--- a/what_i_learn/2026_量子纠错导论.pptx
+++ b/what_i_learn/2026_量子纠错导论.pptx
@@ -5,7 +5,7 @@
     <p:sldMasterId id="2147483648" r:id="rId1"/>
   </p:sldMasterIdLst>
   <p:notesMasterIdLst>
-    <p:notesMasterId r:id="rId37"/>
+    <p:notesMasterId r:id="rId34"/>
   </p:notesMasterIdLst>
   <p:sldIdLst>
     <p:sldId id="267" r:id="rId2"/>
@@ -32,17 +32,14 @@
     <p:sldId id="322" r:id="rId23"/>
     <p:sldId id="323" r:id="rId24"/>
     <p:sldId id="325" r:id="rId25"/>
-    <p:sldId id="326" r:id="rId26"/>
-    <p:sldId id="306" r:id="rId27"/>
-    <p:sldId id="314" r:id="rId28"/>
-    <p:sldId id="308" r:id="rId29"/>
-    <p:sldId id="309" r:id="rId30"/>
-    <p:sldId id="316" r:id="rId31"/>
-    <p:sldId id="312" r:id="rId32"/>
-    <p:sldId id="315" r:id="rId33"/>
-    <p:sldId id="310" r:id="rId34"/>
-    <p:sldId id="311" r:id="rId35"/>
-    <p:sldId id="313" r:id="rId36"/>
+    <p:sldId id="327" r:id="rId26"/>
+    <p:sldId id="326" r:id="rId27"/>
+    <p:sldId id="328" r:id="rId28"/>
+    <p:sldId id="330" r:id="rId29"/>
+    <p:sldId id="331" r:id="rId30"/>
+    <p:sldId id="332" r:id="rId31"/>
+    <p:sldId id="333" r:id="rId32"/>
+    <p:sldId id="334" r:id="rId33"/>
   </p:sldIdLst>
   <p:sldSz cx="12192000" cy="6858000"/>
   <p:notesSz cx="6858000" cy="9144000"/>
@@ -231,7 +228,7 @@
           <a:p>
             <a:fld id="{F3156BD1-BC13-4455-9FB2-79876EFAE974}" type="datetimeFigureOut">
               <a:rPr lang="zh-CN" altLang="en-US" smtClean="0"/>
-              <a:t>2026/5/18</a:t>
+              <a:t>2026/5/27</a:t>
             </a:fld>
             <a:endParaRPr lang="zh-CN" altLang="en-US"/>
           </a:p>
@@ -5134,7 +5131,7 @@
         <p:cNvPr id="1" name="">
           <a:extLst>
             <a:ext uri="{FF2B5EF4-FFF2-40B4-BE49-F238E27FC236}">
-              <a16:creationId xmlns:a16="http://schemas.microsoft.com/office/drawing/2014/main" id="{DB662768-7E82-7C92-1C1A-976047E96934}"/>
+              <a16:creationId xmlns:a16="http://schemas.microsoft.com/office/drawing/2014/main" id="{29A9EE06-1486-1A60-5A6E-DEF1BDAE1F21}"/>
             </a:ext>
           </a:extLst>
         </p:cNvPr>
@@ -5154,7 +5151,7 @@
           <p:cNvPr id="2" name="Header Placeholder 1">
             <a:extLst>
               <a:ext uri="{FF2B5EF4-FFF2-40B4-BE49-F238E27FC236}">
-                <a16:creationId xmlns:a16="http://schemas.microsoft.com/office/drawing/2014/main" id="{C6453949-301C-F43E-502B-D6D18ACC412D}"/>
+                <a16:creationId xmlns:a16="http://schemas.microsoft.com/office/drawing/2014/main" id="{B83DE342-0670-4128-563D-F61E96257BE8}"/>
               </a:ext>
             </a:extLst>
           </p:cNvPr>
@@ -5191,7 +5188,7 @@
           <p:cNvPr id="3" name="Date Placeholder 2">
             <a:extLst>
               <a:ext uri="{FF2B5EF4-FFF2-40B4-BE49-F238E27FC236}">
-                <a16:creationId xmlns:a16="http://schemas.microsoft.com/office/drawing/2014/main" id="{81BEB8DB-A4C7-6E76-3C91-2E788861F386}"/>
+                <a16:creationId xmlns:a16="http://schemas.microsoft.com/office/drawing/2014/main" id="{34DED36D-A40B-9BB9-FE3B-8FFBC122D231}"/>
               </a:ext>
             </a:extLst>
           </p:cNvPr>
@@ -5231,7 +5228,7 @@
           <p:cNvPr id="4" name="Slide Image Placeholder 3">
             <a:extLst>
               <a:ext uri="{FF2B5EF4-FFF2-40B4-BE49-F238E27FC236}">
-                <a16:creationId xmlns:a16="http://schemas.microsoft.com/office/drawing/2014/main" id="{F4229429-D9E4-416D-24B6-8D1CEE961274}"/>
+                <a16:creationId xmlns:a16="http://schemas.microsoft.com/office/drawing/2014/main" id="{F8C0B583-B515-F541-67E8-76513AFE046C}"/>
               </a:ext>
             </a:extLst>
           </p:cNvPr>
@@ -5270,7 +5267,7 @@
           <p:cNvPr id="5" name="Notes Placeholder 4">
             <a:extLst>
               <a:ext uri="{FF2B5EF4-FFF2-40B4-BE49-F238E27FC236}">
-                <a16:creationId xmlns:a16="http://schemas.microsoft.com/office/drawing/2014/main" id="{489AD0F5-6078-4561-F4E0-32CA9268AA44}"/>
+                <a16:creationId xmlns:a16="http://schemas.microsoft.com/office/drawing/2014/main" id="{57D29AA8-9447-FF1C-AC99-4BEDA8FDC41D}"/>
               </a:ext>
             </a:extLst>
           </p:cNvPr>
@@ -5316,7 +5313,7 @@
           <p:cNvPr id="6" name="Footer Placeholder 5">
             <a:extLst>
               <a:ext uri="{FF2B5EF4-FFF2-40B4-BE49-F238E27FC236}">
-                <a16:creationId xmlns:a16="http://schemas.microsoft.com/office/drawing/2014/main" id="{725B2873-67C8-5A62-E649-6D783B3D62B7}"/>
+                <a16:creationId xmlns:a16="http://schemas.microsoft.com/office/drawing/2014/main" id="{D597BD9F-99FD-9E67-D276-19D63B99871E}"/>
               </a:ext>
             </a:extLst>
           </p:cNvPr>
@@ -5353,7 +5350,7 @@
           <p:cNvPr id="7" name="Slide Number Placeholder 6">
             <a:extLst>
               <a:ext uri="{FF2B5EF4-FFF2-40B4-BE49-F238E27FC236}">
-                <a16:creationId xmlns:a16="http://schemas.microsoft.com/office/drawing/2014/main" id="{CE287447-9A42-B733-2EF5-97254CB97F68}"/>
+                <a16:creationId xmlns:a16="http://schemas.microsoft.com/office/drawing/2014/main" id="{F7A91504-BCFE-BB7E-5225-8F4FCAE82F7C}"/>
               </a:ext>
             </a:extLst>
           </p:cNvPr>
@@ -5391,7 +5388,7 @@
     </p:spTree>
     <p:extLst>
       <p:ext uri="{BB962C8B-B14F-4D97-AF65-F5344CB8AC3E}">
-        <p14:creationId xmlns:p14="http://schemas.microsoft.com/office/powerpoint/2010/main" val="366002033"/>
+        <p14:creationId xmlns:p14="http://schemas.microsoft.com/office/powerpoint/2010/main" val="2937525872"/>
       </p:ext>
     </p:extLst>
   </p:cSld>
@@ -5409,7 +5406,7 @@
         <p:cNvPr id="1" name="">
           <a:extLst>
             <a:ext uri="{FF2B5EF4-FFF2-40B4-BE49-F238E27FC236}">
-              <a16:creationId xmlns:a16="http://schemas.microsoft.com/office/drawing/2014/main" id="{6F822430-2FD2-06F2-1120-AAB48B4BCF44}"/>
+              <a16:creationId xmlns:a16="http://schemas.microsoft.com/office/drawing/2014/main" id="{DB662768-7E82-7C92-1C1A-976047E96934}"/>
             </a:ext>
           </a:extLst>
         </p:cNvPr>
@@ -5429,7 +5426,7 @@
           <p:cNvPr id="2" name="Header Placeholder 1">
             <a:extLst>
               <a:ext uri="{FF2B5EF4-FFF2-40B4-BE49-F238E27FC236}">
-                <a16:creationId xmlns:a16="http://schemas.microsoft.com/office/drawing/2014/main" id="{A42B4C53-B160-CC1A-06A1-07C5DE6E3722}"/>
+                <a16:creationId xmlns:a16="http://schemas.microsoft.com/office/drawing/2014/main" id="{C6453949-301C-F43E-502B-D6D18ACC412D}"/>
               </a:ext>
             </a:extLst>
           </p:cNvPr>
@@ -5466,7 +5463,7 @@
           <p:cNvPr id="3" name="Date Placeholder 2">
             <a:extLst>
               <a:ext uri="{FF2B5EF4-FFF2-40B4-BE49-F238E27FC236}">
-                <a16:creationId xmlns:a16="http://schemas.microsoft.com/office/drawing/2014/main" id="{CBDA7015-1619-EC39-C5C8-D5E7137F52B1}"/>
+                <a16:creationId xmlns:a16="http://schemas.microsoft.com/office/drawing/2014/main" id="{81BEB8DB-A4C7-6E76-3C91-2E788861F386}"/>
               </a:ext>
             </a:extLst>
           </p:cNvPr>
@@ -5506,7 +5503,7 @@
           <p:cNvPr id="4" name="Slide Image Placeholder 3">
             <a:extLst>
               <a:ext uri="{FF2B5EF4-FFF2-40B4-BE49-F238E27FC236}">
-                <a16:creationId xmlns:a16="http://schemas.microsoft.com/office/drawing/2014/main" id="{64D88BFE-970A-D963-669E-7F7792C37AF1}"/>
+                <a16:creationId xmlns:a16="http://schemas.microsoft.com/office/drawing/2014/main" id="{F4229429-D9E4-416D-24B6-8D1CEE961274}"/>
               </a:ext>
             </a:extLst>
           </p:cNvPr>
@@ -5545,7 +5542,7 @@
           <p:cNvPr id="5" name="Notes Placeholder 4">
             <a:extLst>
               <a:ext uri="{FF2B5EF4-FFF2-40B4-BE49-F238E27FC236}">
-                <a16:creationId xmlns:a16="http://schemas.microsoft.com/office/drawing/2014/main" id="{C9ABE69E-AB40-CD96-5DE2-5592DE19C3E5}"/>
+                <a16:creationId xmlns:a16="http://schemas.microsoft.com/office/drawing/2014/main" id="{489AD0F5-6078-4561-F4E0-32CA9268AA44}"/>
               </a:ext>
             </a:extLst>
           </p:cNvPr>
@@ -5591,7 +5588,7 @@
           <p:cNvPr id="6" name="Footer Placeholder 5">
             <a:extLst>
               <a:ext uri="{FF2B5EF4-FFF2-40B4-BE49-F238E27FC236}">
-                <a16:creationId xmlns:a16="http://schemas.microsoft.com/office/drawing/2014/main" id="{B7E1946C-60BE-244E-AC35-15ADD7FB49B5}"/>
+                <a16:creationId xmlns:a16="http://schemas.microsoft.com/office/drawing/2014/main" id="{725B2873-67C8-5A62-E649-6D783B3D62B7}"/>
               </a:ext>
             </a:extLst>
           </p:cNvPr>
@@ -5628,7 +5625,7 @@
           <p:cNvPr id="7" name="Slide Number Placeholder 6">
             <a:extLst>
               <a:ext uri="{FF2B5EF4-FFF2-40B4-BE49-F238E27FC236}">
-                <a16:creationId xmlns:a16="http://schemas.microsoft.com/office/drawing/2014/main" id="{29B20FE0-2713-CCF2-9200-33E072CCFF51}"/>
+                <a16:creationId xmlns:a16="http://schemas.microsoft.com/office/drawing/2014/main" id="{CE287447-9A42-B733-2EF5-97254CB97F68}"/>
               </a:ext>
             </a:extLst>
           </p:cNvPr>
@@ -5666,7 +5663,7 @@
     </p:spTree>
     <p:extLst>
       <p:ext uri="{BB962C8B-B14F-4D97-AF65-F5344CB8AC3E}">
-        <p14:creationId xmlns:p14="http://schemas.microsoft.com/office/powerpoint/2010/main" val="1451232824"/>
+        <p14:creationId xmlns:p14="http://schemas.microsoft.com/office/powerpoint/2010/main" val="366002033"/>
       </p:ext>
     </p:extLst>
   </p:cSld>
@@ -5684,7 +5681,7 @@
         <p:cNvPr id="1" name="">
           <a:extLst>
             <a:ext uri="{FF2B5EF4-FFF2-40B4-BE49-F238E27FC236}">
-              <a16:creationId xmlns:a16="http://schemas.microsoft.com/office/drawing/2014/main" id="{F7C0F3AC-F7AF-9112-D7CD-DEDF13D16673}"/>
+              <a16:creationId xmlns:a16="http://schemas.microsoft.com/office/drawing/2014/main" id="{745C4EE1-E3AC-797F-AC87-D4937A87F885}"/>
             </a:ext>
           </a:extLst>
         </p:cNvPr>
@@ -5704,7 +5701,7 @@
           <p:cNvPr id="2" name="Header Placeholder 1">
             <a:extLst>
               <a:ext uri="{FF2B5EF4-FFF2-40B4-BE49-F238E27FC236}">
-                <a16:creationId xmlns:a16="http://schemas.microsoft.com/office/drawing/2014/main" id="{3082AFBE-239E-3B1C-9D73-F02DEF647A80}"/>
+                <a16:creationId xmlns:a16="http://schemas.microsoft.com/office/drawing/2014/main" id="{AEEE28CB-8B9D-CD0F-3988-9EAA605F6AC7}"/>
               </a:ext>
             </a:extLst>
           </p:cNvPr>
@@ -5741,7 +5738,7 @@
           <p:cNvPr id="3" name="Date Placeholder 2">
             <a:extLst>
               <a:ext uri="{FF2B5EF4-FFF2-40B4-BE49-F238E27FC236}">
-                <a16:creationId xmlns:a16="http://schemas.microsoft.com/office/drawing/2014/main" id="{4B80055C-92B5-91DA-B01B-A6C5BD79C7A2}"/>
+                <a16:creationId xmlns:a16="http://schemas.microsoft.com/office/drawing/2014/main" id="{BBF367AC-78B9-86DE-4F56-36C49C975F60}"/>
               </a:ext>
             </a:extLst>
           </p:cNvPr>
@@ -5781,7 +5778,7 @@
           <p:cNvPr id="4" name="Slide Image Placeholder 3">
             <a:extLst>
               <a:ext uri="{FF2B5EF4-FFF2-40B4-BE49-F238E27FC236}">
-                <a16:creationId xmlns:a16="http://schemas.microsoft.com/office/drawing/2014/main" id="{903C41F2-D1E4-9D71-BDEF-E7D727772E63}"/>
+                <a16:creationId xmlns:a16="http://schemas.microsoft.com/office/drawing/2014/main" id="{57E6DFF5-515C-6B0E-9707-8F3F73E5A396}"/>
               </a:ext>
             </a:extLst>
           </p:cNvPr>
@@ -5820,7 +5817,7 @@
           <p:cNvPr id="5" name="Notes Placeholder 4">
             <a:extLst>
               <a:ext uri="{FF2B5EF4-FFF2-40B4-BE49-F238E27FC236}">
-                <a16:creationId xmlns:a16="http://schemas.microsoft.com/office/drawing/2014/main" id="{0A8117C8-C595-F5A0-3AAE-5954D7D70996}"/>
+                <a16:creationId xmlns:a16="http://schemas.microsoft.com/office/drawing/2014/main" id="{B7249AD8-2116-CEFC-494A-6B2C9CF5C9C8}"/>
               </a:ext>
             </a:extLst>
           </p:cNvPr>
@@ -5866,7 +5863,7 @@
           <p:cNvPr id="6" name="Footer Placeholder 5">
             <a:extLst>
               <a:ext uri="{FF2B5EF4-FFF2-40B4-BE49-F238E27FC236}">
-                <a16:creationId xmlns:a16="http://schemas.microsoft.com/office/drawing/2014/main" id="{FB0380E7-2ECF-7738-B325-0C977F22BACD}"/>
+                <a16:creationId xmlns:a16="http://schemas.microsoft.com/office/drawing/2014/main" id="{2FCC9B9A-747A-064D-D986-81C02D1980A5}"/>
               </a:ext>
             </a:extLst>
           </p:cNvPr>
@@ -5903,7 +5900,7 @@
           <p:cNvPr id="7" name="Slide Number Placeholder 6">
             <a:extLst>
               <a:ext uri="{FF2B5EF4-FFF2-40B4-BE49-F238E27FC236}">
-                <a16:creationId xmlns:a16="http://schemas.microsoft.com/office/drawing/2014/main" id="{E62F7E68-0B10-46B6-02D9-2DD3D83076DE}"/>
+                <a16:creationId xmlns:a16="http://schemas.microsoft.com/office/drawing/2014/main" id="{EEA566E2-5F91-18CF-7B83-61265F0C2AA8}"/>
               </a:ext>
             </a:extLst>
           </p:cNvPr>
@@ -5941,7 +5938,7 @@
     </p:spTree>
     <p:extLst>
       <p:ext uri="{BB962C8B-B14F-4D97-AF65-F5344CB8AC3E}">
-        <p14:creationId xmlns:p14="http://schemas.microsoft.com/office/powerpoint/2010/main" val="1120099650"/>
+        <p14:creationId xmlns:p14="http://schemas.microsoft.com/office/powerpoint/2010/main" val="2678204531"/>
       </p:ext>
     </p:extLst>
   </p:cSld>
@@ -5959,7 +5956,7 @@
         <p:cNvPr id="1" name="">
           <a:extLst>
             <a:ext uri="{FF2B5EF4-FFF2-40B4-BE49-F238E27FC236}">
-              <a16:creationId xmlns:a16="http://schemas.microsoft.com/office/drawing/2014/main" id="{23093A29-2B7E-8941-CCC1-0B79EDEB1D61}"/>
+              <a16:creationId xmlns:a16="http://schemas.microsoft.com/office/drawing/2014/main" id="{5F372834-FBFD-2BAB-E9FA-82092A672FBE}"/>
             </a:ext>
           </a:extLst>
         </p:cNvPr>
@@ -5979,7 +5976,7 @@
           <p:cNvPr id="2" name="Header Placeholder 1">
             <a:extLst>
               <a:ext uri="{FF2B5EF4-FFF2-40B4-BE49-F238E27FC236}">
-                <a16:creationId xmlns:a16="http://schemas.microsoft.com/office/drawing/2014/main" id="{515C3FD8-689B-DEF4-D3AF-1C8684635313}"/>
+                <a16:creationId xmlns:a16="http://schemas.microsoft.com/office/drawing/2014/main" id="{59515D8B-9EBC-A46B-18C9-E2671DB1AFD0}"/>
               </a:ext>
             </a:extLst>
           </p:cNvPr>
@@ -6016,7 +6013,7 @@
           <p:cNvPr id="3" name="Date Placeholder 2">
             <a:extLst>
               <a:ext uri="{FF2B5EF4-FFF2-40B4-BE49-F238E27FC236}">
-                <a16:creationId xmlns:a16="http://schemas.microsoft.com/office/drawing/2014/main" id="{D4E2A292-A7CE-C8B7-4A08-C40E98BDA9E6}"/>
+                <a16:creationId xmlns:a16="http://schemas.microsoft.com/office/drawing/2014/main" id="{7FC25940-AECC-8860-573E-132E08AB2CC2}"/>
               </a:ext>
             </a:extLst>
           </p:cNvPr>
@@ -6056,7 +6053,7 @@
           <p:cNvPr id="4" name="Slide Image Placeholder 3">
             <a:extLst>
               <a:ext uri="{FF2B5EF4-FFF2-40B4-BE49-F238E27FC236}">
-                <a16:creationId xmlns:a16="http://schemas.microsoft.com/office/drawing/2014/main" id="{8CA95DD8-D57C-7294-7B10-660D2473BEC2}"/>
+                <a16:creationId xmlns:a16="http://schemas.microsoft.com/office/drawing/2014/main" id="{DCE39F42-7B0C-E23F-0EE5-CA9CCAA2BD90}"/>
               </a:ext>
             </a:extLst>
           </p:cNvPr>
@@ -6095,7 +6092,7 @@
           <p:cNvPr id="5" name="Notes Placeholder 4">
             <a:extLst>
               <a:ext uri="{FF2B5EF4-FFF2-40B4-BE49-F238E27FC236}">
-                <a16:creationId xmlns:a16="http://schemas.microsoft.com/office/drawing/2014/main" id="{69D7ADCF-BBD8-484E-54BD-7B784B7977F9}"/>
+                <a16:creationId xmlns:a16="http://schemas.microsoft.com/office/drawing/2014/main" id="{DF4EA678-F425-B6E4-DF75-2B7930E07D54}"/>
               </a:ext>
             </a:extLst>
           </p:cNvPr>
@@ -6141,7 +6138,7 @@
           <p:cNvPr id="6" name="Footer Placeholder 5">
             <a:extLst>
               <a:ext uri="{FF2B5EF4-FFF2-40B4-BE49-F238E27FC236}">
-                <a16:creationId xmlns:a16="http://schemas.microsoft.com/office/drawing/2014/main" id="{6B95B5C0-566E-C41F-B209-592BED6F1D55}"/>
+                <a16:creationId xmlns:a16="http://schemas.microsoft.com/office/drawing/2014/main" id="{32A7A925-10F7-C87F-DE9C-BAA67FC90E15}"/>
               </a:ext>
             </a:extLst>
           </p:cNvPr>
@@ -6178,7 +6175,7 @@
           <p:cNvPr id="7" name="Slide Number Placeholder 6">
             <a:extLst>
               <a:ext uri="{FF2B5EF4-FFF2-40B4-BE49-F238E27FC236}">
-                <a16:creationId xmlns:a16="http://schemas.microsoft.com/office/drawing/2014/main" id="{04C147E1-8FCD-36F7-EB3D-B0713562D63F}"/>
+                <a16:creationId xmlns:a16="http://schemas.microsoft.com/office/drawing/2014/main" id="{52E637FE-F64F-AC3A-2383-CE7030AC6BE9}"/>
               </a:ext>
             </a:extLst>
           </p:cNvPr>
@@ -6216,7 +6213,7 @@
     </p:spTree>
     <p:extLst>
       <p:ext uri="{BB962C8B-B14F-4D97-AF65-F5344CB8AC3E}">
-        <p14:creationId xmlns:p14="http://schemas.microsoft.com/office/powerpoint/2010/main" val="1867577688"/>
+        <p14:creationId xmlns:p14="http://schemas.microsoft.com/office/powerpoint/2010/main" val="2716660528"/>
       </p:ext>
     </p:extLst>
   </p:cSld>
@@ -6234,7 +6231,7 @@
         <p:cNvPr id="1" name="">
           <a:extLst>
             <a:ext uri="{FF2B5EF4-FFF2-40B4-BE49-F238E27FC236}">
-              <a16:creationId xmlns:a16="http://schemas.microsoft.com/office/drawing/2014/main" id="{0D3F29E9-494A-ADD6-9E64-5F60E9B8652A}"/>
+              <a16:creationId xmlns:a16="http://schemas.microsoft.com/office/drawing/2014/main" id="{DC892B75-869D-3369-9090-0C07F9DB910D}"/>
             </a:ext>
           </a:extLst>
         </p:cNvPr>
@@ -6254,7 +6251,7 @@
           <p:cNvPr id="2" name="Header Placeholder 1">
             <a:extLst>
               <a:ext uri="{FF2B5EF4-FFF2-40B4-BE49-F238E27FC236}">
-                <a16:creationId xmlns:a16="http://schemas.microsoft.com/office/drawing/2014/main" id="{F49286BA-8B2E-7B9B-EEC9-CA856FA4A7A7}"/>
+                <a16:creationId xmlns:a16="http://schemas.microsoft.com/office/drawing/2014/main" id="{7DD1A0B8-C712-B0BC-87B8-60D27630E1E7}"/>
               </a:ext>
             </a:extLst>
           </p:cNvPr>
@@ -6291,7 +6288,7 @@
           <p:cNvPr id="3" name="Date Placeholder 2">
             <a:extLst>
               <a:ext uri="{FF2B5EF4-FFF2-40B4-BE49-F238E27FC236}">
-                <a16:creationId xmlns:a16="http://schemas.microsoft.com/office/drawing/2014/main" id="{EBBF38FF-A277-9072-1DF2-D8AC0C5507B9}"/>
+                <a16:creationId xmlns:a16="http://schemas.microsoft.com/office/drawing/2014/main" id="{BB8EFD1E-4939-EC8F-4CDF-559C532D98E6}"/>
               </a:ext>
             </a:extLst>
           </p:cNvPr>
@@ -6331,7 +6328,7 @@
           <p:cNvPr id="4" name="Slide Image Placeholder 3">
             <a:extLst>
               <a:ext uri="{FF2B5EF4-FFF2-40B4-BE49-F238E27FC236}">
-                <a16:creationId xmlns:a16="http://schemas.microsoft.com/office/drawing/2014/main" id="{989B0A84-7C3E-7C51-81BA-B40DAA2AA4FD}"/>
+                <a16:creationId xmlns:a16="http://schemas.microsoft.com/office/drawing/2014/main" id="{DF3260C4-6353-0779-4868-4320B4FFE9B2}"/>
               </a:ext>
             </a:extLst>
           </p:cNvPr>
@@ -6370,7 +6367,7 @@
           <p:cNvPr id="5" name="Notes Placeholder 4">
             <a:extLst>
               <a:ext uri="{FF2B5EF4-FFF2-40B4-BE49-F238E27FC236}">
-                <a16:creationId xmlns:a16="http://schemas.microsoft.com/office/drawing/2014/main" id="{0AF8CFC9-0A62-7467-7F4B-570FC4B95FB4}"/>
+                <a16:creationId xmlns:a16="http://schemas.microsoft.com/office/drawing/2014/main" id="{B873026D-78BF-933D-121C-CFCE60B30B16}"/>
               </a:ext>
             </a:extLst>
           </p:cNvPr>
@@ -6416,7 +6413,7 @@
           <p:cNvPr id="6" name="Footer Placeholder 5">
             <a:extLst>
               <a:ext uri="{FF2B5EF4-FFF2-40B4-BE49-F238E27FC236}">
-                <a16:creationId xmlns:a16="http://schemas.microsoft.com/office/drawing/2014/main" id="{CF7B5D00-DB7A-C13B-D38D-18A18E64E835}"/>
+                <a16:creationId xmlns:a16="http://schemas.microsoft.com/office/drawing/2014/main" id="{FF8357C2-EF9C-8723-5A78-AE9DDE43751E}"/>
               </a:ext>
             </a:extLst>
           </p:cNvPr>
@@ -6453,7 +6450,7 @@
           <p:cNvPr id="7" name="Slide Number Placeholder 6">
             <a:extLst>
               <a:ext uri="{FF2B5EF4-FFF2-40B4-BE49-F238E27FC236}">
-                <a16:creationId xmlns:a16="http://schemas.microsoft.com/office/drawing/2014/main" id="{2DF7EB99-A698-5033-E0E7-E35DDEA2941F}"/>
+                <a16:creationId xmlns:a16="http://schemas.microsoft.com/office/drawing/2014/main" id="{BEB17D2F-5D80-82DC-67AA-C89C07216540}"/>
               </a:ext>
             </a:extLst>
           </p:cNvPr>
@@ -6491,7 +6488,7 @@
     </p:spTree>
     <p:extLst>
       <p:ext uri="{BB962C8B-B14F-4D97-AF65-F5344CB8AC3E}">
-        <p14:creationId xmlns:p14="http://schemas.microsoft.com/office/powerpoint/2010/main" val="939290988"/>
+        <p14:creationId xmlns:p14="http://schemas.microsoft.com/office/powerpoint/2010/main" val="427397551"/>
       </p:ext>
     </p:extLst>
   </p:cSld>
@@ -6784,7 +6781,7 @@
         <p:cNvPr id="1" name="">
           <a:extLst>
             <a:ext uri="{FF2B5EF4-FFF2-40B4-BE49-F238E27FC236}">
-              <a16:creationId xmlns:a16="http://schemas.microsoft.com/office/drawing/2014/main" id="{DB6E5D8B-0DDD-CEF4-F5CE-670EED6469E1}"/>
+              <a16:creationId xmlns:a16="http://schemas.microsoft.com/office/drawing/2014/main" id="{FF25ED07-62AC-08AB-7422-E9637B357052}"/>
             </a:ext>
           </a:extLst>
         </p:cNvPr>
@@ -6804,7 +6801,7 @@
           <p:cNvPr id="2" name="Header Placeholder 1">
             <a:extLst>
               <a:ext uri="{FF2B5EF4-FFF2-40B4-BE49-F238E27FC236}">
-                <a16:creationId xmlns:a16="http://schemas.microsoft.com/office/drawing/2014/main" id="{1E86F0B3-D41C-EC1B-958C-03B8EDF03CB3}"/>
+                <a16:creationId xmlns:a16="http://schemas.microsoft.com/office/drawing/2014/main" id="{3B6A3164-BCC0-C110-DEB1-DC6EE53A5040}"/>
               </a:ext>
             </a:extLst>
           </p:cNvPr>
@@ -6841,7 +6838,7 @@
           <p:cNvPr id="3" name="Date Placeholder 2">
             <a:extLst>
               <a:ext uri="{FF2B5EF4-FFF2-40B4-BE49-F238E27FC236}">
-                <a16:creationId xmlns:a16="http://schemas.microsoft.com/office/drawing/2014/main" id="{2664C43B-D34B-2651-73B3-D241C3B6C45F}"/>
+                <a16:creationId xmlns:a16="http://schemas.microsoft.com/office/drawing/2014/main" id="{08C7441B-9BD4-B5D4-2748-7B75B7ECEF03}"/>
               </a:ext>
             </a:extLst>
           </p:cNvPr>
@@ -6881,7 +6878,7 @@
           <p:cNvPr id="4" name="Slide Image Placeholder 3">
             <a:extLst>
               <a:ext uri="{FF2B5EF4-FFF2-40B4-BE49-F238E27FC236}">
-                <a16:creationId xmlns:a16="http://schemas.microsoft.com/office/drawing/2014/main" id="{F1DFD7DE-C42B-C245-437F-12C7F9AB68D6}"/>
+                <a16:creationId xmlns:a16="http://schemas.microsoft.com/office/drawing/2014/main" id="{FA409F95-8E3F-7CE3-EB8F-221BC51BF3C7}"/>
               </a:ext>
             </a:extLst>
           </p:cNvPr>
@@ -6920,7 +6917,7 @@
           <p:cNvPr id="5" name="Notes Placeholder 4">
             <a:extLst>
               <a:ext uri="{FF2B5EF4-FFF2-40B4-BE49-F238E27FC236}">
-                <a16:creationId xmlns:a16="http://schemas.microsoft.com/office/drawing/2014/main" id="{6E573ABD-1C52-A7D9-D1E7-8EA9F8EAB98D}"/>
+                <a16:creationId xmlns:a16="http://schemas.microsoft.com/office/drawing/2014/main" id="{ECE071B9-223B-A56B-7E71-CDF531C40EDF}"/>
               </a:ext>
             </a:extLst>
           </p:cNvPr>
@@ -6966,7 +6963,7 @@
           <p:cNvPr id="6" name="Footer Placeholder 5">
             <a:extLst>
               <a:ext uri="{FF2B5EF4-FFF2-40B4-BE49-F238E27FC236}">
-                <a16:creationId xmlns:a16="http://schemas.microsoft.com/office/drawing/2014/main" id="{BE5C22F5-3EEC-85A5-CBAF-3F527FFDF167}"/>
+                <a16:creationId xmlns:a16="http://schemas.microsoft.com/office/drawing/2014/main" id="{B1B79F1A-3BEC-12C1-8EF0-B66D351ECC96}"/>
               </a:ext>
             </a:extLst>
           </p:cNvPr>
@@ -7003,7 +7000,7 @@
           <p:cNvPr id="7" name="Slide Number Placeholder 6">
             <a:extLst>
               <a:ext uri="{FF2B5EF4-FFF2-40B4-BE49-F238E27FC236}">
-                <a16:creationId xmlns:a16="http://schemas.microsoft.com/office/drawing/2014/main" id="{85A2B719-08A4-9900-FF4C-C01560756F66}"/>
+                <a16:creationId xmlns:a16="http://schemas.microsoft.com/office/drawing/2014/main" id="{9DE466E0-3B56-543B-AE2A-EA2FBCE99855}"/>
               </a:ext>
             </a:extLst>
           </p:cNvPr>
@@ -7041,7 +7038,7 @@
     </p:spTree>
     <p:extLst>
       <p:ext uri="{BB962C8B-B14F-4D97-AF65-F5344CB8AC3E}">
-        <p14:creationId xmlns:p14="http://schemas.microsoft.com/office/powerpoint/2010/main" val="2305843688"/>
+        <p14:creationId xmlns:p14="http://schemas.microsoft.com/office/powerpoint/2010/main" val="1578031240"/>
       </p:ext>
     </p:extLst>
   </p:cSld>
@@ -7059,7 +7056,7 @@
         <p:cNvPr id="1" name="">
           <a:extLst>
             <a:ext uri="{FF2B5EF4-FFF2-40B4-BE49-F238E27FC236}">
-              <a16:creationId xmlns:a16="http://schemas.microsoft.com/office/drawing/2014/main" id="{1173DF37-692B-64AA-8E4E-11EA4898EB20}"/>
+              <a16:creationId xmlns:a16="http://schemas.microsoft.com/office/drawing/2014/main" id="{5802BC83-0464-6DCE-B1C0-BF574FA88179}"/>
             </a:ext>
           </a:extLst>
         </p:cNvPr>
@@ -7079,7 +7076,7 @@
           <p:cNvPr id="2" name="Header Placeholder 1">
             <a:extLst>
               <a:ext uri="{FF2B5EF4-FFF2-40B4-BE49-F238E27FC236}">
-                <a16:creationId xmlns:a16="http://schemas.microsoft.com/office/drawing/2014/main" id="{A91A7BFD-2E86-BD9E-84FA-D58A45B601BD}"/>
+                <a16:creationId xmlns:a16="http://schemas.microsoft.com/office/drawing/2014/main" id="{32E3039A-149B-6840-9DE3-622FEBA4DD61}"/>
               </a:ext>
             </a:extLst>
           </p:cNvPr>
@@ -7116,7 +7113,7 @@
           <p:cNvPr id="3" name="Date Placeholder 2">
             <a:extLst>
               <a:ext uri="{FF2B5EF4-FFF2-40B4-BE49-F238E27FC236}">
-                <a16:creationId xmlns:a16="http://schemas.microsoft.com/office/drawing/2014/main" id="{3B002C37-8FE9-5CFF-3249-3EB7B1FCB605}"/>
+                <a16:creationId xmlns:a16="http://schemas.microsoft.com/office/drawing/2014/main" id="{FE1E8093-B980-653C-0ACA-42EB4830AAB8}"/>
               </a:ext>
             </a:extLst>
           </p:cNvPr>
@@ -7156,7 +7153,7 @@
           <p:cNvPr id="4" name="Slide Image Placeholder 3">
             <a:extLst>
               <a:ext uri="{FF2B5EF4-FFF2-40B4-BE49-F238E27FC236}">
-                <a16:creationId xmlns:a16="http://schemas.microsoft.com/office/drawing/2014/main" id="{6B950BC9-8390-C395-7216-B9FFDB07A3A4}"/>
+                <a16:creationId xmlns:a16="http://schemas.microsoft.com/office/drawing/2014/main" id="{BCE4D976-3289-2450-A6F3-421B6E2B10DD}"/>
               </a:ext>
             </a:extLst>
           </p:cNvPr>
@@ -7195,7 +7192,7 @@
           <p:cNvPr id="5" name="Notes Placeholder 4">
             <a:extLst>
               <a:ext uri="{FF2B5EF4-FFF2-40B4-BE49-F238E27FC236}">
-                <a16:creationId xmlns:a16="http://schemas.microsoft.com/office/drawing/2014/main" id="{FFB32A99-22C0-55DF-EDDD-1E2C51AC506E}"/>
+                <a16:creationId xmlns:a16="http://schemas.microsoft.com/office/drawing/2014/main" id="{2E7C4723-4AA3-7E87-8C54-14FB39A5B2D4}"/>
               </a:ext>
             </a:extLst>
           </p:cNvPr>
@@ -7241,7 +7238,7 @@
           <p:cNvPr id="6" name="Footer Placeholder 5">
             <a:extLst>
               <a:ext uri="{FF2B5EF4-FFF2-40B4-BE49-F238E27FC236}">
-                <a16:creationId xmlns:a16="http://schemas.microsoft.com/office/drawing/2014/main" id="{74FF61D2-5A4F-62D7-55B2-B05485CECBCA}"/>
+                <a16:creationId xmlns:a16="http://schemas.microsoft.com/office/drawing/2014/main" id="{C3F01C62-FCC9-FD42-AB4C-D5CDB8469752}"/>
               </a:ext>
             </a:extLst>
           </p:cNvPr>
@@ -7278,7 +7275,7 @@
           <p:cNvPr id="7" name="Slide Number Placeholder 6">
             <a:extLst>
               <a:ext uri="{FF2B5EF4-FFF2-40B4-BE49-F238E27FC236}">
-                <a16:creationId xmlns:a16="http://schemas.microsoft.com/office/drawing/2014/main" id="{7F4CBF98-07CF-F066-2B74-CDA37D84EEF4}"/>
+                <a16:creationId xmlns:a16="http://schemas.microsoft.com/office/drawing/2014/main" id="{2C84ED4B-6477-BB58-B374-2B5EC761BE66}"/>
               </a:ext>
             </a:extLst>
           </p:cNvPr>
@@ -7316,7 +7313,7 @@
     </p:spTree>
     <p:extLst>
       <p:ext uri="{BB962C8B-B14F-4D97-AF65-F5344CB8AC3E}">
-        <p14:creationId xmlns:p14="http://schemas.microsoft.com/office/powerpoint/2010/main" val="1050122145"/>
+        <p14:creationId xmlns:p14="http://schemas.microsoft.com/office/powerpoint/2010/main" val="802824357"/>
       </p:ext>
     </p:extLst>
   </p:cSld>
@@ -7334,7 +7331,7 @@
         <p:cNvPr id="1" name="">
           <a:extLst>
             <a:ext uri="{FF2B5EF4-FFF2-40B4-BE49-F238E27FC236}">
-              <a16:creationId xmlns:a16="http://schemas.microsoft.com/office/drawing/2014/main" id="{1E49465B-DDEA-15A0-B629-73134A36FEE9}"/>
+              <a16:creationId xmlns:a16="http://schemas.microsoft.com/office/drawing/2014/main" id="{FDEB247B-C871-F2D1-56FA-AF3E1A2D0752}"/>
             </a:ext>
           </a:extLst>
         </p:cNvPr>
@@ -7354,7 +7351,7 @@
           <p:cNvPr id="2" name="Header Placeholder 1">
             <a:extLst>
               <a:ext uri="{FF2B5EF4-FFF2-40B4-BE49-F238E27FC236}">
-                <a16:creationId xmlns:a16="http://schemas.microsoft.com/office/drawing/2014/main" id="{315AB8E8-4466-5DC9-B5A5-62E457672B15}"/>
+                <a16:creationId xmlns:a16="http://schemas.microsoft.com/office/drawing/2014/main" id="{3BA1B665-5386-5C2D-21A1-AFCC0B37ABC2}"/>
               </a:ext>
             </a:extLst>
           </p:cNvPr>
@@ -7391,7 +7388,7 @@
           <p:cNvPr id="3" name="Date Placeholder 2">
             <a:extLst>
               <a:ext uri="{FF2B5EF4-FFF2-40B4-BE49-F238E27FC236}">
-                <a16:creationId xmlns:a16="http://schemas.microsoft.com/office/drawing/2014/main" id="{96A30FA5-5790-AB95-53A1-21C0DC25752B}"/>
+                <a16:creationId xmlns:a16="http://schemas.microsoft.com/office/drawing/2014/main" id="{62A96678-ACA0-9F3A-2D47-CB5F6F674B88}"/>
               </a:ext>
             </a:extLst>
           </p:cNvPr>
@@ -7431,7 +7428,7 @@
           <p:cNvPr id="4" name="Slide Image Placeholder 3">
             <a:extLst>
               <a:ext uri="{FF2B5EF4-FFF2-40B4-BE49-F238E27FC236}">
-                <a16:creationId xmlns:a16="http://schemas.microsoft.com/office/drawing/2014/main" id="{D0C67F2D-A505-8A15-409B-438B0E1A1A8F}"/>
+                <a16:creationId xmlns:a16="http://schemas.microsoft.com/office/drawing/2014/main" id="{85FA6315-CFB2-3475-5317-04BCC9C4ABE6}"/>
               </a:ext>
             </a:extLst>
           </p:cNvPr>
@@ -7470,7 +7467,7 @@
           <p:cNvPr id="5" name="Notes Placeholder 4">
             <a:extLst>
               <a:ext uri="{FF2B5EF4-FFF2-40B4-BE49-F238E27FC236}">
-                <a16:creationId xmlns:a16="http://schemas.microsoft.com/office/drawing/2014/main" id="{ABF9821A-483C-F4FC-CAED-D14E5F4B8EB3}"/>
+                <a16:creationId xmlns:a16="http://schemas.microsoft.com/office/drawing/2014/main" id="{9531C429-28C8-4E8A-2F61-ADBA8E36C664}"/>
               </a:ext>
             </a:extLst>
           </p:cNvPr>
@@ -7516,7 +7513,7 @@
           <p:cNvPr id="6" name="Footer Placeholder 5">
             <a:extLst>
               <a:ext uri="{FF2B5EF4-FFF2-40B4-BE49-F238E27FC236}">
-                <a16:creationId xmlns:a16="http://schemas.microsoft.com/office/drawing/2014/main" id="{37E5CD5A-C638-D924-28BE-E186B878D639}"/>
+                <a16:creationId xmlns:a16="http://schemas.microsoft.com/office/drawing/2014/main" id="{15D15065-976C-8867-E1A4-DB14F5A8270F}"/>
               </a:ext>
             </a:extLst>
           </p:cNvPr>
@@ -7553,7 +7550,7 @@
           <p:cNvPr id="7" name="Slide Number Placeholder 6">
             <a:extLst>
               <a:ext uri="{FF2B5EF4-FFF2-40B4-BE49-F238E27FC236}">
-                <a16:creationId xmlns:a16="http://schemas.microsoft.com/office/drawing/2014/main" id="{AD254236-0323-E8E9-1F57-DEA3581B72A1}"/>
+                <a16:creationId xmlns:a16="http://schemas.microsoft.com/office/drawing/2014/main" id="{DAEA0F03-850B-FC62-4EC2-F562A2660FE8}"/>
               </a:ext>
             </a:extLst>
           </p:cNvPr>
@@ -7591,832 +7588,7 @@
     </p:spTree>
     <p:extLst>
       <p:ext uri="{BB962C8B-B14F-4D97-AF65-F5344CB8AC3E}">
-        <p14:creationId xmlns:p14="http://schemas.microsoft.com/office/powerpoint/2010/main" val="2261484374"/>
-      </p:ext>
-    </p:extLst>
-  </p:cSld>
-  <p:clrMapOvr>
-    <a:masterClrMapping/>
-  </p:clrMapOvr>
-</p:notes>
-</file>
-
-<file path=ppt/notesSlides/notesSlide33.xml><?xml version="1.0" encoding="utf-8"?>
-<p:notes xmlns:a="http://schemas.openxmlformats.org/drawingml/2006/main" xmlns:r="http://schemas.openxmlformats.org/officeDocument/2006/relationships" xmlns:p="http://schemas.openxmlformats.org/presentationml/2006/main">
-  <p:cSld>
-    <p:spTree>
-      <p:nvGrpSpPr>
-        <p:cNvPr id="1" name="">
-          <a:extLst>
-            <a:ext uri="{FF2B5EF4-FFF2-40B4-BE49-F238E27FC236}">
-              <a16:creationId xmlns:a16="http://schemas.microsoft.com/office/drawing/2014/main" id="{AD8F9644-B325-C435-FF2D-FB8EACD78C7C}"/>
-            </a:ext>
-          </a:extLst>
-        </p:cNvPr>
-        <p:cNvGrpSpPr/>
-        <p:nvPr/>
-      </p:nvGrpSpPr>
-      <p:grpSpPr>
-        <a:xfrm>
-          <a:off x="0" y="0"/>
-          <a:ext cx="0" cy="0"/>
-          <a:chOff x="0" y="0"/>
-          <a:chExt cx="0" cy="0"/>
-        </a:xfrm>
-      </p:grpSpPr>
-      <p:sp>
-        <p:nvSpPr>
-          <p:cNvPr id="2" name="Header Placeholder 1">
-            <a:extLst>
-              <a:ext uri="{FF2B5EF4-FFF2-40B4-BE49-F238E27FC236}">
-                <a16:creationId xmlns:a16="http://schemas.microsoft.com/office/drawing/2014/main" id="{FF2CF97A-6CE9-F327-4077-F6B748477178}"/>
-              </a:ext>
-            </a:extLst>
-          </p:cNvPr>
-          <p:cNvSpPr>
-            <a:spLocks noGrp="1"/>
-          </p:cNvSpPr>
-          <p:nvPr>
-            <p:ph type="hdr" sz="quarter"/>
-          </p:nvPr>
-        </p:nvSpPr>
-        <p:spPr>
-          <a:xfrm>
-            <a:off x="0" y="0"/>
-            <a:ext cx="3962400" cy="342900"/>
-          </a:xfrm>
-          <a:prstGeom prst="rect">
-            <a:avLst/>
-          </a:prstGeom>
-        </p:spPr>
-        <p:txBody>
-          <a:bodyPr vert="horz" lIns="91440" tIns="45720" rIns="91440" bIns="45720" rtlCol="0"/>
-          <a:lstStyle>
-            <a:lvl1pPr algn="l">
-              <a:defRPr sz="1200"/>
-            </a:lvl1pPr>
-          </a:lstStyle>
-          <a:p>
-            <a:endParaRPr/>
-          </a:p>
-        </p:txBody>
-      </p:sp>
-      <p:sp>
-        <p:nvSpPr>
-          <p:cNvPr id="3" name="Date Placeholder 2">
-            <a:extLst>
-              <a:ext uri="{FF2B5EF4-FFF2-40B4-BE49-F238E27FC236}">
-                <a16:creationId xmlns:a16="http://schemas.microsoft.com/office/drawing/2014/main" id="{DABA8485-C3A5-7F68-40DE-2FEB2E923AEA}"/>
-              </a:ext>
-            </a:extLst>
-          </p:cNvPr>
-          <p:cNvSpPr>
-            <a:spLocks noGrp="1"/>
-          </p:cNvSpPr>
-          <p:nvPr>
-            <p:ph type="dt" idx="1"/>
-          </p:nvPr>
-        </p:nvSpPr>
-        <p:spPr>
-          <a:xfrm>
-            <a:off x="5180013" y="0"/>
-            <a:ext cx="3962400" cy="342900"/>
-          </a:xfrm>
-          <a:prstGeom prst="rect">
-            <a:avLst/>
-          </a:prstGeom>
-        </p:spPr>
-        <p:txBody>
-          <a:bodyPr vert="horz" lIns="91440" tIns="45720" rIns="91440" bIns="45720" rtlCol="0"/>
-          <a:lstStyle>
-            <a:lvl1pPr algn="r">
-              <a:defRPr sz="1200"/>
-            </a:lvl1pPr>
-          </a:lstStyle>
-          <a:p>
-            <a:r>
-              <a:rPr lang="cs-CZ"/>
-              <a:t>1.7.2013</a:t>
-            </a:r>
-          </a:p>
-        </p:txBody>
-      </p:sp>
-      <p:sp>
-        <p:nvSpPr>
-          <p:cNvPr id="4" name="Slide Image Placeholder 3">
-            <a:extLst>
-              <a:ext uri="{FF2B5EF4-FFF2-40B4-BE49-F238E27FC236}">
-                <a16:creationId xmlns:a16="http://schemas.microsoft.com/office/drawing/2014/main" id="{F4C4E0B2-DEB3-CD25-E517-242225D5217D}"/>
-              </a:ext>
-            </a:extLst>
-          </p:cNvPr>
-          <p:cNvSpPr>
-            <a:spLocks noGrp="1" noRot="1" noChangeAspect="1"/>
-          </p:cNvSpPr>
-          <p:nvPr>
-            <p:ph type="sldImg" idx="2"/>
-          </p:nvPr>
-        </p:nvSpPr>
-        <p:spPr>
-          <a:xfrm>
-            <a:off x="2290763" y="512763"/>
-            <a:ext cx="4562475" cy="2566987"/>
-          </a:xfrm>
-          <a:prstGeom prst="rect">
-            <a:avLst/>
-          </a:prstGeom>
-          <a:noFill/>
-          <a:ln w="12700">
-            <a:solidFill>
-              <a:prstClr val="black"/>
-            </a:solidFill>
-          </a:ln>
-        </p:spPr>
-        <p:txBody>
-          <a:bodyPr vert="horz" lIns="91440" tIns="45720" rIns="91440" bIns="45720" rtlCol="0" anchor="ctr"/>
-          <a:lstStyle/>
-          <a:p>
-            <a:endParaRPr/>
-          </a:p>
-        </p:txBody>
-      </p:sp>
-      <p:sp>
-        <p:nvSpPr>
-          <p:cNvPr id="5" name="Notes Placeholder 4">
-            <a:extLst>
-              <a:ext uri="{FF2B5EF4-FFF2-40B4-BE49-F238E27FC236}">
-                <a16:creationId xmlns:a16="http://schemas.microsoft.com/office/drawing/2014/main" id="{E9B22D37-1B02-48E4-E401-BCD2D02F1180}"/>
-              </a:ext>
-            </a:extLst>
-          </p:cNvPr>
-          <p:cNvSpPr>
-            <a:spLocks noGrp="1"/>
-          </p:cNvSpPr>
-          <p:nvPr>
-            <p:ph type="body" sz="quarter" idx="3"/>
-          </p:nvPr>
-        </p:nvSpPr>
-        <p:spPr>
-          <a:xfrm>
-            <a:off x="914400" y="3251200"/>
-            <a:ext cx="7315200" cy="3081338"/>
-          </a:xfrm>
-          <a:prstGeom prst="rect">
-            <a:avLst/>
-          </a:prstGeom>
-        </p:spPr>
-        <p:txBody>
-          <a:bodyPr vert="horz" lIns="91440" tIns="45720" rIns="91440" bIns="45720" rtlCol="0" anchor="ctr"/>
-          <a:lstStyle>
-            <a:lvl1pPr algn="l">
-              <a:defRPr sz="1400" b="0" i="0" u="none" strike="noStrike"/>
-            </a:lvl1pPr>
-          </a:lstStyle>
-          <a:p>
-            <a:pPr indent="0" algn="l">
-              <a:lnSpc>
-                <a:spcPct val="100000"/>
-              </a:lnSpc>
-            </a:pPr>
-            <a:endParaRPr lang="en-US" sz="1400" b="0" i="0" u="none" strike="noStrike" dirty="0">
-              <a:solidFill>
-                <a:srgbClr val="000000"/>
-              </a:solidFill>
-            </a:endParaRPr>
-          </a:p>
-        </p:txBody>
-      </p:sp>
-      <p:sp>
-        <p:nvSpPr>
-          <p:cNvPr id="6" name="Footer Placeholder 5">
-            <a:extLst>
-              <a:ext uri="{FF2B5EF4-FFF2-40B4-BE49-F238E27FC236}">
-                <a16:creationId xmlns:a16="http://schemas.microsoft.com/office/drawing/2014/main" id="{9E7E5AD0-FD96-2DF4-58CF-614AAB82A5B3}"/>
-              </a:ext>
-            </a:extLst>
-          </p:cNvPr>
-          <p:cNvSpPr>
-            <a:spLocks noGrp="1"/>
-          </p:cNvSpPr>
-          <p:nvPr>
-            <p:ph type="ftr" sz="quarter" idx="4"/>
-          </p:nvPr>
-        </p:nvSpPr>
-        <p:spPr>
-          <a:xfrm>
-            <a:off x="0" y="6502400"/>
-            <a:ext cx="3962400" cy="341313"/>
-          </a:xfrm>
-          <a:prstGeom prst="rect">
-            <a:avLst/>
-          </a:prstGeom>
-        </p:spPr>
-        <p:txBody>
-          <a:bodyPr vert="horz" lIns="91440" tIns="45720" rIns="91440" bIns="45720" rtlCol="0" anchor="b"/>
-          <a:lstStyle>
-            <a:lvl1pPr algn="l">
-              <a:defRPr sz="1200"/>
-            </a:lvl1pPr>
-          </a:lstStyle>
-          <a:p>
-            <a:endParaRPr/>
-          </a:p>
-        </p:txBody>
-      </p:sp>
-      <p:sp>
-        <p:nvSpPr>
-          <p:cNvPr id="7" name="Slide Number Placeholder 6">
-            <a:extLst>
-              <a:ext uri="{FF2B5EF4-FFF2-40B4-BE49-F238E27FC236}">
-                <a16:creationId xmlns:a16="http://schemas.microsoft.com/office/drawing/2014/main" id="{D04FEF5A-82E2-B5DA-FD5A-8B6AA614FF5B}"/>
-              </a:ext>
-            </a:extLst>
-          </p:cNvPr>
-          <p:cNvSpPr>
-            <a:spLocks noGrp="1"/>
-          </p:cNvSpPr>
-          <p:nvPr>
-            <p:ph type="sldNum" sz="quarter" idx="5"/>
-          </p:nvPr>
-        </p:nvSpPr>
-        <p:spPr>
-          <a:xfrm>
-            <a:off x="5180013" y="6502400"/>
-            <a:ext cx="3962400" cy="341313"/>
-          </a:xfrm>
-          <a:prstGeom prst="rect">
-            <a:avLst/>
-          </a:prstGeom>
-        </p:spPr>
-        <p:txBody>
-          <a:bodyPr vert="horz" lIns="91440" tIns="45720" rIns="91440" bIns="45720" rtlCol="0" anchor="b"/>
-          <a:lstStyle>
-            <a:lvl1pPr algn="r">
-              <a:defRPr sz="1200"/>
-            </a:lvl1pPr>
-          </a:lstStyle>
-          <a:p>
-            <a:r>
-              <a:rPr lang="cs-CZ"/>
-              <a:t>‹#›</a:t>
-            </a:r>
-          </a:p>
-        </p:txBody>
-      </p:sp>
-    </p:spTree>
-    <p:extLst>
-      <p:ext uri="{BB962C8B-B14F-4D97-AF65-F5344CB8AC3E}">
-        <p14:creationId xmlns:p14="http://schemas.microsoft.com/office/powerpoint/2010/main" val="1504393051"/>
-      </p:ext>
-    </p:extLst>
-  </p:cSld>
-  <p:clrMapOvr>
-    <a:masterClrMapping/>
-  </p:clrMapOvr>
-</p:notes>
-</file>
-
-<file path=ppt/notesSlides/notesSlide34.xml><?xml version="1.0" encoding="utf-8"?>
-<p:notes xmlns:a="http://schemas.openxmlformats.org/drawingml/2006/main" xmlns:r="http://schemas.openxmlformats.org/officeDocument/2006/relationships" xmlns:p="http://schemas.openxmlformats.org/presentationml/2006/main">
-  <p:cSld>
-    <p:spTree>
-      <p:nvGrpSpPr>
-        <p:cNvPr id="1" name="">
-          <a:extLst>
-            <a:ext uri="{FF2B5EF4-FFF2-40B4-BE49-F238E27FC236}">
-              <a16:creationId xmlns:a16="http://schemas.microsoft.com/office/drawing/2014/main" id="{CFF28FFB-A299-84B3-85D1-99E2B3C05838}"/>
-            </a:ext>
-          </a:extLst>
-        </p:cNvPr>
-        <p:cNvGrpSpPr/>
-        <p:nvPr/>
-      </p:nvGrpSpPr>
-      <p:grpSpPr>
-        <a:xfrm>
-          <a:off x="0" y="0"/>
-          <a:ext cx="0" cy="0"/>
-          <a:chOff x="0" y="0"/>
-          <a:chExt cx="0" cy="0"/>
-        </a:xfrm>
-      </p:grpSpPr>
-      <p:sp>
-        <p:nvSpPr>
-          <p:cNvPr id="2" name="Header Placeholder 1">
-            <a:extLst>
-              <a:ext uri="{FF2B5EF4-FFF2-40B4-BE49-F238E27FC236}">
-                <a16:creationId xmlns:a16="http://schemas.microsoft.com/office/drawing/2014/main" id="{4DC3BD9A-DAB7-F8E3-47A3-257BA3A4FD85}"/>
-              </a:ext>
-            </a:extLst>
-          </p:cNvPr>
-          <p:cNvSpPr>
-            <a:spLocks noGrp="1"/>
-          </p:cNvSpPr>
-          <p:nvPr>
-            <p:ph type="hdr" sz="quarter"/>
-          </p:nvPr>
-        </p:nvSpPr>
-        <p:spPr>
-          <a:xfrm>
-            <a:off x="0" y="0"/>
-            <a:ext cx="3962400" cy="342900"/>
-          </a:xfrm>
-          <a:prstGeom prst="rect">
-            <a:avLst/>
-          </a:prstGeom>
-        </p:spPr>
-        <p:txBody>
-          <a:bodyPr vert="horz" lIns="91440" tIns="45720" rIns="91440" bIns="45720" rtlCol="0"/>
-          <a:lstStyle>
-            <a:lvl1pPr algn="l">
-              <a:defRPr sz="1200"/>
-            </a:lvl1pPr>
-          </a:lstStyle>
-          <a:p>
-            <a:endParaRPr/>
-          </a:p>
-        </p:txBody>
-      </p:sp>
-      <p:sp>
-        <p:nvSpPr>
-          <p:cNvPr id="3" name="Date Placeholder 2">
-            <a:extLst>
-              <a:ext uri="{FF2B5EF4-FFF2-40B4-BE49-F238E27FC236}">
-                <a16:creationId xmlns:a16="http://schemas.microsoft.com/office/drawing/2014/main" id="{8C4B1E04-28FA-F780-1F1D-1E9717142631}"/>
-              </a:ext>
-            </a:extLst>
-          </p:cNvPr>
-          <p:cNvSpPr>
-            <a:spLocks noGrp="1"/>
-          </p:cNvSpPr>
-          <p:nvPr>
-            <p:ph type="dt" idx="1"/>
-          </p:nvPr>
-        </p:nvSpPr>
-        <p:spPr>
-          <a:xfrm>
-            <a:off x="5180013" y="0"/>
-            <a:ext cx="3962400" cy="342900"/>
-          </a:xfrm>
-          <a:prstGeom prst="rect">
-            <a:avLst/>
-          </a:prstGeom>
-        </p:spPr>
-        <p:txBody>
-          <a:bodyPr vert="horz" lIns="91440" tIns="45720" rIns="91440" bIns="45720" rtlCol="0"/>
-          <a:lstStyle>
-            <a:lvl1pPr algn="r">
-              <a:defRPr sz="1200"/>
-            </a:lvl1pPr>
-          </a:lstStyle>
-          <a:p>
-            <a:r>
-              <a:rPr lang="cs-CZ"/>
-              <a:t>1.7.2013</a:t>
-            </a:r>
-          </a:p>
-        </p:txBody>
-      </p:sp>
-      <p:sp>
-        <p:nvSpPr>
-          <p:cNvPr id="4" name="Slide Image Placeholder 3">
-            <a:extLst>
-              <a:ext uri="{FF2B5EF4-FFF2-40B4-BE49-F238E27FC236}">
-                <a16:creationId xmlns:a16="http://schemas.microsoft.com/office/drawing/2014/main" id="{131D212E-41CC-95F6-E057-C3B266426F75}"/>
-              </a:ext>
-            </a:extLst>
-          </p:cNvPr>
-          <p:cNvSpPr>
-            <a:spLocks noGrp="1" noRot="1" noChangeAspect="1"/>
-          </p:cNvSpPr>
-          <p:nvPr>
-            <p:ph type="sldImg" idx="2"/>
-          </p:nvPr>
-        </p:nvSpPr>
-        <p:spPr>
-          <a:xfrm>
-            <a:off x="2290763" y="512763"/>
-            <a:ext cx="4562475" cy="2566987"/>
-          </a:xfrm>
-          <a:prstGeom prst="rect">
-            <a:avLst/>
-          </a:prstGeom>
-          <a:noFill/>
-          <a:ln w="12700">
-            <a:solidFill>
-              <a:prstClr val="black"/>
-            </a:solidFill>
-          </a:ln>
-        </p:spPr>
-        <p:txBody>
-          <a:bodyPr vert="horz" lIns="91440" tIns="45720" rIns="91440" bIns="45720" rtlCol="0" anchor="ctr"/>
-          <a:lstStyle/>
-          <a:p>
-            <a:endParaRPr/>
-          </a:p>
-        </p:txBody>
-      </p:sp>
-      <p:sp>
-        <p:nvSpPr>
-          <p:cNvPr id="5" name="Notes Placeholder 4">
-            <a:extLst>
-              <a:ext uri="{FF2B5EF4-FFF2-40B4-BE49-F238E27FC236}">
-                <a16:creationId xmlns:a16="http://schemas.microsoft.com/office/drawing/2014/main" id="{3A836C2B-339F-A92C-C5D6-2F0640DB6CD0}"/>
-              </a:ext>
-            </a:extLst>
-          </p:cNvPr>
-          <p:cNvSpPr>
-            <a:spLocks noGrp="1"/>
-          </p:cNvSpPr>
-          <p:nvPr>
-            <p:ph type="body" sz="quarter" idx="3"/>
-          </p:nvPr>
-        </p:nvSpPr>
-        <p:spPr>
-          <a:xfrm>
-            <a:off x="914400" y="3251200"/>
-            <a:ext cx="7315200" cy="3081338"/>
-          </a:xfrm>
-          <a:prstGeom prst="rect">
-            <a:avLst/>
-          </a:prstGeom>
-        </p:spPr>
-        <p:txBody>
-          <a:bodyPr vert="horz" lIns="91440" tIns="45720" rIns="91440" bIns="45720" rtlCol="0" anchor="ctr"/>
-          <a:lstStyle>
-            <a:lvl1pPr algn="l">
-              <a:defRPr sz="1400" b="0" i="0" u="none" strike="noStrike"/>
-            </a:lvl1pPr>
-          </a:lstStyle>
-          <a:p>
-            <a:pPr indent="0" algn="l">
-              <a:lnSpc>
-                <a:spcPct val="100000"/>
-              </a:lnSpc>
-            </a:pPr>
-            <a:endParaRPr lang="en-US" sz="1400" b="0" i="0" u="none" strike="noStrike" dirty="0">
-              <a:solidFill>
-                <a:srgbClr val="000000"/>
-              </a:solidFill>
-            </a:endParaRPr>
-          </a:p>
-        </p:txBody>
-      </p:sp>
-      <p:sp>
-        <p:nvSpPr>
-          <p:cNvPr id="6" name="Footer Placeholder 5">
-            <a:extLst>
-              <a:ext uri="{FF2B5EF4-FFF2-40B4-BE49-F238E27FC236}">
-                <a16:creationId xmlns:a16="http://schemas.microsoft.com/office/drawing/2014/main" id="{33E463D9-6CCC-43E6-C3D9-BCF74DA117C5}"/>
-              </a:ext>
-            </a:extLst>
-          </p:cNvPr>
-          <p:cNvSpPr>
-            <a:spLocks noGrp="1"/>
-          </p:cNvSpPr>
-          <p:nvPr>
-            <p:ph type="ftr" sz="quarter" idx="4"/>
-          </p:nvPr>
-        </p:nvSpPr>
-        <p:spPr>
-          <a:xfrm>
-            <a:off x="0" y="6502400"/>
-            <a:ext cx="3962400" cy="341313"/>
-          </a:xfrm>
-          <a:prstGeom prst="rect">
-            <a:avLst/>
-          </a:prstGeom>
-        </p:spPr>
-        <p:txBody>
-          <a:bodyPr vert="horz" lIns="91440" tIns="45720" rIns="91440" bIns="45720" rtlCol="0" anchor="b"/>
-          <a:lstStyle>
-            <a:lvl1pPr algn="l">
-              <a:defRPr sz="1200"/>
-            </a:lvl1pPr>
-          </a:lstStyle>
-          <a:p>
-            <a:endParaRPr/>
-          </a:p>
-        </p:txBody>
-      </p:sp>
-      <p:sp>
-        <p:nvSpPr>
-          <p:cNvPr id="7" name="Slide Number Placeholder 6">
-            <a:extLst>
-              <a:ext uri="{FF2B5EF4-FFF2-40B4-BE49-F238E27FC236}">
-                <a16:creationId xmlns:a16="http://schemas.microsoft.com/office/drawing/2014/main" id="{38CF4480-F208-F51B-2CF3-FEBEB4BCCAD7}"/>
-              </a:ext>
-            </a:extLst>
-          </p:cNvPr>
-          <p:cNvSpPr>
-            <a:spLocks noGrp="1"/>
-          </p:cNvSpPr>
-          <p:nvPr>
-            <p:ph type="sldNum" sz="quarter" idx="5"/>
-          </p:nvPr>
-        </p:nvSpPr>
-        <p:spPr>
-          <a:xfrm>
-            <a:off x="5180013" y="6502400"/>
-            <a:ext cx="3962400" cy="341313"/>
-          </a:xfrm>
-          <a:prstGeom prst="rect">
-            <a:avLst/>
-          </a:prstGeom>
-        </p:spPr>
-        <p:txBody>
-          <a:bodyPr vert="horz" lIns="91440" tIns="45720" rIns="91440" bIns="45720" rtlCol="0" anchor="b"/>
-          <a:lstStyle>
-            <a:lvl1pPr algn="r">
-              <a:defRPr sz="1200"/>
-            </a:lvl1pPr>
-          </a:lstStyle>
-          <a:p>
-            <a:r>
-              <a:rPr lang="cs-CZ"/>
-              <a:t>‹#›</a:t>
-            </a:r>
-          </a:p>
-        </p:txBody>
-      </p:sp>
-    </p:spTree>
-    <p:extLst>
-      <p:ext uri="{BB962C8B-B14F-4D97-AF65-F5344CB8AC3E}">
-        <p14:creationId xmlns:p14="http://schemas.microsoft.com/office/powerpoint/2010/main" val="2920906509"/>
-      </p:ext>
-    </p:extLst>
-  </p:cSld>
-  <p:clrMapOvr>
-    <a:masterClrMapping/>
-  </p:clrMapOvr>
-</p:notes>
-</file>
-
-<file path=ppt/notesSlides/notesSlide35.xml><?xml version="1.0" encoding="utf-8"?>
-<p:notes xmlns:a="http://schemas.openxmlformats.org/drawingml/2006/main" xmlns:r="http://schemas.openxmlformats.org/officeDocument/2006/relationships" xmlns:p="http://schemas.openxmlformats.org/presentationml/2006/main">
-  <p:cSld>
-    <p:spTree>
-      <p:nvGrpSpPr>
-        <p:cNvPr id="1" name="">
-          <a:extLst>
-            <a:ext uri="{FF2B5EF4-FFF2-40B4-BE49-F238E27FC236}">
-              <a16:creationId xmlns:a16="http://schemas.microsoft.com/office/drawing/2014/main" id="{E7C1A05D-2253-2565-7067-0B9C51E2A401}"/>
-            </a:ext>
-          </a:extLst>
-        </p:cNvPr>
-        <p:cNvGrpSpPr/>
-        <p:nvPr/>
-      </p:nvGrpSpPr>
-      <p:grpSpPr>
-        <a:xfrm>
-          <a:off x="0" y="0"/>
-          <a:ext cx="0" cy="0"/>
-          <a:chOff x="0" y="0"/>
-          <a:chExt cx="0" cy="0"/>
-        </a:xfrm>
-      </p:grpSpPr>
-      <p:sp>
-        <p:nvSpPr>
-          <p:cNvPr id="2" name="Header Placeholder 1">
-            <a:extLst>
-              <a:ext uri="{FF2B5EF4-FFF2-40B4-BE49-F238E27FC236}">
-                <a16:creationId xmlns:a16="http://schemas.microsoft.com/office/drawing/2014/main" id="{31D4ADC3-0A73-C8B3-77B1-5E4E885C629D}"/>
-              </a:ext>
-            </a:extLst>
-          </p:cNvPr>
-          <p:cNvSpPr>
-            <a:spLocks noGrp="1"/>
-          </p:cNvSpPr>
-          <p:nvPr>
-            <p:ph type="hdr" sz="quarter"/>
-          </p:nvPr>
-        </p:nvSpPr>
-        <p:spPr>
-          <a:xfrm>
-            <a:off x="0" y="0"/>
-            <a:ext cx="3962400" cy="342900"/>
-          </a:xfrm>
-          <a:prstGeom prst="rect">
-            <a:avLst/>
-          </a:prstGeom>
-        </p:spPr>
-        <p:txBody>
-          <a:bodyPr vert="horz" lIns="91440" tIns="45720" rIns="91440" bIns="45720" rtlCol="0"/>
-          <a:lstStyle>
-            <a:lvl1pPr algn="l">
-              <a:defRPr sz="1200"/>
-            </a:lvl1pPr>
-          </a:lstStyle>
-          <a:p>
-            <a:endParaRPr/>
-          </a:p>
-        </p:txBody>
-      </p:sp>
-      <p:sp>
-        <p:nvSpPr>
-          <p:cNvPr id="3" name="Date Placeholder 2">
-            <a:extLst>
-              <a:ext uri="{FF2B5EF4-FFF2-40B4-BE49-F238E27FC236}">
-                <a16:creationId xmlns:a16="http://schemas.microsoft.com/office/drawing/2014/main" id="{C5BAF988-506D-2D7F-3A7D-1DC903BDFEF6}"/>
-              </a:ext>
-            </a:extLst>
-          </p:cNvPr>
-          <p:cNvSpPr>
-            <a:spLocks noGrp="1"/>
-          </p:cNvSpPr>
-          <p:nvPr>
-            <p:ph type="dt" idx="1"/>
-          </p:nvPr>
-        </p:nvSpPr>
-        <p:spPr>
-          <a:xfrm>
-            <a:off x="5180013" y="0"/>
-            <a:ext cx="3962400" cy="342900"/>
-          </a:xfrm>
-          <a:prstGeom prst="rect">
-            <a:avLst/>
-          </a:prstGeom>
-        </p:spPr>
-        <p:txBody>
-          <a:bodyPr vert="horz" lIns="91440" tIns="45720" rIns="91440" bIns="45720" rtlCol="0"/>
-          <a:lstStyle>
-            <a:lvl1pPr algn="r">
-              <a:defRPr sz="1200"/>
-            </a:lvl1pPr>
-          </a:lstStyle>
-          <a:p>
-            <a:r>
-              <a:rPr lang="cs-CZ"/>
-              <a:t>1.7.2013</a:t>
-            </a:r>
-          </a:p>
-        </p:txBody>
-      </p:sp>
-      <p:sp>
-        <p:nvSpPr>
-          <p:cNvPr id="4" name="Slide Image Placeholder 3">
-            <a:extLst>
-              <a:ext uri="{FF2B5EF4-FFF2-40B4-BE49-F238E27FC236}">
-                <a16:creationId xmlns:a16="http://schemas.microsoft.com/office/drawing/2014/main" id="{67E0DBC4-D119-1C8A-5AC2-F2DFF85F886D}"/>
-              </a:ext>
-            </a:extLst>
-          </p:cNvPr>
-          <p:cNvSpPr>
-            <a:spLocks noGrp="1" noRot="1" noChangeAspect="1"/>
-          </p:cNvSpPr>
-          <p:nvPr>
-            <p:ph type="sldImg" idx="2"/>
-          </p:nvPr>
-        </p:nvSpPr>
-        <p:spPr>
-          <a:xfrm>
-            <a:off x="2290763" y="512763"/>
-            <a:ext cx="4562475" cy="2566987"/>
-          </a:xfrm>
-          <a:prstGeom prst="rect">
-            <a:avLst/>
-          </a:prstGeom>
-          <a:noFill/>
-          <a:ln w="12700">
-            <a:solidFill>
-              <a:prstClr val="black"/>
-            </a:solidFill>
-          </a:ln>
-        </p:spPr>
-        <p:txBody>
-          <a:bodyPr vert="horz" lIns="91440" tIns="45720" rIns="91440" bIns="45720" rtlCol="0" anchor="ctr"/>
-          <a:lstStyle/>
-          <a:p>
-            <a:endParaRPr/>
-          </a:p>
-        </p:txBody>
-      </p:sp>
-      <p:sp>
-        <p:nvSpPr>
-          <p:cNvPr id="5" name="Notes Placeholder 4">
-            <a:extLst>
-              <a:ext uri="{FF2B5EF4-FFF2-40B4-BE49-F238E27FC236}">
-                <a16:creationId xmlns:a16="http://schemas.microsoft.com/office/drawing/2014/main" id="{1B84915C-8190-28DF-F81D-02FB33580847}"/>
-              </a:ext>
-            </a:extLst>
-          </p:cNvPr>
-          <p:cNvSpPr>
-            <a:spLocks noGrp="1"/>
-          </p:cNvSpPr>
-          <p:nvPr>
-            <p:ph type="body" sz="quarter" idx="3"/>
-          </p:nvPr>
-        </p:nvSpPr>
-        <p:spPr>
-          <a:xfrm>
-            <a:off x="914400" y="3251200"/>
-            <a:ext cx="7315200" cy="3081338"/>
-          </a:xfrm>
-          <a:prstGeom prst="rect">
-            <a:avLst/>
-          </a:prstGeom>
-        </p:spPr>
-        <p:txBody>
-          <a:bodyPr vert="horz" lIns="91440" tIns="45720" rIns="91440" bIns="45720" rtlCol="0" anchor="ctr"/>
-          <a:lstStyle>
-            <a:lvl1pPr algn="l">
-              <a:defRPr sz="1400" b="0" i="0" u="none" strike="noStrike"/>
-            </a:lvl1pPr>
-          </a:lstStyle>
-          <a:p>
-            <a:pPr indent="0" algn="l">
-              <a:lnSpc>
-                <a:spcPct val="100000"/>
-              </a:lnSpc>
-            </a:pPr>
-            <a:endParaRPr lang="en-US" sz="1400" b="0" i="0" u="none" strike="noStrike" dirty="0">
-              <a:solidFill>
-                <a:srgbClr val="000000"/>
-              </a:solidFill>
-            </a:endParaRPr>
-          </a:p>
-        </p:txBody>
-      </p:sp>
-      <p:sp>
-        <p:nvSpPr>
-          <p:cNvPr id="6" name="Footer Placeholder 5">
-            <a:extLst>
-              <a:ext uri="{FF2B5EF4-FFF2-40B4-BE49-F238E27FC236}">
-                <a16:creationId xmlns:a16="http://schemas.microsoft.com/office/drawing/2014/main" id="{02F7821E-1BE0-9BE2-B0E0-F7AECF0E0E4B}"/>
-              </a:ext>
-            </a:extLst>
-          </p:cNvPr>
-          <p:cNvSpPr>
-            <a:spLocks noGrp="1"/>
-          </p:cNvSpPr>
-          <p:nvPr>
-            <p:ph type="ftr" sz="quarter" idx="4"/>
-          </p:nvPr>
-        </p:nvSpPr>
-        <p:spPr>
-          <a:xfrm>
-            <a:off x="0" y="6502400"/>
-            <a:ext cx="3962400" cy="341313"/>
-          </a:xfrm>
-          <a:prstGeom prst="rect">
-            <a:avLst/>
-          </a:prstGeom>
-        </p:spPr>
-        <p:txBody>
-          <a:bodyPr vert="horz" lIns="91440" tIns="45720" rIns="91440" bIns="45720" rtlCol="0" anchor="b"/>
-          <a:lstStyle>
-            <a:lvl1pPr algn="l">
-              <a:defRPr sz="1200"/>
-            </a:lvl1pPr>
-          </a:lstStyle>
-          <a:p>
-            <a:endParaRPr/>
-          </a:p>
-        </p:txBody>
-      </p:sp>
-      <p:sp>
-        <p:nvSpPr>
-          <p:cNvPr id="7" name="Slide Number Placeholder 6">
-            <a:extLst>
-              <a:ext uri="{FF2B5EF4-FFF2-40B4-BE49-F238E27FC236}">
-                <a16:creationId xmlns:a16="http://schemas.microsoft.com/office/drawing/2014/main" id="{3E0BA1C5-2E03-0933-2960-7D0AFCABDF8D}"/>
-              </a:ext>
-            </a:extLst>
-          </p:cNvPr>
-          <p:cNvSpPr>
-            <a:spLocks noGrp="1"/>
-          </p:cNvSpPr>
-          <p:nvPr>
-            <p:ph type="sldNum" sz="quarter" idx="5"/>
-          </p:nvPr>
-        </p:nvSpPr>
-        <p:spPr>
-          <a:xfrm>
-            <a:off x="5180013" y="6502400"/>
-            <a:ext cx="3962400" cy="341313"/>
-          </a:xfrm>
-          <a:prstGeom prst="rect">
-            <a:avLst/>
-          </a:prstGeom>
-        </p:spPr>
-        <p:txBody>
-          <a:bodyPr vert="horz" lIns="91440" tIns="45720" rIns="91440" bIns="45720" rtlCol="0" anchor="b"/>
-          <a:lstStyle>
-            <a:lvl1pPr algn="r">
-              <a:defRPr sz="1200"/>
-            </a:lvl1pPr>
-          </a:lstStyle>
-          <a:p>
-            <a:r>
-              <a:rPr lang="cs-CZ"/>
-              <a:t>‹#›</a:t>
-            </a:r>
-          </a:p>
-        </p:txBody>
-      </p:sp>
-    </p:spTree>
-    <p:extLst>
-      <p:ext uri="{BB962C8B-B14F-4D97-AF65-F5344CB8AC3E}">
-        <p14:creationId xmlns:p14="http://schemas.microsoft.com/office/powerpoint/2010/main" val="3810537207"/>
+        <p14:creationId xmlns:p14="http://schemas.microsoft.com/office/powerpoint/2010/main" val="2221944924"/>
       </p:ext>
     </p:extLst>
   </p:cSld>
@@ -10035,7 +9207,7 @@
           <a:p>
             <a:fld id="{64F06B81-D0D4-404B-8474-757991D5685D}" type="datetimeFigureOut">
               <a:rPr lang="zh-CN" altLang="en-US" smtClean="0"/>
-              <a:t>2026/5/18</a:t>
+              <a:t>2026/5/27</a:t>
             </a:fld>
             <a:endParaRPr lang="zh-CN" altLang="en-US"/>
           </a:p>
@@ -10245,7 +9417,7 @@
           <a:p>
             <a:fld id="{64F06B81-D0D4-404B-8474-757991D5685D}" type="datetimeFigureOut">
               <a:rPr lang="zh-CN" altLang="en-US" smtClean="0"/>
-              <a:t>2026/5/18</a:t>
+              <a:t>2026/5/27</a:t>
             </a:fld>
             <a:endParaRPr lang="zh-CN" altLang="en-US"/>
           </a:p>
@@ -10465,7 +9637,7 @@
           <a:p>
             <a:fld id="{64F06B81-D0D4-404B-8474-757991D5685D}" type="datetimeFigureOut">
               <a:rPr lang="zh-CN" altLang="en-US" smtClean="0"/>
-              <a:t>2026/5/18</a:t>
+              <a:t>2026/5/27</a:t>
             </a:fld>
             <a:endParaRPr lang="zh-CN" altLang="en-US"/>
           </a:p>
@@ -10717,7 +9889,7 @@
           <a:p>
             <a:fld id="{64F06B81-D0D4-404B-8474-757991D5685D}" type="datetimeFigureOut">
               <a:rPr lang="zh-CN" altLang="en-US" smtClean="0"/>
-              <a:t>2026/5/18</a:t>
+              <a:t>2026/5/27</a:t>
             </a:fld>
             <a:endParaRPr lang="zh-CN" altLang="en-US"/>
           </a:p>
@@ -11004,7 +10176,7 @@
           <a:p>
             <a:fld id="{64F06B81-D0D4-404B-8474-757991D5685D}" type="datetimeFigureOut">
               <a:rPr lang="zh-CN" altLang="en-US" smtClean="0"/>
-              <a:t>2026/5/18</a:t>
+              <a:t>2026/5/27</a:t>
             </a:fld>
             <a:endParaRPr lang="zh-CN" altLang="en-US"/>
           </a:p>
@@ -11281,7 +10453,7 @@
           <a:p>
             <a:fld id="{64F06B81-D0D4-404B-8474-757991D5685D}" type="datetimeFigureOut">
               <a:rPr lang="zh-CN" altLang="en-US" smtClean="0"/>
-              <a:t>2026/5/18</a:t>
+              <a:t>2026/5/27</a:t>
             </a:fld>
             <a:endParaRPr lang="zh-CN" altLang="en-US"/>
           </a:p>
@@ -11705,7 +10877,7 @@
           <a:p>
             <a:fld id="{64F06B81-D0D4-404B-8474-757991D5685D}" type="datetimeFigureOut">
               <a:rPr lang="zh-CN" altLang="en-US" smtClean="0"/>
-              <a:t>2026/5/18</a:t>
+              <a:t>2026/5/27</a:t>
             </a:fld>
             <a:endParaRPr lang="zh-CN" altLang="en-US"/>
           </a:p>
@@ -11858,7 +11030,7 @@
           <a:p>
             <a:fld id="{64F06B81-D0D4-404B-8474-757991D5685D}" type="datetimeFigureOut">
               <a:rPr lang="zh-CN" altLang="en-US" smtClean="0"/>
-              <a:t>2026/5/18</a:t>
+              <a:t>2026/5/27</a:t>
             </a:fld>
             <a:endParaRPr lang="zh-CN" altLang="en-US"/>
           </a:p>
@@ -11983,7 +11155,7 @@
           <a:p>
             <a:fld id="{64F06B81-D0D4-404B-8474-757991D5685D}" type="datetimeFigureOut">
               <a:rPr lang="zh-CN" altLang="en-US" smtClean="0"/>
-              <a:t>2026/5/18</a:t>
+              <a:t>2026/5/27</a:t>
             </a:fld>
             <a:endParaRPr lang="zh-CN" altLang="en-US"/>
           </a:p>
@@ -12306,7 +11478,7 @@
           <a:p>
             <a:fld id="{64F06B81-D0D4-404B-8474-757991D5685D}" type="datetimeFigureOut">
               <a:rPr lang="zh-CN" altLang="en-US" smtClean="0"/>
-              <a:t>2026/5/18</a:t>
+              <a:t>2026/5/27</a:t>
             </a:fld>
             <a:endParaRPr lang="zh-CN" altLang="en-US"/>
           </a:p>
@@ -12606,7 +11778,7 @@
           <a:p>
             <a:fld id="{64F06B81-D0D4-404B-8474-757991D5685D}" type="datetimeFigureOut">
               <a:rPr lang="zh-CN" altLang="en-US" smtClean="0"/>
-              <a:t>2026/5/18</a:t>
+              <a:t>2026/5/27</a:t>
             </a:fld>
             <a:endParaRPr lang="zh-CN" altLang="en-US"/>
           </a:p>
@@ -12859,7 +12031,7 @@
           <a:p>
             <a:fld id="{64F06B81-D0D4-404B-8474-757991D5685D}" type="datetimeFigureOut">
               <a:rPr lang="zh-CN" altLang="en-US" smtClean="0"/>
-              <a:t>2026/5/18</a:t>
+              <a:t>2026/5/27</a:t>
             </a:fld>
             <a:endParaRPr lang="zh-CN" altLang="en-US"/>
           </a:p>
@@ -25478,7 +24650,7 @@
         <p:cNvPr id="1" name="">
           <a:extLst>
             <a:ext uri="{FF2B5EF4-FFF2-40B4-BE49-F238E27FC236}">
-              <a16:creationId xmlns:a16="http://schemas.microsoft.com/office/drawing/2014/main" id="{ADF96FC6-6E27-B2C1-CC7B-28C3FBDD090F}"/>
+              <a16:creationId xmlns:a16="http://schemas.microsoft.com/office/drawing/2014/main" id="{11895744-4A46-D935-A2A4-BB21AE5FDA4D}"/>
             </a:ext>
           </a:extLst>
         </p:cNvPr>
@@ -25498,7 +24670,7 @@
           <p:cNvPr id="2" name="AutoShape 2">
             <a:extLst>
               <a:ext uri="{FF2B5EF4-FFF2-40B4-BE49-F238E27FC236}">
-                <a16:creationId xmlns:a16="http://schemas.microsoft.com/office/drawing/2014/main" id="{FC2EAC1C-3519-8F89-11C4-84642ABA2F1C}"/>
+                <a16:creationId xmlns:a16="http://schemas.microsoft.com/office/drawing/2014/main" id="{263232BC-7A3E-CB84-1301-CA0522F09CC0}"/>
               </a:ext>
             </a:extLst>
           </p:cNvPr>
@@ -25587,7 +24759,7 @@
           <p:cNvPr id="4" name="直接连接符 3">
             <a:extLst>
               <a:ext uri="{FF2B5EF4-FFF2-40B4-BE49-F238E27FC236}">
-                <a16:creationId xmlns:a16="http://schemas.microsoft.com/office/drawing/2014/main" id="{345B3228-6DCD-D4D0-4095-CA90D8C3F4E7}"/>
+                <a16:creationId xmlns:a16="http://schemas.microsoft.com/office/drawing/2014/main" id="{3EC8DAAC-197A-4B49-FC39-A0F06E7FC71C}"/>
               </a:ext>
             </a:extLst>
           </p:cNvPr>
@@ -25632,7 +24804,7 @@
           <p:cNvPr id="3" name="AutoShape 3">
             <a:extLst>
               <a:ext uri="{FF2B5EF4-FFF2-40B4-BE49-F238E27FC236}">
-                <a16:creationId xmlns:a16="http://schemas.microsoft.com/office/drawing/2014/main" id="{955AC964-B623-591D-E75A-9F0C2991029A}"/>
+                <a16:creationId xmlns:a16="http://schemas.microsoft.com/office/drawing/2014/main" id="{6906D91C-D781-B8F2-EF78-A5AD2912AB26}"/>
               </a:ext>
             </a:extLst>
           </p:cNvPr>
@@ -25665,6 +24837,18 @@
               <a:defRPr/>
             </a:pPr>
             <a:r>
+              <a:rPr lang="zh-CN" altLang="en-US" sz="2200" b="1" dirty="0">
+                <a:solidFill>
+                  <a:srgbClr val="555555"/>
+                </a:solidFill>
+                <a:latin typeface="Noto Sans SC"/>
+                <a:ea typeface="Noto Sans SC"/>
+                <a:cs typeface="Noto Sans SC"/>
+                <a:sym typeface="Noto Sans SC"/>
+              </a:rPr>
+              <a:t>回顾</a:t>
+            </a:r>
+            <a:r>
               <a:rPr lang="en-US" altLang="zh-CN" sz="2200" b="1" dirty="0">
                 <a:solidFill>
                   <a:srgbClr val="555555"/>
@@ -25674,42 +24858,548 @@
                 <a:cs typeface="Noto Sans SC"/>
                 <a:sym typeface="Noto Sans SC"/>
               </a:rPr>
-              <a:t>4.3 </a:t>
-            </a:r>
-            <a:r>
-              <a:rPr lang="zh-CN" altLang="en-US" sz="2200" b="1" dirty="0">
-                <a:solidFill>
-                  <a:srgbClr val="555555"/>
-                </a:solidFill>
-                <a:latin typeface="Noto Sans SC"/>
-                <a:ea typeface="Noto Sans SC"/>
-                <a:cs typeface="Noto Sans SC"/>
-                <a:sym typeface="Noto Sans SC"/>
-              </a:rPr>
-              <a:t>量子纠错的条件</a:t>
-            </a:r>
-            <a:r>
-              <a:rPr lang="en-US" altLang="zh-CN" sz="2200" b="1" dirty="0">
-                <a:solidFill>
-                  <a:srgbClr val="555555"/>
-                </a:solidFill>
-                <a:latin typeface="Noto Sans SC"/>
-                <a:ea typeface="Noto Sans SC"/>
-                <a:cs typeface="Noto Sans SC"/>
-                <a:sym typeface="Noto Sans SC"/>
-              </a:rPr>
               <a:t> </a:t>
             </a:r>
             <a:endParaRPr lang="en-US" sz="1100" dirty="0"/>
           </a:p>
         </p:txBody>
       </p:sp>
-      <p:sp>
-        <p:nvSpPr>
-          <p:cNvPr id="16" name="文本框 15">
-            <a:extLst>
-              <a:ext uri="{FF2B5EF4-FFF2-40B4-BE49-F238E27FC236}">
-                <a16:creationId xmlns:a16="http://schemas.microsoft.com/office/drawing/2014/main" id="{46AFF781-BA10-C302-7D9A-37FEC606E913}"/>
+      <mc:AlternateContent xmlns:mc="http://schemas.openxmlformats.org/markup-compatibility/2006" xmlns:a14="http://schemas.microsoft.com/office/drawing/2010/main">
+        <mc:Choice Requires="a14">
+          <p:sp>
+            <p:nvSpPr>
+              <p:cNvPr id="16" name="文本框 15">
+                <a:extLst>
+                  <a:ext uri="{FF2B5EF4-FFF2-40B4-BE49-F238E27FC236}">
+                    <a16:creationId xmlns:a16="http://schemas.microsoft.com/office/drawing/2014/main" id="{A5466041-96C6-68C5-21B0-73743B2D07C3}"/>
+                  </a:ext>
+                </a:extLst>
+              </p:cNvPr>
+              <p:cNvSpPr txBox="1"/>
+              <p:nvPr/>
+            </p:nvSpPr>
+            <p:spPr>
+              <a:xfrm>
+                <a:off x="489732" y="2350397"/>
+                <a:ext cx="6950773" cy="2862322"/>
+              </a:xfrm>
+              <a:prstGeom prst="rect">
+                <a:avLst/>
+              </a:prstGeom>
+              <a:noFill/>
+            </p:spPr>
+            <p:txBody>
+              <a:bodyPr wrap="square">
+                <a:spAutoFit/>
+              </a:bodyPr>
+              <a:lstStyle/>
+              <a:p>
+                <a:pPr marL="342900" indent="-342900">
+                  <a:buAutoNum type="arabicPeriod"/>
+                </a:pPr>
+                <a:r>
+                  <a:rPr lang="en-US" altLang="zh-CN" b="1" dirty="0"/>
+                  <a:t>3bit</a:t>
+                </a:r>
+                <a:r>
+                  <a:rPr lang="zh-CN" altLang="en-US" b="1" dirty="0"/>
+                  <a:t>码的电路模型</a:t>
+                </a:r>
+                <a:endParaRPr lang="en-US" altLang="zh-CN" b="1" dirty="0"/>
+              </a:p>
+              <a:p>
+                <a:r>
+                  <a:rPr lang="en-US" altLang="zh-CN" b="1" dirty="0"/>
+                  <a:t>        </a:t>
+                </a:r>
+                <a:r>
+                  <a:rPr lang="zh-CN" altLang="en-US" b="1" dirty="0"/>
+                  <a:t>辅助码，症候，</a:t>
+                </a:r>
+                <a:r>
+                  <a:rPr lang="en-US" altLang="zh-CN" b="1" dirty="0" err="1"/>
+                  <a:t>cnot</a:t>
+                </a:r>
+                <a:r>
+                  <a:rPr lang="zh-CN" altLang="en-US" b="1" dirty="0"/>
+                  <a:t>门</a:t>
+                </a:r>
+                <a:endParaRPr lang="en-US" altLang="zh-CN" b="1" dirty="0"/>
+              </a:p>
+              <a:p>
+                <a:pPr marL="342900" indent="-342900">
+                  <a:buAutoNum type="arabicPeriod" startAt="2"/>
+                </a:pPr>
+                <a:r>
+                  <a:rPr lang="en-US" altLang="zh-CN" b="1" dirty="0"/>
+                  <a:t>Shor</a:t>
+                </a:r>
+                <a:r>
+                  <a:rPr lang="zh-CN" altLang="en-US" b="1" dirty="0"/>
+                  <a:t>码</a:t>
+                </a:r>
+                <a:endParaRPr lang="en-US" altLang="zh-CN" b="1" dirty="0"/>
+              </a:p>
+              <a:p>
+                <a:r>
+                  <a:rPr lang="en-US" altLang="zh-CN" b="1" dirty="0"/>
+                  <a:t>        </a:t>
+                </a:r>
+                <a:r>
+                  <a:rPr lang="zh-CN" altLang="en-US" b="1" dirty="0"/>
+                  <a:t>同时修复比特翻转与相位翻转</a:t>
+                </a:r>
+                <a:endParaRPr lang="en-US" altLang="zh-CN" b="1" dirty="0"/>
+              </a:p>
+              <a:p>
+                <a:pPr marL="342900" indent="-342900">
+                  <a:buAutoNum type="arabicPeriod" startAt="3"/>
+                </a:pPr>
+                <a:r>
+                  <a:rPr lang="zh-CN" altLang="en-US" b="1" dirty="0"/>
+                  <a:t>量子纠错理论概念</a:t>
+                </a:r>
+                <a:endParaRPr lang="en-US" altLang="zh-CN" b="1" dirty="0"/>
+              </a:p>
+              <a:p>
+                <a:r>
+                  <a:rPr lang="en-US" altLang="zh-CN" b="1" dirty="0"/>
+                  <a:t>        </a:t>
+                </a:r>
+                <a:r>
+                  <a:rPr lang="zh-CN" altLang="en-US" b="1" dirty="0"/>
+                  <a:t>定义 </a:t>
+                </a:r>
+                <a14:m>
+                  <m:oMath xmlns:m="http://schemas.openxmlformats.org/officeDocument/2006/math">
+                    <m:d>
+                      <m:dPr>
+                        <m:sepChr m:val=","/>
+                        <m:ctrlPr>
+                          <a:rPr lang="ar-AE" altLang="zh-CN" b="1" i="1">
+                            <a:solidFill>
+                              <a:schemeClr val="accent2"/>
+                            </a:solidFill>
+                            <a:latin typeface="Cambria Math" panose="02040503050406030204" pitchFamily="18" charset="0"/>
+                          </a:rPr>
+                        </m:ctrlPr>
+                      </m:dPr>
+                      <m:e>
+                        <m:r>
+                          <a:rPr lang="zh-CN" altLang="ar-AE" b="1" i="1">
+                            <a:solidFill>
+                              <a:schemeClr val="accent2"/>
+                            </a:solidFill>
+                            <a:latin typeface="Cambria Math" panose="02040503050406030204" pitchFamily="18" charset="0"/>
+                          </a:rPr>
+                          <m:t>𝑼</m:t>
+                        </m:r>
+                      </m:e>
+                      <m:e>
+                        <m:r>
+                          <a:rPr lang="ar-AE" altLang="zh-CN" b="1">
+                            <a:solidFill>
+                              <a:schemeClr val="accent2"/>
+                            </a:solidFill>
+                            <a:latin typeface="Cambria Math" panose="02040503050406030204" pitchFamily="18" charset="0"/>
+                          </a:rPr>
+                          <m:t>𝓔</m:t>
+                        </m:r>
+                      </m:e>
+                    </m:d>
+                  </m:oMath>
+                </a14:m>
+                <a:r>
+                  <a:rPr lang="en-US" altLang="zh-CN" b="1" dirty="0"/>
+                  <a:t> / </a:t>
+                </a:r>
+                <a14:m>
+                  <m:oMath xmlns:m="http://schemas.openxmlformats.org/officeDocument/2006/math">
+                    <m:d>
+                      <m:dPr>
+                        <m:sepChr m:val=","/>
+                        <m:ctrlPr>
+                          <a:rPr lang="ar-AE" altLang="zh-CN" b="1" i="1" smtClean="0">
+                            <a:solidFill>
+                              <a:schemeClr val="accent2"/>
+                            </a:solidFill>
+                            <a:latin typeface="Cambria Math" panose="02040503050406030204" pitchFamily="18" charset="0"/>
+                          </a:rPr>
+                        </m:ctrlPr>
+                      </m:dPr>
+                      <m:e>
+                        <m:r>
+                          <a:rPr lang="en-US" altLang="zh-CN" b="1" i="1">
+                            <a:solidFill>
+                              <a:schemeClr val="accent2"/>
+                            </a:solidFill>
+                            <a:latin typeface="Cambria Math" panose="02040503050406030204" pitchFamily="18" charset="0"/>
+                          </a:rPr>
+                          <m:t>𝑸</m:t>
+                        </m:r>
+                      </m:e>
+                      <m:e>
+                        <m:r>
+                          <a:rPr lang="ar-AE" altLang="zh-CN" b="1">
+                            <a:solidFill>
+                              <a:schemeClr val="accent2"/>
+                            </a:solidFill>
+                            <a:latin typeface="Cambria Math" panose="02040503050406030204" pitchFamily="18" charset="0"/>
+                          </a:rPr>
+                          <m:t>𝓔</m:t>
+                        </m:r>
+                      </m:e>
+                    </m:d>
+                  </m:oMath>
+                </a14:m>
+                <a:endParaRPr lang="en-US" altLang="zh-CN" b="1" dirty="0"/>
+              </a:p>
+              <a:p>
+                <a:r>
+                  <a:rPr lang="en-US" altLang="zh-CN" b="1" dirty="0"/>
+                  <a:t>        </a:t>
+                </a:r>
+                <a:r>
+                  <a:rPr lang="zh-CN" altLang="en-US" b="1" dirty="0"/>
+                  <a:t>性质 </a:t>
+                </a:r>
+                <a:r>
+                  <a:rPr lang="zh-CN" altLang="en-US" b="1" dirty="0">
+                    <a:solidFill>
+                      <a:schemeClr val="accent2"/>
+                    </a:solidFill>
+                  </a:rPr>
+                  <a:t>线性性质</a:t>
+                </a:r>
+                <a:endParaRPr lang="en-US" altLang="zh-CN" b="1" dirty="0">
+                  <a:solidFill>
+                    <a:schemeClr val="accent2"/>
+                  </a:solidFill>
+                </a:endParaRPr>
+              </a:p>
+              <a:p>
+                <a:r>
+                  <a:rPr lang="en-US" altLang="zh-CN" b="1" dirty="0"/>
+                  <a:t>        </a:t>
+                </a:r>
+                <a:r>
+                  <a:rPr lang="zh-CN" altLang="en-US" b="1" dirty="0"/>
+                  <a:t>条件 </a:t>
+                </a:r>
+                <a:r>
+                  <a:rPr lang="zh-CN" altLang="en-US" b="1" dirty="0">
+                    <a:solidFill>
+                      <a:schemeClr val="accent2"/>
+                    </a:solidFill>
+                  </a:rPr>
+                  <a:t>充分条件</a:t>
+                </a:r>
+                <a:r>
+                  <a:rPr lang="en-US" altLang="zh-CN" b="1" dirty="0"/>
+                  <a:t>/ </a:t>
+                </a:r>
+                <a:r>
+                  <a:rPr lang="en-US" altLang="zh-CN" b="1" dirty="0">
+                    <a:solidFill>
+                      <a:schemeClr val="accent2"/>
+                    </a:solidFill>
+                  </a:rPr>
+                  <a:t>QECC</a:t>
+                </a:r>
+                <a:r>
+                  <a:rPr lang="zh-CN" altLang="en-US" b="1" dirty="0">
+                    <a:solidFill>
+                      <a:schemeClr val="accent2"/>
+                    </a:solidFill>
+                  </a:rPr>
+                  <a:t>条件</a:t>
+                </a:r>
+                <a:r>
+                  <a:rPr lang="en-US" altLang="zh-CN" b="1" dirty="0">
+                    <a:solidFill>
+                      <a:schemeClr val="accent2"/>
+                    </a:solidFill>
+                  </a:rPr>
+                  <a:t> </a:t>
+                </a:r>
+                <a:r>
+                  <a:rPr lang="en-US" altLang="zh-CN" b="1" dirty="0">
+                    <a:sym typeface="Wingdings" panose="05000000000000000000" pitchFamily="2" charset="2"/>
+                  </a:rPr>
+                  <a:t> </a:t>
+                </a:r>
+                <a:r>
+                  <a:rPr lang="zh-CN" altLang="en-US" b="1" dirty="0">
+                    <a:sym typeface="Wingdings" panose="05000000000000000000" pitchFamily="2" charset="2"/>
+                  </a:rPr>
+                  <a:t>简并码 </a:t>
+                </a:r>
+                <a:r>
+                  <a:rPr lang="en-US" altLang="zh-CN" b="1" dirty="0">
+                    <a:sym typeface="Wingdings" panose="05000000000000000000" pitchFamily="2" charset="2"/>
+                  </a:rPr>
+                  <a:t>(Shor</a:t>
+                </a:r>
+                <a:r>
+                  <a:rPr lang="zh-CN" altLang="en-US" b="1" dirty="0">
+                    <a:sym typeface="Wingdings" panose="05000000000000000000" pitchFamily="2" charset="2"/>
+                  </a:rPr>
+                  <a:t>码</a:t>
+                </a:r>
+                <a:r>
+                  <a:rPr lang="en-US" altLang="zh-CN" b="1" dirty="0">
+                    <a:sym typeface="Wingdings" panose="05000000000000000000" pitchFamily="2" charset="2"/>
+                  </a:rPr>
+                  <a:t>)</a:t>
+                </a:r>
+                <a:endParaRPr lang="en-US" altLang="zh-CN" b="1" dirty="0"/>
+              </a:p>
+              <a:p>
+                <a:r>
+                  <a:rPr lang="en-US" altLang="zh-CN" b="1" dirty="0"/>
+                  <a:t>      </a:t>
+                </a:r>
+              </a:p>
+              <a:p>
+                <a:r>
+                  <a:rPr lang="en-US" altLang="zh-CN" b="1" dirty="0"/>
+                  <a:t>  </a:t>
+                </a:r>
+              </a:p>
+            </p:txBody>
+          </p:sp>
+        </mc:Choice>
+        <mc:Fallback xmlns="">
+          <p:sp>
+            <p:nvSpPr>
+              <p:cNvPr id="16" name="文本框 15">
+                <a:extLst>
+                  <a:ext uri="{FF2B5EF4-FFF2-40B4-BE49-F238E27FC236}">
+                    <a16:creationId xmlns:a16="http://schemas.microsoft.com/office/drawing/2014/main" id="{A5466041-96C6-68C5-21B0-73743B2D07C3}"/>
+                  </a:ext>
+                </a:extLst>
+              </p:cNvPr>
+              <p:cNvSpPr txBox="1">
+                <a:spLocks noRot="1" noChangeAspect="1" noMove="1" noResize="1" noEditPoints="1" noAdjustHandles="1" noChangeArrowheads="1" noChangeShapeType="1" noTextEdit="1"/>
+              </p:cNvSpPr>
+              <p:nvPr/>
+            </p:nvSpPr>
+            <p:spPr>
+              <a:xfrm>
+                <a:off x="489732" y="2350397"/>
+                <a:ext cx="6950773" cy="2862322"/>
+              </a:xfrm>
+              <a:prstGeom prst="rect">
+                <a:avLst/>
+              </a:prstGeom>
+              <a:blipFill>
+                <a:blip r:embed="rId3"/>
+                <a:stretch>
+                  <a:fillRect l="-438" t="-1279"/>
+                </a:stretch>
+              </a:blipFill>
+            </p:spPr>
+            <p:txBody>
+              <a:bodyPr/>
+              <a:lstStyle/>
+              <a:p>
+                <a:r>
+                  <a:rPr lang="zh-CN" altLang="en-US">
+                    <a:noFill/>
+                  </a:rPr>
+                  <a:t> </a:t>
+                </a:r>
+              </a:p>
+            </p:txBody>
+          </p:sp>
+        </mc:Fallback>
+      </mc:AlternateContent>
+      <p:pic>
+        <p:nvPicPr>
+          <p:cNvPr id="8" name="图片 7">
+            <a:extLst>
+              <a:ext uri="{FF2B5EF4-FFF2-40B4-BE49-F238E27FC236}">
+                <a16:creationId xmlns:a16="http://schemas.microsoft.com/office/drawing/2014/main" id="{8ECF971E-F576-23BE-3AAA-04CB09942F83}"/>
+              </a:ext>
+            </a:extLst>
+          </p:cNvPr>
+          <p:cNvPicPr>
+            <a:picLocks noChangeAspect="1"/>
+          </p:cNvPicPr>
+          <p:nvPr/>
+        </p:nvPicPr>
+        <p:blipFill>
+          <a:blip r:embed="rId4"/>
+          <a:stretch>
+            <a:fillRect/>
+          </a:stretch>
+        </p:blipFill>
+        <p:spPr>
+          <a:xfrm>
+            <a:off x="7856474" y="2181509"/>
+            <a:ext cx="3849549" cy="847735"/>
+          </a:xfrm>
+          <a:prstGeom prst="rect">
+            <a:avLst/>
+          </a:prstGeom>
+        </p:spPr>
+      </p:pic>
+      <p:pic>
+        <p:nvPicPr>
+          <p:cNvPr id="9" name="图片 8">
+            <a:extLst>
+              <a:ext uri="{FF2B5EF4-FFF2-40B4-BE49-F238E27FC236}">
+                <a16:creationId xmlns:a16="http://schemas.microsoft.com/office/drawing/2014/main" id="{95CC13A0-D303-39F0-0A5A-260E0B505E79}"/>
+              </a:ext>
+            </a:extLst>
+          </p:cNvPr>
+          <p:cNvPicPr>
+            <a:picLocks noChangeAspect="1"/>
+          </p:cNvPicPr>
+          <p:nvPr/>
+        </p:nvPicPr>
+        <p:blipFill>
+          <a:blip r:embed="rId5"/>
+          <a:stretch>
+            <a:fillRect/>
+          </a:stretch>
+        </p:blipFill>
+        <p:spPr>
+          <a:xfrm>
+            <a:off x="7928885" y="1882515"/>
+            <a:ext cx="3799565" cy="371985"/>
+          </a:xfrm>
+          <a:prstGeom prst="rect">
+            <a:avLst/>
+          </a:prstGeom>
+        </p:spPr>
+      </p:pic>
+      <p:pic>
+        <p:nvPicPr>
+          <p:cNvPr id="10" name="图片 9">
+            <a:extLst>
+              <a:ext uri="{FF2B5EF4-FFF2-40B4-BE49-F238E27FC236}">
+                <a16:creationId xmlns:a16="http://schemas.microsoft.com/office/drawing/2014/main" id="{EA1BEF77-EDDF-CBA7-9E02-EB00D5991108}"/>
+              </a:ext>
+            </a:extLst>
+          </p:cNvPr>
+          <p:cNvPicPr>
+            <a:picLocks noChangeAspect="1"/>
+          </p:cNvPicPr>
+          <p:nvPr/>
+        </p:nvPicPr>
+        <p:blipFill>
+          <a:blip r:embed="rId6"/>
+          <a:stretch>
+            <a:fillRect/>
+          </a:stretch>
+        </p:blipFill>
+        <p:spPr>
+          <a:xfrm>
+            <a:off x="9116933" y="1225550"/>
+            <a:ext cx="1318931" cy="469900"/>
+          </a:xfrm>
+          <a:prstGeom prst="rect">
+            <a:avLst/>
+          </a:prstGeom>
+        </p:spPr>
+      </p:pic>
+      <p:pic>
+        <p:nvPicPr>
+          <p:cNvPr id="11" name="图片 10">
+            <a:extLst>
+              <a:ext uri="{FF2B5EF4-FFF2-40B4-BE49-F238E27FC236}">
+                <a16:creationId xmlns:a16="http://schemas.microsoft.com/office/drawing/2014/main" id="{4DE4D9D9-5854-BE03-FBDF-62EC6EA6B0BA}"/>
+              </a:ext>
+            </a:extLst>
+          </p:cNvPr>
+          <p:cNvPicPr>
+            <a:picLocks noChangeAspect="1"/>
+          </p:cNvPicPr>
+          <p:nvPr/>
+        </p:nvPicPr>
+        <p:blipFill>
+          <a:blip r:embed="rId7"/>
+          <a:stretch>
+            <a:fillRect/>
+          </a:stretch>
+        </p:blipFill>
+        <p:spPr>
+          <a:xfrm>
+            <a:off x="8163711" y="4352142"/>
+            <a:ext cx="3251244" cy="406406"/>
+          </a:xfrm>
+          <a:prstGeom prst="rect">
+            <a:avLst/>
+          </a:prstGeom>
+        </p:spPr>
+      </p:pic>
+      <p:pic>
+        <p:nvPicPr>
+          <p:cNvPr id="12" name="图片 11">
+            <a:extLst>
+              <a:ext uri="{FF2B5EF4-FFF2-40B4-BE49-F238E27FC236}">
+                <a16:creationId xmlns:a16="http://schemas.microsoft.com/office/drawing/2014/main" id="{9B5EF09A-FBCA-B0BB-1D58-CA253755907E}"/>
+              </a:ext>
+            </a:extLst>
+          </p:cNvPr>
+          <p:cNvPicPr>
+            <a:picLocks noChangeAspect="1"/>
+          </p:cNvPicPr>
+          <p:nvPr/>
+        </p:nvPicPr>
+        <p:blipFill>
+          <a:blip r:embed="rId8"/>
+          <a:stretch>
+            <a:fillRect/>
+          </a:stretch>
+        </p:blipFill>
+        <p:spPr>
+          <a:xfrm>
+            <a:off x="7657720" y="4771243"/>
+            <a:ext cx="4211265" cy="752484"/>
+          </a:xfrm>
+          <a:prstGeom prst="rect">
+            <a:avLst/>
+          </a:prstGeom>
+        </p:spPr>
+      </p:pic>
+      <p:pic>
+        <p:nvPicPr>
+          <p:cNvPr id="13" name="图片 12">
+            <a:extLst>
+              <a:ext uri="{FF2B5EF4-FFF2-40B4-BE49-F238E27FC236}">
+                <a16:creationId xmlns:a16="http://schemas.microsoft.com/office/drawing/2014/main" id="{6D36917A-53FE-0A80-D14A-58B192098191}"/>
+              </a:ext>
+            </a:extLst>
+          </p:cNvPr>
+          <p:cNvPicPr>
+            <a:picLocks noChangeAspect="1"/>
+          </p:cNvPicPr>
+          <p:nvPr/>
+        </p:nvPicPr>
+        <p:blipFill>
+          <a:blip r:embed="rId9"/>
+          <a:stretch>
+            <a:fillRect/>
+          </a:stretch>
+        </p:blipFill>
+        <p:spPr>
+          <a:xfrm>
+            <a:off x="7673571" y="5501458"/>
+            <a:ext cx="4306487" cy="444541"/>
+          </a:xfrm>
+          <a:prstGeom prst="rect">
+            <a:avLst/>
+          </a:prstGeom>
+        </p:spPr>
+      </p:pic>
+      <p:sp>
+        <p:nvSpPr>
+          <p:cNvPr id="15" name="文本框 14">
+            <a:extLst>
+              <a:ext uri="{FF2B5EF4-FFF2-40B4-BE49-F238E27FC236}">
+                <a16:creationId xmlns:a16="http://schemas.microsoft.com/office/drawing/2014/main" id="{49F4DBF7-2298-17E3-158B-CFA07E1589A8}"/>
               </a:ext>
             </a:extLst>
           </p:cNvPr>
@@ -25718,8 +25408,8 @@
         </p:nvSpPr>
         <p:spPr>
           <a:xfrm>
-            <a:off x="489732" y="2350397"/>
-            <a:ext cx="6950773" cy="646331"/>
+            <a:off x="7631380" y="1168131"/>
+            <a:ext cx="6095010" cy="369332"/>
           </a:xfrm>
           <a:prstGeom prst="rect">
             <a:avLst/>
@@ -25733,23 +25423,69 @@
           <a:lstStyle/>
           <a:p>
             <a:r>
-              <a:rPr lang="zh-CN" altLang="en-US" b="1" dirty="0"/>
-              <a:t>距离</a:t>
-            </a:r>
-            <a:endParaRPr lang="en-US" altLang="zh-CN" b="1" dirty="0"/>
-          </a:p>
-          <a:p>
-            <a:r>
-              <a:rPr lang="en-US" altLang="zh-CN" b="1" dirty="0"/>
-              <a:t>  </a:t>
-            </a:r>
+              <a:rPr lang="zh-CN" altLang="en-US" b="1" dirty="0">
+                <a:solidFill>
+                  <a:schemeClr val="accent2"/>
+                </a:solidFill>
+              </a:rPr>
+              <a:t>充分条件</a:t>
+            </a:r>
+            <a:endParaRPr lang="zh-CN" altLang="en-US" dirty="0"/>
+          </a:p>
+        </p:txBody>
+      </p:sp>
+      <p:sp>
+        <p:nvSpPr>
+          <p:cNvPr id="18" name="文本框 17">
+            <a:extLst>
+              <a:ext uri="{FF2B5EF4-FFF2-40B4-BE49-F238E27FC236}">
+                <a16:creationId xmlns:a16="http://schemas.microsoft.com/office/drawing/2014/main" id="{412C3995-78E8-0688-2AD4-FAC338FD2F4A}"/>
+              </a:ext>
+            </a:extLst>
+          </p:cNvPr>
+          <p:cNvSpPr txBox="1"/>
+          <p:nvPr/>
+        </p:nvSpPr>
+        <p:spPr>
+          <a:xfrm>
+            <a:off x="7628579" y="4014240"/>
+            <a:ext cx="6864054" cy="369332"/>
+          </a:xfrm>
+          <a:prstGeom prst="rect">
+            <a:avLst/>
+          </a:prstGeom>
+          <a:noFill/>
+        </p:spPr>
+        <p:txBody>
+          <a:bodyPr wrap="square">
+            <a:spAutoFit/>
+          </a:bodyPr>
+          <a:lstStyle/>
+          <a:p>
+            <a:r>
+              <a:rPr lang="en-US" altLang="zh-CN" b="1" dirty="0">
+                <a:solidFill>
+                  <a:schemeClr val="accent2"/>
+                </a:solidFill>
+              </a:rPr>
+              <a:t>QECC</a:t>
+            </a:r>
+            <a:r>
+              <a:rPr lang="zh-CN" altLang="en-US" b="1" dirty="0">
+                <a:solidFill>
+                  <a:schemeClr val="accent2"/>
+                </a:solidFill>
+              </a:rPr>
+              <a:t>条件</a:t>
+            </a:r>
+            <a:endParaRPr lang="zh-CN" altLang="en-US" dirty="0"/>
           </a:p>
         </p:txBody>
       </p:sp>
     </p:spTree>
     <p:extLst>
       <p:ext uri="{BB962C8B-B14F-4D97-AF65-F5344CB8AC3E}">
-        <p14:creationId xmlns:p14="http://schemas.microsoft.com/office/powerpoint/2010/main" val="2154777214"/>
+        <p14:creationId xmlns:p14="http://schemas.microsoft.com/office/powerpoint/2010/main" val="2904569203"/>
       </p:ext>
     </p:extLst>
   </p:cSld>
@@ -25779,7 +25515,7 @@
         <p:cNvPr id="1" name="">
           <a:extLst>
             <a:ext uri="{FF2B5EF4-FFF2-40B4-BE49-F238E27FC236}">
-              <a16:creationId xmlns:a16="http://schemas.microsoft.com/office/drawing/2014/main" id="{7EC3F847-ED78-C1AF-30CF-7C85A86D57D8}"/>
+              <a16:creationId xmlns:a16="http://schemas.microsoft.com/office/drawing/2014/main" id="{ADF96FC6-6E27-B2C1-CC7B-28C3FBDD090F}"/>
             </a:ext>
           </a:extLst>
         </p:cNvPr>
@@ -25799,7 +25535,7 @@
           <p:cNvPr id="2" name="AutoShape 2">
             <a:extLst>
               <a:ext uri="{FF2B5EF4-FFF2-40B4-BE49-F238E27FC236}">
-                <a16:creationId xmlns:a16="http://schemas.microsoft.com/office/drawing/2014/main" id="{5B3F8E78-4444-08AC-22A4-2912BB84D57C}"/>
+                <a16:creationId xmlns:a16="http://schemas.microsoft.com/office/drawing/2014/main" id="{FC2EAC1C-3519-8F89-11C4-84642ABA2F1C}"/>
               </a:ext>
             </a:extLst>
           </p:cNvPr>
@@ -25825,77 +25561,60 @@
           <a:bodyPr vert="horz" wrap="square" lIns="0" tIns="0" rIns="0" bIns="0" rtlCol="0" anchor="ctr" anchorCtr="0"/>
           <a:lstStyle/>
           <a:p>
-            <a:pPr>
-              <a:lnSpc>
-                <a:spcPct val="125000"/>
-              </a:lnSpc>
-              <a:defRPr/>
-            </a:pPr>
-            <a:r>
-              <a:rPr lang="en-US" sz="3200" b="1" i="0" u="none" strike="noStrike" dirty="0">
-                <a:solidFill>
-                  <a:srgbClr val="333333"/>
-                </a:solidFill>
-                <a:latin typeface="Noto Sans SC"/>
-                <a:ea typeface="Noto Sans SC"/>
-                <a:cs typeface="Noto Sans SC"/>
-                <a:sym typeface="Noto Sans SC"/>
-              </a:rPr>
-              <a:t>03 </a:t>
-            </a:r>
-            <a:r>
-              <a:rPr lang="zh-CN" altLang="en-US" sz="3200" b="1" i="0" u="none" strike="noStrike" dirty="0">
-                <a:solidFill>
-                  <a:srgbClr val="333333"/>
-                </a:solidFill>
-                <a:latin typeface="Noto Sans SC"/>
-                <a:ea typeface="Noto Sans SC"/>
-                <a:cs typeface="Noto Sans SC"/>
-                <a:sym typeface="Noto Sans SC"/>
-              </a:rPr>
-              <a:t>稳定子</a:t>
-            </a:r>
-            <a:endParaRPr lang="en-US" sz="1100" dirty="0"/>
-          </a:p>
-        </p:txBody>
-      </p:sp>
-      <p:sp>
-        <p:nvSpPr>
-          <p:cNvPr id="3" name="AutoShape 3">
-            <a:extLst>
-              <a:ext uri="{FF2B5EF4-FFF2-40B4-BE49-F238E27FC236}">
-                <a16:creationId xmlns:a16="http://schemas.microsoft.com/office/drawing/2014/main" id="{0A45A18E-24F4-1D12-28F2-DB8E04D34DC1}"/>
-              </a:ext>
-            </a:extLst>
-          </p:cNvPr>
-          <p:cNvSpPr/>
-          <p:nvPr/>
-        </p:nvSpPr>
-        <p:spPr>
-          <a:xfrm>
-            <a:off x="762000" y="1651000"/>
-            <a:ext cx="10668000" cy="508000"/>
-          </a:xfrm>
-          <a:prstGeom prst="rect">
-            <a:avLst/>
-          </a:prstGeom>
-          <a:noFill/>
-          <a:ln w="12700" cap="flat" cmpd="sng">
-            <a:noFill/>
-            <a:prstDash val="solid"/>
-            <a:round/>
-          </a:ln>
-        </p:spPr>
-        <p:txBody>
-          <a:bodyPr vert="horz" wrap="square" lIns="0" tIns="0" rIns="0" bIns="0" rtlCol="0" anchor="ctr" anchorCtr="0"/>
-          <a:lstStyle/>
-          <a:p>
             <a:pPr indent="0" algn="l">
               <a:lnSpc>
                 <a:spcPct val="125000"/>
               </a:lnSpc>
               <a:defRPr/>
             </a:pPr>
+            <a:r>
+              <a:rPr lang="en-US" sz="3200" b="1" i="0" u="none" strike="noStrike" dirty="0">
+                <a:solidFill>
+                  <a:srgbClr val="333333"/>
+                </a:solidFill>
+                <a:latin typeface="Noto Sans SC"/>
+                <a:ea typeface="Noto Sans SC"/>
+                <a:cs typeface="Noto Sans SC"/>
+                <a:sym typeface="Noto Sans SC"/>
+              </a:rPr>
+              <a:t>0</a:t>
+            </a:r>
+            <a:r>
+              <a:rPr lang="en-US" sz="3200" b="1" dirty="0">
+                <a:solidFill>
+                  <a:srgbClr val="333333"/>
+                </a:solidFill>
+                <a:latin typeface="Noto Sans SC"/>
+                <a:ea typeface="Noto Sans SC"/>
+                <a:cs typeface="Noto Sans SC"/>
+                <a:sym typeface="Noto Sans SC"/>
+              </a:rPr>
+              <a:t>4</a:t>
+            </a:r>
+            <a:r>
+              <a:rPr lang="en-US" sz="3200" b="1" i="0" u="none" strike="noStrike" dirty="0">
+                <a:solidFill>
+                  <a:srgbClr val="333333"/>
+                </a:solidFill>
+                <a:latin typeface="Noto Sans SC"/>
+                <a:ea typeface="Noto Sans SC"/>
+                <a:cs typeface="Noto Sans SC"/>
+                <a:sym typeface="Noto Sans SC"/>
+              </a:rPr>
+              <a:t>  </a:t>
+            </a:r>
+            <a:r>
+              <a:rPr lang="zh-CN" altLang="en-US" sz="3200" b="1" i="0" u="none" strike="noStrike" dirty="0">
+                <a:solidFill>
+                  <a:srgbClr val="333333"/>
+                </a:solidFill>
+                <a:latin typeface="Noto Sans SC"/>
+                <a:ea typeface="Noto Sans SC"/>
+                <a:cs typeface="Noto Sans SC"/>
+                <a:sym typeface="Noto Sans SC"/>
+              </a:rPr>
+              <a:t>稳定子</a:t>
+            </a:r>
             <a:endParaRPr lang="en-US" sz="1100" dirty="0"/>
           </a:p>
         </p:txBody>
@@ -25905,7 +25624,7 @@
           <p:cNvPr id="4" name="直接连接符 3">
             <a:extLst>
               <a:ext uri="{FF2B5EF4-FFF2-40B4-BE49-F238E27FC236}">
-                <a16:creationId xmlns:a16="http://schemas.microsoft.com/office/drawing/2014/main" id="{22B006EE-A168-F996-81B7-61D9C60F98D0}"/>
+                <a16:creationId xmlns:a16="http://schemas.microsoft.com/office/drawing/2014/main" id="{345B3228-6DCD-D4D0-4095-CA90D8C3F4E7}"/>
               </a:ext>
             </a:extLst>
           </p:cNvPr>
@@ -25947,10 +25666,10 @@
       </p:cxnSp>
       <p:sp>
         <p:nvSpPr>
-          <p:cNvPr id="10" name="AutoShape 3">
-            <a:extLst>
-              <a:ext uri="{FF2B5EF4-FFF2-40B4-BE49-F238E27FC236}">
-                <a16:creationId xmlns:a16="http://schemas.microsoft.com/office/drawing/2014/main" id="{35FE90DB-96F3-7BB8-6E40-4780EA334F23}"/>
+          <p:cNvPr id="3" name="AutoShape 3">
+            <a:extLst>
+              <a:ext uri="{FF2B5EF4-FFF2-40B4-BE49-F238E27FC236}">
+                <a16:creationId xmlns:a16="http://schemas.microsoft.com/office/drawing/2014/main" id="{955AC964-B623-591D-E75A-9F0C2991029A}"/>
               </a:ext>
             </a:extLst>
           </p:cNvPr>
@@ -25959,8 +25678,8 @@
         </p:nvSpPr>
         <p:spPr>
           <a:xfrm>
-            <a:off x="914400" y="1565893"/>
-            <a:ext cx="6068291" cy="4223327"/>
+            <a:off x="762000" y="1651000"/>
+            <a:ext cx="10668000" cy="508000"/>
           </a:xfrm>
           <a:prstGeom prst="rect">
             <a:avLst/>
@@ -25983,6 +25702,18 @@
               <a:defRPr/>
             </a:pPr>
             <a:r>
+              <a:rPr lang="en-US" altLang="zh-CN" sz="2200" b="1" dirty="0">
+                <a:solidFill>
+                  <a:srgbClr val="555555"/>
+                </a:solidFill>
+                <a:latin typeface="Noto Sans SC"/>
+                <a:ea typeface="Noto Sans SC"/>
+                <a:cs typeface="Noto Sans SC"/>
+                <a:sym typeface="Noto Sans SC"/>
+              </a:rPr>
+              <a:t>4.3 </a:t>
+            </a:r>
+            <a:r>
               <a:rPr lang="zh-CN" altLang="en-US" sz="2200" b="1" dirty="0">
                 <a:solidFill>
                   <a:srgbClr val="555555"/>
@@ -25992,7 +25723,7 @@
                 <a:cs typeface="Noto Sans SC"/>
                 <a:sym typeface="Noto Sans SC"/>
               </a:rPr>
-              <a:t>在</a:t>
+              <a:t>量子纠错的条件</a:t>
             </a:r>
             <a:r>
               <a:rPr lang="en-US" altLang="zh-CN" sz="2200" b="1" dirty="0">
@@ -26004,233 +25735,810 @@
                 <a:cs typeface="Noto Sans SC"/>
                 <a:sym typeface="Noto Sans SC"/>
               </a:rPr>
-              <a:t>02</a:t>
-            </a:r>
-            <a:r>
-              <a:rPr lang="zh-CN" altLang="en-US" sz="2200" b="1" dirty="0">
-                <a:solidFill>
-                  <a:srgbClr val="555555"/>
-                </a:solidFill>
-                <a:latin typeface="Noto Sans SC"/>
-                <a:ea typeface="Noto Sans SC"/>
-                <a:cs typeface="Noto Sans SC"/>
-                <a:sym typeface="Noto Sans SC"/>
-              </a:rPr>
-              <a:t>章节中我们</a:t>
-            </a:r>
-            <a:endParaRPr lang="en-US" altLang="zh-CN" sz="2200" b="1" dirty="0">
+              <a:t> </a:t>
+            </a:r>
+            <a:endParaRPr lang="en-US" sz="1100" dirty="0"/>
+          </a:p>
+        </p:txBody>
+      </p:sp>
+      <p:sp>
+        <p:nvSpPr>
+          <p:cNvPr id="16" name="文本框 15">
+            <a:extLst>
+              <a:ext uri="{FF2B5EF4-FFF2-40B4-BE49-F238E27FC236}">
+                <a16:creationId xmlns:a16="http://schemas.microsoft.com/office/drawing/2014/main" id="{46AFF781-BA10-C302-7D9A-37FEC606E913}"/>
+              </a:ext>
+            </a:extLst>
+          </p:cNvPr>
+          <p:cNvSpPr txBox="1"/>
+          <p:nvPr/>
+        </p:nvSpPr>
+        <p:spPr>
+          <a:xfrm>
+            <a:off x="489732" y="2350397"/>
+            <a:ext cx="6950773" cy="3693319"/>
+          </a:xfrm>
+          <a:prstGeom prst="rect">
+            <a:avLst/>
+          </a:prstGeom>
+          <a:noFill/>
+        </p:spPr>
+        <p:txBody>
+          <a:bodyPr wrap="square">
+            <a:spAutoFit/>
+          </a:bodyPr>
+          <a:lstStyle/>
+          <a:p>
+            <a:r>
+              <a:rPr lang="zh-CN" altLang="en-US" b="1" dirty="0"/>
+              <a:t>权</a:t>
+            </a:r>
+            <a:r>
+              <a:rPr lang="en-US" altLang="zh-CN" b="1" dirty="0"/>
+              <a:t>(weight)</a:t>
+            </a:r>
+          </a:p>
+          <a:p>
+            <a:endParaRPr lang="en-US" altLang="zh-CN" b="1" dirty="0"/>
+          </a:p>
+          <a:p>
+            <a:r>
+              <a:rPr lang="zh-CN" altLang="en-US" b="1" dirty="0"/>
+              <a:t>  指一个错误算子</a:t>
+            </a:r>
+            <a:r>
+              <a:rPr lang="en-US" altLang="zh-CN" b="1" dirty="0"/>
+              <a:t>(</a:t>
+            </a:r>
+            <a:r>
+              <a:rPr lang="zh-CN" altLang="en-US" b="1" dirty="0"/>
+              <a:t>通常是 </a:t>
+            </a:r>
+            <a:r>
+              <a:rPr lang="en-US" altLang="zh-CN" b="1" dirty="0"/>
+              <a:t>Pauli </a:t>
+            </a:r>
+            <a:r>
+              <a:rPr lang="zh-CN" altLang="en-US" b="1" dirty="0"/>
+              <a:t>算子</a:t>
+            </a:r>
+            <a:r>
+              <a:rPr lang="en-US" altLang="zh-CN" b="1" dirty="0"/>
+              <a:t>)</a:t>
+            </a:r>
+            <a:r>
+              <a:rPr lang="zh-CN" altLang="en-US" b="1" dirty="0">
+                <a:solidFill>
+                  <a:schemeClr val="accent2"/>
+                </a:solidFill>
+              </a:rPr>
+              <a:t>非平凡作用</a:t>
+            </a:r>
+            <a:r>
+              <a:rPr lang="zh-CN" altLang="en-US" b="1" dirty="0"/>
+              <a:t>的量子比特个数</a:t>
+            </a:r>
+            <a:endParaRPr lang="en-US" altLang="zh-CN" b="1" dirty="0"/>
+          </a:p>
+          <a:p>
+            <a:endParaRPr lang="en-US" altLang="zh-CN" b="1" dirty="0"/>
+          </a:p>
+          <a:p>
+            <a:r>
+              <a:rPr lang="zh-CN" altLang="en-US" b="1" dirty="0"/>
+              <a:t>距离</a:t>
+            </a:r>
+            <a:r>
+              <a:rPr lang="en-US" altLang="zh-CN" b="1" dirty="0"/>
+              <a:t>(distance)</a:t>
+            </a:r>
+          </a:p>
+          <a:p>
+            <a:endParaRPr lang="en-US" altLang="zh-CN" b="1" dirty="0"/>
+          </a:p>
+          <a:p>
+            <a:r>
+              <a:rPr lang="zh-CN" altLang="en-US" b="1" dirty="0"/>
+              <a:t>  </a:t>
+            </a:r>
+            <a:r>
+              <a:rPr lang="zh-CN" altLang="en-US" b="1" dirty="0">
+                <a:solidFill>
+                  <a:schemeClr val="accent2"/>
+                </a:solidFill>
+              </a:rPr>
+              <a:t>无法满足</a:t>
+            </a:r>
+            <a:r>
+              <a:rPr lang="en-US" altLang="zh-CN" b="1" dirty="0">
+                <a:solidFill>
+                  <a:schemeClr val="accent2"/>
+                </a:solidFill>
+              </a:rPr>
+              <a:t>QECC</a:t>
+            </a:r>
+            <a:r>
+              <a:rPr lang="zh-CN" altLang="en-US" b="1" dirty="0">
+                <a:solidFill>
+                  <a:schemeClr val="accent2"/>
+                </a:solidFill>
+              </a:rPr>
+              <a:t>条件</a:t>
+            </a:r>
+            <a:r>
+              <a:rPr lang="zh-CN" altLang="en-US" b="1" dirty="0"/>
+              <a:t>的</a:t>
+            </a:r>
+            <a:r>
+              <a:rPr lang="zh-CN" altLang="en-US" b="1" dirty="0">
+                <a:solidFill>
+                  <a:schemeClr val="accent2"/>
+                </a:solidFill>
+              </a:rPr>
+              <a:t>错误组合</a:t>
+            </a:r>
+            <a:r>
+              <a:rPr lang="zh-CN" altLang="en-US" b="1" dirty="0"/>
+              <a:t>的</a:t>
+            </a:r>
+            <a:r>
+              <a:rPr lang="zh-CN" altLang="en-US" b="1" dirty="0">
+                <a:solidFill>
+                  <a:schemeClr val="accent2"/>
+                </a:solidFill>
+              </a:rPr>
+              <a:t>最小的的权值</a:t>
+            </a:r>
+            <a:endParaRPr lang="en-US" altLang="zh-CN" b="1" dirty="0">
               <a:solidFill>
-                <a:srgbClr val="555555"/>
+                <a:schemeClr val="accent2"/>
               </a:solidFill>
-              <a:latin typeface="Noto Sans SC"/>
-              <a:ea typeface="Noto Sans SC"/>
-              <a:cs typeface="Noto Sans SC"/>
-              <a:sym typeface="Noto Sans SC"/>
             </a:endParaRPr>
           </a:p>
           <a:p>
-            <a:pPr indent="0" algn="l">
-              <a:lnSpc>
-                <a:spcPct val="125000"/>
-              </a:lnSpc>
-              <a:defRPr/>
-            </a:pPr>
-            <a:r>
-              <a:rPr lang="zh-CN" altLang="en-US" sz="2200" b="1" dirty="0">
-                <a:solidFill>
-                  <a:srgbClr val="555555"/>
-                </a:solidFill>
-                <a:latin typeface="Noto Sans SC"/>
-                <a:ea typeface="Noto Sans SC"/>
-                <a:cs typeface="Noto Sans SC"/>
-                <a:sym typeface="Noto Sans SC"/>
-              </a:rPr>
-              <a:t>在</a:t>
-            </a:r>
-            <a:r>
-              <a:rPr lang="zh-CN" altLang="en-US" sz="2200" b="1" dirty="0">
+            <a:endParaRPr lang="en-US" altLang="zh-CN" b="1" dirty="0">
+              <a:solidFill>
+                <a:schemeClr val="accent2"/>
+              </a:solidFill>
+            </a:endParaRPr>
+          </a:p>
+          <a:p>
+            <a:r>
+              <a:rPr lang="zh-CN" altLang="en-US" b="1" dirty="0"/>
+              <a:t>定理 </a:t>
+            </a:r>
+            <a:r>
+              <a:rPr lang="en-US" altLang="zh-CN" b="1" dirty="0"/>
+              <a:t>1</a:t>
+            </a:r>
+          </a:p>
+          <a:p>
+            <a:endParaRPr lang="en-US" altLang="zh-CN" b="1" dirty="0">
+              <a:solidFill>
+                <a:schemeClr val="accent2"/>
+              </a:solidFill>
+            </a:endParaRPr>
+          </a:p>
+          <a:p>
+            <a:r>
+              <a:rPr lang="en-US" altLang="zh-CN" b="1" dirty="0">
                 <a:solidFill>
                   <a:schemeClr val="accent2"/>
                 </a:solidFill>
-                <a:latin typeface="Noto Sans SC"/>
-                <a:ea typeface="Noto Sans SC"/>
-                <a:cs typeface="Noto Sans SC"/>
-                <a:sym typeface="Noto Sans SC"/>
-              </a:rPr>
-              <a:t>实际电路框架</a:t>
-            </a:r>
-            <a:r>
-              <a:rPr lang="zh-CN" altLang="en-US" sz="2200" b="1" dirty="0">
-                <a:solidFill>
-                  <a:srgbClr val="555555"/>
-                </a:solidFill>
-                <a:latin typeface="Noto Sans SC"/>
-                <a:ea typeface="Noto Sans SC"/>
-                <a:cs typeface="Noto Sans SC"/>
-                <a:sym typeface="Noto Sans SC"/>
-              </a:rPr>
-              <a:t>下</a:t>
-            </a:r>
-            <a:endParaRPr lang="en-US" altLang="zh-CN" sz="2200" b="1" dirty="0">
+              </a:rPr>
+              <a:t>  </a:t>
+            </a:r>
+            <a:r>
+              <a:rPr lang="zh-CN" altLang="en-US" b="1" dirty="0"/>
+              <a:t>一个可以纠正所有</a:t>
+            </a:r>
+            <a:r>
+              <a:rPr lang="en-US" altLang="zh-CN" b="1" dirty="0">
+                <a:solidFill>
+                  <a:schemeClr val="accent2"/>
+                </a:solidFill>
+              </a:rPr>
+              <a:t>t</a:t>
+            </a:r>
+            <a:r>
+              <a:rPr lang="zh-CN" altLang="en-US" b="1" dirty="0">
+                <a:solidFill>
+                  <a:schemeClr val="accent2"/>
+                </a:solidFill>
+              </a:rPr>
+              <a:t>权值</a:t>
+            </a:r>
+            <a:r>
+              <a:rPr lang="zh-CN" altLang="en-US" b="1" dirty="0"/>
+              <a:t>错误的纠错码其</a:t>
+            </a:r>
+            <a:r>
+              <a:rPr lang="zh-CN" altLang="en-US" b="1" dirty="0">
+                <a:solidFill>
+                  <a:schemeClr val="accent2"/>
+                </a:solidFill>
+              </a:rPr>
+              <a:t>距离</a:t>
+            </a:r>
+            <a:r>
+              <a:rPr lang="en-US" altLang="zh-CN" b="1" dirty="0">
+                <a:solidFill>
+                  <a:schemeClr val="accent2"/>
+                </a:solidFill>
+              </a:rPr>
+              <a:t>d</a:t>
+            </a:r>
+            <a:r>
+              <a:rPr lang="zh-CN" altLang="en-US" b="1" dirty="0"/>
+              <a:t>至少为</a:t>
+            </a:r>
+            <a:r>
+              <a:rPr lang="en-US" altLang="zh-CN" b="1" dirty="0">
+                <a:solidFill>
+                  <a:schemeClr val="accent2"/>
+                </a:solidFill>
+              </a:rPr>
+              <a:t>2t+1</a:t>
+            </a:r>
+          </a:p>
+          <a:p>
+            <a:endParaRPr lang="en-US" altLang="zh-CN" b="1" dirty="0">
               <a:solidFill>
-                <a:srgbClr val="555555"/>
+                <a:schemeClr val="accent2"/>
               </a:solidFill>
-              <a:latin typeface="Noto Sans SC"/>
-              <a:ea typeface="Noto Sans SC"/>
-              <a:cs typeface="Noto Sans SC"/>
-              <a:sym typeface="Noto Sans SC"/>
             </a:endParaRPr>
           </a:p>
           <a:p>
-            <a:pPr indent="0" algn="l">
-              <a:lnSpc>
-                <a:spcPct val="125000"/>
-              </a:lnSpc>
-              <a:defRPr/>
-            </a:pPr>
-            <a:r>
-              <a:rPr lang="zh-CN" altLang="en-US" sz="2200" b="1" dirty="0">
-                <a:solidFill>
-                  <a:srgbClr val="555555"/>
-                </a:solidFill>
-                <a:latin typeface="Noto Sans SC"/>
-                <a:ea typeface="Noto Sans SC"/>
-                <a:cs typeface="Noto Sans SC"/>
-                <a:sym typeface="Noto Sans SC"/>
-              </a:rPr>
-              <a:t>讨论了简单的</a:t>
-            </a:r>
-            <a:r>
-              <a:rPr lang="en-US" altLang="zh-CN" sz="2200" b="1" dirty="0">
-                <a:solidFill>
-                  <a:srgbClr val="555555"/>
-                </a:solidFill>
-                <a:latin typeface="Noto Sans SC"/>
-                <a:ea typeface="Noto Sans SC"/>
-                <a:cs typeface="Noto Sans SC"/>
-                <a:sym typeface="Noto Sans SC"/>
-              </a:rPr>
-              <a:t>3 bit </a:t>
-            </a:r>
-            <a:r>
-              <a:rPr lang="zh-CN" altLang="en-US" sz="2200" b="1" dirty="0">
-                <a:solidFill>
-                  <a:srgbClr val="555555"/>
-                </a:solidFill>
-                <a:latin typeface="Noto Sans SC"/>
-                <a:ea typeface="Noto Sans SC"/>
-                <a:cs typeface="Noto Sans SC"/>
-                <a:sym typeface="Noto Sans SC"/>
-              </a:rPr>
-              <a:t>量子纠错码</a:t>
-            </a:r>
-            <a:endParaRPr lang="en-US" altLang="zh-CN" sz="2200" b="1" dirty="0">
+            <a:endParaRPr lang="en-US" altLang="zh-CN" b="1" dirty="0">
               <a:solidFill>
-                <a:srgbClr val="555555"/>
+                <a:schemeClr val="accent2"/>
               </a:solidFill>
-              <a:latin typeface="Noto Sans SC"/>
-              <a:ea typeface="Noto Sans SC"/>
-              <a:cs typeface="Noto Sans SC"/>
-              <a:sym typeface="Noto Sans SC"/>
             </a:endParaRPr>
           </a:p>
-          <a:p>
-            <a:pPr indent="0" algn="l">
-              <a:lnSpc>
-                <a:spcPct val="125000"/>
-              </a:lnSpc>
-              <a:defRPr/>
-            </a:pPr>
-            <a:r>
-              <a:rPr lang="zh-CN" altLang="en-US" sz="2200" b="1" dirty="0">
-                <a:solidFill>
-                  <a:srgbClr val="555555"/>
-                </a:solidFill>
-                <a:latin typeface="Noto Sans SC"/>
-                <a:ea typeface="Noto Sans SC"/>
-                <a:cs typeface="Noto Sans SC"/>
-                <a:sym typeface="Noto Sans SC"/>
-              </a:rPr>
-              <a:t>建立了直观的量子纠错过程的印象</a:t>
-            </a:r>
-            <a:endParaRPr lang="en-US" altLang="zh-CN" sz="2200" b="1" dirty="0">
-              <a:solidFill>
-                <a:srgbClr val="555555"/>
-              </a:solidFill>
-              <a:latin typeface="Noto Sans SC"/>
-              <a:ea typeface="Noto Sans SC"/>
-              <a:cs typeface="Noto Sans SC"/>
-              <a:sym typeface="Noto Sans SC"/>
-            </a:endParaRPr>
-          </a:p>
-          <a:p>
-            <a:pPr indent="0" algn="l">
-              <a:lnSpc>
-                <a:spcPct val="125000"/>
-              </a:lnSpc>
-              <a:defRPr/>
-            </a:pPr>
-            <a:endParaRPr lang="en-US" altLang="zh-CN" sz="2200" b="1" dirty="0">
-              <a:solidFill>
-                <a:srgbClr val="555555"/>
-              </a:solidFill>
-              <a:latin typeface="Noto Sans SC"/>
-              <a:ea typeface="Noto Sans SC"/>
-              <a:cs typeface="Noto Sans SC"/>
-              <a:sym typeface="Noto Sans SC"/>
-            </a:endParaRPr>
-          </a:p>
-          <a:p>
-            <a:pPr indent="0" algn="l">
-              <a:lnSpc>
-                <a:spcPct val="125000"/>
-              </a:lnSpc>
-              <a:defRPr/>
-            </a:pPr>
-            <a:r>
-              <a:rPr lang="zh-CN" altLang="en-US" sz="2200" b="1" dirty="0">
-                <a:solidFill>
-                  <a:srgbClr val="555555"/>
-                </a:solidFill>
-                <a:latin typeface="Noto Sans SC"/>
-                <a:ea typeface="Noto Sans SC"/>
-                <a:cs typeface="Noto Sans SC"/>
-                <a:sym typeface="Noto Sans SC"/>
-              </a:rPr>
-              <a:t>而本章节我们从</a:t>
-            </a:r>
-            <a:r>
-              <a:rPr lang="zh-CN" altLang="en-US" sz="2200" b="1" dirty="0">
-                <a:solidFill>
-                  <a:schemeClr val="accent2"/>
-                </a:solidFill>
-                <a:latin typeface="Noto Sans SC"/>
-                <a:ea typeface="Noto Sans SC"/>
-                <a:cs typeface="Noto Sans SC"/>
-                <a:sym typeface="Noto Sans SC"/>
-              </a:rPr>
-              <a:t>稳定子</a:t>
-            </a:r>
-            <a:r>
-              <a:rPr lang="zh-CN" altLang="en-US" sz="2200" b="1" dirty="0">
-                <a:solidFill>
-                  <a:srgbClr val="555555"/>
-                </a:solidFill>
-                <a:latin typeface="Noto Sans SC"/>
-                <a:ea typeface="Noto Sans SC"/>
-                <a:cs typeface="Noto Sans SC"/>
-                <a:sym typeface="Noto Sans SC"/>
-              </a:rPr>
-              <a:t>的视角重新看待量子纠错</a:t>
-            </a:r>
-            <a:endParaRPr lang="en-US" sz="1100" dirty="0"/>
-          </a:p>
-        </p:txBody>
-      </p:sp>
+        </p:txBody>
+      </p:sp>
+      <p:sp>
+        <p:nvSpPr>
+          <p:cNvPr id="6" name="文本框 5">
+            <a:extLst>
+              <a:ext uri="{FF2B5EF4-FFF2-40B4-BE49-F238E27FC236}">
+                <a16:creationId xmlns:a16="http://schemas.microsoft.com/office/drawing/2014/main" id="{7D1EB998-9C8E-0EB0-16C4-84A297BAC8B2}"/>
+              </a:ext>
+            </a:extLst>
+          </p:cNvPr>
+          <p:cNvSpPr txBox="1"/>
+          <p:nvPr/>
+        </p:nvSpPr>
+        <p:spPr>
+          <a:xfrm>
+            <a:off x="9144000" y="1688584"/>
+            <a:ext cx="6096000" cy="369332"/>
+          </a:xfrm>
+          <a:prstGeom prst="rect">
+            <a:avLst/>
+          </a:prstGeom>
+          <a:noFill/>
+        </p:spPr>
+        <p:txBody>
+          <a:bodyPr wrap="square">
+            <a:spAutoFit/>
+          </a:bodyPr>
+          <a:lstStyle/>
+          <a:p>
+            <a:r>
+              <a:rPr lang="zh-CN" altLang="en-US" b="1" dirty="0">
+                <a:latin typeface="Artifakt Element Black" panose="020B0A03050000020004" pitchFamily="34" charset="0"/>
+              </a:rPr>
+              <a:t> X⊗</a:t>
+            </a:r>
+            <a:r>
+              <a:rPr lang="en-US" altLang="zh-CN" b="1" dirty="0">
+                <a:latin typeface="Artifakt Element Black" panose="020B0A03050000020004" pitchFamily="34" charset="0"/>
+                <a:ea typeface="Artifakt Element Black" panose="020B0A03050000020004" pitchFamily="34" charset="0"/>
+              </a:rPr>
+              <a:t>I</a:t>
+            </a:r>
+            <a:r>
+              <a:rPr lang="zh-CN" altLang="en-US" b="1" dirty="0">
+                <a:latin typeface="Artifakt Element Black" panose="020B0A03050000020004" pitchFamily="34" charset="0"/>
+              </a:rPr>
+              <a:t>⊗X</a:t>
+            </a:r>
+          </a:p>
+        </p:txBody>
+      </p:sp>
+      <p:pic>
+        <p:nvPicPr>
+          <p:cNvPr id="8" name="图片 7">
+            <a:extLst>
+              <a:ext uri="{FF2B5EF4-FFF2-40B4-BE49-F238E27FC236}">
+                <a16:creationId xmlns:a16="http://schemas.microsoft.com/office/drawing/2014/main" id="{BBCECA69-1135-F136-1076-743D16B9E418}"/>
+              </a:ext>
+            </a:extLst>
+          </p:cNvPr>
+          <p:cNvPicPr>
+            <a:picLocks noChangeAspect="1"/>
+          </p:cNvPicPr>
+          <p:nvPr/>
+        </p:nvPicPr>
+        <p:blipFill>
+          <a:blip r:embed="rId3"/>
+          <a:stretch>
+            <a:fillRect/>
+          </a:stretch>
+        </p:blipFill>
+        <p:spPr>
+          <a:xfrm>
+            <a:off x="8494540" y="2260560"/>
+            <a:ext cx="2467319" cy="571580"/>
+          </a:xfrm>
+          <a:prstGeom prst="rect">
+            <a:avLst/>
+          </a:prstGeom>
+        </p:spPr>
+      </p:pic>
+      <p:pic>
+        <p:nvPicPr>
+          <p:cNvPr id="9" name="图片 8">
+            <a:extLst>
+              <a:ext uri="{FF2B5EF4-FFF2-40B4-BE49-F238E27FC236}">
+                <a16:creationId xmlns:a16="http://schemas.microsoft.com/office/drawing/2014/main" id="{58CA4376-F1F5-38D5-FAEF-E29F556A8E08}"/>
+              </a:ext>
+            </a:extLst>
+          </p:cNvPr>
+          <p:cNvPicPr>
+            <a:picLocks noChangeAspect="1"/>
+          </p:cNvPicPr>
+          <p:nvPr/>
+        </p:nvPicPr>
+        <p:blipFill>
+          <a:blip r:embed="rId4"/>
+          <a:stretch>
+            <a:fillRect/>
+          </a:stretch>
+        </p:blipFill>
+        <p:spPr>
+          <a:xfrm>
+            <a:off x="8163711" y="4091792"/>
+            <a:ext cx="3251244" cy="406406"/>
+          </a:xfrm>
+          <a:prstGeom prst="rect">
+            <a:avLst/>
+          </a:prstGeom>
+        </p:spPr>
+      </p:pic>
+      <p:pic>
+        <p:nvPicPr>
+          <p:cNvPr id="10" name="图片 9">
+            <a:extLst>
+              <a:ext uri="{FF2B5EF4-FFF2-40B4-BE49-F238E27FC236}">
+                <a16:creationId xmlns:a16="http://schemas.microsoft.com/office/drawing/2014/main" id="{4992DBA7-1C0A-283E-4665-71A9ACE2C533}"/>
+              </a:ext>
+            </a:extLst>
+          </p:cNvPr>
+          <p:cNvPicPr>
+            <a:picLocks noChangeAspect="1"/>
+          </p:cNvPicPr>
+          <p:nvPr/>
+        </p:nvPicPr>
+        <p:blipFill>
+          <a:blip r:embed="rId5"/>
+          <a:stretch>
+            <a:fillRect/>
+          </a:stretch>
+        </p:blipFill>
+        <p:spPr>
+          <a:xfrm>
+            <a:off x="7657720" y="4510893"/>
+            <a:ext cx="4211265" cy="752484"/>
+          </a:xfrm>
+          <a:prstGeom prst="rect">
+            <a:avLst/>
+          </a:prstGeom>
+        </p:spPr>
+      </p:pic>
+      <mc:AlternateContent xmlns:mc="http://schemas.openxmlformats.org/markup-compatibility/2006" xmlns:a14="http://schemas.microsoft.com/office/drawing/2010/main">
+        <mc:Choice Requires="a14">
+          <p:sp>
+            <p:nvSpPr>
+              <p:cNvPr id="11" name="文本框 10">
+                <a:extLst>
+                  <a:ext uri="{FF2B5EF4-FFF2-40B4-BE49-F238E27FC236}">
+                    <a16:creationId xmlns:a16="http://schemas.microsoft.com/office/drawing/2014/main" id="{D592E105-4BC0-17D8-D7FD-AA8F832AE901}"/>
+                  </a:ext>
+                </a:extLst>
+              </p:cNvPr>
+              <p:cNvSpPr txBox="1"/>
+              <p:nvPr/>
+            </p:nvSpPr>
+            <p:spPr>
+              <a:xfrm>
+                <a:off x="539750" y="5829300"/>
+                <a:ext cx="2297617" cy="661271"/>
+              </a:xfrm>
+              <a:prstGeom prst="rect">
+                <a:avLst/>
+              </a:prstGeom>
+              <a:noFill/>
+            </p:spPr>
+            <p:txBody>
+              <a:bodyPr wrap="none" lIns="0" tIns="0" rIns="0" bIns="0" rtlCol="0">
+                <a:spAutoFit/>
+              </a:bodyPr>
+              <a:lstStyle/>
+              <a:p>
+                <a:pPr/>
+                <a14:m>
+                  <m:oMathPara xmlns:m="http://schemas.openxmlformats.org/officeDocument/2006/math">
+                    <m:oMathParaPr>
+                      <m:jc m:val="centerGroup"/>
+                    </m:oMathParaPr>
+                    <m:oMath xmlns:m="http://schemas.openxmlformats.org/officeDocument/2006/math">
+                      <m:sSub>
+                        <m:sSubPr>
+                          <m:ctrlPr>
+                            <a:rPr lang="en-US" altLang="zh-CN" b="1" i="1" smtClean="0">
+                              <a:solidFill>
+                                <a:schemeClr val="accent2"/>
+                              </a:solidFill>
+                              <a:latin typeface="Cambria Math" panose="02040503050406030204" pitchFamily="18" charset="0"/>
+                            </a:rPr>
+                          </m:ctrlPr>
+                        </m:sSubPr>
+                        <m:e>
+                          <m:d>
+                            <m:dPr>
+                              <m:ctrlPr>
+                                <a:rPr lang="en-US" altLang="zh-CN" b="1" i="1" smtClean="0">
+                                  <a:solidFill>
+                                    <a:schemeClr val="accent2"/>
+                                  </a:solidFill>
+                                  <a:latin typeface="Cambria Math" panose="02040503050406030204" pitchFamily="18" charset="0"/>
+                                </a:rPr>
+                              </m:ctrlPr>
+                            </m:dPr>
+                            <m:e>
+                              <m:d>
+                                <m:dPr>
+                                  <m:ctrlPr>
+                                    <a:rPr lang="en-US" altLang="zh-CN" b="1" i="1" smtClean="0">
+                                      <a:solidFill>
+                                        <a:schemeClr val="accent2"/>
+                                      </a:solidFill>
+                                      <a:latin typeface="Cambria Math" panose="02040503050406030204" pitchFamily="18" charset="0"/>
+                                    </a:rPr>
+                                  </m:ctrlPr>
+                                </m:dPr>
+                                <m:e>
+                                  <m:r>
+                                    <a:rPr lang="en-US" altLang="zh-CN" b="1" i="1" smtClean="0">
+                                      <a:solidFill>
+                                        <a:schemeClr val="accent2"/>
+                                      </a:solidFill>
+                                      <a:latin typeface="Cambria Math" panose="02040503050406030204" pitchFamily="18" charset="0"/>
+                                    </a:rPr>
+                                    <m:t>𝒏</m:t>
+                                  </m:r>
+                                  <m:r>
+                                    <a:rPr lang="en-US" altLang="zh-CN" b="1" i="1" smtClean="0">
+                                      <a:solidFill>
+                                        <a:schemeClr val="accent2"/>
+                                      </a:solidFill>
+                                      <a:latin typeface="Cambria Math" panose="02040503050406030204" pitchFamily="18" charset="0"/>
+                                    </a:rPr>
+                                    <m:t>,</m:t>
+                                  </m:r>
+                                  <m:r>
+                                    <a:rPr lang="en-US" altLang="zh-CN" b="1" i="1" smtClean="0">
+                                      <a:solidFill>
+                                        <a:schemeClr val="accent2"/>
+                                      </a:solidFill>
+                                      <a:latin typeface="Cambria Math" panose="02040503050406030204" pitchFamily="18" charset="0"/>
+                                    </a:rPr>
+                                    <m:t>𝑲</m:t>
+                                  </m:r>
+                                  <m:r>
+                                    <a:rPr lang="en-US" altLang="zh-CN" b="1" i="1" smtClean="0">
+                                      <a:solidFill>
+                                        <a:schemeClr val="accent2"/>
+                                      </a:solidFill>
+                                      <a:latin typeface="Cambria Math" panose="02040503050406030204" pitchFamily="18" charset="0"/>
+                                    </a:rPr>
+                                    <m:t>,</m:t>
+                                  </m:r>
+                                  <m:r>
+                                    <a:rPr lang="en-US" altLang="zh-CN" b="1" i="1" smtClean="0">
+                                      <a:solidFill>
+                                        <a:schemeClr val="accent2"/>
+                                      </a:solidFill>
+                                      <a:latin typeface="Cambria Math" panose="02040503050406030204" pitchFamily="18" charset="0"/>
+                                    </a:rPr>
+                                    <m:t>𝒅</m:t>
+                                  </m:r>
+                                </m:e>
+                              </m:d>
+                            </m:e>
+                          </m:d>
+                        </m:e>
+                        <m:sub>
+                          <m:r>
+                            <a:rPr lang="en-US" altLang="zh-CN" b="1" i="1" smtClean="0">
+                              <a:solidFill>
+                                <a:schemeClr val="accent2"/>
+                              </a:solidFill>
+                              <a:latin typeface="Cambria Math" panose="02040503050406030204" pitchFamily="18" charset="0"/>
+                            </a:rPr>
+                            <m:t>𝒒</m:t>
+                          </m:r>
+                        </m:sub>
+                      </m:sSub>
+                      <m:r>
+                        <a:rPr lang="en-US" altLang="zh-CN" b="1" i="1" smtClean="0">
+                          <a:solidFill>
+                            <a:schemeClr val="accent2"/>
+                          </a:solidFill>
+                          <a:latin typeface="Cambria Math" panose="02040503050406030204" pitchFamily="18" charset="0"/>
+                        </a:rPr>
+                        <m:t> </m:t>
+                      </m:r>
+                      <m:sSub>
+                        <m:sSubPr>
+                          <m:ctrlPr>
+                            <a:rPr lang="en-US" altLang="zh-CN" b="1" i="1" smtClean="0">
+                              <a:solidFill>
+                                <a:schemeClr val="accent2"/>
+                              </a:solidFill>
+                              <a:latin typeface="Cambria Math" panose="02040503050406030204" pitchFamily="18" charset="0"/>
+                            </a:rPr>
+                          </m:ctrlPr>
+                        </m:sSubPr>
+                        <m:e>
+                          <m:d>
+                            <m:dPr>
+                              <m:ctrlPr>
+                                <a:rPr lang="en-US" altLang="zh-CN" b="1" i="1" smtClean="0">
+                                  <a:solidFill>
+                                    <a:schemeClr val="accent2"/>
+                                  </a:solidFill>
+                                  <a:latin typeface="Cambria Math" panose="02040503050406030204" pitchFamily="18" charset="0"/>
+                                </a:rPr>
+                              </m:ctrlPr>
+                            </m:dPr>
+                            <m:e>
+                              <m:d>
+                                <m:dPr>
+                                  <m:ctrlPr>
+                                    <a:rPr lang="en-US" altLang="zh-CN" b="1" i="1" smtClean="0">
+                                      <a:solidFill>
+                                        <a:schemeClr val="accent2"/>
+                                      </a:solidFill>
+                                      <a:latin typeface="Cambria Math" panose="02040503050406030204" pitchFamily="18" charset="0"/>
+                                    </a:rPr>
+                                  </m:ctrlPr>
+                                </m:dPr>
+                                <m:e>
+                                  <m:r>
+                                    <a:rPr lang="en-US" altLang="zh-CN" b="1" i="1" smtClean="0">
+                                      <a:solidFill>
+                                        <a:schemeClr val="accent2"/>
+                                      </a:solidFill>
+                                      <a:latin typeface="Cambria Math" panose="02040503050406030204" pitchFamily="18" charset="0"/>
+                                    </a:rPr>
+                                    <m:t>𝒏</m:t>
+                                  </m:r>
+                                  <m:r>
+                                    <a:rPr lang="en-US" altLang="zh-CN" b="1" i="1" smtClean="0">
+                                      <a:solidFill>
+                                        <a:schemeClr val="accent2"/>
+                                      </a:solidFill>
+                                      <a:latin typeface="Cambria Math" panose="02040503050406030204" pitchFamily="18" charset="0"/>
+                                    </a:rPr>
+                                    <m:t>,</m:t>
+                                  </m:r>
+                                  <m:r>
+                                    <a:rPr lang="en-US" altLang="zh-CN" b="1" i="1" smtClean="0">
+                                      <a:solidFill>
+                                        <a:schemeClr val="accent2"/>
+                                      </a:solidFill>
+                                      <a:latin typeface="Cambria Math" panose="02040503050406030204" pitchFamily="18" charset="0"/>
+                                    </a:rPr>
+                                    <m:t>𝑲</m:t>
+                                  </m:r>
+                                </m:e>
+                              </m:d>
+                            </m:e>
+                          </m:d>
+                        </m:e>
+                        <m:sub>
+                          <m:r>
+                            <a:rPr lang="en-US" altLang="zh-CN" b="1" i="1" smtClean="0">
+                              <a:solidFill>
+                                <a:schemeClr val="accent2"/>
+                              </a:solidFill>
+                              <a:latin typeface="Cambria Math" panose="02040503050406030204" pitchFamily="18" charset="0"/>
+                            </a:rPr>
+                            <m:t>𝒒</m:t>
+                          </m:r>
+                        </m:sub>
+                      </m:sSub>
+                    </m:oMath>
+                  </m:oMathPara>
+                </a14:m>
+                <a:endParaRPr lang="en-US" altLang="zh-CN" b="1" i="1" dirty="0">
+                  <a:solidFill>
+                    <a:schemeClr val="accent2"/>
+                  </a:solidFill>
+                </a:endParaRPr>
+              </a:p>
+              <a:p>
+                <a:endParaRPr lang="zh-CN" altLang="en-US" b="1" i="1" dirty="0">
+                  <a:solidFill>
+                    <a:schemeClr val="accent2"/>
+                  </a:solidFill>
+                </a:endParaRPr>
+              </a:p>
+            </p:txBody>
+          </p:sp>
+        </mc:Choice>
+        <mc:Fallback xmlns="">
+          <p:sp>
+            <p:nvSpPr>
+              <p:cNvPr id="11" name="文本框 10">
+                <a:extLst>
+                  <a:ext uri="{FF2B5EF4-FFF2-40B4-BE49-F238E27FC236}">
+                    <a16:creationId xmlns:a16="http://schemas.microsoft.com/office/drawing/2014/main" id="{D592E105-4BC0-17D8-D7FD-AA8F832AE901}"/>
+                  </a:ext>
+                </a:extLst>
+              </p:cNvPr>
+              <p:cNvSpPr txBox="1">
+                <a:spLocks noRot="1" noChangeAspect="1" noMove="1" noResize="1" noEditPoints="1" noAdjustHandles="1" noChangeArrowheads="1" noChangeShapeType="1" noTextEdit="1"/>
+              </p:cNvSpPr>
+              <p:nvPr/>
+            </p:nvSpPr>
+            <p:spPr>
+              <a:xfrm>
+                <a:off x="539750" y="5829300"/>
+                <a:ext cx="2297617" cy="661271"/>
+              </a:xfrm>
+              <a:prstGeom prst="rect">
+                <a:avLst/>
+              </a:prstGeom>
+              <a:blipFill>
+                <a:blip r:embed="rId6"/>
+                <a:stretch>
+                  <a:fillRect/>
+                </a:stretch>
+              </a:blipFill>
+            </p:spPr>
+            <p:txBody>
+              <a:bodyPr/>
+              <a:lstStyle/>
+              <a:p>
+                <a:r>
+                  <a:rPr lang="zh-CN" altLang="en-US">
+                    <a:noFill/>
+                  </a:rPr>
+                  <a:t> </a:t>
+                </a:r>
+              </a:p>
+            </p:txBody>
+          </p:sp>
+        </mc:Fallback>
+      </mc:AlternateContent>
+      <mc:AlternateContent xmlns:mc="http://schemas.openxmlformats.org/markup-compatibility/2006" xmlns:a14="http://schemas.microsoft.com/office/drawing/2010/main">
+        <mc:Choice Requires="a14">
+          <p:sp>
+            <p:nvSpPr>
+              <p:cNvPr id="12" name="文本框 11">
+                <a:extLst>
+                  <a:ext uri="{FF2B5EF4-FFF2-40B4-BE49-F238E27FC236}">
+                    <a16:creationId xmlns:a16="http://schemas.microsoft.com/office/drawing/2014/main" id="{9443AFA8-B9AF-6961-028D-06734EC406EB}"/>
+                  </a:ext>
+                </a:extLst>
+              </p:cNvPr>
+              <p:cNvSpPr txBox="1"/>
+              <p:nvPr/>
+            </p:nvSpPr>
+            <p:spPr>
+              <a:xfrm>
+                <a:off x="7612495" y="3600449"/>
+                <a:ext cx="992259" cy="369332"/>
+              </a:xfrm>
+              <a:prstGeom prst="rect">
+                <a:avLst/>
+              </a:prstGeom>
+              <a:noFill/>
+            </p:spPr>
+            <p:txBody>
+              <a:bodyPr wrap="none" lIns="0" tIns="0" rIns="0" bIns="0" rtlCol="0">
+                <a:spAutoFit/>
+              </a:bodyPr>
+              <a:lstStyle/>
+              <a:p>
+                <a:pPr/>
+                <a14:m>
+                  <m:oMathPara xmlns:m="http://schemas.openxmlformats.org/officeDocument/2006/math">
+                    <m:oMathParaPr>
+                      <m:jc m:val="centerGroup"/>
+                    </m:oMathParaPr>
+                    <m:oMath xmlns:m="http://schemas.openxmlformats.org/officeDocument/2006/math">
+                      <m:r>
+                        <a:rPr lang="en-US" altLang="zh-CN" sz="2400" b="1" i="1" smtClean="0">
+                          <a:solidFill>
+                            <a:schemeClr val="accent2"/>
+                          </a:solidFill>
+                          <a:latin typeface="Cambria Math" panose="02040503050406030204" pitchFamily="18" charset="0"/>
+                        </a:rPr>
+                        <m:t>𝑷</m:t>
+                      </m:r>
+                      <m:r>
+                        <a:rPr lang="en-US" altLang="zh-CN" sz="2400" b="1" i="1">
+                          <a:solidFill>
+                            <a:schemeClr val="accent2"/>
+                          </a:solidFill>
+                          <a:latin typeface="Cambria Math" panose="02040503050406030204" pitchFamily="18" charset="0"/>
+                        </a:rPr>
+                        <m:t>𝒓𝒐𝒐𝒇</m:t>
+                      </m:r>
+                    </m:oMath>
+                  </m:oMathPara>
+                </a14:m>
+                <a:endParaRPr lang="zh-CN" altLang="en-US" sz="2400" b="1" i="1" dirty="0">
+                  <a:latin typeface="Brush Script MT" panose="03060802040406070304" pitchFamily="66" charset="0"/>
+                </a:endParaRPr>
+              </a:p>
+            </p:txBody>
+          </p:sp>
+        </mc:Choice>
+        <mc:Fallback xmlns="">
+          <p:sp>
+            <p:nvSpPr>
+              <p:cNvPr id="12" name="文本框 11">
+                <a:extLst>
+                  <a:ext uri="{FF2B5EF4-FFF2-40B4-BE49-F238E27FC236}">
+                    <a16:creationId xmlns:a16="http://schemas.microsoft.com/office/drawing/2014/main" id="{9443AFA8-B9AF-6961-028D-06734EC406EB}"/>
+                  </a:ext>
+                </a:extLst>
+              </p:cNvPr>
+              <p:cNvSpPr txBox="1">
+                <a:spLocks noRot="1" noChangeAspect="1" noMove="1" noResize="1" noEditPoints="1" noAdjustHandles="1" noChangeArrowheads="1" noChangeShapeType="1" noTextEdit="1"/>
+              </p:cNvSpPr>
+              <p:nvPr/>
+            </p:nvSpPr>
+            <p:spPr>
+              <a:xfrm>
+                <a:off x="7612495" y="3600449"/>
+                <a:ext cx="992259" cy="369332"/>
+              </a:xfrm>
+              <a:prstGeom prst="rect">
+                <a:avLst/>
+              </a:prstGeom>
+              <a:blipFill>
+                <a:blip r:embed="rId7"/>
+                <a:stretch>
+                  <a:fillRect l="-6135" t="-3333" r="-9202" b="-31667"/>
+                </a:stretch>
+              </a:blipFill>
+            </p:spPr>
+            <p:txBody>
+              <a:bodyPr/>
+              <a:lstStyle/>
+              <a:p>
+                <a:r>
+                  <a:rPr lang="zh-CN" altLang="en-US">
+                    <a:noFill/>
+                  </a:rPr>
+                  <a:t> </a:t>
+                </a:r>
+              </a:p>
+            </p:txBody>
+          </p:sp>
+        </mc:Fallback>
+      </mc:AlternateContent>
     </p:spTree>
     <p:extLst>
       <p:ext uri="{BB962C8B-B14F-4D97-AF65-F5344CB8AC3E}">
-        <p14:creationId xmlns:p14="http://schemas.microsoft.com/office/powerpoint/2010/main" val="800963773"/>
+        <p14:creationId xmlns:p14="http://schemas.microsoft.com/office/powerpoint/2010/main" val="2154777214"/>
       </p:ext>
     </p:extLst>
   </p:cSld>
@@ -26260,7 +26568,7 @@
         <p:cNvPr id="1" name="">
           <a:extLst>
             <a:ext uri="{FF2B5EF4-FFF2-40B4-BE49-F238E27FC236}">
-              <a16:creationId xmlns:a16="http://schemas.microsoft.com/office/drawing/2014/main" id="{A68D7008-93EE-B69E-76DB-D70EEA1E545F}"/>
+              <a16:creationId xmlns:a16="http://schemas.microsoft.com/office/drawing/2014/main" id="{A7724C7B-1EC9-C74A-863A-2397DB591003}"/>
             </a:ext>
           </a:extLst>
         </p:cNvPr>
@@ -26280,7 +26588,7 @@
           <p:cNvPr id="2" name="AutoShape 2">
             <a:extLst>
               <a:ext uri="{FF2B5EF4-FFF2-40B4-BE49-F238E27FC236}">
-                <a16:creationId xmlns:a16="http://schemas.microsoft.com/office/drawing/2014/main" id="{A6CCE066-D664-E775-A319-58B173371B42}"/>
+                <a16:creationId xmlns:a16="http://schemas.microsoft.com/office/drawing/2014/main" id="{4F597B1A-917F-F796-C63A-72B653C65CF1}"/>
               </a:ext>
             </a:extLst>
           </p:cNvPr>
@@ -26306,77 +26614,60 @@
           <a:bodyPr vert="horz" wrap="square" lIns="0" tIns="0" rIns="0" bIns="0" rtlCol="0" anchor="ctr" anchorCtr="0"/>
           <a:lstStyle/>
           <a:p>
-            <a:pPr>
-              <a:lnSpc>
-                <a:spcPct val="125000"/>
-              </a:lnSpc>
-              <a:defRPr/>
-            </a:pPr>
-            <a:r>
-              <a:rPr lang="en-US" sz="3200" b="1" i="0" u="none" strike="noStrike" dirty="0">
-                <a:solidFill>
-                  <a:srgbClr val="333333"/>
-                </a:solidFill>
-                <a:latin typeface="Noto Sans SC"/>
-                <a:ea typeface="Noto Sans SC"/>
-                <a:cs typeface="Noto Sans SC"/>
-                <a:sym typeface="Noto Sans SC"/>
-              </a:rPr>
-              <a:t>03 </a:t>
-            </a:r>
-            <a:r>
-              <a:rPr lang="zh-CN" altLang="en-US" sz="3200" b="1" i="0" u="none" strike="noStrike" dirty="0">
-                <a:solidFill>
-                  <a:srgbClr val="333333"/>
-                </a:solidFill>
-                <a:latin typeface="Noto Sans SC"/>
-                <a:ea typeface="Noto Sans SC"/>
-                <a:cs typeface="Noto Sans SC"/>
-                <a:sym typeface="Noto Sans SC"/>
-              </a:rPr>
-              <a:t>稳定子</a:t>
-            </a:r>
-            <a:endParaRPr lang="en-US" sz="1100" dirty="0"/>
-          </a:p>
-        </p:txBody>
-      </p:sp>
-      <p:sp>
-        <p:nvSpPr>
-          <p:cNvPr id="3" name="AutoShape 3">
-            <a:extLst>
-              <a:ext uri="{FF2B5EF4-FFF2-40B4-BE49-F238E27FC236}">
-                <a16:creationId xmlns:a16="http://schemas.microsoft.com/office/drawing/2014/main" id="{13E952E4-BA09-6EC1-3E9D-0D4F44BA572D}"/>
-              </a:ext>
-            </a:extLst>
-          </p:cNvPr>
-          <p:cNvSpPr/>
-          <p:nvPr/>
-        </p:nvSpPr>
-        <p:spPr>
-          <a:xfrm>
-            <a:off x="762000" y="1651000"/>
-            <a:ext cx="10668000" cy="508000"/>
-          </a:xfrm>
-          <a:prstGeom prst="rect">
-            <a:avLst/>
-          </a:prstGeom>
-          <a:noFill/>
-          <a:ln w="12700" cap="flat" cmpd="sng">
-            <a:noFill/>
-            <a:prstDash val="solid"/>
-            <a:round/>
-          </a:ln>
-        </p:spPr>
-        <p:txBody>
-          <a:bodyPr vert="horz" wrap="square" lIns="0" tIns="0" rIns="0" bIns="0" rtlCol="0" anchor="ctr" anchorCtr="0"/>
-          <a:lstStyle/>
-          <a:p>
             <a:pPr indent="0" algn="l">
               <a:lnSpc>
                 <a:spcPct val="125000"/>
               </a:lnSpc>
               <a:defRPr/>
             </a:pPr>
+            <a:r>
+              <a:rPr lang="en-US" sz="3200" b="1" i="0" u="none" strike="noStrike" dirty="0">
+                <a:solidFill>
+                  <a:srgbClr val="333333"/>
+                </a:solidFill>
+                <a:latin typeface="Noto Sans SC"/>
+                <a:ea typeface="Noto Sans SC"/>
+                <a:cs typeface="Noto Sans SC"/>
+                <a:sym typeface="Noto Sans SC"/>
+              </a:rPr>
+              <a:t>0</a:t>
+            </a:r>
+            <a:r>
+              <a:rPr lang="en-US" sz="3200" b="1" dirty="0">
+                <a:solidFill>
+                  <a:srgbClr val="333333"/>
+                </a:solidFill>
+                <a:latin typeface="Noto Sans SC"/>
+                <a:ea typeface="Noto Sans SC"/>
+                <a:cs typeface="Noto Sans SC"/>
+                <a:sym typeface="Noto Sans SC"/>
+              </a:rPr>
+              <a:t>4</a:t>
+            </a:r>
+            <a:r>
+              <a:rPr lang="en-US" sz="3200" b="1" i="0" u="none" strike="noStrike" dirty="0">
+                <a:solidFill>
+                  <a:srgbClr val="333333"/>
+                </a:solidFill>
+                <a:latin typeface="Noto Sans SC"/>
+                <a:ea typeface="Noto Sans SC"/>
+                <a:cs typeface="Noto Sans SC"/>
+                <a:sym typeface="Noto Sans SC"/>
+              </a:rPr>
+              <a:t>  </a:t>
+            </a:r>
+            <a:r>
+              <a:rPr lang="zh-CN" altLang="en-US" sz="3200" b="1" i="0" u="none" strike="noStrike" dirty="0">
+                <a:solidFill>
+                  <a:srgbClr val="333333"/>
+                </a:solidFill>
+                <a:latin typeface="Noto Sans SC"/>
+                <a:ea typeface="Noto Sans SC"/>
+                <a:cs typeface="Noto Sans SC"/>
+                <a:sym typeface="Noto Sans SC"/>
+              </a:rPr>
+              <a:t>稳定子</a:t>
+            </a:r>
             <a:endParaRPr lang="en-US" sz="1100" dirty="0"/>
           </a:p>
         </p:txBody>
@@ -26386,7 +26677,7 @@
           <p:cNvPr id="4" name="直接连接符 3">
             <a:extLst>
               <a:ext uri="{FF2B5EF4-FFF2-40B4-BE49-F238E27FC236}">
-                <a16:creationId xmlns:a16="http://schemas.microsoft.com/office/drawing/2014/main" id="{22CE4F8C-A252-63E9-0A22-73318ECC4FC5}"/>
+                <a16:creationId xmlns:a16="http://schemas.microsoft.com/office/drawing/2014/main" id="{8D0B51A2-7E73-BDD6-4AC3-6678EFA2FB2E}"/>
               </a:ext>
             </a:extLst>
           </p:cNvPr>
@@ -26428,10 +26719,10 @@
       </p:cxnSp>
       <p:sp>
         <p:nvSpPr>
-          <p:cNvPr id="10" name="AutoShape 3">
-            <a:extLst>
-              <a:ext uri="{FF2B5EF4-FFF2-40B4-BE49-F238E27FC236}">
-                <a16:creationId xmlns:a16="http://schemas.microsoft.com/office/drawing/2014/main" id="{C3BDC17F-4900-C1C0-4B4F-3A8C2FA95207}"/>
+          <p:cNvPr id="3" name="AutoShape 3">
+            <a:extLst>
+              <a:ext uri="{FF2B5EF4-FFF2-40B4-BE49-F238E27FC236}">
+                <a16:creationId xmlns:a16="http://schemas.microsoft.com/office/drawing/2014/main" id="{0DB010BE-1429-2647-F103-C5A84B9282AD}"/>
               </a:ext>
             </a:extLst>
           </p:cNvPr>
@@ -26440,8 +26731,8 @@
         </p:nvSpPr>
         <p:spPr>
           <a:xfrm>
-            <a:off x="914400" y="1565893"/>
-            <a:ext cx="6068291" cy="4223327"/>
+            <a:off x="762000" y="1651000"/>
+            <a:ext cx="10668000" cy="508000"/>
           </a:xfrm>
           <a:prstGeom prst="rect">
             <a:avLst/>
@@ -26463,233 +26754,470 @@
               </a:lnSpc>
               <a:defRPr/>
             </a:pPr>
+            <a:r>
+              <a:rPr lang="en-US" altLang="zh-CN" sz="2200" b="1" dirty="0">
+                <a:solidFill>
+                  <a:srgbClr val="555555"/>
+                </a:solidFill>
+                <a:latin typeface="Noto Sans SC"/>
+                <a:ea typeface="Noto Sans SC"/>
+                <a:cs typeface="Noto Sans SC"/>
+                <a:sym typeface="Noto Sans SC"/>
+              </a:rPr>
+              <a:t>4.3 </a:t>
+            </a:r>
+            <a:r>
+              <a:rPr lang="zh-CN" altLang="en-US" sz="2200" b="1" dirty="0">
+                <a:solidFill>
+                  <a:srgbClr val="555555"/>
+                </a:solidFill>
+                <a:latin typeface="Noto Sans SC"/>
+                <a:ea typeface="Noto Sans SC"/>
+                <a:cs typeface="Noto Sans SC"/>
+                <a:sym typeface="Noto Sans SC"/>
+              </a:rPr>
+              <a:t>量子纠错的条件</a:t>
+            </a:r>
+            <a:r>
+              <a:rPr lang="en-US" altLang="zh-CN" sz="2200" b="1" dirty="0">
+                <a:solidFill>
+                  <a:srgbClr val="555555"/>
+                </a:solidFill>
+                <a:latin typeface="Noto Sans SC"/>
+                <a:ea typeface="Noto Sans SC"/>
+                <a:cs typeface="Noto Sans SC"/>
+                <a:sym typeface="Noto Sans SC"/>
+              </a:rPr>
+              <a:t> </a:t>
+            </a:r>
             <a:endParaRPr lang="en-US" sz="1100" dirty="0"/>
           </a:p>
         </p:txBody>
       </p:sp>
       <p:sp>
         <p:nvSpPr>
-          <p:cNvPr id="5" name="AutoShape 3">
-            <a:extLst>
-              <a:ext uri="{FF2B5EF4-FFF2-40B4-BE49-F238E27FC236}">
-                <a16:creationId xmlns:a16="http://schemas.microsoft.com/office/drawing/2014/main" id="{F3EFDBCB-DDE8-541B-8CD4-8AA73A56E093}"/>
-              </a:ext>
-            </a:extLst>
-          </p:cNvPr>
-          <p:cNvSpPr/>
+          <p:cNvPr id="7" name="文本框 6">
+            <a:extLst>
+              <a:ext uri="{FF2B5EF4-FFF2-40B4-BE49-F238E27FC236}">
+                <a16:creationId xmlns:a16="http://schemas.microsoft.com/office/drawing/2014/main" id="{FA2F4436-30DF-D5E0-1293-F77814DD0E8B}"/>
+              </a:ext>
+            </a:extLst>
+          </p:cNvPr>
+          <p:cNvSpPr txBox="1"/>
           <p:nvPr/>
         </p:nvSpPr>
         <p:spPr>
           <a:xfrm>
-            <a:off x="1005840" y="1065007"/>
-            <a:ext cx="1877209" cy="5884433"/>
+            <a:off x="559582" y="2274197"/>
+            <a:ext cx="6950773" cy="5078313"/>
           </a:xfrm>
           <a:prstGeom prst="rect">
             <a:avLst/>
           </a:prstGeom>
           <a:noFill/>
-          <a:ln w="12700" cap="flat" cmpd="sng">
-            <a:noFill/>
-            <a:prstDash val="solid"/>
-            <a:round/>
-          </a:ln>
-        </p:spPr>
-        <p:txBody>
-          <a:bodyPr vert="horz" wrap="square" lIns="0" tIns="0" rIns="0" bIns="0" rtlCol="0" anchor="ctr" anchorCtr="0"/>
+        </p:spPr>
+        <p:txBody>
+          <a:bodyPr wrap="square">
+            <a:spAutoFit/>
+          </a:bodyPr>
           <a:lstStyle/>
           <a:p>
-            <a:pPr algn="l">
-              <a:lnSpc>
-                <a:spcPct val="125000"/>
-              </a:lnSpc>
-              <a:defRPr/>
-            </a:pPr>
-            <a:r>
-              <a:rPr lang="en-US" altLang="zh-CN" sz="2200" b="1" dirty="0">
-                <a:solidFill>
-                  <a:srgbClr val="555555"/>
-                </a:solidFill>
-                <a:latin typeface="Noto Sans SC"/>
-                <a:ea typeface="Noto Sans SC"/>
-                <a:cs typeface="Noto Sans SC"/>
-                <a:sym typeface="Noto Sans SC"/>
-              </a:rPr>
-              <a:t>3.1</a:t>
-            </a:r>
-            <a:r>
-              <a:rPr lang="zh-CN" altLang="en-US" sz="2200" b="1" dirty="0">
-                <a:solidFill>
-                  <a:srgbClr val="555555"/>
-                </a:solidFill>
-                <a:latin typeface="Noto Sans SC"/>
-                <a:ea typeface="Noto Sans SC"/>
-                <a:cs typeface="Noto Sans SC"/>
-                <a:sym typeface="Noto Sans SC"/>
-              </a:rPr>
-              <a:t>泡利群</a:t>
-            </a:r>
-            <a:endParaRPr lang="en-US" altLang="zh-CN" sz="2200" b="1" dirty="0">
+            <a:r>
+              <a:rPr lang="zh-CN" altLang="en-US" b="1" dirty="0"/>
+              <a:t>错误检测</a:t>
+            </a:r>
+            <a:endParaRPr lang="en-US" altLang="zh-CN" b="1" dirty="0"/>
+          </a:p>
+          <a:p>
+            <a:r>
+              <a:rPr lang="en-US" altLang="zh-CN" b="1" dirty="0"/>
+              <a:t>  </a:t>
+            </a:r>
+          </a:p>
+          <a:p>
+            <a:r>
+              <a:rPr lang="en-US" altLang="zh-CN" b="1" dirty="0"/>
+              <a:t>  </a:t>
+            </a:r>
+            <a:r>
+              <a:rPr lang="zh-CN" altLang="en-US" b="1" dirty="0"/>
+              <a:t>只要求</a:t>
+            </a:r>
+            <a:r>
+              <a:rPr lang="zh-CN" altLang="en-US" b="1" dirty="0">
+                <a:solidFill>
+                  <a:schemeClr val="accent2"/>
+                </a:solidFill>
+              </a:rPr>
+              <a:t>检测</a:t>
+            </a:r>
+            <a:r>
+              <a:rPr lang="zh-CN" altLang="en-US" b="1" dirty="0"/>
+              <a:t>到错误不要求</a:t>
+            </a:r>
+            <a:r>
+              <a:rPr lang="zh-CN" altLang="en-US" b="1" dirty="0">
+                <a:solidFill>
+                  <a:schemeClr val="accent2"/>
+                </a:solidFill>
+              </a:rPr>
+              <a:t>纠正</a:t>
+            </a:r>
+            <a:endParaRPr lang="en-US" altLang="zh-CN" b="1" dirty="0">
               <a:solidFill>
-                <a:srgbClr val="555555"/>
+                <a:schemeClr val="accent2"/>
               </a:solidFill>
-              <a:latin typeface="Noto Sans SC"/>
-              <a:ea typeface="Noto Sans SC"/>
-              <a:cs typeface="Noto Sans SC"/>
-              <a:sym typeface="Noto Sans SC"/>
             </a:endParaRPr>
           </a:p>
           <a:p>
-            <a:pPr algn="l">
-              <a:lnSpc>
-                <a:spcPct val="125000"/>
-              </a:lnSpc>
-              <a:defRPr/>
-            </a:pPr>
-            <a:endParaRPr lang="en-US" altLang="zh-CN" sz="2200" b="1" dirty="0">
+            <a:endParaRPr lang="en-US" altLang="zh-CN" b="1" dirty="0">
               <a:solidFill>
-                <a:srgbClr val="555555"/>
+                <a:schemeClr val="accent2"/>
               </a:solidFill>
-              <a:latin typeface="Noto Sans SC"/>
-              <a:ea typeface="Noto Sans SC"/>
-              <a:cs typeface="Noto Sans SC"/>
-              <a:sym typeface="Noto Sans SC"/>
             </a:endParaRPr>
           </a:p>
           <a:p>
-            <a:pPr algn="l">
-              <a:lnSpc>
-                <a:spcPct val="125000"/>
-              </a:lnSpc>
-              <a:defRPr/>
-            </a:pPr>
-            <a:r>
-              <a:rPr lang="en-US" altLang="zh-CN" sz="2200" b="1" dirty="0">
-                <a:solidFill>
-                  <a:srgbClr val="555555"/>
-                </a:solidFill>
-                <a:latin typeface="Noto Sans SC"/>
-                <a:ea typeface="Noto Sans SC"/>
-                <a:cs typeface="Noto Sans SC"/>
-                <a:sym typeface="Noto Sans SC"/>
-              </a:rPr>
-              <a:t>3.2</a:t>
-            </a:r>
-            <a:r>
-              <a:rPr lang="zh-CN" altLang="en-US" sz="2200" b="1" dirty="0">
-                <a:solidFill>
-                  <a:srgbClr val="555555"/>
-                </a:solidFill>
-                <a:latin typeface="Noto Sans SC"/>
-                <a:ea typeface="Noto Sans SC"/>
-                <a:cs typeface="Noto Sans SC"/>
-                <a:sym typeface="Noto Sans SC"/>
-              </a:rPr>
-              <a:t>稳定</a:t>
-            </a:r>
-            <a:endParaRPr lang="en-US" altLang="zh-CN" sz="2200" b="1" dirty="0">
+            <a:r>
+              <a:rPr lang="zh-CN" altLang="en-US" b="1" dirty="0"/>
+              <a:t>定理 </a:t>
+            </a:r>
+            <a:r>
+              <a:rPr lang="en-US" altLang="zh-CN" b="1" dirty="0"/>
+              <a:t>2</a:t>
+            </a:r>
+          </a:p>
+          <a:p>
+            <a:endParaRPr lang="en-US" altLang="zh-CN" b="1" dirty="0"/>
+          </a:p>
+          <a:p>
+            <a:r>
+              <a:rPr lang="zh-CN" altLang="en-US" b="1" dirty="0"/>
+              <a:t>  距离为 </a:t>
+            </a:r>
+            <a:r>
+              <a:rPr lang="en-US" altLang="zh-CN" b="1" dirty="0">
+                <a:solidFill>
+                  <a:schemeClr val="accent2"/>
+                </a:solidFill>
+              </a:rPr>
+              <a:t>d</a:t>
+            </a:r>
+            <a:r>
+              <a:rPr lang="en-US" altLang="zh-CN" b="1" dirty="0"/>
+              <a:t> </a:t>
+            </a:r>
+            <a:r>
+              <a:rPr lang="zh-CN" altLang="en-US" b="1" dirty="0"/>
+              <a:t>的码可以</a:t>
+            </a:r>
+            <a:r>
+              <a:rPr lang="zh-CN" altLang="en-US" b="1" dirty="0">
+                <a:solidFill>
+                  <a:schemeClr val="accent2"/>
+                </a:solidFill>
+              </a:rPr>
+              <a:t>检测</a:t>
+            </a:r>
+            <a:r>
+              <a:rPr lang="zh-CN" altLang="en-US" b="1" dirty="0"/>
+              <a:t>任意 </a:t>
+            </a:r>
+            <a:r>
+              <a:rPr lang="en-US" altLang="zh-CN" b="1" dirty="0">
+                <a:solidFill>
+                  <a:schemeClr val="accent2"/>
+                </a:solidFill>
+              </a:rPr>
+              <a:t>(d−1) </a:t>
+            </a:r>
+            <a:r>
+              <a:rPr lang="zh-CN" altLang="en-US" b="1" dirty="0">
+                <a:solidFill>
+                  <a:schemeClr val="accent2"/>
+                </a:solidFill>
+              </a:rPr>
+              <a:t>权值</a:t>
+            </a:r>
+            <a:r>
+              <a:rPr lang="zh-CN" altLang="en-US" b="1" dirty="0"/>
+              <a:t>的量子比特错误</a:t>
+            </a:r>
+            <a:endParaRPr lang="en-US" altLang="zh-CN" b="1" dirty="0"/>
+          </a:p>
+          <a:p>
+            <a:endParaRPr lang="en-US" altLang="zh-CN" b="1" dirty="0"/>
+          </a:p>
+          <a:p>
+            <a:r>
+              <a:rPr lang="zh-CN" altLang="en-US" b="1" dirty="0"/>
+              <a:t>擦除错误</a:t>
+            </a:r>
+            <a:endParaRPr lang="en-US" altLang="zh-CN" b="1" dirty="0"/>
+          </a:p>
+          <a:p>
+            <a:r>
+              <a:rPr lang="en-US" altLang="zh-CN" b="1" dirty="0"/>
+              <a:t>  </a:t>
+            </a:r>
+          </a:p>
+          <a:p>
+            <a:r>
+              <a:rPr lang="en-US" altLang="zh-CN" b="1" dirty="0"/>
+              <a:t>  </a:t>
+            </a:r>
+            <a:r>
+              <a:rPr lang="zh-CN" altLang="en-US" b="1" dirty="0"/>
+              <a:t>知道</a:t>
+            </a:r>
+            <a:r>
+              <a:rPr lang="zh-CN" altLang="en-US" b="1" dirty="0">
+                <a:solidFill>
+                  <a:schemeClr val="accent2"/>
+                </a:solidFill>
+              </a:rPr>
+              <a:t>位置</a:t>
+            </a:r>
+            <a:r>
+              <a:rPr lang="zh-CN" altLang="en-US" b="1" dirty="0"/>
+              <a:t>但不知道</a:t>
+            </a:r>
+            <a:r>
+              <a:rPr lang="zh-CN" altLang="en-US" b="1" dirty="0">
+                <a:solidFill>
+                  <a:schemeClr val="accent2"/>
+                </a:solidFill>
+              </a:rPr>
+              <a:t>类型</a:t>
+            </a:r>
+            <a:r>
+              <a:rPr lang="zh-CN" altLang="en-US" b="1" dirty="0"/>
+              <a:t>的错误</a:t>
+            </a:r>
+            <a:endParaRPr lang="en-US" altLang="zh-CN" b="1" dirty="0"/>
+          </a:p>
+          <a:p>
+            <a:endParaRPr lang="en-US" altLang="zh-CN" b="1" dirty="0"/>
+          </a:p>
+          <a:p>
+            <a:r>
+              <a:rPr lang="zh-CN" altLang="en-US" b="1" dirty="0"/>
+              <a:t>定理 </a:t>
+            </a:r>
+            <a:r>
+              <a:rPr lang="en-US" altLang="zh-CN" b="1" dirty="0"/>
+              <a:t>3</a:t>
+            </a:r>
+          </a:p>
+          <a:p>
+            <a:r>
+              <a:rPr lang="en-US" altLang="zh-CN" b="1" dirty="0"/>
+              <a:t>  </a:t>
+            </a:r>
+          </a:p>
+          <a:p>
+            <a:r>
+              <a:rPr lang="zh-CN" altLang="en-US" b="1" dirty="0"/>
+              <a:t>  距离为 </a:t>
+            </a:r>
+            <a:r>
+              <a:rPr lang="en-US" altLang="zh-CN" b="1" dirty="0"/>
+              <a:t>d </a:t>
+            </a:r>
+            <a:r>
+              <a:rPr lang="zh-CN" altLang="en-US" b="1" dirty="0"/>
+              <a:t>的 </a:t>
+            </a:r>
+            <a:r>
+              <a:rPr lang="en-US" altLang="zh-CN" b="1" dirty="0"/>
+              <a:t>QECC </a:t>
+            </a:r>
+            <a:r>
+              <a:rPr lang="zh-CN" altLang="en-US" b="1" dirty="0"/>
+              <a:t>可以纠正 </a:t>
+            </a:r>
+            <a:r>
+              <a:rPr lang="en-US" altLang="zh-CN" b="1" dirty="0"/>
+              <a:t>d−1 </a:t>
+            </a:r>
+            <a:r>
+              <a:rPr lang="zh-CN" altLang="en-US" b="1" dirty="0"/>
+              <a:t>个擦除错误</a:t>
+            </a:r>
+            <a:endParaRPr lang="en-US" altLang="zh-CN" b="1" dirty="0"/>
+          </a:p>
+          <a:p>
+            <a:endParaRPr lang="en-US" altLang="zh-CN" b="1" dirty="0"/>
+          </a:p>
+          <a:p>
+            <a:endParaRPr lang="en-US" altLang="zh-CN" b="1" dirty="0">
               <a:solidFill>
-                <a:srgbClr val="555555"/>
+                <a:schemeClr val="accent2"/>
               </a:solidFill>
-              <a:latin typeface="Noto Sans SC"/>
-              <a:ea typeface="Noto Sans SC"/>
-              <a:cs typeface="Noto Sans SC"/>
-              <a:sym typeface="Noto Sans SC"/>
             </a:endParaRPr>
           </a:p>
           <a:p>
-            <a:pPr algn="l">
-              <a:lnSpc>
-                <a:spcPct val="125000"/>
-              </a:lnSpc>
-              <a:defRPr/>
-            </a:pPr>
-            <a:endParaRPr lang="en-US" altLang="zh-CN" sz="2200" b="1" dirty="0">
+            <a:endParaRPr lang="en-US" altLang="zh-CN" b="1" dirty="0">
               <a:solidFill>
-                <a:srgbClr val="555555"/>
+                <a:schemeClr val="accent2"/>
               </a:solidFill>
-              <a:latin typeface="Noto Sans SC"/>
-              <a:ea typeface="Noto Sans SC"/>
-              <a:cs typeface="Noto Sans SC"/>
-              <a:sym typeface="Noto Sans SC"/>
             </a:endParaRPr>
           </a:p>
-          <a:p>
-            <a:pPr algn="l">
-              <a:lnSpc>
-                <a:spcPct val="125000"/>
-              </a:lnSpc>
-              <a:defRPr/>
-            </a:pPr>
-            <a:r>
-              <a:rPr lang="en-US" altLang="zh-CN" sz="2200" b="1" dirty="0">
-                <a:solidFill>
-                  <a:srgbClr val="555555"/>
-                </a:solidFill>
-                <a:latin typeface="Noto Sans SC"/>
-                <a:ea typeface="Noto Sans SC"/>
-                <a:cs typeface="Noto Sans SC"/>
-                <a:sym typeface="Noto Sans SC"/>
-              </a:rPr>
-              <a:t>3.3</a:t>
-            </a:r>
-          </a:p>
-          <a:p>
-            <a:pPr indent="0" algn="l">
-              <a:lnSpc>
-                <a:spcPct val="125000"/>
-              </a:lnSpc>
-              <a:defRPr/>
-            </a:pPr>
-            <a:endParaRPr lang="en-US" altLang="zh-CN" sz="2200" b="1" dirty="0">
-              <a:solidFill>
-                <a:srgbClr val="555555"/>
-              </a:solidFill>
-              <a:latin typeface="Noto Sans SC"/>
-              <a:ea typeface="Noto Sans SC"/>
-              <a:cs typeface="Noto Sans SC"/>
-              <a:sym typeface="Noto Sans SC"/>
-            </a:endParaRPr>
-          </a:p>
-          <a:p>
-            <a:pPr indent="0" algn="l">
-              <a:lnSpc>
-                <a:spcPct val="125000"/>
-              </a:lnSpc>
-              <a:defRPr/>
-            </a:pPr>
-            <a:endParaRPr lang="en-US" altLang="zh-CN" sz="2200" b="1" dirty="0">
-              <a:solidFill>
-                <a:srgbClr val="555555"/>
-              </a:solidFill>
-              <a:latin typeface="Noto Sans SC"/>
-              <a:ea typeface="Noto Sans SC"/>
-              <a:cs typeface="Noto Sans SC"/>
-              <a:sym typeface="Noto Sans SC"/>
-            </a:endParaRPr>
-          </a:p>
-          <a:p>
-            <a:pPr indent="0" algn="l">
-              <a:lnSpc>
-                <a:spcPct val="125000"/>
-              </a:lnSpc>
-              <a:defRPr/>
-            </a:pPr>
-            <a:endParaRPr lang="en-US" altLang="zh-CN" sz="2200" b="1" dirty="0">
-              <a:solidFill>
-                <a:srgbClr val="555555"/>
-              </a:solidFill>
-              <a:latin typeface="Noto Sans SC"/>
-              <a:ea typeface="Noto Sans SC"/>
-              <a:cs typeface="Noto Sans SC"/>
-              <a:sym typeface="Noto Sans SC"/>
-            </a:endParaRPr>
+        </p:txBody>
+      </p:sp>
+      <p:pic>
+        <p:nvPicPr>
+          <p:cNvPr id="12" name="图片 11">
+            <a:extLst>
+              <a:ext uri="{FF2B5EF4-FFF2-40B4-BE49-F238E27FC236}">
+                <a16:creationId xmlns:a16="http://schemas.microsoft.com/office/drawing/2014/main" id="{7EB65703-A70F-BC3C-F90D-3C5FCA51C3AC}"/>
+              </a:ext>
+            </a:extLst>
+          </p:cNvPr>
+          <p:cNvPicPr>
+            <a:picLocks noChangeAspect="1"/>
+          </p:cNvPicPr>
+          <p:nvPr/>
+        </p:nvPicPr>
+        <p:blipFill>
+          <a:blip r:embed="rId3"/>
+          <a:stretch>
+            <a:fillRect/>
+          </a:stretch>
+        </p:blipFill>
+        <p:spPr>
+          <a:xfrm>
+            <a:off x="8521519" y="377784"/>
+            <a:ext cx="2591162" cy="590632"/>
+          </a:xfrm>
+          <a:prstGeom prst="rect">
+            <a:avLst/>
+          </a:prstGeom>
+        </p:spPr>
+      </p:pic>
+      <p:sp>
+        <p:nvSpPr>
+          <p:cNvPr id="14" name="文本框 13">
+            <a:extLst>
+              <a:ext uri="{FF2B5EF4-FFF2-40B4-BE49-F238E27FC236}">
+                <a16:creationId xmlns:a16="http://schemas.microsoft.com/office/drawing/2014/main" id="{A4E53F99-545C-E2FD-822D-39BFA10C2005}"/>
+              </a:ext>
+            </a:extLst>
+          </p:cNvPr>
+          <p:cNvSpPr txBox="1"/>
+          <p:nvPr/>
+        </p:nvSpPr>
+        <p:spPr>
+          <a:xfrm>
+            <a:off x="8604250" y="1159986"/>
+            <a:ext cx="3098800" cy="2308324"/>
+          </a:xfrm>
+          <a:prstGeom prst="rect">
+            <a:avLst/>
+          </a:prstGeom>
+          <a:noFill/>
+        </p:spPr>
+        <p:txBody>
+          <a:bodyPr wrap="square">
+            <a:spAutoFit/>
+          </a:bodyPr>
+          <a:lstStyle/>
+          <a:p>
+            <a:r>
+              <a:rPr lang="zh-CN" altLang="en-US"/>
+              <a:t>000 →	0	✅</a:t>
+            </a:r>
+            <a:endParaRPr lang="en-US" altLang="zh-CN"/>
+          </a:p>
+          <a:p>
+            <a:r>
+              <a:rPr lang="zh-CN" altLang="en-US"/>
+              <a:t>001 →	0	✅</a:t>
+            </a:r>
+            <a:endParaRPr lang="en-US" altLang="zh-CN"/>
+          </a:p>
+          <a:p>
+            <a:r>
+              <a:rPr lang="zh-CN" altLang="en-US"/>
+              <a:t>010 →	0	✅</a:t>
+            </a:r>
+            <a:endParaRPr lang="en-US" altLang="zh-CN"/>
+          </a:p>
+          <a:p>
+            <a:r>
+              <a:rPr lang="zh-CN" altLang="en-US"/>
+              <a:t>100 →	0	✅</a:t>
+            </a:r>
+            <a:endParaRPr lang="en-US" altLang="zh-CN"/>
+          </a:p>
+          <a:p>
+            <a:r>
+              <a:rPr lang="zh-CN" altLang="en-US"/>
+              <a:t>110 →	1	❌</a:t>
+            </a:r>
+            <a:endParaRPr lang="en-US" altLang="zh-CN"/>
+          </a:p>
+          <a:p>
+            <a:r>
+              <a:rPr lang="zh-CN" altLang="en-US"/>
+              <a:t>101 →	1	❌</a:t>
+            </a:r>
+            <a:endParaRPr lang="en-US" altLang="zh-CN"/>
+          </a:p>
+          <a:p>
+            <a:r>
+              <a:rPr lang="zh-CN" altLang="en-US"/>
+              <a:t>011 →	1	❌</a:t>
+            </a:r>
+            <a:endParaRPr lang="en-US" altLang="zh-CN"/>
+          </a:p>
+          <a:p>
+            <a:r>
+              <a:rPr lang="zh-CN" altLang="en-US"/>
+              <a:t>111 →	1	✅</a:t>
+            </a:r>
+            <a:endParaRPr lang="zh-CN" altLang="en-US" dirty="0"/>
+          </a:p>
+        </p:txBody>
+      </p:sp>
+      <p:sp>
+        <p:nvSpPr>
+          <p:cNvPr id="17" name="文本框 16">
+            <a:extLst>
+              <a:ext uri="{FF2B5EF4-FFF2-40B4-BE49-F238E27FC236}">
+                <a16:creationId xmlns:a16="http://schemas.microsoft.com/office/drawing/2014/main" id="{4B042183-C51C-0669-D41E-D97E18F6A353}"/>
+              </a:ext>
+            </a:extLst>
+          </p:cNvPr>
+          <p:cNvSpPr txBox="1"/>
+          <p:nvPr/>
+        </p:nvSpPr>
+        <p:spPr>
+          <a:xfrm>
+            <a:off x="8572500" y="3631337"/>
+            <a:ext cx="2609850" cy="2308324"/>
+          </a:xfrm>
+          <a:prstGeom prst="rect">
+            <a:avLst/>
+          </a:prstGeom>
+          <a:noFill/>
+        </p:spPr>
+        <p:txBody>
+          <a:bodyPr wrap="square">
+            <a:spAutoFit/>
+          </a:bodyPr>
+          <a:lstStyle/>
+          <a:p>
+            <a:r>
+              <a:rPr lang="zh-CN" altLang="en-US" dirty="0"/>
+              <a:t>000	✅ 	接受001	❌ 	丢弃010	❌ 	丢弃100	❌ 	丢弃110	❌ 	丢弃101	❌ 	丢弃011	❌ 	丢弃111	✅ 	接受</a:t>
+            </a:r>
           </a:p>
         </p:txBody>
       </p:sp>
     </p:spTree>
     <p:extLst>
       <p:ext uri="{BB962C8B-B14F-4D97-AF65-F5344CB8AC3E}">
-        <p14:creationId xmlns:p14="http://schemas.microsoft.com/office/powerpoint/2010/main" val="3653603435"/>
+        <p14:creationId xmlns:p14="http://schemas.microsoft.com/office/powerpoint/2010/main" val="439703189"/>
       </p:ext>
     </p:extLst>
   </p:cSld>
@@ -26719,7 +27247,7 @@
         <p:cNvPr id="1" name="">
           <a:extLst>
             <a:ext uri="{FF2B5EF4-FFF2-40B4-BE49-F238E27FC236}">
-              <a16:creationId xmlns:a16="http://schemas.microsoft.com/office/drawing/2014/main" id="{ED478C0D-69E0-7034-60B7-D046DB2A6164}"/>
+              <a16:creationId xmlns:a16="http://schemas.microsoft.com/office/drawing/2014/main" id="{BE912BE9-F76E-4AD9-51F6-7714F89708C2}"/>
             </a:ext>
           </a:extLst>
         </p:cNvPr>
@@ -26739,7 +27267,7 @@
           <p:cNvPr id="2" name="AutoShape 2">
             <a:extLst>
               <a:ext uri="{FF2B5EF4-FFF2-40B4-BE49-F238E27FC236}">
-                <a16:creationId xmlns:a16="http://schemas.microsoft.com/office/drawing/2014/main" id="{59878A1D-9AE6-3F22-3927-39A0E32FCBD0}"/>
+                <a16:creationId xmlns:a16="http://schemas.microsoft.com/office/drawing/2014/main" id="{6C23325E-D84A-B3B8-8870-2B2EC5818C38}"/>
               </a:ext>
             </a:extLst>
           </p:cNvPr>
@@ -26765,77 +27293,60 @@
           <a:bodyPr vert="horz" wrap="square" lIns="0" tIns="0" rIns="0" bIns="0" rtlCol="0" anchor="ctr" anchorCtr="0"/>
           <a:lstStyle/>
           <a:p>
-            <a:pPr>
-              <a:lnSpc>
-                <a:spcPct val="125000"/>
-              </a:lnSpc>
-              <a:defRPr/>
-            </a:pPr>
-            <a:r>
-              <a:rPr lang="en-US" sz="3200" b="1" i="0" u="none" strike="noStrike" dirty="0">
-                <a:solidFill>
-                  <a:srgbClr val="333333"/>
-                </a:solidFill>
-                <a:latin typeface="Noto Sans SC"/>
-                <a:ea typeface="Noto Sans SC"/>
-                <a:cs typeface="Noto Sans SC"/>
-                <a:sym typeface="Noto Sans SC"/>
-              </a:rPr>
-              <a:t>03 </a:t>
-            </a:r>
-            <a:r>
-              <a:rPr lang="zh-CN" altLang="en-US" sz="3200" b="1" i="0" u="none" strike="noStrike" dirty="0">
-                <a:solidFill>
-                  <a:srgbClr val="333333"/>
-                </a:solidFill>
-                <a:latin typeface="Noto Sans SC"/>
-                <a:ea typeface="Noto Sans SC"/>
-                <a:cs typeface="Noto Sans SC"/>
-                <a:sym typeface="Noto Sans SC"/>
-              </a:rPr>
-              <a:t>稳定子</a:t>
-            </a:r>
-            <a:endParaRPr lang="en-US" sz="1100" dirty="0"/>
-          </a:p>
-        </p:txBody>
-      </p:sp>
-      <p:sp>
-        <p:nvSpPr>
-          <p:cNvPr id="3" name="AutoShape 3">
-            <a:extLst>
-              <a:ext uri="{FF2B5EF4-FFF2-40B4-BE49-F238E27FC236}">
-                <a16:creationId xmlns:a16="http://schemas.microsoft.com/office/drawing/2014/main" id="{064AB6D7-07E8-FAF3-C60A-B07058B174D3}"/>
-              </a:ext>
-            </a:extLst>
-          </p:cNvPr>
-          <p:cNvSpPr/>
-          <p:nvPr/>
-        </p:nvSpPr>
-        <p:spPr>
-          <a:xfrm>
-            <a:off x="762000" y="1651000"/>
-            <a:ext cx="10668000" cy="508000"/>
-          </a:xfrm>
-          <a:prstGeom prst="rect">
-            <a:avLst/>
-          </a:prstGeom>
-          <a:noFill/>
-          <a:ln w="12700" cap="flat" cmpd="sng">
-            <a:noFill/>
-            <a:prstDash val="solid"/>
-            <a:round/>
-          </a:ln>
-        </p:spPr>
-        <p:txBody>
-          <a:bodyPr vert="horz" wrap="square" lIns="0" tIns="0" rIns="0" bIns="0" rtlCol="0" anchor="ctr" anchorCtr="0"/>
-          <a:lstStyle/>
-          <a:p>
             <a:pPr indent="0" algn="l">
               <a:lnSpc>
                 <a:spcPct val="125000"/>
               </a:lnSpc>
               <a:defRPr/>
             </a:pPr>
+            <a:r>
+              <a:rPr lang="en-US" sz="3200" b="1" i="0" u="none" strike="noStrike" dirty="0">
+                <a:solidFill>
+                  <a:srgbClr val="333333"/>
+                </a:solidFill>
+                <a:latin typeface="Noto Sans SC"/>
+                <a:ea typeface="Noto Sans SC"/>
+                <a:cs typeface="Noto Sans SC"/>
+                <a:sym typeface="Noto Sans SC"/>
+              </a:rPr>
+              <a:t>0</a:t>
+            </a:r>
+            <a:r>
+              <a:rPr lang="en-US" sz="3200" b="1" dirty="0">
+                <a:solidFill>
+                  <a:srgbClr val="333333"/>
+                </a:solidFill>
+                <a:latin typeface="Noto Sans SC"/>
+                <a:ea typeface="Noto Sans SC"/>
+                <a:cs typeface="Noto Sans SC"/>
+                <a:sym typeface="Noto Sans SC"/>
+              </a:rPr>
+              <a:t>4</a:t>
+            </a:r>
+            <a:r>
+              <a:rPr lang="en-US" sz="3200" b="1" i="0" u="none" strike="noStrike" dirty="0">
+                <a:solidFill>
+                  <a:srgbClr val="333333"/>
+                </a:solidFill>
+                <a:latin typeface="Noto Sans SC"/>
+                <a:ea typeface="Noto Sans SC"/>
+                <a:cs typeface="Noto Sans SC"/>
+                <a:sym typeface="Noto Sans SC"/>
+              </a:rPr>
+              <a:t>  </a:t>
+            </a:r>
+            <a:r>
+              <a:rPr lang="zh-CN" altLang="en-US" sz="3200" b="1" i="0" u="none" strike="noStrike" dirty="0">
+                <a:solidFill>
+                  <a:srgbClr val="333333"/>
+                </a:solidFill>
+                <a:latin typeface="Noto Sans SC"/>
+                <a:ea typeface="Noto Sans SC"/>
+                <a:cs typeface="Noto Sans SC"/>
+                <a:sym typeface="Noto Sans SC"/>
+              </a:rPr>
+              <a:t>稳定子</a:t>
+            </a:r>
             <a:endParaRPr lang="en-US" sz="1100" dirty="0"/>
           </a:p>
         </p:txBody>
@@ -26845,7 +27356,7 @@
           <p:cNvPr id="4" name="直接连接符 3">
             <a:extLst>
               <a:ext uri="{FF2B5EF4-FFF2-40B4-BE49-F238E27FC236}">
-                <a16:creationId xmlns:a16="http://schemas.microsoft.com/office/drawing/2014/main" id="{2034550F-5C2A-1A56-9CB6-452B2F559192}"/>
+                <a16:creationId xmlns:a16="http://schemas.microsoft.com/office/drawing/2014/main" id="{C3BC2802-3568-3C82-5528-E1FBD7DF607F}"/>
               </a:ext>
             </a:extLst>
           </p:cNvPr>
@@ -26887,10 +27398,10 @@
       </p:cxnSp>
       <p:sp>
         <p:nvSpPr>
-          <p:cNvPr id="6" name="AutoShape 3">
-            <a:extLst>
-              <a:ext uri="{FF2B5EF4-FFF2-40B4-BE49-F238E27FC236}">
-                <a16:creationId xmlns:a16="http://schemas.microsoft.com/office/drawing/2014/main" id="{4C207BCB-6A2A-5385-D0D2-8AEE53813A12}"/>
+          <p:cNvPr id="3" name="AutoShape 3">
+            <a:extLst>
+              <a:ext uri="{FF2B5EF4-FFF2-40B4-BE49-F238E27FC236}">
+                <a16:creationId xmlns:a16="http://schemas.microsoft.com/office/drawing/2014/main" id="{CF969287-1204-5BFC-6A86-31E2902BE460}"/>
               </a:ext>
             </a:extLst>
           </p:cNvPr>
@@ -26899,8 +27410,8 @@
         </p:nvSpPr>
         <p:spPr>
           <a:xfrm>
-            <a:off x="1005840" y="1315720"/>
-            <a:ext cx="1877209" cy="1061720"/>
+            <a:off x="762000" y="1651000"/>
+            <a:ext cx="10668000" cy="508000"/>
           </a:xfrm>
           <a:prstGeom prst="rect">
             <a:avLst/>
@@ -26932,7 +27443,7 @@
                 <a:cs typeface="Noto Sans SC"/>
                 <a:sym typeface="Noto Sans SC"/>
               </a:rPr>
-              <a:t>3.1.1</a:t>
+              <a:t>4.3 </a:t>
             </a:r>
             <a:r>
               <a:rPr lang="zh-CN" altLang="en-US" sz="2200" b="1" dirty="0">
@@ -26944,43 +27455,228 @@
                 <a:cs typeface="Noto Sans SC"/>
                 <a:sym typeface="Noto Sans SC"/>
               </a:rPr>
-              <a:t>泡利群</a:t>
-            </a:r>
-            <a:endParaRPr lang="en-US" altLang="zh-CN" sz="2200" b="1" dirty="0">
+              <a:t>量子纠错的条件</a:t>
+            </a:r>
+            <a:r>
+              <a:rPr lang="en-US" altLang="zh-CN" sz="2200" b="1" dirty="0">
+                <a:solidFill>
+                  <a:srgbClr val="555555"/>
+                </a:solidFill>
+                <a:latin typeface="Noto Sans SC"/>
+                <a:ea typeface="Noto Sans SC"/>
+                <a:cs typeface="Noto Sans SC"/>
+                <a:sym typeface="Noto Sans SC"/>
+              </a:rPr>
+              <a:t> </a:t>
+            </a:r>
+            <a:endParaRPr lang="en-US" sz="1100" dirty="0"/>
+          </a:p>
+        </p:txBody>
+      </p:sp>
+      <p:sp>
+        <p:nvSpPr>
+          <p:cNvPr id="7" name="文本框 6">
+            <a:extLst>
+              <a:ext uri="{FF2B5EF4-FFF2-40B4-BE49-F238E27FC236}">
+                <a16:creationId xmlns:a16="http://schemas.microsoft.com/office/drawing/2014/main" id="{9D3652EA-BE48-1601-8248-26331FB18284}"/>
+              </a:ext>
+            </a:extLst>
+          </p:cNvPr>
+          <p:cNvSpPr txBox="1"/>
+          <p:nvPr/>
+        </p:nvSpPr>
+        <p:spPr>
+          <a:xfrm>
+            <a:off x="692932" y="2413897"/>
+            <a:ext cx="6950773" cy="3693319"/>
+          </a:xfrm>
+          <a:prstGeom prst="rect">
+            <a:avLst/>
+          </a:prstGeom>
+          <a:noFill/>
+        </p:spPr>
+        <p:txBody>
+          <a:bodyPr wrap="square">
+            <a:spAutoFit/>
+          </a:bodyPr>
+          <a:lstStyle/>
+          <a:p>
+            <a:r>
+              <a:rPr lang="en-US" altLang="zh-CN" b="1" dirty="0"/>
+              <a:t>QECC</a:t>
+            </a:r>
+            <a:r>
+              <a:rPr lang="zh-CN" altLang="en-US" b="1" dirty="0"/>
+              <a:t>条件的等价表示</a:t>
+            </a:r>
+            <a:endParaRPr lang="en-US" altLang="zh-CN" b="1" dirty="0"/>
+          </a:p>
+          <a:p>
+            <a:endParaRPr lang="en-US" altLang="zh-CN" b="1" dirty="0">
               <a:solidFill>
-                <a:srgbClr val="555555"/>
+                <a:schemeClr val="accent2"/>
               </a:solidFill>
-              <a:latin typeface="Noto Sans SC"/>
-              <a:ea typeface="Noto Sans SC"/>
-              <a:cs typeface="Noto Sans SC"/>
-              <a:sym typeface="Noto Sans SC"/>
             </a:endParaRPr>
           </a:p>
           <a:p>
-            <a:pPr indent="0" algn="l">
-              <a:lnSpc>
-                <a:spcPct val="125000"/>
-              </a:lnSpc>
-              <a:defRPr/>
-            </a:pPr>
-            <a:endParaRPr lang="en-US" altLang="zh-CN" sz="2200" b="1" dirty="0">
-              <a:solidFill>
-                <a:srgbClr val="555555"/>
-              </a:solidFill>
-              <a:latin typeface="Noto Sans SC"/>
-              <a:ea typeface="Noto Sans SC"/>
-              <a:cs typeface="Noto Sans SC"/>
-              <a:sym typeface="Noto Sans SC"/>
-            </a:endParaRPr>
+            <a:r>
+              <a:rPr lang="zh-CN" altLang="en-US" b="1" dirty="0">
+                <a:solidFill>
+                  <a:schemeClr val="accent2"/>
+                </a:solidFill>
+              </a:rPr>
+              <a:t>  物理意义</a:t>
+            </a:r>
+            <a:r>
+              <a:rPr lang="en-US" altLang="zh-CN" b="1" dirty="0"/>
+              <a:t>:</a:t>
+            </a:r>
+            <a:r>
+              <a:rPr lang="zh-CN" altLang="en-US" b="1" dirty="0"/>
+              <a:t>错误不会泄漏信息</a:t>
+            </a:r>
+            <a:r>
+              <a:rPr lang="en-US" altLang="zh-CN" b="1" dirty="0"/>
+              <a:t>(</a:t>
+            </a:r>
+            <a:r>
+              <a:rPr lang="zh-CN" altLang="en-US" b="1" dirty="0"/>
+              <a:t>实际就是不丢失相干性的原因</a:t>
+            </a:r>
+            <a:r>
+              <a:rPr lang="en-US" altLang="zh-CN" b="1" dirty="0"/>
+              <a:t>)</a:t>
+            </a:r>
+          </a:p>
+          <a:p>
+            <a:endParaRPr lang="en-US" altLang="zh-CN" b="1" dirty="0"/>
+          </a:p>
+          <a:p>
+            <a:r>
+              <a:rPr lang="zh-CN" altLang="en-US" b="1" dirty="0"/>
+              <a:t>等价码</a:t>
+            </a:r>
+            <a:endParaRPr lang="en-US" altLang="zh-CN" b="1" dirty="0"/>
+          </a:p>
+          <a:p>
+            <a:r>
+              <a:rPr lang="en-US" altLang="zh-CN" b="1" dirty="0"/>
+              <a:t>  </a:t>
+            </a:r>
+          </a:p>
+          <a:p>
+            <a:r>
+              <a:rPr lang="en-US" altLang="zh-CN" b="1" dirty="0"/>
+              <a:t>  </a:t>
+            </a:r>
+            <a:r>
+              <a:rPr lang="zh-CN" altLang="en-US" b="1" dirty="0"/>
+              <a:t>一个纠错码在</a:t>
+            </a:r>
+            <a:r>
+              <a:rPr lang="zh-CN" altLang="en-US" b="1" dirty="0">
+                <a:solidFill>
+                  <a:schemeClr val="accent2"/>
+                </a:solidFill>
+              </a:rPr>
+              <a:t>单量子比特门操作</a:t>
+            </a:r>
+            <a:r>
+              <a:rPr lang="en-US" altLang="zh-CN" b="1" dirty="0"/>
+              <a:t>(</a:t>
+            </a:r>
+            <a:r>
+              <a:rPr lang="zh-CN" altLang="en-US" b="1" dirty="0"/>
+              <a:t>任意一个</a:t>
+            </a:r>
+            <a:r>
+              <a:rPr lang="en-US" altLang="zh-CN" b="1" dirty="0"/>
+              <a:t>qubit)</a:t>
+            </a:r>
+            <a:r>
+              <a:rPr lang="zh-CN" altLang="en-US" b="1" dirty="0"/>
+              <a:t>或者</a:t>
+            </a:r>
+            <a:r>
+              <a:rPr lang="zh-CN" altLang="en-US" b="1" dirty="0">
+                <a:solidFill>
+                  <a:schemeClr val="accent2"/>
+                </a:solidFill>
+              </a:rPr>
+              <a:t>重排</a:t>
+            </a:r>
+            <a:r>
+              <a:rPr lang="zh-CN" altLang="en-US" b="1" dirty="0"/>
+              <a:t>量子比特顺序获得的量子纠错</a:t>
+            </a:r>
+            <a:endParaRPr lang="en-US" altLang="zh-CN" b="1" dirty="0"/>
+          </a:p>
+          <a:p>
+            <a:endParaRPr lang="en-US" altLang="zh-CN" b="1" dirty="0"/>
+          </a:p>
+          <a:p>
+            <a:r>
+              <a:rPr lang="zh-CN" altLang="en-US" b="1" dirty="0"/>
+              <a:t>性质</a:t>
+            </a:r>
+            <a:endParaRPr lang="en-US" altLang="zh-CN" b="1" dirty="0"/>
+          </a:p>
+          <a:p>
+            <a:r>
+              <a:rPr lang="en-US" altLang="zh-CN" b="1" dirty="0"/>
+              <a:t>  </a:t>
+            </a:r>
+            <a:r>
+              <a:rPr lang="en-US" altLang="zh-CN" b="1" dirty="0" err="1"/>
+              <a:t>nkd</a:t>
+            </a:r>
+            <a:r>
+              <a:rPr lang="zh-CN" altLang="en-US" b="1" dirty="0"/>
+              <a:t>相同</a:t>
+            </a:r>
+            <a:endParaRPr lang="en-US" altLang="zh-CN" b="1" dirty="0"/>
+          </a:p>
+          <a:p>
+            <a:r>
+              <a:rPr lang="en-US" altLang="zh-CN" b="1" dirty="0"/>
+              <a:t>  </a:t>
+            </a:r>
+            <a:r>
+              <a:rPr lang="zh-CN" altLang="en-US" b="1" dirty="0"/>
+              <a:t>擦除集相同</a:t>
+            </a:r>
+            <a:r>
+              <a:rPr lang="en-US" altLang="zh-CN" b="1" dirty="0"/>
+              <a:t>(</a:t>
+            </a:r>
+            <a:r>
+              <a:rPr lang="zh-CN" altLang="en-US" b="1" dirty="0"/>
+              <a:t>只看位置</a:t>
+            </a:r>
+            <a:r>
+              <a:rPr lang="en-US" altLang="zh-CN" b="1" dirty="0"/>
+              <a:t>)</a:t>
+            </a:r>
+          </a:p>
+          <a:p>
+            <a:r>
+              <a:rPr lang="en-US" altLang="zh-CN" b="1" dirty="0"/>
+              <a:t>  </a:t>
+            </a:r>
+            <a:r>
+              <a:rPr lang="zh-CN" altLang="en-US" b="1" dirty="0"/>
+              <a:t>纠错集不一定相同</a:t>
+            </a:r>
+            <a:endParaRPr lang="en-US" altLang="zh-CN" b="1" dirty="0"/>
           </a:p>
         </p:txBody>
       </p:sp>
       <p:pic>
         <p:nvPicPr>
-          <p:cNvPr id="11" name="图片 10">
-            <a:extLst>
-              <a:ext uri="{FF2B5EF4-FFF2-40B4-BE49-F238E27FC236}">
-                <a16:creationId xmlns:a16="http://schemas.microsoft.com/office/drawing/2014/main" id="{9C98D530-48AC-DD7F-A58E-CD9165AA5C5B}"/>
+          <p:cNvPr id="6" name="图片 5">
+            <a:extLst>
+              <a:ext uri="{FF2B5EF4-FFF2-40B4-BE49-F238E27FC236}">
+                <a16:creationId xmlns:a16="http://schemas.microsoft.com/office/drawing/2014/main" id="{D16BDB0D-68CD-CFDB-EFDD-4D7158650086}"/>
               </a:ext>
             </a:extLst>
           </p:cNvPr>
@@ -26997,8 +27693,8 @@
         </p:blipFill>
         <p:spPr>
           <a:xfrm>
-            <a:off x="8438709" y="180453"/>
-            <a:ext cx="3124636" cy="2667372"/>
+            <a:off x="7645097" y="1787484"/>
+            <a:ext cx="4344006" cy="590632"/>
           </a:xfrm>
           <a:prstGeom prst="rect">
             <a:avLst/>
@@ -27007,10 +27703,10 @@
       </p:pic>
       <p:pic>
         <p:nvPicPr>
-          <p:cNvPr id="13" name="图片 12">
-            <a:extLst>
-              <a:ext uri="{FF2B5EF4-FFF2-40B4-BE49-F238E27FC236}">
-                <a16:creationId xmlns:a16="http://schemas.microsoft.com/office/drawing/2014/main" id="{6F074AF4-3082-57CF-4B98-CB23275D58F6}"/>
+          <p:cNvPr id="9" name="图片 8">
+            <a:extLst>
+              <a:ext uri="{FF2B5EF4-FFF2-40B4-BE49-F238E27FC236}">
+                <a16:creationId xmlns:a16="http://schemas.microsoft.com/office/drawing/2014/main" id="{67F8B134-2101-B4A5-242D-8CB51A1F74BB}"/>
               </a:ext>
             </a:extLst>
           </p:cNvPr>
@@ -27027,8 +27723,8 @@
         </p:blipFill>
         <p:spPr>
           <a:xfrm>
-            <a:off x="8716462" y="2865618"/>
-            <a:ext cx="2095792" cy="1686160"/>
+            <a:off x="8281771" y="2727286"/>
+            <a:ext cx="3096057" cy="552527"/>
           </a:xfrm>
           <a:prstGeom prst="rect">
             <a:avLst/>
@@ -27037,10 +27733,10 @@
       </p:pic>
       <p:pic>
         <p:nvPicPr>
-          <p:cNvPr id="15" name="图片 14">
-            <a:extLst>
-              <a:ext uri="{FF2B5EF4-FFF2-40B4-BE49-F238E27FC236}">
-                <a16:creationId xmlns:a16="http://schemas.microsoft.com/office/drawing/2014/main" id="{A750BD3A-1878-627D-7197-D75D9398FC86}"/>
+          <p:cNvPr id="11" name="图片 10">
+            <a:extLst>
+              <a:ext uri="{FF2B5EF4-FFF2-40B4-BE49-F238E27FC236}">
+                <a16:creationId xmlns:a16="http://schemas.microsoft.com/office/drawing/2014/main" id="{195593F6-0BF0-B78B-8C1D-C738473C97A7}"/>
               </a:ext>
             </a:extLst>
           </p:cNvPr>
@@ -27057,8 +27753,8 @@
         </p:blipFill>
         <p:spPr>
           <a:xfrm>
-            <a:off x="7743869" y="4802902"/>
-            <a:ext cx="4191585" cy="1533739"/>
+            <a:off x="8446892" y="3560723"/>
+            <a:ext cx="2791215" cy="562053"/>
           </a:xfrm>
           <a:prstGeom prst="rect">
             <a:avLst/>
@@ -27067,434 +27763,48 @@
       </p:pic>
       <p:sp>
         <p:nvSpPr>
-          <p:cNvPr id="16" name="AutoShape 7">
-            <a:extLst>
-              <a:ext uri="{FF2B5EF4-FFF2-40B4-BE49-F238E27FC236}">
-                <a16:creationId xmlns:a16="http://schemas.microsoft.com/office/drawing/2014/main" id="{77BCB919-D09E-B807-C793-462DBB4A90A3}"/>
-              </a:ext>
-            </a:extLst>
-          </p:cNvPr>
-          <p:cNvSpPr/>
+          <p:cNvPr id="14" name="文本框 13">
+            <a:extLst>
+              <a:ext uri="{FF2B5EF4-FFF2-40B4-BE49-F238E27FC236}">
+                <a16:creationId xmlns:a16="http://schemas.microsoft.com/office/drawing/2014/main" id="{217D32FD-F1BC-3008-2F1A-8F99EF2BA4CD}"/>
+              </a:ext>
+            </a:extLst>
+          </p:cNvPr>
+          <p:cNvSpPr txBox="1"/>
           <p:nvPr/>
         </p:nvSpPr>
         <p:spPr>
           <a:xfrm>
-            <a:off x="736929" y="1861292"/>
-            <a:ext cx="6340764" cy="3061030"/>
+            <a:off x="8477250" y="5308084"/>
+            <a:ext cx="6096000" cy="369332"/>
           </a:xfrm>
           <a:prstGeom prst="rect">
             <a:avLst/>
           </a:prstGeom>
           <a:noFill/>
-          <a:ln w="12700" cap="flat" cmpd="sng">
-            <a:noFill/>
-            <a:prstDash val="solid"/>
-            <a:round/>
-          </a:ln>
-        </p:spPr>
-        <p:txBody>
-          <a:bodyPr vert="horz" wrap="square" lIns="0" tIns="0" rIns="0" bIns="0" rtlCol="0" anchor="ctr" anchorCtr="0"/>
+        </p:spPr>
+        <p:txBody>
+          <a:bodyPr wrap="square">
+            <a:spAutoFit/>
+          </a:bodyPr>
           <a:lstStyle/>
           <a:p>
-            <a:pPr indent="0" algn="l">
-              <a:lnSpc>
-                <a:spcPct val="108333"/>
-              </a:lnSpc>
-              <a:defRPr/>
-            </a:pPr>
-            <a:endParaRPr lang="en-US" sz="2000" dirty="0"/>
-          </a:p>
-        </p:txBody>
-      </p:sp>
-      <mc:AlternateContent xmlns:mc="http://schemas.openxmlformats.org/markup-compatibility/2006" xmlns:a14="http://schemas.microsoft.com/office/drawing/2010/main">
-        <mc:Choice Requires="a14">
-          <p:sp>
-            <p:nvSpPr>
-              <p:cNvPr id="18" name="文本框 17">
-                <a:extLst>
-                  <a:ext uri="{FF2B5EF4-FFF2-40B4-BE49-F238E27FC236}">
-                    <a16:creationId xmlns:a16="http://schemas.microsoft.com/office/drawing/2014/main" id="{F23AF00C-CDE6-3F85-48E0-1A90C0355DD4}"/>
-                  </a:ext>
-                </a:extLst>
-              </p:cNvPr>
-              <p:cNvSpPr txBox="1"/>
-              <p:nvPr/>
-            </p:nvSpPr>
-            <p:spPr>
-              <a:xfrm>
-                <a:off x="895575" y="2324566"/>
-                <a:ext cx="6094206" cy="3416320"/>
-              </a:xfrm>
-              <a:prstGeom prst="rect">
-                <a:avLst/>
-              </a:prstGeom>
-              <a:noFill/>
-            </p:spPr>
-            <p:txBody>
-              <a:bodyPr wrap="square">
-                <a:spAutoFit/>
-              </a:bodyPr>
-              <a:lstStyle/>
-              <a:p>
-                <a:r>
-                  <a:rPr lang="zh-CN" altLang="en-US" sz="2400" b="1" i="0" dirty="0">
-                    <a:solidFill>
-                      <a:schemeClr val="accent2"/>
-                    </a:solidFill>
-                    <a:effectLst/>
-                    <a:latin typeface="quote-cjk-patch"/>
-                  </a:rPr>
-                  <a:t>单</a:t>
-                </a:r>
-                <a:r>
-                  <a:rPr lang="zh-CN" altLang="en-US" sz="2400" b="1" i="0" dirty="0">
-                    <a:solidFill>
-                      <a:srgbClr val="0F1115"/>
-                    </a:solidFill>
-                    <a:effectLst/>
-                    <a:latin typeface="quote-cjk-patch"/>
-                  </a:rPr>
-                  <a:t>量子比特的泡利矩阵 </a:t>
-                </a:r>
-                <a14:m>
-                  <m:oMath xmlns:m="http://schemas.openxmlformats.org/officeDocument/2006/math">
-                    <m:r>
-                      <a:rPr lang="zh-CN" altLang="en-US" sz="2400" i="1">
-                        <a:latin typeface="Cambria Math" panose="02040503050406030204" pitchFamily="18" charset="0"/>
-                      </a:rPr>
-                      <m:t>𝐼</m:t>
-                    </m:r>
-                    <m:r>
-                      <a:rPr lang="en-US" altLang="zh-CN" sz="2400" i="0">
-                        <a:latin typeface="Cambria Math" panose="02040503050406030204" pitchFamily="18" charset="0"/>
-                      </a:rPr>
-                      <m:t>,</m:t>
-                    </m:r>
-                    <m:r>
-                      <a:rPr lang="zh-CN" altLang="en-US" sz="2400" i="1">
-                        <a:latin typeface="Cambria Math" panose="02040503050406030204" pitchFamily="18" charset="0"/>
-                      </a:rPr>
-                      <m:t>𝑋</m:t>
-                    </m:r>
-                    <m:r>
-                      <a:rPr lang="en-US" altLang="zh-CN" sz="2400" i="0">
-                        <a:latin typeface="Cambria Math" panose="02040503050406030204" pitchFamily="18" charset="0"/>
-                      </a:rPr>
-                      <m:t>,</m:t>
-                    </m:r>
-                    <m:r>
-                      <a:rPr lang="zh-CN" altLang="en-US" sz="2400" i="1">
-                        <a:latin typeface="Cambria Math" panose="02040503050406030204" pitchFamily="18" charset="0"/>
-                      </a:rPr>
-                      <m:t>𝑌</m:t>
-                    </m:r>
-                    <m:r>
-                      <a:rPr lang="en-US" altLang="zh-CN" sz="2400" i="0">
-                        <a:latin typeface="Cambria Math" panose="02040503050406030204" pitchFamily="18" charset="0"/>
-                      </a:rPr>
-                      <m:t>,</m:t>
-                    </m:r>
-                    <m:r>
-                      <a:rPr lang="zh-CN" altLang="en-US" sz="2400" i="1">
-                        <a:latin typeface="Cambria Math" panose="02040503050406030204" pitchFamily="18" charset="0"/>
-                      </a:rPr>
-                      <m:t>𝑍</m:t>
-                    </m:r>
-                  </m:oMath>
-                </a14:m>
-                <a:r>
-                  <a:rPr lang="zh-CN" altLang="en-US" sz="2400" b="1" i="0" dirty="0">
-                    <a:solidFill>
-                      <a:srgbClr val="0F1115"/>
-                    </a:solidFill>
-                    <a:effectLst/>
-                    <a:latin typeface="quote-cjk-patch"/>
-                  </a:rPr>
-                  <a:t> </a:t>
-                </a:r>
-                <a:endParaRPr lang="en-US" altLang="zh-CN" sz="2400" b="1" i="0" dirty="0">
-                  <a:solidFill>
-                    <a:srgbClr val="0F1115"/>
-                  </a:solidFill>
-                  <a:effectLst/>
-                  <a:latin typeface="quote-cjk-patch"/>
-                </a:endParaRPr>
-              </a:p>
-              <a:p>
-                <a:r>
-                  <a:rPr lang="zh-CN" altLang="en-US" sz="2400" b="1" i="0" dirty="0">
-                    <a:solidFill>
-                      <a:srgbClr val="0F1115"/>
-                    </a:solidFill>
-                    <a:effectLst/>
-                    <a:latin typeface="quote-cjk-patch"/>
-                  </a:rPr>
-                  <a:t>乘以</a:t>
-                </a:r>
-                <a:r>
-                  <a:rPr lang="zh-CN" altLang="en-US" sz="2400" b="1" i="0" dirty="0">
-                    <a:solidFill>
-                      <a:schemeClr val="accent2"/>
-                    </a:solidFill>
-                    <a:effectLst/>
-                    <a:latin typeface="quote-cjk-patch"/>
-                  </a:rPr>
-                  <a:t>相位</a:t>
-                </a:r>
-                <a:r>
-                  <a:rPr lang="zh-CN" altLang="en-US" sz="2400" b="1" i="0" dirty="0">
-                    <a:solidFill>
-                      <a:srgbClr val="0F1115"/>
-                    </a:solidFill>
-                    <a:effectLst/>
-                    <a:latin typeface="quote-cjk-patch"/>
-                  </a:rPr>
-                  <a:t>因子 </a:t>
-                </a:r>
-                <a14:m>
-                  <m:oMath xmlns:m="http://schemas.openxmlformats.org/officeDocument/2006/math">
-                    <m:r>
-                      <a:rPr lang="en-US" altLang="zh-CN" sz="2400">
-                        <a:latin typeface="Cambria Math" panose="02040503050406030204" pitchFamily="18" charset="0"/>
-                      </a:rPr>
-                      <m:t>±</m:t>
-                    </m:r>
-                    <m:r>
-                      <a:rPr lang="en-US" altLang="zh-CN" sz="2400" i="0">
-                        <a:latin typeface="Cambria Math" panose="02040503050406030204" pitchFamily="18" charset="0"/>
-                      </a:rPr>
-                      <m:t>1</m:t>
-                    </m:r>
-                    <m:r>
-                      <a:rPr lang="en-US" altLang="zh-CN" sz="2400" i="0">
-                        <a:latin typeface="Cambria Math" panose="02040503050406030204" pitchFamily="18" charset="0"/>
-                      </a:rPr>
-                      <m:t>,±</m:t>
-                    </m:r>
-                    <m:r>
-                      <a:rPr lang="zh-CN" altLang="en-US" sz="2400" i="1">
-                        <a:latin typeface="Cambria Math" panose="02040503050406030204" pitchFamily="18" charset="0"/>
-                      </a:rPr>
-                      <m:t>𝑖</m:t>
-                    </m:r>
-                  </m:oMath>
-                </a14:m>
-                <a:r>
-                  <a:rPr lang="zh-CN" altLang="en-US" sz="2400" b="1" i="0" dirty="0">
-                    <a:solidFill>
-                      <a:srgbClr val="0F1115"/>
-                    </a:solidFill>
-                    <a:effectLst/>
-                    <a:latin typeface="quote-cjk-patch"/>
-                  </a:rPr>
-                  <a:t> 后生成的</a:t>
-                </a:r>
-                <a:endParaRPr lang="en-US" altLang="zh-CN" sz="2400" b="1" i="0" dirty="0">
-                  <a:solidFill>
-                    <a:srgbClr val="0F1115"/>
-                  </a:solidFill>
-                  <a:effectLst/>
-                  <a:latin typeface="quote-cjk-patch"/>
-                </a:endParaRPr>
-              </a:p>
-              <a:p>
-                <a14:m>
-                  <m:oMath xmlns:m="http://schemas.openxmlformats.org/officeDocument/2006/math">
-                    <m:r>
-                      <a:rPr lang="en-US" altLang="zh-CN" sz="2400" smtClean="0">
-                        <a:solidFill>
-                          <a:schemeClr val="accent2"/>
-                        </a:solidFill>
-                        <a:latin typeface="Cambria Math" panose="02040503050406030204" pitchFamily="18" charset="0"/>
-                      </a:rPr>
-                      <m:t>16</m:t>
-                    </m:r>
-                  </m:oMath>
-                </a14:m>
-                <a:r>
-                  <a:rPr lang="zh-CN" altLang="en-US" sz="2400" b="1" i="0" dirty="0">
-                    <a:solidFill>
-                      <a:schemeClr val="accent2"/>
-                    </a:solidFill>
-                    <a:effectLst/>
-                    <a:latin typeface="quote-cjk-patch"/>
-                  </a:rPr>
-                  <a:t> </a:t>
-                </a:r>
-                <a:r>
-                  <a:rPr lang="zh-CN" altLang="en-US" sz="2400" b="1" i="0" dirty="0">
-                    <a:solidFill>
-                      <a:srgbClr val="0F1115"/>
-                    </a:solidFill>
-                    <a:effectLst/>
-                    <a:latin typeface="quote-cjk-patch"/>
-                  </a:rPr>
-                  <a:t>个 </a:t>
-                </a:r>
-                <a14:m>
-                  <m:oMath xmlns:m="http://schemas.openxmlformats.org/officeDocument/2006/math">
-                    <m:r>
-                      <a:rPr lang="en-US" altLang="zh-CN" sz="2400">
-                        <a:latin typeface="Cambria Math" panose="02040503050406030204" pitchFamily="18" charset="0"/>
-                      </a:rPr>
-                      <m:t>2</m:t>
-                    </m:r>
-                    <m:r>
-                      <a:rPr lang="en-US" altLang="zh-CN" sz="2400" i="0">
-                        <a:latin typeface="Cambria Math" panose="02040503050406030204" pitchFamily="18" charset="0"/>
-                      </a:rPr>
-                      <m:t>×</m:t>
-                    </m:r>
-                    <m:r>
-                      <a:rPr lang="en-US" altLang="zh-CN" sz="2400" i="0">
-                        <a:latin typeface="Cambria Math" panose="02040503050406030204" pitchFamily="18" charset="0"/>
-                      </a:rPr>
-                      <m:t>2</m:t>
-                    </m:r>
-                  </m:oMath>
-                </a14:m>
-                <a:r>
-                  <a:rPr lang="zh-CN" altLang="en-US" sz="2400" b="1" i="0" dirty="0">
-                    <a:solidFill>
-                      <a:srgbClr val="0F1115"/>
-                    </a:solidFill>
-                    <a:effectLst/>
-                    <a:latin typeface="quote-cjk-patch"/>
-                  </a:rPr>
-                  <a:t> 矩阵构成的集合</a:t>
-                </a:r>
-                <a:endParaRPr lang="en-US" altLang="zh-CN" sz="2400" b="1" i="0" dirty="0">
-                  <a:solidFill>
-                    <a:srgbClr val="0F1115"/>
-                  </a:solidFill>
-                  <a:effectLst/>
-                  <a:latin typeface="quote-cjk-patch"/>
-                </a:endParaRPr>
-              </a:p>
-              <a:p>
-                <a:endParaRPr lang="en-US" altLang="zh-CN" sz="2400" b="1" i="0" dirty="0">
-                  <a:solidFill>
-                    <a:srgbClr val="0F1115"/>
-                  </a:solidFill>
-                  <a:effectLst/>
-                  <a:latin typeface="quote-cjk-patch"/>
-                </a:endParaRPr>
-              </a:p>
-              <a:p>
-                <a:r>
-                  <a:rPr lang="en-US" altLang="zh-CN" sz="2400" b="1" dirty="0">
-                    <a:solidFill>
-                      <a:schemeClr val="accent2"/>
-                    </a:solidFill>
-                    <a:latin typeface="quote-cjk-patch"/>
-                  </a:rPr>
-                  <a:t>g</a:t>
-                </a:r>
-                <a:r>
-                  <a:rPr lang="en-US" altLang="zh-CN" sz="2400" b="1" dirty="0">
-                    <a:solidFill>
-                      <a:srgbClr val="0F1115"/>
-                    </a:solidFill>
-                    <a:latin typeface="quote-cjk-patch"/>
-                  </a:rPr>
-                  <a:t>(group)</a:t>
-                </a:r>
-              </a:p>
-              <a:p>
-                <a:r>
-                  <a:rPr lang="en-US" altLang="zh-CN" sz="2400" b="1" dirty="0">
-                    <a:solidFill>
-                      <a:srgbClr val="0F1115"/>
-                    </a:solidFill>
-                    <a:latin typeface="quote-cjk-patch"/>
-                  </a:rPr>
-                  <a:t>e f </a:t>
-                </a:r>
-                <a:r>
-                  <a:rPr lang="en-US" altLang="zh-CN" sz="2400" b="1" dirty="0">
-                    <a:solidFill>
-                      <a:schemeClr val="accent2"/>
-                    </a:solidFill>
-                    <a:latin typeface="quote-cjk-patch"/>
-                  </a:rPr>
-                  <a:t>g h</a:t>
-                </a:r>
-              </a:p>
-              <a:p>
-                <a:endParaRPr lang="en-US" altLang="zh-CN" sz="2400" b="1" dirty="0">
-                  <a:solidFill>
-                    <a:schemeClr val="accent2"/>
-                  </a:solidFill>
-                  <a:latin typeface="quote-cjk-patch"/>
-                </a:endParaRPr>
-              </a:p>
-              <a:p>
-                <a:endParaRPr lang="en-US" altLang="zh-CN" sz="2400" b="1" dirty="0">
-                  <a:solidFill>
-                    <a:schemeClr val="accent2"/>
-                  </a:solidFill>
-                  <a:latin typeface="quote-cjk-patch"/>
-                </a:endParaRPr>
-              </a:p>
-              <a:p>
-                <a:endParaRPr lang="zh-CN" altLang="en-US" sz="2400" dirty="0">
-                  <a:solidFill>
-                    <a:schemeClr val="accent2"/>
-                  </a:solidFill>
-                </a:endParaRPr>
-              </a:p>
-            </p:txBody>
-          </p:sp>
-        </mc:Choice>
-        <mc:Fallback xmlns="">
-          <p:sp>
-            <p:nvSpPr>
-              <p:cNvPr id="18" name="文本框 17">
-                <a:extLst>
-                  <a:ext uri="{FF2B5EF4-FFF2-40B4-BE49-F238E27FC236}">
-                    <a16:creationId xmlns:a16="http://schemas.microsoft.com/office/drawing/2014/main" id="{F23AF00C-CDE6-3F85-48E0-1A90C0355DD4}"/>
-                  </a:ext>
-                </a:extLst>
-              </p:cNvPr>
-              <p:cNvSpPr txBox="1">
-                <a:spLocks noRot="1" noChangeAspect="1" noMove="1" noResize="1" noEditPoints="1" noAdjustHandles="1" noChangeArrowheads="1" noChangeShapeType="1" noTextEdit="1"/>
-              </p:cNvSpPr>
-              <p:nvPr/>
-            </p:nvSpPr>
-            <p:spPr>
-              <a:xfrm>
-                <a:off x="895575" y="2324566"/>
-                <a:ext cx="6094206" cy="3416320"/>
-              </a:xfrm>
-              <a:prstGeom prst="rect">
-                <a:avLst/>
-              </a:prstGeom>
-              <a:blipFill>
-                <a:blip r:embed="rId6"/>
-                <a:stretch>
-                  <a:fillRect l="-1600" t="-1248"/>
-                </a:stretch>
-              </a:blipFill>
-            </p:spPr>
-            <p:txBody>
-              <a:bodyPr/>
-              <a:lstStyle/>
-              <a:p>
-                <a:r>
-                  <a:rPr lang="zh-CN" altLang="en-US">
-                    <a:noFill/>
-                  </a:rPr>
-                  <a:t> </a:t>
-                </a:r>
-              </a:p>
-            </p:txBody>
-          </p:sp>
-        </mc:Fallback>
-      </mc:AlternateContent>
+            <a:r>
+              <a:rPr lang="zh-CN" altLang="en-US" b="1" dirty="0"/>
+              <a:t>|000⟩                           </a:t>
+            </a:r>
+            <a:r>
+              <a:rPr lang="en-US" altLang="zh-CN" b="1" dirty="0"/>
+              <a:t>|+++⟩</a:t>
+            </a:r>
+            <a:endParaRPr lang="zh-CN" altLang="en-US" b="1" dirty="0"/>
+          </a:p>
+        </p:txBody>
+      </p:sp>
     </p:spTree>
     <p:extLst>
       <p:ext uri="{BB962C8B-B14F-4D97-AF65-F5344CB8AC3E}">
-        <p14:creationId xmlns:p14="http://schemas.microsoft.com/office/powerpoint/2010/main" val="115895750"/>
+        <p14:creationId xmlns:p14="http://schemas.microsoft.com/office/powerpoint/2010/main" val="3519842499"/>
       </p:ext>
     </p:extLst>
   </p:cSld>
@@ -27524,7 +27834,7 @@
         <p:cNvPr id="1" name="">
           <a:extLst>
             <a:ext uri="{FF2B5EF4-FFF2-40B4-BE49-F238E27FC236}">
-              <a16:creationId xmlns:a16="http://schemas.microsoft.com/office/drawing/2014/main" id="{16FF2551-B6DD-BC69-23FB-62F545EA4C00}"/>
+              <a16:creationId xmlns:a16="http://schemas.microsoft.com/office/drawing/2014/main" id="{4B85C3D0-2295-8C02-50E6-32C94949065F}"/>
             </a:ext>
           </a:extLst>
         </p:cNvPr>
@@ -27544,7 +27854,7 @@
           <p:cNvPr id="2" name="AutoShape 2">
             <a:extLst>
               <a:ext uri="{FF2B5EF4-FFF2-40B4-BE49-F238E27FC236}">
-                <a16:creationId xmlns:a16="http://schemas.microsoft.com/office/drawing/2014/main" id="{2E399A43-7346-FFA3-19BC-245E246F9DF7}"/>
+                <a16:creationId xmlns:a16="http://schemas.microsoft.com/office/drawing/2014/main" id="{B7722DD4-7326-F203-BF4B-D7E8928BE23D}"/>
               </a:ext>
             </a:extLst>
           </p:cNvPr>
@@ -27570,77 +27880,60 @@
           <a:bodyPr vert="horz" wrap="square" lIns="0" tIns="0" rIns="0" bIns="0" rtlCol="0" anchor="ctr" anchorCtr="0"/>
           <a:lstStyle/>
           <a:p>
-            <a:pPr>
-              <a:lnSpc>
-                <a:spcPct val="125000"/>
-              </a:lnSpc>
-              <a:defRPr/>
-            </a:pPr>
-            <a:r>
-              <a:rPr lang="en-US" sz="3200" b="1" i="0" u="none" strike="noStrike" dirty="0">
-                <a:solidFill>
-                  <a:srgbClr val="333333"/>
-                </a:solidFill>
-                <a:latin typeface="Noto Sans SC"/>
-                <a:ea typeface="Noto Sans SC"/>
-                <a:cs typeface="Noto Sans SC"/>
-                <a:sym typeface="Noto Sans SC"/>
-              </a:rPr>
-              <a:t>03 </a:t>
-            </a:r>
-            <a:r>
-              <a:rPr lang="zh-CN" altLang="en-US" sz="3200" b="1" i="0" u="none" strike="noStrike" dirty="0">
-                <a:solidFill>
-                  <a:srgbClr val="333333"/>
-                </a:solidFill>
-                <a:latin typeface="Noto Sans SC"/>
-                <a:ea typeface="Noto Sans SC"/>
-                <a:cs typeface="Noto Sans SC"/>
-                <a:sym typeface="Noto Sans SC"/>
-              </a:rPr>
-              <a:t>稳定子</a:t>
-            </a:r>
-            <a:endParaRPr lang="en-US" sz="1100" dirty="0"/>
-          </a:p>
-        </p:txBody>
-      </p:sp>
-      <p:sp>
-        <p:nvSpPr>
-          <p:cNvPr id="3" name="AutoShape 3">
-            <a:extLst>
-              <a:ext uri="{FF2B5EF4-FFF2-40B4-BE49-F238E27FC236}">
-                <a16:creationId xmlns:a16="http://schemas.microsoft.com/office/drawing/2014/main" id="{A130DFF4-47EA-B098-C3D3-F65543E093AD}"/>
-              </a:ext>
-            </a:extLst>
-          </p:cNvPr>
-          <p:cNvSpPr/>
-          <p:nvPr/>
-        </p:nvSpPr>
-        <p:spPr>
-          <a:xfrm>
-            <a:off x="762000" y="1651000"/>
-            <a:ext cx="10668000" cy="508000"/>
-          </a:xfrm>
-          <a:prstGeom prst="rect">
-            <a:avLst/>
-          </a:prstGeom>
-          <a:noFill/>
-          <a:ln w="12700" cap="flat" cmpd="sng">
-            <a:noFill/>
-            <a:prstDash val="solid"/>
-            <a:round/>
-          </a:ln>
-        </p:spPr>
-        <p:txBody>
-          <a:bodyPr vert="horz" wrap="square" lIns="0" tIns="0" rIns="0" bIns="0" rtlCol="0" anchor="ctr" anchorCtr="0"/>
-          <a:lstStyle/>
-          <a:p>
             <a:pPr indent="0" algn="l">
               <a:lnSpc>
                 <a:spcPct val="125000"/>
               </a:lnSpc>
               <a:defRPr/>
             </a:pPr>
+            <a:r>
+              <a:rPr lang="en-US" sz="3200" b="1" i="0" u="none" strike="noStrike" dirty="0">
+                <a:solidFill>
+                  <a:srgbClr val="333333"/>
+                </a:solidFill>
+                <a:latin typeface="Noto Sans SC"/>
+                <a:ea typeface="Noto Sans SC"/>
+                <a:cs typeface="Noto Sans SC"/>
+                <a:sym typeface="Noto Sans SC"/>
+              </a:rPr>
+              <a:t>0</a:t>
+            </a:r>
+            <a:r>
+              <a:rPr lang="en-US" sz="3200" b="1" dirty="0">
+                <a:solidFill>
+                  <a:srgbClr val="333333"/>
+                </a:solidFill>
+                <a:latin typeface="Noto Sans SC"/>
+                <a:ea typeface="Noto Sans SC"/>
+                <a:cs typeface="Noto Sans SC"/>
+                <a:sym typeface="Noto Sans SC"/>
+              </a:rPr>
+              <a:t>4</a:t>
+            </a:r>
+            <a:r>
+              <a:rPr lang="en-US" sz="3200" b="1" i="0" u="none" strike="noStrike" dirty="0">
+                <a:solidFill>
+                  <a:srgbClr val="333333"/>
+                </a:solidFill>
+                <a:latin typeface="Noto Sans SC"/>
+                <a:ea typeface="Noto Sans SC"/>
+                <a:cs typeface="Noto Sans SC"/>
+                <a:sym typeface="Noto Sans SC"/>
+              </a:rPr>
+              <a:t>  </a:t>
+            </a:r>
+            <a:r>
+              <a:rPr lang="zh-CN" altLang="en-US" sz="3200" b="1" i="0" u="none" strike="noStrike" dirty="0">
+                <a:solidFill>
+                  <a:srgbClr val="333333"/>
+                </a:solidFill>
+                <a:latin typeface="Noto Sans SC"/>
+                <a:ea typeface="Noto Sans SC"/>
+                <a:cs typeface="Noto Sans SC"/>
+                <a:sym typeface="Noto Sans SC"/>
+              </a:rPr>
+              <a:t>稳定子</a:t>
+            </a:r>
             <a:endParaRPr lang="en-US" sz="1100" dirty="0"/>
           </a:p>
         </p:txBody>
@@ -27650,7 +27943,7 @@
           <p:cNvPr id="4" name="直接连接符 3">
             <a:extLst>
               <a:ext uri="{FF2B5EF4-FFF2-40B4-BE49-F238E27FC236}">
-                <a16:creationId xmlns:a16="http://schemas.microsoft.com/office/drawing/2014/main" id="{35522C79-C040-68B4-F0F1-6F0D3131FE61}"/>
+                <a16:creationId xmlns:a16="http://schemas.microsoft.com/office/drawing/2014/main" id="{A0D52E4C-5E34-D52C-5619-B532CCF4551C}"/>
               </a:ext>
             </a:extLst>
           </p:cNvPr>
@@ -27692,10 +27985,10 @@
       </p:cxnSp>
       <p:sp>
         <p:nvSpPr>
-          <p:cNvPr id="6" name="AutoShape 3">
-            <a:extLst>
-              <a:ext uri="{FF2B5EF4-FFF2-40B4-BE49-F238E27FC236}">
-                <a16:creationId xmlns:a16="http://schemas.microsoft.com/office/drawing/2014/main" id="{C7ED3541-43E7-82B8-A10B-0193E1FE46E6}"/>
+          <p:cNvPr id="3" name="AutoShape 3">
+            <a:extLst>
+              <a:ext uri="{FF2B5EF4-FFF2-40B4-BE49-F238E27FC236}">
+                <a16:creationId xmlns:a16="http://schemas.microsoft.com/office/drawing/2014/main" id="{D1FB2B39-3931-1035-37DE-019CB14775CC}"/>
               </a:ext>
             </a:extLst>
           </p:cNvPr>
@@ -27704,8 +27997,8 @@
         </p:nvSpPr>
         <p:spPr>
           <a:xfrm>
-            <a:off x="1005840" y="1315720"/>
-            <a:ext cx="2587214" cy="1061720"/>
+            <a:off x="762000" y="1651000"/>
+            <a:ext cx="10668000" cy="508000"/>
           </a:xfrm>
           <a:prstGeom prst="rect">
             <a:avLst/>
@@ -27737,7 +28030,7 @@
                 <a:cs typeface="Noto Sans SC"/>
                 <a:sym typeface="Noto Sans SC"/>
               </a:rPr>
-              <a:t>3.1.2</a:t>
+              <a:t>4.1~3 </a:t>
             </a:r>
             <a:r>
               <a:rPr lang="zh-CN" altLang="en-US" sz="2200" b="1" dirty="0">
@@ -27749,235 +28042,412 @@
                 <a:cs typeface="Noto Sans SC"/>
                 <a:sym typeface="Noto Sans SC"/>
               </a:rPr>
-              <a:t>广义泡利群</a:t>
-            </a:r>
-            <a:endParaRPr lang="en-US" altLang="zh-CN" sz="2200" b="1" dirty="0">
-              <a:solidFill>
-                <a:srgbClr val="555555"/>
-              </a:solidFill>
-              <a:latin typeface="Noto Sans SC"/>
-              <a:ea typeface="Noto Sans SC"/>
-              <a:cs typeface="Noto Sans SC"/>
-              <a:sym typeface="Noto Sans SC"/>
-            </a:endParaRPr>
-          </a:p>
-          <a:p>
-            <a:pPr indent="0" algn="l">
-              <a:lnSpc>
-                <a:spcPct val="125000"/>
-              </a:lnSpc>
-              <a:defRPr/>
-            </a:pPr>
-            <a:endParaRPr lang="en-US" altLang="zh-CN" sz="2200" b="1" dirty="0">
-              <a:solidFill>
-                <a:srgbClr val="555555"/>
-              </a:solidFill>
-              <a:latin typeface="Noto Sans SC"/>
-              <a:ea typeface="Noto Sans SC"/>
-              <a:cs typeface="Noto Sans SC"/>
-              <a:sym typeface="Noto Sans SC"/>
-            </a:endParaRPr>
-          </a:p>
-        </p:txBody>
-      </p:sp>
-      <p:sp>
-        <p:nvSpPr>
-          <p:cNvPr id="16" name="AutoShape 7">
-            <a:extLst>
-              <a:ext uri="{FF2B5EF4-FFF2-40B4-BE49-F238E27FC236}">
-                <a16:creationId xmlns:a16="http://schemas.microsoft.com/office/drawing/2014/main" id="{A60A6B15-FDCD-EF5B-CD43-EAD08D215F8E}"/>
-              </a:ext>
-            </a:extLst>
-          </p:cNvPr>
-          <p:cNvSpPr/>
-          <p:nvPr/>
-        </p:nvSpPr>
-        <p:spPr>
-          <a:xfrm>
-            <a:off x="736929" y="1861292"/>
-            <a:ext cx="6340764" cy="3061030"/>
-          </a:xfrm>
-          <a:prstGeom prst="rect">
-            <a:avLst/>
-          </a:prstGeom>
-          <a:noFill/>
-          <a:ln w="12700" cap="flat" cmpd="sng">
-            <a:noFill/>
-            <a:prstDash val="solid"/>
-            <a:round/>
-          </a:ln>
-        </p:spPr>
-        <p:txBody>
-          <a:bodyPr vert="horz" wrap="square" lIns="0" tIns="0" rIns="0" bIns="0" rtlCol="0" anchor="ctr" anchorCtr="0"/>
-          <a:lstStyle/>
-          <a:p>
-            <a:pPr indent="0" algn="l">
-              <a:lnSpc>
-                <a:spcPct val="108333"/>
-              </a:lnSpc>
-              <a:defRPr/>
-            </a:pPr>
-            <a:endParaRPr lang="en-US" sz="2000" dirty="0"/>
-          </a:p>
-        </p:txBody>
-      </p:sp>
-      <p:sp>
-        <p:nvSpPr>
-          <p:cNvPr id="18" name="文本框 17">
-            <a:extLst>
-              <a:ext uri="{FF2B5EF4-FFF2-40B4-BE49-F238E27FC236}">
-                <a16:creationId xmlns:a16="http://schemas.microsoft.com/office/drawing/2014/main" id="{EE1DBBE6-4C18-DA89-CDDE-00BE16EB2BA5}"/>
-              </a:ext>
-            </a:extLst>
-          </p:cNvPr>
-          <p:cNvSpPr txBox="1"/>
-          <p:nvPr/>
-        </p:nvSpPr>
-        <p:spPr>
-          <a:xfrm>
-            <a:off x="1046182" y="3529423"/>
-            <a:ext cx="6094206" cy="1569660"/>
-          </a:xfrm>
-          <a:prstGeom prst="rect">
-            <a:avLst/>
-          </a:prstGeom>
-          <a:noFill/>
-        </p:spPr>
-        <p:txBody>
-          <a:bodyPr wrap="square">
-            <a:spAutoFit/>
-          </a:bodyPr>
-          <a:lstStyle/>
-          <a:p>
-            <a:r>
-              <a:rPr lang="zh-CN" altLang="en-US" sz="2400" b="1" dirty="0">
-                <a:latin typeface="quote-cjk-patch"/>
-              </a:rPr>
-              <a:t>泡利群的张量积结果</a:t>
-            </a:r>
-            <a:endParaRPr lang="en-US" altLang="zh-CN" sz="2400" b="1" dirty="0">
-              <a:latin typeface="quote-cjk-patch"/>
-            </a:endParaRPr>
-          </a:p>
-          <a:p>
-            <a:endParaRPr lang="en-US" altLang="zh-CN" sz="2400" b="1" dirty="0">
-              <a:solidFill>
-                <a:schemeClr val="accent2"/>
-              </a:solidFill>
-              <a:latin typeface="quote-cjk-patch"/>
-            </a:endParaRPr>
-          </a:p>
-          <a:p>
-            <a:endParaRPr lang="en-US" altLang="zh-CN" sz="2400" b="1" dirty="0">
-              <a:solidFill>
-                <a:schemeClr val="accent2"/>
-              </a:solidFill>
-              <a:latin typeface="quote-cjk-patch"/>
-            </a:endParaRPr>
-          </a:p>
-          <a:p>
-            <a:endParaRPr lang="zh-CN" altLang="en-US" sz="2400" dirty="0">
-              <a:solidFill>
-                <a:schemeClr val="accent2"/>
-              </a:solidFill>
-            </a:endParaRPr>
-          </a:p>
-        </p:txBody>
-      </p:sp>
-      <p:pic>
-        <p:nvPicPr>
-          <p:cNvPr id="7" name="图片 6">
-            <a:extLst>
-              <a:ext uri="{FF2B5EF4-FFF2-40B4-BE49-F238E27FC236}">
-                <a16:creationId xmlns:a16="http://schemas.microsoft.com/office/drawing/2014/main" id="{7FCAEAF6-C7BA-EA09-1BD4-B715472F0C17}"/>
-              </a:ext>
-            </a:extLst>
-          </p:cNvPr>
-          <p:cNvPicPr>
-            <a:picLocks noChangeAspect="1"/>
-          </p:cNvPicPr>
-          <p:nvPr/>
-        </p:nvPicPr>
-        <p:blipFill>
-          <a:blip r:embed="rId3"/>
-          <a:stretch>
-            <a:fillRect/>
-          </a:stretch>
-        </p:blipFill>
-        <p:spPr>
-          <a:xfrm>
-            <a:off x="7823051" y="544428"/>
-            <a:ext cx="4368949" cy="1958239"/>
-          </a:xfrm>
-          <a:prstGeom prst="rect">
-            <a:avLst/>
-          </a:prstGeom>
-        </p:spPr>
-      </p:pic>
-      <p:pic>
-        <p:nvPicPr>
-          <p:cNvPr id="8" name="图片 7">
-            <a:extLst>
-              <a:ext uri="{FF2B5EF4-FFF2-40B4-BE49-F238E27FC236}">
-                <a16:creationId xmlns:a16="http://schemas.microsoft.com/office/drawing/2014/main" id="{22B2038C-F743-2D0C-F5E5-47D89498C904}"/>
-              </a:ext>
-            </a:extLst>
-          </p:cNvPr>
-          <p:cNvPicPr>
-            <a:picLocks noChangeAspect="1"/>
-          </p:cNvPicPr>
-          <p:nvPr/>
-        </p:nvPicPr>
-        <p:blipFill>
-          <a:blip r:embed="rId4"/>
-          <a:stretch>
-            <a:fillRect/>
-          </a:stretch>
-        </p:blipFill>
-        <p:spPr>
-          <a:xfrm>
-            <a:off x="8716462" y="2865618"/>
-            <a:ext cx="2095792" cy="1686160"/>
-          </a:xfrm>
-          <a:prstGeom prst="rect">
-            <a:avLst/>
-          </a:prstGeom>
-        </p:spPr>
-      </p:pic>
-      <p:pic>
-        <p:nvPicPr>
-          <p:cNvPr id="9" name="图片 8">
-            <a:extLst>
-              <a:ext uri="{FF2B5EF4-FFF2-40B4-BE49-F238E27FC236}">
-                <a16:creationId xmlns:a16="http://schemas.microsoft.com/office/drawing/2014/main" id="{CD38DBB3-FB92-71B4-B7CB-CBAACB5D72CF}"/>
-              </a:ext>
-            </a:extLst>
-          </p:cNvPr>
-          <p:cNvPicPr>
-            <a:picLocks noChangeAspect="1"/>
-          </p:cNvPicPr>
-          <p:nvPr/>
-        </p:nvPicPr>
-        <p:blipFill>
-          <a:blip r:embed="rId5"/>
-          <a:stretch>
-            <a:fillRect/>
-          </a:stretch>
-        </p:blipFill>
-        <p:spPr>
-          <a:xfrm>
-            <a:off x="7743869" y="4802902"/>
-            <a:ext cx="4191585" cy="1533739"/>
-          </a:xfrm>
-          <a:prstGeom prst="rect">
-            <a:avLst/>
-          </a:prstGeom>
-        </p:spPr>
-      </p:pic>
+              <a:t>总结</a:t>
+            </a:r>
+            <a:endParaRPr lang="en-US" sz="1100" dirty="0"/>
+          </a:p>
+        </p:txBody>
+      </p:sp>
+      <mc:AlternateContent xmlns:mc="http://schemas.openxmlformats.org/markup-compatibility/2006" xmlns:a14="http://schemas.microsoft.com/office/drawing/2010/main">
+        <mc:Choice Requires="a14">
+          <p:sp>
+            <p:nvSpPr>
+              <p:cNvPr id="5" name="文本框 4">
+                <a:extLst>
+                  <a:ext uri="{FF2B5EF4-FFF2-40B4-BE49-F238E27FC236}">
+                    <a16:creationId xmlns:a16="http://schemas.microsoft.com/office/drawing/2014/main" id="{42AF2BCF-CFE4-611D-F030-4F223EB19B91}"/>
+                  </a:ext>
+                </a:extLst>
+              </p:cNvPr>
+              <p:cNvSpPr txBox="1"/>
+              <p:nvPr/>
+            </p:nvSpPr>
+            <p:spPr>
+              <a:xfrm>
+                <a:off x="718332" y="2953647"/>
+                <a:ext cx="6950773" cy="2308324"/>
+              </a:xfrm>
+              <a:prstGeom prst="rect">
+                <a:avLst/>
+              </a:prstGeom>
+              <a:noFill/>
+            </p:spPr>
+            <p:txBody>
+              <a:bodyPr wrap="square">
+                <a:spAutoFit/>
+              </a:bodyPr>
+              <a:lstStyle/>
+              <a:p>
+                <a:r>
+                  <a:rPr lang="zh-CN" altLang="en-US" b="1" dirty="0"/>
+                  <a:t>量子纠错理论概念</a:t>
+                </a:r>
+                <a:endParaRPr lang="en-US" altLang="zh-CN" b="1" dirty="0"/>
+              </a:p>
+              <a:p>
+                <a:r>
+                  <a:rPr lang="en-US" altLang="zh-CN" b="1" dirty="0"/>
+                  <a:t>        </a:t>
+                </a:r>
+                <a:r>
+                  <a:rPr lang="zh-CN" altLang="en-US" b="1" dirty="0"/>
+                  <a:t>定义 </a:t>
+                </a:r>
+                <a14:m>
+                  <m:oMath xmlns:m="http://schemas.openxmlformats.org/officeDocument/2006/math">
+                    <m:d>
+                      <m:dPr>
+                        <m:sepChr m:val=","/>
+                        <m:ctrlPr>
+                          <a:rPr lang="ar-AE" altLang="zh-CN" b="1" i="1">
+                            <a:solidFill>
+                              <a:schemeClr val="accent2"/>
+                            </a:solidFill>
+                            <a:latin typeface="Cambria Math" panose="02040503050406030204" pitchFamily="18" charset="0"/>
+                          </a:rPr>
+                        </m:ctrlPr>
+                      </m:dPr>
+                      <m:e>
+                        <m:r>
+                          <a:rPr lang="zh-CN" altLang="ar-AE" b="1" i="1">
+                            <a:solidFill>
+                              <a:schemeClr val="accent2"/>
+                            </a:solidFill>
+                            <a:latin typeface="Cambria Math" panose="02040503050406030204" pitchFamily="18" charset="0"/>
+                          </a:rPr>
+                          <m:t>𝑼</m:t>
+                        </m:r>
+                      </m:e>
+                      <m:e>
+                        <m:r>
+                          <a:rPr lang="ar-AE" altLang="zh-CN" b="1">
+                            <a:solidFill>
+                              <a:schemeClr val="accent2"/>
+                            </a:solidFill>
+                            <a:latin typeface="Cambria Math" panose="02040503050406030204" pitchFamily="18" charset="0"/>
+                          </a:rPr>
+                          <m:t>𝓔</m:t>
+                        </m:r>
+                      </m:e>
+                    </m:d>
+                  </m:oMath>
+                </a14:m>
+                <a:r>
+                  <a:rPr lang="en-US" altLang="zh-CN" b="1" dirty="0"/>
+                  <a:t> / </a:t>
+                </a:r>
+                <a14:m>
+                  <m:oMath xmlns:m="http://schemas.openxmlformats.org/officeDocument/2006/math">
+                    <m:d>
+                      <m:dPr>
+                        <m:sepChr m:val=","/>
+                        <m:ctrlPr>
+                          <a:rPr lang="ar-AE" altLang="zh-CN" b="1" i="1" smtClean="0">
+                            <a:solidFill>
+                              <a:schemeClr val="accent2"/>
+                            </a:solidFill>
+                            <a:latin typeface="Cambria Math" panose="02040503050406030204" pitchFamily="18" charset="0"/>
+                          </a:rPr>
+                        </m:ctrlPr>
+                      </m:dPr>
+                      <m:e>
+                        <m:r>
+                          <a:rPr lang="en-US" altLang="zh-CN" b="1" i="1">
+                            <a:solidFill>
+                              <a:schemeClr val="accent2"/>
+                            </a:solidFill>
+                            <a:latin typeface="Cambria Math" panose="02040503050406030204" pitchFamily="18" charset="0"/>
+                          </a:rPr>
+                          <m:t>𝑸</m:t>
+                        </m:r>
+                      </m:e>
+                      <m:e>
+                        <m:r>
+                          <a:rPr lang="ar-AE" altLang="zh-CN" b="1">
+                            <a:solidFill>
+                              <a:schemeClr val="accent2"/>
+                            </a:solidFill>
+                            <a:latin typeface="Cambria Math" panose="02040503050406030204" pitchFamily="18" charset="0"/>
+                          </a:rPr>
+                          <m:t>𝓔</m:t>
+                        </m:r>
+                      </m:e>
+                    </m:d>
+                  </m:oMath>
+                </a14:m>
+                <a:endParaRPr lang="en-US" altLang="zh-CN" b="1" dirty="0"/>
+              </a:p>
+              <a:p>
+                <a:r>
+                  <a:rPr lang="en-US" altLang="zh-CN" b="1" dirty="0"/>
+                  <a:t>        </a:t>
+                </a:r>
+                <a:r>
+                  <a:rPr lang="zh-CN" altLang="en-US" b="1" dirty="0"/>
+                  <a:t>性质 </a:t>
+                </a:r>
+                <a:r>
+                  <a:rPr lang="zh-CN" altLang="en-US" b="1" dirty="0">
+                    <a:solidFill>
+                      <a:schemeClr val="accent2"/>
+                    </a:solidFill>
+                  </a:rPr>
+                  <a:t>线性性质</a:t>
+                </a:r>
+                <a:endParaRPr lang="en-US" altLang="zh-CN" b="1" dirty="0">
+                  <a:solidFill>
+                    <a:schemeClr val="accent2"/>
+                  </a:solidFill>
+                </a:endParaRPr>
+              </a:p>
+              <a:p>
+                <a:r>
+                  <a:rPr lang="en-US" altLang="zh-CN" b="1" dirty="0"/>
+                  <a:t>        </a:t>
+                </a:r>
+                <a:r>
+                  <a:rPr lang="zh-CN" altLang="en-US" b="1" dirty="0"/>
+                  <a:t>条件 </a:t>
+                </a:r>
+                <a:r>
+                  <a:rPr lang="zh-CN" altLang="en-US" b="1" dirty="0">
+                    <a:solidFill>
+                      <a:schemeClr val="accent2"/>
+                    </a:solidFill>
+                  </a:rPr>
+                  <a:t>充分条件</a:t>
+                </a:r>
+                <a:r>
+                  <a:rPr lang="en-US" altLang="zh-CN" b="1" dirty="0"/>
+                  <a:t>/ </a:t>
+                </a:r>
+                <a:r>
+                  <a:rPr lang="en-US" altLang="zh-CN" b="1" dirty="0">
+                    <a:solidFill>
+                      <a:schemeClr val="accent2"/>
+                    </a:solidFill>
+                  </a:rPr>
+                  <a:t>QECC</a:t>
+                </a:r>
+                <a:r>
+                  <a:rPr lang="zh-CN" altLang="en-US" b="1" dirty="0">
+                    <a:solidFill>
+                      <a:schemeClr val="accent2"/>
+                    </a:solidFill>
+                  </a:rPr>
+                  <a:t>条件</a:t>
+                </a:r>
+                <a:r>
+                  <a:rPr lang="en-US" altLang="zh-CN" b="1" dirty="0">
+                    <a:solidFill>
+                      <a:schemeClr val="accent2"/>
+                    </a:solidFill>
+                  </a:rPr>
+                  <a:t> </a:t>
+                </a:r>
+                <a:r>
+                  <a:rPr lang="en-US" altLang="zh-CN" b="1" dirty="0">
+                    <a:sym typeface="Wingdings" panose="05000000000000000000" pitchFamily="2" charset="2"/>
+                  </a:rPr>
+                  <a:t> </a:t>
+                </a:r>
+                <a:r>
+                  <a:rPr lang="zh-CN" altLang="en-US" b="1" dirty="0">
+                    <a:sym typeface="Wingdings" panose="05000000000000000000" pitchFamily="2" charset="2"/>
+                  </a:rPr>
+                  <a:t>简并码 </a:t>
+                </a:r>
+                <a:r>
+                  <a:rPr lang="en-US" altLang="zh-CN" b="1" dirty="0">
+                    <a:sym typeface="Wingdings" panose="05000000000000000000" pitchFamily="2" charset="2"/>
+                  </a:rPr>
+                  <a:t>(Shor</a:t>
+                </a:r>
+                <a:r>
+                  <a:rPr lang="zh-CN" altLang="en-US" b="1" dirty="0">
+                    <a:sym typeface="Wingdings" panose="05000000000000000000" pitchFamily="2" charset="2"/>
+                  </a:rPr>
+                  <a:t>码</a:t>
+                </a:r>
+                <a:r>
+                  <a:rPr lang="en-US" altLang="zh-CN" b="1" dirty="0">
+                    <a:sym typeface="Wingdings" panose="05000000000000000000" pitchFamily="2" charset="2"/>
+                  </a:rPr>
+                  <a:t>)</a:t>
+                </a:r>
+              </a:p>
+              <a:p>
+                <a:r>
+                  <a:rPr lang="en-US" altLang="zh-CN" b="1" dirty="0">
+                    <a:sym typeface="Wingdings" panose="05000000000000000000" pitchFamily="2" charset="2"/>
+                  </a:rPr>
+                  <a:t>                 </a:t>
+                </a:r>
+                <a:r>
+                  <a:rPr lang="zh-CN" altLang="en-US" b="1" dirty="0">
+                    <a:solidFill>
+                      <a:schemeClr val="accent2"/>
+                    </a:solidFill>
+                    <a:sym typeface="Wingdings" panose="05000000000000000000" pitchFamily="2" charset="2"/>
+                  </a:rPr>
+                  <a:t>权</a:t>
+                </a:r>
+                <a:r>
+                  <a:rPr lang="zh-CN" altLang="en-US" b="1" dirty="0">
+                    <a:sym typeface="Wingdings" panose="05000000000000000000" pitchFamily="2" charset="2"/>
+                  </a:rPr>
+                  <a:t> </a:t>
+                </a:r>
+                <a:r>
+                  <a:rPr lang="en-US" altLang="zh-CN" b="1" dirty="0">
+                    <a:sym typeface="Wingdings" panose="05000000000000000000" pitchFamily="2" charset="2"/>
+                  </a:rPr>
+                  <a:t> </a:t>
+                </a:r>
+                <a:r>
+                  <a:rPr lang="zh-CN" altLang="en-US" b="1" dirty="0">
+                    <a:solidFill>
+                      <a:schemeClr val="accent2"/>
+                    </a:solidFill>
+                    <a:sym typeface="Wingdings" panose="05000000000000000000" pitchFamily="2" charset="2"/>
+                  </a:rPr>
+                  <a:t>距离</a:t>
+                </a:r>
+                <a:r>
+                  <a:rPr lang="zh-CN" altLang="en-US" b="1" dirty="0">
+                    <a:sym typeface="Wingdings" panose="05000000000000000000" pitchFamily="2" charset="2"/>
+                  </a:rPr>
+                  <a:t> </a:t>
+                </a:r>
+                <a:r>
+                  <a:rPr lang="en-US" altLang="zh-CN" b="1" dirty="0">
+                    <a:sym typeface="Wingdings" panose="05000000000000000000" pitchFamily="2" charset="2"/>
+                  </a:rPr>
+                  <a:t> </a:t>
+                </a:r>
+                <a:r>
+                  <a:rPr lang="zh-CN" altLang="en-US" b="1" dirty="0">
+                    <a:solidFill>
+                      <a:schemeClr val="accent2"/>
+                    </a:solidFill>
+                    <a:sym typeface="Wingdings" panose="05000000000000000000" pitchFamily="2" charset="2"/>
+                  </a:rPr>
+                  <a:t>错误检测</a:t>
+                </a:r>
+                <a:r>
+                  <a:rPr lang="zh-CN" altLang="en-US" b="1" dirty="0">
+                    <a:sym typeface="Wingdings" panose="05000000000000000000" pitchFamily="2" charset="2"/>
+                  </a:rPr>
+                  <a:t>  </a:t>
+                </a:r>
+                <a:r>
+                  <a:rPr lang="en-US" altLang="zh-CN" b="1" dirty="0">
+                    <a:sym typeface="Wingdings" panose="05000000000000000000" pitchFamily="2" charset="2"/>
+                  </a:rPr>
+                  <a:t> </a:t>
+                </a:r>
+                <a:r>
+                  <a:rPr lang="zh-CN" altLang="en-US" b="1" dirty="0">
+                    <a:solidFill>
+                      <a:schemeClr val="accent2"/>
+                    </a:solidFill>
+                    <a:sym typeface="Wingdings" panose="05000000000000000000" pitchFamily="2" charset="2"/>
+                  </a:rPr>
+                  <a:t>擦除错误</a:t>
+                </a:r>
+                <a:endParaRPr lang="en-US" altLang="zh-CN" b="1" dirty="0">
+                  <a:solidFill>
+                    <a:schemeClr val="accent2"/>
+                  </a:solidFill>
+                  <a:sym typeface="Wingdings" panose="05000000000000000000" pitchFamily="2" charset="2"/>
+                </a:endParaRPr>
+              </a:p>
+              <a:p>
+                <a:r>
+                  <a:rPr lang="en-US" altLang="zh-CN" b="1" dirty="0">
+                    <a:sym typeface="Wingdings" panose="05000000000000000000" pitchFamily="2" charset="2"/>
+                  </a:rPr>
+                  <a:t>                 </a:t>
+                </a:r>
+                <a:r>
+                  <a:rPr lang="zh-CN" altLang="en-US" b="1" dirty="0">
+                    <a:solidFill>
+                      <a:schemeClr val="accent2"/>
+                    </a:solidFill>
+                    <a:sym typeface="Wingdings" panose="05000000000000000000" pitchFamily="2" charset="2"/>
+                  </a:rPr>
+                  <a:t>等价码</a:t>
+                </a:r>
+                <a:endParaRPr lang="en-US" altLang="zh-CN" b="1" dirty="0">
+                  <a:solidFill>
+                    <a:schemeClr val="accent2"/>
+                  </a:solidFill>
+                </a:endParaRPr>
+              </a:p>
+              <a:p>
+                <a:r>
+                  <a:rPr lang="en-US" altLang="zh-CN" b="1" dirty="0"/>
+                  <a:t>      </a:t>
+                </a:r>
+              </a:p>
+              <a:p>
+                <a:r>
+                  <a:rPr lang="en-US" altLang="zh-CN" b="1" dirty="0"/>
+                  <a:t>  </a:t>
+                </a:r>
+              </a:p>
+            </p:txBody>
+          </p:sp>
+        </mc:Choice>
+        <mc:Fallback xmlns="">
+          <p:sp>
+            <p:nvSpPr>
+              <p:cNvPr id="5" name="文本框 4">
+                <a:extLst>
+                  <a:ext uri="{FF2B5EF4-FFF2-40B4-BE49-F238E27FC236}">
+                    <a16:creationId xmlns:a16="http://schemas.microsoft.com/office/drawing/2014/main" id="{42AF2BCF-CFE4-611D-F030-4F223EB19B91}"/>
+                  </a:ext>
+                </a:extLst>
+              </p:cNvPr>
+              <p:cNvSpPr txBox="1">
+                <a:spLocks noRot="1" noChangeAspect="1" noMove="1" noResize="1" noEditPoints="1" noAdjustHandles="1" noChangeArrowheads="1" noChangeShapeType="1" noTextEdit="1"/>
+              </p:cNvSpPr>
+              <p:nvPr/>
+            </p:nvSpPr>
+            <p:spPr>
+              <a:xfrm>
+                <a:off x="718332" y="2953647"/>
+                <a:ext cx="6950773" cy="2308324"/>
+              </a:xfrm>
+              <a:prstGeom prst="rect">
+                <a:avLst/>
+              </a:prstGeom>
+              <a:blipFill>
+                <a:blip r:embed="rId3"/>
+                <a:stretch>
+                  <a:fillRect l="-789" t="-1587"/>
+                </a:stretch>
+              </a:blipFill>
+            </p:spPr>
+            <p:txBody>
+              <a:bodyPr/>
+              <a:lstStyle/>
+              <a:p>
+                <a:r>
+                  <a:rPr lang="zh-CN" altLang="en-US">
+                    <a:noFill/>
+                  </a:rPr>
+                  <a:t> </a:t>
+                </a:r>
+              </a:p>
+            </p:txBody>
+          </p:sp>
+        </mc:Fallback>
+      </mc:AlternateContent>
     </p:spTree>
     <p:extLst>
       <p:ext uri="{BB962C8B-B14F-4D97-AF65-F5344CB8AC3E}">
-        <p14:creationId xmlns:p14="http://schemas.microsoft.com/office/powerpoint/2010/main" val="1077121864"/>
+        <p14:creationId xmlns:p14="http://schemas.microsoft.com/office/powerpoint/2010/main" val="2622818687"/>
       </p:ext>
     </p:extLst>
   </p:cSld>
@@ -28593,7 +29063,7 @@
         <p:cNvPr id="1" name="">
           <a:extLst>
             <a:ext uri="{FF2B5EF4-FFF2-40B4-BE49-F238E27FC236}">
-              <a16:creationId xmlns:a16="http://schemas.microsoft.com/office/drawing/2014/main" id="{640F2AC9-7FB2-471D-89B5-119D04847E93}"/>
+              <a16:creationId xmlns:a16="http://schemas.microsoft.com/office/drawing/2014/main" id="{DD49C38A-B3F2-52F5-01D3-1009370D9DF4}"/>
             </a:ext>
           </a:extLst>
         </p:cNvPr>
@@ -28613,7 +29083,7 @@
           <p:cNvPr id="2" name="AutoShape 2">
             <a:extLst>
               <a:ext uri="{FF2B5EF4-FFF2-40B4-BE49-F238E27FC236}">
-                <a16:creationId xmlns:a16="http://schemas.microsoft.com/office/drawing/2014/main" id="{B75245E9-A822-F0EE-2DE1-EB0A59846F0E}"/>
+                <a16:creationId xmlns:a16="http://schemas.microsoft.com/office/drawing/2014/main" id="{C6C8E996-C280-8E02-C4A1-63A2695EF0DC}"/>
               </a:ext>
             </a:extLst>
           </p:cNvPr>
@@ -28639,77 +29109,60 @@
           <a:bodyPr vert="horz" wrap="square" lIns="0" tIns="0" rIns="0" bIns="0" rtlCol="0" anchor="ctr" anchorCtr="0"/>
           <a:lstStyle/>
           <a:p>
-            <a:pPr>
-              <a:lnSpc>
-                <a:spcPct val="125000"/>
-              </a:lnSpc>
-              <a:defRPr/>
-            </a:pPr>
-            <a:r>
-              <a:rPr lang="en-US" sz="3200" b="1" i="0" u="none" strike="noStrike" dirty="0">
-                <a:solidFill>
-                  <a:srgbClr val="333333"/>
-                </a:solidFill>
-                <a:latin typeface="Noto Sans SC"/>
-                <a:ea typeface="Noto Sans SC"/>
-                <a:cs typeface="Noto Sans SC"/>
-                <a:sym typeface="Noto Sans SC"/>
-              </a:rPr>
-              <a:t>03 </a:t>
-            </a:r>
-            <a:r>
-              <a:rPr lang="zh-CN" altLang="en-US" sz="3200" b="1" i="0" u="none" strike="noStrike" dirty="0">
-                <a:solidFill>
-                  <a:srgbClr val="333333"/>
-                </a:solidFill>
-                <a:latin typeface="Noto Sans SC"/>
-                <a:ea typeface="Noto Sans SC"/>
-                <a:cs typeface="Noto Sans SC"/>
-                <a:sym typeface="Noto Sans SC"/>
-              </a:rPr>
-              <a:t>稳定子</a:t>
-            </a:r>
-            <a:endParaRPr lang="en-US" sz="1100" dirty="0"/>
-          </a:p>
-        </p:txBody>
-      </p:sp>
-      <p:sp>
-        <p:nvSpPr>
-          <p:cNvPr id="3" name="AutoShape 3">
-            <a:extLst>
-              <a:ext uri="{FF2B5EF4-FFF2-40B4-BE49-F238E27FC236}">
-                <a16:creationId xmlns:a16="http://schemas.microsoft.com/office/drawing/2014/main" id="{5233C1B7-6C31-35EB-F3DA-85EAABBCD824}"/>
-              </a:ext>
-            </a:extLst>
-          </p:cNvPr>
-          <p:cNvSpPr/>
-          <p:nvPr/>
-        </p:nvSpPr>
-        <p:spPr>
-          <a:xfrm>
-            <a:off x="762000" y="1651000"/>
-            <a:ext cx="10668000" cy="508000"/>
-          </a:xfrm>
-          <a:prstGeom prst="rect">
-            <a:avLst/>
-          </a:prstGeom>
-          <a:noFill/>
-          <a:ln w="12700" cap="flat" cmpd="sng">
-            <a:noFill/>
-            <a:prstDash val="solid"/>
-            <a:round/>
-          </a:ln>
-        </p:spPr>
-        <p:txBody>
-          <a:bodyPr vert="horz" wrap="square" lIns="0" tIns="0" rIns="0" bIns="0" rtlCol="0" anchor="ctr" anchorCtr="0"/>
-          <a:lstStyle/>
-          <a:p>
             <a:pPr indent="0" algn="l">
               <a:lnSpc>
                 <a:spcPct val="125000"/>
               </a:lnSpc>
               <a:defRPr/>
             </a:pPr>
+            <a:r>
+              <a:rPr lang="en-US" sz="3200" b="1" i="0" u="none" strike="noStrike" dirty="0">
+                <a:solidFill>
+                  <a:srgbClr val="333333"/>
+                </a:solidFill>
+                <a:latin typeface="Noto Sans SC"/>
+                <a:ea typeface="Noto Sans SC"/>
+                <a:cs typeface="Noto Sans SC"/>
+                <a:sym typeface="Noto Sans SC"/>
+              </a:rPr>
+              <a:t>0</a:t>
+            </a:r>
+            <a:r>
+              <a:rPr lang="en-US" sz="3200" b="1" dirty="0">
+                <a:solidFill>
+                  <a:srgbClr val="333333"/>
+                </a:solidFill>
+                <a:latin typeface="Noto Sans SC"/>
+                <a:ea typeface="Noto Sans SC"/>
+                <a:cs typeface="Noto Sans SC"/>
+                <a:sym typeface="Noto Sans SC"/>
+              </a:rPr>
+              <a:t>4</a:t>
+            </a:r>
+            <a:r>
+              <a:rPr lang="en-US" sz="3200" b="1" i="0" u="none" strike="noStrike" dirty="0">
+                <a:solidFill>
+                  <a:srgbClr val="333333"/>
+                </a:solidFill>
+                <a:latin typeface="Noto Sans SC"/>
+                <a:ea typeface="Noto Sans SC"/>
+                <a:cs typeface="Noto Sans SC"/>
+                <a:sym typeface="Noto Sans SC"/>
+              </a:rPr>
+              <a:t>  </a:t>
+            </a:r>
+            <a:r>
+              <a:rPr lang="zh-CN" altLang="en-US" sz="3200" b="1" i="0" u="none" strike="noStrike" dirty="0">
+                <a:solidFill>
+                  <a:srgbClr val="333333"/>
+                </a:solidFill>
+                <a:latin typeface="Noto Sans SC"/>
+                <a:ea typeface="Noto Sans SC"/>
+                <a:cs typeface="Noto Sans SC"/>
+                <a:sym typeface="Noto Sans SC"/>
+              </a:rPr>
+              <a:t>稳定子</a:t>
+            </a:r>
             <a:endParaRPr lang="en-US" sz="1100" dirty="0"/>
           </a:p>
         </p:txBody>
@@ -28719,7 +29172,7 @@
           <p:cNvPr id="4" name="直接连接符 3">
             <a:extLst>
               <a:ext uri="{FF2B5EF4-FFF2-40B4-BE49-F238E27FC236}">
-                <a16:creationId xmlns:a16="http://schemas.microsoft.com/office/drawing/2014/main" id="{C7E50337-FEDF-8501-5BEE-C416EBFA2094}"/>
+                <a16:creationId xmlns:a16="http://schemas.microsoft.com/office/drawing/2014/main" id="{1F36977B-D8B2-2F53-1C08-14A81AD476A8}"/>
               </a:ext>
             </a:extLst>
           </p:cNvPr>
@@ -28761,10 +29214,10 @@
       </p:cxnSp>
       <p:sp>
         <p:nvSpPr>
-          <p:cNvPr id="6" name="AutoShape 3">
-            <a:extLst>
-              <a:ext uri="{FF2B5EF4-FFF2-40B4-BE49-F238E27FC236}">
-                <a16:creationId xmlns:a16="http://schemas.microsoft.com/office/drawing/2014/main" id="{34261D83-7996-788A-65B5-CA2D0B89B371}"/>
+          <p:cNvPr id="3" name="AutoShape 3">
+            <a:extLst>
+              <a:ext uri="{FF2B5EF4-FFF2-40B4-BE49-F238E27FC236}">
+                <a16:creationId xmlns:a16="http://schemas.microsoft.com/office/drawing/2014/main" id="{3D55A76E-FF92-6300-287B-B5AF4D28FF32}"/>
               </a:ext>
             </a:extLst>
           </p:cNvPr>
@@ -28773,8 +29226,8 @@
         </p:nvSpPr>
         <p:spPr>
           <a:xfrm>
-            <a:off x="1005840" y="1315720"/>
-            <a:ext cx="3501614" cy="1061720"/>
+            <a:off x="762000" y="1651000"/>
+            <a:ext cx="10668000" cy="508000"/>
           </a:xfrm>
           <a:prstGeom prst="rect">
             <a:avLst/>
@@ -28806,7 +29259,19 @@
                 <a:cs typeface="Noto Sans SC"/>
                 <a:sym typeface="Noto Sans SC"/>
               </a:rPr>
-              <a:t>3.2.1</a:t>
+              <a:t>4.4 </a:t>
+            </a:r>
+            <a:r>
+              <a:rPr lang="en-US" altLang="zh-CN" sz="2200" b="1" dirty="0" err="1">
+                <a:solidFill>
+                  <a:srgbClr val="555555"/>
+                </a:solidFill>
+                <a:latin typeface="Noto Sans SC"/>
+                <a:ea typeface="Noto Sans SC"/>
+                <a:cs typeface="Noto Sans SC"/>
+                <a:sym typeface="Noto Sans SC"/>
+              </a:rPr>
+              <a:t>shor</a:t>
             </a:r>
             <a:r>
               <a:rPr lang="zh-CN" altLang="en-US" sz="2200" b="1" dirty="0">
@@ -28818,157 +29283,16 @@
                 <a:cs typeface="Noto Sans SC"/>
                 <a:sym typeface="Noto Sans SC"/>
               </a:rPr>
-              <a:t>稳定</a:t>
-            </a:r>
-            <a:endParaRPr lang="en-US" altLang="zh-CN" sz="2200" b="1" dirty="0">
-              <a:solidFill>
-                <a:srgbClr val="555555"/>
-              </a:solidFill>
-              <a:latin typeface="Noto Sans SC"/>
-              <a:ea typeface="Noto Sans SC"/>
-              <a:cs typeface="Noto Sans SC"/>
-              <a:sym typeface="Noto Sans SC"/>
-            </a:endParaRPr>
-          </a:p>
-          <a:p>
-            <a:pPr indent="0" algn="l">
-              <a:lnSpc>
-                <a:spcPct val="125000"/>
-              </a:lnSpc>
-              <a:defRPr/>
-            </a:pPr>
-            <a:endParaRPr lang="en-US" altLang="zh-CN" sz="2200" b="1" dirty="0">
-              <a:solidFill>
-                <a:srgbClr val="555555"/>
-              </a:solidFill>
-              <a:latin typeface="Noto Sans SC"/>
-              <a:ea typeface="Noto Sans SC"/>
-              <a:cs typeface="Noto Sans SC"/>
-              <a:sym typeface="Noto Sans SC"/>
-            </a:endParaRPr>
-          </a:p>
-        </p:txBody>
-      </p:sp>
-      <p:sp>
-        <p:nvSpPr>
-          <p:cNvPr id="16" name="AutoShape 7">
-            <a:extLst>
-              <a:ext uri="{FF2B5EF4-FFF2-40B4-BE49-F238E27FC236}">
-                <a16:creationId xmlns:a16="http://schemas.microsoft.com/office/drawing/2014/main" id="{62616CF6-F500-9769-324A-3728E092D1B3}"/>
-              </a:ext>
-            </a:extLst>
-          </p:cNvPr>
-          <p:cNvSpPr/>
-          <p:nvPr/>
-        </p:nvSpPr>
-        <p:spPr>
-          <a:xfrm>
-            <a:off x="736929" y="1861292"/>
-            <a:ext cx="6340764" cy="3061030"/>
-          </a:xfrm>
-          <a:prstGeom prst="rect">
-            <a:avLst/>
-          </a:prstGeom>
-          <a:noFill/>
-          <a:ln w="12700" cap="flat" cmpd="sng">
-            <a:noFill/>
-            <a:prstDash val="solid"/>
-            <a:round/>
-          </a:ln>
-        </p:spPr>
-        <p:txBody>
-          <a:bodyPr vert="horz" wrap="square" lIns="0" tIns="0" rIns="0" bIns="0" rtlCol="0" anchor="ctr" anchorCtr="0"/>
-          <a:lstStyle/>
-          <a:p>
-            <a:pPr indent="0" algn="l">
-              <a:lnSpc>
-                <a:spcPct val="108333"/>
-              </a:lnSpc>
-              <a:defRPr/>
-            </a:pPr>
-            <a:endParaRPr lang="en-US" sz="2000" dirty="0"/>
-          </a:p>
-        </p:txBody>
-      </p:sp>
-      <p:sp>
-        <p:nvSpPr>
-          <p:cNvPr id="7" name="文本框 6">
-            <a:extLst>
-              <a:ext uri="{FF2B5EF4-FFF2-40B4-BE49-F238E27FC236}">
-                <a16:creationId xmlns:a16="http://schemas.microsoft.com/office/drawing/2014/main" id="{D393D62D-9A1D-6C4B-E322-3A48BE21DE7F}"/>
-              </a:ext>
-            </a:extLst>
-          </p:cNvPr>
-          <p:cNvSpPr txBox="1"/>
-          <p:nvPr/>
-        </p:nvSpPr>
-        <p:spPr>
-          <a:xfrm>
-            <a:off x="2186492" y="3569752"/>
-            <a:ext cx="6094206" cy="830997"/>
-          </a:xfrm>
-          <a:prstGeom prst="rect">
-            <a:avLst/>
-          </a:prstGeom>
-          <a:noFill/>
-        </p:spPr>
-        <p:txBody>
-          <a:bodyPr wrap="square">
-            <a:spAutoFit/>
-          </a:bodyPr>
-          <a:lstStyle/>
-          <a:p>
-            <a:r>
-              <a:rPr lang="zh-CN" altLang="en-US" sz="2400" b="1" dirty="0">
-                <a:solidFill>
-                  <a:schemeClr val="accent2"/>
-                </a:solidFill>
-              </a:rPr>
-              <a:t>稳定</a:t>
-            </a:r>
-            <a:r>
-              <a:rPr lang="en-US" altLang="zh-CN" sz="2400" b="1" dirty="0">
-                <a:solidFill>
-                  <a:schemeClr val="accent2"/>
-                </a:solidFill>
-              </a:rPr>
-              <a:t> </a:t>
-            </a:r>
-            <a:r>
-              <a:rPr lang="zh-CN" altLang="en-US" sz="2400" b="1" dirty="0">
-                <a:solidFill>
-                  <a:schemeClr val="accent2"/>
-                </a:solidFill>
-              </a:rPr>
-              <a:t> </a:t>
-            </a:r>
-            <a:r>
-              <a:rPr lang="zh-CN" altLang="en-US" sz="2400" b="1" dirty="0"/>
-              <a:t>操作</a:t>
-            </a:r>
-            <a:r>
-              <a:rPr lang="zh-CN" altLang="en-US" sz="2400" b="1" dirty="0">
-                <a:solidFill>
-                  <a:schemeClr val="accent2"/>
-                </a:solidFill>
-              </a:rPr>
-              <a:t>不</a:t>
-            </a:r>
-            <a:r>
-              <a:rPr lang="zh-CN" altLang="en-US" sz="2400" b="1" dirty="0"/>
-              <a:t>改变对象</a:t>
-            </a:r>
-            <a:endParaRPr lang="en-US" altLang="zh-CN" sz="2400" b="1" dirty="0"/>
-          </a:p>
-          <a:p>
-            <a:endParaRPr lang="zh-CN" altLang="en-US" sz="2400" b="1" dirty="0"/>
+              <a:t>码回顾</a:t>
+            </a:r>
+            <a:endParaRPr lang="en-US" sz="1100" dirty="0"/>
           </a:p>
         </p:txBody>
       </p:sp>
     </p:spTree>
     <p:extLst>
       <p:ext uri="{BB962C8B-B14F-4D97-AF65-F5344CB8AC3E}">
-        <p14:creationId xmlns:p14="http://schemas.microsoft.com/office/powerpoint/2010/main" val="2590623085"/>
+        <p14:creationId xmlns:p14="http://schemas.microsoft.com/office/powerpoint/2010/main" val="557730455"/>
       </p:ext>
     </p:extLst>
   </p:cSld>
@@ -28998,7 +29322,7 @@
         <p:cNvPr id="1" name="">
           <a:extLst>
             <a:ext uri="{FF2B5EF4-FFF2-40B4-BE49-F238E27FC236}">
-              <a16:creationId xmlns:a16="http://schemas.microsoft.com/office/drawing/2014/main" id="{ABA854DD-86EC-9B62-A016-A97C24443D30}"/>
+              <a16:creationId xmlns:a16="http://schemas.microsoft.com/office/drawing/2014/main" id="{BFBD2712-7AB7-A0AB-C6DD-2E30D71283F8}"/>
             </a:ext>
           </a:extLst>
         </p:cNvPr>
@@ -29018,7 +29342,7 @@
           <p:cNvPr id="2" name="AutoShape 2">
             <a:extLst>
               <a:ext uri="{FF2B5EF4-FFF2-40B4-BE49-F238E27FC236}">
-                <a16:creationId xmlns:a16="http://schemas.microsoft.com/office/drawing/2014/main" id="{E0500A6C-1164-3352-CB20-33D553EBD28B}"/>
+                <a16:creationId xmlns:a16="http://schemas.microsoft.com/office/drawing/2014/main" id="{7BE907A5-A21C-8D77-CAB6-D296DEEC33F3}"/>
               </a:ext>
             </a:extLst>
           </p:cNvPr>
@@ -29044,77 +29368,60 @@
           <a:bodyPr vert="horz" wrap="square" lIns="0" tIns="0" rIns="0" bIns="0" rtlCol="0" anchor="ctr" anchorCtr="0"/>
           <a:lstStyle/>
           <a:p>
-            <a:pPr>
-              <a:lnSpc>
-                <a:spcPct val="125000"/>
-              </a:lnSpc>
-              <a:defRPr/>
-            </a:pPr>
-            <a:r>
-              <a:rPr lang="en-US" sz="3200" b="1" i="0" u="none" strike="noStrike" dirty="0">
-                <a:solidFill>
-                  <a:srgbClr val="333333"/>
-                </a:solidFill>
-                <a:latin typeface="Noto Sans SC"/>
-                <a:ea typeface="Noto Sans SC"/>
-                <a:cs typeface="Noto Sans SC"/>
-                <a:sym typeface="Noto Sans SC"/>
-              </a:rPr>
-              <a:t>03 </a:t>
-            </a:r>
-            <a:r>
-              <a:rPr lang="zh-CN" altLang="en-US" sz="3200" b="1" i="0" u="none" strike="noStrike" dirty="0">
-                <a:solidFill>
-                  <a:srgbClr val="333333"/>
-                </a:solidFill>
-                <a:latin typeface="Noto Sans SC"/>
-                <a:ea typeface="Noto Sans SC"/>
-                <a:cs typeface="Noto Sans SC"/>
-                <a:sym typeface="Noto Sans SC"/>
-              </a:rPr>
-              <a:t>稳定子</a:t>
-            </a:r>
-            <a:endParaRPr lang="en-US" sz="1100" dirty="0"/>
-          </a:p>
-        </p:txBody>
-      </p:sp>
-      <p:sp>
-        <p:nvSpPr>
-          <p:cNvPr id="3" name="AutoShape 3">
-            <a:extLst>
-              <a:ext uri="{FF2B5EF4-FFF2-40B4-BE49-F238E27FC236}">
-                <a16:creationId xmlns:a16="http://schemas.microsoft.com/office/drawing/2014/main" id="{9AE17005-26EC-2A9F-F9E2-E28B82CD5897}"/>
-              </a:ext>
-            </a:extLst>
-          </p:cNvPr>
-          <p:cNvSpPr/>
-          <p:nvPr/>
-        </p:nvSpPr>
-        <p:spPr>
-          <a:xfrm>
-            <a:off x="762000" y="1651000"/>
-            <a:ext cx="10668000" cy="508000"/>
-          </a:xfrm>
-          <a:prstGeom prst="rect">
-            <a:avLst/>
-          </a:prstGeom>
-          <a:noFill/>
-          <a:ln w="12700" cap="flat" cmpd="sng">
-            <a:noFill/>
-            <a:prstDash val="solid"/>
-            <a:round/>
-          </a:ln>
-        </p:spPr>
-        <p:txBody>
-          <a:bodyPr vert="horz" wrap="square" lIns="0" tIns="0" rIns="0" bIns="0" rtlCol="0" anchor="ctr" anchorCtr="0"/>
-          <a:lstStyle/>
-          <a:p>
             <a:pPr indent="0" algn="l">
               <a:lnSpc>
                 <a:spcPct val="125000"/>
               </a:lnSpc>
               <a:defRPr/>
             </a:pPr>
+            <a:r>
+              <a:rPr lang="en-US" sz="3200" b="1" i="0" u="none" strike="noStrike" dirty="0">
+                <a:solidFill>
+                  <a:srgbClr val="333333"/>
+                </a:solidFill>
+                <a:latin typeface="Noto Sans SC"/>
+                <a:ea typeface="Noto Sans SC"/>
+                <a:cs typeface="Noto Sans SC"/>
+                <a:sym typeface="Noto Sans SC"/>
+              </a:rPr>
+              <a:t>0</a:t>
+            </a:r>
+            <a:r>
+              <a:rPr lang="en-US" sz="3200" b="1" dirty="0">
+                <a:solidFill>
+                  <a:srgbClr val="333333"/>
+                </a:solidFill>
+                <a:latin typeface="Noto Sans SC"/>
+                <a:ea typeface="Noto Sans SC"/>
+                <a:cs typeface="Noto Sans SC"/>
+                <a:sym typeface="Noto Sans SC"/>
+              </a:rPr>
+              <a:t>4</a:t>
+            </a:r>
+            <a:r>
+              <a:rPr lang="en-US" sz="3200" b="1" i="0" u="none" strike="noStrike" dirty="0">
+                <a:solidFill>
+                  <a:srgbClr val="333333"/>
+                </a:solidFill>
+                <a:latin typeface="Noto Sans SC"/>
+                <a:ea typeface="Noto Sans SC"/>
+                <a:cs typeface="Noto Sans SC"/>
+                <a:sym typeface="Noto Sans SC"/>
+              </a:rPr>
+              <a:t>  </a:t>
+            </a:r>
+            <a:r>
+              <a:rPr lang="zh-CN" altLang="en-US" sz="3200" b="1" i="0" u="none" strike="noStrike" dirty="0">
+                <a:solidFill>
+                  <a:srgbClr val="333333"/>
+                </a:solidFill>
+                <a:latin typeface="Noto Sans SC"/>
+                <a:ea typeface="Noto Sans SC"/>
+                <a:cs typeface="Noto Sans SC"/>
+                <a:sym typeface="Noto Sans SC"/>
+              </a:rPr>
+              <a:t>稳定子</a:t>
+            </a:r>
             <a:endParaRPr lang="en-US" sz="1100" dirty="0"/>
           </a:p>
         </p:txBody>
@@ -29124,7 +29431,7 @@
           <p:cNvPr id="4" name="直接连接符 3">
             <a:extLst>
               <a:ext uri="{FF2B5EF4-FFF2-40B4-BE49-F238E27FC236}">
-                <a16:creationId xmlns:a16="http://schemas.microsoft.com/office/drawing/2014/main" id="{0F80C0FF-8569-79FB-0162-E47EB241CBCA}"/>
+                <a16:creationId xmlns:a16="http://schemas.microsoft.com/office/drawing/2014/main" id="{4BB14536-37AE-6E97-3683-FC72E8FDC37E}"/>
               </a:ext>
             </a:extLst>
           </p:cNvPr>
@@ -29166,10 +29473,10 @@
       </p:cxnSp>
       <p:sp>
         <p:nvSpPr>
-          <p:cNvPr id="6" name="AutoShape 3">
-            <a:extLst>
-              <a:ext uri="{FF2B5EF4-FFF2-40B4-BE49-F238E27FC236}">
-                <a16:creationId xmlns:a16="http://schemas.microsoft.com/office/drawing/2014/main" id="{4AC70BBF-4194-E1E1-A39E-907AD56EA928}"/>
+          <p:cNvPr id="3" name="AutoShape 3">
+            <a:extLst>
+              <a:ext uri="{FF2B5EF4-FFF2-40B4-BE49-F238E27FC236}">
+                <a16:creationId xmlns:a16="http://schemas.microsoft.com/office/drawing/2014/main" id="{9547DE3B-145A-C962-3C15-2B1CDFD1869C}"/>
               </a:ext>
             </a:extLst>
           </p:cNvPr>
@@ -29178,8 +29485,8 @@
         </p:nvSpPr>
         <p:spPr>
           <a:xfrm>
-            <a:off x="1005840" y="1315720"/>
-            <a:ext cx="5093746" cy="1061720"/>
+            <a:off x="762000" y="1651000"/>
+            <a:ext cx="10668000" cy="508000"/>
           </a:xfrm>
           <a:prstGeom prst="rect">
             <a:avLst/>
@@ -29211,7 +29518,7 @@
                 <a:cs typeface="Noto Sans SC"/>
                 <a:sym typeface="Noto Sans SC"/>
               </a:rPr>
-              <a:t>3.2.2</a:t>
+              <a:t>4.4 </a:t>
             </a:r>
             <a:r>
               <a:rPr lang="zh-CN" altLang="en-US" sz="2200" b="1" dirty="0">
@@ -29223,192 +29530,16 @@
                 <a:cs typeface="Noto Sans SC"/>
                 <a:sym typeface="Noto Sans SC"/>
               </a:rPr>
-              <a:t>稳定子 群 与 稳定子 空间</a:t>
-            </a:r>
-            <a:endParaRPr lang="en-US" altLang="zh-CN" sz="2200" b="1" dirty="0">
-              <a:solidFill>
-                <a:srgbClr val="555555"/>
-              </a:solidFill>
-              <a:latin typeface="Noto Sans SC"/>
-              <a:ea typeface="Noto Sans SC"/>
-              <a:cs typeface="Noto Sans SC"/>
-              <a:sym typeface="Noto Sans SC"/>
-            </a:endParaRPr>
-          </a:p>
-          <a:p>
-            <a:pPr indent="0" algn="l">
-              <a:lnSpc>
-                <a:spcPct val="125000"/>
-              </a:lnSpc>
-              <a:defRPr/>
-            </a:pPr>
-            <a:endParaRPr lang="en-US" altLang="zh-CN" sz="2200" b="1" dirty="0">
-              <a:solidFill>
-                <a:srgbClr val="555555"/>
-              </a:solidFill>
-              <a:latin typeface="Noto Sans SC"/>
-              <a:ea typeface="Noto Sans SC"/>
-              <a:cs typeface="Noto Sans SC"/>
-              <a:sym typeface="Noto Sans SC"/>
-            </a:endParaRPr>
-          </a:p>
-        </p:txBody>
-      </p:sp>
-      <p:sp>
-        <p:nvSpPr>
-          <p:cNvPr id="16" name="AutoShape 7">
-            <a:extLst>
-              <a:ext uri="{FF2B5EF4-FFF2-40B4-BE49-F238E27FC236}">
-                <a16:creationId xmlns:a16="http://schemas.microsoft.com/office/drawing/2014/main" id="{392362B9-3F87-8473-4FEF-567157535624}"/>
-              </a:ext>
-            </a:extLst>
-          </p:cNvPr>
-          <p:cNvSpPr/>
-          <p:nvPr/>
-        </p:nvSpPr>
-        <p:spPr>
-          <a:xfrm>
-            <a:off x="736929" y="1861292"/>
-            <a:ext cx="6340764" cy="3061030"/>
-          </a:xfrm>
-          <a:prstGeom prst="rect">
-            <a:avLst/>
-          </a:prstGeom>
-          <a:noFill/>
-          <a:ln w="12700" cap="flat" cmpd="sng">
-            <a:noFill/>
-            <a:prstDash val="solid"/>
-            <a:round/>
-          </a:ln>
-        </p:spPr>
-        <p:txBody>
-          <a:bodyPr vert="horz" wrap="square" lIns="0" tIns="0" rIns="0" bIns="0" rtlCol="0" anchor="ctr" anchorCtr="0"/>
-          <a:lstStyle/>
-          <a:p>
-            <a:pPr indent="0" algn="l">
-              <a:lnSpc>
-                <a:spcPct val="108333"/>
-              </a:lnSpc>
-              <a:defRPr/>
-            </a:pPr>
-            <a:endParaRPr lang="en-US" sz="2000" dirty="0"/>
-          </a:p>
-        </p:txBody>
-      </p:sp>
-      <p:pic>
-        <p:nvPicPr>
-          <p:cNvPr id="8" name="图片 7">
-            <a:extLst>
-              <a:ext uri="{FF2B5EF4-FFF2-40B4-BE49-F238E27FC236}">
-                <a16:creationId xmlns:a16="http://schemas.microsoft.com/office/drawing/2014/main" id="{7DC061F4-DDB1-DBF4-5F25-072379B199DB}"/>
-              </a:ext>
-            </a:extLst>
-          </p:cNvPr>
-          <p:cNvPicPr>
-            <a:picLocks noChangeAspect="1"/>
-          </p:cNvPicPr>
-          <p:nvPr/>
-        </p:nvPicPr>
-        <p:blipFill>
-          <a:blip r:embed="rId3"/>
-          <a:stretch>
-            <a:fillRect/>
-          </a:stretch>
-        </p:blipFill>
-        <p:spPr>
-          <a:xfrm>
-            <a:off x="9022115" y="1266617"/>
-            <a:ext cx="1914792" cy="581106"/>
-          </a:xfrm>
-          <a:prstGeom prst="rect">
-            <a:avLst/>
-          </a:prstGeom>
-        </p:spPr>
-      </p:pic>
-      <p:sp>
-        <p:nvSpPr>
-          <p:cNvPr id="5" name="文本框 4">
-            <a:extLst>
-              <a:ext uri="{FF2B5EF4-FFF2-40B4-BE49-F238E27FC236}">
-                <a16:creationId xmlns:a16="http://schemas.microsoft.com/office/drawing/2014/main" id="{4751D7AC-020A-B649-65D8-82AF7AA5CCEF}"/>
-              </a:ext>
-            </a:extLst>
-          </p:cNvPr>
-          <p:cNvSpPr txBox="1"/>
-          <p:nvPr/>
-        </p:nvSpPr>
-        <p:spPr>
-          <a:xfrm>
-            <a:off x="1132242" y="2117469"/>
-            <a:ext cx="6094206" cy="1569660"/>
-          </a:xfrm>
-          <a:prstGeom prst="rect">
-            <a:avLst/>
-          </a:prstGeom>
-          <a:noFill/>
-        </p:spPr>
-        <p:txBody>
-          <a:bodyPr wrap="square">
-            <a:spAutoFit/>
-          </a:bodyPr>
-          <a:lstStyle/>
-          <a:p>
-            <a:r>
-              <a:rPr lang="zh-CN" altLang="en-US" sz="2400" b="1" dirty="0">
-                <a:solidFill>
-                  <a:schemeClr val="accent2"/>
-                </a:solidFill>
-              </a:rPr>
-              <a:t>稳定子群中</a:t>
-            </a:r>
-            <a:r>
-              <a:rPr lang="zh-CN" altLang="en-US" sz="2400" b="1" dirty="0"/>
-              <a:t>的算符 对 </a:t>
-            </a:r>
-            <a:r>
-              <a:rPr lang="zh-CN" altLang="en-US" sz="2400" b="1" dirty="0">
-                <a:solidFill>
-                  <a:schemeClr val="accent2"/>
-                </a:solidFill>
-              </a:rPr>
-              <a:t>稳定子空间</a:t>
-            </a:r>
-            <a:r>
-              <a:rPr lang="zh-CN" altLang="en-US" sz="2400" b="1" dirty="0"/>
-              <a:t>的态</a:t>
-            </a:r>
-            <a:endParaRPr lang="en-US" altLang="zh-CN" sz="2400" b="1" dirty="0"/>
-          </a:p>
-          <a:p>
-            <a:r>
-              <a:rPr lang="zh-CN" altLang="en-US" sz="2400" b="1" dirty="0"/>
-              <a:t>                                                   本征值为 </a:t>
-            </a:r>
-            <a:r>
-              <a:rPr lang="en-US" altLang="zh-CN" sz="2400" b="1" dirty="0">
-                <a:solidFill>
-                  <a:schemeClr val="accent2"/>
-                </a:solidFill>
-              </a:rPr>
-              <a:t>1</a:t>
-            </a:r>
-          </a:p>
-          <a:p>
-            <a:r>
-              <a:rPr lang="zh-CN" altLang="en-US" sz="2400" b="1" dirty="0"/>
-              <a:t> </a:t>
-            </a:r>
-            <a:endParaRPr lang="en-US" altLang="zh-CN" sz="2400" b="1" dirty="0"/>
-          </a:p>
-          <a:p>
-            <a:endParaRPr lang="zh-CN" altLang="en-US" sz="2400" b="1" dirty="0"/>
+              <a:t>泡利群</a:t>
+            </a:r>
+            <a:endParaRPr lang="en-US" sz="1100" dirty="0"/>
           </a:p>
         </p:txBody>
       </p:sp>
     </p:spTree>
     <p:extLst>
       <p:ext uri="{BB962C8B-B14F-4D97-AF65-F5344CB8AC3E}">
-        <p14:creationId xmlns:p14="http://schemas.microsoft.com/office/powerpoint/2010/main" val="2590672208"/>
+        <p14:creationId xmlns:p14="http://schemas.microsoft.com/office/powerpoint/2010/main" val="3763458054"/>
       </p:ext>
     </p:extLst>
   </p:cSld>
@@ -29438,7 +29569,7 @@
         <p:cNvPr id="1" name="">
           <a:extLst>
             <a:ext uri="{FF2B5EF4-FFF2-40B4-BE49-F238E27FC236}">
-              <a16:creationId xmlns:a16="http://schemas.microsoft.com/office/drawing/2014/main" id="{8756BF1E-DFC2-EBA3-9F60-3777461A7C9B}"/>
+              <a16:creationId xmlns:a16="http://schemas.microsoft.com/office/drawing/2014/main" id="{FB630AD3-4AAF-F438-5B11-8F869AC2A4F4}"/>
             </a:ext>
           </a:extLst>
         </p:cNvPr>
@@ -29458,7 +29589,7 @@
           <p:cNvPr id="2" name="AutoShape 2">
             <a:extLst>
               <a:ext uri="{FF2B5EF4-FFF2-40B4-BE49-F238E27FC236}">
-                <a16:creationId xmlns:a16="http://schemas.microsoft.com/office/drawing/2014/main" id="{F34A4411-DB39-BE2A-AAF4-FEB0C16B6E69}"/>
+                <a16:creationId xmlns:a16="http://schemas.microsoft.com/office/drawing/2014/main" id="{C94D28FD-A00C-F0E9-DCB2-F8E072B35C44}"/>
               </a:ext>
             </a:extLst>
           </p:cNvPr>
@@ -29484,77 +29615,60 @@
           <a:bodyPr vert="horz" wrap="square" lIns="0" tIns="0" rIns="0" bIns="0" rtlCol="0" anchor="ctr" anchorCtr="0"/>
           <a:lstStyle/>
           <a:p>
-            <a:pPr>
-              <a:lnSpc>
-                <a:spcPct val="125000"/>
-              </a:lnSpc>
-              <a:defRPr/>
-            </a:pPr>
-            <a:r>
-              <a:rPr lang="en-US" sz="3200" b="1" i="0" u="none" strike="noStrike" dirty="0">
-                <a:solidFill>
-                  <a:srgbClr val="333333"/>
-                </a:solidFill>
-                <a:latin typeface="Noto Sans SC"/>
-                <a:ea typeface="Noto Sans SC"/>
-                <a:cs typeface="Noto Sans SC"/>
-                <a:sym typeface="Noto Sans SC"/>
-              </a:rPr>
-              <a:t>03 </a:t>
-            </a:r>
-            <a:r>
-              <a:rPr lang="zh-CN" altLang="en-US" sz="3200" b="1" i="0" u="none" strike="noStrike" dirty="0">
-                <a:solidFill>
-                  <a:srgbClr val="333333"/>
-                </a:solidFill>
-                <a:latin typeface="Noto Sans SC"/>
-                <a:ea typeface="Noto Sans SC"/>
-                <a:cs typeface="Noto Sans SC"/>
-                <a:sym typeface="Noto Sans SC"/>
-              </a:rPr>
-              <a:t>稳定子</a:t>
-            </a:r>
-            <a:endParaRPr lang="en-US" sz="1100" dirty="0"/>
-          </a:p>
-        </p:txBody>
-      </p:sp>
-      <p:sp>
-        <p:nvSpPr>
-          <p:cNvPr id="3" name="AutoShape 3">
-            <a:extLst>
-              <a:ext uri="{FF2B5EF4-FFF2-40B4-BE49-F238E27FC236}">
-                <a16:creationId xmlns:a16="http://schemas.microsoft.com/office/drawing/2014/main" id="{4FAD9A11-509D-55B2-3A83-A2989C58B13F}"/>
-              </a:ext>
-            </a:extLst>
-          </p:cNvPr>
-          <p:cNvSpPr/>
-          <p:nvPr/>
-        </p:nvSpPr>
-        <p:spPr>
-          <a:xfrm>
-            <a:off x="762000" y="1651000"/>
-            <a:ext cx="10668000" cy="508000"/>
-          </a:xfrm>
-          <a:prstGeom prst="rect">
-            <a:avLst/>
-          </a:prstGeom>
-          <a:noFill/>
-          <a:ln w="12700" cap="flat" cmpd="sng">
-            <a:noFill/>
-            <a:prstDash val="solid"/>
-            <a:round/>
-          </a:ln>
-        </p:spPr>
-        <p:txBody>
-          <a:bodyPr vert="horz" wrap="square" lIns="0" tIns="0" rIns="0" bIns="0" rtlCol="0" anchor="ctr" anchorCtr="0"/>
-          <a:lstStyle/>
-          <a:p>
             <a:pPr indent="0" algn="l">
               <a:lnSpc>
                 <a:spcPct val="125000"/>
               </a:lnSpc>
               <a:defRPr/>
             </a:pPr>
+            <a:r>
+              <a:rPr lang="en-US" sz="3200" b="1" i="0" u="none" strike="noStrike" dirty="0">
+                <a:solidFill>
+                  <a:srgbClr val="333333"/>
+                </a:solidFill>
+                <a:latin typeface="Noto Sans SC"/>
+                <a:ea typeface="Noto Sans SC"/>
+                <a:cs typeface="Noto Sans SC"/>
+                <a:sym typeface="Noto Sans SC"/>
+              </a:rPr>
+              <a:t>0</a:t>
+            </a:r>
+            <a:r>
+              <a:rPr lang="en-US" sz="3200" b="1" dirty="0">
+                <a:solidFill>
+                  <a:srgbClr val="333333"/>
+                </a:solidFill>
+                <a:latin typeface="Noto Sans SC"/>
+                <a:ea typeface="Noto Sans SC"/>
+                <a:cs typeface="Noto Sans SC"/>
+                <a:sym typeface="Noto Sans SC"/>
+              </a:rPr>
+              <a:t>4</a:t>
+            </a:r>
+            <a:r>
+              <a:rPr lang="en-US" sz="3200" b="1" i="0" u="none" strike="noStrike" dirty="0">
+                <a:solidFill>
+                  <a:srgbClr val="333333"/>
+                </a:solidFill>
+                <a:latin typeface="Noto Sans SC"/>
+                <a:ea typeface="Noto Sans SC"/>
+                <a:cs typeface="Noto Sans SC"/>
+                <a:sym typeface="Noto Sans SC"/>
+              </a:rPr>
+              <a:t>  </a:t>
+            </a:r>
+            <a:r>
+              <a:rPr lang="zh-CN" altLang="en-US" sz="3200" b="1" i="0" u="none" strike="noStrike" dirty="0">
+                <a:solidFill>
+                  <a:srgbClr val="333333"/>
+                </a:solidFill>
+                <a:latin typeface="Noto Sans SC"/>
+                <a:ea typeface="Noto Sans SC"/>
+                <a:cs typeface="Noto Sans SC"/>
+                <a:sym typeface="Noto Sans SC"/>
+              </a:rPr>
+              <a:t>稳定子</a:t>
+            </a:r>
             <a:endParaRPr lang="en-US" sz="1100" dirty="0"/>
           </a:p>
         </p:txBody>
@@ -29564,7 +29678,7 @@
           <p:cNvPr id="4" name="直接连接符 3">
             <a:extLst>
               <a:ext uri="{FF2B5EF4-FFF2-40B4-BE49-F238E27FC236}">
-                <a16:creationId xmlns:a16="http://schemas.microsoft.com/office/drawing/2014/main" id="{2FD04918-1139-7A27-C6CF-2C3582FCEFE2}"/>
+                <a16:creationId xmlns:a16="http://schemas.microsoft.com/office/drawing/2014/main" id="{CA0FFC55-3315-F53C-0358-719D7F1181BD}"/>
               </a:ext>
             </a:extLst>
           </p:cNvPr>
@@ -29606,10 +29720,10 @@
       </p:cxnSp>
       <p:sp>
         <p:nvSpPr>
-          <p:cNvPr id="6" name="AutoShape 3">
-            <a:extLst>
-              <a:ext uri="{FF2B5EF4-FFF2-40B4-BE49-F238E27FC236}">
-                <a16:creationId xmlns:a16="http://schemas.microsoft.com/office/drawing/2014/main" id="{E36C58BE-C8F6-20B8-3EB3-89BB09DE8CA8}"/>
+          <p:cNvPr id="3" name="AutoShape 3">
+            <a:extLst>
+              <a:ext uri="{FF2B5EF4-FFF2-40B4-BE49-F238E27FC236}">
+                <a16:creationId xmlns:a16="http://schemas.microsoft.com/office/drawing/2014/main" id="{F02DC376-677A-81FA-F725-4DBDBD47E3C0}"/>
               </a:ext>
             </a:extLst>
           </p:cNvPr>
@@ -29618,8 +29732,8 @@
         </p:nvSpPr>
         <p:spPr>
           <a:xfrm>
-            <a:off x="1005840" y="1315720"/>
-            <a:ext cx="3501614" cy="1061720"/>
+            <a:off x="762000" y="1651000"/>
+            <a:ext cx="10668000" cy="508000"/>
           </a:xfrm>
           <a:prstGeom prst="rect">
             <a:avLst/>
@@ -29651,7 +29765,7 @@
                 <a:cs typeface="Noto Sans SC"/>
                 <a:sym typeface="Noto Sans SC"/>
               </a:rPr>
-              <a:t>3.2.2</a:t>
+              <a:t>4.4 </a:t>
             </a:r>
             <a:r>
               <a:rPr lang="zh-CN" altLang="en-US" sz="2200" b="1" dirty="0">
@@ -29663,1753 +29777,16 @@
                 <a:cs typeface="Noto Sans SC"/>
                 <a:sym typeface="Noto Sans SC"/>
               </a:rPr>
-              <a:t>稳定子 空间</a:t>
-            </a:r>
-            <a:endParaRPr lang="en-US" altLang="zh-CN" sz="2200" b="1" dirty="0">
-              <a:solidFill>
-                <a:srgbClr val="555555"/>
-              </a:solidFill>
-              <a:latin typeface="Noto Sans SC"/>
-              <a:ea typeface="Noto Sans SC"/>
-              <a:cs typeface="Noto Sans SC"/>
-              <a:sym typeface="Noto Sans SC"/>
-            </a:endParaRPr>
-          </a:p>
-          <a:p>
-            <a:pPr indent="0" algn="l">
-              <a:lnSpc>
-                <a:spcPct val="125000"/>
-              </a:lnSpc>
-              <a:defRPr/>
-            </a:pPr>
-            <a:endParaRPr lang="en-US" altLang="zh-CN" sz="2200" b="1" dirty="0">
-              <a:solidFill>
-                <a:srgbClr val="555555"/>
-              </a:solidFill>
-              <a:latin typeface="Noto Sans SC"/>
-              <a:ea typeface="Noto Sans SC"/>
-              <a:cs typeface="Noto Sans SC"/>
-              <a:sym typeface="Noto Sans SC"/>
-            </a:endParaRPr>
-          </a:p>
-        </p:txBody>
-      </p:sp>
-      <p:sp>
-        <p:nvSpPr>
-          <p:cNvPr id="16" name="AutoShape 7">
-            <a:extLst>
-              <a:ext uri="{FF2B5EF4-FFF2-40B4-BE49-F238E27FC236}">
-                <a16:creationId xmlns:a16="http://schemas.microsoft.com/office/drawing/2014/main" id="{ECD93D52-8130-C542-3CCF-F27E31F82528}"/>
-              </a:ext>
-            </a:extLst>
-          </p:cNvPr>
-          <p:cNvSpPr/>
-          <p:nvPr/>
-        </p:nvSpPr>
-        <p:spPr>
-          <a:xfrm>
-            <a:off x="736929" y="1861292"/>
-            <a:ext cx="6340764" cy="3061030"/>
-          </a:xfrm>
-          <a:prstGeom prst="rect">
-            <a:avLst/>
-          </a:prstGeom>
-          <a:noFill/>
-          <a:ln w="12700" cap="flat" cmpd="sng">
-            <a:noFill/>
-            <a:prstDash val="solid"/>
-            <a:round/>
-          </a:ln>
-        </p:spPr>
-        <p:txBody>
-          <a:bodyPr vert="horz" wrap="square" lIns="0" tIns="0" rIns="0" bIns="0" rtlCol="0" anchor="ctr" anchorCtr="0"/>
-          <a:lstStyle/>
-          <a:p>
-            <a:pPr indent="0" algn="l">
-              <a:lnSpc>
-                <a:spcPct val="108333"/>
-              </a:lnSpc>
-              <a:defRPr/>
-            </a:pPr>
-            <a:endParaRPr lang="en-US" sz="2000" dirty="0"/>
-          </a:p>
-        </p:txBody>
-      </p:sp>
-      <p:sp>
-        <p:nvSpPr>
-          <p:cNvPr id="7" name="文本框 6">
-            <a:extLst>
-              <a:ext uri="{FF2B5EF4-FFF2-40B4-BE49-F238E27FC236}">
-                <a16:creationId xmlns:a16="http://schemas.microsoft.com/office/drawing/2014/main" id="{3204BC14-AA27-5D05-046C-3DA1E502E247}"/>
-              </a:ext>
-            </a:extLst>
-          </p:cNvPr>
-          <p:cNvSpPr txBox="1"/>
-          <p:nvPr/>
-        </p:nvSpPr>
-        <p:spPr>
-          <a:xfrm>
-            <a:off x="755725" y="2343380"/>
-            <a:ext cx="6094206" cy="830997"/>
-          </a:xfrm>
-          <a:prstGeom prst="rect">
-            <a:avLst/>
-          </a:prstGeom>
-          <a:noFill/>
-        </p:spPr>
-        <p:txBody>
-          <a:bodyPr wrap="square">
-            <a:spAutoFit/>
-          </a:bodyPr>
-          <a:lstStyle/>
-          <a:p>
-            <a:r>
-              <a:rPr lang="zh-CN" altLang="en-US" sz="2400" b="1" dirty="0">
-                <a:solidFill>
-                  <a:schemeClr val="accent2"/>
-                </a:solidFill>
-              </a:rPr>
-              <a:t>稳定 </a:t>
-            </a:r>
-            <a:r>
-              <a:rPr lang="zh-CN" altLang="en-US" sz="2400" b="1" dirty="0"/>
-              <a:t>操作</a:t>
-            </a:r>
-            <a:r>
-              <a:rPr lang="zh-CN" altLang="en-US" sz="2400" b="1" dirty="0">
-                <a:solidFill>
-                  <a:schemeClr val="accent2"/>
-                </a:solidFill>
-              </a:rPr>
-              <a:t>不</a:t>
-            </a:r>
-            <a:r>
-              <a:rPr lang="zh-CN" altLang="en-US" sz="2400" b="1" dirty="0"/>
-              <a:t>改变对象</a:t>
-            </a:r>
-            <a:endParaRPr lang="en-US" altLang="zh-CN" sz="2400" b="1" dirty="0"/>
-          </a:p>
-          <a:p>
-            <a:endParaRPr lang="zh-CN" altLang="en-US" sz="2400" b="1" dirty="0"/>
-          </a:p>
-        </p:txBody>
-      </p:sp>
-      <p:pic>
-        <p:nvPicPr>
-          <p:cNvPr id="8" name="图片 7">
-            <a:extLst>
-              <a:ext uri="{FF2B5EF4-FFF2-40B4-BE49-F238E27FC236}">
-                <a16:creationId xmlns:a16="http://schemas.microsoft.com/office/drawing/2014/main" id="{D3A583C8-AEE7-30B7-625B-DEAB1F226B5E}"/>
-              </a:ext>
-            </a:extLst>
-          </p:cNvPr>
-          <p:cNvPicPr>
-            <a:picLocks noChangeAspect="1"/>
-          </p:cNvPicPr>
-          <p:nvPr/>
-        </p:nvPicPr>
-        <p:blipFill>
-          <a:blip r:embed="rId3"/>
-          <a:stretch>
-            <a:fillRect/>
-          </a:stretch>
-        </p:blipFill>
-        <p:spPr>
-          <a:xfrm>
-            <a:off x="9022115" y="1266617"/>
-            <a:ext cx="1914792" cy="581106"/>
-          </a:xfrm>
-          <a:prstGeom prst="rect">
-            <a:avLst/>
-          </a:prstGeom>
-        </p:spPr>
-      </p:pic>
+              <a:t>稳定子</a:t>
+            </a:r>
+            <a:endParaRPr lang="en-US" sz="1100" dirty="0"/>
+          </a:p>
+        </p:txBody>
+      </p:sp>
     </p:spTree>
     <p:extLst>
       <p:ext uri="{BB962C8B-B14F-4D97-AF65-F5344CB8AC3E}">
-        <p14:creationId xmlns:p14="http://schemas.microsoft.com/office/powerpoint/2010/main" val="54983490"/>
-      </p:ext>
-    </p:extLst>
-  </p:cSld>
-  <p:clrMapOvr>
-    <a:masterClrMapping/>
-  </p:clrMapOvr>
-  <mc:AlternateContent xmlns:mc="http://schemas.openxmlformats.org/markup-compatibility/2006" xmlns:p159="http://schemas.microsoft.com/office/powerpoint/2015/09/main">
-    <mc:Choice Requires="p159">
-      <p:transition spd="slow">
-        <p159:morph option="byObject"/>
-      </p:transition>
-    </mc:Choice>
-    <mc:Fallback xmlns="">
-      <p:transition spd="slow">
-        <p:fade/>
-      </p:transition>
-    </mc:Fallback>
-  </mc:AlternateContent>
-</p:sld>
-</file>
-
-<file path=ppt/slides/slide33.xml><?xml version="1.0" encoding="utf-8"?>
-<p:sld xmlns:a="http://schemas.openxmlformats.org/drawingml/2006/main" xmlns:r="http://schemas.openxmlformats.org/officeDocument/2006/relationships" xmlns:p="http://schemas.openxmlformats.org/presentationml/2006/main">
-  <p:cSld>
-    <p:spTree>
-      <p:nvGrpSpPr>
-        <p:cNvPr id="1" name="">
-          <a:extLst>
-            <a:ext uri="{FF2B5EF4-FFF2-40B4-BE49-F238E27FC236}">
-              <a16:creationId xmlns:a16="http://schemas.microsoft.com/office/drawing/2014/main" id="{E6FD1EAB-822E-0EA9-1695-CF82529DF8E0}"/>
-            </a:ext>
-          </a:extLst>
-        </p:cNvPr>
-        <p:cNvGrpSpPr/>
-        <p:nvPr/>
-      </p:nvGrpSpPr>
-      <p:grpSpPr>
-        <a:xfrm>
-          <a:off x="0" y="0"/>
-          <a:ext cx="0" cy="0"/>
-          <a:chOff x="0" y="0"/>
-          <a:chExt cx="0" cy="0"/>
-        </a:xfrm>
-      </p:grpSpPr>
-      <p:sp>
-        <p:nvSpPr>
-          <p:cNvPr id="2" name="AutoShape 2">
-            <a:extLst>
-              <a:ext uri="{FF2B5EF4-FFF2-40B4-BE49-F238E27FC236}">
-                <a16:creationId xmlns:a16="http://schemas.microsoft.com/office/drawing/2014/main" id="{C3EB5F16-1BEE-93C7-7EA9-EB09139E5963}"/>
-              </a:ext>
-            </a:extLst>
-          </p:cNvPr>
-          <p:cNvSpPr/>
-          <p:nvPr/>
-        </p:nvSpPr>
-        <p:spPr>
-          <a:xfrm>
-            <a:off x="762000" y="635000"/>
-            <a:ext cx="10668000" cy="635000"/>
-          </a:xfrm>
-          <a:prstGeom prst="rect">
-            <a:avLst/>
-          </a:prstGeom>
-          <a:noFill/>
-          <a:ln w="12700" cap="flat" cmpd="sng">
-            <a:noFill/>
-            <a:prstDash val="solid"/>
-            <a:round/>
-          </a:ln>
-        </p:spPr>
-        <p:txBody>
-          <a:bodyPr vert="horz" wrap="square" lIns="0" tIns="0" rIns="0" bIns="0" rtlCol="0" anchor="ctr" anchorCtr="0"/>
-          <a:lstStyle/>
-          <a:p>
-            <a:pPr>
-              <a:lnSpc>
-                <a:spcPct val="125000"/>
-              </a:lnSpc>
-              <a:defRPr/>
-            </a:pPr>
-            <a:r>
-              <a:rPr lang="en-US" sz="3200" b="1" i="0" u="none" strike="noStrike" dirty="0">
-                <a:solidFill>
-                  <a:srgbClr val="333333"/>
-                </a:solidFill>
-                <a:latin typeface="Noto Sans SC"/>
-                <a:ea typeface="Noto Sans SC"/>
-                <a:cs typeface="Noto Sans SC"/>
-                <a:sym typeface="Noto Sans SC"/>
-              </a:rPr>
-              <a:t>03 </a:t>
-            </a:r>
-            <a:r>
-              <a:rPr lang="zh-CN" altLang="en-US" sz="3200" b="1" i="0" u="none" strike="noStrike" dirty="0">
-                <a:solidFill>
-                  <a:srgbClr val="333333"/>
-                </a:solidFill>
-                <a:latin typeface="Noto Sans SC"/>
-                <a:ea typeface="Noto Sans SC"/>
-                <a:cs typeface="Noto Sans SC"/>
-                <a:sym typeface="Noto Sans SC"/>
-              </a:rPr>
-              <a:t>稳定子</a:t>
-            </a:r>
-            <a:endParaRPr lang="en-US" sz="1100" dirty="0"/>
-          </a:p>
-        </p:txBody>
-      </p:sp>
-      <p:sp>
-        <p:nvSpPr>
-          <p:cNvPr id="3" name="AutoShape 3">
-            <a:extLst>
-              <a:ext uri="{FF2B5EF4-FFF2-40B4-BE49-F238E27FC236}">
-                <a16:creationId xmlns:a16="http://schemas.microsoft.com/office/drawing/2014/main" id="{6C58F4E4-DFF3-8AC9-5752-E7BE72DC8364}"/>
-              </a:ext>
-            </a:extLst>
-          </p:cNvPr>
-          <p:cNvSpPr/>
-          <p:nvPr/>
-        </p:nvSpPr>
-        <p:spPr>
-          <a:xfrm>
-            <a:off x="762000" y="1651000"/>
-            <a:ext cx="10668000" cy="508000"/>
-          </a:xfrm>
-          <a:prstGeom prst="rect">
-            <a:avLst/>
-          </a:prstGeom>
-          <a:noFill/>
-          <a:ln w="12700" cap="flat" cmpd="sng">
-            <a:noFill/>
-            <a:prstDash val="solid"/>
-            <a:round/>
-          </a:ln>
-        </p:spPr>
-        <p:txBody>
-          <a:bodyPr vert="horz" wrap="square" lIns="0" tIns="0" rIns="0" bIns="0" rtlCol="0" anchor="ctr" anchorCtr="0"/>
-          <a:lstStyle/>
-          <a:p>
-            <a:pPr indent="0" algn="l">
-              <a:lnSpc>
-                <a:spcPct val="125000"/>
-              </a:lnSpc>
-              <a:defRPr/>
-            </a:pPr>
-            <a:endParaRPr lang="en-US" sz="1100" dirty="0"/>
-          </a:p>
-        </p:txBody>
-      </p:sp>
-      <p:cxnSp>
-        <p:nvCxnSpPr>
-          <p:cNvPr id="4" name="直接连接符 3">
-            <a:extLst>
-              <a:ext uri="{FF2B5EF4-FFF2-40B4-BE49-F238E27FC236}">
-                <a16:creationId xmlns:a16="http://schemas.microsoft.com/office/drawing/2014/main" id="{49622008-4D84-591A-0261-94982E5B4C30}"/>
-              </a:ext>
-            </a:extLst>
-          </p:cNvPr>
-          <p:cNvCxnSpPr/>
-          <p:nvPr/>
-        </p:nvCxnSpPr>
-        <p:spPr>
-          <a:xfrm>
-            <a:off x="7534894" y="0"/>
-            <a:ext cx="0" cy="6941127"/>
-          </a:xfrm>
-          <a:prstGeom prst="line">
-            <a:avLst/>
-          </a:prstGeom>
-          <a:ln w="76200">
-            <a:solidFill>
-              <a:schemeClr val="tx1">
-                <a:lumMod val="75000"/>
-                <a:lumOff val="25000"/>
-              </a:schemeClr>
-            </a:solidFill>
-            <a:prstDash val="sysDot"/>
-          </a:ln>
-        </p:spPr>
-        <p:style>
-          <a:lnRef idx="1">
-            <a:schemeClr val="accent1"/>
-          </a:lnRef>
-          <a:fillRef idx="0">
-            <a:schemeClr val="accent1"/>
-          </a:fillRef>
-          <a:effectRef idx="0">
-            <a:schemeClr val="accent1"/>
-          </a:effectRef>
-          <a:fontRef idx="minor">
-            <a:schemeClr val="tx1"/>
-          </a:fontRef>
-        </p:style>
-      </p:cxnSp>
-      <p:sp>
-        <p:nvSpPr>
-          <p:cNvPr id="6" name="AutoShape 3">
-            <a:extLst>
-              <a:ext uri="{FF2B5EF4-FFF2-40B4-BE49-F238E27FC236}">
-                <a16:creationId xmlns:a16="http://schemas.microsoft.com/office/drawing/2014/main" id="{CD5D7014-2B63-102A-1895-F98208F555DD}"/>
-              </a:ext>
-            </a:extLst>
-          </p:cNvPr>
-          <p:cNvSpPr/>
-          <p:nvPr/>
-        </p:nvSpPr>
-        <p:spPr>
-          <a:xfrm>
-            <a:off x="1005840" y="1315720"/>
-            <a:ext cx="3501614" cy="1061720"/>
-          </a:xfrm>
-          <a:prstGeom prst="rect">
-            <a:avLst/>
-          </a:prstGeom>
-          <a:noFill/>
-          <a:ln w="12700" cap="flat" cmpd="sng">
-            <a:noFill/>
-            <a:prstDash val="solid"/>
-            <a:round/>
-          </a:ln>
-        </p:spPr>
-        <p:txBody>
-          <a:bodyPr vert="horz" wrap="square" lIns="0" tIns="0" rIns="0" bIns="0" rtlCol="0" anchor="ctr" anchorCtr="0"/>
-          <a:lstStyle/>
-          <a:p>
-            <a:pPr indent="0" algn="l">
-              <a:lnSpc>
-                <a:spcPct val="125000"/>
-              </a:lnSpc>
-              <a:defRPr/>
-            </a:pPr>
-            <a:r>
-              <a:rPr lang="en-US" altLang="zh-CN" sz="2200" b="1" dirty="0">
-                <a:solidFill>
-                  <a:srgbClr val="555555"/>
-                </a:solidFill>
-                <a:latin typeface="Noto Sans SC"/>
-                <a:ea typeface="Noto Sans SC"/>
-                <a:cs typeface="Noto Sans SC"/>
-                <a:sym typeface="Noto Sans SC"/>
-              </a:rPr>
-              <a:t>3.3.1</a:t>
-            </a:r>
-            <a:r>
-              <a:rPr lang="zh-CN" altLang="en-US" sz="2200" b="1" dirty="0">
-                <a:solidFill>
-                  <a:srgbClr val="555555"/>
-                </a:solidFill>
-                <a:latin typeface="Noto Sans SC"/>
-                <a:ea typeface="Noto Sans SC"/>
-                <a:cs typeface="Noto Sans SC"/>
-                <a:sym typeface="Noto Sans SC"/>
-              </a:rPr>
-              <a:t>权重</a:t>
-            </a:r>
-            <a:endParaRPr lang="en-US" altLang="zh-CN" sz="2200" b="1" dirty="0">
-              <a:solidFill>
-                <a:srgbClr val="555555"/>
-              </a:solidFill>
-              <a:latin typeface="Noto Sans SC"/>
-              <a:ea typeface="Noto Sans SC"/>
-              <a:cs typeface="Noto Sans SC"/>
-              <a:sym typeface="Noto Sans SC"/>
-            </a:endParaRPr>
-          </a:p>
-          <a:p>
-            <a:pPr indent="0" algn="l">
-              <a:lnSpc>
-                <a:spcPct val="125000"/>
-              </a:lnSpc>
-              <a:defRPr/>
-            </a:pPr>
-            <a:endParaRPr lang="en-US" altLang="zh-CN" sz="2200" b="1" dirty="0">
-              <a:solidFill>
-                <a:srgbClr val="555555"/>
-              </a:solidFill>
-              <a:latin typeface="Noto Sans SC"/>
-              <a:ea typeface="Noto Sans SC"/>
-              <a:cs typeface="Noto Sans SC"/>
-              <a:sym typeface="Noto Sans SC"/>
-            </a:endParaRPr>
-          </a:p>
-        </p:txBody>
-      </p:sp>
-      <p:sp>
-        <p:nvSpPr>
-          <p:cNvPr id="16" name="AutoShape 7">
-            <a:extLst>
-              <a:ext uri="{FF2B5EF4-FFF2-40B4-BE49-F238E27FC236}">
-                <a16:creationId xmlns:a16="http://schemas.microsoft.com/office/drawing/2014/main" id="{DDACA48F-1BCA-110C-ACEA-FA8E9E410248}"/>
-              </a:ext>
-            </a:extLst>
-          </p:cNvPr>
-          <p:cNvSpPr/>
-          <p:nvPr/>
-        </p:nvSpPr>
-        <p:spPr>
-          <a:xfrm>
-            <a:off x="736929" y="1861292"/>
-            <a:ext cx="6340764" cy="3061030"/>
-          </a:xfrm>
-          <a:prstGeom prst="rect">
-            <a:avLst/>
-          </a:prstGeom>
-          <a:noFill/>
-          <a:ln w="12700" cap="flat" cmpd="sng">
-            <a:noFill/>
-            <a:prstDash val="solid"/>
-            <a:round/>
-          </a:ln>
-        </p:spPr>
-        <p:txBody>
-          <a:bodyPr vert="horz" wrap="square" lIns="0" tIns="0" rIns="0" bIns="0" rtlCol="0" anchor="ctr" anchorCtr="0"/>
-          <a:lstStyle/>
-          <a:p>
-            <a:pPr indent="0" algn="l">
-              <a:lnSpc>
-                <a:spcPct val="108333"/>
-              </a:lnSpc>
-              <a:defRPr/>
-            </a:pPr>
-            <a:endParaRPr lang="en-US" sz="2000" dirty="0"/>
-          </a:p>
-        </p:txBody>
-      </p:sp>
-      <mc:AlternateContent xmlns:mc="http://schemas.openxmlformats.org/markup-compatibility/2006" xmlns:a14="http://schemas.microsoft.com/office/drawing/2010/main">
-        <mc:Choice Requires="a14">
-          <p:sp>
-            <p:nvSpPr>
-              <p:cNvPr id="18" name="文本框 17">
-                <a:extLst>
-                  <a:ext uri="{FF2B5EF4-FFF2-40B4-BE49-F238E27FC236}">
-                    <a16:creationId xmlns:a16="http://schemas.microsoft.com/office/drawing/2014/main" id="{F51D7CF7-042D-6047-7F1E-4871F38B9E8F}"/>
-                  </a:ext>
-                </a:extLst>
-              </p:cNvPr>
-              <p:cNvSpPr txBox="1"/>
-              <p:nvPr/>
-            </p:nvSpPr>
-            <p:spPr>
-              <a:xfrm>
-                <a:off x="744967" y="3518665"/>
-                <a:ext cx="6473413" cy="1569660"/>
-              </a:xfrm>
-              <a:prstGeom prst="rect">
-                <a:avLst/>
-              </a:prstGeom>
-              <a:noFill/>
-            </p:spPr>
-            <p:txBody>
-              <a:bodyPr wrap="square">
-                <a:spAutoFit/>
-              </a:bodyPr>
-              <a:lstStyle/>
-              <a:p>
-                <a:r>
-                  <a:rPr lang="zh-CN" altLang="en-US" sz="2400" b="1" dirty="0"/>
-                  <a:t>泡利算符中</a:t>
-                </a:r>
-                <a:r>
-                  <a:rPr lang="zh-CN" altLang="en-US" sz="2400" b="1" dirty="0">
-                    <a:solidFill>
-                      <a:schemeClr val="accent2"/>
-                    </a:solidFill>
-                  </a:rPr>
-                  <a:t>非单位算符（即 </a:t>
-                </a:r>
-                <a14:m>
-                  <m:oMath xmlns:m="http://schemas.openxmlformats.org/officeDocument/2006/math">
-                    <m:r>
-                      <a:rPr lang="zh-CN" altLang="en-US" sz="2400" b="1" i="1">
-                        <a:solidFill>
-                          <a:schemeClr val="accent2"/>
-                        </a:solidFill>
-                        <a:latin typeface="Cambria Math" panose="02040503050406030204" pitchFamily="18" charset="0"/>
-                      </a:rPr>
-                      <m:t>𝑿</m:t>
-                    </m:r>
-                    <m:r>
-                      <a:rPr lang="en-US" altLang="zh-CN" sz="2400" b="1">
-                        <a:solidFill>
-                          <a:schemeClr val="accent2"/>
-                        </a:solidFill>
-                        <a:latin typeface="Cambria Math" panose="02040503050406030204" pitchFamily="18" charset="0"/>
-                      </a:rPr>
-                      <m:t>,</m:t>
-                    </m:r>
-                    <m:r>
-                      <a:rPr lang="zh-CN" altLang="en-US" sz="2400" b="1" i="1">
-                        <a:solidFill>
-                          <a:schemeClr val="accent2"/>
-                        </a:solidFill>
-                        <a:latin typeface="Cambria Math" panose="02040503050406030204" pitchFamily="18" charset="0"/>
-                      </a:rPr>
-                      <m:t>𝒀</m:t>
-                    </m:r>
-                    <m:r>
-                      <a:rPr lang="en-US" altLang="zh-CN" sz="2400" b="1">
-                        <a:solidFill>
-                          <a:schemeClr val="accent2"/>
-                        </a:solidFill>
-                        <a:latin typeface="Cambria Math" panose="02040503050406030204" pitchFamily="18" charset="0"/>
-                      </a:rPr>
-                      <m:t>,</m:t>
-                    </m:r>
-                    <m:r>
-                      <a:rPr lang="zh-CN" altLang="en-US" sz="2400" b="1" i="1">
-                        <a:solidFill>
-                          <a:schemeClr val="accent2"/>
-                        </a:solidFill>
-                        <a:latin typeface="Cambria Math" panose="02040503050406030204" pitchFamily="18" charset="0"/>
-                      </a:rPr>
-                      <m:t>𝒁</m:t>
-                    </m:r>
-                  </m:oMath>
-                </a14:m>
-                <a:r>
-                  <a:rPr lang="zh-CN" altLang="en-US" sz="2400" b="1" dirty="0">
-                    <a:solidFill>
-                      <a:schemeClr val="accent2"/>
-                    </a:solidFill>
-                  </a:rPr>
-                  <a:t>）</a:t>
-                </a:r>
-                <a:r>
-                  <a:rPr lang="zh-CN" altLang="en-US" sz="2400" b="1" dirty="0"/>
-                  <a:t>的数量</a:t>
-                </a:r>
-                <a:endParaRPr lang="en-US" altLang="zh-CN" sz="2400" b="1" dirty="0">
-                  <a:latin typeface="quote-cjk-patch"/>
-                </a:endParaRPr>
-              </a:p>
-              <a:p>
-                <a:endParaRPr lang="en-US" altLang="zh-CN" sz="2400" b="1" dirty="0">
-                  <a:solidFill>
-                    <a:schemeClr val="accent2"/>
-                  </a:solidFill>
-                  <a:latin typeface="quote-cjk-patch"/>
-                </a:endParaRPr>
-              </a:p>
-              <a:p>
-                <a:endParaRPr lang="en-US" altLang="zh-CN" sz="2400" b="1" dirty="0">
-                  <a:solidFill>
-                    <a:schemeClr val="accent2"/>
-                  </a:solidFill>
-                  <a:latin typeface="quote-cjk-patch"/>
-                </a:endParaRPr>
-              </a:p>
-              <a:p>
-                <a:endParaRPr lang="zh-CN" altLang="en-US" sz="2400" b="1" dirty="0">
-                  <a:solidFill>
-                    <a:schemeClr val="accent2"/>
-                  </a:solidFill>
-                </a:endParaRPr>
-              </a:p>
-            </p:txBody>
-          </p:sp>
-        </mc:Choice>
-        <mc:Fallback xmlns="">
-          <p:sp>
-            <p:nvSpPr>
-              <p:cNvPr id="18" name="文本框 17">
-                <a:extLst>
-                  <a:ext uri="{FF2B5EF4-FFF2-40B4-BE49-F238E27FC236}">
-                    <a16:creationId xmlns:a16="http://schemas.microsoft.com/office/drawing/2014/main" id="{F51D7CF7-042D-6047-7F1E-4871F38B9E8F}"/>
-                  </a:ext>
-                </a:extLst>
-              </p:cNvPr>
-              <p:cNvSpPr txBox="1">
-                <a:spLocks noRot="1" noChangeAspect="1" noMove="1" noResize="1" noEditPoints="1" noAdjustHandles="1" noChangeArrowheads="1" noChangeShapeType="1" noTextEdit="1"/>
-              </p:cNvSpPr>
-              <p:nvPr/>
-            </p:nvSpPr>
-            <p:spPr>
-              <a:xfrm>
-                <a:off x="744967" y="3518665"/>
-                <a:ext cx="6473413" cy="1569660"/>
-              </a:xfrm>
-              <a:prstGeom prst="rect">
-                <a:avLst/>
-              </a:prstGeom>
-              <a:blipFill>
-                <a:blip r:embed="rId3"/>
-                <a:stretch>
-                  <a:fillRect l="-1412" t="-2713"/>
-                </a:stretch>
-              </a:blipFill>
-            </p:spPr>
-            <p:txBody>
-              <a:bodyPr/>
-              <a:lstStyle/>
-              <a:p>
-                <a:r>
-                  <a:rPr lang="zh-CN" altLang="en-US">
-                    <a:noFill/>
-                  </a:rPr>
-                  <a:t> </a:t>
-                </a:r>
-              </a:p>
-            </p:txBody>
-          </p:sp>
-        </mc:Fallback>
-      </mc:AlternateContent>
-      <p:pic>
-        <p:nvPicPr>
-          <p:cNvPr id="10" name="图片 9">
-            <a:extLst>
-              <a:ext uri="{FF2B5EF4-FFF2-40B4-BE49-F238E27FC236}">
-                <a16:creationId xmlns:a16="http://schemas.microsoft.com/office/drawing/2014/main" id="{F51B604B-9C26-8ECC-BC7F-DDF3938317FA}"/>
-              </a:ext>
-            </a:extLst>
-          </p:cNvPr>
-          <p:cNvPicPr>
-            <a:picLocks noChangeAspect="1"/>
-          </p:cNvPicPr>
-          <p:nvPr/>
-        </p:nvPicPr>
-        <p:blipFill>
-          <a:blip r:embed="rId4"/>
-          <a:stretch>
-            <a:fillRect/>
-          </a:stretch>
-        </p:blipFill>
-        <p:spPr>
-          <a:xfrm>
-            <a:off x="8251390" y="3087673"/>
-            <a:ext cx="3305636" cy="1543265"/>
-          </a:xfrm>
-          <a:prstGeom prst="rect">
-            <a:avLst/>
-          </a:prstGeom>
-        </p:spPr>
-      </p:pic>
-    </p:spTree>
-    <p:extLst>
-      <p:ext uri="{BB962C8B-B14F-4D97-AF65-F5344CB8AC3E}">
-        <p14:creationId xmlns:p14="http://schemas.microsoft.com/office/powerpoint/2010/main" val="4099575720"/>
-      </p:ext>
-    </p:extLst>
-  </p:cSld>
-  <p:clrMapOvr>
-    <a:masterClrMapping/>
-  </p:clrMapOvr>
-  <mc:AlternateContent xmlns:mc="http://schemas.openxmlformats.org/markup-compatibility/2006" xmlns:p159="http://schemas.microsoft.com/office/powerpoint/2015/09/main">
-    <mc:Choice Requires="p159">
-      <p:transition spd="slow">
-        <p159:morph option="byObject"/>
-      </p:transition>
-    </mc:Choice>
-    <mc:Fallback xmlns="">
-      <p:transition spd="slow">
-        <p:fade/>
-      </p:transition>
-    </mc:Fallback>
-  </mc:AlternateContent>
-</p:sld>
-</file>
-
-<file path=ppt/slides/slide34.xml><?xml version="1.0" encoding="utf-8"?>
-<p:sld xmlns:a="http://schemas.openxmlformats.org/drawingml/2006/main" xmlns:r="http://schemas.openxmlformats.org/officeDocument/2006/relationships" xmlns:p="http://schemas.openxmlformats.org/presentationml/2006/main">
-  <p:cSld>
-    <p:spTree>
-      <p:nvGrpSpPr>
-        <p:cNvPr id="1" name="">
-          <a:extLst>
-            <a:ext uri="{FF2B5EF4-FFF2-40B4-BE49-F238E27FC236}">
-              <a16:creationId xmlns:a16="http://schemas.microsoft.com/office/drawing/2014/main" id="{38D22B70-331D-3B36-A841-B3AA9ACC1508}"/>
-            </a:ext>
-          </a:extLst>
-        </p:cNvPr>
-        <p:cNvGrpSpPr/>
-        <p:nvPr/>
-      </p:nvGrpSpPr>
-      <p:grpSpPr>
-        <a:xfrm>
-          <a:off x="0" y="0"/>
-          <a:ext cx="0" cy="0"/>
-          <a:chOff x="0" y="0"/>
-          <a:chExt cx="0" cy="0"/>
-        </a:xfrm>
-      </p:grpSpPr>
-      <p:sp>
-        <p:nvSpPr>
-          <p:cNvPr id="2" name="AutoShape 2">
-            <a:extLst>
-              <a:ext uri="{FF2B5EF4-FFF2-40B4-BE49-F238E27FC236}">
-                <a16:creationId xmlns:a16="http://schemas.microsoft.com/office/drawing/2014/main" id="{57D6CD0B-B4AC-AF5C-90A5-FE8222926B67}"/>
-              </a:ext>
-            </a:extLst>
-          </p:cNvPr>
-          <p:cNvSpPr/>
-          <p:nvPr/>
-        </p:nvSpPr>
-        <p:spPr>
-          <a:xfrm>
-            <a:off x="762000" y="635000"/>
-            <a:ext cx="10668000" cy="635000"/>
-          </a:xfrm>
-          <a:prstGeom prst="rect">
-            <a:avLst/>
-          </a:prstGeom>
-          <a:noFill/>
-          <a:ln w="12700" cap="flat" cmpd="sng">
-            <a:noFill/>
-            <a:prstDash val="solid"/>
-            <a:round/>
-          </a:ln>
-        </p:spPr>
-        <p:txBody>
-          <a:bodyPr vert="horz" wrap="square" lIns="0" tIns="0" rIns="0" bIns="0" rtlCol="0" anchor="ctr" anchorCtr="0"/>
-          <a:lstStyle/>
-          <a:p>
-            <a:pPr>
-              <a:lnSpc>
-                <a:spcPct val="125000"/>
-              </a:lnSpc>
-              <a:defRPr/>
-            </a:pPr>
-            <a:r>
-              <a:rPr lang="en-US" sz="3200" b="1" i="0" u="none" strike="noStrike" dirty="0">
-                <a:solidFill>
-                  <a:srgbClr val="333333"/>
-                </a:solidFill>
-                <a:latin typeface="Noto Sans SC"/>
-                <a:ea typeface="Noto Sans SC"/>
-                <a:cs typeface="Noto Sans SC"/>
-                <a:sym typeface="Noto Sans SC"/>
-              </a:rPr>
-              <a:t>03 </a:t>
-            </a:r>
-            <a:r>
-              <a:rPr lang="zh-CN" altLang="en-US" sz="3200" b="1" i="0" u="none" strike="noStrike" dirty="0">
-                <a:solidFill>
-                  <a:srgbClr val="333333"/>
-                </a:solidFill>
-                <a:latin typeface="Noto Sans SC"/>
-                <a:ea typeface="Noto Sans SC"/>
-                <a:cs typeface="Noto Sans SC"/>
-                <a:sym typeface="Noto Sans SC"/>
-              </a:rPr>
-              <a:t>稳定子</a:t>
-            </a:r>
-            <a:endParaRPr lang="en-US" sz="1100" dirty="0"/>
-          </a:p>
-        </p:txBody>
-      </p:sp>
-      <p:sp>
-        <p:nvSpPr>
-          <p:cNvPr id="3" name="AutoShape 3">
-            <a:extLst>
-              <a:ext uri="{FF2B5EF4-FFF2-40B4-BE49-F238E27FC236}">
-                <a16:creationId xmlns:a16="http://schemas.microsoft.com/office/drawing/2014/main" id="{61999969-B224-D8A0-B3F7-A85D2587ECC9}"/>
-              </a:ext>
-            </a:extLst>
-          </p:cNvPr>
-          <p:cNvSpPr/>
-          <p:nvPr/>
-        </p:nvSpPr>
-        <p:spPr>
-          <a:xfrm>
-            <a:off x="762000" y="1651000"/>
-            <a:ext cx="10668000" cy="508000"/>
-          </a:xfrm>
-          <a:prstGeom prst="rect">
-            <a:avLst/>
-          </a:prstGeom>
-          <a:noFill/>
-          <a:ln w="12700" cap="flat" cmpd="sng">
-            <a:noFill/>
-            <a:prstDash val="solid"/>
-            <a:round/>
-          </a:ln>
-        </p:spPr>
-        <p:txBody>
-          <a:bodyPr vert="horz" wrap="square" lIns="0" tIns="0" rIns="0" bIns="0" rtlCol="0" anchor="ctr" anchorCtr="0"/>
-          <a:lstStyle/>
-          <a:p>
-            <a:pPr indent="0" algn="l">
-              <a:lnSpc>
-                <a:spcPct val="125000"/>
-              </a:lnSpc>
-              <a:defRPr/>
-            </a:pPr>
-            <a:endParaRPr lang="en-US" sz="1100" dirty="0"/>
-          </a:p>
-        </p:txBody>
-      </p:sp>
-      <p:cxnSp>
-        <p:nvCxnSpPr>
-          <p:cNvPr id="4" name="直接连接符 3">
-            <a:extLst>
-              <a:ext uri="{FF2B5EF4-FFF2-40B4-BE49-F238E27FC236}">
-                <a16:creationId xmlns:a16="http://schemas.microsoft.com/office/drawing/2014/main" id="{3677D746-B4ED-10D5-8FFA-193B1A70C45A}"/>
-              </a:ext>
-            </a:extLst>
-          </p:cNvPr>
-          <p:cNvCxnSpPr/>
-          <p:nvPr/>
-        </p:nvCxnSpPr>
-        <p:spPr>
-          <a:xfrm>
-            <a:off x="7534894" y="0"/>
-            <a:ext cx="0" cy="6941127"/>
-          </a:xfrm>
-          <a:prstGeom prst="line">
-            <a:avLst/>
-          </a:prstGeom>
-          <a:ln w="76200">
-            <a:solidFill>
-              <a:schemeClr val="tx1">
-                <a:lumMod val="75000"/>
-                <a:lumOff val="25000"/>
-              </a:schemeClr>
-            </a:solidFill>
-            <a:prstDash val="sysDot"/>
-          </a:ln>
-        </p:spPr>
-        <p:style>
-          <a:lnRef idx="1">
-            <a:schemeClr val="accent1"/>
-          </a:lnRef>
-          <a:fillRef idx="0">
-            <a:schemeClr val="accent1"/>
-          </a:fillRef>
-          <a:effectRef idx="0">
-            <a:schemeClr val="accent1"/>
-          </a:effectRef>
-          <a:fontRef idx="minor">
-            <a:schemeClr val="tx1"/>
-          </a:fontRef>
-        </p:style>
-      </p:cxnSp>
-      <p:sp>
-        <p:nvSpPr>
-          <p:cNvPr id="6" name="AutoShape 3">
-            <a:extLst>
-              <a:ext uri="{FF2B5EF4-FFF2-40B4-BE49-F238E27FC236}">
-                <a16:creationId xmlns:a16="http://schemas.microsoft.com/office/drawing/2014/main" id="{DD9D581C-F370-BADD-27F6-EB6AA8F58836}"/>
-              </a:ext>
-            </a:extLst>
-          </p:cNvPr>
-          <p:cNvSpPr/>
-          <p:nvPr/>
-        </p:nvSpPr>
-        <p:spPr>
-          <a:xfrm>
-            <a:off x="1005840" y="1315720"/>
-            <a:ext cx="3501614" cy="1061720"/>
-          </a:xfrm>
-          <a:prstGeom prst="rect">
-            <a:avLst/>
-          </a:prstGeom>
-          <a:noFill/>
-          <a:ln w="12700" cap="flat" cmpd="sng">
-            <a:noFill/>
-            <a:prstDash val="solid"/>
-            <a:round/>
-          </a:ln>
-        </p:spPr>
-        <p:txBody>
-          <a:bodyPr vert="horz" wrap="square" lIns="0" tIns="0" rIns="0" bIns="0" rtlCol="0" anchor="ctr" anchorCtr="0"/>
-          <a:lstStyle/>
-          <a:p>
-            <a:pPr indent="0" algn="l">
-              <a:lnSpc>
-                <a:spcPct val="125000"/>
-              </a:lnSpc>
-              <a:defRPr/>
-            </a:pPr>
-            <a:r>
-              <a:rPr lang="en-US" altLang="zh-CN" sz="2200" b="1" dirty="0">
-                <a:solidFill>
-                  <a:srgbClr val="555555"/>
-                </a:solidFill>
-                <a:latin typeface="Noto Sans SC"/>
-                <a:ea typeface="Noto Sans SC"/>
-                <a:cs typeface="Noto Sans SC"/>
-                <a:sym typeface="Noto Sans SC"/>
-              </a:rPr>
-              <a:t>3.3.2</a:t>
-            </a:r>
-            <a:r>
-              <a:rPr lang="zh-CN" altLang="en-US" sz="2200" b="1" dirty="0">
-                <a:solidFill>
-                  <a:srgbClr val="555555"/>
-                </a:solidFill>
-                <a:latin typeface="Noto Sans SC"/>
-                <a:ea typeface="Noto Sans SC"/>
-                <a:cs typeface="Noto Sans SC"/>
-                <a:sym typeface="Noto Sans SC"/>
-              </a:rPr>
-              <a:t>量子码距离</a:t>
-            </a:r>
-            <a:endParaRPr lang="en-US" altLang="zh-CN" sz="2200" b="1" dirty="0">
-              <a:solidFill>
-                <a:srgbClr val="555555"/>
-              </a:solidFill>
-              <a:latin typeface="Noto Sans SC"/>
-              <a:ea typeface="Noto Sans SC"/>
-              <a:cs typeface="Noto Sans SC"/>
-              <a:sym typeface="Noto Sans SC"/>
-            </a:endParaRPr>
-          </a:p>
-          <a:p>
-            <a:pPr indent="0" algn="l">
-              <a:lnSpc>
-                <a:spcPct val="125000"/>
-              </a:lnSpc>
-              <a:defRPr/>
-            </a:pPr>
-            <a:endParaRPr lang="en-US" altLang="zh-CN" sz="2200" b="1" dirty="0">
-              <a:solidFill>
-                <a:srgbClr val="555555"/>
-              </a:solidFill>
-              <a:latin typeface="Noto Sans SC"/>
-              <a:ea typeface="Noto Sans SC"/>
-              <a:cs typeface="Noto Sans SC"/>
-              <a:sym typeface="Noto Sans SC"/>
-            </a:endParaRPr>
-          </a:p>
-        </p:txBody>
-      </p:sp>
-      <p:sp>
-        <p:nvSpPr>
-          <p:cNvPr id="16" name="AutoShape 7">
-            <a:extLst>
-              <a:ext uri="{FF2B5EF4-FFF2-40B4-BE49-F238E27FC236}">
-                <a16:creationId xmlns:a16="http://schemas.microsoft.com/office/drawing/2014/main" id="{4650CA24-08F1-A104-D048-B0E6AB8C4418}"/>
-              </a:ext>
-            </a:extLst>
-          </p:cNvPr>
-          <p:cNvSpPr/>
-          <p:nvPr/>
-        </p:nvSpPr>
-        <p:spPr>
-          <a:xfrm>
-            <a:off x="736929" y="1861292"/>
-            <a:ext cx="6340764" cy="3061030"/>
-          </a:xfrm>
-          <a:prstGeom prst="rect">
-            <a:avLst/>
-          </a:prstGeom>
-          <a:noFill/>
-          <a:ln w="12700" cap="flat" cmpd="sng">
-            <a:noFill/>
-            <a:prstDash val="solid"/>
-            <a:round/>
-          </a:ln>
-        </p:spPr>
-        <p:txBody>
-          <a:bodyPr vert="horz" wrap="square" lIns="0" tIns="0" rIns="0" bIns="0" rtlCol="0" anchor="ctr" anchorCtr="0"/>
-          <a:lstStyle/>
-          <a:p>
-            <a:pPr indent="0" algn="l">
-              <a:lnSpc>
-                <a:spcPct val="108333"/>
-              </a:lnSpc>
-              <a:defRPr/>
-            </a:pPr>
-            <a:endParaRPr lang="en-US" sz="2000" dirty="0"/>
-          </a:p>
-        </p:txBody>
-      </p:sp>
-      <p:sp>
-        <p:nvSpPr>
-          <p:cNvPr id="7" name="文本框 6">
-            <a:extLst>
-              <a:ext uri="{FF2B5EF4-FFF2-40B4-BE49-F238E27FC236}">
-                <a16:creationId xmlns:a16="http://schemas.microsoft.com/office/drawing/2014/main" id="{259F456D-5A11-C509-8FD3-05F292874492}"/>
-              </a:ext>
-            </a:extLst>
-          </p:cNvPr>
-          <p:cNvSpPr txBox="1"/>
-          <p:nvPr/>
-        </p:nvSpPr>
-        <p:spPr>
-          <a:xfrm>
-            <a:off x="766483" y="3247023"/>
-            <a:ext cx="6094206" cy="461665"/>
-          </a:xfrm>
-          <a:prstGeom prst="rect">
-            <a:avLst/>
-          </a:prstGeom>
-          <a:noFill/>
-        </p:spPr>
-        <p:txBody>
-          <a:bodyPr wrap="square">
-            <a:spAutoFit/>
-          </a:bodyPr>
-          <a:lstStyle/>
-          <a:p>
-            <a:r>
-              <a:rPr lang="zh-CN" altLang="en-US" sz="2400" b="1" i="0" dirty="0">
-                <a:solidFill>
-                  <a:srgbClr val="0F1115"/>
-                </a:solidFill>
-                <a:effectLst/>
-                <a:latin typeface="quote-cjk-patch"/>
-              </a:rPr>
-              <a:t>使纠错</a:t>
-            </a:r>
-            <a:r>
-              <a:rPr lang="zh-CN" altLang="en-US" sz="2400" b="1" i="0" dirty="0">
-                <a:solidFill>
-                  <a:schemeClr val="accent2"/>
-                </a:solidFill>
-                <a:effectLst/>
-                <a:latin typeface="quote-cjk-patch"/>
-              </a:rPr>
-              <a:t>失效</a:t>
-            </a:r>
-            <a:r>
-              <a:rPr lang="zh-CN" altLang="en-US" sz="2400" b="1" i="0" dirty="0">
-                <a:solidFill>
-                  <a:srgbClr val="0F1115"/>
-                </a:solidFill>
-                <a:effectLst/>
-                <a:latin typeface="quote-cjk-patch"/>
-              </a:rPr>
-              <a:t>的</a:t>
-            </a:r>
-            <a:r>
-              <a:rPr lang="zh-CN" altLang="en-US" sz="2400" b="1" i="0" dirty="0">
-                <a:solidFill>
-                  <a:schemeClr val="accent2"/>
-                </a:solidFill>
-                <a:effectLst/>
-                <a:latin typeface="quote-cjk-patch"/>
-              </a:rPr>
-              <a:t>最小</a:t>
-            </a:r>
-            <a:r>
-              <a:rPr lang="zh-CN" altLang="en-US" sz="2400" b="1" i="0" dirty="0">
-                <a:solidFill>
-                  <a:srgbClr val="0F1115"/>
-                </a:solidFill>
-                <a:effectLst/>
-                <a:latin typeface="quote-cjk-patch"/>
-              </a:rPr>
-              <a:t>错误</a:t>
-            </a:r>
-            <a:r>
-              <a:rPr lang="zh-CN" altLang="en-US" sz="2400" b="1" i="0" dirty="0">
-                <a:solidFill>
-                  <a:schemeClr val="accent2"/>
-                </a:solidFill>
-                <a:effectLst/>
-                <a:latin typeface="quote-cjk-patch"/>
-              </a:rPr>
-              <a:t>权重</a:t>
-            </a:r>
-            <a:r>
-              <a:rPr lang="zh-CN" altLang="en-US" sz="2400" b="1" i="0" dirty="0">
-                <a:solidFill>
-                  <a:srgbClr val="0F1115"/>
-                </a:solidFill>
-                <a:effectLst/>
-                <a:latin typeface="quote-cjk-patch"/>
-              </a:rPr>
-              <a:t>。</a:t>
-            </a:r>
-            <a:endParaRPr lang="zh-CN" altLang="en-US" sz="2400" b="1" dirty="0"/>
-          </a:p>
-        </p:txBody>
-      </p:sp>
-      <p:pic>
-        <p:nvPicPr>
-          <p:cNvPr id="12" name="图片 11">
-            <a:extLst>
-              <a:ext uri="{FF2B5EF4-FFF2-40B4-BE49-F238E27FC236}">
-                <a16:creationId xmlns:a16="http://schemas.microsoft.com/office/drawing/2014/main" id="{042A9871-E190-2F2B-3035-AAD93CF3DCA0}"/>
-              </a:ext>
-            </a:extLst>
-          </p:cNvPr>
-          <p:cNvPicPr>
-            <a:picLocks noChangeAspect="1"/>
-          </p:cNvPicPr>
-          <p:nvPr/>
-        </p:nvPicPr>
-        <p:blipFill>
-          <a:blip r:embed="rId3"/>
-          <a:stretch>
-            <a:fillRect/>
-          </a:stretch>
-        </p:blipFill>
-        <p:spPr>
-          <a:xfrm>
-            <a:off x="8269210" y="4395500"/>
-            <a:ext cx="3248478" cy="1638529"/>
-          </a:xfrm>
-          <a:prstGeom prst="rect">
-            <a:avLst/>
-          </a:prstGeom>
-        </p:spPr>
-      </p:pic>
-      <p:pic>
-        <p:nvPicPr>
-          <p:cNvPr id="14" name="图片 13">
-            <a:extLst>
-              <a:ext uri="{FF2B5EF4-FFF2-40B4-BE49-F238E27FC236}">
-                <a16:creationId xmlns:a16="http://schemas.microsoft.com/office/drawing/2014/main" id="{71F8F269-0711-81FB-4AB7-41CEAFB356F0}"/>
-              </a:ext>
-            </a:extLst>
-          </p:cNvPr>
-          <p:cNvPicPr>
-            <a:picLocks noChangeAspect="1"/>
-          </p:cNvPicPr>
-          <p:nvPr/>
-        </p:nvPicPr>
-        <p:blipFill>
-          <a:blip r:embed="rId4"/>
-          <a:stretch>
-            <a:fillRect/>
-          </a:stretch>
-        </p:blipFill>
-        <p:spPr>
-          <a:xfrm>
-            <a:off x="8409476" y="2310661"/>
-            <a:ext cx="2838846" cy="1505160"/>
-          </a:xfrm>
-          <a:prstGeom prst="rect">
-            <a:avLst/>
-          </a:prstGeom>
-        </p:spPr>
-      </p:pic>
-      <p:pic>
-        <p:nvPicPr>
-          <p:cNvPr id="17" name="图片 16">
-            <a:extLst>
-              <a:ext uri="{FF2B5EF4-FFF2-40B4-BE49-F238E27FC236}">
-                <a16:creationId xmlns:a16="http://schemas.microsoft.com/office/drawing/2014/main" id="{1CFDCBD0-70B5-EA09-945A-913D26C32F2F}"/>
-              </a:ext>
-            </a:extLst>
-          </p:cNvPr>
-          <p:cNvPicPr>
-            <a:picLocks noChangeAspect="1"/>
-          </p:cNvPicPr>
-          <p:nvPr/>
-        </p:nvPicPr>
-        <p:blipFill>
-          <a:blip r:embed="rId5"/>
-          <a:stretch>
-            <a:fillRect/>
-          </a:stretch>
-        </p:blipFill>
-        <p:spPr>
-          <a:xfrm>
-            <a:off x="7662593" y="372220"/>
-            <a:ext cx="4529407" cy="1438660"/>
-          </a:xfrm>
-          <a:prstGeom prst="rect">
-            <a:avLst/>
-          </a:prstGeom>
-        </p:spPr>
-      </p:pic>
-    </p:spTree>
-    <p:extLst>
-      <p:ext uri="{BB962C8B-B14F-4D97-AF65-F5344CB8AC3E}">
-        <p14:creationId xmlns:p14="http://schemas.microsoft.com/office/powerpoint/2010/main" val="3807020192"/>
-      </p:ext>
-    </p:extLst>
-  </p:cSld>
-  <p:clrMapOvr>
-    <a:masterClrMapping/>
-  </p:clrMapOvr>
-  <mc:AlternateContent xmlns:mc="http://schemas.openxmlformats.org/markup-compatibility/2006" xmlns:p159="http://schemas.microsoft.com/office/powerpoint/2015/09/main">
-    <mc:Choice Requires="p159">
-      <p:transition spd="slow">
-        <p159:morph option="byObject"/>
-      </p:transition>
-    </mc:Choice>
-    <mc:Fallback xmlns="">
-      <p:transition spd="slow">
-        <p:fade/>
-      </p:transition>
-    </mc:Fallback>
-  </mc:AlternateContent>
-</p:sld>
-</file>
-
-<file path=ppt/slides/slide35.xml><?xml version="1.0" encoding="utf-8"?>
-<p:sld xmlns:a="http://schemas.openxmlformats.org/drawingml/2006/main" xmlns:r="http://schemas.openxmlformats.org/officeDocument/2006/relationships" xmlns:p="http://schemas.openxmlformats.org/presentationml/2006/main">
-  <p:cSld>
-    <p:spTree>
-      <p:nvGrpSpPr>
-        <p:cNvPr id="1" name="">
-          <a:extLst>
-            <a:ext uri="{FF2B5EF4-FFF2-40B4-BE49-F238E27FC236}">
-              <a16:creationId xmlns:a16="http://schemas.microsoft.com/office/drawing/2014/main" id="{DAB131A9-5202-4109-3B52-67108EB33B0E}"/>
-            </a:ext>
-          </a:extLst>
-        </p:cNvPr>
-        <p:cNvGrpSpPr/>
-        <p:nvPr/>
-      </p:nvGrpSpPr>
-      <p:grpSpPr>
-        <a:xfrm>
-          <a:off x="0" y="0"/>
-          <a:ext cx="0" cy="0"/>
-          <a:chOff x="0" y="0"/>
-          <a:chExt cx="0" cy="0"/>
-        </a:xfrm>
-      </p:grpSpPr>
-      <p:sp>
-        <p:nvSpPr>
-          <p:cNvPr id="2" name="AutoShape 2">
-            <a:extLst>
-              <a:ext uri="{FF2B5EF4-FFF2-40B4-BE49-F238E27FC236}">
-                <a16:creationId xmlns:a16="http://schemas.microsoft.com/office/drawing/2014/main" id="{E1DFDAFE-1765-7C72-F84B-C4552894E824}"/>
-              </a:ext>
-            </a:extLst>
-          </p:cNvPr>
-          <p:cNvSpPr/>
-          <p:nvPr/>
-        </p:nvSpPr>
-        <p:spPr>
-          <a:xfrm>
-            <a:off x="762000" y="635000"/>
-            <a:ext cx="10668000" cy="635000"/>
-          </a:xfrm>
-          <a:prstGeom prst="rect">
-            <a:avLst/>
-          </a:prstGeom>
-          <a:noFill/>
-          <a:ln w="12700" cap="flat" cmpd="sng">
-            <a:noFill/>
-            <a:prstDash val="solid"/>
-            <a:round/>
-          </a:ln>
-        </p:spPr>
-        <p:txBody>
-          <a:bodyPr vert="horz" wrap="square" lIns="0" tIns="0" rIns="0" bIns="0" rtlCol="0" anchor="ctr" anchorCtr="0"/>
-          <a:lstStyle/>
-          <a:p>
-            <a:pPr>
-              <a:lnSpc>
-                <a:spcPct val="125000"/>
-              </a:lnSpc>
-              <a:defRPr/>
-            </a:pPr>
-            <a:r>
-              <a:rPr lang="en-US" sz="3200" b="1" i="0" u="none" strike="noStrike" dirty="0">
-                <a:solidFill>
-                  <a:srgbClr val="333333"/>
-                </a:solidFill>
-                <a:latin typeface="Noto Sans SC"/>
-                <a:ea typeface="Noto Sans SC"/>
-                <a:cs typeface="Noto Sans SC"/>
-                <a:sym typeface="Noto Sans SC"/>
-              </a:rPr>
-              <a:t>03 </a:t>
-            </a:r>
-            <a:r>
-              <a:rPr lang="zh-CN" altLang="en-US" sz="3200" b="1" i="0" u="none" strike="noStrike" dirty="0">
-                <a:solidFill>
-                  <a:srgbClr val="333333"/>
-                </a:solidFill>
-                <a:latin typeface="Noto Sans SC"/>
-                <a:ea typeface="Noto Sans SC"/>
-                <a:cs typeface="Noto Sans SC"/>
-                <a:sym typeface="Noto Sans SC"/>
-              </a:rPr>
-              <a:t>稳定子</a:t>
-            </a:r>
-            <a:endParaRPr lang="en-US" sz="1100" dirty="0"/>
-          </a:p>
-        </p:txBody>
-      </p:sp>
-      <p:sp>
-        <p:nvSpPr>
-          <p:cNvPr id="3" name="AutoShape 3">
-            <a:extLst>
-              <a:ext uri="{FF2B5EF4-FFF2-40B4-BE49-F238E27FC236}">
-                <a16:creationId xmlns:a16="http://schemas.microsoft.com/office/drawing/2014/main" id="{664BF0EA-612B-A9F0-A554-7D2EF3A75905}"/>
-              </a:ext>
-            </a:extLst>
-          </p:cNvPr>
-          <p:cNvSpPr/>
-          <p:nvPr/>
-        </p:nvSpPr>
-        <p:spPr>
-          <a:xfrm>
-            <a:off x="762000" y="1651000"/>
-            <a:ext cx="10668000" cy="508000"/>
-          </a:xfrm>
-          <a:prstGeom prst="rect">
-            <a:avLst/>
-          </a:prstGeom>
-          <a:noFill/>
-          <a:ln w="12700" cap="flat" cmpd="sng">
-            <a:noFill/>
-            <a:prstDash val="solid"/>
-            <a:round/>
-          </a:ln>
-        </p:spPr>
-        <p:txBody>
-          <a:bodyPr vert="horz" wrap="square" lIns="0" tIns="0" rIns="0" bIns="0" rtlCol="0" anchor="ctr" anchorCtr="0"/>
-          <a:lstStyle/>
-          <a:p>
-            <a:pPr indent="0" algn="l">
-              <a:lnSpc>
-                <a:spcPct val="125000"/>
-              </a:lnSpc>
-              <a:defRPr/>
-            </a:pPr>
-            <a:endParaRPr lang="en-US" sz="1100" dirty="0"/>
-          </a:p>
-        </p:txBody>
-      </p:sp>
-      <p:cxnSp>
-        <p:nvCxnSpPr>
-          <p:cNvPr id="4" name="直接连接符 3">
-            <a:extLst>
-              <a:ext uri="{FF2B5EF4-FFF2-40B4-BE49-F238E27FC236}">
-                <a16:creationId xmlns:a16="http://schemas.microsoft.com/office/drawing/2014/main" id="{66DFE714-0F6D-D919-53C0-B92EC02331A4}"/>
-              </a:ext>
-            </a:extLst>
-          </p:cNvPr>
-          <p:cNvCxnSpPr/>
-          <p:nvPr/>
-        </p:nvCxnSpPr>
-        <p:spPr>
-          <a:xfrm>
-            <a:off x="7534894" y="0"/>
-            <a:ext cx="0" cy="6941127"/>
-          </a:xfrm>
-          <a:prstGeom prst="line">
-            <a:avLst/>
-          </a:prstGeom>
-          <a:ln w="76200">
-            <a:solidFill>
-              <a:schemeClr val="tx1">
-                <a:lumMod val="75000"/>
-                <a:lumOff val="25000"/>
-              </a:schemeClr>
-            </a:solidFill>
-            <a:prstDash val="sysDot"/>
-          </a:ln>
-        </p:spPr>
-        <p:style>
-          <a:lnRef idx="1">
-            <a:schemeClr val="accent1"/>
-          </a:lnRef>
-          <a:fillRef idx="0">
-            <a:schemeClr val="accent1"/>
-          </a:fillRef>
-          <a:effectRef idx="0">
-            <a:schemeClr val="accent1"/>
-          </a:effectRef>
-          <a:fontRef idx="minor">
-            <a:schemeClr val="tx1"/>
-          </a:fontRef>
-        </p:style>
-      </p:cxnSp>
-      <p:sp>
-        <p:nvSpPr>
-          <p:cNvPr id="6" name="AutoShape 3">
-            <a:extLst>
-              <a:ext uri="{FF2B5EF4-FFF2-40B4-BE49-F238E27FC236}">
-                <a16:creationId xmlns:a16="http://schemas.microsoft.com/office/drawing/2014/main" id="{73D8C765-D609-E7B1-13E4-E8E76FD7F3B0}"/>
-              </a:ext>
-            </a:extLst>
-          </p:cNvPr>
-          <p:cNvSpPr/>
-          <p:nvPr/>
-        </p:nvSpPr>
-        <p:spPr>
-          <a:xfrm>
-            <a:off x="1005840" y="1315720"/>
-            <a:ext cx="3501614" cy="1061720"/>
-          </a:xfrm>
-          <a:prstGeom prst="rect">
-            <a:avLst/>
-          </a:prstGeom>
-          <a:noFill/>
-          <a:ln w="12700" cap="flat" cmpd="sng">
-            <a:noFill/>
-            <a:prstDash val="solid"/>
-            <a:round/>
-          </a:ln>
-        </p:spPr>
-        <p:txBody>
-          <a:bodyPr vert="horz" wrap="square" lIns="0" tIns="0" rIns="0" bIns="0" rtlCol="0" anchor="ctr" anchorCtr="0"/>
-          <a:lstStyle/>
-          <a:p>
-            <a:pPr indent="0" algn="l">
-              <a:lnSpc>
-                <a:spcPct val="125000"/>
-              </a:lnSpc>
-              <a:defRPr/>
-            </a:pPr>
-            <a:r>
-              <a:rPr lang="en-US" altLang="zh-CN" sz="2200" b="1" dirty="0">
-                <a:solidFill>
-                  <a:srgbClr val="555555"/>
-                </a:solidFill>
-                <a:latin typeface="Noto Sans SC"/>
-                <a:ea typeface="Noto Sans SC"/>
-                <a:cs typeface="Noto Sans SC"/>
-                <a:sym typeface="Noto Sans SC"/>
-              </a:rPr>
-              <a:t>3.3.3</a:t>
-            </a:r>
-            <a:r>
-              <a:rPr lang="zh-CN" altLang="en-US" sz="2200" b="1" dirty="0">
-                <a:solidFill>
-                  <a:srgbClr val="555555"/>
-                </a:solidFill>
-                <a:latin typeface="Noto Sans SC"/>
-                <a:ea typeface="Noto Sans SC"/>
-                <a:cs typeface="Noto Sans SC"/>
-                <a:sym typeface="Noto Sans SC"/>
-              </a:rPr>
-              <a:t>纠错码标记</a:t>
-            </a:r>
-            <a:endParaRPr lang="en-US" altLang="zh-CN" sz="2200" b="1" dirty="0">
-              <a:solidFill>
-                <a:srgbClr val="555555"/>
-              </a:solidFill>
-              <a:latin typeface="Noto Sans SC"/>
-              <a:ea typeface="Noto Sans SC"/>
-              <a:cs typeface="Noto Sans SC"/>
-              <a:sym typeface="Noto Sans SC"/>
-            </a:endParaRPr>
-          </a:p>
-          <a:p>
-            <a:pPr indent="0" algn="l">
-              <a:lnSpc>
-                <a:spcPct val="125000"/>
-              </a:lnSpc>
-              <a:defRPr/>
-            </a:pPr>
-            <a:endParaRPr lang="en-US" altLang="zh-CN" sz="2200" b="1" dirty="0">
-              <a:solidFill>
-                <a:srgbClr val="555555"/>
-              </a:solidFill>
-              <a:latin typeface="Noto Sans SC"/>
-              <a:ea typeface="Noto Sans SC"/>
-              <a:cs typeface="Noto Sans SC"/>
-              <a:sym typeface="Noto Sans SC"/>
-            </a:endParaRPr>
-          </a:p>
-        </p:txBody>
-      </p:sp>
-      <p:sp>
-        <p:nvSpPr>
-          <p:cNvPr id="16" name="AutoShape 7">
-            <a:extLst>
-              <a:ext uri="{FF2B5EF4-FFF2-40B4-BE49-F238E27FC236}">
-                <a16:creationId xmlns:a16="http://schemas.microsoft.com/office/drawing/2014/main" id="{52D0F09A-8DC6-26C6-2F64-A42DECEAE472}"/>
-              </a:ext>
-            </a:extLst>
-          </p:cNvPr>
-          <p:cNvSpPr/>
-          <p:nvPr/>
-        </p:nvSpPr>
-        <p:spPr>
-          <a:xfrm>
-            <a:off x="736929" y="1861292"/>
-            <a:ext cx="6340764" cy="3061030"/>
-          </a:xfrm>
-          <a:prstGeom prst="rect">
-            <a:avLst/>
-          </a:prstGeom>
-          <a:noFill/>
-          <a:ln w="12700" cap="flat" cmpd="sng">
-            <a:noFill/>
-            <a:prstDash val="solid"/>
-            <a:round/>
-          </a:ln>
-        </p:spPr>
-        <p:txBody>
-          <a:bodyPr vert="horz" wrap="square" lIns="0" tIns="0" rIns="0" bIns="0" rtlCol="0" anchor="ctr" anchorCtr="0"/>
-          <a:lstStyle/>
-          <a:p>
-            <a:pPr indent="0" algn="l">
-              <a:lnSpc>
-                <a:spcPct val="108333"/>
-              </a:lnSpc>
-              <a:defRPr/>
-            </a:pPr>
-            <a:endParaRPr lang="en-US" sz="2000" dirty="0"/>
-          </a:p>
-        </p:txBody>
-      </p:sp>
-      <p:sp>
-        <p:nvSpPr>
-          <p:cNvPr id="8" name="文本框 7">
-            <a:extLst>
-              <a:ext uri="{FF2B5EF4-FFF2-40B4-BE49-F238E27FC236}">
-                <a16:creationId xmlns:a16="http://schemas.microsoft.com/office/drawing/2014/main" id="{8F00BE5B-2C1C-1946-A84F-1D5135556D3C}"/>
-              </a:ext>
-            </a:extLst>
-          </p:cNvPr>
-          <p:cNvSpPr txBox="1"/>
-          <p:nvPr/>
-        </p:nvSpPr>
-        <p:spPr>
-          <a:xfrm>
-            <a:off x="841787" y="3634298"/>
-            <a:ext cx="6094206" cy="461665"/>
-          </a:xfrm>
-          <a:prstGeom prst="rect">
-            <a:avLst/>
-          </a:prstGeom>
-          <a:noFill/>
-        </p:spPr>
-        <p:txBody>
-          <a:bodyPr wrap="square">
-            <a:spAutoFit/>
-          </a:bodyPr>
-          <a:lstStyle/>
-          <a:p>
-            <a:r>
-              <a:rPr lang="zh-CN" altLang="en-US" sz="2400" b="1" i="0" dirty="0">
-                <a:solidFill>
-                  <a:srgbClr val="0F1115"/>
-                </a:solidFill>
-                <a:effectLst/>
-                <a:latin typeface="quote-cjk-patch"/>
-              </a:rPr>
-              <a:t>概括了该码的规模、信息容量和纠错能力</a:t>
-            </a:r>
-            <a:endParaRPr lang="zh-CN" altLang="en-US" sz="2400" b="1" dirty="0"/>
-          </a:p>
-        </p:txBody>
-      </p:sp>
-      <p:pic>
-        <p:nvPicPr>
-          <p:cNvPr id="10" name="图片 9">
-            <a:extLst>
-              <a:ext uri="{FF2B5EF4-FFF2-40B4-BE49-F238E27FC236}">
-                <a16:creationId xmlns:a16="http://schemas.microsoft.com/office/drawing/2014/main" id="{FB027404-165E-F7D7-4D0A-8EC7A4570C23}"/>
-              </a:ext>
-            </a:extLst>
-          </p:cNvPr>
-          <p:cNvPicPr>
-            <a:picLocks noChangeAspect="1"/>
-          </p:cNvPicPr>
-          <p:nvPr/>
-        </p:nvPicPr>
-        <p:blipFill>
-          <a:blip r:embed="rId3"/>
-          <a:stretch>
-            <a:fillRect/>
-          </a:stretch>
-        </p:blipFill>
-        <p:spPr>
-          <a:xfrm>
-            <a:off x="8277629" y="3119228"/>
-            <a:ext cx="1381318" cy="533474"/>
-          </a:xfrm>
-          <a:prstGeom prst="rect">
-            <a:avLst/>
-          </a:prstGeom>
-        </p:spPr>
-      </p:pic>
-      <p:pic>
-        <p:nvPicPr>
-          <p:cNvPr id="13" name="图片 12">
-            <a:extLst>
-              <a:ext uri="{FF2B5EF4-FFF2-40B4-BE49-F238E27FC236}">
-                <a16:creationId xmlns:a16="http://schemas.microsoft.com/office/drawing/2014/main" id="{C59D7589-EED1-B597-41BB-79556E0A363A}"/>
-              </a:ext>
-            </a:extLst>
-          </p:cNvPr>
-          <p:cNvPicPr>
-            <a:picLocks noChangeAspect="1"/>
-          </p:cNvPicPr>
-          <p:nvPr/>
-        </p:nvPicPr>
-        <p:blipFill>
-          <a:blip r:embed="rId4"/>
-          <a:stretch>
-            <a:fillRect/>
-          </a:stretch>
-        </p:blipFill>
-        <p:spPr>
-          <a:xfrm>
-            <a:off x="9020818" y="1105249"/>
-            <a:ext cx="1228896" cy="581106"/>
-          </a:xfrm>
-          <a:prstGeom prst="rect">
-            <a:avLst/>
-          </a:prstGeom>
-        </p:spPr>
-      </p:pic>
-      <p:pic>
-        <p:nvPicPr>
-          <p:cNvPr id="18" name="图片 17">
-            <a:extLst>
-              <a:ext uri="{FF2B5EF4-FFF2-40B4-BE49-F238E27FC236}">
-                <a16:creationId xmlns:a16="http://schemas.microsoft.com/office/drawing/2014/main" id="{39DB3366-6DE3-82A3-8FBD-77169730DDDA}"/>
-              </a:ext>
-            </a:extLst>
-          </p:cNvPr>
-          <p:cNvPicPr>
-            <a:picLocks noChangeAspect="1"/>
-          </p:cNvPicPr>
-          <p:nvPr/>
-        </p:nvPicPr>
-        <p:blipFill>
-          <a:blip r:embed="rId5"/>
-          <a:stretch>
-            <a:fillRect/>
-          </a:stretch>
-        </p:blipFill>
-        <p:spPr>
-          <a:xfrm>
-            <a:off x="8189428" y="4262167"/>
-            <a:ext cx="1514686" cy="657317"/>
-          </a:xfrm>
-          <a:prstGeom prst="rect">
-            <a:avLst/>
-          </a:prstGeom>
-        </p:spPr>
-      </p:pic>
-      <p:pic>
-        <p:nvPicPr>
-          <p:cNvPr id="20" name="图片 19">
-            <a:extLst>
-              <a:ext uri="{FF2B5EF4-FFF2-40B4-BE49-F238E27FC236}">
-                <a16:creationId xmlns:a16="http://schemas.microsoft.com/office/drawing/2014/main" id="{C5041C44-83FB-C6DE-E711-D22B26826180}"/>
-              </a:ext>
-            </a:extLst>
-          </p:cNvPr>
-          <p:cNvPicPr>
-            <a:picLocks noChangeAspect="1"/>
-          </p:cNvPicPr>
-          <p:nvPr/>
-        </p:nvPicPr>
-        <p:blipFill>
-          <a:blip r:embed="rId6"/>
-          <a:stretch>
-            <a:fillRect/>
-          </a:stretch>
-        </p:blipFill>
-        <p:spPr>
-          <a:xfrm>
-            <a:off x="8305884" y="2204669"/>
-            <a:ext cx="1152686" cy="447737"/>
-          </a:xfrm>
-          <a:prstGeom prst="rect">
-            <a:avLst/>
-          </a:prstGeom>
-        </p:spPr>
-      </p:pic>
-      <p:pic>
-        <p:nvPicPr>
-          <p:cNvPr id="22" name="图片 21">
-            <a:extLst>
-              <a:ext uri="{FF2B5EF4-FFF2-40B4-BE49-F238E27FC236}">
-                <a16:creationId xmlns:a16="http://schemas.microsoft.com/office/drawing/2014/main" id="{87A2A4D3-8A4D-BC80-7B6C-8D01FC360BA6}"/>
-              </a:ext>
-            </a:extLst>
-          </p:cNvPr>
-          <p:cNvPicPr>
-            <a:picLocks noChangeAspect="1"/>
-          </p:cNvPicPr>
-          <p:nvPr/>
-        </p:nvPicPr>
-        <p:blipFill>
-          <a:blip r:embed="rId7"/>
-          <a:stretch>
-            <a:fillRect/>
-          </a:stretch>
-        </p:blipFill>
-        <p:spPr>
-          <a:xfrm>
-            <a:off x="9923284" y="3138610"/>
-            <a:ext cx="1876687" cy="666843"/>
-          </a:xfrm>
-          <a:prstGeom prst="rect">
-            <a:avLst/>
-          </a:prstGeom>
-        </p:spPr>
-      </p:pic>
-    </p:spTree>
-    <p:extLst>
-      <p:ext uri="{BB962C8B-B14F-4D97-AF65-F5344CB8AC3E}">
-        <p14:creationId xmlns:p14="http://schemas.microsoft.com/office/powerpoint/2010/main" val="1408011516"/>
+        <p14:creationId xmlns:p14="http://schemas.microsoft.com/office/powerpoint/2010/main" val="1304257519"/>
       </p:ext>
     </p:extLst>
   </p:cSld>

--- a/what_i_learn/2026_量子纠错导论.pptx
+++ b/what_i_learn/2026_量子纠错导论.pptx
@@ -5,7 +5,7 @@
     <p:sldMasterId id="2147483648" r:id="rId1"/>
   </p:sldMasterIdLst>
   <p:notesMasterIdLst>
-    <p:notesMasterId r:id="rId34"/>
+    <p:notesMasterId r:id="rId37"/>
   </p:notesMasterIdLst>
   <p:sldIdLst>
     <p:sldId id="267" r:id="rId2"/>
@@ -40,6 +40,9 @@
     <p:sldId id="332" r:id="rId31"/>
     <p:sldId id="333" r:id="rId32"/>
     <p:sldId id="334" r:id="rId33"/>
+    <p:sldId id="335" r:id="rId34"/>
+    <p:sldId id="336" r:id="rId35"/>
+    <p:sldId id="337" r:id="rId36"/>
   </p:sldIdLst>
   <p:sldSz cx="12192000" cy="6858000"/>
   <p:notesSz cx="6858000" cy="9144000"/>
@@ -228,7 +231,7 @@
           <a:p>
             <a:fld id="{F3156BD1-BC13-4455-9FB2-79876EFAE974}" type="datetimeFigureOut">
               <a:rPr lang="zh-CN" altLang="en-US" smtClean="0"/>
-              <a:t>2026/5/27</a:t>
+              <a:t>2026/6/11</a:t>
             </a:fld>
             <a:endParaRPr lang="zh-CN" altLang="en-US"/>
           </a:p>
@@ -7056,7 +7059,7 @@
         <p:cNvPr id="1" name="">
           <a:extLst>
             <a:ext uri="{FF2B5EF4-FFF2-40B4-BE49-F238E27FC236}">
-              <a16:creationId xmlns:a16="http://schemas.microsoft.com/office/drawing/2014/main" id="{5802BC83-0464-6DCE-B1C0-BF574FA88179}"/>
+              <a16:creationId xmlns:a16="http://schemas.microsoft.com/office/drawing/2014/main" id="{842F46F0-487B-495D-C528-9CB8427D98E6}"/>
             </a:ext>
           </a:extLst>
         </p:cNvPr>
@@ -7076,7 +7079,7 @@
           <p:cNvPr id="2" name="Header Placeholder 1">
             <a:extLst>
               <a:ext uri="{FF2B5EF4-FFF2-40B4-BE49-F238E27FC236}">
-                <a16:creationId xmlns:a16="http://schemas.microsoft.com/office/drawing/2014/main" id="{32E3039A-149B-6840-9DE3-622FEBA4DD61}"/>
+                <a16:creationId xmlns:a16="http://schemas.microsoft.com/office/drawing/2014/main" id="{A419EDBF-B164-D463-63D0-75348FCD485E}"/>
               </a:ext>
             </a:extLst>
           </p:cNvPr>
@@ -7113,7 +7116,7 @@
           <p:cNvPr id="3" name="Date Placeholder 2">
             <a:extLst>
               <a:ext uri="{FF2B5EF4-FFF2-40B4-BE49-F238E27FC236}">
-                <a16:creationId xmlns:a16="http://schemas.microsoft.com/office/drawing/2014/main" id="{FE1E8093-B980-653C-0ACA-42EB4830AAB8}"/>
+                <a16:creationId xmlns:a16="http://schemas.microsoft.com/office/drawing/2014/main" id="{F81D838D-8F80-62D2-616B-D7F8EFB501AF}"/>
               </a:ext>
             </a:extLst>
           </p:cNvPr>
@@ -7153,7 +7156,7 @@
           <p:cNvPr id="4" name="Slide Image Placeholder 3">
             <a:extLst>
               <a:ext uri="{FF2B5EF4-FFF2-40B4-BE49-F238E27FC236}">
-                <a16:creationId xmlns:a16="http://schemas.microsoft.com/office/drawing/2014/main" id="{BCE4D976-3289-2450-A6F3-421B6E2B10DD}"/>
+                <a16:creationId xmlns:a16="http://schemas.microsoft.com/office/drawing/2014/main" id="{2D3652B6-B601-BBA0-1358-7CE71E5C0AC2}"/>
               </a:ext>
             </a:extLst>
           </p:cNvPr>
@@ -7192,7 +7195,7 @@
           <p:cNvPr id="5" name="Notes Placeholder 4">
             <a:extLst>
               <a:ext uri="{FF2B5EF4-FFF2-40B4-BE49-F238E27FC236}">
-                <a16:creationId xmlns:a16="http://schemas.microsoft.com/office/drawing/2014/main" id="{2E7C4723-4AA3-7E87-8C54-14FB39A5B2D4}"/>
+                <a16:creationId xmlns:a16="http://schemas.microsoft.com/office/drawing/2014/main" id="{3932E9CA-C0EC-351B-3B97-60CA45100DAD}"/>
               </a:ext>
             </a:extLst>
           </p:cNvPr>
@@ -7238,7 +7241,7 @@
           <p:cNvPr id="6" name="Footer Placeholder 5">
             <a:extLst>
               <a:ext uri="{FF2B5EF4-FFF2-40B4-BE49-F238E27FC236}">
-                <a16:creationId xmlns:a16="http://schemas.microsoft.com/office/drawing/2014/main" id="{C3F01C62-FCC9-FD42-AB4C-D5CDB8469752}"/>
+                <a16:creationId xmlns:a16="http://schemas.microsoft.com/office/drawing/2014/main" id="{E27B1123-98E0-B93D-3BDE-D4F6F2489D99}"/>
               </a:ext>
             </a:extLst>
           </p:cNvPr>
@@ -7275,7 +7278,7 @@
           <p:cNvPr id="7" name="Slide Number Placeholder 6">
             <a:extLst>
               <a:ext uri="{FF2B5EF4-FFF2-40B4-BE49-F238E27FC236}">
-                <a16:creationId xmlns:a16="http://schemas.microsoft.com/office/drawing/2014/main" id="{2C84ED4B-6477-BB58-B374-2B5EC761BE66}"/>
+                <a16:creationId xmlns:a16="http://schemas.microsoft.com/office/drawing/2014/main" id="{0C5DE722-259B-6B07-37AC-B085CFB482CE}"/>
               </a:ext>
             </a:extLst>
           </p:cNvPr>
@@ -7313,7 +7316,7 @@
     </p:spTree>
     <p:extLst>
       <p:ext uri="{BB962C8B-B14F-4D97-AF65-F5344CB8AC3E}">
-        <p14:creationId xmlns:p14="http://schemas.microsoft.com/office/powerpoint/2010/main" val="802824357"/>
+        <p14:creationId xmlns:p14="http://schemas.microsoft.com/office/powerpoint/2010/main" val="3642346537"/>
       </p:ext>
     </p:extLst>
   </p:cSld>
@@ -7331,7 +7334,7 @@
         <p:cNvPr id="1" name="">
           <a:extLst>
             <a:ext uri="{FF2B5EF4-FFF2-40B4-BE49-F238E27FC236}">
-              <a16:creationId xmlns:a16="http://schemas.microsoft.com/office/drawing/2014/main" id="{FDEB247B-C871-F2D1-56FA-AF3E1A2D0752}"/>
+              <a16:creationId xmlns:a16="http://schemas.microsoft.com/office/drawing/2014/main" id="{B5850504-442F-C4E6-8C7B-E6AC64179E68}"/>
             </a:ext>
           </a:extLst>
         </p:cNvPr>
@@ -7351,7 +7354,7 @@
           <p:cNvPr id="2" name="Header Placeholder 1">
             <a:extLst>
               <a:ext uri="{FF2B5EF4-FFF2-40B4-BE49-F238E27FC236}">
-                <a16:creationId xmlns:a16="http://schemas.microsoft.com/office/drawing/2014/main" id="{3BA1B665-5386-5C2D-21A1-AFCC0B37ABC2}"/>
+                <a16:creationId xmlns:a16="http://schemas.microsoft.com/office/drawing/2014/main" id="{61D7071B-0836-7B92-AC79-72CAB9E35DA9}"/>
               </a:ext>
             </a:extLst>
           </p:cNvPr>
@@ -7388,7 +7391,7 @@
           <p:cNvPr id="3" name="Date Placeholder 2">
             <a:extLst>
               <a:ext uri="{FF2B5EF4-FFF2-40B4-BE49-F238E27FC236}">
-                <a16:creationId xmlns:a16="http://schemas.microsoft.com/office/drawing/2014/main" id="{62A96678-ACA0-9F3A-2D47-CB5F6F674B88}"/>
+                <a16:creationId xmlns:a16="http://schemas.microsoft.com/office/drawing/2014/main" id="{8DA78B65-FEAE-0351-6CD0-E6F363F62EF6}"/>
               </a:ext>
             </a:extLst>
           </p:cNvPr>
@@ -7428,7 +7431,7 @@
           <p:cNvPr id="4" name="Slide Image Placeholder 3">
             <a:extLst>
               <a:ext uri="{FF2B5EF4-FFF2-40B4-BE49-F238E27FC236}">
-                <a16:creationId xmlns:a16="http://schemas.microsoft.com/office/drawing/2014/main" id="{85FA6315-CFB2-3475-5317-04BCC9C4ABE6}"/>
+                <a16:creationId xmlns:a16="http://schemas.microsoft.com/office/drawing/2014/main" id="{65E04DE7-06F3-CE2A-42D3-F430BA211A2A}"/>
               </a:ext>
             </a:extLst>
           </p:cNvPr>
@@ -7467,7 +7470,7 @@
           <p:cNvPr id="5" name="Notes Placeholder 4">
             <a:extLst>
               <a:ext uri="{FF2B5EF4-FFF2-40B4-BE49-F238E27FC236}">
-                <a16:creationId xmlns:a16="http://schemas.microsoft.com/office/drawing/2014/main" id="{9531C429-28C8-4E8A-2F61-ADBA8E36C664}"/>
+                <a16:creationId xmlns:a16="http://schemas.microsoft.com/office/drawing/2014/main" id="{4307A2ED-E86B-D1A5-3829-34AF362E0006}"/>
               </a:ext>
             </a:extLst>
           </p:cNvPr>
@@ -7513,7 +7516,7 @@
           <p:cNvPr id="6" name="Footer Placeholder 5">
             <a:extLst>
               <a:ext uri="{FF2B5EF4-FFF2-40B4-BE49-F238E27FC236}">
-                <a16:creationId xmlns:a16="http://schemas.microsoft.com/office/drawing/2014/main" id="{15D15065-976C-8867-E1A4-DB14F5A8270F}"/>
+                <a16:creationId xmlns:a16="http://schemas.microsoft.com/office/drawing/2014/main" id="{7BC2A8EA-8B77-AFDA-8C1E-80D92BE1FB56}"/>
               </a:ext>
             </a:extLst>
           </p:cNvPr>
@@ -7550,7 +7553,7 @@
           <p:cNvPr id="7" name="Slide Number Placeholder 6">
             <a:extLst>
               <a:ext uri="{FF2B5EF4-FFF2-40B4-BE49-F238E27FC236}">
-                <a16:creationId xmlns:a16="http://schemas.microsoft.com/office/drawing/2014/main" id="{DAEA0F03-850B-FC62-4EC2-F562A2660FE8}"/>
+                <a16:creationId xmlns:a16="http://schemas.microsoft.com/office/drawing/2014/main" id="{9853A474-EA7E-3AEC-1577-1D593ADD75FA}"/>
               </a:ext>
             </a:extLst>
           </p:cNvPr>
@@ -7588,7 +7591,832 @@
     </p:spTree>
     <p:extLst>
       <p:ext uri="{BB962C8B-B14F-4D97-AF65-F5344CB8AC3E}">
-        <p14:creationId xmlns:p14="http://schemas.microsoft.com/office/powerpoint/2010/main" val="2221944924"/>
+        <p14:creationId xmlns:p14="http://schemas.microsoft.com/office/powerpoint/2010/main" val="1527204412"/>
+      </p:ext>
+    </p:extLst>
+  </p:cSld>
+  <p:clrMapOvr>
+    <a:masterClrMapping/>
+  </p:clrMapOvr>
+</p:notes>
+</file>
+
+<file path=ppt/notesSlides/notesSlide33.xml><?xml version="1.0" encoding="utf-8"?>
+<p:notes xmlns:a="http://schemas.openxmlformats.org/drawingml/2006/main" xmlns:r="http://schemas.openxmlformats.org/officeDocument/2006/relationships" xmlns:p="http://schemas.openxmlformats.org/presentationml/2006/main">
+  <p:cSld>
+    <p:spTree>
+      <p:nvGrpSpPr>
+        <p:cNvPr id="1" name="">
+          <a:extLst>
+            <a:ext uri="{FF2B5EF4-FFF2-40B4-BE49-F238E27FC236}">
+              <a16:creationId xmlns:a16="http://schemas.microsoft.com/office/drawing/2014/main" id="{3EAAF4F8-AD04-40A3-8215-80951FAFCC9A}"/>
+            </a:ext>
+          </a:extLst>
+        </p:cNvPr>
+        <p:cNvGrpSpPr/>
+        <p:nvPr/>
+      </p:nvGrpSpPr>
+      <p:grpSpPr>
+        <a:xfrm>
+          <a:off x="0" y="0"/>
+          <a:ext cx="0" cy="0"/>
+          <a:chOff x="0" y="0"/>
+          <a:chExt cx="0" cy="0"/>
+        </a:xfrm>
+      </p:grpSpPr>
+      <p:sp>
+        <p:nvSpPr>
+          <p:cNvPr id="2" name="Header Placeholder 1">
+            <a:extLst>
+              <a:ext uri="{FF2B5EF4-FFF2-40B4-BE49-F238E27FC236}">
+                <a16:creationId xmlns:a16="http://schemas.microsoft.com/office/drawing/2014/main" id="{A23AA555-D6A1-84D2-1D2B-510C980D362F}"/>
+              </a:ext>
+            </a:extLst>
+          </p:cNvPr>
+          <p:cNvSpPr>
+            <a:spLocks noGrp="1"/>
+          </p:cNvSpPr>
+          <p:nvPr>
+            <p:ph type="hdr" sz="quarter"/>
+          </p:nvPr>
+        </p:nvSpPr>
+        <p:spPr>
+          <a:xfrm>
+            <a:off x="0" y="0"/>
+            <a:ext cx="3962400" cy="342900"/>
+          </a:xfrm>
+          <a:prstGeom prst="rect">
+            <a:avLst/>
+          </a:prstGeom>
+        </p:spPr>
+        <p:txBody>
+          <a:bodyPr vert="horz" lIns="91440" tIns="45720" rIns="91440" bIns="45720" rtlCol="0"/>
+          <a:lstStyle>
+            <a:lvl1pPr algn="l">
+              <a:defRPr sz="1200"/>
+            </a:lvl1pPr>
+          </a:lstStyle>
+          <a:p>
+            <a:endParaRPr/>
+          </a:p>
+        </p:txBody>
+      </p:sp>
+      <p:sp>
+        <p:nvSpPr>
+          <p:cNvPr id="3" name="Date Placeholder 2">
+            <a:extLst>
+              <a:ext uri="{FF2B5EF4-FFF2-40B4-BE49-F238E27FC236}">
+                <a16:creationId xmlns:a16="http://schemas.microsoft.com/office/drawing/2014/main" id="{B4CB7C2D-52C1-5F4A-CDC1-B12929633CDA}"/>
+              </a:ext>
+            </a:extLst>
+          </p:cNvPr>
+          <p:cNvSpPr>
+            <a:spLocks noGrp="1"/>
+          </p:cNvSpPr>
+          <p:nvPr>
+            <p:ph type="dt" idx="1"/>
+          </p:nvPr>
+        </p:nvSpPr>
+        <p:spPr>
+          <a:xfrm>
+            <a:off x="5180013" y="0"/>
+            <a:ext cx="3962400" cy="342900"/>
+          </a:xfrm>
+          <a:prstGeom prst="rect">
+            <a:avLst/>
+          </a:prstGeom>
+        </p:spPr>
+        <p:txBody>
+          <a:bodyPr vert="horz" lIns="91440" tIns="45720" rIns="91440" bIns="45720" rtlCol="0"/>
+          <a:lstStyle>
+            <a:lvl1pPr algn="r">
+              <a:defRPr sz="1200"/>
+            </a:lvl1pPr>
+          </a:lstStyle>
+          <a:p>
+            <a:r>
+              <a:rPr lang="cs-CZ"/>
+              <a:t>1.7.2013</a:t>
+            </a:r>
+          </a:p>
+        </p:txBody>
+      </p:sp>
+      <p:sp>
+        <p:nvSpPr>
+          <p:cNvPr id="4" name="Slide Image Placeholder 3">
+            <a:extLst>
+              <a:ext uri="{FF2B5EF4-FFF2-40B4-BE49-F238E27FC236}">
+                <a16:creationId xmlns:a16="http://schemas.microsoft.com/office/drawing/2014/main" id="{94C3F570-7899-C003-16A5-FBEAD3FDA835}"/>
+              </a:ext>
+            </a:extLst>
+          </p:cNvPr>
+          <p:cNvSpPr>
+            <a:spLocks noGrp="1" noRot="1" noChangeAspect="1"/>
+          </p:cNvSpPr>
+          <p:nvPr>
+            <p:ph type="sldImg" idx="2"/>
+          </p:nvPr>
+        </p:nvSpPr>
+        <p:spPr>
+          <a:xfrm>
+            <a:off x="2290763" y="512763"/>
+            <a:ext cx="4562475" cy="2566987"/>
+          </a:xfrm>
+          <a:prstGeom prst="rect">
+            <a:avLst/>
+          </a:prstGeom>
+          <a:noFill/>
+          <a:ln w="12700">
+            <a:solidFill>
+              <a:prstClr val="black"/>
+            </a:solidFill>
+          </a:ln>
+        </p:spPr>
+        <p:txBody>
+          <a:bodyPr vert="horz" lIns="91440" tIns="45720" rIns="91440" bIns="45720" rtlCol="0" anchor="ctr"/>
+          <a:lstStyle/>
+          <a:p>
+            <a:endParaRPr/>
+          </a:p>
+        </p:txBody>
+      </p:sp>
+      <p:sp>
+        <p:nvSpPr>
+          <p:cNvPr id="5" name="Notes Placeholder 4">
+            <a:extLst>
+              <a:ext uri="{FF2B5EF4-FFF2-40B4-BE49-F238E27FC236}">
+                <a16:creationId xmlns:a16="http://schemas.microsoft.com/office/drawing/2014/main" id="{A66BA781-E4E1-7F91-1935-13522DB3E2B6}"/>
+              </a:ext>
+            </a:extLst>
+          </p:cNvPr>
+          <p:cNvSpPr>
+            <a:spLocks noGrp="1"/>
+          </p:cNvSpPr>
+          <p:nvPr>
+            <p:ph type="body" sz="quarter" idx="3"/>
+          </p:nvPr>
+        </p:nvSpPr>
+        <p:spPr>
+          <a:xfrm>
+            <a:off x="914400" y="3251200"/>
+            <a:ext cx="7315200" cy="3081338"/>
+          </a:xfrm>
+          <a:prstGeom prst="rect">
+            <a:avLst/>
+          </a:prstGeom>
+        </p:spPr>
+        <p:txBody>
+          <a:bodyPr vert="horz" lIns="91440" tIns="45720" rIns="91440" bIns="45720" rtlCol="0" anchor="ctr"/>
+          <a:lstStyle>
+            <a:lvl1pPr algn="l">
+              <a:defRPr sz="1400" b="0" i="0" u="none" strike="noStrike"/>
+            </a:lvl1pPr>
+          </a:lstStyle>
+          <a:p>
+            <a:pPr indent="0" algn="l">
+              <a:lnSpc>
+                <a:spcPct val="100000"/>
+              </a:lnSpc>
+            </a:pPr>
+            <a:endParaRPr lang="en-US" sz="1400" b="0" i="0" u="none" strike="noStrike" dirty="0">
+              <a:solidFill>
+                <a:srgbClr val="000000"/>
+              </a:solidFill>
+            </a:endParaRPr>
+          </a:p>
+        </p:txBody>
+      </p:sp>
+      <p:sp>
+        <p:nvSpPr>
+          <p:cNvPr id="6" name="Footer Placeholder 5">
+            <a:extLst>
+              <a:ext uri="{FF2B5EF4-FFF2-40B4-BE49-F238E27FC236}">
+                <a16:creationId xmlns:a16="http://schemas.microsoft.com/office/drawing/2014/main" id="{A5A8D3FB-01C9-E4C1-A45A-208CEACDB768}"/>
+              </a:ext>
+            </a:extLst>
+          </p:cNvPr>
+          <p:cNvSpPr>
+            <a:spLocks noGrp="1"/>
+          </p:cNvSpPr>
+          <p:nvPr>
+            <p:ph type="ftr" sz="quarter" idx="4"/>
+          </p:nvPr>
+        </p:nvSpPr>
+        <p:spPr>
+          <a:xfrm>
+            <a:off x="0" y="6502400"/>
+            <a:ext cx="3962400" cy="341313"/>
+          </a:xfrm>
+          <a:prstGeom prst="rect">
+            <a:avLst/>
+          </a:prstGeom>
+        </p:spPr>
+        <p:txBody>
+          <a:bodyPr vert="horz" lIns="91440" tIns="45720" rIns="91440" bIns="45720" rtlCol="0" anchor="b"/>
+          <a:lstStyle>
+            <a:lvl1pPr algn="l">
+              <a:defRPr sz="1200"/>
+            </a:lvl1pPr>
+          </a:lstStyle>
+          <a:p>
+            <a:endParaRPr/>
+          </a:p>
+        </p:txBody>
+      </p:sp>
+      <p:sp>
+        <p:nvSpPr>
+          <p:cNvPr id="7" name="Slide Number Placeholder 6">
+            <a:extLst>
+              <a:ext uri="{FF2B5EF4-FFF2-40B4-BE49-F238E27FC236}">
+                <a16:creationId xmlns:a16="http://schemas.microsoft.com/office/drawing/2014/main" id="{FBB65EDE-0DC3-8DFA-0081-B712D4E4D668}"/>
+              </a:ext>
+            </a:extLst>
+          </p:cNvPr>
+          <p:cNvSpPr>
+            <a:spLocks noGrp="1"/>
+          </p:cNvSpPr>
+          <p:nvPr>
+            <p:ph type="sldNum" sz="quarter" idx="5"/>
+          </p:nvPr>
+        </p:nvSpPr>
+        <p:spPr>
+          <a:xfrm>
+            <a:off x="5180013" y="6502400"/>
+            <a:ext cx="3962400" cy="341313"/>
+          </a:xfrm>
+          <a:prstGeom prst="rect">
+            <a:avLst/>
+          </a:prstGeom>
+        </p:spPr>
+        <p:txBody>
+          <a:bodyPr vert="horz" lIns="91440" tIns="45720" rIns="91440" bIns="45720" rtlCol="0" anchor="b"/>
+          <a:lstStyle>
+            <a:lvl1pPr algn="r">
+              <a:defRPr sz="1200"/>
+            </a:lvl1pPr>
+          </a:lstStyle>
+          <a:p>
+            <a:r>
+              <a:rPr lang="cs-CZ"/>
+              <a:t>‹#›</a:t>
+            </a:r>
+          </a:p>
+        </p:txBody>
+      </p:sp>
+    </p:spTree>
+    <p:extLst>
+      <p:ext uri="{BB962C8B-B14F-4D97-AF65-F5344CB8AC3E}">
+        <p14:creationId xmlns:p14="http://schemas.microsoft.com/office/powerpoint/2010/main" val="2387053897"/>
+      </p:ext>
+    </p:extLst>
+  </p:cSld>
+  <p:clrMapOvr>
+    <a:masterClrMapping/>
+  </p:clrMapOvr>
+</p:notes>
+</file>
+
+<file path=ppt/notesSlides/notesSlide34.xml><?xml version="1.0" encoding="utf-8"?>
+<p:notes xmlns:a="http://schemas.openxmlformats.org/drawingml/2006/main" xmlns:r="http://schemas.openxmlformats.org/officeDocument/2006/relationships" xmlns:p="http://schemas.openxmlformats.org/presentationml/2006/main">
+  <p:cSld>
+    <p:spTree>
+      <p:nvGrpSpPr>
+        <p:cNvPr id="1" name="">
+          <a:extLst>
+            <a:ext uri="{FF2B5EF4-FFF2-40B4-BE49-F238E27FC236}">
+              <a16:creationId xmlns:a16="http://schemas.microsoft.com/office/drawing/2014/main" id="{EA7092CC-2E27-106F-12C8-4AF5CA8FA551}"/>
+            </a:ext>
+          </a:extLst>
+        </p:cNvPr>
+        <p:cNvGrpSpPr/>
+        <p:nvPr/>
+      </p:nvGrpSpPr>
+      <p:grpSpPr>
+        <a:xfrm>
+          <a:off x="0" y="0"/>
+          <a:ext cx="0" cy="0"/>
+          <a:chOff x="0" y="0"/>
+          <a:chExt cx="0" cy="0"/>
+        </a:xfrm>
+      </p:grpSpPr>
+      <p:sp>
+        <p:nvSpPr>
+          <p:cNvPr id="2" name="Header Placeholder 1">
+            <a:extLst>
+              <a:ext uri="{FF2B5EF4-FFF2-40B4-BE49-F238E27FC236}">
+                <a16:creationId xmlns:a16="http://schemas.microsoft.com/office/drawing/2014/main" id="{6FD928ED-CFEE-6F97-92D0-B16A85C0B89C}"/>
+              </a:ext>
+            </a:extLst>
+          </p:cNvPr>
+          <p:cNvSpPr>
+            <a:spLocks noGrp="1"/>
+          </p:cNvSpPr>
+          <p:nvPr>
+            <p:ph type="hdr" sz="quarter"/>
+          </p:nvPr>
+        </p:nvSpPr>
+        <p:spPr>
+          <a:xfrm>
+            <a:off x="0" y="0"/>
+            <a:ext cx="3962400" cy="342900"/>
+          </a:xfrm>
+          <a:prstGeom prst="rect">
+            <a:avLst/>
+          </a:prstGeom>
+        </p:spPr>
+        <p:txBody>
+          <a:bodyPr vert="horz" lIns="91440" tIns="45720" rIns="91440" bIns="45720" rtlCol="0"/>
+          <a:lstStyle>
+            <a:lvl1pPr algn="l">
+              <a:defRPr sz="1200"/>
+            </a:lvl1pPr>
+          </a:lstStyle>
+          <a:p>
+            <a:endParaRPr/>
+          </a:p>
+        </p:txBody>
+      </p:sp>
+      <p:sp>
+        <p:nvSpPr>
+          <p:cNvPr id="3" name="Date Placeholder 2">
+            <a:extLst>
+              <a:ext uri="{FF2B5EF4-FFF2-40B4-BE49-F238E27FC236}">
+                <a16:creationId xmlns:a16="http://schemas.microsoft.com/office/drawing/2014/main" id="{14710A9C-55EA-8D36-7802-4DE678C4E1C7}"/>
+              </a:ext>
+            </a:extLst>
+          </p:cNvPr>
+          <p:cNvSpPr>
+            <a:spLocks noGrp="1"/>
+          </p:cNvSpPr>
+          <p:nvPr>
+            <p:ph type="dt" idx="1"/>
+          </p:nvPr>
+        </p:nvSpPr>
+        <p:spPr>
+          <a:xfrm>
+            <a:off x="5180013" y="0"/>
+            <a:ext cx="3962400" cy="342900"/>
+          </a:xfrm>
+          <a:prstGeom prst="rect">
+            <a:avLst/>
+          </a:prstGeom>
+        </p:spPr>
+        <p:txBody>
+          <a:bodyPr vert="horz" lIns="91440" tIns="45720" rIns="91440" bIns="45720" rtlCol="0"/>
+          <a:lstStyle>
+            <a:lvl1pPr algn="r">
+              <a:defRPr sz="1200"/>
+            </a:lvl1pPr>
+          </a:lstStyle>
+          <a:p>
+            <a:r>
+              <a:rPr lang="cs-CZ"/>
+              <a:t>1.7.2013</a:t>
+            </a:r>
+          </a:p>
+        </p:txBody>
+      </p:sp>
+      <p:sp>
+        <p:nvSpPr>
+          <p:cNvPr id="4" name="Slide Image Placeholder 3">
+            <a:extLst>
+              <a:ext uri="{FF2B5EF4-FFF2-40B4-BE49-F238E27FC236}">
+                <a16:creationId xmlns:a16="http://schemas.microsoft.com/office/drawing/2014/main" id="{715FF05B-9467-21BC-68D7-4302CB713DDF}"/>
+              </a:ext>
+            </a:extLst>
+          </p:cNvPr>
+          <p:cNvSpPr>
+            <a:spLocks noGrp="1" noRot="1" noChangeAspect="1"/>
+          </p:cNvSpPr>
+          <p:nvPr>
+            <p:ph type="sldImg" idx="2"/>
+          </p:nvPr>
+        </p:nvSpPr>
+        <p:spPr>
+          <a:xfrm>
+            <a:off x="2290763" y="512763"/>
+            <a:ext cx="4562475" cy="2566987"/>
+          </a:xfrm>
+          <a:prstGeom prst="rect">
+            <a:avLst/>
+          </a:prstGeom>
+          <a:noFill/>
+          <a:ln w="12700">
+            <a:solidFill>
+              <a:prstClr val="black"/>
+            </a:solidFill>
+          </a:ln>
+        </p:spPr>
+        <p:txBody>
+          <a:bodyPr vert="horz" lIns="91440" tIns="45720" rIns="91440" bIns="45720" rtlCol="0" anchor="ctr"/>
+          <a:lstStyle/>
+          <a:p>
+            <a:endParaRPr/>
+          </a:p>
+        </p:txBody>
+      </p:sp>
+      <p:sp>
+        <p:nvSpPr>
+          <p:cNvPr id="5" name="Notes Placeholder 4">
+            <a:extLst>
+              <a:ext uri="{FF2B5EF4-FFF2-40B4-BE49-F238E27FC236}">
+                <a16:creationId xmlns:a16="http://schemas.microsoft.com/office/drawing/2014/main" id="{09FD7DBE-F05E-5310-E99A-B1A600883B43}"/>
+              </a:ext>
+            </a:extLst>
+          </p:cNvPr>
+          <p:cNvSpPr>
+            <a:spLocks noGrp="1"/>
+          </p:cNvSpPr>
+          <p:nvPr>
+            <p:ph type="body" sz="quarter" idx="3"/>
+          </p:nvPr>
+        </p:nvSpPr>
+        <p:spPr>
+          <a:xfrm>
+            <a:off x="914400" y="3251200"/>
+            <a:ext cx="7315200" cy="3081338"/>
+          </a:xfrm>
+          <a:prstGeom prst="rect">
+            <a:avLst/>
+          </a:prstGeom>
+        </p:spPr>
+        <p:txBody>
+          <a:bodyPr vert="horz" lIns="91440" tIns="45720" rIns="91440" bIns="45720" rtlCol="0" anchor="ctr"/>
+          <a:lstStyle>
+            <a:lvl1pPr algn="l">
+              <a:defRPr sz="1400" b="0" i="0" u="none" strike="noStrike"/>
+            </a:lvl1pPr>
+          </a:lstStyle>
+          <a:p>
+            <a:pPr indent="0" algn="l">
+              <a:lnSpc>
+                <a:spcPct val="100000"/>
+              </a:lnSpc>
+            </a:pPr>
+            <a:endParaRPr lang="en-US" sz="1400" b="0" i="0" u="none" strike="noStrike" dirty="0">
+              <a:solidFill>
+                <a:srgbClr val="000000"/>
+              </a:solidFill>
+            </a:endParaRPr>
+          </a:p>
+        </p:txBody>
+      </p:sp>
+      <p:sp>
+        <p:nvSpPr>
+          <p:cNvPr id="6" name="Footer Placeholder 5">
+            <a:extLst>
+              <a:ext uri="{FF2B5EF4-FFF2-40B4-BE49-F238E27FC236}">
+                <a16:creationId xmlns:a16="http://schemas.microsoft.com/office/drawing/2014/main" id="{78CD03C3-9378-C1B3-3186-6A84BBD0EFDB}"/>
+              </a:ext>
+            </a:extLst>
+          </p:cNvPr>
+          <p:cNvSpPr>
+            <a:spLocks noGrp="1"/>
+          </p:cNvSpPr>
+          <p:nvPr>
+            <p:ph type="ftr" sz="quarter" idx="4"/>
+          </p:nvPr>
+        </p:nvSpPr>
+        <p:spPr>
+          <a:xfrm>
+            <a:off x="0" y="6502400"/>
+            <a:ext cx="3962400" cy="341313"/>
+          </a:xfrm>
+          <a:prstGeom prst="rect">
+            <a:avLst/>
+          </a:prstGeom>
+        </p:spPr>
+        <p:txBody>
+          <a:bodyPr vert="horz" lIns="91440" tIns="45720" rIns="91440" bIns="45720" rtlCol="0" anchor="b"/>
+          <a:lstStyle>
+            <a:lvl1pPr algn="l">
+              <a:defRPr sz="1200"/>
+            </a:lvl1pPr>
+          </a:lstStyle>
+          <a:p>
+            <a:endParaRPr/>
+          </a:p>
+        </p:txBody>
+      </p:sp>
+      <p:sp>
+        <p:nvSpPr>
+          <p:cNvPr id="7" name="Slide Number Placeholder 6">
+            <a:extLst>
+              <a:ext uri="{FF2B5EF4-FFF2-40B4-BE49-F238E27FC236}">
+                <a16:creationId xmlns:a16="http://schemas.microsoft.com/office/drawing/2014/main" id="{6CB73CA5-CAEF-DF73-EE5A-82C2683903FF}"/>
+              </a:ext>
+            </a:extLst>
+          </p:cNvPr>
+          <p:cNvSpPr>
+            <a:spLocks noGrp="1"/>
+          </p:cNvSpPr>
+          <p:nvPr>
+            <p:ph type="sldNum" sz="quarter" idx="5"/>
+          </p:nvPr>
+        </p:nvSpPr>
+        <p:spPr>
+          <a:xfrm>
+            <a:off x="5180013" y="6502400"/>
+            <a:ext cx="3962400" cy="341313"/>
+          </a:xfrm>
+          <a:prstGeom prst="rect">
+            <a:avLst/>
+          </a:prstGeom>
+        </p:spPr>
+        <p:txBody>
+          <a:bodyPr vert="horz" lIns="91440" tIns="45720" rIns="91440" bIns="45720" rtlCol="0" anchor="b"/>
+          <a:lstStyle>
+            <a:lvl1pPr algn="r">
+              <a:defRPr sz="1200"/>
+            </a:lvl1pPr>
+          </a:lstStyle>
+          <a:p>
+            <a:r>
+              <a:rPr lang="cs-CZ"/>
+              <a:t>‹#›</a:t>
+            </a:r>
+          </a:p>
+        </p:txBody>
+      </p:sp>
+    </p:spTree>
+    <p:extLst>
+      <p:ext uri="{BB962C8B-B14F-4D97-AF65-F5344CB8AC3E}">
+        <p14:creationId xmlns:p14="http://schemas.microsoft.com/office/powerpoint/2010/main" val="1300271149"/>
+      </p:ext>
+    </p:extLst>
+  </p:cSld>
+  <p:clrMapOvr>
+    <a:masterClrMapping/>
+  </p:clrMapOvr>
+</p:notes>
+</file>
+
+<file path=ppt/notesSlides/notesSlide35.xml><?xml version="1.0" encoding="utf-8"?>
+<p:notes xmlns:a="http://schemas.openxmlformats.org/drawingml/2006/main" xmlns:r="http://schemas.openxmlformats.org/officeDocument/2006/relationships" xmlns:p="http://schemas.openxmlformats.org/presentationml/2006/main">
+  <p:cSld>
+    <p:spTree>
+      <p:nvGrpSpPr>
+        <p:cNvPr id="1" name="">
+          <a:extLst>
+            <a:ext uri="{FF2B5EF4-FFF2-40B4-BE49-F238E27FC236}">
+              <a16:creationId xmlns:a16="http://schemas.microsoft.com/office/drawing/2014/main" id="{56588475-E9B7-B7E5-DBF2-884287461652}"/>
+            </a:ext>
+          </a:extLst>
+        </p:cNvPr>
+        <p:cNvGrpSpPr/>
+        <p:nvPr/>
+      </p:nvGrpSpPr>
+      <p:grpSpPr>
+        <a:xfrm>
+          <a:off x="0" y="0"/>
+          <a:ext cx="0" cy="0"/>
+          <a:chOff x="0" y="0"/>
+          <a:chExt cx="0" cy="0"/>
+        </a:xfrm>
+      </p:grpSpPr>
+      <p:sp>
+        <p:nvSpPr>
+          <p:cNvPr id="2" name="Header Placeholder 1">
+            <a:extLst>
+              <a:ext uri="{FF2B5EF4-FFF2-40B4-BE49-F238E27FC236}">
+                <a16:creationId xmlns:a16="http://schemas.microsoft.com/office/drawing/2014/main" id="{A618007D-82E7-3E92-B882-D6965BFA9A15}"/>
+              </a:ext>
+            </a:extLst>
+          </p:cNvPr>
+          <p:cNvSpPr>
+            <a:spLocks noGrp="1"/>
+          </p:cNvSpPr>
+          <p:nvPr>
+            <p:ph type="hdr" sz="quarter"/>
+          </p:nvPr>
+        </p:nvSpPr>
+        <p:spPr>
+          <a:xfrm>
+            <a:off x="0" y="0"/>
+            <a:ext cx="3962400" cy="342900"/>
+          </a:xfrm>
+          <a:prstGeom prst="rect">
+            <a:avLst/>
+          </a:prstGeom>
+        </p:spPr>
+        <p:txBody>
+          <a:bodyPr vert="horz" lIns="91440" tIns="45720" rIns="91440" bIns="45720" rtlCol="0"/>
+          <a:lstStyle>
+            <a:lvl1pPr algn="l">
+              <a:defRPr sz="1200"/>
+            </a:lvl1pPr>
+          </a:lstStyle>
+          <a:p>
+            <a:endParaRPr/>
+          </a:p>
+        </p:txBody>
+      </p:sp>
+      <p:sp>
+        <p:nvSpPr>
+          <p:cNvPr id="3" name="Date Placeholder 2">
+            <a:extLst>
+              <a:ext uri="{FF2B5EF4-FFF2-40B4-BE49-F238E27FC236}">
+                <a16:creationId xmlns:a16="http://schemas.microsoft.com/office/drawing/2014/main" id="{F555F386-7737-FD9E-68E8-8A2956C5DEB6}"/>
+              </a:ext>
+            </a:extLst>
+          </p:cNvPr>
+          <p:cNvSpPr>
+            <a:spLocks noGrp="1"/>
+          </p:cNvSpPr>
+          <p:nvPr>
+            <p:ph type="dt" idx="1"/>
+          </p:nvPr>
+        </p:nvSpPr>
+        <p:spPr>
+          <a:xfrm>
+            <a:off x="5180013" y="0"/>
+            <a:ext cx="3962400" cy="342900"/>
+          </a:xfrm>
+          <a:prstGeom prst="rect">
+            <a:avLst/>
+          </a:prstGeom>
+        </p:spPr>
+        <p:txBody>
+          <a:bodyPr vert="horz" lIns="91440" tIns="45720" rIns="91440" bIns="45720" rtlCol="0"/>
+          <a:lstStyle>
+            <a:lvl1pPr algn="r">
+              <a:defRPr sz="1200"/>
+            </a:lvl1pPr>
+          </a:lstStyle>
+          <a:p>
+            <a:r>
+              <a:rPr lang="cs-CZ"/>
+              <a:t>1.7.2013</a:t>
+            </a:r>
+          </a:p>
+        </p:txBody>
+      </p:sp>
+      <p:sp>
+        <p:nvSpPr>
+          <p:cNvPr id="4" name="Slide Image Placeholder 3">
+            <a:extLst>
+              <a:ext uri="{FF2B5EF4-FFF2-40B4-BE49-F238E27FC236}">
+                <a16:creationId xmlns:a16="http://schemas.microsoft.com/office/drawing/2014/main" id="{DBBAEE9C-9064-8FFC-276D-98FA6094963A}"/>
+              </a:ext>
+            </a:extLst>
+          </p:cNvPr>
+          <p:cNvSpPr>
+            <a:spLocks noGrp="1" noRot="1" noChangeAspect="1"/>
+          </p:cNvSpPr>
+          <p:nvPr>
+            <p:ph type="sldImg" idx="2"/>
+          </p:nvPr>
+        </p:nvSpPr>
+        <p:spPr>
+          <a:xfrm>
+            <a:off x="2290763" y="512763"/>
+            <a:ext cx="4562475" cy="2566987"/>
+          </a:xfrm>
+          <a:prstGeom prst="rect">
+            <a:avLst/>
+          </a:prstGeom>
+          <a:noFill/>
+          <a:ln w="12700">
+            <a:solidFill>
+              <a:prstClr val="black"/>
+            </a:solidFill>
+          </a:ln>
+        </p:spPr>
+        <p:txBody>
+          <a:bodyPr vert="horz" lIns="91440" tIns="45720" rIns="91440" bIns="45720" rtlCol="0" anchor="ctr"/>
+          <a:lstStyle/>
+          <a:p>
+            <a:endParaRPr/>
+          </a:p>
+        </p:txBody>
+      </p:sp>
+      <p:sp>
+        <p:nvSpPr>
+          <p:cNvPr id="5" name="Notes Placeholder 4">
+            <a:extLst>
+              <a:ext uri="{FF2B5EF4-FFF2-40B4-BE49-F238E27FC236}">
+                <a16:creationId xmlns:a16="http://schemas.microsoft.com/office/drawing/2014/main" id="{B95358DD-7473-ED2D-A328-6DA45B8D967D}"/>
+              </a:ext>
+            </a:extLst>
+          </p:cNvPr>
+          <p:cNvSpPr>
+            <a:spLocks noGrp="1"/>
+          </p:cNvSpPr>
+          <p:nvPr>
+            <p:ph type="body" sz="quarter" idx="3"/>
+          </p:nvPr>
+        </p:nvSpPr>
+        <p:spPr>
+          <a:xfrm>
+            <a:off x="914400" y="3251200"/>
+            <a:ext cx="7315200" cy="3081338"/>
+          </a:xfrm>
+          <a:prstGeom prst="rect">
+            <a:avLst/>
+          </a:prstGeom>
+        </p:spPr>
+        <p:txBody>
+          <a:bodyPr vert="horz" lIns="91440" tIns="45720" rIns="91440" bIns="45720" rtlCol="0" anchor="ctr"/>
+          <a:lstStyle>
+            <a:lvl1pPr algn="l">
+              <a:defRPr sz="1400" b="0" i="0" u="none" strike="noStrike"/>
+            </a:lvl1pPr>
+          </a:lstStyle>
+          <a:p>
+            <a:pPr indent="0" algn="l">
+              <a:lnSpc>
+                <a:spcPct val="100000"/>
+              </a:lnSpc>
+            </a:pPr>
+            <a:endParaRPr lang="en-US" sz="1400" b="0" i="0" u="none" strike="noStrike" dirty="0">
+              <a:solidFill>
+                <a:srgbClr val="000000"/>
+              </a:solidFill>
+            </a:endParaRPr>
+          </a:p>
+        </p:txBody>
+      </p:sp>
+      <p:sp>
+        <p:nvSpPr>
+          <p:cNvPr id="6" name="Footer Placeholder 5">
+            <a:extLst>
+              <a:ext uri="{FF2B5EF4-FFF2-40B4-BE49-F238E27FC236}">
+                <a16:creationId xmlns:a16="http://schemas.microsoft.com/office/drawing/2014/main" id="{AE3EA985-6C2F-0767-5AC1-73E7C9DCF0B2}"/>
+              </a:ext>
+            </a:extLst>
+          </p:cNvPr>
+          <p:cNvSpPr>
+            <a:spLocks noGrp="1"/>
+          </p:cNvSpPr>
+          <p:nvPr>
+            <p:ph type="ftr" sz="quarter" idx="4"/>
+          </p:nvPr>
+        </p:nvSpPr>
+        <p:spPr>
+          <a:xfrm>
+            <a:off x="0" y="6502400"/>
+            <a:ext cx="3962400" cy="341313"/>
+          </a:xfrm>
+          <a:prstGeom prst="rect">
+            <a:avLst/>
+          </a:prstGeom>
+        </p:spPr>
+        <p:txBody>
+          <a:bodyPr vert="horz" lIns="91440" tIns="45720" rIns="91440" bIns="45720" rtlCol="0" anchor="b"/>
+          <a:lstStyle>
+            <a:lvl1pPr algn="l">
+              <a:defRPr sz="1200"/>
+            </a:lvl1pPr>
+          </a:lstStyle>
+          <a:p>
+            <a:endParaRPr/>
+          </a:p>
+        </p:txBody>
+      </p:sp>
+      <p:sp>
+        <p:nvSpPr>
+          <p:cNvPr id="7" name="Slide Number Placeholder 6">
+            <a:extLst>
+              <a:ext uri="{FF2B5EF4-FFF2-40B4-BE49-F238E27FC236}">
+                <a16:creationId xmlns:a16="http://schemas.microsoft.com/office/drawing/2014/main" id="{AFAE6662-DC2B-1E63-78F5-C47BAA9DE26F}"/>
+              </a:ext>
+            </a:extLst>
+          </p:cNvPr>
+          <p:cNvSpPr>
+            <a:spLocks noGrp="1"/>
+          </p:cNvSpPr>
+          <p:nvPr>
+            <p:ph type="sldNum" sz="quarter" idx="5"/>
+          </p:nvPr>
+        </p:nvSpPr>
+        <p:spPr>
+          <a:xfrm>
+            <a:off x="5180013" y="6502400"/>
+            <a:ext cx="3962400" cy="341313"/>
+          </a:xfrm>
+          <a:prstGeom prst="rect">
+            <a:avLst/>
+          </a:prstGeom>
+        </p:spPr>
+        <p:txBody>
+          <a:bodyPr vert="horz" lIns="91440" tIns="45720" rIns="91440" bIns="45720" rtlCol="0" anchor="b"/>
+          <a:lstStyle>
+            <a:lvl1pPr algn="r">
+              <a:defRPr sz="1200"/>
+            </a:lvl1pPr>
+          </a:lstStyle>
+          <a:p>
+            <a:r>
+              <a:rPr lang="cs-CZ"/>
+              <a:t>‹#›</a:t>
+            </a:r>
+          </a:p>
+        </p:txBody>
+      </p:sp>
+    </p:spTree>
+    <p:extLst>
+      <p:ext uri="{BB962C8B-B14F-4D97-AF65-F5344CB8AC3E}">
+        <p14:creationId xmlns:p14="http://schemas.microsoft.com/office/powerpoint/2010/main" val="4278664048"/>
       </p:ext>
     </p:extLst>
   </p:cSld>
@@ -9207,7 +10035,7 @@
           <a:p>
             <a:fld id="{64F06B81-D0D4-404B-8474-757991D5685D}" type="datetimeFigureOut">
               <a:rPr lang="zh-CN" altLang="en-US" smtClean="0"/>
-              <a:t>2026/5/27</a:t>
+              <a:t>2026/6/11</a:t>
             </a:fld>
             <a:endParaRPr lang="zh-CN" altLang="en-US"/>
           </a:p>
@@ -9417,7 +10245,7 @@
           <a:p>
             <a:fld id="{64F06B81-D0D4-404B-8474-757991D5685D}" type="datetimeFigureOut">
               <a:rPr lang="zh-CN" altLang="en-US" smtClean="0"/>
-              <a:t>2026/5/27</a:t>
+              <a:t>2026/6/11</a:t>
             </a:fld>
             <a:endParaRPr lang="zh-CN" altLang="en-US"/>
           </a:p>
@@ -9637,7 +10465,7 @@
           <a:p>
             <a:fld id="{64F06B81-D0D4-404B-8474-757991D5685D}" type="datetimeFigureOut">
               <a:rPr lang="zh-CN" altLang="en-US" smtClean="0"/>
-              <a:t>2026/5/27</a:t>
+              <a:t>2026/6/11</a:t>
             </a:fld>
             <a:endParaRPr lang="zh-CN" altLang="en-US"/>
           </a:p>
@@ -9889,7 +10717,7 @@
           <a:p>
             <a:fld id="{64F06B81-D0D4-404B-8474-757991D5685D}" type="datetimeFigureOut">
               <a:rPr lang="zh-CN" altLang="en-US" smtClean="0"/>
-              <a:t>2026/5/27</a:t>
+              <a:t>2026/6/11</a:t>
             </a:fld>
             <a:endParaRPr lang="zh-CN" altLang="en-US"/>
           </a:p>
@@ -10176,7 +11004,7 @@
           <a:p>
             <a:fld id="{64F06B81-D0D4-404B-8474-757991D5685D}" type="datetimeFigureOut">
               <a:rPr lang="zh-CN" altLang="en-US" smtClean="0"/>
-              <a:t>2026/5/27</a:t>
+              <a:t>2026/6/11</a:t>
             </a:fld>
             <a:endParaRPr lang="zh-CN" altLang="en-US"/>
           </a:p>
@@ -10453,7 +11281,7 @@
           <a:p>
             <a:fld id="{64F06B81-D0D4-404B-8474-757991D5685D}" type="datetimeFigureOut">
               <a:rPr lang="zh-CN" altLang="en-US" smtClean="0"/>
-              <a:t>2026/5/27</a:t>
+              <a:t>2026/6/11</a:t>
             </a:fld>
             <a:endParaRPr lang="zh-CN" altLang="en-US"/>
           </a:p>
@@ -10877,7 +11705,7 @@
           <a:p>
             <a:fld id="{64F06B81-D0D4-404B-8474-757991D5685D}" type="datetimeFigureOut">
               <a:rPr lang="zh-CN" altLang="en-US" smtClean="0"/>
-              <a:t>2026/5/27</a:t>
+              <a:t>2026/6/11</a:t>
             </a:fld>
             <a:endParaRPr lang="zh-CN" altLang="en-US"/>
           </a:p>
@@ -11030,7 +11858,7 @@
           <a:p>
             <a:fld id="{64F06B81-D0D4-404B-8474-757991D5685D}" type="datetimeFigureOut">
               <a:rPr lang="zh-CN" altLang="en-US" smtClean="0"/>
-              <a:t>2026/5/27</a:t>
+              <a:t>2026/6/11</a:t>
             </a:fld>
             <a:endParaRPr lang="zh-CN" altLang="en-US"/>
           </a:p>
@@ -11155,7 +11983,7 @@
           <a:p>
             <a:fld id="{64F06B81-D0D4-404B-8474-757991D5685D}" type="datetimeFigureOut">
               <a:rPr lang="zh-CN" altLang="en-US" smtClean="0"/>
-              <a:t>2026/5/27</a:t>
+              <a:t>2026/6/11</a:t>
             </a:fld>
             <a:endParaRPr lang="zh-CN" altLang="en-US"/>
           </a:p>
@@ -11478,7 +12306,7 @@
           <a:p>
             <a:fld id="{64F06B81-D0D4-404B-8474-757991D5685D}" type="datetimeFigureOut">
               <a:rPr lang="zh-CN" altLang="en-US" smtClean="0"/>
-              <a:t>2026/5/27</a:t>
+              <a:t>2026/6/11</a:t>
             </a:fld>
             <a:endParaRPr lang="zh-CN" altLang="en-US"/>
           </a:p>
@@ -11778,7 +12606,7 @@
           <a:p>
             <a:fld id="{64F06B81-D0D4-404B-8474-757991D5685D}" type="datetimeFigureOut">
               <a:rPr lang="zh-CN" altLang="en-US" smtClean="0"/>
-              <a:t>2026/5/27</a:t>
+              <a:t>2026/6/11</a:t>
             </a:fld>
             <a:endParaRPr lang="zh-CN" altLang="en-US"/>
           </a:p>
@@ -12031,7 +12859,7 @@
           <a:p>
             <a:fld id="{64F06B81-D0D4-404B-8474-757991D5685D}" type="datetimeFigureOut">
               <a:rPr lang="zh-CN" altLang="en-US" smtClean="0"/>
-              <a:t>2026/5/27</a:t>
+              <a:t>2026/6/11</a:t>
             </a:fld>
             <a:endParaRPr lang="zh-CN" altLang="en-US"/>
           </a:p>
@@ -29080,99 +29908,95 @@
       </p:grpSpPr>
       <p:sp>
         <p:nvSpPr>
-          <p:cNvPr id="2" name="AutoShape 2">
-            <a:extLst>
-              <a:ext uri="{FF2B5EF4-FFF2-40B4-BE49-F238E27FC236}">
-                <a16:creationId xmlns:a16="http://schemas.microsoft.com/office/drawing/2014/main" id="{C6C8E996-C280-8E02-C4A1-63A2695EF0DC}"/>
-              </a:ext>
-            </a:extLst>
-          </p:cNvPr>
-          <p:cNvSpPr/>
+          <p:cNvPr id="2" name="TextBox 1"/>
+          <p:cNvSpPr txBox="1"/>
           <p:nvPr/>
         </p:nvSpPr>
         <p:spPr>
           <a:xfrm>
             <a:off x="762000" y="635000"/>
-            <a:ext cx="10668000" cy="635000"/>
+            <a:ext cx="10668000" cy="571500"/>
           </a:xfrm>
           <a:prstGeom prst="rect">
             <a:avLst/>
           </a:prstGeom>
           <a:noFill/>
-          <a:ln w="12700" cap="flat" cmpd="sng">
-            <a:noFill/>
-            <a:prstDash val="solid"/>
-            <a:round/>
-          </a:ln>
-        </p:spPr>
-        <p:txBody>
-          <a:bodyPr vert="horz" wrap="square" lIns="0" tIns="0" rIns="0" bIns="0" rtlCol="0" anchor="ctr" anchorCtr="0"/>
+        </p:spPr>
+        <p:txBody>
+          <a:bodyPr wrap="square">
+            <a:spAutoFit/>
+          </a:bodyPr>
           <a:lstStyle/>
           <a:p>
-            <a:pPr indent="0" algn="l">
-              <a:lnSpc>
-                <a:spcPct val="125000"/>
-              </a:lnSpc>
-              <a:defRPr/>
-            </a:pPr>
-            <a:r>
-              <a:rPr lang="en-US" sz="3200" b="1" i="0" u="none" strike="noStrike" dirty="0">
+            <a:pPr algn="l"/>
+            <a:r>
+              <a:rPr sz="3200" b="1">
                 <a:solidFill>
                   <a:srgbClr val="333333"/>
                 </a:solidFill>
                 <a:latin typeface="Noto Sans SC"/>
-                <a:ea typeface="Noto Sans SC"/>
-                <a:cs typeface="Noto Sans SC"/>
-                <a:sym typeface="Noto Sans SC"/>
-              </a:rPr>
-              <a:t>0</a:t>
-            </a:r>
-            <a:r>
-              <a:rPr lang="en-US" sz="3200" b="1" dirty="0">
-                <a:solidFill>
-                  <a:srgbClr val="333333"/>
+              </a:rPr>
+              <a:t>04  稳定子</a:t>
+            </a:r>
+          </a:p>
+        </p:txBody>
+      </p:sp>
+      <p:sp>
+        <p:nvSpPr>
+          <p:cNvPr id="3" name="TextBox 2"/>
+          <p:cNvSpPr txBox="1"/>
+          <p:nvPr/>
+        </p:nvSpPr>
+        <p:spPr>
+          <a:xfrm>
+            <a:off x="762000" y="1397000"/>
+            <a:ext cx="10668000" cy="444500"/>
+          </a:xfrm>
+          <a:prstGeom prst="rect">
+            <a:avLst/>
+          </a:prstGeom>
+          <a:noFill/>
+        </p:spPr>
+        <p:txBody>
+          <a:bodyPr wrap="square">
+            <a:spAutoFit/>
+          </a:bodyPr>
+          <a:lstStyle/>
+          <a:p>
+            <a:pPr algn="l"/>
+            <a:r>
+              <a:rPr sz="2200" b="1" dirty="0">
+                <a:solidFill>
+                  <a:srgbClr val="666666"/>
                 </a:solidFill>
                 <a:latin typeface="Noto Sans SC"/>
-                <a:ea typeface="Noto Sans SC"/>
-                <a:cs typeface="Noto Sans SC"/>
-                <a:sym typeface="Noto Sans SC"/>
-              </a:rPr>
-              <a:t>4</a:t>
-            </a:r>
-            <a:r>
-              <a:rPr lang="en-US" sz="3200" b="1" i="0" u="none" strike="noStrike" dirty="0">
-                <a:solidFill>
-                  <a:srgbClr val="333333"/>
+              </a:rPr>
+              <a:t>4.4 </a:t>
+            </a:r>
+            <a:r>
+              <a:rPr sz="2200" b="1" dirty="0" err="1">
+                <a:solidFill>
+                  <a:srgbClr val="666666"/>
                 </a:solidFill>
                 <a:latin typeface="Noto Sans SC"/>
-                <a:ea typeface="Noto Sans SC"/>
-                <a:cs typeface="Noto Sans SC"/>
-                <a:sym typeface="Noto Sans SC"/>
-              </a:rPr>
-              <a:t>  </a:t>
-            </a:r>
-            <a:r>
-              <a:rPr lang="zh-CN" altLang="en-US" sz="3200" b="1" i="0" u="none" strike="noStrike" dirty="0">
-                <a:solidFill>
-                  <a:srgbClr val="333333"/>
-                </a:solidFill>
-                <a:latin typeface="Noto Sans SC"/>
-                <a:ea typeface="Noto Sans SC"/>
-                <a:cs typeface="Noto Sans SC"/>
-                <a:sym typeface="Noto Sans SC"/>
-              </a:rPr>
-              <a:t>稳定子</a:t>
-            </a:r>
-            <a:endParaRPr lang="en-US" sz="1100" dirty="0"/>
+              </a:rPr>
+              <a:t>Shor码回顾</a:t>
+            </a:r>
+            <a:endParaRPr sz="2200" b="1" dirty="0">
+              <a:solidFill>
+                <a:srgbClr val="666666"/>
+              </a:solidFill>
+              <a:latin typeface="Noto Sans SC"/>
+            </a:endParaRPr>
           </a:p>
         </p:txBody>
       </p:sp>
       <p:cxnSp>
         <p:nvCxnSpPr>
-          <p:cNvPr id="4" name="直接连接符 3">
-            <a:extLst>
-              <a:ext uri="{FF2B5EF4-FFF2-40B4-BE49-F238E27FC236}">
-                <a16:creationId xmlns:a16="http://schemas.microsoft.com/office/drawing/2014/main" id="{1F36977B-D8B2-2F53-1C08-14A81AD476A8}"/>
+          <p:cNvPr id="8" name="直接连接符 7">
+            <a:extLst>
+              <a:ext uri="{FF2B5EF4-FFF2-40B4-BE49-F238E27FC236}">
+                <a16:creationId xmlns:a16="http://schemas.microsoft.com/office/drawing/2014/main" id="{94F26774-9D22-E872-35FE-5DA997DABBCF}"/>
               </a:ext>
             </a:extLst>
           </p:cNvPr>
@@ -29212,12 +30036,605 @@
           </a:fontRef>
         </p:style>
       </p:cxnSp>
-      <p:sp>
-        <p:nvSpPr>
-          <p:cNvPr id="3" name="AutoShape 3">
-            <a:extLst>
-              <a:ext uri="{FF2B5EF4-FFF2-40B4-BE49-F238E27FC236}">
-                <a16:creationId xmlns:a16="http://schemas.microsoft.com/office/drawing/2014/main" id="{3D55A76E-FF92-6300-287B-B5AF4D28FF32}"/>
+      <p:pic>
+        <p:nvPicPr>
+          <p:cNvPr id="10" name="图片 9">
+            <a:extLst>
+              <a:ext uri="{FF2B5EF4-FFF2-40B4-BE49-F238E27FC236}">
+                <a16:creationId xmlns:a16="http://schemas.microsoft.com/office/drawing/2014/main" id="{F394B001-F56C-9AA5-6B54-244D92C2F1F7}"/>
+              </a:ext>
+            </a:extLst>
+          </p:cNvPr>
+          <p:cNvPicPr>
+            <a:picLocks noChangeAspect="1"/>
+          </p:cNvPicPr>
+          <p:nvPr/>
+        </p:nvPicPr>
+        <p:blipFill>
+          <a:blip r:embed="rId3"/>
+          <a:stretch>
+            <a:fillRect/>
+          </a:stretch>
+        </p:blipFill>
+        <p:spPr>
+          <a:xfrm>
+            <a:off x="8019603" y="455287"/>
+            <a:ext cx="3587934" cy="1447874"/>
+          </a:xfrm>
+          <a:prstGeom prst="rect">
+            <a:avLst/>
+          </a:prstGeom>
+        </p:spPr>
+      </p:pic>
+      <p:pic>
+        <p:nvPicPr>
+          <p:cNvPr id="12" name="图片 11">
+            <a:extLst>
+              <a:ext uri="{FF2B5EF4-FFF2-40B4-BE49-F238E27FC236}">
+                <a16:creationId xmlns:a16="http://schemas.microsoft.com/office/drawing/2014/main" id="{A2FF9B27-E2CE-E10A-E902-D3CFFF4CAEA0}"/>
+              </a:ext>
+            </a:extLst>
+          </p:cNvPr>
+          <p:cNvPicPr>
+            <a:picLocks noChangeAspect="1"/>
+          </p:cNvPicPr>
+          <p:nvPr/>
+        </p:nvPicPr>
+        <p:blipFill>
+          <a:blip r:embed="rId4"/>
+          <a:stretch>
+            <a:fillRect/>
+          </a:stretch>
+        </p:blipFill>
+        <p:spPr>
+          <a:xfrm>
+            <a:off x="7799298" y="2142308"/>
+            <a:ext cx="3919896" cy="1074309"/>
+          </a:xfrm>
+          <a:prstGeom prst="rect">
+            <a:avLst/>
+          </a:prstGeom>
+        </p:spPr>
+      </p:pic>
+      <mc:AlternateContent xmlns:mc="http://schemas.openxmlformats.org/markup-compatibility/2006" xmlns:a14="http://schemas.microsoft.com/office/drawing/2010/main">
+        <mc:Choice Requires="a14">
+          <p:sp>
+            <p:nvSpPr>
+              <p:cNvPr id="14" name="文本框 13">
+                <a:extLst>
+                  <a:ext uri="{FF2B5EF4-FFF2-40B4-BE49-F238E27FC236}">
+                    <a16:creationId xmlns:a16="http://schemas.microsoft.com/office/drawing/2014/main" id="{18C920B6-F33B-3764-998A-16169378C3B9}"/>
+                  </a:ext>
+                </a:extLst>
+              </p:cNvPr>
+              <p:cNvSpPr txBox="1"/>
+              <p:nvPr/>
+            </p:nvSpPr>
+            <p:spPr>
+              <a:xfrm>
+                <a:off x="7945767" y="3497674"/>
+                <a:ext cx="4055149" cy="1386983"/>
+              </a:xfrm>
+              <a:prstGeom prst="rect">
+                <a:avLst/>
+              </a:prstGeom>
+              <a:noFill/>
+            </p:spPr>
+            <p:txBody>
+              <a:bodyPr wrap="none" lIns="0" tIns="0" rIns="0" bIns="0" rtlCol="0">
+                <a:spAutoFit/>
+              </a:bodyPr>
+              <a:lstStyle/>
+              <a:p>
+                <a14:m>
+                  <m:oMath xmlns:m="http://schemas.openxmlformats.org/officeDocument/2006/math">
+                    <m:r>
+                      <a:rPr lang="en-US" altLang="zh-CN" b="0" i="1" smtClean="0">
+                        <a:latin typeface="Cambria Math" panose="02040503050406030204" pitchFamily="18" charset="0"/>
+                      </a:rPr>
+                      <m:t>𝑋</m:t>
+                    </m:r>
+                    <m:r>
+                      <a:rPr lang="en-US" altLang="zh-CN" b="0" i="1" smtClean="0">
+                        <a:latin typeface="Cambria Math" panose="02040503050406030204" pitchFamily="18" charset="0"/>
+                      </a:rPr>
+                      <m:t>⊗</m:t>
+                    </m:r>
+                    <m:r>
+                      <a:rPr lang="en-US" altLang="zh-CN" b="0" i="1" smtClean="0">
+                        <a:latin typeface="Cambria Math" panose="02040503050406030204" pitchFamily="18" charset="0"/>
+                      </a:rPr>
+                      <m:t>𝑋</m:t>
+                    </m:r>
+                    <m:r>
+                      <a:rPr lang="en-US" altLang="zh-CN" b="0" i="1" smtClean="0">
+                        <a:latin typeface="Cambria Math" panose="02040503050406030204" pitchFamily="18" charset="0"/>
+                      </a:rPr>
+                      <m:t>⊗</m:t>
+                    </m:r>
+                    <m:r>
+                      <a:rPr lang="en-US" altLang="zh-CN" b="0" i="1" smtClean="0">
+                        <a:latin typeface="Cambria Math" panose="02040503050406030204" pitchFamily="18" charset="0"/>
+                      </a:rPr>
+                      <m:t>𝑋</m:t>
+                    </m:r>
+                    <m:r>
+                      <a:rPr lang="en-US" altLang="zh-CN" b="0" i="1" smtClean="0">
+                        <a:latin typeface="Cambria Math" panose="02040503050406030204" pitchFamily="18" charset="0"/>
+                      </a:rPr>
+                      <m:t>⊗</m:t>
+                    </m:r>
+                    <m:r>
+                      <a:rPr lang="en-US" altLang="zh-CN" b="0" i="1" smtClean="0">
+                        <a:latin typeface="Cambria Math" panose="02040503050406030204" pitchFamily="18" charset="0"/>
+                      </a:rPr>
+                      <m:t>𝑋</m:t>
+                    </m:r>
+                    <m:r>
+                      <a:rPr lang="en-US" altLang="zh-CN" b="0" i="1" smtClean="0">
+                        <a:latin typeface="Cambria Math" panose="02040503050406030204" pitchFamily="18" charset="0"/>
+                      </a:rPr>
+                      <m:t>⊗</m:t>
+                    </m:r>
+                    <m:r>
+                      <a:rPr lang="en-US" altLang="zh-CN" b="0" i="1" smtClean="0">
+                        <a:latin typeface="Cambria Math" panose="02040503050406030204" pitchFamily="18" charset="0"/>
+                      </a:rPr>
+                      <m:t>𝑋</m:t>
+                    </m:r>
+                    <m:r>
+                      <a:rPr lang="en-US" altLang="zh-CN" b="0" i="1" smtClean="0">
+                        <a:latin typeface="Cambria Math" panose="02040503050406030204" pitchFamily="18" charset="0"/>
+                      </a:rPr>
+                      <m:t>⊗</m:t>
+                    </m:r>
+                    <m:r>
+                      <a:rPr lang="en-US" altLang="zh-CN" b="0" i="1" smtClean="0">
+                        <a:latin typeface="Cambria Math" panose="02040503050406030204" pitchFamily="18" charset="0"/>
+                      </a:rPr>
+                      <m:t>𝑋</m:t>
+                    </m:r>
+                    <m:r>
+                      <a:rPr lang="en-US" altLang="zh-CN" b="0" i="1" smtClean="0">
+                        <a:latin typeface="Cambria Math" panose="02040503050406030204" pitchFamily="18" charset="0"/>
+                      </a:rPr>
+                      <m:t> </m:t>
+                    </m:r>
+                  </m:oMath>
+                </a14:m>
+                <a:r>
+                  <a:rPr lang="en-US" altLang="zh-CN" b="0" dirty="0"/>
+                  <a:t> </a:t>
+                </a:r>
+              </a:p>
+              <a:p>
+                <a:r>
+                  <a:rPr lang="en-US" altLang="zh-CN" dirty="0"/>
+                  <a:t> </a:t>
+                </a:r>
+                <a14:m>
+                  <m:oMath xmlns:m="http://schemas.openxmlformats.org/officeDocument/2006/math">
+                    <m:r>
+                      <a:rPr lang="en-US" altLang="zh-CN" b="0" i="1" smtClean="0">
+                        <a:latin typeface="Cambria Math" panose="02040503050406030204" pitchFamily="18" charset="0"/>
+                      </a:rPr>
+                      <m:t>=</m:t>
+                    </m:r>
+                    <m:d>
+                      <m:dPr>
+                        <m:ctrlPr>
+                          <a:rPr lang="en-US" altLang="zh-CN" b="0" i="1" smtClean="0">
+                            <a:latin typeface="Cambria Math" panose="02040503050406030204" pitchFamily="18" charset="0"/>
+                          </a:rPr>
+                        </m:ctrlPr>
+                      </m:dPr>
+                      <m:e>
+                        <m:m>
+                          <m:mPr>
+                            <m:plcHide m:val="on"/>
+                            <m:mcs>
+                              <m:mc>
+                                <m:mcPr>
+                                  <m:count m:val="4"/>
+                                  <m:mcJc m:val="center"/>
+                                </m:mcPr>
+                              </m:mc>
+                            </m:mcs>
+                            <m:ctrlPr>
+                              <a:rPr lang="en-US" altLang="zh-CN" b="0" i="1" smtClean="0">
+                                <a:latin typeface="Cambria Math" panose="02040503050406030204" pitchFamily="18" charset="0"/>
+                              </a:rPr>
+                            </m:ctrlPr>
+                          </m:mPr>
+                          <m:mr>
+                            <m:e>
+                              <m:r>
+                                <a:rPr lang="en-US" altLang="zh-CN" b="0" i="1" smtClean="0">
+                                  <a:latin typeface="Cambria Math" panose="02040503050406030204" pitchFamily="18" charset="0"/>
+                                </a:rPr>
+                                <m:t>+1 </m:t>
+                              </m:r>
+                            </m:e>
+                            <m:e>
+                              <m:r>
+                                <a:rPr lang="en-US" altLang="zh-CN" b="0" i="1" smtClean="0">
+                                  <a:latin typeface="Cambria Math" panose="02040503050406030204" pitchFamily="18" charset="0"/>
+                                </a:rPr>
+                                <m:t> 0 </m:t>
+                              </m:r>
+                            </m:e>
+                            <m:e>
+                              <m:r>
+                                <a:rPr lang="en-US" altLang="zh-CN" b="0" i="1" smtClean="0">
+                                  <a:latin typeface="Cambria Math" panose="02040503050406030204" pitchFamily="18" charset="0"/>
+                                </a:rPr>
+                                <m:t> 0 </m:t>
+                              </m:r>
+                            </m:e>
+                            <m:e>
+                              <m:r>
+                                <a:rPr lang="en-US" altLang="zh-CN" b="0" i="1" smtClean="0">
+                                  <a:latin typeface="Cambria Math" panose="02040503050406030204" pitchFamily="18" charset="0"/>
+                                </a:rPr>
+                                <m:t> 0 </m:t>
+                              </m:r>
+                            </m:e>
+                          </m:mr>
+                          <m:mr>
+                            <m:e>
+                              <m:r>
+                                <a:rPr lang="en-US" altLang="zh-CN" b="0" i="1" smtClean="0">
+                                  <a:latin typeface="Cambria Math" panose="02040503050406030204" pitchFamily="18" charset="0"/>
+                                </a:rPr>
+                                <m:t> 0 </m:t>
+                              </m:r>
+                            </m:e>
+                            <m:e>
+                              <m:r>
+                                <a:rPr lang="en-US" altLang="zh-CN" b="0" i="1" smtClean="0">
+                                  <a:latin typeface="Cambria Math" panose="02040503050406030204" pitchFamily="18" charset="0"/>
+                                </a:rPr>
+                                <m:t> −1 </m:t>
+                              </m:r>
+                            </m:e>
+                            <m:e>
+                              <m:r>
+                                <a:rPr lang="en-US" altLang="zh-CN" b="0" i="1" smtClean="0">
+                                  <a:latin typeface="Cambria Math" panose="02040503050406030204" pitchFamily="18" charset="0"/>
+                                </a:rPr>
+                                <m:t> 0 </m:t>
+                              </m:r>
+                            </m:e>
+                            <m:e>
+                              <m:r>
+                                <a:rPr lang="en-US" altLang="zh-CN" b="0" i="1" smtClean="0">
+                                  <a:latin typeface="Cambria Math" panose="02040503050406030204" pitchFamily="18" charset="0"/>
+                                </a:rPr>
+                                <m:t> 0 </m:t>
+                              </m:r>
+                            </m:e>
+                          </m:mr>
+                          <m:mr>
+                            <m:e>
+                              <m:r>
+                                <a:rPr lang="en-US" altLang="zh-CN" b="0" i="1" smtClean="0">
+                                  <a:latin typeface="Cambria Math" panose="02040503050406030204" pitchFamily="18" charset="0"/>
+                                </a:rPr>
+                                <m:t> 0 </m:t>
+                              </m:r>
+                            </m:e>
+                            <m:e>
+                              <m:r>
+                                <a:rPr lang="en-US" altLang="zh-CN" b="0" i="1" smtClean="0">
+                                  <a:latin typeface="Cambria Math" panose="02040503050406030204" pitchFamily="18" charset="0"/>
+                                </a:rPr>
+                                <m:t> 0 </m:t>
+                              </m:r>
+                            </m:e>
+                            <m:e>
+                              <m:r>
+                                <a:rPr lang="en-US" altLang="zh-CN" b="0" i="1" smtClean="0">
+                                  <a:latin typeface="Cambria Math" panose="02040503050406030204" pitchFamily="18" charset="0"/>
+                                </a:rPr>
+                                <m:t> −1 </m:t>
+                              </m:r>
+                            </m:e>
+                            <m:e>
+                              <m:r>
+                                <a:rPr lang="en-US" altLang="zh-CN" b="0" i="1" smtClean="0">
+                                  <a:latin typeface="Cambria Math" panose="02040503050406030204" pitchFamily="18" charset="0"/>
+                                </a:rPr>
+                                <m:t> 0 </m:t>
+                              </m:r>
+                            </m:e>
+                          </m:mr>
+                          <m:mr>
+                            <m:e>
+                              <m:r>
+                                <a:rPr lang="en-US" altLang="zh-CN" b="0" i="1" smtClean="0">
+                                  <a:latin typeface="Cambria Math" panose="02040503050406030204" pitchFamily="18" charset="0"/>
+                                </a:rPr>
+                                <m:t> 0 </m:t>
+                              </m:r>
+                            </m:e>
+                            <m:e>
+                              <m:r>
+                                <a:rPr lang="en-US" altLang="zh-CN" b="0" i="1" smtClean="0">
+                                  <a:latin typeface="Cambria Math" panose="02040503050406030204" pitchFamily="18" charset="0"/>
+                                </a:rPr>
+                                <m:t> 0 </m:t>
+                              </m:r>
+                            </m:e>
+                            <m:e>
+                              <m:r>
+                                <a:rPr lang="en-US" altLang="zh-CN" b="0" i="1" smtClean="0">
+                                  <a:latin typeface="Cambria Math" panose="02040503050406030204" pitchFamily="18" charset="0"/>
+                                </a:rPr>
+                                <m:t> 0 </m:t>
+                              </m:r>
+                            </m:e>
+                            <m:e>
+                              <m:r>
+                                <a:rPr lang="en-US" altLang="zh-CN" b="0" i="1" smtClean="0">
+                                  <a:latin typeface="Cambria Math" panose="02040503050406030204" pitchFamily="18" charset="0"/>
+                                </a:rPr>
+                                <m:t>+1</m:t>
+                              </m:r>
+                            </m:e>
+                          </m:mr>
+                        </m:m>
+                      </m:e>
+                    </m:d>
+                    <m:r>
+                      <a:rPr lang="en-US" altLang="zh-CN" b="0" i="1" smtClean="0">
+                        <a:latin typeface="Cambria Math" panose="02040503050406030204" pitchFamily="18" charset="0"/>
+                      </a:rPr>
+                      <m:t> </m:t>
+                    </m:r>
+                    <m:m>
+                      <m:mPr>
+                        <m:plcHide m:val="on"/>
+                        <m:mcs>
+                          <m:mc>
+                            <m:mcPr>
+                              <m:count m:val="1"/>
+                              <m:mcJc m:val="center"/>
+                            </m:mcPr>
+                          </m:mc>
+                        </m:mcs>
+                        <m:ctrlPr>
+                          <a:rPr lang="en-US" altLang="zh-CN" b="0" i="1" smtClean="0">
+                            <a:latin typeface="Cambria Math" panose="02040503050406030204" pitchFamily="18" charset="0"/>
+                          </a:rPr>
+                        </m:ctrlPr>
+                      </m:mPr>
+                      <m:mr>
+                        <m:e>
+                          <m:r>
+                            <a:rPr lang="en-US" altLang="zh-CN" b="0" i="1" smtClean="0">
+                              <a:latin typeface="Cambria Math" panose="02040503050406030204" pitchFamily="18" charset="0"/>
+                            </a:rPr>
+                            <m:t>++</m:t>
+                          </m:r>
+                          <m:d>
+                            <m:dPr>
+                              <m:ctrlPr>
+                                <a:rPr lang="en-US" altLang="zh-CN" b="0" i="1" smtClean="0">
+                                  <a:latin typeface="Cambria Math" panose="02040503050406030204" pitchFamily="18" charset="0"/>
+                                </a:rPr>
+                              </m:ctrlPr>
+                            </m:dPr>
+                            <m:e>
+                              <m:r>
+                                <m:rPr>
+                                  <m:sty m:val="p"/>
+                                </m:rPr>
+                                <a:rPr lang="en-US" altLang="zh-CN" b="0" i="0" smtClean="0">
+                                  <a:latin typeface="Cambria Math" panose="02040503050406030204" pitchFamily="18" charset="0"/>
+                                </a:rPr>
+                                <m:t>even</m:t>
+                              </m:r>
+                            </m:e>
+                          </m:d>
+                          <m:r>
+                            <a:rPr lang="en-US" altLang="zh-CN" b="0" i="1" smtClean="0">
+                              <a:latin typeface="Cambria Math" panose="02040503050406030204" pitchFamily="18" charset="0"/>
+                            </a:rPr>
+                            <m:t> </m:t>
+                          </m:r>
+                        </m:e>
+                      </m:mr>
+                      <m:mr>
+                        <m:e>
+                          <m:r>
+                            <a:rPr lang="en-US" altLang="zh-CN" b="0" i="1" smtClean="0">
+                              <a:latin typeface="Cambria Math" panose="02040503050406030204" pitchFamily="18" charset="0"/>
+                            </a:rPr>
+                            <m:t>+ −</m:t>
+                          </m:r>
+                          <m:d>
+                            <m:dPr>
+                              <m:ctrlPr>
+                                <a:rPr lang="en-US" altLang="zh-CN" b="0" i="1" smtClean="0">
+                                  <a:latin typeface="Cambria Math" panose="02040503050406030204" pitchFamily="18" charset="0"/>
+                                </a:rPr>
+                              </m:ctrlPr>
+                            </m:dPr>
+                            <m:e>
+                              <m:r>
+                                <m:rPr>
+                                  <m:sty m:val="p"/>
+                                </m:rPr>
+                                <a:rPr lang="en-US" altLang="zh-CN" b="0" i="0" smtClean="0">
+                                  <a:latin typeface="Cambria Math" panose="02040503050406030204" pitchFamily="18" charset="0"/>
+                                </a:rPr>
+                                <m:t>odd</m:t>
+                              </m:r>
+                            </m:e>
+                          </m:d>
+                          <m:r>
+                            <a:rPr lang="en-US" altLang="zh-CN" b="0" i="1" smtClean="0">
+                              <a:latin typeface="Cambria Math" panose="02040503050406030204" pitchFamily="18" charset="0"/>
+                            </a:rPr>
+                            <m:t> </m:t>
+                          </m:r>
+                        </m:e>
+                      </m:mr>
+                      <m:mr>
+                        <m:e>
+                          <m:r>
+                            <a:rPr lang="en-US" altLang="zh-CN" b="0" i="1" smtClean="0">
+                              <a:latin typeface="Cambria Math" panose="02040503050406030204" pitchFamily="18" charset="0"/>
+                            </a:rPr>
+                            <m:t> − +</m:t>
+                          </m:r>
+                          <m:d>
+                            <m:dPr>
+                              <m:ctrlPr>
+                                <a:rPr lang="en-US" altLang="zh-CN" b="0" i="1" smtClean="0">
+                                  <a:latin typeface="Cambria Math" panose="02040503050406030204" pitchFamily="18" charset="0"/>
+                                </a:rPr>
+                              </m:ctrlPr>
+                            </m:dPr>
+                            <m:e>
+                              <m:r>
+                                <m:rPr>
+                                  <m:sty m:val="p"/>
+                                </m:rPr>
+                                <a:rPr lang="en-US" altLang="zh-CN" b="0" i="0" smtClean="0">
+                                  <a:latin typeface="Cambria Math" panose="02040503050406030204" pitchFamily="18" charset="0"/>
+                                </a:rPr>
+                                <m:t>odd</m:t>
+                              </m:r>
+                            </m:e>
+                          </m:d>
+                          <m:r>
+                            <a:rPr lang="en-US" altLang="zh-CN" b="0" i="1" smtClean="0">
+                              <a:latin typeface="Cambria Math" panose="02040503050406030204" pitchFamily="18" charset="0"/>
+                            </a:rPr>
+                            <m:t> </m:t>
+                          </m:r>
+                        </m:e>
+                      </m:mr>
+                      <m:mr>
+                        <m:e>
+                          <m:r>
+                            <a:rPr lang="en-US" altLang="zh-CN" b="0" i="1" smtClean="0">
+                              <a:latin typeface="Cambria Math" panose="02040503050406030204" pitchFamily="18" charset="0"/>
+                            </a:rPr>
+                            <m:t> −−</m:t>
+                          </m:r>
+                          <m:d>
+                            <m:dPr>
+                              <m:ctrlPr>
+                                <a:rPr lang="en-US" altLang="zh-CN" b="0" i="1" smtClean="0">
+                                  <a:latin typeface="Cambria Math" panose="02040503050406030204" pitchFamily="18" charset="0"/>
+                                </a:rPr>
+                              </m:ctrlPr>
+                            </m:dPr>
+                            <m:e>
+                              <m:r>
+                                <m:rPr>
+                                  <m:sty m:val="p"/>
+                                </m:rPr>
+                                <a:rPr lang="en-US" altLang="zh-CN" b="0" i="0" smtClean="0">
+                                  <a:latin typeface="Cambria Math" panose="02040503050406030204" pitchFamily="18" charset="0"/>
+                                </a:rPr>
+                                <m:t>even</m:t>
+                              </m:r>
+                            </m:e>
+                          </m:d>
+                        </m:e>
+                      </m:mr>
+                    </m:m>
+                  </m:oMath>
+                </a14:m>
+                <a:endParaRPr lang="en-US" altLang="zh-CN" dirty="0"/>
+              </a:p>
+            </p:txBody>
+          </p:sp>
+        </mc:Choice>
+        <mc:Fallback xmlns="">
+          <p:sp>
+            <p:nvSpPr>
+              <p:cNvPr id="14" name="文本框 13">
+                <a:extLst>
+                  <a:ext uri="{FF2B5EF4-FFF2-40B4-BE49-F238E27FC236}">
+                    <a16:creationId xmlns:a16="http://schemas.microsoft.com/office/drawing/2014/main" id="{18C920B6-F33B-3764-998A-16169378C3B9}"/>
+                  </a:ext>
+                </a:extLst>
+              </p:cNvPr>
+              <p:cNvSpPr txBox="1">
+                <a:spLocks noRot="1" noChangeAspect="1" noMove="1" noResize="1" noEditPoints="1" noAdjustHandles="1" noChangeArrowheads="1" noChangeShapeType="1" noTextEdit="1"/>
+              </p:cNvSpPr>
+              <p:nvPr/>
+            </p:nvSpPr>
+            <p:spPr>
+              <a:xfrm>
+                <a:off x="7945767" y="3497674"/>
+                <a:ext cx="4055149" cy="1386983"/>
+              </a:xfrm>
+              <a:prstGeom prst="rect">
+                <a:avLst/>
+              </a:prstGeom>
+              <a:blipFill>
+                <a:blip r:embed="rId5"/>
+                <a:stretch>
+                  <a:fillRect l="-1952" t="-441"/>
+                </a:stretch>
+              </a:blipFill>
+            </p:spPr>
+            <p:txBody>
+              <a:bodyPr/>
+              <a:lstStyle/>
+              <a:p>
+                <a:r>
+                  <a:rPr lang="zh-CN" altLang="en-US">
+                    <a:noFill/>
+                  </a:rPr>
+                  <a:t> </a:t>
+                </a:r>
+              </a:p>
+            </p:txBody>
+          </p:sp>
+        </mc:Fallback>
+      </mc:AlternateContent>
+      <p:pic>
+        <p:nvPicPr>
+          <p:cNvPr id="16" name="图片 15">
+            <a:extLst>
+              <a:ext uri="{FF2B5EF4-FFF2-40B4-BE49-F238E27FC236}">
+                <a16:creationId xmlns:a16="http://schemas.microsoft.com/office/drawing/2014/main" id="{E7C92BDD-49EE-C82C-628C-448A4BCB83DD}"/>
+              </a:ext>
+            </a:extLst>
+          </p:cNvPr>
+          <p:cNvPicPr>
+            <a:picLocks noChangeAspect="1"/>
+          </p:cNvPicPr>
+          <p:nvPr/>
+        </p:nvPicPr>
+        <p:blipFill>
+          <a:blip r:embed="rId6"/>
+          <a:stretch>
+            <a:fillRect/>
+          </a:stretch>
+        </p:blipFill>
+        <p:spPr>
+          <a:xfrm>
+            <a:off x="8421755" y="5129145"/>
+            <a:ext cx="3010067" cy="1567026"/>
+          </a:xfrm>
+          <a:prstGeom prst="rect">
+            <a:avLst/>
+          </a:prstGeom>
+        </p:spPr>
+      </p:pic>
+      <p:sp>
+        <p:nvSpPr>
+          <p:cNvPr id="18" name="AutoShape 11">
+            <a:extLst>
+              <a:ext uri="{FF2B5EF4-FFF2-40B4-BE49-F238E27FC236}">
+                <a16:creationId xmlns:a16="http://schemas.microsoft.com/office/drawing/2014/main" id="{3B6599AF-FB57-4BF5-1F98-F1F170F21E02}"/>
               </a:ext>
             </a:extLst>
           </p:cNvPr>
@@ -29226,8 +30643,8 @@
         </p:nvSpPr>
         <p:spPr>
           <a:xfrm>
-            <a:off x="762000" y="1651000"/>
-            <a:ext cx="10668000" cy="508000"/>
+            <a:off x="935955" y="2617185"/>
+            <a:ext cx="6273800" cy="3071689"/>
           </a:xfrm>
           <a:prstGeom prst="rect">
             <a:avLst/>
@@ -29245,47 +30662,358 @@
           <a:p>
             <a:pPr indent="0" algn="l">
               <a:lnSpc>
-                <a:spcPct val="125000"/>
+                <a:spcPct val="116666"/>
               </a:lnSpc>
               <a:defRPr/>
             </a:pPr>
             <a:r>
-              <a:rPr lang="en-US" altLang="zh-CN" sz="2200" b="1" dirty="0">
-                <a:solidFill>
-                  <a:srgbClr val="555555"/>
-                </a:solidFill>
-                <a:latin typeface="Noto Sans SC"/>
+              <a:rPr lang="zh-CN" altLang="en-US" b="1" dirty="0">
+                <a:solidFill>
+                  <a:schemeClr val="accent2"/>
+                </a:solidFill>
                 <a:ea typeface="Noto Sans SC"/>
                 <a:cs typeface="Noto Sans SC"/>
                 <a:sym typeface="Noto Sans SC"/>
               </a:rPr>
-              <a:t>4.4 </a:t>
-            </a:r>
-            <a:r>
-              <a:rPr lang="en-US" altLang="zh-CN" sz="2200" b="1" dirty="0" err="1">
-                <a:solidFill>
-                  <a:srgbClr val="555555"/>
-                </a:solidFill>
-                <a:latin typeface="Noto Sans SC"/>
+              <a:t>算符</a:t>
+            </a:r>
+            <a:r>
+              <a:rPr lang="zh-CN" altLang="en-US" b="1" i="0" u="none" strike="noStrike" dirty="0">
                 <a:ea typeface="Noto Sans SC"/>
                 <a:cs typeface="Noto Sans SC"/>
                 <a:sym typeface="Noto Sans SC"/>
               </a:rPr>
-              <a:t>shor</a:t>
-            </a:r>
-            <a:r>
-              <a:rPr lang="zh-CN" altLang="en-US" sz="2200" b="1" dirty="0">
-                <a:solidFill>
-                  <a:srgbClr val="555555"/>
-                </a:solidFill>
-                <a:latin typeface="Noto Sans SC"/>
+              <a:t>作用于态获得</a:t>
+            </a:r>
+            <a:r>
+              <a:rPr lang="zh-CN" altLang="en-US" b="1" i="0" u="none" strike="noStrike" dirty="0">
+                <a:solidFill>
+                  <a:schemeClr val="accent2"/>
+                </a:solidFill>
                 <a:ea typeface="Noto Sans SC"/>
                 <a:cs typeface="Noto Sans SC"/>
                 <a:sym typeface="Noto Sans SC"/>
               </a:rPr>
-              <a:t>码回顾</a:t>
-            </a:r>
-            <a:endParaRPr lang="en-US" sz="1100" dirty="0"/>
+              <a:t>本征值</a:t>
+            </a:r>
+            <a:r>
+              <a:rPr lang="zh-CN" altLang="en-US" b="1" i="0" u="none" strike="noStrike" dirty="0">
+                <a:ea typeface="Noto Sans SC"/>
+                <a:cs typeface="Noto Sans SC"/>
+                <a:sym typeface="Noto Sans SC"/>
+              </a:rPr>
+              <a:t>来</a:t>
+            </a:r>
+            <a:r>
+              <a:rPr lang="zh-CN" altLang="en-US" b="1" i="0" u="none" strike="noStrike" dirty="0">
+                <a:solidFill>
+                  <a:schemeClr val="accent2"/>
+                </a:solidFill>
+                <a:ea typeface="Noto Sans SC"/>
+                <a:cs typeface="Noto Sans SC"/>
+                <a:sym typeface="Noto Sans SC"/>
+              </a:rPr>
+              <a:t>检测错误</a:t>
+            </a:r>
+            <a:endParaRPr lang="en-US" altLang="zh-CN" b="1" i="0" u="none" strike="noStrike" dirty="0">
+              <a:solidFill>
+                <a:schemeClr val="accent2"/>
+              </a:solidFill>
+              <a:ea typeface="Noto Sans SC"/>
+              <a:cs typeface="Noto Sans SC"/>
+              <a:sym typeface="Noto Sans SC"/>
+            </a:endParaRPr>
+          </a:p>
+          <a:p>
+            <a:pPr indent="0" algn="l">
+              <a:lnSpc>
+                <a:spcPct val="116666"/>
+              </a:lnSpc>
+              <a:defRPr/>
+            </a:pPr>
+            <a:endParaRPr lang="en-US" altLang="zh-CN" b="1" dirty="0">
+              <a:solidFill>
+                <a:schemeClr val="accent2"/>
+              </a:solidFill>
+              <a:ea typeface="Noto Sans SC"/>
+              <a:cs typeface="Noto Sans SC"/>
+              <a:sym typeface="Noto Sans SC"/>
+            </a:endParaRPr>
+          </a:p>
+          <a:p>
+            <a:pPr indent="0" algn="l">
+              <a:lnSpc>
+                <a:spcPct val="116666"/>
+              </a:lnSpc>
+              <a:defRPr/>
+            </a:pPr>
+            <a:r>
+              <a:rPr lang="zh-CN" altLang="en-US" b="1" i="0" u="none" strike="noStrike" dirty="0">
+                <a:ea typeface="Noto Sans SC"/>
+                <a:cs typeface="Noto Sans SC"/>
+                <a:sym typeface="Noto Sans SC"/>
+              </a:rPr>
+              <a:t>而这些算符的</a:t>
+            </a:r>
+            <a:r>
+              <a:rPr lang="zh-CN" altLang="en-US" b="1" i="0" u="none" strike="noStrike" dirty="0">
+                <a:solidFill>
+                  <a:schemeClr val="accent2"/>
+                </a:solidFill>
+                <a:ea typeface="Noto Sans SC"/>
+                <a:cs typeface="Noto Sans SC"/>
+                <a:sym typeface="Noto Sans SC"/>
+              </a:rPr>
+              <a:t>集合</a:t>
+            </a:r>
+            <a:r>
+              <a:rPr lang="zh-CN" altLang="en-US" b="1" i="0" u="none" strike="noStrike" dirty="0">
+                <a:ea typeface="Noto Sans SC"/>
+                <a:cs typeface="Noto Sans SC"/>
+                <a:sym typeface="Noto Sans SC"/>
+              </a:rPr>
+              <a:t>就是</a:t>
+            </a:r>
+            <a:r>
+              <a:rPr lang="zh-CN" altLang="en-US" b="1" i="0" u="none" strike="noStrike" dirty="0">
+                <a:solidFill>
+                  <a:schemeClr val="accent2"/>
+                </a:solidFill>
+                <a:ea typeface="Noto Sans SC"/>
+                <a:cs typeface="Noto Sans SC"/>
+                <a:sym typeface="Noto Sans SC"/>
+              </a:rPr>
+              <a:t>稳定子</a:t>
+            </a:r>
+            <a:r>
+              <a:rPr lang="en-US" altLang="zh-CN" b="1" i="0" u="none" strike="noStrike" dirty="0">
+                <a:solidFill>
+                  <a:schemeClr val="accent2"/>
+                </a:solidFill>
+                <a:ea typeface="Noto Sans SC"/>
+                <a:cs typeface="Noto Sans SC"/>
+                <a:sym typeface="Noto Sans SC"/>
+              </a:rPr>
+              <a:t>(</a:t>
+            </a:r>
+            <a:r>
+              <a:rPr lang="en-US" altLang="zh-CN" b="1" i="0" u="none" strike="noStrike" dirty="0" err="1">
+                <a:solidFill>
+                  <a:schemeClr val="accent2"/>
+                </a:solidFill>
+                <a:ea typeface="Noto Sans SC"/>
+                <a:cs typeface="Noto Sans SC"/>
+                <a:sym typeface="Noto Sans SC"/>
+              </a:rPr>
+              <a:t>stablizer</a:t>
+            </a:r>
+            <a:r>
+              <a:rPr lang="en-US" altLang="zh-CN" b="1" i="0" u="none" strike="noStrike" dirty="0">
+                <a:solidFill>
+                  <a:schemeClr val="accent2"/>
+                </a:solidFill>
+                <a:ea typeface="Noto Sans SC"/>
+                <a:cs typeface="Noto Sans SC"/>
+                <a:sym typeface="Noto Sans SC"/>
+              </a:rPr>
+              <a:t>)</a:t>
+            </a:r>
+          </a:p>
+          <a:p>
+            <a:pPr indent="0" algn="l">
+              <a:lnSpc>
+                <a:spcPct val="116666"/>
+              </a:lnSpc>
+              <a:defRPr/>
+            </a:pPr>
+            <a:endParaRPr lang="en-US" altLang="zh-CN" b="1" dirty="0">
+              <a:solidFill>
+                <a:schemeClr val="accent2"/>
+              </a:solidFill>
+              <a:ea typeface="Noto Sans SC"/>
+              <a:cs typeface="Noto Sans SC"/>
+              <a:sym typeface="Noto Sans SC"/>
+            </a:endParaRPr>
+          </a:p>
+          <a:p>
+            <a:pPr indent="0" algn="l">
+              <a:lnSpc>
+                <a:spcPct val="116666"/>
+              </a:lnSpc>
+              <a:defRPr/>
+            </a:pPr>
+            <a:r>
+              <a:rPr lang="zh-CN" altLang="en-US" b="1" dirty="0">
+                <a:ea typeface="Noto Sans SC"/>
+                <a:cs typeface="Noto Sans SC"/>
+                <a:sym typeface="Noto Sans SC"/>
+              </a:rPr>
+              <a:t>最下方的</a:t>
+            </a:r>
+            <a:r>
+              <a:rPr lang="en-US" altLang="zh-CN" b="1" dirty="0">
+                <a:ea typeface="Noto Sans SC"/>
+                <a:cs typeface="Noto Sans SC"/>
+                <a:sym typeface="Noto Sans SC"/>
+              </a:rPr>
+              <a:t>8</a:t>
+            </a:r>
+            <a:r>
+              <a:rPr lang="zh-CN" altLang="en-US" b="1" dirty="0">
+                <a:ea typeface="Noto Sans SC"/>
+                <a:cs typeface="Noto Sans SC"/>
+                <a:sym typeface="Noto Sans SC"/>
+              </a:rPr>
+              <a:t>个算符可以</a:t>
+            </a:r>
+            <a:r>
+              <a:rPr lang="zh-CN" altLang="en-US" b="1" dirty="0">
+                <a:solidFill>
+                  <a:schemeClr val="accent2"/>
+                </a:solidFill>
+                <a:ea typeface="Noto Sans SC"/>
+                <a:cs typeface="Noto Sans SC"/>
+                <a:sym typeface="Noto Sans SC"/>
+              </a:rPr>
+              <a:t>组合出</a:t>
+            </a:r>
+            <a:r>
+              <a:rPr lang="en-US" altLang="zh-CN" b="1" dirty="0" err="1">
+                <a:ea typeface="Noto Sans SC"/>
+                <a:cs typeface="Noto Sans SC"/>
+                <a:sym typeface="Noto Sans SC"/>
+              </a:rPr>
+              <a:t>shor</a:t>
+            </a:r>
+            <a:r>
+              <a:rPr lang="zh-CN" altLang="en-US" b="1" dirty="0">
+                <a:ea typeface="Noto Sans SC"/>
+                <a:cs typeface="Noto Sans SC"/>
+                <a:sym typeface="Noto Sans SC"/>
+              </a:rPr>
+              <a:t>码稳定子里的所有算符</a:t>
+            </a:r>
+            <a:endParaRPr lang="en-US" altLang="zh-CN" b="1" dirty="0">
+              <a:ea typeface="Noto Sans SC"/>
+              <a:cs typeface="Noto Sans SC"/>
+              <a:sym typeface="Noto Sans SC"/>
+            </a:endParaRPr>
+          </a:p>
+          <a:p>
+            <a:pPr indent="0" algn="l">
+              <a:lnSpc>
+                <a:spcPct val="116666"/>
+              </a:lnSpc>
+              <a:defRPr/>
+            </a:pPr>
+            <a:r>
+              <a:rPr lang="zh-CN" altLang="en-US" b="1" i="0" u="none" strike="noStrike" dirty="0">
+                <a:ea typeface="Noto Sans SC"/>
+                <a:cs typeface="Noto Sans SC"/>
+                <a:sym typeface="Noto Sans SC"/>
+              </a:rPr>
+              <a:t>所以被称为</a:t>
+            </a:r>
+            <a:r>
+              <a:rPr lang="zh-CN" altLang="en-US" b="1" i="0" u="none" strike="noStrike" dirty="0">
+                <a:solidFill>
+                  <a:schemeClr val="accent2"/>
+                </a:solidFill>
+                <a:ea typeface="Noto Sans SC"/>
+                <a:cs typeface="Noto Sans SC"/>
+                <a:sym typeface="Noto Sans SC"/>
+              </a:rPr>
+              <a:t>生成元</a:t>
+            </a:r>
+            <a:r>
+              <a:rPr lang="en-US" altLang="zh-CN" b="1" i="0" u="none" strike="noStrike" dirty="0">
+                <a:solidFill>
+                  <a:schemeClr val="accent2"/>
+                </a:solidFill>
+                <a:ea typeface="Noto Sans SC"/>
+                <a:cs typeface="Noto Sans SC"/>
+                <a:sym typeface="Noto Sans SC"/>
+              </a:rPr>
+              <a:t>(generators)</a:t>
+            </a:r>
+          </a:p>
+          <a:p>
+            <a:pPr indent="0" algn="l">
+              <a:lnSpc>
+                <a:spcPct val="116666"/>
+              </a:lnSpc>
+              <a:defRPr/>
+            </a:pPr>
+            <a:r>
+              <a:rPr lang="zh-CN" altLang="en-US" b="1" dirty="0">
+                <a:ea typeface="Noto Sans SC"/>
+                <a:cs typeface="Noto Sans SC"/>
+                <a:sym typeface="Noto Sans SC"/>
+              </a:rPr>
+              <a:t>我们之后会发现生成元作为</a:t>
+            </a:r>
+            <a:r>
+              <a:rPr lang="zh-CN" altLang="en-US" b="1" dirty="0">
+                <a:solidFill>
+                  <a:schemeClr val="accent2"/>
+                </a:solidFill>
+                <a:ea typeface="Noto Sans SC"/>
+                <a:cs typeface="Noto Sans SC"/>
+                <a:sym typeface="Noto Sans SC"/>
+              </a:rPr>
+              <a:t>完整稳定子群的基</a:t>
+            </a:r>
+            <a:r>
+              <a:rPr lang="zh-CN" altLang="en-US" b="1" dirty="0">
+                <a:ea typeface="Noto Sans SC"/>
+                <a:cs typeface="Noto Sans SC"/>
+                <a:sym typeface="Noto Sans SC"/>
+              </a:rPr>
+              <a:t>，他是最</a:t>
+            </a:r>
+            <a:r>
+              <a:rPr lang="zh-CN" altLang="en-US" b="1" dirty="0">
+                <a:solidFill>
+                  <a:schemeClr val="accent2"/>
+                </a:solidFill>
+                <a:ea typeface="Noto Sans SC"/>
+                <a:cs typeface="Noto Sans SC"/>
+                <a:sym typeface="Noto Sans SC"/>
+              </a:rPr>
+              <a:t>简洁</a:t>
+            </a:r>
+            <a:r>
+              <a:rPr lang="zh-CN" altLang="en-US" b="1" dirty="0">
+                <a:ea typeface="Noto Sans SC"/>
+                <a:cs typeface="Noto Sans SC"/>
+                <a:sym typeface="Noto Sans SC"/>
+              </a:rPr>
+              <a:t>而</a:t>
+            </a:r>
+            <a:r>
+              <a:rPr lang="zh-CN" altLang="en-US" b="1" dirty="0">
+                <a:solidFill>
+                  <a:schemeClr val="accent2"/>
+                </a:solidFill>
+                <a:ea typeface="Noto Sans SC"/>
+                <a:cs typeface="Noto Sans SC"/>
+                <a:sym typeface="Noto Sans SC"/>
+              </a:rPr>
+              <a:t>完备</a:t>
+            </a:r>
+            <a:r>
+              <a:rPr lang="zh-CN" altLang="en-US" b="1" dirty="0">
+                <a:ea typeface="Noto Sans SC"/>
+                <a:cs typeface="Noto Sans SC"/>
+                <a:sym typeface="Noto Sans SC"/>
+              </a:rPr>
+              <a:t>的纠错工具</a:t>
+            </a:r>
+            <a:endParaRPr lang="en-US" altLang="zh-CN" b="1" i="0" u="none" strike="noStrike" dirty="0">
+              <a:ea typeface="Noto Sans SC"/>
+              <a:cs typeface="Noto Sans SC"/>
+              <a:sym typeface="Noto Sans SC"/>
+            </a:endParaRPr>
           </a:p>
         </p:txBody>
       </p:sp>
@@ -29322,7 +31050,7 @@
         <p:cNvPr id="1" name="">
           <a:extLst>
             <a:ext uri="{FF2B5EF4-FFF2-40B4-BE49-F238E27FC236}">
-              <a16:creationId xmlns:a16="http://schemas.microsoft.com/office/drawing/2014/main" id="{BFBD2712-7AB7-A0AB-C6DD-2E30D71283F8}"/>
+              <a16:creationId xmlns:a16="http://schemas.microsoft.com/office/drawing/2014/main" id="{9398A25B-C3B4-DC45-01D2-B078B4E8BE2A}"/>
             </a:ext>
           </a:extLst>
         </p:cNvPr>
@@ -29339,99 +31067,125 @@
       </p:grpSpPr>
       <p:sp>
         <p:nvSpPr>
-          <p:cNvPr id="2" name="AutoShape 2">
-            <a:extLst>
-              <a:ext uri="{FF2B5EF4-FFF2-40B4-BE49-F238E27FC236}">
-                <a16:creationId xmlns:a16="http://schemas.microsoft.com/office/drawing/2014/main" id="{7BE907A5-A21C-8D77-CAB6-D296DEEC33F3}"/>
-              </a:ext>
-            </a:extLst>
-          </p:cNvPr>
-          <p:cNvSpPr/>
+          <p:cNvPr id="2" name="TextBox 1">
+            <a:extLst>
+              <a:ext uri="{FF2B5EF4-FFF2-40B4-BE49-F238E27FC236}">
+                <a16:creationId xmlns:a16="http://schemas.microsoft.com/office/drawing/2014/main" id="{8B375BBB-8A62-DF94-4E86-7AE69D3BD17A}"/>
+              </a:ext>
+            </a:extLst>
+          </p:cNvPr>
+          <p:cNvSpPr txBox="1"/>
           <p:nvPr/>
         </p:nvSpPr>
         <p:spPr>
           <a:xfrm>
             <a:off x="762000" y="635000"/>
-            <a:ext cx="10668000" cy="635000"/>
+            <a:ext cx="10668000" cy="571500"/>
           </a:xfrm>
           <a:prstGeom prst="rect">
             <a:avLst/>
           </a:prstGeom>
           <a:noFill/>
-          <a:ln w="12700" cap="flat" cmpd="sng">
-            <a:noFill/>
-            <a:prstDash val="solid"/>
-            <a:round/>
-          </a:ln>
-        </p:spPr>
-        <p:txBody>
-          <a:bodyPr vert="horz" wrap="square" lIns="0" tIns="0" rIns="0" bIns="0" rtlCol="0" anchor="ctr" anchorCtr="0"/>
+        </p:spPr>
+        <p:txBody>
+          <a:bodyPr wrap="square">
+            <a:spAutoFit/>
+          </a:bodyPr>
           <a:lstStyle/>
           <a:p>
-            <a:pPr indent="0" algn="l">
-              <a:lnSpc>
-                <a:spcPct val="125000"/>
-              </a:lnSpc>
-              <a:defRPr/>
-            </a:pPr>
-            <a:r>
-              <a:rPr lang="en-US" sz="3200" b="1" i="0" u="none" strike="noStrike" dirty="0">
+            <a:pPr algn="l"/>
+            <a:r>
+              <a:rPr sz="3200" b="1">
                 <a:solidFill>
                   <a:srgbClr val="333333"/>
                 </a:solidFill>
                 <a:latin typeface="Noto Sans SC"/>
-                <a:ea typeface="Noto Sans SC"/>
-                <a:cs typeface="Noto Sans SC"/>
-                <a:sym typeface="Noto Sans SC"/>
-              </a:rPr>
-              <a:t>0</a:t>
-            </a:r>
-            <a:r>
-              <a:rPr lang="en-US" sz="3200" b="1" dirty="0">
-                <a:solidFill>
-                  <a:srgbClr val="333333"/>
+              </a:rPr>
+              <a:t>04  稳定子</a:t>
+            </a:r>
+          </a:p>
+        </p:txBody>
+      </p:sp>
+      <p:sp>
+        <p:nvSpPr>
+          <p:cNvPr id="3" name="TextBox 2">
+            <a:extLst>
+              <a:ext uri="{FF2B5EF4-FFF2-40B4-BE49-F238E27FC236}">
+                <a16:creationId xmlns:a16="http://schemas.microsoft.com/office/drawing/2014/main" id="{F97EA2AE-EF77-64AA-727A-40C3C256BC07}"/>
+              </a:ext>
+            </a:extLst>
+          </p:cNvPr>
+          <p:cNvSpPr txBox="1"/>
+          <p:nvPr/>
+        </p:nvSpPr>
+        <p:spPr>
+          <a:xfrm>
+            <a:off x="762000" y="1397000"/>
+            <a:ext cx="10668000" cy="444500"/>
+          </a:xfrm>
+          <a:prstGeom prst="rect">
+            <a:avLst/>
+          </a:prstGeom>
+          <a:noFill/>
+        </p:spPr>
+        <p:txBody>
+          <a:bodyPr wrap="square">
+            <a:spAutoFit/>
+          </a:bodyPr>
+          <a:lstStyle/>
+          <a:p>
+            <a:pPr algn="l"/>
+            <a:r>
+              <a:rPr sz="2200" b="1" dirty="0">
+                <a:solidFill>
+                  <a:srgbClr val="666666"/>
                 </a:solidFill>
                 <a:latin typeface="Noto Sans SC"/>
-                <a:ea typeface="Noto Sans SC"/>
-                <a:cs typeface="Noto Sans SC"/>
-                <a:sym typeface="Noto Sans SC"/>
-              </a:rPr>
-              <a:t>4</a:t>
-            </a:r>
-            <a:r>
-              <a:rPr lang="en-US" sz="3200" b="1" i="0" u="none" strike="noStrike" dirty="0">
-                <a:solidFill>
-                  <a:srgbClr val="333333"/>
+              </a:rPr>
+              <a:t>4.</a:t>
+            </a:r>
+            <a:r>
+              <a:rPr lang="en-US" sz="2200" b="1" dirty="0">
+                <a:solidFill>
+                  <a:srgbClr val="666666"/>
                 </a:solidFill>
                 <a:latin typeface="Noto Sans SC"/>
-                <a:ea typeface="Noto Sans SC"/>
-                <a:cs typeface="Noto Sans SC"/>
-                <a:sym typeface="Noto Sans SC"/>
-              </a:rPr>
-              <a:t>  </a:t>
-            </a:r>
-            <a:r>
-              <a:rPr lang="zh-CN" altLang="en-US" sz="3200" b="1" i="0" u="none" strike="noStrike" dirty="0">
-                <a:solidFill>
-                  <a:srgbClr val="333333"/>
+              </a:rPr>
+              <a:t>5</a:t>
+            </a:r>
+            <a:r>
+              <a:rPr sz="2200" b="1" dirty="0">
+                <a:solidFill>
+                  <a:srgbClr val="666666"/>
                 </a:solidFill>
                 <a:latin typeface="Noto Sans SC"/>
-                <a:ea typeface="Noto Sans SC"/>
-                <a:cs typeface="Noto Sans SC"/>
-                <a:sym typeface="Noto Sans SC"/>
-              </a:rPr>
-              <a:t>稳定子</a:t>
-            </a:r>
-            <a:endParaRPr lang="en-US" sz="1100" dirty="0"/>
+              </a:rPr>
+              <a:t> </a:t>
+            </a:r>
+            <a:r>
+              <a:rPr lang="zh-CN" altLang="en-US" sz="2200" b="1" dirty="0">
+                <a:solidFill>
+                  <a:srgbClr val="666666"/>
+                </a:solidFill>
+                <a:latin typeface="Noto Sans SC"/>
+              </a:rPr>
+              <a:t>泡利群</a:t>
+            </a:r>
+            <a:endParaRPr sz="2200" b="1" dirty="0">
+              <a:solidFill>
+                <a:srgbClr val="666666"/>
+              </a:solidFill>
+              <a:latin typeface="Noto Sans SC"/>
+            </a:endParaRPr>
           </a:p>
         </p:txBody>
       </p:sp>
       <p:cxnSp>
         <p:nvCxnSpPr>
-          <p:cNvPr id="4" name="直接连接符 3">
-            <a:extLst>
-              <a:ext uri="{FF2B5EF4-FFF2-40B4-BE49-F238E27FC236}">
-                <a16:creationId xmlns:a16="http://schemas.microsoft.com/office/drawing/2014/main" id="{4BB14536-37AE-6E97-3683-FC72E8FDC37E}"/>
+          <p:cNvPr id="8" name="直接连接符 7">
+            <a:extLst>
+              <a:ext uri="{FF2B5EF4-FFF2-40B4-BE49-F238E27FC236}">
+                <a16:creationId xmlns:a16="http://schemas.microsoft.com/office/drawing/2014/main" id="{A8747A23-F164-FAE4-8F5E-9D74D37A5963}"/>
               </a:ext>
             </a:extLst>
           </p:cNvPr>
@@ -29471,75 +31225,1588 @@
           </a:fontRef>
         </p:style>
       </p:cxnSp>
-      <p:sp>
-        <p:nvSpPr>
-          <p:cNvPr id="3" name="AutoShape 3">
-            <a:extLst>
-              <a:ext uri="{FF2B5EF4-FFF2-40B4-BE49-F238E27FC236}">
-                <a16:creationId xmlns:a16="http://schemas.microsoft.com/office/drawing/2014/main" id="{9547DE3B-145A-C962-3C15-2B1CDFD1869C}"/>
-              </a:ext>
-            </a:extLst>
-          </p:cNvPr>
-          <p:cNvSpPr/>
-          <p:nvPr/>
-        </p:nvSpPr>
-        <p:spPr>
-          <a:xfrm>
-            <a:off x="762000" y="1651000"/>
-            <a:ext cx="10668000" cy="508000"/>
-          </a:xfrm>
-          <a:prstGeom prst="rect">
-            <a:avLst/>
-          </a:prstGeom>
-          <a:noFill/>
-          <a:ln w="12700" cap="flat" cmpd="sng">
-            <a:noFill/>
-            <a:prstDash val="solid"/>
-            <a:round/>
-          </a:ln>
-        </p:spPr>
-        <p:txBody>
-          <a:bodyPr vert="horz" wrap="square" lIns="0" tIns="0" rIns="0" bIns="0" rtlCol="0" anchor="ctr" anchorCtr="0"/>
-          <a:lstStyle/>
-          <a:p>
-            <a:pPr indent="0" algn="l">
-              <a:lnSpc>
-                <a:spcPct val="125000"/>
-              </a:lnSpc>
-              <a:defRPr/>
-            </a:pPr>
-            <a:r>
-              <a:rPr lang="en-US" altLang="zh-CN" sz="2200" b="1" dirty="0">
-                <a:solidFill>
-                  <a:srgbClr val="555555"/>
-                </a:solidFill>
-                <a:latin typeface="Noto Sans SC"/>
-                <a:ea typeface="Noto Sans SC"/>
-                <a:cs typeface="Noto Sans SC"/>
-                <a:sym typeface="Noto Sans SC"/>
-              </a:rPr>
-              <a:t>4.4 </a:t>
-            </a:r>
-            <a:r>
-              <a:rPr lang="zh-CN" altLang="en-US" sz="2200" b="1" dirty="0">
-                <a:solidFill>
-                  <a:srgbClr val="555555"/>
-                </a:solidFill>
-                <a:latin typeface="Noto Sans SC"/>
-                <a:ea typeface="Noto Sans SC"/>
-                <a:cs typeface="Noto Sans SC"/>
-                <a:sym typeface="Noto Sans SC"/>
-              </a:rPr>
-              <a:t>泡利群</a:t>
-            </a:r>
-            <a:endParaRPr lang="en-US" sz="1100" dirty="0"/>
-          </a:p>
-        </p:txBody>
-      </p:sp>
+      <mc:AlternateContent xmlns:mc="http://schemas.openxmlformats.org/markup-compatibility/2006" xmlns:a14="http://schemas.microsoft.com/office/drawing/2010/main">
+        <mc:Choice Requires="a14">
+          <p:sp>
+            <p:nvSpPr>
+              <p:cNvPr id="5" name="AutoShape 11">
+                <a:extLst>
+                  <a:ext uri="{FF2B5EF4-FFF2-40B4-BE49-F238E27FC236}">
+                    <a16:creationId xmlns:a16="http://schemas.microsoft.com/office/drawing/2014/main" id="{FBD89B2D-C61C-6008-81C8-8A09F8AEE66C}"/>
+                  </a:ext>
+                </a:extLst>
+              </p:cNvPr>
+              <p:cNvSpPr/>
+              <p:nvPr/>
+            </p:nvSpPr>
+            <p:spPr>
+              <a:xfrm>
+                <a:off x="622444" y="1776548"/>
+                <a:ext cx="6836445" cy="6518366"/>
+              </a:xfrm>
+              <a:prstGeom prst="rect">
+                <a:avLst/>
+              </a:prstGeom>
+              <a:noFill/>
+              <a:ln w="12700" cap="flat" cmpd="sng">
+                <a:noFill/>
+                <a:prstDash val="solid"/>
+                <a:round/>
+              </a:ln>
+            </p:spPr>
+            <p:txBody>
+              <a:bodyPr vert="horz" wrap="square" lIns="0" tIns="0" rIns="0" bIns="0" rtlCol="0" anchor="ctr" anchorCtr="0"/>
+              <a:lstStyle/>
+              <a:p>
+                <a:pPr indent="0">
+                  <a:lnSpc>
+                    <a:spcPct val="116666"/>
+                  </a:lnSpc>
+                  <a:defRPr/>
+                </a:pPr>
+                <a:r>
+                  <a:rPr lang="zh-CN" altLang="en-US" b="1" dirty="0">
+                    <a:ea typeface="Noto Sans SC"/>
+                    <a:cs typeface="Noto Sans SC"/>
+                    <a:sym typeface="Noto Sans SC"/>
+                  </a:rPr>
+                  <a:t>可以发现上面提到的各种错误表征，测量算符都由</a:t>
+                </a:r>
+                <a:r>
+                  <a:rPr lang="zh-CN" altLang="en-US" b="1" dirty="0">
+                    <a:solidFill>
+                      <a:schemeClr val="accent2"/>
+                    </a:solidFill>
+                    <a:ea typeface="Noto Sans SC"/>
+                    <a:cs typeface="Noto Sans SC"/>
+                    <a:sym typeface="Noto Sans SC"/>
+                  </a:rPr>
+                  <a:t>泡利算符</a:t>
+                </a:r>
+                <a:r>
+                  <a:rPr lang="zh-CN" altLang="en-US" b="1" dirty="0">
+                    <a:ea typeface="Noto Sans SC"/>
+                    <a:cs typeface="Noto Sans SC"/>
+                    <a:sym typeface="Noto Sans SC"/>
+                  </a:rPr>
+                  <a:t>组成</a:t>
+                </a:r>
+                <a:endParaRPr lang="en-US" altLang="zh-CN" b="1" dirty="0">
+                  <a:ea typeface="Noto Sans SC"/>
+                  <a:cs typeface="Noto Sans SC"/>
+                  <a:sym typeface="Noto Sans SC"/>
+                </a:endParaRPr>
+              </a:p>
+              <a:p>
+                <a:pPr indent="0">
+                  <a:lnSpc>
+                    <a:spcPct val="116666"/>
+                  </a:lnSpc>
+                  <a:defRPr/>
+                </a:pPr>
+                <a:endParaRPr lang="en-US" altLang="zh-CN" b="1" dirty="0">
+                  <a:ea typeface="Noto Sans SC"/>
+                  <a:cs typeface="Noto Sans SC"/>
+                  <a:sym typeface="Noto Sans SC"/>
+                </a:endParaRPr>
+              </a:p>
+              <a:p>
+                <a:pPr indent="0">
+                  <a:lnSpc>
+                    <a:spcPct val="116666"/>
+                  </a:lnSpc>
+                  <a:defRPr/>
+                </a:pPr>
+                <a:r>
+                  <a:rPr lang="zh-CN" altLang="en-US" b="1" dirty="0">
+                    <a:ea typeface="Noto Sans SC"/>
+                    <a:cs typeface="Noto Sans SC"/>
+                    <a:sym typeface="Noto Sans SC"/>
+                  </a:rPr>
+                  <a:t>因此我们需要了解一下</a:t>
+                </a:r>
+                <a:r>
+                  <a:rPr lang="zh-CN" altLang="en-US" b="1" dirty="0">
+                    <a:solidFill>
+                      <a:schemeClr val="accent2"/>
+                    </a:solidFill>
+                    <a:ea typeface="Noto Sans SC"/>
+                    <a:cs typeface="Noto Sans SC"/>
+                    <a:sym typeface="Noto Sans SC"/>
+                  </a:rPr>
+                  <a:t>泡利群</a:t>
+                </a:r>
+                <a:r>
+                  <a:rPr lang="zh-CN" altLang="en-US" b="1" dirty="0">
+                    <a:ea typeface="Noto Sans SC"/>
+                    <a:cs typeface="Noto Sans SC"/>
+                    <a:sym typeface="Noto Sans SC"/>
+                  </a:rPr>
+                  <a:t>的概念</a:t>
+                </a:r>
+                <a:endParaRPr lang="en-US" altLang="zh-CN" b="1" dirty="0">
+                  <a:ea typeface="Noto Sans SC"/>
+                  <a:cs typeface="Noto Sans SC"/>
+                  <a:sym typeface="Noto Sans SC"/>
+                </a:endParaRPr>
+              </a:p>
+              <a:p>
+                <a:pPr indent="0">
+                  <a:lnSpc>
+                    <a:spcPct val="116666"/>
+                  </a:lnSpc>
+                  <a:defRPr/>
+                </a:pPr>
+                <a:endParaRPr lang="en-US" altLang="zh-CN" b="1" i="0" u="none" strike="noStrike" dirty="0">
+                  <a:ea typeface="Noto Sans SC"/>
+                  <a:cs typeface="Noto Sans SC"/>
+                  <a:sym typeface="Noto Sans SC"/>
+                </a:endParaRPr>
+              </a:p>
+              <a:p>
+                <a:pPr indent="0">
+                  <a:lnSpc>
+                    <a:spcPct val="116666"/>
+                  </a:lnSpc>
+                  <a:defRPr/>
+                </a:pPr>
+                <a:r>
+                  <a:rPr lang="zh-CN" altLang="en-US" b="1" dirty="0">
+                    <a:ea typeface="Noto Sans SC"/>
+                    <a:cs typeface="Noto Sans SC"/>
+                    <a:sym typeface="Noto Sans SC"/>
+                  </a:rPr>
+                  <a:t>一个泡利群即</a:t>
+                </a:r>
+                <a:r>
+                  <a:rPr lang="en-US" altLang="zh-CN" b="1" dirty="0">
+                    <a:solidFill>
+                      <a:schemeClr val="accent2"/>
+                    </a:solidFill>
+                    <a:ea typeface="Noto Sans SC"/>
+                    <a:cs typeface="Noto Sans SC"/>
+                    <a:sym typeface="Noto Sans SC"/>
+                  </a:rPr>
+                  <a:t>n</a:t>
+                </a:r>
+                <a:r>
+                  <a:rPr lang="zh-CN" altLang="en-US" b="1" dirty="0">
+                    <a:solidFill>
+                      <a:schemeClr val="accent2"/>
+                    </a:solidFill>
+                    <a:ea typeface="Noto Sans SC"/>
+                    <a:cs typeface="Noto Sans SC"/>
+                    <a:sym typeface="Noto Sans SC"/>
+                  </a:rPr>
+                  <a:t>个泡利算符</a:t>
+                </a:r>
+                <a:r>
+                  <a:rPr lang="zh-CN" altLang="en-US" b="1" dirty="0">
+                    <a:ea typeface="Noto Sans SC"/>
+                    <a:cs typeface="Noto Sans SC"/>
+                    <a:sym typeface="Noto Sans SC"/>
+                  </a:rPr>
+                  <a:t>的</a:t>
+                </a:r>
+                <a:r>
+                  <a:rPr lang="zh-CN" altLang="en-US" b="1" dirty="0">
+                    <a:solidFill>
+                      <a:schemeClr val="accent2"/>
+                    </a:solidFill>
+                    <a:ea typeface="Noto Sans SC"/>
+                    <a:cs typeface="Noto Sans SC"/>
+                    <a:sym typeface="Noto Sans SC"/>
+                  </a:rPr>
+                  <a:t>张量积</a:t>
+                </a:r>
+                <a:r>
+                  <a:rPr lang="zh-CN" altLang="en-US" b="1" dirty="0">
+                    <a:ea typeface="Noto Sans SC"/>
+                    <a:cs typeface="Noto Sans SC"/>
+                    <a:sym typeface="Noto Sans SC"/>
+                  </a:rPr>
+                  <a:t>和</a:t>
+                </a:r>
+                <a14:m>
+                  <m:oMath xmlns:m="http://schemas.openxmlformats.org/officeDocument/2006/math">
+                    <m:r>
+                      <a:rPr lang="en-US" altLang="zh-CN" b="1" i="0" smtClean="0">
+                        <a:solidFill>
+                          <a:schemeClr val="accent2"/>
+                        </a:solidFill>
+                        <a:latin typeface="Cambria Math" panose="02040503050406030204" pitchFamily="18" charset="0"/>
+                        <a:ea typeface="Noto Sans SC"/>
+                        <a:cs typeface="Noto Sans SC"/>
+                        <a:sym typeface="Noto Sans SC"/>
+                      </a:rPr>
+                      <m:t>{</m:t>
+                    </m:r>
+                    <m:r>
+                      <a:rPr lang="en-US" altLang="zh-CN" b="1" i="1" smtClean="0">
+                        <a:solidFill>
+                          <a:schemeClr val="accent2"/>
+                        </a:solidFill>
+                        <a:latin typeface="Cambria Math" panose="02040503050406030204" pitchFamily="18" charset="0"/>
+                        <a:ea typeface="Noto Sans SC"/>
+                        <a:cs typeface="Noto Sans SC"/>
+                        <a:sym typeface="Noto Sans SC"/>
+                      </a:rPr>
+                      <m:t>±</m:t>
+                    </m:r>
+                    <m:r>
+                      <a:rPr lang="en-US" altLang="zh-CN" b="1" i="1" smtClean="0">
+                        <a:solidFill>
+                          <a:schemeClr val="accent2"/>
+                        </a:solidFill>
+                        <a:latin typeface="Cambria Math" panose="02040503050406030204" pitchFamily="18" charset="0"/>
+                        <a:ea typeface="Noto Sans SC"/>
+                        <a:cs typeface="Noto Sans SC"/>
+                        <a:sym typeface="Noto Sans SC"/>
+                      </a:rPr>
+                      <m:t>𝟏</m:t>
+                    </m:r>
+                    <m:r>
+                      <a:rPr lang="en-US" altLang="zh-CN" b="1" i="1" smtClean="0">
+                        <a:solidFill>
+                          <a:schemeClr val="accent2"/>
+                        </a:solidFill>
+                        <a:latin typeface="Cambria Math" panose="02040503050406030204" pitchFamily="18" charset="0"/>
+                        <a:ea typeface="Noto Sans SC"/>
+                        <a:cs typeface="Noto Sans SC"/>
+                        <a:sym typeface="Noto Sans SC"/>
+                      </a:rPr>
+                      <m:t>,±</m:t>
+                    </m:r>
+                    <m:r>
+                      <a:rPr lang="en-US" altLang="zh-CN" b="1" i="1" dirty="0">
+                        <a:solidFill>
+                          <a:schemeClr val="accent2"/>
+                        </a:solidFill>
+                        <a:latin typeface="Cambria Math" panose="02040503050406030204" pitchFamily="18" charset="0"/>
+                        <a:ea typeface="Noto Sans SC"/>
+                        <a:cs typeface="Noto Sans SC"/>
+                        <a:sym typeface="Noto Sans SC"/>
+                      </a:rPr>
+                      <m:t>𝒊</m:t>
+                    </m:r>
+                    <m:r>
+                      <a:rPr lang="en-US" altLang="zh-CN" b="1" i="1" dirty="0" smtClean="0">
+                        <a:solidFill>
+                          <a:schemeClr val="accent2"/>
+                        </a:solidFill>
+                        <a:latin typeface="Cambria Math" panose="02040503050406030204" pitchFamily="18" charset="0"/>
+                        <a:ea typeface="Noto Sans SC"/>
+                        <a:cs typeface="Noto Sans SC"/>
+                        <a:sym typeface="Noto Sans SC"/>
+                      </a:rPr>
+                      <m:t>}</m:t>
+                    </m:r>
+                  </m:oMath>
+                </a14:m>
+                <a:r>
+                  <a:rPr lang="zh-CN" altLang="en-US" b="1" u="none" strike="noStrike" dirty="0">
+                    <a:solidFill>
+                      <a:schemeClr val="accent2"/>
+                    </a:solidFill>
+                    <a:ea typeface="Noto Sans SC"/>
+                    <a:cs typeface="Noto Sans SC"/>
+                    <a:sym typeface="Noto Sans SC"/>
+                  </a:rPr>
+                  <a:t>的全局相位</a:t>
+                </a:r>
+                <a:endParaRPr lang="en-US" altLang="zh-CN" b="1" u="none" strike="noStrike" dirty="0">
+                  <a:solidFill>
+                    <a:schemeClr val="accent2"/>
+                  </a:solidFill>
+                  <a:ea typeface="Noto Sans SC"/>
+                  <a:cs typeface="Noto Sans SC"/>
+                  <a:sym typeface="Noto Sans SC"/>
+                </a:endParaRPr>
+              </a:p>
+              <a:p>
+                <a:pPr indent="0">
+                  <a:lnSpc>
+                    <a:spcPct val="116666"/>
+                  </a:lnSpc>
+                  <a:defRPr/>
+                </a:pPr>
+                <a:r>
+                  <a:rPr lang="en-US" altLang="zh-CN" b="1" dirty="0">
+                    <a:solidFill>
+                      <a:schemeClr val="accent2"/>
+                    </a:solidFill>
+                    <a:ea typeface="Noto Sans SC"/>
+                    <a:cs typeface="Noto Sans SC"/>
+                    <a:sym typeface="Noto Sans SC"/>
+                  </a:rPr>
+                  <a:t>   </a:t>
+                </a:r>
+                <a:r>
+                  <a:rPr lang="zh-CN" altLang="en-US" b="1" dirty="0">
+                    <a:ea typeface="Noto Sans SC"/>
+                    <a:cs typeface="Noto Sans SC"/>
+                    <a:sym typeface="Noto Sans SC"/>
+                  </a:rPr>
+                  <a:t>每个泡利算符当然可以</a:t>
+                </a:r>
+                <a:r>
+                  <a:rPr lang="zh-CN" altLang="en-US" b="1" dirty="0">
+                    <a:solidFill>
+                      <a:schemeClr val="accent2"/>
+                    </a:solidFill>
+                    <a:ea typeface="Noto Sans SC"/>
+                    <a:cs typeface="Noto Sans SC"/>
+                    <a:sym typeface="Noto Sans SC"/>
+                  </a:rPr>
+                  <a:t>带自己的相位</a:t>
+                </a:r>
+                <a:r>
+                  <a:rPr lang="zh-CN" altLang="en-US" b="1" dirty="0">
+                    <a:ea typeface="Noto Sans SC"/>
+                    <a:cs typeface="Noto Sans SC"/>
+                    <a:sym typeface="Noto Sans SC"/>
+                  </a:rPr>
+                  <a:t>但最终只会获得</a:t>
+                </a:r>
+                <a:r>
+                  <a:rPr lang="zh-CN" altLang="en-US" b="1" dirty="0">
+                    <a:solidFill>
+                      <a:schemeClr val="accent2"/>
+                    </a:solidFill>
+                    <a:ea typeface="Noto Sans SC"/>
+                    <a:cs typeface="Noto Sans SC"/>
+                    <a:sym typeface="Noto Sans SC"/>
+                  </a:rPr>
+                  <a:t>一个全局相位</a:t>
+                </a:r>
+                <a:endParaRPr lang="en-US" altLang="zh-CN" b="1" u="none" strike="noStrike" dirty="0">
+                  <a:solidFill>
+                    <a:schemeClr val="accent2"/>
+                  </a:solidFill>
+                  <a:ea typeface="Noto Sans SC"/>
+                  <a:cs typeface="Noto Sans SC"/>
+                  <a:sym typeface="Noto Sans SC"/>
+                </a:endParaRPr>
+              </a:p>
+              <a:p>
+                <a:pPr indent="0">
+                  <a:lnSpc>
+                    <a:spcPct val="116666"/>
+                  </a:lnSpc>
+                  <a:defRPr/>
+                </a:pPr>
+                <a:endParaRPr lang="en-US" altLang="zh-CN" b="1" dirty="0">
+                  <a:ea typeface="Noto Sans SC"/>
+                  <a:cs typeface="Noto Sans SC"/>
+                  <a:sym typeface="Noto Sans SC"/>
+                </a:endParaRPr>
+              </a:p>
+              <a:p>
+                <a:pPr indent="0">
+                  <a:lnSpc>
+                    <a:spcPct val="116666"/>
+                  </a:lnSpc>
+                  <a:defRPr/>
+                </a:pPr>
+                <a:r>
+                  <a:rPr lang="zh-CN" altLang="en-US" b="1" dirty="0">
+                    <a:ea typeface="Noto Sans SC"/>
+                    <a:cs typeface="Noto Sans SC"/>
+                    <a:sym typeface="Noto Sans SC"/>
+                  </a:rPr>
+                  <a:t>  所以</a:t>
+                </a:r>
+                <a14:m>
+                  <m:oMath xmlns:m="http://schemas.openxmlformats.org/officeDocument/2006/math">
+                    <m:sSub>
+                      <m:sSubPr>
+                        <m:ctrlPr>
+                          <a:rPr lang="en-US" altLang="zh-CN" b="1" i="1" smtClean="0">
+                            <a:latin typeface="Cambria Math" panose="02040503050406030204" pitchFamily="18" charset="0"/>
+                            <a:ea typeface="Noto Sans SC"/>
+                            <a:cs typeface="Noto Sans SC"/>
+                            <a:sym typeface="Noto Sans SC"/>
+                          </a:rPr>
+                        </m:ctrlPr>
+                      </m:sSubPr>
+                      <m:e>
+                        <m:r>
+                          <a:rPr lang="en-US" altLang="zh-CN" b="1" i="0" smtClean="0">
+                            <a:latin typeface="Cambria Math" panose="02040503050406030204" pitchFamily="18" charset="0"/>
+                            <a:ea typeface="Noto Sans SC"/>
+                            <a:cs typeface="Noto Sans SC"/>
+                            <a:sym typeface="Noto Sans SC"/>
+                          </a:rPr>
+                          <m:t>𝐏</m:t>
+                        </m:r>
+                      </m:e>
+                      <m:sub>
+                        <m:r>
+                          <a:rPr lang="en-US" altLang="zh-CN" b="1" i="1" smtClean="0">
+                            <a:latin typeface="Cambria Math" panose="02040503050406030204" pitchFamily="18" charset="0"/>
+                            <a:ea typeface="Noto Sans SC"/>
+                            <a:cs typeface="Noto Sans SC"/>
+                            <a:sym typeface="Noto Sans SC"/>
+                          </a:rPr>
+                          <m:t>𝒏</m:t>
+                        </m:r>
+                      </m:sub>
+                    </m:sSub>
+                  </m:oMath>
+                </a14:m>
+                <a:r>
+                  <a:rPr lang="zh-CN" altLang="en-US" b="1" u="none" strike="noStrike" dirty="0">
+                    <a:ea typeface="Noto Sans SC"/>
+                    <a:cs typeface="Noto Sans SC"/>
+                    <a:sym typeface="Noto Sans SC"/>
+                  </a:rPr>
+                  <a:t>有</a:t>
+                </a:r>
+                <a14:m>
+                  <m:oMath xmlns:m="http://schemas.openxmlformats.org/officeDocument/2006/math">
+                    <m:sSup>
+                      <m:sSupPr>
+                        <m:ctrlPr>
+                          <a:rPr lang="en-US" altLang="zh-CN" b="1" i="1" u="none" strike="noStrike" dirty="0" smtClean="0">
+                            <a:solidFill>
+                              <a:schemeClr val="accent2"/>
+                            </a:solidFill>
+                            <a:latin typeface="Cambria Math" panose="02040503050406030204" pitchFamily="18" charset="0"/>
+                            <a:ea typeface="Noto Sans SC"/>
+                            <a:cs typeface="Noto Sans SC"/>
+                            <a:sym typeface="Noto Sans SC"/>
+                          </a:rPr>
+                        </m:ctrlPr>
+                      </m:sSupPr>
+                      <m:e>
+                        <m:r>
+                          <a:rPr lang="en-US" altLang="zh-CN" b="1" i="1" u="none" strike="noStrike" dirty="0" smtClean="0">
+                            <a:solidFill>
+                              <a:schemeClr val="accent2"/>
+                            </a:solidFill>
+                            <a:latin typeface="Cambria Math" panose="02040503050406030204" pitchFamily="18" charset="0"/>
+                            <a:ea typeface="Noto Sans SC"/>
+                            <a:cs typeface="Noto Sans SC"/>
+                            <a:sym typeface="Noto Sans SC"/>
+                          </a:rPr>
+                          <m:t>𝟒</m:t>
+                        </m:r>
+                      </m:e>
+                      <m:sup>
+                        <m:r>
+                          <a:rPr lang="en-US" altLang="zh-CN" b="1" i="1" u="none" strike="noStrike" dirty="0" smtClean="0">
+                            <a:solidFill>
+                              <a:schemeClr val="accent2"/>
+                            </a:solidFill>
+                            <a:latin typeface="Cambria Math" panose="02040503050406030204" pitchFamily="18" charset="0"/>
+                            <a:ea typeface="Noto Sans SC"/>
+                            <a:cs typeface="Noto Sans SC"/>
+                            <a:sym typeface="Noto Sans SC"/>
+                          </a:rPr>
+                          <m:t>𝒏</m:t>
+                        </m:r>
+                        <m:r>
+                          <a:rPr lang="en-US" altLang="zh-CN" b="1" i="1" u="none" strike="noStrike" dirty="0" smtClean="0">
+                            <a:solidFill>
+                              <a:schemeClr val="accent2"/>
+                            </a:solidFill>
+                            <a:latin typeface="Cambria Math" panose="02040503050406030204" pitchFamily="18" charset="0"/>
+                            <a:ea typeface="Noto Sans SC"/>
+                            <a:cs typeface="Noto Sans SC"/>
+                            <a:sym typeface="Noto Sans SC"/>
+                          </a:rPr>
+                          <m:t>+</m:t>
+                        </m:r>
+                        <m:r>
+                          <a:rPr lang="en-US" altLang="zh-CN" b="1" i="1" u="none" strike="noStrike" dirty="0" smtClean="0">
+                            <a:solidFill>
+                              <a:schemeClr val="accent2"/>
+                            </a:solidFill>
+                            <a:latin typeface="Cambria Math" panose="02040503050406030204" pitchFamily="18" charset="0"/>
+                            <a:ea typeface="Noto Sans SC"/>
+                            <a:cs typeface="Noto Sans SC"/>
+                            <a:sym typeface="Noto Sans SC"/>
+                          </a:rPr>
+                          <m:t>𝟏</m:t>
+                        </m:r>
+                      </m:sup>
+                    </m:sSup>
+                  </m:oMath>
+                </a14:m>
+                <a:r>
+                  <a:rPr lang="zh-CN" altLang="en-US" b="1" u="none" strike="noStrike" dirty="0">
+                    <a:ea typeface="Noto Sans SC"/>
+                    <a:cs typeface="Noto Sans SC"/>
+                    <a:sym typeface="Noto Sans SC"/>
+                  </a:rPr>
+                  <a:t>种组合</a:t>
+                </a:r>
+                <a:endParaRPr lang="en-US" altLang="zh-CN" b="1" u="none" strike="noStrike" dirty="0">
+                  <a:ea typeface="Noto Sans SC"/>
+                  <a:cs typeface="Noto Sans SC"/>
+                  <a:sym typeface="Noto Sans SC"/>
+                </a:endParaRPr>
+              </a:p>
+              <a:p>
+                <a:pPr indent="0">
+                  <a:lnSpc>
+                    <a:spcPct val="116666"/>
+                  </a:lnSpc>
+                  <a:defRPr/>
+                </a:pPr>
+                <a:endParaRPr lang="en-US" altLang="zh-CN" b="1" dirty="0">
+                  <a:ea typeface="Noto Sans SC"/>
+                  <a:cs typeface="Noto Sans SC"/>
+                  <a:sym typeface="Noto Sans SC"/>
+                </a:endParaRPr>
+              </a:p>
+              <a:p>
+                <a:pPr indent="0">
+                  <a:lnSpc>
+                    <a:spcPct val="116666"/>
+                  </a:lnSpc>
+                  <a:defRPr/>
+                </a:pPr>
+                <a:r>
+                  <a:rPr lang="zh-CN" altLang="en-US" b="1" u="none" strike="noStrike" dirty="0">
+                    <a:ea typeface="Noto Sans SC"/>
+                    <a:cs typeface="Noto Sans SC"/>
+                    <a:sym typeface="Noto Sans SC"/>
+                  </a:rPr>
+                  <a:t>我们使用</a:t>
+                </a:r>
+                <a14:m>
+                  <m:oMath xmlns:m="http://schemas.openxmlformats.org/officeDocument/2006/math">
+                    <m:acc>
+                      <m:accPr>
+                        <m:chr m:val="̂"/>
+                        <m:ctrlPr>
+                          <a:rPr lang="en-US" altLang="zh-CN" b="1" i="1" u="none" strike="noStrike" smtClean="0">
+                            <a:solidFill>
+                              <a:schemeClr val="accent2"/>
+                            </a:solidFill>
+                            <a:latin typeface="Cambria Math" panose="02040503050406030204" pitchFamily="18" charset="0"/>
+                            <a:ea typeface="Noto Sans SC"/>
+                            <a:sym typeface="Noto Sans SC"/>
+                          </a:rPr>
+                        </m:ctrlPr>
+                      </m:accPr>
+                      <m:e>
+                        <m:sSub>
+                          <m:sSubPr>
+                            <m:ctrlPr>
+                              <a:rPr lang="en-US" altLang="zh-CN" b="1" i="1" u="none" strike="noStrike" smtClean="0">
+                                <a:solidFill>
+                                  <a:schemeClr val="accent2"/>
+                                </a:solidFill>
+                                <a:latin typeface="Cambria Math" panose="02040503050406030204" pitchFamily="18" charset="0"/>
+                                <a:ea typeface="Noto Sans SC"/>
+                                <a:sym typeface="Noto Sans SC"/>
+                              </a:rPr>
+                            </m:ctrlPr>
+                          </m:sSubPr>
+                          <m:e>
+                            <m:r>
+                              <a:rPr lang="en-US" altLang="zh-CN" b="1" i="0" u="none" strike="noStrike" smtClean="0">
+                                <a:solidFill>
+                                  <a:schemeClr val="accent2"/>
+                                </a:solidFill>
+                                <a:latin typeface="Cambria Math" panose="02040503050406030204" pitchFamily="18" charset="0"/>
+                                <a:ea typeface="Noto Sans SC"/>
+                                <a:sym typeface="Noto Sans SC"/>
+                              </a:rPr>
+                              <m:t>𝐏</m:t>
+                            </m:r>
+                          </m:e>
+                          <m:sub>
+                            <m:r>
+                              <a:rPr lang="en-US" altLang="zh-CN" b="1" i="1" u="none" strike="noStrike" smtClean="0">
+                                <a:solidFill>
+                                  <a:schemeClr val="accent2"/>
+                                </a:solidFill>
+                                <a:latin typeface="Cambria Math" panose="02040503050406030204" pitchFamily="18" charset="0"/>
+                                <a:ea typeface="Noto Sans SC"/>
+                                <a:sym typeface="Noto Sans SC"/>
+                              </a:rPr>
+                              <m:t>𝒏</m:t>
+                            </m:r>
+                          </m:sub>
+                        </m:sSub>
+                      </m:e>
+                    </m:acc>
+                  </m:oMath>
+                </a14:m>
+                <a:r>
+                  <a:rPr lang="zh-CN" altLang="en-US" b="1" u="none" strike="noStrike" dirty="0">
+                    <a:ea typeface="Noto Sans SC"/>
+                    <a:cs typeface="Noto Sans SC"/>
+                    <a:sym typeface="Noto Sans SC"/>
+                  </a:rPr>
+                  <a:t>表征</a:t>
+                </a:r>
+                <a:r>
+                  <a:rPr lang="zh-CN" altLang="en-US" b="1" u="none" strike="noStrike" dirty="0">
+                    <a:solidFill>
+                      <a:schemeClr val="accent2"/>
+                    </a:solidFill>
+                    <a:ea typeface="Noto Sans SC"/>
+                    <a:cs typeface="Noto Sans SC"/>
+                    <a:sym typeface="Noto Sans SC"/>
+                  </a:rPr>
+                  <a:t>不考虑全局相位</a:t>
+                </a:r>
+                <a:r>
+                  <a:rPr lang="zh-CN" altLang="en-US" b="1" u="none" strike="noStrike" dirty="0">
+                    <a:ea typeface="Noto Sans SC"/>
+                    <a:cs typeface="Noto Sans SC"/>
+                    <a:sym typeface="Noto Sans SC"/>
+                  </a:rPr>
+                  <a:t>的情况</a:t>
+                </a:r>
+                <a:endParaRPr lang="en-US" altLang="zh-CN" b="1" u="none" strike="noStrike" dirty="0">
+                  <a:ea typeface="Noto Sans SC"/>
+                  <a:cs typeface="Noto Sans SC"/>
+                  <a:sym typeface="Noto Sans SC"/>
+                </a:endParaRPr>
+              </a:p>
+              <a:p>
+                <a:pPr indent="0">
+                  <a:lnSpc>
+                    <a:spcPct val="116666"/>
+                  </a:lnSpc>
+                  <a:defRPr/>
+                </a:pPr>
+                <a:r>
+                  <a:rPr lang="zh-CN" altLang="en-US" b="1" u="none" strike="noStrike" dirty="0">
+                    <a:ea typeface="Noto Sans SC"/>
+                    <a:cs typeface="Noto Sans SC"/>
+                    <a:sym typeface="Noto Sans SC"/>
+                  </a:rPr>
+                  <a:t>  这时当然只有</a:t>
+                </a:r>
+                <a14:m>
+                  <m:oMath xmlns:m="http://schemas.openxmlformats.org/officeDocument/2006/math">
+                    <m:sSup>
+                      <m:sSupPr>
+                        <m:ctrlPr>
+                          <a:rPr lang="en-US" altLang="zh-CN" b="1" i="1" u="none" strike="noStrike" smtClean="0">
+                            <a:solidFill>
+                              <a:schemeClr val="accent2"/>
+                            </a:solidFill>
+                            <a:latin typeface="Cambria Math" panose="02040503050406030204" pitchFamily="18" charset="0"/>
+                            <a:ea typeface="Noto Sans SC"/>
+                            <a:cs typeface="Noto Sans SC"/>
+                            <a:sym typeface="Noto Sans SC"/>
+                          </a:rPr>
+                        </m:ctrlPr>
+                      </m:sSupPr>
+                      <m:e>
+                        <m:r>
+                          <a:rPr lang="en-US" altLang="zh-CN" b="1" i="1" u="none" strike="noStrike" smtClean="0">
+                            <a:solidFill>
+                              <a:schemeClr val="accent2"/>
+                            </a:solidFill>
+                            <a:latin typeface="Cambria Math" panose="02040503050406030204" pitchFamily="18" charset="0"/>
+                            <a:ea typeface="Noto Sans SC"/>
+                            <a:cs typeface="Noto Sans SC"/>
+                            <a:sym typeface="Noto Sans SC"/>
+                          </a:rPr>
+                          <m:t>𝟒</m:t>
+                        </m:r>
+                      </m:e>
+                      <m:sup>
+                        <m:r>
+                          <a:rPr lang="en-US" altLang="zh-CN" b="1" i="1" u="none" strike="noStrike" smtClean="0">
+                            <a:solidFill>
+                              <a:schemeClr val="accent2"/>
+                            </a:solidFill>
+                            <a:latin typeface="Cambria Math" panose="02040503050406030204" pitchFamily="18" charset="0"/>
+                            <a:ea typeface="Noto Sans SC"/>
+                            <a:cs typeface="Noto Sans SC"/>
+                            <a:sym typeface="Noto Sans SC"/>
+                          </a:rPr>
+                          <m:t>𝒏</m:t>
+                        </m:r>
+                      </m:sup>
+                    </m:sSup>
+                  </m:oMath>
+                </a14:m>
+                <a:r>
+                  <a:rPr lang="zh-CN" altLang="en-US" b="1" u="none" strike="noStrike" dirty="0">
+                    <a:ea typeface="Noto Sans SC"/>
+                    <a:cs typeface="Noto Sans SC"/>
+                    <a:sym typeface="Noto Sans SC"/>
+                  </a:rPr>
+                  <a:t>种组合</a:t>
+                </a:r>
+                <a:endParaRPr lang="en-US" altLang="zh-CN" b="1" u="none" strike="noStrike" dirty="0">
+                  <a:ea typeface="Noto Sans SC"/>
+                  <a:cs typeface="Noto Sans SC"/>
+                  <a:sym typeface="Noto Sans SC"/>
+                </a:endParaRPr>
+              </a:p>
+              <a:p>
+                <a:pPr indent="0">
+                  <a:lnSpc>
+                    <a:spcPct val="116666"/>
+                  </a:lnSpc>
+                  <a:defRPr/>
+                </a:pPr>
+                <a:endParaRPr lang="en-US" altLang="zh-CN" b="1" dirty="0">
+                  <a:ea typeface="Noto Sans SC"/>
+                  <a:cs typeface="Noto Sans SC"/>
+                  <a:sym typeface="Noto Sans SC"/>
+                </a:endParaRPr>
+              </a:p>
+              <a:p>
+                <a:pPr indent="0">
+                  <a:lnSpc>
+                    <a:spcPct val="116666"/>
+                  </a:lnSpc>
+                  <a:defRPr/>
+                </a:pPr>
+                <a:r>
+                  <a:rPr lang="en-US" altLang="zh-CN" b="1" i="0" u="none" strike="noStrike" dirty="0">
+                    <a:ea typeface="Noto Sans SC"/>
+                    <a:cs typeface="Noto Sans SC"/>
+                    <a:sym typeface="Noto Sans SC"/>
+                  </a:rPr>
+                  <a:t> </a:t>
+                </a:r>
+                <a14:m>
+                  <m:oMath xmlns:m="http://schemas.openxmlformats.org/officeDocument/2006/math">
+                    <m:r>
+                      <a:rPr lang="en-US" altLang="zh-CN" b="1" i="1" u="none" strike="noStrike" smtClean="0">
+                        <a:latin typeface="Cambria Math" panose="02040503050406030204" pitchFamily="18" charset="0"/>
+                        <a:ea typeface="Noto Sans SC"/>
+                        <a:cs typeface="Noto Sans SC"/>
+                        <a:sym typeface="Noto Sans SC"/>
+                      </a:rPr>
+                      <m:t>≅</m:t>
+                    </m:r>
+                  </m:oMath>
+                </a14:m>
+                <a:r>
+                  <a:rPr lang="zh-CN" altLang="en-US" b="1" i="0" u="none" strike="noStrike" dirty="0">
+                    <a:ea typeface="Noto Sans SC"/>
+                    <a:cs typeface="Noto Sans SC"/>
+                    <a:sym typeface="Noto Sans SC"/>
+                  </a:rPr>
+                  <a:t>叫做</a:t>
+                </a:r>
+                <a:r>
+                  <a:rPr lang="zh-CN" altLang="en-US" b="1" i="0" u="none" strike="noStrike" dirty="0">
+                    <a:solidFill>
+                      <a:schemeClr val="accent2"/>
+                    </a:solidFill>
+                    <a:ea typeface="Noto Sans SC"/>
+                    <a:cs typeface="Noto Sans SC"/>
+                    <a:sym typeface="Noto Sans SC"/>
+                  </a:rPr>
+                  <a:t>同构</a:t>
+                </a:r>
+                <a:r>
+                  <a:rPr lang="zh-CN" altLang="en-US" b="1" i="0" u="none" strike="noStrike" dirty="0">
+                    <a:ea typeface="Noto Sans SC"/>
+                    <a:cs typeface="Noto Sans SC"/>
+                    <a:sym typeface="Noto Sans SC"/>
+                  </a:rPr>
+                  <a:t>，允许</a:t>
+                </a:r>
+                <a:r>
+                  <a:rPr lang="zh-CN" altLang="en-US" b="1" i="0" u="none" strike="noStrike" dirty="0">
+                    <a:solidFill>
+                      <a:srgbClr val="7030A0"/>
+                    </a:solidFill>
+                    <a:ea typeface="Noto Sans SC"/>
+                    <a:cs typeface="Noto Sans SC"/>
+                    <a:sym typeface="Noto Sans SC"/>
+                  </a:rPr>
+                  <a:t>两个对象不同</a:t>
+                </a:r>
+                <a:r>
+                  <a:rPr lang="zh-CN" altLang="en-US" b="1" i="0" u="none" strike="noStrike" dirty="0">
+                    <a:ea typeface="Noto Sans SC"/>
+                    <a:cs typeface="Noto Sans SC"/>
+                    <a:sym typeface="Noto Sans SC"/>
+                  </a:rPr>
+                  <a:t>，但是</a:t>
+                </a:r>
+                <a:r>
+                  <a:rPr lang="zh-CN" altLang="en-US" b="1" i="0" u="none" strike="noStrike" dirty="0">
+                    <a:solidFill>
+                      <a:srgbClr val="7030A0"/>
+                    </a:solidFill>
+                    <a:ea typeface="Noto Sans SC"/>
+                    <a:cs typeface="Noto Sans SC"/>
+                    <a:sym typeface="Noto Sans SC"/>
+                  </a:rPr>
+                  <a:t>从结构上无法区分</a:t>
+                </a:r>
+                <a:r>
+                  <a:rPr lang="en-US" altLang="zh-CN" b="1" i="0" u="none" strike="noStrike" dirty="0">
+                    <a:solidFill>
+                      <a:srgbClr val="7030A0"/>
+                    </a:solidFill>
+                    <a:ea typeface="Noto Sans SC"/>
+                    <a:cs typeface="Noto Sans SC"/>
+                    <a:sym typeface="Noto Sans SC"/>
+                  </a:rPr>
+                  <a:t> </a:t>
+                </a:r>
+              </a:p>
+              <a:p>
+                <a:pPr indent="0">
+                  <a:lnSpc>
+                    <a:spcPct val="116666"/>
+                  </a:lnSpc>
+                  <a:defRPr/>
+                </a:pPr>
+                <a:r>
+                  <a:rPr lang="en-US" altLang="zh-CN" b="1" i="0" u="none" strike="noStrike" dirty="0">
+                    <a:solidFill>
+                      <a:srgbClr val="7030A0"/>
+                    </a:solidFill>
+                    <a:ea typeface="Noto Sans SC"/>
+                    <a:cs typeface="Noto Sans SC"/>
+                    <a:sym typeface="Noto Sans SC"/>
+                  </a:rPr>
+                  <a:t> </a:t>
+                </a:r>
+                <a14:m>
+                  <m:oMath xmlns:m="http://schemas.openxmlformats.org/officeDocument/2006/math">
+                    <m:r>
+                      <a:rPr lang="en-US" altLang="zh-CN" b="1" i="1" u="none" strike="noStrike" smtClean="0">
+                        <a:solidFill>
+                          <a:schemeClr val="tx1"/>
+                        </a:solidFill>
+                        <a:latin typeface="Cambria Math" panose="02040503050406030204" pitchFamily="18" charset="0"/>
+                        <a:ea typeface="Noto Sans SC"/>
+                        <a:cs typeface="Noto Sans SC"/>
+                        <a:sym typeface="Noto Sans SC"/>
+                      </a:rPr>
+                      <m:t>/</m:t>
+                    </m:r>
+                  </m:oMath>
+                </a14:m>
+                <a:r>
+                  <a:rPr lang="en-US" altLang="zh-CN" b="1" i="0" u="none" strike="noStrike" dirty="0">
+                    <a:solidFill>
+                      <a:schemeClr val="tx1"/>
+                    </a:solidFill>
+                    <a:ea typeface="Noto Sans SC"/>
+                    <a:cs typeface="Noto Sans SC"/>
+                    <a:sym typeface="Noto Sans SC"/>
+                  </a:rPr>
+                  <a:t> </a:t>
+                </a:r>
+                <a:r>
+                  <a:rPr lang="zh-CN" altLang="en-US" b="1" i="0" u="none" strike="noStrike" dirty="0">
+                    <a:solidFill>
+                      <a:schemeClr val="tx1"/>
+                    </a:solidFill>
+                    <a:ea typeface="Noto Sans SC"/>
+                    <a:cs typeface="Noto Sans SC"/>
+                    <a:sym typeface="Noto Sans SC"/>
+                  </a:rPr>
+                  <a:t>叫做商群，这里表示</a:t>
+                </a:r>
+                <a14:m>
+                  <m:oMath xmlns:m="http://schemas.openxmlformats.org/officeDocument/2006/math">
+                    <m:sSub>
+                      <m:sSubPr>
+                        <m:ctrlPr>
+                          <a:rPr lang="en-US" altLang="zh-CN" b="1" i="1" u="none" strike="noStrike" smtClean="0">
+                            <a:solidFill>
+                              <a:schemeClr val="tx1"/>
+                            </a:solidFill>
+                            <a:latin typeface="Cambria Math" panose="02040503050406030204" pitchFamily="18" charset="0"/>
+                            <a:ea typeface="Noto Sans SC"/>
+                            <a:cs typeface="Noto Sans SC"/>
+                            <a:sym typeface="Noto Sans SC"/>
+                          </a:rPr>
+                        </m:ctrlPr>
+                      </m:sSubPr>
+                      <m:e>
+                        <m:r>
+                          <a:rPr lang="en-US" altLang="zh-CN" b="1" i="0" u="none" strike="noStrike" smtClean="0">
+                            <a:solidFill>
+                              <a:schemeClr val="tx1"/>
+                            </a:solidFill>
+                            <a:latin typeface="Cambria Math" panose="02040503050406030204" pitchFamily="18" charset="0"/>
+                            <a:ea typeface="Noto Sans SC"/>
+                            <a:cs typeface="Noto Sans SC"/>
+                            <a:sym typeface="Noto Sans SC"/>
+                          </a:rPr>
+                          <m:t>𝐏</m:t>
+                        </m:r>
+                      </m:e>
+                      <m:sub>
+                        <m:r>
+                          <a:rPr lang="en-US" altLang="zh-CN" b="1" i="1" u="none" strike="noStrike" smtClean="0">
+                            <a:solidFill>
+                              <a:schemeClr val="tx1"/>
+                            </a:solidFill>
+                            <a:latin typeface="Cambria Math" panose="02040503050406030204" pitchFamily="18" charset="0"/>
+                            <a:ea typeface="Noto Sans SC"/>
+                            <a:cs typeface="Noto Sans SC"/>
+                            <a:sym typeface="Noto Sans SC"/>
+                          </a:rPr>
+                          <m:t>𝒏</m:t>
+                        </m:r>
+                      </m:sub>
+                    </m:sSub>
+                  </m:oMath>
+                </a14:m>
+                <a:r>
+                  <a:rPr lang="zh-CN" altLang="en-US" b="1" i="0" u="none" strike="noStrike" dirty="0">
+                    <a:solidFill>
+                      <a:schemeClr val="accent2"/>
+                    </a:solidFill>
+                    <a:ea typeface="Noto Sans SC"/>
+                    <a:cs typeface="Noto Sans SC"/>
+                    <a:sym typeface="Noto Sans SC"/>
+                  </a:rPr>
+                  <a:t>除以</a:t>
+                </a:r>
+                <a:r>
+                  <a:rPr lang="zh-CN" altLang="en-US" b="1" i="0" u="none" strike="noStrike" dirty="0">
+                    <a:solidFill>
+                      <a:schemeClr val="tx1"/>
+                    </a:solidFill>
+                    <a:ea typeface="Noto Sans SC"/>
+                    <a:cs typeface="Noto Sans SC"/>
+                    <a:sym typeface="Noto Sans SC"/>
+                  </a:rPr>
+                  <a:t>右侧相位因子集合生成的子群</a:t>
+                </a:r>
+                <a:endParaRPr lang="en-US" altLang="zh-CN" b="1" i="0" u="none" strike="noStrike" dirty="0">
+                  <a:solidFill>
+                    <a:schemeClr val="tx1"/>
+                  </a:solidFill>
+                  <a:ea typeface="Noto Sans SC"/>
+                  <a:cs typeface="Noto Sans SC"/>
+                  <a:sym typeface="Noto Sans SC"/>
+                </a:endParaRPr>
+              </a:p>
+              <a:p>
+                <a:pPr indent="0">
+                  <a:lnSpc>
+                    <a:spcPct val="116666"/>
+                  </a:lnSpc>
+                  <a:defRPr/>
+                </a:pPr>
+                <a:endParaRPr lang="en-US" altLang="zh-CN" b="1" dirty="0">
+                  <a:ea typeface="Noto Sans SC"/>
+                  <a:cs typeface="Noto Sans SC"/>
+                  <a:sym typeface="Noto Sans SC"/>
+                </a:endParaRPr>
+              </a:p>
+              <a:p>
+                <a:pPr indent="0">
+                  <a:lnSpc>
+                    <a:spcPct val="116666"/>
+                  </a:lnSpc>
+                  <a:defRPr/>
+                </a:pPr>
+                <a:endParaRPr lang="en-US" altLang="zh-CN" b="1" i="0" u="none" strike="noStrike" dirty="0">
+                  <a:ea typeface="Noto Sans SC"/>
+                  <a:cs typeface="Noto Sans SC"/>
+                  <a:sym typeface="Noto Sans SC"/>
+                </a:endParaRPr>
+              </a:p>
+              <a:p>
+                <a:pPr indent="0">
+                  <a:lnSpc>
+                    <a:spcPct val="116666"/>
+                  </a:lnSpc>
+                  <a:defRPr/>
+                </a:pPr>
+                <a:endParaRPr lang="en-US" altLang="zh-CN" b="1" dirty="0">
+                  <a:ea typeface="Noto Sans SC"/>
+                  <a:cs typeface="Noto Sans SC"/>
+                  <a:sym typeface="Noto Sans SC"/>
+                </a:endParaRPr>
+              </a:p>
+              <a:p>
+                <a:pPr indent="0">
+                  <a:lnSpc>
+                    <a:spcPct val="116666"/>
+                  </a:lnSpc>
+                  <a:defRPr/>
+                </a:pPr>
+                <a:endParaRPr lang="en-US" altLang="zh-CN" b="1" i="0" u="none" strike="noStrike" dirty="0">
+                  <a:ea typeface="Noto Sans SC"/>
+                  <a:cs typeface="Noto Sans SC"/>
+                  <a:sym typeface="Noto Sans SC"/>
+                </a:endParaRPr>
+              </a:p>
+              <a:p>
+                <a:pPr indent="0">
+                  <a:lnSpc>
+                    <a:spcPct val="116666"/>
+                  </a:lnSpc>
+                  <a:defRPr/>
+                </a:pPr>
+                <a:endParaRPr lang="en-US" altLang="zh-CN" b="1" i="0" u="none" strike="noStrike" dirty="0">
+                  <a:ea typeface="Noto Sans SC"/>
+                  <a:cs typeface="Noto Sans SC"/>
+                  <a:sym typeface="Noto Sans SC"/>
+                </a:endParaRPr>
+              </a:p>
+            </p:txBody>
+          </p:sp>
+        </mc:Choice>
+        <mc:Fallback xmlns="">
+          <p:sp>
+            <p:nvSpPr>
+              <p:cNvPr id="5" name="AutoShape 11">
+                <a:extLst>
+                  <a:ext uri="{FF2B5EF4-FFF2-40B4-BE49-F238E27FC236}">
+                    <a16:creationId xmlns:a16="http://schemas.microsoft.com/office/drawing/2014/main" id="{FBD89B2D-C61C-6008-81C8-8A09F8AEE66C}"/>
+                  </a:ext>
+                </a:extLst>
+              </p:cNvPr>
+              <p:cNvSpPr>
+                <a:spLocks noRot="1" noChangeAspect="1" noMove="1" noResize="1" noEditPoints="1" noAdjustHandles="1" noChangeArrowheads="1" noChangeShapeType="1" noTextEdit="1"/>
+              </p:cNvSpPr>
+              <p:nvPr/>
+            </p:nvSpPr>
+            <p:spPr>
+              <a:xfrm>
+                <a:off x="622444" y="1776548"/>
+                <a:ext cx="6836445" cy="6518366"/>
+              </a:xfrm>
+              <a:prstGeom prst="rect">
+                <a:avLst/>
+              </a:prstGeom>
+              <a:blipFill>
+                <a:blip r:embed="rId3"/>
+                <a:stretch>
+                  <a:fillRect l="-2050" r="-2941"/>
+                </a:stretch>
+              </a:blipFill>
+              <a:ln w="12700" cap="flat" cmpd="sng">
+                <a:noFill/>
+                <a:prstDash val="solid"/>
+                <a:round/>
+              </a:ln>
+            </p:spPr>
+            <p:txBody>
+              <a:bodyPr/>
+              <a:lstStyle/>
+              <a:p>
+                <a:r>
+                  <a:rPr lang="zh-CN" altLang="en-US">
+                    <a:noFill/>
+                  </a:rPr>
+                  <a:t> </a:t>
+                </a:r>
+              </a:p>
+            </p:txBody>
+          </p:sp>
+        </mc:Fallback>
+      </mc:AlternateContent>
+      <mc:AlternateContent xmlns:mc="http://schemas.openxmlformats.org/markup-compatibility/2006" xmlns:a14="http://schemas.microsoft.com/office/drawing/2010/main">
+        <mc:Choice Requires="a14">
+          <p:sp>
+            <p:nvSpPr>
+              <p:cNvPr id="6" name="文本框 5">
+                <a:extLst>
+                  <a:ext uri="{FF2B5EF4-FFF2-40B4-BE49-F238E27FC236}">
+                    <a16:creationId xmlns:a16="http://schemas.microsoft.com/office/drawing/2014/main" id="{8EBA2AB3-7A62-C84E-FA07-C16C690B38E8}"/>
+                  </a:ext>
+                </a:extLst>
+              </p:cNvPr>
+              <p:cNvSpPr txBox="1"/>
+              <p:nvPr/>
+            </p:nvSpPr>
+            <p:spPr>
+              <a:xfrm>
+                <a:off x="8598625" y="2197826"/>
+                <a:ext cx="2890471" cy="553998"/>
+              </a:xfrm>
+              <a:prstGeom prst="rect">
+                <a:avLst/>
+              </a:prstGeom>
+              <a:noFill/>
+            </p:spPr>
+            <p:txBody>
+              <a:bodyPr wrap="none" lIns="0" tIns="0" rIns="0" bIns="0" rtlCol="0">
+                <a:spAutoFit/>
+              </a:bodyPr>
+              <a:lstStyle/>
+              <a:p>
+                <a:pPr/>
+                <a14:m>
+                  <m:oMathPara xmlns:m="http://schemas.openxmlformats.org/officeDocument/2006/math">
+                    <m:oMathParaPr>
+                      <m:jc m:val="centerGroup"/>
+                    </m:oMathParaPr>
+                    <m:oMath xmlns:m="http://schemas.openxmlformats.org/officeDocument/2006/math">
+                      <m:sSub>
+                        <m:sSubPr>
+                          <m:ctrlPr>
+                            <a:rPr lang="en-US" altLang="zh-CN" b="0" i="1" smtClean="0">
+                              <a:latin typeface="Cambria Math" panose="02040503050406030204" pitchFamily="18" charset="0"/>
+                            </a:rPr>
+                          </m:ctrlPr>
+                        </m:sSubPr>
+                        <m:e>
+                          <m:r>
+                            <m:rPr>
+                              <m:sty m:val="p"/>
+                            </m:rPr>
+                            <a:rPr lang="en-US" altLang="zh-CN" b="0" i="0" smtClean="0">
+                              <a:latin typeface="Cambria Math" panose="02040503050406030204" pitchFamily="18" charset="0"/>
+                            </a:rPr>
+                            <m:t>P</m:t>
+                          </m:r>
+                        </m:e>
+                        <m:sub>
+                          <m:r>
+                            <a:rPr lang="en-US" altLang="zh-CN" b="0" i="1" smtClean="0">
+                              <a:latin typeface="Cambria Math" panose="02040503050406030204" pitchFamily="18" charset="0"/>
+                            </a:rPr>
+                            <m:t>𝑛</m:t>
+                          </m:r>
+                        </m:sub>
+                      </m:sSub>
+                      <m:r>
+                        <a:rPr lang="en-US" altLang="zh-CN" b="0" i="1" smtClean="0">
+                          <a:latin typeface="Cambria Math" panose="02040503050406030204" pitchFamily="18" charset="0"/>
+                        </a:rPr>
+                        <m:t>=</m:t>
+                      </m:r>
+                      <m:r>
+                        <a:rPr lang="en-US" altLang="zh-CN" b="0" i="1" smtClean="0">
+                          <a:latin typeface="Cambria Math" panose="02040503050406030204" pitchFamily="18" charset="0"/>
+                        </a:rPr>
+                        <m:t>𝑐</m:t>
+                      </m:r>
+                      <m:sSub>
+                        <m:sSubPr>
+                          <m:ctrlPr>
+                            <a:rPr lang="en-US" altLang="zh-CN" b="0" i="1" smtClean="0">
+                              <a:latin typeface="Cambria Math" panose="02040503050406030204" pitchFamily="18" charset="0"/>
+                            </a:rPr>
+                          </m:ctrlPr>
+                        </m:sSubPr>
+                        <m:e>
+                          <m:d>
+                            <m:dPr>
+                              <m:ctrlPr>
+                                <a:rPr lang="en-US" altLang="zh-CN" b="0" i="1" smtClean="0">
+                                  <a:latin typeface="Cambria Math" panose="02040503050406030204" pitchFamily="18" charset="0"/>
+                                </a:rPr>
+                              </m:ctrlPr>
+                            </m:dPr>
+                            <m:e>
+                              <m:r>
+                                <a:rPr lang="en-US" altLang="zh-CN" b="0" i="1" smtClean="0">
+                                  <a:latin typeface="Cambria Math" panose="02040503050406030204" pitchFamily="18" charset="0"/>
+                                </a:rPr>
+                                <m:t>𝐼</m:t>
+                              </m:r>
+                              <m:r>
+                                <a:rPr lang="en-US" altLang="zh-CN" b="0" i="1" smtClean="0">
+                                  <a:latin typeface="Cambria Math" panose="02040503050406030204" pitchFamily="18" charset="0"/>
+                                </a:rPr>
+                                <m:t>⊗</m:t>
+                              </m:r>
+                              <m:r>
+                                <a:rPr lang="en-US" altLang="zh-CN" b="0" i="1" smtClean="0">
+                                  <a:latin typeface="Cambria Math" panose="02040503050406030204" pitchFamily="18" charset="0"/>
+                                </a:rPr>
+                                <m:t>𝑋</m:t>
+                              </m:r>
+                              <m:r>
+                                <a:rPr lang="en-US" altLang="zh-CN" b="0" i="1" smtClean="0">
+                                  <a:latin typeface="Cambria Math" panose="02040503050406030204" pitchFamily="18" charset="0"/>
+                                </a:rPr>
+                                <m:t>⊗</m:t>
+                              </m:r>
+                              <m:r>
+                                <a:rPr lang="en-US" altLang="zh-CN" b="0" i="1" smtClean="0">
+                                  <a:latin typeface="Cambria Math" panose="02040503050406030204" pitchFamily="18" charset="0"/>
+                                </a:rPr>
+                                <m:t>𝑌</m:t>
+                              </m:r>
+                              <m:r>
+                                <a:rPr lang="en-US" altLang="zh-CN" b="0" i="1" smtClean="0">
+                                  <a:latin typeface="Cambria Math" panose="02040503050406030204" pitchFamily="18" charset="0"/>
+                                </a:rPr>
+                                <m:t>⊗</m:t>
+                              </m:r>
+                              <m:r>
+                                <a:rPr lang="en-US" altLang="zh-CN" b="0" i="1" smtClean="0">
+                                  <a:latin typeface="Cambria Math" panose="02040503050406030204" pitchFamily="18" charset="0"/>
+                                </a:rPr>
+                                <m:t>𝑍</m:t>
+                              </m:r>
+                              <m:r>
+                                <a:rPr lang="en-US" altLang="zh-CN" b="0" i="1" smtClean="0">
+                                  <a:latin typeface="Cambria Math" panose="02040503050406030204" pitchFamily="18" charset="0"/>
+                                </a:rPr>
+                                <m:t>…</m:t>
+                              </m:r>
+                            </m:e>
+                          </m:d>
+                        </m:e>
+                        <m:sub>
+                          <m:r>
+                            <a:rPr lang="en-US" altLang="zh-CN" b="0" i="1" smtClean="0">
+                              <a:latin typeface="Cambria Math" panose="02040503050406030204" pitchFamily="18" charset="0"/>
+                            </a:rPr>
+                            <m:t>𝑛</m:t>
+                          </m:r>
+                        </m:sub>
+                      </m:sSub>
+                    </m:oMath>
+                  </m:oMathPara>
+                </a14:m>
+                <a:endParaRPr lang="en-US" altLang="zh-CN" dirty="0"/>
+              </a:p>
+              <a:p>
+                <a:pPr/>
+                <a14:m>
+                  <m:oMathPara xmlns:m="http://schemas.openxmlformats.org/officeDocument/2006/math">
+                    <m:oMathParaPr>
+                      <m:jc m:val="centerGroup"/>
+                    </m:oMathParaPr>
+                    <m:oMath xmlns:m="http://schemas.openxmlformats.org/officeDocument/2006/math">
+                      <m:r>
+                        <a:rPr lang="en-US" altLang="zh-CN" i="1" dirty="0">
+                          <a:latin typeface="Cambria Math" panose="02040503050406030204" pitchFamily="18" charset="0"/>
+                        </a:rPr>
+                        <m:t>𝑐</m:t>
+                      </m:r>
+                      <m:r>
+                        <a:rPr lang="en-US" altLang="zh-CN" b="0" i="0" dirty="0" smtClean="0">
+                          <a:latin typeface="Cambria Math" panose="02040503050406030204" pitchFamily="18" charset="0"/>
+                        </a:rPr>
+                        <m:t>={</m:t>
+                      </m:r>
+                      <m:r>
+                        <a:rPr lang="en-US" altLang="zh-CN" b="0" i="0" dirty="0" smtClean="0">
+                          <a:latin typeface="Cambria Math" panose="02040503050406030204" pitchFamily="18" charset="0"/>
+                        </a:rPr>
+                        <m:t>1</m:t>
+                      </m:r>
+                      <m:r>
+                        <a:rPr lang="en-US" altLang="zh-CN" b="0" i="0" dirty="0" smtClean="0">
+                          <a:latin typeface="Cambria Math" panose="02040503050406030204" pitchFamily="18" charset="0"/>
+                        </a:rPr>
+                        <m:t>, −</m:t>
+                      </m:r>
+                      <m:r>
+                        <a:rPr lang="en-US" altLang="zh-CN" b="0" i="0" dirty="0" smtClean="0">
+                          <a:latin typeface="Cambria Math" panose="02040503050406030204" pitchFamily="18" charset="0"/>
+                        </a:rPr>
+                        <m:t>1</m:t>
+                      </m:r>
+                      <m:r>
+                        <a:rPr lang="en-US" altLang="zh-CN" b="0" i="0" dirty="0" smtClean="0">
+                          <a:latin typeface="Cambria Math" panose="02040503050406030204" pitchFamily="18" charset="0"/>
+                        </a:rPr>
+                        <m:t>,</m:t>
+                      </m:r>
+                      <m:r>
+                        <a:rPr lang="en-US" altLang="zh-CN" b="0" i="1" dirty="0" smtClean="0">
+                          <a:latin typeface="Cambria Math" panose="02040503050406030204" pitchFamily="18" charset="0"/>
+                        </a:rPr>
+                        <m:t>𝑖</m:t>
+                      </m:r>
+                      <m:r>
+                        <a:rPr lang="en-US" altLang="zh-CN" b="0" i="1" dirty="0" smtClean="0">
+                          <a:latin typeface="Cambria Math" panose="02040503050406030204" pitchFamily="18" charset="0"/>
+                        </a:rPr>
+                        <m:t>,−</m:t>
+                      </m:r>
+                      <m:r>
+                        <a:rPr lang="en-US" altLang="zh-CN" b="0" i="1" dirty="0" smtClean="0">
+                          <a:latin typeface="Cambria Math" panose="02040503050406030204" pitchFamily="18" charset="0"/>
+                        </a:rPr>
+                        <m:t>𝑖</m:t>
+                      </m:r>
+                      <m:r>
+                        <a:rPr lang="en-US" altLang="zh-CN" b="0" i="0" dirty="0" smtClean="0">
+                          <a:latin typeface="Cambria Math" panose="02040503050406030204" pitchFamily="18" charset="0"/>
+                        </a:rPr>
+                        <m:t>}</m:t>
+                      </m:r>
+                    </m:oMath>
+                  </m:oMathPara>
+                </a14:m>
+                <a:endParaRPr lang="zh-CN" altLang="en-US" dirty="0"/>
+              </a:p>
+            </p:txBody>
+          </p:sp>
+        </mc:Choice>
+        <mc:Fallback xmlns="">
+          <p:sp>
+            <p:nvSpPr>
+              <p:cNvPr id="6" name="文本框 5">
+                <a:extLst>
+                  <a:ext uri="{FF2B5EF4-FFF2-40B4-BE49-F238E27FC236}">
+                    <a16:creationId xmlns:a16="http://schemas.microsoft.com/office/drawing/2014/main" id="{8EBA2AB3-7A62-C84E-FA07-C16C690B38E8}"/>
+                  </a:ext>
+                </a:extLst>
+              </p:cNvPr>
+              <p:cNvSpPr txBox="1">
+                <a:spLocks noRot="1" noChangeAspect="1" noMove="1" noResize="1" noEditPoints="1" noAdjustHandles="1" noChangeArrowheads="1" noChangeShapeType="1" noTextEdit="1"/>
+              </p:cNvSpPr>
+              <p:nvPr/>
+            </p:nvSpPr>
+            <p:spPr>
+              <a:xfrm>
+                <a:off x="8598625" y="2197826"/>
+                <a:ext cx="2890471" cy="553998"/>
+              </a:xfrm>
+              <a:prstGeom prst="rect">
+                <a:avLst/>
+              </a:prstGeom>
+              <a:blipFill>
+                <a:blip r:embed="rId4"/>
+                <a:stretch>
+                  <a:fillRect t="-1111" b="-18889"/>
+                </a:stretch>
+              </a:blipFill>
+            </p:spPr>
+            <p:txBody>
+              <a:bodyPr/>
+              <a:lstStyle/>
+              <a:p>
+                <a:r>
+                  <a:rPr lang="zh-CN" altLang="en-US">
+                    <a:noFill/>
+                  </a:rPr>
+                  <a:t> </a:t>
+                </a:r>
+              </a:p>
+            </p:txBody>
+          </p:sp>
+        </mc:Fallback>
+      </mc:AlternateContent>
+      <mc:AlternateContent xmlns:mc="http://schemas.openxmlformats.org/markup-compatibility/2006" xmlns:a14="http://schemas.microsoft.com/office/drawing/2010/main">
+        <mc:Choice Requires="a14">
+          <p:sp>
+            <p:nvSpPr>
+              <p:cNvPr id="13" name="文本框 12">
+                <a:extLst>
+                  <a:ext uri="{FF2B5EF4-FFF2-40B4-BE49-F238E27FC236}">
+                    <a16:creationId xmlns:a16="http://schemas.microsoft.com/office/drawing/2014/main" id="{A792D2AC-B393-639A-34DE-2EAA3500CB28}"/>
+                  </a:ext>
+                </a:extLst>
+              </p:cNvPr>
+              <p:cNvSpPr txBox="1"/>
+              <p:nvPr/>
+            </p:nvSpPr>
+            <p:spPr>
+              <a:xfrm>
+                <a:off x="8970916" y="4718957"/>
+                <a:ext cx="2233368" cy="284501"/>
+              </a:xfrm>
+              <a:prstGeom prst="rect">
+                <a:avLst/>
+              </a:prstGeom>
+              <a:noFill/>
+            </p:spPr>
+            <p:txBody>
+              <a:bodyPr wrap="none" lIns="0" tIns="0" rIns="0" bIns="0" rtlCol="0">
+                <a:spAutoFit/>
+              </a:bodyPr>
+              <a:lstStyle/>
+              <a:p>
+                <a:pPr/>
+                <a14:m>
+                  <m:oMathPara xmlns:m="http://schemas.openxmlformats.org/officeDocument/2006/math">
+                    <m:oMathParaPr>
+                      <m:jc m:val="centerGroup"/>
+                    </m:oMathParaPr>
+                    <m:oMath xmlns:m="http://schemas.openxmlformats.org/officeDocument/2006/math">
+                      <m:acc>
+                        <m:accPr>
+                          <m:chr m:val="̂"/>
+                          <m:ctrlPr>
+                            <a:rPr lang="en-US" altLang="zh-CN" b="0" i="1" smtClean="0">
+                              <a:latin typeface="Cambria Math" panose="02040503050406030204" pitchFamily="18" charset="0"/>
+                            </a:rPr>
+                          </m:ctrlPr>
+                        </m:accPr>
+                        <m:e>
+                          <m:sSub>
+                            <m:sSubPr>
+                              <m:ctrlPr>
+                                <a:rPr lang="en-US" altLang="zh-CN" b="0" i="1" smtClean="0">
+                                  <a:latin typeface="Cambria Math" panose="02040503050406030204" pitchFamily="18" charset="0"/>
+                                </a:rPr>
+                              </m:ctrlPr>
+                            </m:sSubPr>
+                            <m:e>
+                              <m:r>
+                                <m:rPr>
+                                  <m:sty m:val="p"/>
+                                </m:rPr>
+                                <a:rPr lang="en-US" altLang="zh-CN" b="0" i="0" smtClean="0">
+                                  <a:latin typeface="Cambria Math" panose="02040503050406030204" pitchFamily="18" charset="0"/>
+                                </a:rPr>
+                                <m:t>P</m:t>
+                              </m:r>
+                            </m:e>
+                            <m:sub>
+                              <m:r>
+                                <a:rPr lang="en-US" altLang="zh-CN" b="0" i="1" smtClean="0">
+                                  <a:latin typeface="Cambria Math" panose="02040503050406030204" pitchFamily="18" charset="0"/>
+                                </a:rPr>
+                                <m:t>𝑛</m:t>
+                              </m:r>
+                            </m:sub>
+                          </m:sSub>
+                        </m:e>
+                      </m:acc>
+                      <m:r>
+                        <a:rPr lang="en-US" altLang="zh-CN" b="0" i="1" smtClean="0">
+                          <a:latin typeface="Cambria Math" panose="02040503050406030204" pitchFamily="18" charset="0"/>
+                        </a:rPr>
+                        <m:t>≅</m:t>
+                      </m:r>
+                      <m:sSub>
+                        <m:sSubPr>
+                          <m:ctrlPr>
+                            <a:rPr lang="en-US" altLang="zh-CN" b="0" i="1" smtClean="0">
+                              <a:latin typeface="Cambria Math" panose="02040503050406030204" pitchFamily="18" charset="0"/>
+                            </a:rPr>
+                          </m:ctrlPr>
+                        </m:sSubPr>
+                        <m:e>
+                          <m:r>
+                            <a:rPr lang="en-US" altLang="zh-CN" b="0" i="1" smtClean="0">
+                              <a:latin typeface="Cambria Math" panose="02040503050406030204" pitchFamily="18" charset="0"/>
+                            </a:rPr>
+                            <m:t>𝑃</m:t>
+                          </m:r>
+                        </m:e>
+                        <m:sub>
+                          <m:r>
+                            <a:rPr lang="en-US" altLang="zh-CN" b="0" i="1" smtClean="0">
+                              <a:latin typeface="Cambria Math" panose="02040503050406030204" pitchFamily="18" charset="0"/>
+                            </a:rPr>
+                            <m:t>𝑛</m:t>
+                          </m:r>
+                        </m:sub>
+                      </m:sSub>
+                      <m:r>
+                        <a:rPr lang="en-US" altLang="zh-CN" b="0" i="1" smtClean="0">
+                          <a:latin typeface="Cambria Math" panose="02040503050406030204" pitchFamily="18" charset="0"/>
+                        </a:rPr>
+                        <m:t>/{</m:t>
+                      </m:r>
+                      <m:r>
+                        <a:rPr lang="en-US" altLang="zh-CN" b="0" i="1" smtClean="0">
+                          <a:latin typeface="Cambria Math" panose="02040503050406030204" pitchFamily="18" charset="0"/>
+                        </a:rPr>
+                        <m:t>𝐼</m:t>
+                      </m:r>
+                      <m:r>
+                        <a:rPr lang="en-US" altLang="zh-CN" b="0" i="1" smtClean="0">
+                          <a:latin typeface="Cambria Math" panose="02040503050406030204" pitchFamily="18" charset="0"/>
+                        </a:rPr>
+                        <m:t>, </m:t>
+                      </m:r>
+                      <m:r>
+                        <a:rPr lang="en-US" altLang="zh-CN" b="0" i="1" smtClean="0">
+                          <a:latin typeface="Cambria Math" panose="02040503050406030204" pitchFamily="18" charset="0"/>
+                        </a:rPr>
+                        <m:t>𝑖𝐼</m:t>
+                      </m:r>
+                      <m:r>
+                        <a:rPr lang="en-US" altLang="zh-CN" b="0" i="1" smtClean="0">
+                          <a:latin typeface="Cambria Math" panose="02040503050406030204" pitchFamily="18" charset="0"/>
+                        </a:rPr>
+                        <m:t>,−</m:t>
+                      </m:r>
+                      <m:r>
+                        <a:rPr lang="en-US" altLang="zh-CN" b="0" i="1" smtClean="0">
+                          <a:latin typeface="Cambria Math" panose="02040503050406030204" pitchFamily="18" charset="0"/>
+                        </a:rPr>
+                        <m:t>𝐼</m:t>
+                      </m:r>
+                      <m:r>
+                        <a:rPr lang="en-US" altLang="zh-CN" b="0" i="1" smtClean="0">
+                          <a:latin typeface="Cambria Math" panose="02040503050406030204" pitchFamily="18" charset="0"/>
+                        </a:rPr>
+                        <m:t>,−</m:t>
+                      </m:r>
+                      <m:r>
+                        <a:rPr lang="en-US" altLang="zh-CN" b="0" i="1" smtClean="0">
+                          <a:latin typeface="Cambria Math" panose="02040503050406030204" pitchFamily="18" charset="0"/>
+                        </a:rPr>
+                        <m:t>𝑖𝐼</m:t>
+                      </m:r>
+                      <m:r>
+                        <a:rPr lang="en-US" altLang="zh-CN" b="0" i="1" smtClean="0">
+                          <a:latin typeface="Cambria Math" panose="02040503050406030204" pitchFamily="18" charset="0"/>
+                        </a:rPr>
+                        <m:t>}</m:t>
+                      </m:r>
+                    </m:oMath>
+                  </m:oMathPara>
+                </a14:m>
+                <a:endParaRPr lang="zh-CN" altLang="en-US" dirty="0"/>
+              </a:p>
+            </p:txBody>
+          </p:sp>
+        </mc:Choice>
+        <mc:Fallback xmlns="">
+          <p:sp>
+            <p:nvSpPr>
+              <p:cNvPr id="13" name="文本框 12">
+                <a:extLst>
+                  <a:ext uri="{FF2B5EF4-FFF2-40B4-BE49-F238E27FC236}">
+                    <a16:creationId xmlns:a16="http://schemas.microsoft.com/office/drawing/2014/main" id="{A792D2AC-B393-639A-34DE-2EAA3500CB28}"/>
+                  </a:ext>
+                </a:extLst>
+              </p:cNvPr>
+              <p:cNvSpPr txBox="1">
+                <a:spLocks noRot="1" noChangeAspect="1" noMove="1" noResize="1" noEditPoints="1" noAdjustHandles="1" noChangeArrowheads="1" noChangeShapeType="1" noTextEdit="1"/>
+              </p:cNvSpPr>
+              <p:nvPr/>
+            </p:nvSpPr>
+            <p:spPr>
+              <a:xfrm>
+                <a:off x="8970916" y="4718957"/>
+                <a:ext cx="2233368" cy="284501"/>
+              </a:xfrm>
+              <a:prstGeom prst="rect">
+                <a:avLst/>
+              </a:prstGeom>
+              <a:blipFill>
+                <a:blip r:embed="rId5"/>
+                <a:stretch>
+                  <a:fillRect l="-1913" t="-17021" r="-3279" b="-38298"/>
+                </a:stretch>
+              </a:blipFill>
+            </p:spPr>
+            <p:txBody>
+              <a:bodyPr/>
+              <a:lstStyle/>
+              <a:p>
+                <a:r>
+                  <a:rPr lang="zh-CN" altLang="en-US">
+                    <a:noFill/>
+                  </a:rPr>
+                  <a:t> </a:t>
+                </a:r>
+              </a:p>
+            </p:txBody>
+          </p:sp>
+        </mc:Fallback>
+      </mc:AlternateContent>
     </p:spTree>
     <p:extLst>
       <p:ext uri="{BB962C8B-B14F-4D97-AF65-F5344CB8AC3E}">
-        <p14:creationId xmlns:p14="http://schemas.microsoft.com/office/powerpoint/2010/main" val="3763458054"/>
+        <p14:creationId xmlns:p14="http://schemas.microsoft.com/office/powerpoint/2010/main" val="3070460754"/>
       </p:ext>
     </p:extLst>
   </p:cSld>
@@ -29569,7 +32836,7 @@
         <p:cNvPr id="1" name="">
           <a:extLst>
             <a:ext uri="{FF2B5EF4-FFF2-40B4-BE49-F238E27FC236}">
-              <a16:creationId xmlns:a16="http://schemas.microsoft.com/office/drawing/2014/main" id="{FB630AD3-4AAF-F438-5B11-8F869AC2A4F4}"/>
+              <a16:creationId xmlns:a16="http://schemas.microsoft.com/office/drawing/2014/main" id="{27E3875A-F27F-01B1-8B00-4B566541FCD5}"/>
             </a:ext>
           </a:extLst>
         </p:cNvPr>
@@ -29586,99 +32853,125 @@
       </p:grpSpPr>
       <p:sp>
         <p:nvSpPr>
-          <p:cNvPr id="2" name="AutoShape 2">
-            <a:extLst>
-              <a:ext uri="{FF2B5EF4-FFF2-40B4-BE49-F238E27FC236}">
-                <a16:creationId xmlns:a16="http://schemas.microsoft.com/office/drawing/2014/main" id="{C94D28FD-A00C-F0E9-DCB2-F8E072B35C44}"/>
-              </a:ext>
-            </a:extLst>
-          </p:cNvPr>
-          <p:cNvSpPr/>
+          <p:cNvPr id="2" name="TextBox 1">
+            <a:extLst>
+              <a:ext uri="{FF2B5EF4-FFF2-40B4-BE49-F238E27FC236}">
+                <a16:creationId xmlns:a16="http://schemas.microsoft.com/office/drawing/2014/main" id="{E316B4D6-4958-9425-5A60-B27D9EDEC956}"/>
+              </a:ext>
+            </a:extLst>
+          </p:cNvPr>
+          <p:cNvSpPr txBox="1"/>
           <p:nvPr/>
         </p:nvSpPr>
         <p:spPr>
           <a:xfrm>
             <a:off x="762000" y="635000"/>
-            <a:ext cx="10668000" cy="635000"/>
+            <a:ext cx="10668000" cy="571500"/>
           </a:xfrm>
           <a:prstGeom prst="rect">
             <a:avLst/>
           </a:prstGeom>
           <a:noFill/>
-          <a:ln w="12700" cap="flat" cmpd="sng">
-            <a:noFill/>
-            <a:prstDash val="solid"/>
-            <a:round/>
-          </a:ln>
-        </p:spPr>
-        <p:txBody>
-          <a:bodyPr vert="horz" wrap="square" lIns="0" tIns="0" rIns="0" bIns="0" rtlCol="0" anchor="ctr" anchorCtr="0"/>
+        </p:spPr>
+        <p:txBody>
+          <a:bodyPr wrap="square">
+            <a:spAutoFit/>
+          </a:bodyPr>
           <a:lstStyle/>
           <a:p>
-            <a:pPr indent="0" algn="l">
-              <a:lnSpc>
-                <a:spcPct val="125000"/>
-              </a:lnSpc>
-              <a:defRPr/>
-            </a:pPr>
-            <a:r>
-              <a:rPr lang="en-US" sz="3200" b="1" i="0" u="none" strike="noStrike" dirty="0">
+            <a:pPr algn="l"/>
+            <a:r>
+              <a:rPr sz="3200" b="1">
                 <a:solidFill>
                   <a:srgbClr val="333333"/>
                 </a:solidFill>
                 <a:latin typeface="Noto Sans SC"/>
-                <a:ea typeface="Noto Sans SC"/>
-                <a:cs typeface="Noto Sans SC"/>
-                <a:sym typeface="Noto Sans SC"/>
-              </a:rPr>
-              <a:t>0</a:t>
-            </a:r>
-            <a:r>
-              <a:rPr lang="en-US" sz="3200" b="1" dirty="0">
-                <a:solidFill>
-                  <a:srgbClr val="333333"/>
+              </a:rPr>
+              <a:t>04  稳定子</a:t>
+            </a:r>
+          </a:p>
+        </p:txBody>
+      </p:sp>
+      <p:sp>
+        <p:nvSpPr>
+          <p:cNvPr id="3" name="TextBox 2">
+            <a:extLst>
+              <a:ext uri="{FF2B5EF4-FFF2-40B4-BE49-F238E27FC236}">
+                <a16:creationId xmlns:a16="http://schemas.microsoft.com/office/drawing/2014/main" id="{42E13249-4604-1136-5FCA-11E7D960CB37}"/>
+              </a:ext>
+            </a:extLst>
+          </p:cNvPr>
+          <p:cNvSpPr txBox="1"/>
+          <p:nvPr/>
+        </p:nvSpPr>
+        <p:spPr>
+          <a:xfrm>
+            <a:off x="762000" y="1397000"/>
+            <a:ext cx="10668000" cy="444500"/>
+          </a:xfrm>
+          <a:prstGeom prst="rect">
+            <a:avLst/>
+          </a:prstGeom>
+          <a:noFill/>
+        </p:spPr>
+        <p:txBody>
+          <a:bodyPr wrap="square">
+            <a:spAutoFit/>
+          </a:bodyPr>
+          <a:lstStyle/>
+          <a:p>
+            <a:pPr algn="l"/>
+            <a:r>
+              <a:rPr sz="2200" b="1" dirty="0">
+                <a:solidFill>
+                  <a:srgbClr val="666666"/>
                 </a:solidFill>
                 <a:latin typeface="Noto Sans SC"/>
-                <a:ea typeface="Noto Sans SC"/>
-                <a:cs typeface="Noto Sans SC"/>
-                <a:sym typeface="Noto Sans SC"/>
-              </a:rPr>
-              <a:t>4</a:t>
-            </a:r>
-            <a:r>
-              <a:rPr lang="en-US" sz="3200" b="1" i="0" u="none" strike="noStrike" dirty="0">
-                <a:solidFill>
-                  <a:srgbClr val="333333"/>
+              </a:rPr>
+              <a:t>4.</a:t>
+            </a:r>
+            <a:r>
+              <a:rPr lang="en-US" sz="2200" b="1" dirty="0">
+                <a:solidFill>
+                  <a:srgbClr val="666666"/>
                 </a:solidFill>
                 <a:latin typeface="Noto Sans SC"/>
-                <a:ea typeface="Noto Sans SC"/>
-                <a:cs typeface="Noto Sans SC"/>
-                <a:sym typeface="Noto Sans SC"/>
-              </a:rPr>
-              <a:t>  </a:t>
-            </a:r>
-            <a:r>
-              <a:rPr lang="zh-CN" altLang="en-US" sz="3200" b="1" i="0" u="none" strike="noStrike" dirty="0">
-                <a:solidFill>
-                  <a:srgbClr val="333333"/>
+              </a:rPr>
+              <a:t>6</a:t>
+            </a:r>
+            <a:r>
+              <a:rPr sz="2200" b="1" dirty="0">
+                <a:solidFill>
+                  <a:srgbClr val="666666"/>
                 </a:solidFill>
                 <a:latin typeface="Noto Sans SC"/>
-                <a:ea typeface="Noto Sans SC"/>
-                <a:cs typeface="Noto Sans SC"/>
-                <a:sym typeface="Noto Sans SC"/>
-              </a:rPr>
-              <a:t>稳定子</a:t>
-            </a:r>
-            <a:endParaRPr lang="en-US" sz="1100" dirty="0"/>
+              </a:rPr>
+              <a:t> </a:t>
+            </a:r>
+            <a:r>
+              <a:rPr lang="zh-CN" altLang="en-US" sz="2200" b="1" dirty="0">
+                <a:solidFill>
+                  <a:srgbClr val="666666"/>
+                </a:solidFill>
+                <a:latin typeface="Noto Sans SC"/>
+              </a:rPr>
+              <a:t>稳定子定义及其相关性质</a:t>
+            </a:r>
+            <a:endParaRPr sz="2200" b="1" dirty="0">
+              <a:solidFill>
+                <a:srgbClr val="666666"/>
+              </a:solidFill>
+              <a:latin typeface="Noto Sans SC"/>
+            </a:endParaRPr>
           </a:p>
         </p:txBody>
       </p:sp>
       <p:cxnSp>
         <p:nvCxnSpPr>
-          <p:cNvPr id="4" name="直接连接符 3">
-            <a:extLst>
-              <a:ext uri="{FF2B5EF4-FFF2-40B4-BE49-F238E27FC236}">
-                <a16:creationId xmlns:a16="http://schemas.microsoft.com/office/drawing/2014/main" id="{CA0FFC55-3315-F53C-0358-719D7F1181BD}"/>
+          <p:cNvPr id="8" name="直接连接符 7">
+            <a:extLst>
+              <a:ext uri="{FF2B5EF4-FFF2-40B4-BE49-F238E27FC236}">
+                <a16:creationId xmlns:a16="http://schemas.microsoft.com/office/drawing/2014/main" id="{F7B3FE55-0189-9BF6-4CA7-6BD120C7DCF5}"/>
               </a:ext>
             </a:extLst>
           </p:cNvPr>
@@ -29718,12 +33011,2983 @@
           </a:fontRef>
         </p:style>
       </p:cxnSp>
-      <p:sp>
-        <p:nvSpPr>
-          <p:cNvPr id="3" name="AutoShape 3">
-            <a:extLst>
-              <a:ext uri="{FF2B5EF4-FFF2-40B4-BE49-F238E27FC236}">
-                <a16:creationId xmlns:a16="http://schemas.microsoft.com/office/drawing/2014/main" id="{F02DC376-677A-81FA-F725-4DBDBD47E3C0}"/>
+      <mc:AlternateContent xmlns:mc="http://schemas.openxmlformats.org/markup-compatibility/2006" xmlns:a14="http://schemas.microsoft.com/office/drawing/2010/main">
+        <mc:Choice Requires="a14">
+          <p:sp>
+            <p:nvSpPr>
+              <p:cNvPr id="5" name="AutoShape 11">
+                <a:extLst>
+                  <a:ext uri="{FF2B5EF4-FFF2-40B4-BE49-F238E27FC236}">
+                    <a16:creationId xmlns:a16="http://schemas.microsoft.com/office/drawing/2014/main" id="{F1222A41-E1E2-CBE0-EFCF-409E9DC6126E}"/>
+                  </a:ext>
+                </a:extLst>
+              </p:cNvPr>
+              <p:cNvSpPr/>
+              <p:nvPr/>
+            </p:nvSpPr>
+            <p:spPr>
+              <a:xfrm>
+                <a:off x="805324" y="1848393"/>
+                <a:ext cx="6836445" cy="4578531"/>
+              </a:xfrm>
+              <a:prstGeom prst="rect">
+                <a:avLst/>
+              </a:prstGeom>
+              <a:noFill/>
+              <a:ln w="12700" cap="flat" cmpd="sng">
+                <a:noFill/>
+                <a:prstDash val="solid"/>
+                <a:round/>
+              </a:ln>
+            </p:spPr>
+            <p:txBody>
+              <a:bodyPr vert="horz" wrap="square" lIns="0" tIns="0" rIns="0" bIns="0" rtlCol="0" anchor="ctr" anchorCtr="0"/>
+              <a:lstStyle/>
+              <a:p>
+                <a:pPr indent="0">
+                  <a:lnSpc>
+                    <a:spcPct val="116666"/>
+                  </a:lnSpc>
+                  <a:defRPr/>
+                </a:pPr>
+                <a:r>
+                  <a:rPr lang="zh-CN" altLang="en-US" sz="1400" b="1" dirty="0">
+                    <a:ea typeface="Noto Sans SC"/>
+                    <a:cs typeface="Noto Sans SC"/>
+                    <a:sym typeface="Noto Sans SC"/>
+                  </a:rPr>
+                  <a:t>介绍完泡利群，现在我们回到刚刚在</a:t>
+                </a:r>
+                <a:r>
+                  <a:rPr lang="en-US" altLang="zh-CN" sz="1400" b="1" dirty="0" err="1">
+                    <a:ea typeface="Noto Sans SC"/>
+                    <a:cs typeface="Noto Sans SC"/>
+                    <a:sym typeface="Noto Sans SC"/>
+                  </a:rPr>
+                  <a:t>shor</a:t>
+                </a:r>
+                <a:r>
+                  <a:rPr lang="zh-CN" altLang="en-US" sz="1400" b="1" dirty="0">
+                    <a:ea typeface="Noto Sans SC"/>
+                    <a:cs typeface="Noto Sans SC"/>
+                    <a:sym typeface="Noto Sans SC"/>
+                  </a:rPr>
+                  <a:t>码处提及的稳定子，</a:t>
+                </a:r>
+                <a:endParaRPr lang="en-US" altLang="zh-CN" sz="1400" b="1" dirty="0">
+                  <a:ea typeface="Noto Sans SC"/>
+                  <a:cs typeface="Noto Sans SC"/>
+                  <a:sym typeface="Noto Sans SC"/>
+                </a:endParaRPr>
+              </a:p>
+              <a:p>
+                <a:pPr indent="0">
+                  <a:lnSpc>
+                    <a:spcPct val="116666"/>
+                  </a:lnSpc>
+                  <a:defRPr/>
+                </a:pPr>
+                <a:r>
+                  <a:rPr lang="zh-CN" altLang="en-US" sz="1400" b="1" dirty="0">
+                    <a:ea typeface="Noto Sans SC"/>
+                    <a:cs typeface="Noto Sans SC"/>
+                    <a:sym typeface="Noto Sans SC"/>
+                  </a:rPr>
+                  <a:t>我们给出其定义及其相关性质</a:t>
+                </a:r>
+                <a:endParaRPr lang="en-US" altLang="zh-CN" sz="1400" b="1" dirty="0">
+                  <a:ea typeface="Noto Sans SC"/>
+                  <a:cs typeface="Noto Sans SC"/>
+                  <a:sym typeface="Noto Sans SC"/>
+                </a:endParaRPr>
+              </a:p>
+              <a:p>
+                <a:pPr indent="0">
+                  <a:lnSpc>
+                    <a:spcPct val="116666"/>
+                  </a:lnSpc>
+                  <a:defRPr/>
+                </a:pPr>
+                <a:endParaRPr lang="en-US" altLang="zh-CN" sz="1400" b="1" dirty="0">
+                  <a:ea typeface="Noto Sans SC"/>
+                  <a:cs typeface="Noto Sans SC"/>
+                  <a:sym typeface="Noto Sans SC"/>
+                </a:endParaRPr>
+              </a:p>
+              <a:p>
+                <a:pPr indent="0">
+                  <a:lnSpc>
+                    <a:spcPct val="116666"/>
+                  </a:lnSpc>
+                  <a:defRPr/>
+                </a:pPr>
+                <a:r>
+                  <a:rPr lang="zh-CN" altLang="en-US" sz="1400" b="1" i="0" u="none" strike="noStrike" dirty="0">
+                    <a:ea typeface="Noto Sans SC"/>
+                    <a:cs typeface="Noto Sans SC"/>
+                    <a:sym typeface="Noto Sans SC"/>
+                  </a:rPr>
+                  <a:t>作用于</a:t>
+                </a:r>
+                <a:r>
+                  <a:rPr lang="zh-CN" altLang="en-US" sz="1400" b="1" i="0" u="none" strike="noStrike" dirty="0">
+                    <a:solidFill>
+                      <a:schemeClr val="accent2"/>
+                    </a:solidFill>
+                    <a:ea typeface="Noto Sans SC"/>
+                    <a:cs typeface="Noto Sans SC"/>
+                    <a:sym typeface="Noto Sans SC"/>
+                  </a:rPr>
+                  <a:t>逻辑比特</a:t>
+                </a:r>
+                <a:r>
+                  <a:rPr lang="en-US" altLang="zh-CN" sz="1400" b="1" i="0" u="none" strike="noStrike" dirty="0">
+                    <a:solidFill>
+                      <a:schemeClr val="accent2"/>
+                    </a:solidFill>
+                    <a:ea typeface="Noto Sans SC"/>
+                    <a:cs typeface="Noto Sans SC"/>
+                    <a:sym typeface="Noto Sans SC"/>
+                  </a:rPr>
+                  <a:t>(</a:t>
+                </a:r>
+                <a:r>
+                  <a:rPr lang="zh-CN" altLang="en-US" sz="1400" b="1" i="0" u="none" strike="noStrike" dirty="0">
+                    <a:solidFill>
+                      <a:schemeClr val="accent2"/>
+                    </a:solidFill>
+                    <a:ea typeface="Noto Sans SC"/>
+                    <a:cs typeface="Noto Sans SC"/>
+                    <a:sym typeface="Noto Sans SC"/>
+                  </a:rPr>
+                  <a:t>码字</a:t>
+                </a:r>
+                <a:r>
+                  <a:rPr lang="en-US" altLang="zh-CN" sz="1400" b="1" i="0" u="none" strike="noStrike" dirty="0">
+                    <a:solidFill>
+                      <a:schemeClr val="accent2"/>
+                    </a:solidFill>
+                    <a:ea typeface="Noto Sans SC"/>
+                    <a:cs typeface="Noto Sans SC"/>
+                    <a:sym typeface="Noto Sans SC"/>
+                  </a:rPr>
+                  <a:t>/codewords)</a:t>
+                </a:r>
+                <a:r>
+                  <a:rPr lang="zh-CN" altLang="en-US" sz="1400" b="1" i="0" u="none" strike="noStrike" dirty="0">
+                    <a:ea typeface="Noto Sans SC"/>
+                    <a:cs typeface="Noto Sans SC"/>
+                    <a:sym typeface="Noto Sans SC"/>
+                  </a:rPr>
+                  <a:t>上时</a:t>
+                </a:r>
+                <a:r>
+                  <a:rPr lang="zh-CN" altLang="en-US" sz="1400" b="1" i="0" u="none" strike="noStrike" dirty="0">
+                    <a:solidFill>
+                      <a:schemeClr val="accent2"/>
+                    </a:solidFill>
+                    <a:ea typeface="Noto Sans SC"/>
+                    <a:cs typeface="Noto Sans SC"/>
+                    <a:sym typeface="Noto Sans SC"/>
+                  </a:rPr>
+                  <a:t>本征值为</a:t>
+                </a:r>
+                <a:r>
+                  <a:rPr lang="en-US" altLang="zh-CN" sz="1400" b="1" i="0" u="none" strike="noStrike" dirty="0">
+                    <a:solidFill>
+                      <a:schemeClr val="accent2"/>
+                    </a:solidFill>
+                    <a:ea typeface="Noto Sans SC"/>
+                    <a:cs typeface="Noto Sans SC"/>
+                    <a:sym typeface="Noto Sans SC"/>
+                  </a:rPr>
+                  <a:t>1</a:t>
+                </a:r>
+              </a:p>
+              <a:p>
+                <a:pPr indent="0">
+                  <a:lnSpc>
+                    <a:spcPct val="116666"/>
+                  </a:lnSpc>
+                  <a:defRPr/>
+                </a:pPr>
+                <a:r>
+                  <a:rPr lang="zh-CN" altLang="en-US" sz="1400" b="1" i="0" u="none" strike="noStrike" dirty="0">
+                    <a:ea typeface="Noto Sans SC"/>
+                    <a:cs typeface="Noto Sans SC"/>
+                    <a:sym typeface="Noto Sans SC"/>
+                  </a:rPr>
+                  <a:t>且同时属于</a:t>
+                </a:r>
+                <a:r>
+                  <a:rPr lang="zh-CN" altLang="en-US" sz="1400" b="1" i="0" u="none" strike="noStrike" dirty="0">
+                    <a:solidFill>
+                      <a:schemeClr val="accent2"/>
+                    </a:solidFill>
+                    <a:ea typeface="Noto Sans SC"/>
+                    <a:cs typeface="Noto Sans SC"/>
+                    <a:sym typeface="Noto Sans SC"/>
+                  </a:rPr>
+                  <a:t>泡利群</a:t>
+                </a:r>
+                <a:r>
+                  <a:rPr lang="zh-CN" altLang="en-US" sz="1400" b="1" i="0" u="none" strike="noStrike" dirty="0">
+                    <a:ea typeface="Noto Sans SC"/>
+                    <a:cs typeface="Noto Sans SC"/>
+                    <a:sym typeface="Noto Sans SC"/>
+                  </a:rPr>
+                  <a:t>的</a:t>
+                </a:r>
+                <a:r>
+                  <a:rPr lang="zh-CN" altLang="en-US" sz="1400" b="1" i="0" u="none" strike="noStrike" dirty="0">
+                    <a:solidFill>
+                      <a:schemeClr val="accent2"/>
+                    </a:solidFill>
+                    <a:ea typeface="Noto Sans SC"/>
+                    <a:cs typeface="Noto Sans SC"/>
+                    <a:sym typeface="Noto Sans SC"/>
+                  </a:rPr>
+                  <a:t>算符集合</a:t>
+                </a:r>
+                <a:endParaRPr lang="en-US" altLang="zh-CN" sz="1400" b="1" i="0" u="none" strike="noStrike" dirty="0">
+                  <a:solidFill>
+                    <a:schemeClr val="accent2"/>
+                  </a:solidFill>
+                  <a:ea typeface="Noto Sans SC"/>
+                  <a:cs typeface="Noto Sans SC"/>
+                  <a:sym typeface="Noto Sans SC"/>
+                </a:endParaRPr>
+              </a:p>
+              <a:p>
+                <a:pPr indent="0">
+                  <a:lnSpc>
+                    <a:spcPct val="116666"/>
+                  </a:lnSpc>
+                  <a:defRPr/>
+                </a:pPr>
+                <a:r>
+                  <a:rPr lang="zh-CN" altLang="en-US" sz="1400" b="1" i="0" u="none" strike="noStrike" dirty="0">
+                    <a:ea typeface="Noto Sans SC"/>
+                    <a:cs typeface="Noto Sans SC"/>
+                    <a:sym typeface="Noto Sans SC"/>
+                  </a:rPr>
+                  <a:t>构成了</a:t>
+                </a:r>
+                <a:r>
+                  <a:rPr lang="zh-CN" altLang="en-US" sz="1400" b="1" i="0" u="none" strike="noStrike" dirty="0">
+                    <a:solidFill>
+                      <a:schemeClr val="accent2"/>
+                    </a:solidFill>
+                    <a:ea typeface="Noto Sans SC"/>
+                    <a:cs typeface="Noto Sans SC"/>
+                    <a:sym typeface="Noto Sans SC"/>
+                  </a:rPr>
+                  <a:t>稳定子</a:t>
+                </a:r>
+                <a:endParaRPr lang="en-US" altLang="zh-CN" sz="1400" b="1" i="0" u="none" strike="noStrike" dirty="0">
+                  <a:solidFill>
+                    <a:schemeClr val="accent2"/>
+                  </a:solidFill>
+                  <a:ea typeface="Noto Sans SC"/>
+                  <a:cs typeface="Noto Sans SC"/>
+                  <a:sym typeface="Noto Sans SC"/>
+                </a:endParaRPr>
+              </a:p>
+              <a:p>
+                <a:pPr indent="0">
+                  <a:lnSpc>
+                    <a:spcPct val="116666"/>
+                  </a:lnSpc>
+                  <a:defRPr/>
+                </a:pPr>
+                <a:endParaRPr lang="en-US" altLang="zh-CN" sz="1400" b="1" dirty="0">
+                  <a:ea typeface="Noto Sans SC"/>
+                  <a:cs typeface="Noto Sans SC"/>
+                  <a:sym typeface="Noto Sans SC"/>
+                </a:endParaRPr>
+              </a:p>
+              <a:p>
+                <a:pPr indent="0">
+                  <a:lnSpc>
+                    <a:spcPct val="116666"/>
+                  </a:lnSpc>
+                  <a:defRPr/>
+                </a:pPr>
+                <a:r>
+                  <a:rPr lang="zh-CN" altLang="en-US" sz="1400" b="1" i="0" u="none" strike="noStrike" dirty="0">
+                    <a:ea typeface="Noto Sans SC"/>
+                    <a:cs typeface="Noto Sans SC"/>
+                    <a:sym typeface="Noto Sans SC"/>
+                  </a:rPr>
+                  <a:t>根据定义</a:t>
+                </a:r>
+                <a:endParaRPr lang="en-US" altLang="zh-CN" sz="1400" b="1" i="0" u="none" strike="noStrike" dirty="0">
+                  <a:ea typeface="Noto Sans SC"/>
+                  <a:cs typeface="Noto Sans SC"/>
+                  <a:sym typeface="Noto Sans SC"/>
+                </a:endParaRPr>
+              </a:p>
+              <a:p>
+                <a:pPr indent="0">
+                  <a:lnSpc>
+                    <a:spcPct val="116666"/>
+                  </a:lnSpc>
+                  <a:defRPr/>
+                </a:pPr>
+                <a:r>
+                  <a:rPr lang="en-US" altLang="zh-CN" sz="1400" b="1" i="0" u="none" strike="noStrike" dirty="0">
+                    <a:ea typeface="Noto Sans SC"/>
+                    <a:cs typeface="Noto Sans SC"/>
+                    <a:sym typeface="Noto Sans SC"/>
+                  </a:rPr>
+                  <a:t> </a:t>
+                </a:r>
+                <a14:m>
+                  <m:oMath xmlns:m="http://schemas.openxmlformats.org/officeDocument/2006/math">
+                    <m:r>
+                      <a:rPr lang="en-US" altLang="zh-CN" sz="1400" b="1" i="1" u="none" strike="noStrike" smtClean="0">
+                        <a:latin typeface="Cambria Math" panose="02040503050406030204" pitchFamily="18" charset="0"/>
+                        <a:ea typeface="Noto Sans SC"/>
+                        <a:cs typeface="Noto Sans SC"/>
+                        <a:sym typeface="Noto Sans SC"/>
+                      </a:rPr>
+                      <m:t>−</m:t>
+                    </m:r>
+                    <m:r>
+                      <a:rPr lang="en-US" altLang="zh-CN" sz="1400" b="1" i="1" u="none" strike="noStrike" smtClean="0">
+                        <a:latin typeface="Cambria Math" panose="02040503050406030204" pitchFamily="18" charset="0"/>
+                        <a:ea typeface="Noto Sans SC"/>
+                        <a:cs typeface="Noto Sans SC"/>
+                        <a:sym typeface="Noto Sans SC"/>
+                      </a:rPr>
+                      <m:t>𝑰</m:t>
+                    </m:r>
+                    <m:r>
+                      <a:rPr lang="en-US" altLang="zh-CN" sz="1400" b="1" i="1" u="none" strike="noStrike" smtClean="0">
+                        <a:latin typeface="Cambria Math" panose="02040503050406030204" pitchFamily="18" charset="0"/>
+                        <a:ea typeface="Noto Sans SC"/>
+                        <a:cs typeface="Noto Sans SC"/>
+                        <a:sym typeface="Noto Sans SC"/>
+                      </a:rPr>
+                      <m:t>∉</m:t>
+                    </m:r>
+                    <m:r>
+                      <a:rPr lang="en-US" altLang="zh-CN" sz="1400" b="1" i="1" u="none" strike="noStrike" smtClean="0">
+                        <a:latin typeface="Cambria Math" panose="02040503050406030204" pitchFamily="18" charset="0"/>
+                        <a:ea typeface="Noto Sans SC"/>
+                        <a:cs typeface="Noto Sans SC"/>
+                        <a:sym typeface="Noto Sans SC"/>
+                      </a:rPr>
+                      <m:t>𝑺</m:t>
+                    </m:r>
+                  </m:oMath>
+                </a14:m>
+                <a:endParaRPr lang="en-US" altLang="zh-CN" sz="1400" b="1" i="0" u="none" strike="noStrike" dirty="0">
+                  <a:ea typeface="Noto Sans SC"/>
+                  <a:cs typeface="Noto Sans SC"/>
+                  <a:sym typeface="Noto Sans SC"/>
+                </a:endParaRPr>
+              </a:p>
+              <a:p>
+                <a:pPr indent="0">
+                  <a:lnSpc>
+                    <a:spcPct val="116666"/>
+                  </a:lnSpc>
+                  <a:defRPr/>
+                </a:pPr>
+                <a:r>
+                  <a:rPr lang="zh-CN" altLang="en-US" sz="1400" b="1" i="0" u="none" strike="noStrike" dirty="0">
+                    <a:ea typeface="Noto Sans SC"/>
+                    <a:cs typeface="Noto Sans SC"/>
+                    <a:sym typeface="Noto Sans SC"/>
+                  </a:rPr>
+                  <a:t>任意两个属于同一个稳定子的算符是</a:t>
+                </a:r>
+                <a:r>
+                  <a:rPr lang="zh-CN" altLang="en-US" sz="1400" b="1" i="0" u="none" strike="noStrike" dirty="0">
+                    <a:solidFill>
+                      <a:schemeClr val="accent2"/>
+                    </a:solidFill>
+                    <a:ea typeface="Noto Sans SC"/>
+                    <a:cs typeface="Noto Sans SC"/>
+                    <a:sym typeface="Noto Sans SC"/>
+                  </a:rPr>
+                  <a:t>相互对易</a:t>
+                </a:r>
+                <a:r>
+                  <a:rPr lang="zh-CN" altLang="en-US" sz="1400" b="1" i="0" u="none" strike="noStrike" dirty="0">
+                    <a:ea typeface="Noto Sans SC"/>
+                    <a:cs typeface="Noto Sans SC"/>
+                    <a:sym typeface="Noto Sans SC"/>
+                  </a:rPr>
+                  <a:t>的</a:t>
+                </a:r>
+                <a:endParaRPr lang="en-US" altLang="zh-CN" sz="1400" b="1" i="0" u="none" strike="noStrike" dirty="0">
+                  <a:ea typeface="Noto Sans SC"/>
+                  <a:cs typeface="Noto Sans SC"/>
+                  <a:sym typeface="Noto Sans SC"/>
+                </a:endParaRPr>
+              </a:p>
+              <a:p>
+                <a:pPr indent="0">
+                  <a:lnSpc>
+                    <a:spcPct val="116666"/>
+                  </a:lnSpc>
+                  <a:defRPr/>
+                </a:pPr>
+                <a:endParaRPr lang="en-US" altLang="zh-CN" sz="1400" b="1" dirty="0">
+                  <a:ea typeface="Noto Sans SC"/>
+                  <a:cs typeface="Noto Sans SC"/>
+                  <a:sym typeface="Noto Sans SC"/>
+                </a:endParaRPr>
+              </a:p>
+              <a:p>
+                <a:pPr indent="0">
+                  <a:lnSpc>
+                    <a:spcPct val="116666"/>
+                  </a:lnSpc>
+                  <a:defRPr/>
+                </a:pPr>
+                <a:r>
+                  <a:rPr lang="zh-CN" altLang="en-US" sz="1400" b="1" dirty="0">
+                    <a:ea typeface="Noto Sans SC"/>
+                    <a:cs typeface="Noto Sans SC"/>
+                    <a:sym typeface="Noto Sans SC"/>
+                  </a:rPr>
+                  <a:t>在实际处理中直接从稳定子本身的性质出发获得一个稳定子群再推导出更加有效</a:t>
+                </a:r>
+                <a:endParaRPr lang="en-US" altLang="zh-CN" sz="1400" b="1" dirty="0">
+                  <a:ea typeface="Noto Sans SC"/>
+                  <a:cs typeface="Noto Sans SC"/>
+                  <a:sym typeface="Noto Sans SC"/>
+                </a:endParaRPr>
+              </a:p>
+              <a:p>
+                <a:pPr indent="0">
+                  <a:lnSpc>
+                    <a:spcPct val="116666"/>
+                  </a:lnSpc>
+                  <a:defRPr/>
+                </a:pPr>
+                <a:endParaRPr lang="en-US" altLang="zh-CN" sz="1400" b="1" i="0" u="none" strike="noStrike" dirty="0">
+                  <a:ea typeface="Noto Sans SC"/>
+                  <a:cs typeface="Noto Sans SC"/>
+                  <a:sym typeface="Noto Sans SC"/>
+                </a:endParaRPr>
+              </a:p>
+              <a:p>
+                <a:pPr indent="0">
+                  <a:lnSpc>
+                    <a:spcPct val="116666"/>
+                  </a:lnSpc>
+                  <a:defRPr/>
+                </a:pPr>
+                <a:r>
+                  <a:rPr lang="zh-CN" altLang="en-US" sz="1400" b="1" dirty="0">
+                    <a:ea typeface="Noto Sans SC"/>
+                    <a:cs typeface="Noto Sans SC"/>
+                    <a:sym typeface="Noto Sans SC"/>
+                  </a:rPr>
+                  <a:t>因此我们有了右侧</a:t>
+                </a:r>
+                <a:r>
+                  <a:rPr lang="zh-CN" altLang="en-US" sz="1400" b="1" dirty="0">
+                    <a:solidFill>
+                      <a:schemeClr val="accent2"/>
+                    </a:solidFill>
+                    <a:ea typeface="Noto Sans SC"/>
+                    <a:cs typeface="Noto Sans SC"/>
+                    <a:sym typeface="Noto Sans SC"/>
+                  </a:rPr>
+                  <a:t>通过稳定子定义</a:t>
+                </a:r>
+                <a:r>
+                  <a:rPr lang="zh-CN" altLang="en-US" sz="1400" b="1" dirty="0">
+                    <a:ea typeface="Noto Sans SC"/>
+                    <a:cs typeface="Noto Sans SC"/>
+                    <a:sym typeface="Noto Sans SC"/>
+                  </a:rPr>
+                  <a:t>的码空间</a:t>
+                </a:r>
+                <a:r>
+                  <a:rPr lang="en-US" altLang="zh-CN" sz="1400" b="1" dirty="0">
+                    <a:ea typeface="Noto Sans SC"/>
+                    <a:cs typeface="Noto Sans SC"/>
+                    <a:sym typeface="Noto Sans SC"/>
+                  </a:rPr>
+                  <a:t>(code space)</a:t>
+                </a:r>
+              </a:p>
+              <a:p>
+                <a:pPr indent="0">
+                  <a:lnSpc>
+                    <a:spcPct val="116666"/>
+                  </a:lnSpc>
+                  <a:defRPr/>
+                </a:pPr>
+                <a:endParaRPr lang="en-US" altLang="zh-CN" sz="1400" b="1" i="0" u="none" strike="noStrike" dirty="0">
+                  <a:ea typeface="Noto Sans SC"/>
+                  <a:cs typeface="Noto Sans SC"/>
+                  <a:sym typeface="Noto Sans SC"/>
+                </a:endParaRPr>
+              </a:p>
+              <a:p>
+                <a:pPr indent="0">
+                  <a:lnSpc>
+                    <a:spcPct val="116666"/>
+                  </a:lnSpc>
+                  <a:defRPr/>
+                </a:pPr>
+                <a:r>
+                  <a:rPr lang="en-US" altLang="zh-CN" sz="1400" b="1" i="0" u="none" strike="noStrike" dirty="0" err="1">
+                    <a:ea typeface="Noto Sans SC"/>
+                    <a:cs typeface="Noto Sans SC"/>
+                    <a:sym typeface="Noto Sans SC"/>
+                  </a:rPr>
+                  <a:t>s.t.</a:t>
+                </a:r>
+                <a:r>
+                  <a:rPr lang="en-US" altLang="zh-CN" sz="1400" b="1" i="0" u="none" strike="noStrike" dirty="0">
+                    <a:ea typeface="Noto Sans SC"/>
+                    <a:cs typeface="Noto Sans SC"/>
+                    <a:sym typeface="Noto Sans SC"/>
+                  </a:rPr>
+                  <a:t> such that </a:t>
+                </a:r>
+                <a:r>
+                  <a:rPr lang="zh-CN" altLang="en-US" sz="1400" b="1" i="0" u="none" strike="noStrike" dirty="0">
+                    <a:ea typeface="Noto Sans SC"/>
+                    <a:cs typeface="Noto Sans SC"/>
+                    <a:sym typeface="Noto Sans SC"/>
+                  </a:rPr>
+                  <a:t>（</a:t>
+                </a:r>
+                <a:r>
+                  <a:rPr lang="zh-CN" altLang="en-US" sz="1400" b="1" dirty="0">
+                    <a:ea typeface="Noto Sans SC"/>
+                    <a:cs typeface="Noto Sans SC"/>
+                    <a:sym typeface="Noto Sans SC"/>
+                  </a:rPr>
+                  <a:t>使得</a:t>
+                </a:r>
+                <a:r>
+                  <a:rPr lang="en-US" altLang="zh-CN" sz="1400" b="1" dirty="0">
+                    <a:ea typeface="Noto Sans SC"/>
+                    <a:cs typeface="Noto Sans SC"/>
+                    <a:sym typeface="Noto Sans SC"/>
+                  </a:rPr>
+                  <a:t>/</a:t>
+                </a:r>
+                <a:r>
+                  <a:rPr lang="zh-CN" altLang="en-US" sz="1400" b="1" dirty="0">
+                    <a:ea typeface="Noto Sans SC"/>
+                    <a:cs typeface="Noto Sans SC"/>
+                    <a:sym typeface="Noto Sans SC"/>
+                  </a:rPr>
+                  <a:t>满足</a:t>
+                </a:r>
+                <a:r>
+                  <a:rPr lang="zh-CN" altLang="en-US" sz="1400" b="1" i="0" u="none" strike="noStrike" dirty="0">
+                    <a:ea typeface="Noto Sans SC"/>
+                    <a:cs typeface="Noto Sans SC"/>
+                    <a:sym typeface="Noto Sans SC"/>
+                  </a:rPr>
+                  <a:t>）</a:t>
+                </a:r>
+                <a:endParaRPr lang="en-US" altLang="zh-CN" sz="1400" b="1" i="0" u="none" strike="noStrike" dirty="0">
+                  <a:ea typeface="Noto Sans SC"/>
+                  <a:cs typeface="Noto Sans SC"/>
+                  <a:sym typeface="Noto Sans SC"/>
+                </a:endParaRPr>
+              </a:p>
+            </p:txBody>
+          </p:sp>
+        </mc:Choice>
+        <mc:Fallback xmlns="">
+          <p:sp>
+            <p:nvSpPr>
+              <p:cNvPr id="5" name="AutoShape 11">
+                <a:extLst>
+                  <a:ext uri="{FF2B5EF4-FFF2-40B4-BE49-F238E27FC236}">
+                    <a16:creationId xmlns:a16="http://schemas.microsoft.com/office/drawing/2014/main" id="{F1222A41-E1E2-CBE0-EFCF-409E9DC6126E}"/>
+                  </a:ext>
+                </a:extLst>
+              </p:cNvPr>
+              <p:cNvSpPr>
+                <a:spLocks noRot="1" noChangeAspect="1" noMove="1" noResize="1" noEditPoints="1" noAdjustHandles="1" noChangeArrowheads="1" noChangeShapeType="1" noTextEdit="1"/>
+              </p:cNvSpPr>
+              <p:nvPr/>
+            </p:nvSpPr>
+            <p:spPr>
+              <a:xfrm>
+                <a:off x="805324" y="1848393"/>
+                <a:ext cx="6836445" cy="4578531"/>
+              </a:xfrm>
+              <a:prstGeom prst="rect">
+                <a:avLst/>
+              </a:prstGeom>
+              <a:blipFill>
+                <a:blip r:embed="rId3"/>
+                <a:stretch>
+                  <a:fillRect l="-1604"/>
+                </a:stretch>
+              </a:blipFill>
+              <a:ln w="12700" cap="flat" cmpd="sng">
+                <a:noFill/>
+                <a:prstDash val="solid"/>
+                <a:round/>
+              </a:ln>
+            </p:spPr>
+            <p:txBody>
+              <a:bodyPr/>
+              <a:lstStyle/>
+              <a:p>
+                <a:r>
+                  <a:rPr lang="zh-CN" altLang="en-US">
+                    <a:noFill/>
+                  </a:rPr>
+                  <a:t> </a:t>
+                </a:r>
+              </a:p>
+            </p:txBody>
+          </p:sp>
+        </mc:Fallback>
+      </mc:AlternateContent>
+      <p:pic>
+        <p:nvPicPr>
+          <p:cNvPr id="10" name="图片 9">
+            <a:extLst>
+              <a:ext uri="{FF2B5EF4-FFF2-40B4-BE49-F238E27FC236}">
+                <a16:creationId xmlns:a16="http://schemas.microsoft.com/office/drawing/2014/main" id="{5401637B-5BCB-466A-0A26-762601564063}"/>
+              </a:ext>
+            </a:extLst>
+          </p:cNvPr>
+          <p:cNvPicPr>
+            <a:picLocks noChangeAspect="1"/>
+          </p:cNvPicPr>
+          <p:nvPr/>
+        </p:nvPicPr>
+        <p:blipFill>
+          <a:blip r:embed="rId4"/>
+          <a:stretch>
+            <a:fillRect/>
+          </a:stretch>
+        </p:blipFill>
+        <p:spPr>
+          <a:xfrm>
+            <a:off x="7603620" y="2008092"/>
+            <a:ext cx="4570963" cy="454029"/>
+          </a:xfrm>
+          <a:prstGeom prst="rect">
+            <a:avLst/>
+          </a:prstGeom>
+        </p:spPr>
+      </p:pic>
+      <p:pic>
+        <p:nvPicPr>
+          <p:cNvPr id="12" name="图片 11">
+            <a:extLst>
+              <a:ext uri="{FF2B5EF4-FFF2-40B4-BE49-F238E27FC236}">
+                <a16:creationId xmlns:a16="http://schemas.microsoft.com/office/drawing/2014/main" id="{FA726D80-954F-395B-92B3-57DF05B3948B}"/>
+              </a:ext>
+            </a:extLst>
+          </p:cNvPr>
+          <p:cNvPicPr>
+            <a:picLocks noChangeAspect="1"/>
+          </p:cNvPicPr>
+          <p:nvPr/>
+        </p:nvPicPr>
+        <p:blipFill>
+          <a:blip r:embed="rId5"/>
+          <a:stretch>
+            <a:fillRect/>
+          </a:stretch>
+        </p:blipFill>
+        <p:spPr>
+          <a:xfrm>
+            <a:off x="8903638" y="1551657"/>
+            <a:ext cx="1853625" cy="389576"/>
+          </a:xfrm>
+          <a:prstGeom prst="rect">
+            <a:avLst/>
+          </a:prstGeom>
+        </p:spPr>
+      </p:pic>
+      <mc:AlternateContent xmlns:mc="http://schemas.openxmlformats.org/markup-compatibility/2006" xmlns:a14="http://schemas.microsoft.com/office/drawing/2010/main">
+        <mc:Choice Requires="a14">
+          <p:sp>
+            <p:nvSpPr>
+              <p:cNvPr id="14" name="文本框 13">
+                <a:extLst>
+                  <a:ext uri="{FF2B5EF4-FFF2-40B4-BE49-F238E27FC236}">
+                    <a16:creationId xmlns:a16="http://schemas.microsoft.com/office/drawing/2014/main" id="{DEF72D17-D46F-48CE-CDCD-BD3E53CF605A}"/>
+                  </a:ext>
+                </a:extLst>
+              </p:cNvPr>
+              <p:cNvSpPr txBox="1"/>
+              <p:nvPr/>
+            </p:nvSpPr>
+            <p:spPr>
+              <a:xfrm>
+                <a:off x="8755379" y="2726868"/>
+                <a:ext cx="2244461" cy="830997"/>
+              </a:xfrm>
+              <a:prstGeom prst="rect">
+                <a:avLst/>
+              </a:prstGeom>
+              <a:noFill/>
+            </p:spPr>
+            <p:txBody>
+              <a:bodyPr wrap="none" lIns="0" tIns="0" rIns="0" bIns="0" rtlCol="0">
+                <a:spAutoFit/>
+              </a:bodyPr>
+              <a:lstStyle/>
+              <a:p>
+                <a:pPr/>
+                <a14:m>
+                  <m:oMathPara xmlns:m="http://schemas.openxmlformats.org/officeDocument/2006/math">
+                    <m:oMathParaPr>
+                      <m:jc m:val="centerGroup"/>
+                    </m:oMathParaPr>
+                    <m:oMath xmlns:m="http://schemas.openxmlformats.org/officeDocument/2006/math">
+                      <m:r>
+                        <a:rPr lang="en-US" altLang="zh-CN" b="0" i="1" smtClean="0">
+                          <a:latin typeface="Cambria Math" panose="02040503050406030204" pitchFamily="18" charset="0"/>
+                        </a:rPr>
+                        <m:t>𝑀</m:t>
+                      </m:r>
+                      <m:r>
+                        <a:rPr lang="en-US" altLang="zh-CN" b="0" i="1" smtClean="0">
+                          <a:latin typeface="Cambria Math" panose="02040503050406030204" pitchFamily="18" charset="0"/>
+                        </a:rPr>
+                        <m:t>, </m:t>
+                      </m:r>
+                      <m:r>
+                        <a:rPr lang="en-US" altLang="zh-CN" b="0" i="1" smtClean="0">
+                          <a:latin typeface="Cambria Math" panose="02040503050406030204" pitchFamily="18" charset="0"/>
+                        </a:rPr>
+                        <m:t>𝑁</m:t>
+                      </m:r>
+                      <m:r>
+                        <a:rPr lang="en-US" altLang="zh-CN" b="0" i="1" smtClean="0">
+                          <a:latin typeface="Cambria Math" panose="02040503050406030204" pitchFamily="18" charset="0"/>
+                        </a:rPr>
+                        <m:t>∈</m:t>
+                      </m:r>
+                      <m:r>
+                        <m:rPr>
+                          <m:sty m:val="p"/>
+                        </m:rPr>
+                        <a:rPr lang="en-US" altLang="zh-CN" b="0" i="0" smtClean="0">
+                          <a:latin typeface="Cambria Math" panose="02040503050406030204" pitchFamily="18" charset="0"/>
+                        </a:rPr>
+                        <m:t>S</m:t>
+                      </m:r>
+                    </m:oMath>
+                  </m:oMathPara>
+                </a14:m>
+                <a:endParaRPr lang="en-US" altLang="zh-CN" b="0" dirty="0">
+                  <a:latin typeface="Cambria Math" panose="02040503050406030204" pitchFamily="18" charset="0"/>
+                </a:endParaRPr>
+              </a:p>
+              <a:p>
+                <a:pPr/>
+                <a14:m>
+                  <m:oMathPara xmlns:m="http://schemas.openxmlformats.org/officeDocument/2006/math">
+                    <m:oMathParaPr>
+                      <m:jc m:val="centerGroup"/>
+                    </m:oMathParaPr>
+                    <m:oMath xmlns:m="http://schemas.openxmlformats.org/officeDocument/2006/math">
+                      <m:r>
+                        <a:rPr lang="en-US" altLang="zh-CN" b="0" i="1" smtClean="0">
+                          <a:latin typeface="Cambria Math" panose="02040503050406030204" pitchFamily="18" charset="0"/>
+                        </a:rPr>
+                        <m:t>𝑀𝑁</m:t>
+                      </m:r>
+                      <m:d>
+                        <m:dPr>
+                          <m:begChr m:val="|"/>
+                          <m:endChr m:val="⟩"/>
+                          <m:ctrlPr>
+                            <a:rPr lang="en-US" altLang="zh-CN" b="0" i="1" smtClean="0">
+                              <a:latin typeface="Cambria Math" panose="02040503050406030204" pitchFamily="18" charset="0"/>
+                            </a:rPr>
+                          </m:ctrlPr>
+                        </m:dPr>
+                        <m:e>
+                          <m:r>
+                            <a:rPr lang="en-US" altLang="zh-CN" b="0" i="1" smtClean="0">
+                              <a:latin typeface="Cambria Math" panose="02040503050406030204" pitchFamily="18" charset="0"/>
+                            </a:rPr>
+                            <m:t>𝜓</m:t>
+                          </m:r>
+                        </m:e>
+                      </m:d>
+                      <m:r>
+                        <a:rPr lang="en-US" altLang="zh-CN" b="0" i="1" smtClean="0">
+                          <a:latin typeface="Cambria Math" panose="02040503050406030204" pitchFamily="18" charset="0"/>
+                        </a:rPr>
+                        <m:t>=</m:t>
+                      </m:r>
+                      <m:r>
+                        <a:rPr lang="en-US" altLang="zh-CN" b="0" i="1" smtClean="0">
+                          <a:latin typeface="Cambria Math" panose="02040503050406030204" pitchFamily="18" charset="0"/>
+                        </a:rPr>
+                        <m:t>𝑀</m:t>
+                      </m:r>
+                      <m:d>
+                        <m:dPr>
+                          <m:begChr m:val="|"/>
+                          <m:endChr m:val="⟩"/>
+                          <m:ctrlPr>
+                            <a:rPr lang="en-US" altLang="zh-CN" b="0" i="1" smtClean="0">
+                              <a:latin typeface="Cambria Math" panose="02040503050406030204" pitchFamily="18" charset="0"/>
+                            </a:rPr>
+                          </m:ctrlPr>
+                        </m:dPr>
+                        <m:e>
+                          <m:r>
+                            <a:rPr lang="en-US" altLang="zh-CN" b="0" i="1" smtClean="0">
+                              <a:latin typeface="Cambria Math" panose="02040503050406030204" pitchFamily="18" charset="0"/>
+                            </a:rPr>
+                            <m:t>𝜓</m:t>
+                          </m:r>
+                        </m:e>
+                      </m:d>
+                      <m:r>
+                        <a:rPr lang="en-US" altLang="zh-CN" b="0" i="1" smtClean="0">
+                          <a:latin typeface="Cambria Math" panose="02040503050406030204" pitchFamily="18" charset="0"/>
+                        </a:rPr>
+                        <m:t>=</m:t>
+                      </m:r>
+                      <m:d>
+                        <m:dPr>
+                          <m:begChr m:val="|"/>
+                          <m:endChr m:val="⟩"/>
+                          <m:ctrlPr>
+                            <a:rPr lang="en-US" altLang="zh-CN" b="0" i="1" smtClean="0">
+                              <a:latin typeface="Cambria Math" panose="02040503050406030204" pitchFamily="18" charset="0"/>
+                            </a:rPr>
+                          </m:ctrlPr>
+                        </m:dPr>
+                        <m:e>
+                          <m:r>
+                            <a:rPr lang="en-US" altLang="zh-CN" b="0" i="1" smtClean="0">
+                              <a:latin typeface="Cambria Math" panose="02040503050406030204" pitchFamily="18" charset="0"/>
+                            </a:rPr>
+                            <m:t>𝜓</m:t>
+                          </m:r>
+                        </m:e>
+                      </m:d>
+                    </m:oMath>
+                  </m:oMathPara>
+                </a14:m>
+                <a:endParaRPr lang="en-US" altLang="zh-CN" dirty="0"/>
+              </a:p>
+              <a:p>
+                <a:pPr/>
+                <a14:m>
+                  <m:oMathPara xmlns:m="http://schemas.openxmlformats.org/officeDocument/2006/math">
+                    <m:oMathParaPr>
+                      <m:jc m:val="centerGroup"/>
+                    </m:oMathParaPr>
+                    <m:oMath xmlns:m="http://schemas.openxmlformats.org/officeDocument/2006/math">
+                      <m:r>
+                        <a:rPr lang="en-US" altLang="zh-CN" b="0" i="1" smtClean="0">
+                          <a:latin typeface="Cambria Math" panose="02040503050406030204" pitchFamily="18" charset="0"/>
+                        </a:rPr>
+                        <m:t>𝑁𝑀</m:t>
+                      </m:r>
+                      <m:d>
+                        <m:dPr>
+                          <m:begChr m:val="|"/>
+                          <m:endChr m:val="⟩"/>
+                          <m:ctrlPr>
+                            <a:rPr lang="en-US" altLang="zh-CN" b="0" i="1" smtClean="0">
+                              <a:latin typeface="Cambria Math" panose="02040503050406030204" pitchFamily="18" charset="0"/>
+                            </a:rPr>
+                          </m:ctrlPr>
+                        </m:dPr>
+                        <m:e>
+                          <m:r>
+                            <a:rPr lang="en-US" altLang="zh-CN" b="0" i="1" smtClean="0">
+                              <a:latin typeface="Cambria Math" panose="02040503050406030204" pitchFamily="18" charset="0"/>
+                            </a:rPr>
+                            <m:t>𝜓</m:t>
+                          </m:r>
+                        </m:e>
+                      </m:d>
+                      <m:r>
+                        <a:rPr lang="en-US" altLang="zh-CN" b="0" i="1" smtClean="0">
+                          <a:latin typeface="Cambria Math" panose="02040503050406030204" pitchFamily="18" charset="0"/>
+                        </a:rPr>
+                        <m:t>=</m:t>
+                      </m:r>
+                      <m:r>
+                        <a:rPr lang="en-US" altLang="zh-CN" b="0" i="1" smtClean="0">
+                          <a:latin typeface="Cambria Math" panose="02040503050406030204" pitchFamily="18" charset="0"/>
+                        </a:rPr>
+                        <m:t>𝑁</m:t>
+                      </m:r>
+                      <m:d>
+                        <m:dPr>
+                          <m:begChr m:val="|"/>
+                          <m:endChr m:val="⟩"/>
+                          <m:ctrlPr>
+                            <a:rPr lang="en-US" altLang="zh-CN" b="0" i="1" smtClean="0">
+                              <a:latin typeface="Cambria Math" panose="02040503050406030204" pitchFamily="18" charset="0"/>
+                            </a:rPr>
+                          </m:ctrlPr>
+                        </m:dPr>
+                        <m:e>
+                          <m:r>
+                            <a:rPr lang="en-US" altLang="zh-CN" b="0" i="1" smtClean="0">
+                              <a:latin typeface="Cambria Math" panose="02040503050406030204" pitchFamily="18" charset="0"/>
+                            </a:rPr>
+                            <m:t>𝜓</m:t>
+                          </m:r>
+                        </m:e>
+                      </m:d>
+                      <m:r>
+                        <a:rPr lang="en-US" altLang="zh-CN" b="0" i="1" smtClean="0">
+                          <a:latin typeface="Cambria Math" panose="02040503050406030204" pitchFamily="18" charset="0"/>
+                        </a:rPr>
+                        <m:t>=|</m:t>
+                      </m:r>
+                      <m:r>
+                        <a:rPr lang="en-US" altLang="zh-CN" b="0" i="1" smtClean="0">
+                          <a:latin typeface="Cambria Math" panose="02040503050406030204" pitchFamily="18" charset="0"/>
+                        </a:rPr>
+                        <m:t>𝜓</m:t>
+                      </m:r>
+                      <m:r>
+                        <a:rPr lang="en-US" altLang="zh-CN" b="0" i="1" smtClean="0">
+                          <a:latin typeface="Cambria Math" panose="02040503050406030204" pitchFamily="18" charset="0"/>
+                        </a:rPr>
+                        <m:t>⟩</m:t>
+                      </m:r>
+                    </m:oMath>
+                  </m:oMathPara>
+                </a14:m>
+                <a:endParaRPr lang="zh-CN" altLang="en-US" dirty="0"/>
+              </a:p>
+            </p:txBody>
+          </p:sp>
+        </mc:Choice>
+        <mc:Fallback xmlns="">
+          <p:sp>
+            <p:nvSpPr>
+              <p:cNvPr id="14" name="文本框 13">
+                <a:extLst>
+                  <a:ext uri="{FF2B5EF4-FFF2-40B4-BE49-F238E27FC236}">
+                    <a16:creationId xmlns:a16="http://schemas.microsoft.com/office/drawing/2014/main" id="{DEF72D17-D46F-48CE-CDCD-BD3E53CF605A}"/>
+                  </a:ext>
+                </a:extLst>
+              </p:cNvPr>
+              <p:cNvSpPr txBox="1">
+                <a:spLocks noRot="1" noChangeAspect="1" noMove="1" noResize="1" noEditPoints="1" noAdjustHandles="1" noChangeArrowheads="1" noChangeShapeType="1" noTextEdit="1"/>
+              </p:cNvSpPr>
+              <p:nvPr/>
+            </p:nvSpPr>
+            <p:spPr>
+              <a:xfrm>
+                <a:off x="8755379" y="2726868"/>
+                <a:ext cx="2244461" cy="830997"/>
+              </a:xfrm>
+              <a:prstGeom prst="rect">
+                <a:avLst/>
+              </a:prstGeom>
+              <a:blipFill>
+                <a:blip r:embed="rId6"/>
+                <a:stretch>
+                  <a:fillRect l="-815" r="-1630" b="-10219"/>
+                </a:stretch>
+              </a:blipFill>
+            </p:spPr>
+            <p:txBody>
+              <a:bodyPr/>
+              <a:lstStyle/>
+              <a:p>
+                <a:r>
+                  <a:rPr lang="zh-CN" altLang="en-US">
+                    <a:noFill/>
+                  </a:rPr>
+                  <a:t> </a:t>
+                </a:r>
+              </a:p>
+            </p:txBody>
+          </p:sp>
+        </mc:Fallback>
+      </mc:AlternateContent>
+      <p:pic>
+        <p:nvPicPr>
+          <p:cNvPr id="16" name="图片 15">
+            <a:extLst>
+              <a:ext uri="{FF2B5EF4-FFF2-40B4-BE49-F238E27FC236}">
+                <a16:creationId xmlns:a16="http://schemas.microsoft.com/office/drawing/2014/main" id="{5AAA9DB6-B37F-5723-E728-F6D0DE4CE282}"/>
+              </a:ext>
+            </a:extLst>
+          </p:cNvPr>
+          <p:cNvPicPr>
+            <a:picLocks noChangeAspect="1"/>
+          </p:cNvPicPr>
+          <p:nvPr/>
+        </p:nvPicPr>
+        <p:blipFill>
+          <a:blip r:embed="rId7"/>
+          <a:stretch>
+            <a:fillRect/>
+          </a:stretch>
+        </p:blipFill>
+        <p:spPr>
+          <a:xfrm>
+            <a:off x="7597134" y="4778630"/>
+            <a:ext cx="4627528" cy="644869"/>
+          </a:xfrm>
+          <a:prstGeom prst="rect">
+            <a:avLst/>
+          </a:prstGeom>
+        </p:spPr>
+      </p:pic>
+      <p:pic>
+        <p:nvPicPr>
+          <p:cNvPr id="18" name="图片 17">
+            <a:extLst>
+              <a:ext uri="{FF2B5EF4-FFF2-40B4-BE49-F238E27FC236}">
+                <a16:creationId xmlns:a16="http://schemas.microsoft.com/office/drawing/2014/main" id="{676774A0-E968-40D2-8C0B-119408C18DDE}"/>
+              </a:ext>
+            </a:extLst>
+          </p:cNvPr>
+          <p:cNvPicPr>
+            <a:picLocks noChangeAspect="1"/>
+          </p:cNvPicPr>
+          <p:nvPr/>
+        </p:nvPicPr>
+        <p:blipFill>
+          <a:blip r:embed="rId8"/>
+          <a:stretch>
+            <a:fillRect/>
+          </a:stretch>
+        </p:blipFill>
+        <p:spPr>
+          <a:xfrm>
+            <a:off x="9162287" y="4335903"/>
+            <a:ext cx="941838" cy="467324"/>
+          </a:xfrm>
+          <a:prstGeom prst="rect">
+            <a:avLst/>
+          </a:prstGeom>
+        </p:spPr>
+      </p:pic>
+      <mc:AlternateContent xmlns:mc="http://schemas.openxmlformats.org/markup-compatibility/2006" xmlns:a14="http://schemas.microsoft.com/office/drawing/2010/main">
+        <mc:Choice Requires="a14">
+          <p:sp>
+            <p:nvSpPr>
+              <p:cNvPr id="20" name="文本框 19">
+                <a:extLst>
+                  <a:ext uri="{FF2B5EF4-FFF2-40B4-BE49-F238E27FC236}">
+                    <a16:creationId xmlns:a16="http://schemas.microsoft.com/office/drawing/2014/main" id="{C8FE9E2C-EF74-2A2E-D075-B33D9CB4B3B9}"/>
+                  </a:ext>
+                </a:extLst>
+              </p:cNvPr>
+              <p:cNvSpPr txBox="1"/>
+              <p:nvPr/>
+            </p:nvSpPr>
+            <p:spPr>
+              <a:xfrm>
+                <a:off x="10032281" y="4308283"/>
+                <a:ext cx="1574074" cy="524439"/>
+              </a:xfrm>
+              <a:prstGeom prst="rect">
+                <a:avLst/>
+              </a:prstGeom>
+              <a:noFill/>
+            </p:spPr>
+            <p:txBody>
+              <a:bodyPr wrap="square">
+                <a:spAutoFit/>
+              </a:bodyPr>
+              <a:lstStyle/>
+              <a:p>
+                <a:pPr indent="0">
+                  <a:lnSpc>
+                    <a:spcPct val="116666"/>
+                  </a:lnSpc>
+                  <a:defRPr/>
+                </a:pPr>
+                <a14:m>
+                  <m:oMathPara xmlns:m="http://schemas.openxmlformats.org/officeDocument/2006/math">
+                    <m:oMathParaPr>
+                      <m:jc m:val="centerGroup"/>
+                    </m:oMathParaPr>
+                    <m:oMath xmlns:m="http://schemas.openxmlformats.org/officeDocument/2006/math">
+                      <m:r>
+                        <a:rPr lang="en-US" altLang="zh-CN" sz="2400" b="1" i="1" u="none" strike="noStrike" smtClean="0">
+                          <a:latin typeface="Cambria Math" panose="02040503050406030204" pitchFamily="18" charset="0"/>
+                          <a:ea typeface="Noto Sans SC"/>
+                          <a:cs typeface="Noto Sans SC"/>
+                          <a:sym typeface="Noto Sans SC"/>
+                        </a:rPr>
+                        <m:t>−</m:t>
+                      </m:r>
+                      <m:r>
+                        <a:rPr lang="en-US" altLang="zh-CN" sz="2400" b="1" i="1" u="none" strike="noStrike" smtClean="0">
+                          <a:latin typeface="Cambria Math" panose="02040503050406030204" pitchFamily="18" charset="0"/>
+                          <a:ea typeface="Noto Sans SC"/>
+                          <a:cs typeface="Noto Sans SC"/>
+                          <a:sym typeface="Noto Sans SC"/>
+                        </a:rPr>
+                        <m:t>𝑰</m:t>
+                      </m:r>
+                      <m:r>
+                        <a:rPr lang="en-US" altLang="zh-CN" sz="2400" b="1" i="1" u="none" strike="noStrike" smtClean="0">
+                          <a:latin typeface="Cambria Math" panose="02040503050406030204" pitchFamily="18" charset="0"/>
+                          <a:ea typeface="Noto Sans SC"/>
+                          <a:cs typeface="Noto Sans SC"/>
+                          <a:sym typeface="Noto Sans SC"/>
+                        </a:rPr>
+                        <m:t>∉</m:t>
+                      </m:r>
+                      <m:r>
+                        <a:rPr lang="en-US" altLang="zh-CN" sz="2400" b="1" i="1" u="none" strike="noStrike" smtClean="0">
+                          <a:latin typeface="Cambria Math" panose="02040503050406030204" pitchFamily="18" charset="0"/>
+                          <a:ea typeface="Noto Sans SC"/>
+                          <a:cs typeface="Noto Sans SC"/>
+                          <a:sym typeface="Noto Sans SC"/>
+                        </a:rPr>
+                        <m:t>𝑺</m:t>
+                      </m:r>
+                    </m:oMath>
+                  </m:oMathPara>
+                </a14:m>
+                <a:endParaRPr lang="en-US" altLang="zh-CN" sz="2400" b="1" i="0" u="none" strike="noStrike" dirty="0">
+                  <a:ea typeface="Noto Sans SC"/>
+                  <a:cs typeface="Noto Sans SC"/>
+                  <a:sym typeface="Noto Sans SC"/>
+                </a:endParaRPr>
+              </a:p>
+            </p:txBody>
+          </p:sp>
+        </mc:Choice>
+        <mc:Fallback xmlns="">
+          <p:sp>
+            <p:nvSpPr>
+              <p:cNvPr id="20" name="文本框 19">
+                <a:extLst>
+                  <a:ext uri="{FF2B5EF4-FFF2-40B4-BE49-F238E27FC236}">
+                    <a16:creationId xmlns:a16="http://schemas.microsoft.com/office/drawing/2014/main" id="{C8FE9E2C-EF74-2A2E-D075-B33D9CB4B3B9}"/>
+                  </a:ext>
+                </a:extLst>
+              </p:cNvPr>
+              <p:cNvSpPr txBox="1">
+                <a:spLocks noRot="1" noChangeAspect="1" noMove="1" noResize="1" noEditPoints="1" noAdjustHandles="1" noChangeArrowheads="1" noChangeShapeType="1" noTextEdit="1"/>
+              </p:cNvSpPr>
+              <p:nvPr/>
+            </p:nvSpPr>
+            <p:spPr>
+              <a:xfrm>
+                <a:off x="10032281" y="4308283"/>
+                <a:ext cx="1574074" cy="524439"/>
+              </a:xfrm>
+              <a:prstGeom prst="rect">
+                <a:avLst/>
+              </a:prstGeom>
+              <a:blipFill>
+                <a:blip r:embed="rId9"/>
+                <a:stretch>
+                  <a:fillRect t="-2326" b="-20930"/>
+                </a:stretch>
+              </a:blipFill>
+            </p:spPr>
+            <p:txBody>
+              <a:bodyPr/>
+              <a:lstStyle/>
+              <a:p>
+                <a:r>
+                  <a:rPr lang="zh-CN" altLang="en-US">
+                    <a:noFill/>
+                  </a:rPr>
+                  <a:t> </a:t>
+                </a:r>
+              </a:p>
+            </p:txBody>
+          </p:sp>
+        </mc:Fallback>
+      </mc:AlternateContent>
+    </p:spTree>
+    <p:extLst>
+      <p:ext uri="{BB962C8B-B14F-4D97-AF65-F5344CB8AC3E}">
+        <p14:creationId xmlns:p14="http://schemas.microsoft.com/office/powerpoint/2010/main" val="1103812012"/>
+      </p:ext>
+    </p:extLst>
+  </p:cSld>
+  <p:clrMapOvr>
+    <a:masterClrMapping/>
+  </p:clrMapOvr>
+  <mc:AlternateContent xmlns:mc="http://schemas.openxmlformats.org/markup-compatibility/2006" xmlns:p159="http://schemas.microsoft.com/office/powerpoint/2015/09/main">
+    <mc:Choice Requires="p159">
+      <p:transition spd="slow">
+        <p159:morph option="byObject"/>
+      </p:transition>
+    </mc:Choice>
+    <mc:Fallback xmlns="">
+      <p:transition spd="slow">
+        <p:fade/>
+      </p:transition>
+    </mc:Fallback>
+  </mc:AlternateContent>
+</p:sld>
+</file>
+
+<file path=ppt/slides/slide33.xml><?xml version="1.0" encoding="utf-8"?>
+<p:sld xmlns:a="http://schemas.openxmlformats.org/drawingml/2006/main" xmlns:r="http://schemas.openxmlformats.org/officeDocument/2006/relationships" xmlns:p="http://schemas.openxmlformats.org/presentationml/2006/main">
+  <p:cSld>
+    <p:spTree>
+      <p:nvGrpSpPr>
+        <p:cNvPr id="1" name="">
+          <a:extLst>
+            <a:ext uri="{FF2B5EF4-FFF2-40B4-BE49-F238E27FC236}">
+              <a16:creationId xmlns:a16="http://schemas.microsoft.com/office/drawing/2014/main" id="{E479546A-2CBE-59A6-C261-467446DA9E46}"/>
+            </a:ext>
+          </a:extLst>
+        </p:cNvPr>
+        <p:cNvGrpSpPr/>
+        <p:nvPr/>
+      </p:nvGrpSpPr>
+      <p:grpSpPr>
+        <a:xfrm>
+          <a:off x="0" y="0"/>
+          <a:ext cx="0" cy="0"/>
+          <a:chOff x="0" y="0"/>
+          <a:chExt cx="0" cy="0"/>
+        </a:xfrm>
+      </p:grpSpPr>
+      <p:sp>
+        <p:nvSpPr>
+          <p:cNvPr id="2" name="TextBox 1">
+            <a:extLst>
+              <a:ext uri="{FF2B5EF4-FFF2-40B4-BE49-F238E27FC236}">
+                <a16:creationId xmlns:a16="http://schemas.microsoft.com/office/drawing/2014/main" id="{C4654040-D654-6E63-3152-AD3758B22670}"/>
+              </a:ext>
+            </a:extLst>
+          </p:cNvPr>
+          <p:cNvSpPr txBox="1"/>
+          <p:nvPr/>
+        </p:nvSpPr>
+        <p:spPr>
+          <a:xfrm>
+            <a:off x="762000" y="635000"/>
+            <a:ext cx="10668000" cy="571500"/>
+          </a:xfrm>
+          <a:prstGeom prst="rect">
+            <a:avLst/>
+          </a:prstGeom>
+          <a:noFill/>
+        </p:spPr>
+        <p:txBody>
+          <a:bodyPr wrap="square">
+            <a:spAutoFit/>
+          </a:bodyPr>
+          <a:lstStyle/>
+          <a:p>
+            <a:pPr algn="l"/>
+            <a:r>
+              <a:rPr sz="3200" b="1">
+                <a:solidFill>
+                  <a:srgbClr val="333333"/>
+                </a:solidFill>
+                <a:latin typeface="Noto Sans SC"/>
+              </a:rPr>
+              <a:t>04  稳定子</a:t>
+            </a:r>
+          </a:p>
+        </p:txBody>
+      </p:sp>
+      <p:sp>
+        <p:nvSpPr>
+          <p:cNvPr id="3" name="TextBox 2">
+            <a:extLst>
+              <a:ext uri="{FF2B5EF4-FFF2-40B4-BE49-F238E27FC236}">
+                <a16:creationId xmlns:a16="http://schemas.microsoft.com/office/drawing/2014/main" id="{81D388A5-9141-369C-54A2-C059C6459760}"/>
+              </a:ext>
+            </a:extLst>
+          </p:cNvPr>
+          <p:cNvSpPr txBox="1"/>
+          <p:nvPr/>
+        </p:nvSpPr>
+        <p:spPr>
+          <a:xfrm>
+            <a:off x="762000" y="1397000"/>
+            <a:ext cx="10668000" cy="444500"/>
+          </a:xfrm>
+          <a:prstGeom prst="rect">
+            <a:avLst/>
+          </a:prstGeom>
+          <a:noFill/>
+        </p:spPr>
+        <p:txBody>
+          <a:bodyPr wrap="square">
+            <a:spAutoFit/>
+          </a:bodyPr>
+          <a:lstStyle/>
+          <a:p>
+            <a:r>
+              <a:rPr sz="2200" b="1" dirty="0">
+                <a:solidFill>
+                  <a:srgbClr val="666666"/>
+                </a:solidFill>
+                <a:latin typeface="Noto Sans SC"/>
+              </a:rPr>
+              <a:t>4.</a:t>
+            </a:r>
+            <a:r>
+              <a:rPr lang="en-US" sz="2200" b="1" dirty="0">
+                <a:solidFill>
+                  <a:srgbClr val="666666"/>
+                </a:solidFill>
+                <a:latin typeface="Noto Sans SC"/>
+              </a:rPr>
+              <a:t>6</a:t>
+            </a:r>
+            <a:r>
+              <a:rPr sz="2200" b="1" dirty="0">
+                <a:solidFill>
+                  <a:srgbClr val="666666"/>
+                </a:solidFill>
+                <a:latin typeface="Noto Sans SC"/>
+              </a:rPr>
+              <a:t> </a:t>
+            </a:r>
+            <a:r>
+              <a:rPr lang="zh-CN" altLang="en-US" sz="2200" b="1" dirty="0">
+                <a:solidFill>
+                  <a:srgbClr val="666666"/>
+                </a:solidFill>
+                <a:latin typeface="Noto Sans SC"/>
+              </a:rPr>
+              <a:t>稳定子定义及其相关性质</a:t>
+            </a:r>
+            <a:endParaRPr sz="2200" b="1" dirty="0">
+              <a:solidFill>
+                <a:srgbClr val="666666"/>
+              </a:solidFill>
+              <a:latin typeface="Noto Sans SC"/>
+            </a:endParaRPr>
+          </a:p>
+        </p:txBody>
+      </p:sp>
+      <p:cxnSp>
+        <p:nvCxnSpPr>
+          <p:cNvPr id="8" name="直接连接符 7">
+            <a:extLst>
+              <a:ext uri="{FF2B5EF4-FFF2-40B4-BE49-F238E27FC236}">
+                <a16:creationId xmlns:a16="http://schemas.microsoft.com/office/drawing/2014/main" id="{70D1A6F2-55A8-F1B0-B2EB-4A9568BAAB5C}"/>
+              </a:ext>
+            </a:extLst>
+          </p:cNvPr>
+          <p:cNvCxnSpPr/>
+          <p:nvPr/>
+        </p:nvCxnSpPr>
+        <p:spPr>
+          <a:xfrm>
+            <a:off x="7534894" y="0"/>
+            <a:ext cx="0" cy="6941127"/>
+          </a:xfrm>
+          <a:prstGeom prst="line">
+            <a:avLst/>
+          </a:prstGeom>
+          <a:ln w="76200">
+            <a:solidFill>
+              <a:schemeClr val="tx1">
+                <a:lumMod val="75000"/>
+                <a:lumOff val="25000"/>
+              </a:schemeClr>
+            </a:solidFill>
+            <a:prstDash val="sysDot"/>
+          </a:ln>
+        </p:spPr>
+        <p:style>
+          <a:lnRef idx="1">
+            <a:schemeClr val="accent1"/>
+          </a:lnRef>
+          <a:fillRef idx="0">
+            <a:schemeClr val="accent1"/>
+          </a:fillRef>
+          <a:effectRef idx="0">
+            <a:schemeClr val="accent1"/>
+          </a:effectRef>
+          <a:fontRef idx="minor">
+            <a:schemeClr val="tx1"/>
+          </a:fontRef>
+        </p:style>
+      </p:cxnSp>
+      <mc:AlternateContent xmlns:mc="http://schemas.openxmlformats.org/markup-compatibility/2006" xmlns:a14="http://schemas.microsoft.com/office/drawing/2010/main">
+        <mc:Choice Requires="a14">
+          <p:sp>
+            <p:nvSpPr>
+              <p:cNvPr id="5" name="AutoShape 11">
+                <a:extLst>
+                  <a:ext uri="{FF2B5EF4-FFF2-40B4-BE49-F238E27FC236}">
+                    <a16:creationId xmlns:a16="http://schemas.microsoft.com/office/drawing/2014/main" id="{E991B5D3-854E-4F62-D67A-FFF7FB91EC0F}"/>
+                  </a:ext>
+                </a:extLst>
+              </p:cNvPr>
+              <p:cNvSpPr/>
+              <p:nvPr/>
+            </p:nvSpPr>
+            <p:spPr>
+              <a:xfrm>
+                <a:off x="713883" y="2201090"/>
+                <a:ext cx="6836445" cy="4578531"/>
+              </a:xfrm>
+              <a:prstGeom prst="rect">
+                <a:avLst/>
+              </a:prstGeom>
+              <a:noFill/>
+              <a:ln w="12700" cap="flat" cmpd="sng">
+                <a:noFill/>
+                <a:prstDash val="solid"/>
+                <a:round/>
+              </a:ln>
+            </p:spPr>
+            <p:txBody>
+              <a:bodyPr vert="horz" wrap="square" lIns="0" tIns="0" rIns="0" bIns="0" rtlCol="0" anchor="ctr" anchorCtr="0"/>
+              <a:lstStyle/>
+              <a:p>
+                <a:pPr indent="0">
+                  <a:lnSpc>
+                    <a:spcPct val="116666"/>
+                  </a:lnSpc>
+                  <a:defRPr/>
+                </a:pPr>
+                <a:r>
+                  <a:rPr lang="zh-CN" altLang="en-US" b="1" i="0" u="none" strike="noStrike" dirty="0">
+                    <a:ea typeface="Noto Sans SC"/>
+                    <a:cs typeface="Noto Sans SC"/>
+                    <a:sym typeface="Noto Sans SC"/>
+                  </a:rPr>
+                  <a:t>正常来讲 </a:t>
+                </a:r>
+                <a14:m>
+                  <m:oMath xmlns:m="http://schemas.openxmlformats.org/officeDocument/2006/math">
+                    <m:r>
+                      <a:rPr lang="en-US" altLang="zh-CN" b="1" i="1" u="none" strike="noStrike" smtClean="0">
+                        <a:latin typeface="Cambria Math" panose="02040503050406030204" pitchFamily="18" charset="0"/>
+                        <a:ea typeface="Noto Sans SC"/>
+                        <a:cs typeface="Noto Sans SC"/>
+                        <a:sym typeface="Noto Sans SC"/>
+                      </a:rPr>
+                      <m:t>𝑻</m:t>
+                    </m:r>
+                    <m:r>
+                      <a:rPr lang="en-US" altLang="zh-CN" b="1" i="1" u="none" strike="noStrike" smtClean="0">
+                        <a:latin typeface="Cambria Math" panose="02040503050406030204" pitchFamily="18" charset="0"/>
+                        <a:ea typeface="Noto Sans SC"/>
+                        <a:cs typeface="Noto Sans SC"/>
+                        <a:sym typeface="Noto Sans SC"/>
+                      </a:rPr>
+                      <m:t>⊆</m:t>
+                    </m:r>
+                    <m:r>
+                      <a:rPr lang="en-US" altLang="zh-CN" b="1" i="1" u="none" strike="noStrike" smtClean="0">
+                        <a:latin typeface="Cambria Math" panose="02040503050406030204" pitchFamily="18" charset="0"/>
+                        <a:ea typeface="Noto Sans SC"/>
+                        <a:cs typeface="Noto Sans SC"/>
+                        <a:sym typeface="Noto Sans SC"/>
+                      </a:rPr>
+                      <m:t>𝓣</m:t>
+                    </m:r>
+                    <m:r>
+                      <a:rPr lang="en-US" altLang="zh-CN" b="1" i="1" u="none" strike="noStrike" smtClean="0">
+                        <a:latin typeface="Cambria Math" panose="02040503050406030204" pitchFamily="18" charset="0"/>
+                        <a:ea typeface="Noto Sans SC"/>
+                        <a:cs typeface="Noto Sans SC"/>
+                        <a:sym typeface="Noto Sans SC"/>
+                      </a:rPr>
+                      <m:t>(</m:t>
+                    </m:r>
+                    <m:r>
+                      <a:rPr lang="en-US" altLang="zh-CN" b="1" i="0" u="none" strike="noStrike" smtClean="0">
+                        <a:latin typeface="Cambria Math" panose="02040503050406030204" pitchFamily="18" charset="0"/>
+                        <a:ea typeface="Noto Sans SC"/>
+                        <a:cs typeface="Noto Sans SC"/>
+                        <a:sym typeface="Noto Sans SC"/>
+                      </a:rPr>
+                      <m:t>𝐒</m:t>
+                    </m:r>
+                    <m:r>
+                      <a:rPr lang="en-US" altLang="zh-CN" b="1" i="1" u="none" strike="noStrike" smtClean="0">
+                        <a:latin typeface="Cambria Math" panose="02040503050406030204" pitchFamily="18" charset="0"/>
+                        <a:ea typeface="Noto Sans SC"/>
+                        <a:cs typeface="Noto Sans SC"/>
+                        <a:sym typeface="Noto Sans SC"/>
+                      </a:rPr>
+                      <m:t>(</m:t>
+                    </m:r>
+                    <m:r>
+                      <a:rPr lang="en-US" altLang="zh-CN" b="1" i="1" u="none" strike="noStrike" smtClean="0">
+                        <a:latin typeface="Cambria Math" panose="02040503050406030204" pitchFamily="18" charset="0"/>
+                        <a:ea typeface="Noto Sans SC"/>
+                        <a:cs typeface="Noto Sans SC"/>
+                        <a:sym typeface="Noto Sans SC"/>
+                      </a:rPr>
+                      <m:t>𝑻</m:t>
+                    </m:r>
+                    <m:r>
+                      <a:rPr lang="en-US" altLang="zh-CN" b="1" i="1" u="none" strike="noStrike" smtClean="0">
+                        <a:latin typeface="Cambria Math" panose="02040503050406030204" pitchFamily="18" charset="0"/>
+                        <a:ea typeface="Noto Sans SC"/>
+                        <a:cs typeface="Noto Sans SC"/>
+                        <a:sym typeface="Noto Sans SC"/>
+                      </a:rPr>
+                      <m:t>))</m:t>
+                    </m:r>
+                  </m:oMath>
+                </a14:m>
+                <a:r>
+                  <a:rPr lang="zh-CN" altLang="en-US" b="1" i="0" u="none" strike="noStrike" dirty="0">
+                    <a:ea typeface="Noto Sans SC"/>
+                    <a:cs typeface="Noto Sans SC"/>
+                    <a:sym typeface="Noto Sans SC"/>
+                  </a:rPr>
+                  <a:t>，但是当</a:t>
+                </a:r>
+                <a14:m>
+                  <m:oMath xmlns:m="http://schemas.openxmlformats.org/officeDocument/2006/math">
+                    <m:r>
+                      <a:rPr lang="en-US" altLang="zh-CN" b="1" i="0" u="none" strike="noStrike" smtClean="0">
+                        <a:latin typeface="Cambria Math" panose="02040503050406030204" pitchFamily="18" charset="0"/>
+                        <a:ea typeface="Noto Sans SC"/>
+                        <a:cs typeface="Noto Sans SC"/>
+                        <a:sym typeface="Noto Sans SC"/>
+                      </a:rPr>
+                      <m:t> </m:t>
+                    </m:r>
+                    <m:r>
+                      <a:rPr lang="en-US" altLang="zh-CN" b="1" i="1" u="none" strike="noStrike" smtClean="0">
+                        <a:latin typeface="Cambria Math" panose="02040503050406030204" pitchFamily="18" charset="0"/>
+                        <a:ea typeface="Noto Sans SC"/>
+                        <a:cs typeface="Noto Sans SC"/>
+                        <a:sym typeface="Noto Sans SC"/>
+                      </a:rPr>
+                      <m:t>𝑻</m:t>
+                    </m:r>
+                    <m:r>
+                      <a:rPr lang="en-US" altLang="zh-CN" b="1" i="1" u="none" strike="noStrike" smtClean="0">
+                        <a:latin typeface="Cambria Math" panose="02040503050406030204" pitchFamily="18" charset="0"/>
+                        <a:ea typeface="Noto Sans SC"/>
+                        <a:cs typeface="Noto Sans SC"/>
+                        <a:sym typeface="Noto Sans SC"/>
+                      </a:rPr>
+                      <m:t>=</m:t>
+                    </m:r>
+                    <m:r>
+                      <a:rPr lang="en-US" altLang="zh-CN" b="1" i="0" smtClean="0">
+                        <a:latin typeface="Cambria Math" panose="02040503050406030204" pitchFamily="18" charset="0"/>
+                        <a:ea typeface="Noto Sans SC"/>
+                        <a:cs typeface="Noto Sans SC"/>
+                        <a:sym typeface="Noto Sans SC"/>
+                      </a:rPr>
+                      <m:t>𝓣</m:t>
+                    </m:r>
+                    <m:r>
+                      <a:rPr lang="en-US" altLang="zh-CN" b="1" i="0" smtClean="0">
+                        <a:latin typeface="Cambria Math" panose="02040503050406030204" pitchFamily="18" charset="0"/>
+                        <a:ea typeface="Noto Sans SC"/>
+                        <a:cs typeface="Noto Sans SC"/>
+                        <a:sym typeface="Noto Sans SC"/>
+                      </a:rPr>
+                      <m:t>(</m:t>
+                    </m:r>
+                    <m:r>
+                      <a:rPr lang="en-US" altLang="zh-CN" b="1" i="0" smtClean="0">
+                        <a:latin typeface="Cambria Math" panose="02040503050406030204" pitchFamily="18" charset="0"/>
+                        <a:ea typeface="Noto Sans SC"/>
+                        <a:cs typeface="Noto Sans SC"/>
+                        <a:sym typeface="Noto Sans SC"/>
+                      </a:rPr>
+                      <m:t>𝐒</m:t>
+                    </m:r>
+                    <m:r>
+                      <a:rPr lang="en-US" altLang="zh-CN" b="1" i="0" smtClean="0">
+                        <a:latin typeface="Cambria Math" panose="02040503050406030204" pitchFamily="18" charset="0"/>
+                        <a:ea typeface="Noto Sans SC"/>
+                        <a:cs typeface="Noto Sans SC"/>
+                        <a:sym typeface="Noto Sans SC"/>
+                      </a:rPr>
+                      <m:t>(</m:t>
+                    </m:r>
+                    <m:r>
+                      <a:rPr lang="en-US" altLang="zh-CN" b="1" i="1" smtClean="0">
+                        <a:latin typeface="Cambria Math" panose="02040503050406030204" pitchFamily="18" charset="0"/>
+                        <a:ea typeface="Noto Sans SC"/>
+                        <a:cs typeface="Noto Sans SC"/>
+                        <a:sym typeface="Noto Sans SC"/>
+                      </a:rPr>
+                      <m:t>𝑻</m:t>
+                    </m:r>
+                    <m:r>
+                      <a:rPr lang="en-US" altLang="zh-CN" b="1" i="0" smtClean="0">
+                        <a:latin typeface="Cambria Math" panose="02040503050406030204" pitchFamily="18" charset="0"/>
+                        <a:ea typeface="Noto Sans SC"/>
+                        <a:cs typeface="Noto Sans SC"/>
+                        <a:sym typeface="Noto Sans SC"/>
+                      </a:rPr>
+                      <m:t>)) </m:t>
+                    </m:r>
+                  </m:oMath>
+                </a14:m>
+                <a:r>
+                  <a:rPr lang="zh-CN" altLang="en-US" b="1" i="0" dirty="0">
+                    <a:latin typeface="Cambria Math" panose="02040503050406030204" pitchFamily="18" charset="0"/>
+                    <a:ea typeface="Noto Sans SC"/>
+                    <a:cs typeface="Noto Sans SC"/>
+                    <a:sym typeface="Noto Sans SC"/>
+                  </a:rPr>
+                  <a:t>时</a:t>
+                </a:r>
+                <a:endParaRPr lang="en-US" altLang="zh-CN" b="1" dirty="0">
+                  <a:latin typeface="Cambria Math" panose="02040503050406030204" pitchFamily="18" charset="0"/>
+                  <a:ea typeface="Noto Sans SC"/>
+                  <a:cs typeface="Noto Sans SC"/>
+                  <a:sym typeface="Noto Sans SC"/>
+                </a:endParaRPr>
+              </a:p>
+              <a:p>
+                <a:pPr indent="0">
+                  <a:lnSpc>
+                    <a:spcPct val="116666"/>
+                  </a:lnSpc>
+                  <a:defRPr/>
+                </a:pPr>
+                <a:r>
+                  <a:rPr lang="zh-CN" altLang="en-US" b="1" dirty="0">
+                    <a:latin typeface="Cambria Math" panose="02040503050406030204" pitchFamily="18" charset="0"/>
+                    <a:ea typeface="Noto Sans SC"/>
+                    <a:cs typeface="Noto Sans SC"/>
+                    <a:sym typeface="Noto Sans SC"/>
+                  </a:rPr>
+                  <a:t>此时的</a:t>
+                </a:r>
+                <a14:m>
+                  <m:oMath xmlns:m="http://schemas.openxmlformats.org/officeDocument/2006/math">
+                    <m:r>
+                      <a:rPr lang="en-US" altLang="zh-CN" b="1" i="0" smtClean="0">
+                        <a:latin typeface="Cambria Math" panose="02040503050406030204" pitchFamily="18" charset="0"/>
+                        <a:ea typeface="Noto Sans SC"/>
+                        <a:cs typeface="Noto Sans SC"/>
+                        <a:sym typeface="Noto Sans SC"/>
+                      </a:rPr>
+                      <m:t> </m:t>
+                    </m:r>
+                    <m:r>
+                      <a:rPr lang="en-US" altLang="zh-CN" b="1" i="1" smtClean="0">
+                        <a:latin typeface="Cambria Math" panose="02040503050406030204" pitchFamily="18" charset="0"/>
+                        <a:ea typeface="Noto Sans SC"/>
+                        <a:cs typeface="Noto Sans SC"/>
+                        <a:sym typeface="Noto Sans SC"/>
+                      </a:rPr>
+                      <m:t>𝑻</m:t>
+                    </m:r>
+                    <m:r>
+                      <a:rPr lang="en-US" altLang="zh-CN" b="1" i="0" smtClean="0">
+                        <a:latin typeface="Cambria Math" panose="02040503050406030204" pitchFamily="18" charset="0"/>
+                        <a:ea typeface="Noto Sans SC"/>
+                        <a:cs typeface="Noto Sans SC"/>
+                        <a:sym typeface="Noto Sans SC"/>
+                      </a:rPr>
+                      <m:t> </m:t>
+                    </m:r>
+                  </m:oMath>
+                </a14:m>
+                <a:r>
+                  <a:rPr lang="zh-CN" altLang="en-US" b="1" i="0" u="none" strike="noStrike" dirty="0">
+                    <a:ea typeface="Noto Sans SC"/>
+                    <a:cs typeface="Noto Sans SC"/>
+                    <a:sym typeface="Noto Sans SC"/>
+                  </a:rPr>
+                  <a:t>被称作</a:t>
+                </a:r>
+                <a:r>
+                  <a:rPr lang="zh-CN" altLang="en-US" b="1" i="0" u="none" strike="noStrike" dirty="0">
+                    <a:solidFill>
+                      <a:schemeClr val="accent2"/>
+                    </a:solidFill>
+                    <a:ea typeface="Noto Sans SC"/>
+                    <a:cs typeface="Noto Sans SC"/>
+                    <a:sym typeface="Noto Sans SC"/>
+                  </a:rPr>
+                  <a:t>稳定子码</a:t>
+                </a:r>
+                <a:r>
+                  <a:rPr lang="en-US" altLang="zh-CN" b="1" i="0" u="none" strike="noStrike" dirty="0">
+                    <a:solidFill>
+                      <a:schemeClr val="accent2"/>
+                    </a:solidFill>
+                    <a:ea typeface="Noto Sans SC"/>
+                    <a:cs typeface="Noto Sans SC"/>
+                    <a:sym typeface="Noto Sans SC"/>
+                  </a:rPr>
+                  <a:t>(stabilizer code)</a:t>
+                </a:r>
+              </a:p>
+              <a:p>
+                <a:pPr indent="0">
+                  <a:lnSpc>
+                    <a:spcPct val="116666"/>
+                  </a:lnSpc>
+                  <a:defRPr/>
+                </a:pPr>
+                <a:endParaRPr lang="en-US" altLang="zh-CN" b="1" i="0" u="none" strike="noStrike" dirty="0">
+                  <a:solidFill>
+                    <a:schemeClr val="accent2"/>
+                  </a:solidFill>
+                  <a:ea typeface="Noto Sans SC"/>
+                  <a:cs typeface="Noto Sans SC"/>
+                  <a:sym typeface="Noto Sans SC"/>
+                </a:endParaRPr>
+              </a:p>
+              <a:p>
+                <a:pPr indent="0">
+                  <a:lnSpc>
+                    <a:spcPct val="116666"/>
+                  </a:lnSpc>
+                  <a:defRPr/>
+                </a:pPr>
+                <a:r>
+                  <a:rPr lang="zh-CN" altLang="en-US" b="1" i="0" u="none" strike="noStrike" dirty="0">
+                    <a:ea typeface="Noto Sans SC"/>
+                    <a:cs typeface="Noto Sans SC"/>
+                    <a:sym typeface="Noto Sans SC"/>
+                  </a:rPr>
+                  <a:t>并且当一个纠错码</a:t>
+                </a:r>
+                <a:r>
+                  <a:rPr lang="zh-CN" altLang="en-US" b="1" i="0" u="none" strike="noStrike" dirty="0">
+                    <a:solidFill>
+                      <a:schemeClr val="accent2"/>
+                    </a:solidFill>
+                    <a:ea typeface="Noto Sans SC"/>
+                    <a:cs typeface="Noto Sans SC"/>
+                    <a:sym typeface="Noto Sans SC"/>
+                  </a:rPr>
+                  <a:t>从稳定子直接获得时</a:t>
+                </a:r>
+                <a:r>
+                  <a:rPr lang="zh-CN" altLang="en-US" b="1" i="0" u="none" strike="noStrike" dirty="0">
+                    <a:ea typeface="Noto Sans SC"/>
+                    <a:cs typeface="Noto Sans SC"/>
+                    <a:sym typeface="Noto Sans SC"/>
+                  </a:rPr>
+                  <a:t>其</a:t>
+                </a:r>
+                <a:r>
+                  <a:rPr lang="zh-CN" altLang="en-US" b="1" i="0" u="none" strike="noStrike" dirty="0">
+                    <a:solidFill>
+                      <a:schemeClr val="accent2"/>
+                    </a:solidFill>
+                    <a:ea typeface="Noto Sans SC"/>
+                    <a:cs typeface="Noto Sans SC"/>
+                    <a:sym typeface="Noto Sans SC"/>
+                  </a:rPr>
+                  <a:t>总能是稳定子码</a:t>
+                </a:r>
+                <a:endParaRPr lang="en-US" altLang="zh-CN" b="1" i="0" u="none" strike="noStrike" dirty="0">
+                  <a:solidFill>
+                    <a:schemeClr val="accent2"/>
+                  </a:solidFill>
+                  <a:ea typeface="Noto Sans SC"/>
+                  <a:cs typeface="Noto Sans SC"/>
+                  <a:sym typeface="Noto Sans SC"/>
+                </a:endParaRPr>
+              </a:p>
+              <a:p>
+                <a:pPr indent="0">
+                  <a:lnSpc>
+                    <a:spcPct val="116666"/>
+                  </a:lnSpc>
+                  <a:defRPr/>
+                </a:pPr>
+                <a:r>
+                  <a:rPr lang="zh-CN" altLang="en-US" b="1" dirty="0">
+                    <a:ea typeface="Noto Sans SC"/>
+                    <a:cs typeface="Noto Sans SC"/>
+                    <a:sym typeface="Noto Sans SC"/>
+                  </a:rPr>
+                  <a:t>换句话说，我们确实可以从稳定子出发直接获得稳定子码</a:t>
+                </a:r>
+                <a:endParaRPr lang="en-US" altLang="zh-CN" b="1" dirty="0">
+                  <a:ea typeface="Noto Sans SC"/>
+                  <a:cs typeface="Noto Sans SC"/>
+                  <a:sym typeface="Noto Sans SC"/>
+                </a:endParaRPr>
+              </a:p>
+              <a:p>
+                <a:pPr indent="0">
+                  <a:lnSpc>
+                    <a:spcPct val="116666"/>
+                  </a:lnSpc>
+                  <a:defRPr/>
+                </a:pPr>
+                <a:endParaRPr lang="en-US" altLang="zh-CN" b="1" i="0" u="none" strike="noStrike" dirty="0">
+                  <a:ea typeface="Noto Sans SC"/>
+                  <a:cs typeface="Noto Sans SC"/>
+                  <a:sym typeface="Noto Sans SC"/>
+                </a:endParaRPr>
+              </a:p>
+              <a:p>
+                <a:pPr indent="0">
+                  <a:lnSpc>
+                    <a:spcPct val="116666"/>
+                  </a:lnSpc>
+                  <a:defRPr/>
+                </a:pPr>
+                <a:r>
+                  <a:rPr lang="zh-CN" altLang="en-US" b="1" dirty="0">
+                    <a:ea typeface="Noto Sans SC"/>
+                    <a:cs typeface="Noto Sans SC"/>
+                    <a:sym typeface="Noto Sans SC"/>
+                  </a:rPr>
+                  <a:t>接下来再给出生成元的特点</a:t>
+                </a:r>
+                <a:endParaRPr lang="en-US" altLang="zh-CN" b="1" dirty="0">
+                  <a:ea typeface="Noto Sans SC"/>
+                  <a:cs typeface="Noto Sans SC"/>
+                  <a:sym typeface="Noto Sans SC"/>
+                </a:endParaRPr>
+              </a:p>
+              <a:p>
+                <a:pPr indent="0">
+                  <a:lnSpc>
+                    <a:spcPct val="116666"/>
+                  </a:lnSpc>
+                  <a:defRPr/>
+                </a:pPr>
+                <a:r>
+                  <a:rPr lang="zh-CN" altLang="en-US" b="1" dirty="0">
+                    <a:ea typeface="Noto Sans SC"/>
+                    <a:cs typeface="Noto Sans SC"/>
+                    <a:sym typeface="Noto Sans SC"/>
+                  </a:rPr>
+                  <a:t>生成元中的算符之间相互完全独立，任意一个都无法写成剩余算符的乘积</a:t>
+                </a:r>
+                <a:endParaRPr lang="en-US" altLang="zh-CN" b="1" dirty="0">
+                  <a:ea typeface="Noto Sans SC"/>
+                  <a:cs typeface="Noto Sans SC"/>
+                  <a:sym typeface="Noto Sans SC"/>
+                </a:endParaRPr>
+              </a:p>
+              <a:p>
+                <a:pPr indent="0">
+                  <a:lnSpc>
+                    <a:spcPct val="116666"/>
+                  </a:lnSpc>
+                  <a:defRPr/>
+                </a:pPr>
+                <a:endParaRPr lang="en-US" altLang="zh-CN" b="1" dirty="0">
+                  <a:ea typeface="Noto Sans SC"/>
+                  <a:cs typeface="Noto Sans SC"/>
+                  <a:sym typeface="Noto Sans SC"/>
+                </a:endParaRPr>
+              </a:p>
+              <a:p>
+                <a:pPr indent="0">
+                  <a:lnSpc>
+                    <a:spcPct val="116666"/>
+                  </a:lnSpc>
+                  <a:defRPr/>
+                </a:pPr>
+                <a:r>
+                  <a:rPr lang="zh-CN" altLang="en-US" b="1" dirty="0">
+                    <a:ea typeface="Noto Sans SC"/>
+                    <a:cs typeface="Noto Sans SC"/>
+                    <a:sym typeface="Noto Sans SC"/>
+                  </a:rPr>
+                  <a:t>基于这一特点以及之前稳定子群的性质</a:t>
+                </a:r>
+                <a:endParaRPr lang="en-US" altLang="zh-CN" b="1" dirty="0">
+                  <a:ea typeface="Noto Sans SC"/>
+                  <a:cs typeface="Noto Sans SC"/>
+                  <a:sym typeface="Noto Sans SC"/>
+                </a:endParaRPr>
+              </a:p>
+              <a:p>
+                <a:pPr indent="0">
+                  <a:lnSpc>
+                    <a:spcPct val="116666"/>
+                  </a:lnSpc>
+                  <a:defRPr/>
+                </a:pPr>
+                <a:r>
+                  <a:rPr lang="en-US" altLang="zh-CN" b="1" dirty="0">
+                    <a:ea typeface="Noto Sans SC"/>
+                    <a:cs typeface="Noto Sans SC"/>
+                    <a:sym typeface="Noto Sans SC"/>
+                  </a:rPr>
+                  <a:t>1.</a:t>
+                </a:r>
+                <a:r>
+                  <a:rPr lang="zh-CN" altLang="en-US" b="1" dirty="0">
+                    <a:ea typeface="Noto Sans SC"/>
+                    <a:cs typeface="Noto Sans SC"/>
+                    <a:sym typeface="Noto Sans SC"/>
+                  </a:rPr>
+                  <a:t>算符间相互对易 </a:t>
+                </a:r>
+                <a:r>
+                  <a:rPr lang="en-US" altLang="zh-CN" b="1" dirty="0">
+                    <a:ea typeface="Noto Sans SC"/>
+                    <a:cs typeface="Noto Sans SC"/>
+                    <a:sym typeface="Noto Sans SC"/>
+                  </a:rPr>
+                  <a:t>(</a:t>
+                </a:r>
+                <a:r>
+                  <a:rPr lang="zh-CN" altLang="en-US" b="1" dirty="0">
+                    <a:solidFill>
+                      <a:schemeClr val="accent2"/>
+                    </a:solidFill>
+                    <a:ea typeface="Noto Sans SC"/>
+                    <a:cs typeface="Noto Sans SC"/>
+                    <a:sym typeface="Noto Sans SC"/>
+                  </a:rPr>
+                  <a:t>乘积顺序无关紧要</a:t>
+                </a:r>
+                <a:r>
+                  <a:rPr lang="en-US" altLang="zh-CN" b="1" dirty="0">
+                    <a:ea typeface="Noto Sans SC"/>
+                    <a:cs typeface="Noto Sans SC"/>
+                    <a:sym typeface="Noto Sans SC"/>
+                  </a:rPr>
+                  <a:t>)</a:t>
+                </a:r>
+              </a:p>
+              <a:p>
+                <a:pPr indent="0">
+                  <a:lnSpc>
+                    <a:spcPct val="116666"/>
+                  </a:lnSpc>
+                  <a:defRPr/>
+                </a:pPr>
+                <a:r>
+                  <a:rPr lang="en-US" altLang="zh-CN" b="1" dirty="0">
+                    <a:ea typeface="Noto Sans SC"/>
+                    <a:cs typeface="Noto Sans SC"/>
+                    <a:sym typeface="Noto Sans SC"/>
+                  </a:rPr>
+                  <a:t>2.</a:t>
+                </a:r>
+                <a:r>
+                  <a:rPr lang="zh-CN" altLang="en-US" b="1" dirty="0">
+                    <a:ea typeface="Noto Sans SC"/>
+                    <a:cs typeface="Noto Sans SC"/>
+                    <a:sym typeface="Noto Sans SC"/>
+                  </a:rPr>
+                  <a:t>算符自身的平方为</a:t>
+                </a:r>
+                <a14:m>
+                  <m:oMath xmlns:m="http://schemas.openxmlformats.org/officeDocument/2006/math">
+                    <m:r>
+                      <a:rPr lang="en-US" altLang="zh-CN" b="1" i="1" smtClean="0">
+                        <a:latin typeface="Cambria Math" panose="02040503050406030204" pitchFamily="18" charset="0"/>
+                        <a:ea typeface="Noto Sans SC"/>
+                        <a:cs typeface="Noto Sans SC"/>
+                        <a:sym typeface="Noto Sans SC"/>
+                      </a:rPr>
+                      <m:t>𝑰</m:t>
+                    </m:r>
+                  </m:oMath>
+                </a14:m>
+                <a:r>
+                  <a:rPr lang="en-US" altLang="zh-CN" b="1" i="1" dirty="0">
+                    <a:ea typeface="Noto Sans SC"/>
+                    <a:cs typeface="Noto Sans SC"/>
+                    <a:sym typeface="Noto Sans SC"/>
+                  </a:rPr>
+                  <a:t> </a:t>
+                </a:r>
+                <a:r>
+                  <a:rPr lang="en-US" altLang="zh-CN" b="1" dirty="0">
+                    <a:ea typeface="Noto Sans SC"/>
+                    <a:cs typeface="Noto Sans SC"/>
+                    <a:sym typeface="Noto Sans SC"/>
+                  </a:rPr>
+                  <a:t>(</a:t>
+                </a:r>
+                <a:r>
+                  <a:rPr lang="zh-CN" altLang="en-US" b="1" dirty="0">
+                    <a:solidFill>
+                      <a:schemeClr val="accent2"/>
+                    </a:solidFill>
+                    <a:ea typeface="Noto Sans SC"/>
+                    <a:cs typeface="Noto Sans SC"/>
+                    <a:sym typeface="Noto Sans SC"/>
+                  </a:rPr>
+                  <a:t>任意算符的幂次都可以收敛到</a:t>
+                </a:r>
+                <a:r>
+                  <a:rPr lang="en-US" altLang="zh-CN" b="1" dirty="0">
+                    <a:solidFill>
+                      <a:schemeClr val="accent2"/>
+                    </a:solidFill>
+                    <a:ea typeface="Noto Sans SC"/>
+                    <a:cs typeface="Noto Sans SC"/>
+                    <a:sym typeface="Noto Sans SC"/>
+                  </a:rPr>
+                  <a:t>1</a:t>
+                </a:r>
+                <a:r>
+                  <a:rPr lang="en-US" altLang="zh-CN" b="1" dirty="0">
+                    <a:ea typeface="Noto Sans SC"/>
+                    <a:cs typeface="Noto Sans SC"/>
+                    <a:sym typeface="Noto Sans SC"/>
+                  </a:rPr>
+                  <a:t>)</a:t>
+                </a:r>
+              </a:p>
+              <a:p>
+                <a:pPr indent="0">
+                  <a:lnSpc>
+                    <a:spcPct val="116666"/>
+                  </a:lnSpc>
+                  <a:defRPr/>
+                </a:pPr>
+                <a:r>
+                  <a:rPr lang="zh-CN" altLang="en-US" b="1" dirty="0">
+                    <a:ea typeface="Noto Sans SC"/>
+                    <a:cs typeface="Noto Sans SC"/>
+                    <a:sym typeface="Noto Sans SC"/>
+                  </a:rPr>
+                  <a:t>得到了右边通过一组生成元获得稳定子群的式子</a:t>
+                </a:r>
+                <a:endParaRPr lang="en-US" altLang="zh-CN" b="1" dirty="0">
+                  <a:ea typeface="Noto Sans SC"/>
+                  <a:cs typeface="Noto Sans SC"/>
+                  <a:sym typeface="Noto Sans SC"/>
+                </a:endParaRPr>
+              </a:p>
+              <a:p>
+                <a:pPr indent="0">
+                  <a:lnSpc>
+                    <a:spcPct val="116666"/>
+                  </a:lnSpc>
+                  <a:defRPr/>
+                </a:pPr>
+                <a:endParaRPr lang="en-US" altLang="zh-CN" b="1" dirty="0">
+                  <a:ea typeface="Noto Sans SC"/>
+                  <a:cs typeface="Noto Sans SC"/>
+                  <a:sym typeface="Noto Sans SC"/>
+                </a:endParaRPr>
+              </a:p>
+              <a:p>
+                <a:pPr indent="0">
+                  <a:lnSpc>
+                    <a:spcPct val="116666"/>
+                  </a:lnSpc>
+                  <a:defRPr/>
+                </a:pPr>
+                <a:endParaRPr lang="en-US" altLang="zh-CN" b="1" i="0" u="none" strike="noStrike" dirty="0">
+                  <a:ea typeface="Noto Sans SC"/>
+                  <a:cs typeface="Noto Sans SC"/>
+                  <a:sym typeface="Noto Sans SC"/>
+                </a:endParaRPr>
+              </a:p>
+            </p:txBody>
+          </p:sp>
+        </mc:Choice>
+        <mc:Fallback xmlns="">
+          <p:sp>
+            <p:nvSpPr>
+              <p:cNvPr id="5" name="AutoShape 11">
+                <a:extLst>
+                  <a:ext uri="{FF2B5EF4-FFF2-40B4-BE49-F238E27FC236}">
+                    <a16:creationId xmlns:a16="http://schemas.microsoft.com/office/drawing/2014/main" id="{E991B5D3-854E-4F62-D67A-FFF7FB91EC0F}"/>
+                  </a:ext>
+                </a:extLst>
+              </p:cNvPr>
+              <p:cNvSpPr>
+                <a:spLocks noRot="1" noChangeAspect="1" noMove="1" noResize="1" noEditPoints="1" noAdjustHandles="1" noChangeArrowheads="1" noChangeShapeType="1" noTextEdit="1"/>
+              </p:cNvSpPr>
+              <p:nvPr/>
+            </p:nvSpPr>
+            <p:spPr>
+              <a:xfrm>
+                <a:off x="713883" y="2201090"/>
+                <a:ext cx="6836445" cy="4578531"/>
+              </a:xfrm>
+              <a:prstGeom prst="rect">
+                <a:avLst/>
+              </a:prstGeom>
+              <a:blipFill>
+                <a:blip r:embed="rId3"/>
+                <a:stretch>
+                  <a:fillRect l="-2050" t="-7324" b="-9055"/>
+                </a:stretch>
+              </a:blipFill>
+              <a:ln w="12700" cap="flat" cmpd="sng">
+                <a:noFill/>
+                <a:prstDash val="solid"/>
+                <a:round/>
+              </a:ln>
+            </p:spPr>
+            <p:txBody>
+              <a:bodyPr/>
+              <a:lstStyle/>
+              <a:p>
+                <a:r>
+                  <a:rPr lang="zh-CN" altLang="en-US">
+                    <a:noFill/>
+                  </a:rPr>
+                  <a:t> </a:t>
+                </a:r>
+              </a:p>
+            </p:txBody>
+          </p:sp>
+        </mc:Fallback>
+      </mc:AlternateContent>
+      <p:pic>
+        <p:nvPicPr>
+          <p:cNvPr id="10" name="图片 9">
+            <a:extLst>
+              <a:ext uri="{FF2B5EF4-FFF2-40B4-BE49-F238E27FC236}">
+                <a16:creationId xmlns:a16="http://schemas.microsoft.com/office/drawing/2014/main" id="{E8F128F6-B40E-DB39-C976-3F10835A29D6}"/>
+              </a:ext>
+            </a:extLst>
+          </p:cNvPr>
+          <p:cNvPicPr>
+            <a:picLocks noChangeAspect="1"/>
+          </p:cNvPicPr>
+          <p:nvPr/>
+        </p:nvPicPr>
+        <p:blipFill>
+          <a:blip r:embed="rId4"/>
+          <a:stretch>
+            <a:fillRect/>
+          </a:stretch>
+        </p:blipFill>
+        <p:spPr>
+          <a:xfrm>
+            <a:off x="7603620" y="2008092"/>
+            <a:ext cx="4570963" cy="454029"/>
+          </a:xfrm>
+          <a:prstGeom prst="rect">
+            <a:avLst/>
+          </a:prstGeom>
+        </p:spPr>
+      </p:pic>
+      <p:pic>
+        <p:nvPicPr>
+          <p:cNvPr id="12" name="图片 11">
+            <a:extLst>
+              <a:ext uri="{FF2B5EF4-FFF2-40B4-BE49-F238E27FC236}">
+                <a16:creationId xmlns:a16="http://schemas.microsoft.com/office/drawing/2014/main" id="{F608A40C-E036-A5CB-167D-E636D6BE717D}"/>
+              </a:ext>
+            </a:extLst>
+          </p:cNvPr>
+          <p:cNvPicPr>
+            <a:picLocks noChangeAspect="1"/>
+          </p:cNvPicPr>
+          <p:nvPr/>
+        </p:nvPicPr>
+        <p:blipFill>
+          <a:blip r:embed="rId5"/>
+          <a:stretch>
+            <a:fillRect/>
+          </a:stretch>
+        </p:blipFill>
+        <p:spPr>
+          <a:xfrm>
+            <a:off x="8903638" y="1551657"/>
+            <a:ext cx="1853625" cy="389576"/>
+          </a:xfrm>
+          <a:prstGeom prst="rect">
+            <a:avLst/>
+          </a:prstGeom>
+        </p:spPr>
+      </p:pic>
+      <p:pic>
+        <p:nvPicPr>
+          <p:cNvPr id="16" name="图片 15">
+            <a:extLst>
+              <a:ext uri="{FF2B5EF4-FFF2-40B4-BE49-F238E27FC236}">
+                <a16:creationId xmlns:a16="http://schemas.microsoft.com/office/drawing/2014/main" id="{B2EC5ACC-B5AC-BF5C-99C2-E3BF8E71EE4C}"/>
+              </a:ext>
+            </a:extLst>
+          </p:cNvPr>
+          <p:cNvPicPr>
+            <a:picLocks noChangeAspect="1"/>
+          </p:cNvPicPr>
+          <p:nvPr/>
+        </p:nvPicPr>
+        <p:blipFill>
+          <a:blip r:embed="rId6"/>
+          <a:stretch>
+            <a:fillRect/>
+          </a:stretch>
+        </p:blipFill>
+        <p:spPr>
+          <a:xfrm>
+            <a:off x="7597134" y="2923712"/>
+            <a:ext cx="4627528" cy="644869"/>
+          </a:xfrm>
+          <a:prstGeom prst="rect">
+            <a:avLst/>
+          </a:prstGeom>
+        </p:spPr>
+      </p:pic>
+      <p:pic>
+        <p:nvPicPr>
+          <p:cNvPr id="18" name="图片 17">
+            <a:extLst>
+              <a:ext uri="{FF2B5EF4-FFF2-40B4-BE49-F238E27FC236}">
+                <a16:creationId xmlns:a16="http://schemas.microsoft.com/office/drawing/2014/main" id="{9462F8DE-D22A-6C16-4290-43F42FAB599D}"/>
+              </a:ext>
+            </a:extLst>
+          </p:cNvPr>
+          <p:cNvPicPr>
+            <a:picLocks noChangeAspect="1"/>
+          </p:cNvPicPr>
+          <p:nvPr/>
+        </p:nvPicPr>
+        <p:blipFill>
+          <a:blip r:embed="rId7"/>
+          <a:stretch>
+            <a:fillRect/>
+          </a:stretch>
+        </p:blipFill>
+        <p:spPr>
+          <a:xfrm>
+            <a:off x="9162287" y="2480985"/>
+            <a:ext cx="941838" cy="467324"/>
+          </a:xfrm>
+          <a:prstGeom prst="rect">
+            <a:avLst/>
+          </a:prstGeom>
+        </p:spPr>
+      </p:pic>
+      <mc:AlternateContent xmlns:mc="http://schemas.openxmlformats.org/markup-compatibility/2006" xmlns:a14="http://schemas.microsoft.com/office/drawing/2010/main">
+        <mc:Choice Requires="a14">
+          <p:sp>
+            <p:nvSpPr>
+              <p:cNvPr id="20" name="文本框 19">
+                <a:extLst>
+                  <a:ext uri="{FF2B5EF4-FFF2-40B4-BE49-F238E27FC236}">
+                    <a16:creationId xmlns:a16="http://schemas.microsoft.com/office/drawing/2014/main" id="{C2EEF9C8-5DF4-6F23-5DE6-19CC5BDC6E7C}"/>
+                  </a:ext>
+                </a:extLst>
+              </p:cNvPr>
+              <p:cNvSpPr txBox="1"/>
+              <p:nvPr/>
+            </p:nvSpPr>
+            <p:spPr>
+              <a:xfrm>
+                <a:off x="10032281" y="2453365"/>
+                <a:ext cx="1574074" cy="524439"/>
+              </a:xfrm>
+              <a:prstGeom prst="rect">
+                <a:avLst/>
+              </a:prstGeom>
+              <a:noFill/>
+            </p:spPr>
+            <p:txBody>
+              <a:bodyPr wrap="square">
+                <a:spAutoFit/>
+              </a:bodyPr>
+              <a:lstStyle/>
+              <a:p>
+                <a:pPr indent="0">
+                  <a:lnSpc>
+                    <a:spcPct val="116666"/>
+                  </a:lnSpc>
+                  <a:defRPr/>
+                </a:pPr>
+                <a14:m>
+                  <m:oMathPara xmlns:m="http://schemas.openxmlformats.org/officeDocument/2006/math">
+                    <m:oMathParaPr>
+                      <m:jc m:val="centerGroup"/>
+                    </m:oMathParaPr>
+                    <m:oMath xmlns:m="http://schemas.openxmlformats.org/officeDocument/2006/math">
+                      <m:r>
+                        <a:rPr lang="en-US" altLang="zh-CN" sz="2400" b="1" i="1" u="none" strike="noStrike" smtClean="0">
+                          <a:latin typeface="Cambria Math" panose="02040503050406030204" pitchFamily="18" charset="0"/>
+                          <a:ea typeface="Noto Sans SC"/>
+                          <a:cs typeface="Noto Sans SC"/>
+                          <a:sym typeface="Noto Sans SC"/>
+                        </a:rPr>
+                        <m:t>−</m:t>
+                      </m:r>
+                      <m:r>
+                        <a:rPr lang="en-US" altLang="zh-CN" sz="2400" b="1" i="1" u="none" strike="noStrike" smtClean="0">
+                          <a:latin typeface="Cambria Math" panose="02040503050406030204" pitchFamily="18" charset="0"/>
+                          <a:ea typeface="Noto Sans SC"/>
+                          <a:cs typeface="Noto Sans SC"/>
+                          <a:sym typeface="Noto Sans SC"/>
+                        </a:rPr>
+                        <m:t>𝑰</m:t>
+                      </m:r>
+                      <m:r>
+                        <a:rPr lang="en-US" altLang="zh-CN" sz="2400" b="1" i="1" u="none" strike="noStrike" smtClean="0">
+                          <a:latin typeface="Cambria Math" panose="02040503050406030204" pitchFamily="18" charset="0"/>
+                          <a:ea typeface="Noto Sans SC"/>
+                          <a:cs typeface="Noto Sans SC"/>
+                          <a:sym typeface="Noto Sans SC"/>
+                        </a:rPr>
+                        <m:t>∉</m:t>
+                      </m:r>
+                      <m:r>
+                        <a:rPr lang="en-US" altLang="zh-CN" sz="2400" b="1" i="0" u="none" strike="noStrike" smtClean="0">
+                          <a:latin typeface="Cambria Math" panose="02040503050406030204" pitchFamily="18" charset="0"/>
+                          <a:ea typeface="Noto Sans SC"/>
+                          <a:cs typeface="Noto Sans SC"/>
+                          <a:sym typeface="Noto Sans SC"/>
+                        </a:rPr>
+                        <m:t>𝐒</m:t>
+                      </m:r>
+                    </m:oMath>
+                  </m:oMathPara>
+                </a14:m>
+                <a:endParaRPr lang="en-US" altLang="zh-CN" sz="2400" b="1" u="none" strike="noStrike" dirty="0">
+                  <a:ea typeface="Noto Sans SC"/>
+                  <a:cs typeface="Noto Sans SC"/>
+                  <a:sym typeface="Noto Sans SC"/>
+                </a:endParaRPr>
+              </a:p>
+            </p:txBody>
+          </p:sp>
+        </mc:Choice>
+        <mc:Fallback xmlns="">
+          <p:sp>
+            <p:nvSpPr>
+              <p:cNvPr id="20" name="文本框 19">
+                <a:extLst>
+                  <a:ext uri="{FF2B5EF4-FFF2-40B4-BE49-F238E27FC236}">
+                    <a16:creationId xmlns:a16="http://schemas.microsoft.com/office/drawing/2014/main" id="{C2EEF9C8-5DF4-6F23-5DE6-19CC5BDC6E7C}"/>
+                  </a:ext>
+                </a:extLst>
+              </p:cNvPr>
+              <p:cNvSpPr txBox="1">
+                <a:spLocks noRot="1" noChangeAspect="1" noMove="1" noResize="1" noEditPoints="1" noAdjustHandles="1" noChangeArrowheads="1" noChangeShapeType="1" noTextEdit="1"/>
+              </p:cNvSpPr>
+              <p:nvPr/>
+            </p:nvSpPr>
+            <p:spPr>
+              <a:xfrm>
+                <a:off x="10032281" y="2453365"/>
+                <a:ext cx="1574074" cy="524439"/>
+              </a:xfrm>
+              <a:prstGeom prst="rect">
+                <a:avLst/>
+              </a:prstGeom>
+              <a:blipFill>
+                <a:blip r:embed="rId8"/>
+                <a:stretch>
+                  <a:fillRect t="-2326" b="-20930"/>
+                </a:stretch>
+              </a:blipFill>
+            </p:spPr>
+            <p:txBody>
+              <a:bodyPr/>
+              <a:lstStyle/>
+              <a:p>
+                <a:r>
+                  <a:rPr lang="zh-CN" altLang="en-US">
+                    <a:noFill/>
+                  </a:rPr>
+                  <a:t> </a:t>
+                </a:r>
+              </a:p>
+            </p:txBody>
+          </p:sp>
+        </mc:Fallback>
+      </mc:AlternateContent>
+      <p:pic>
+        <p:nvPicPr>
+          <p:cNvPr id="9" name="图片 8">
+            <a:extLst>
+              <a:ext uri="{FF2B5EF4-FFF2-40B4-BE49-F238E27FC236}">
+                <a16:creationId xmlns:a16="http://schemas.microsoft.com/office/drawing/2014/main" id="{1F2502E7-64B6-1C17-DF05-FADD7FA4C344}"/>
+              </a:ext>
+            </a:extLst>
+          </p:cNvPr>
+          <p:cNvPicPr>
+            <a:picLocks noChangeAspect="1"/>
+          </p:cNvPicPr>
+          <p:nvPr/>
+        </p:nvPicPr>
+        <p:blipFill>
+          <a:blip r:embed="rId9"/>
+          <a:stretch>
+            <a:fillRect/>
+          </a:stretch>
+        </p:blipFill>
+        <p:spPr>
+          <a:xfrm>
+            <a:off x="8178472" y="4446327"/>
+            <a:ext cx="3372321" cy="1152686"/>
+          </a:xfrm>
+          <a:prstGeom prst="rect">
+            <a:avLst/>
+          </a:prstGeom>
+        </p:spPr>
+      </p:pic>
+      <mc:AlternateContent xmlns:mc="http://schemas.openxmlformats.org/markup-compatibility/2006" xmlns:a14="http://schemas.microsoft.com/office/drawing/2010/main">
+        <mc:Choice Requires="a14">
+          <p:sp>
+            <p:nvSpPr>
+              <p:cNvPr id="11" name="文本框 10">
+                <a:extLst>
+                  <a:ext uri="{FF2B5EF4-FFF2-40B4-BE49-F238E27FC236}">
+                    <a16:creationId xmlns:a16="http://schemas.microsoft.com/office/drawing/2014/main" id="{9C3975C3-5E29-7135-89A3-F95D0060F9C4}"/>
+                  </a:ext>
+                </a:extLst>
+              </p:cNvPr>
+              <p:cNvSpPr txBox="1"/>
+              <p:nvPr/>
+            </p:nvSpPr>
+            <p:spPr>
+              <a:xfrm>
+                <a:off x="8223068" y="4059282"/>
+                <a:ext cx="1878784" cy="1107996"/>
+              </a:xfrm>
+              <a:prstGeom prst="rect">
+                <a:avLst/>
+              </a:prstGeom>
+              <a:noFill/>
+            </p:spPr>
+            <p:txBody>
+              <a:bodyPr wrap="none" lIns="0" tIns="0" rIns="0" bIns="0" rtlCol="0">
+                <a:spAutoFit/>
+              </a:bodyPr>
+              <a:lstStyle/>
+              <a:p>
+                <a:r>
+                  <a:rPr lang="zh-CN" altLang="en-US" b="1" dirty="0"/>
+                  <a:t>生成元</a:t>
+                </a:r>
+                <a14:m>
+                  <m:oMath xmlns:m="http://schemas.openxmlformats.org/officeDocument/2006/math">
+                    <m:r>
+                      <a:rPr lang="en-US" altLang="zh-CN" b="0" i="1" smtClean="0">
+                        <a:latin typeface="Cambria Math" panose="02040503050406030204" pitchFamily="18" charset="0"/>
+                      </a:rPr>
+                      <m:t>{</m:t>
+                    </m:r>
+                    <m:sSub>
+                      <m:sSubPr>
+                        <m:ctrlPr>
+                          <a:rPr lang="en-US" altLang="zh-CN" b="0" i="1" smtClean="0">
+                            <a:latin typeface="Cambria Math" panose="02040503050406030204" pitchFamily="18" charset="0"/>
+                          </a:rPr>
+                        </m:ctrlPr>
+                      </m:sSubPr>
+                      <m:e>
+                        <m:r>
+                          <a:rPr lang="en-US" altLang="zh-CN" b="0" i="1" smtClean="0">
+                            <a:latin typeface="Cambria Math" panose="02040503050406030204" pitchFamily="18" charset="0"/>
+                          </a:rPr>
+                          <m:t>𝑀</m:t>
+                        </m:r>
+                      </m:e>
+                      <m:sub>
+                        <m:r>
+                          <a:rPr lang="en-US" altLang="zh-CN" b="0" i="1" smtClean="0">
+                            <a:latin typeface="Cambria Math" panose="02040503050406030204" pitchFamily="18" charset="0"/>
+                          </a:rPr>
+                          <m:t>1</m:t>
+                        </m:r>
+                      </m:sub>
+                    </m:sSub>
+                    <m:r>
+                      <a:rPr lang="en-US" altLang="zh-CN" b="0" i="1" smtClean="0">
+                        <a:latin typeface="Cambria Math" panose="02040503050406030204" pitchFamily="18" charset="0"/>
+                      </a:rPr>
+                      <m:t>,...,</m:t>
+                    </m:r>
+                    <m:sSub>
+                      <m:sSubPr>
+                        <m:ctrlPr>
+                          <a:rPr lang="en-US" altLang="zh-CN" b="0" i="1" smtClean="0">
+                            <a:latin typeface="Cambria Math" panose="02040503050406030204" pitchFamily="18" charset="0"/>
+                          </a:rPr>
+                        </m:ctrlPr>
+                      </m:sSubPr>
+                      <m:e>
+                        <m:r>
+                          <a:rPr lang="en-US" altLang="zh-CN" b="0" i="1" smtClean="0">
+                            <a:latin typeface="Cambria Math" panose="02040503050406030204" pitchFamily="18" charset="0"/>
+                          </a:rPr>
+                          <m:t>𝑀</m:t>
+                        </m:r>
+                      </m:e>
+                      <m:sub>
+                        <m:r>
+                          <a:rPr lang="en-US" altLang="zh-CN" i="1">
+                            <a:latin typeface="Cambria Math" panose="02040503050406030204" pitchFamily="18" charset="0"/>
+                          </a:rPr>
+                          <m:t>𝑟</m:t>
+                        </m:r>
+                      </m:sub>
+                    </m:sSub>
+                    <m:r>
+                      <a:rPr lang="en-US" altLang="zh-CN" b="0" i="1" smtClean="0">
+                        <a:latin typeface="Cambria Math" panose="02040503050406030204" pitchFamily="18" charset="0"/>
+                      </a:rPr>
+                      <m:t>}</m:t>
+                    </m:r>
+                  </m:oMath>
+                </a14:m>
+                <a:endParaRPr lang="en-US" altLang="zh-CN" dirty="0"/>
+              </a:p>
+              <a:p>
+                <a:endParaRPr lang="en-US" altLang="zh-CN" b="0" dirty="0"/>
+              </a:p>
+              <a:p>
+                <a:endParaRPr lang="en-US" altLang="zh-CN" b="0" dirty="0"/>
+              </a:p>
+              <a:p>
+                <a:endParaRPr lang="zh-CN" altLang="en-US" dirty="0"/>
+              </a:p>
+            </p:txBody>
+          </p:sp>
+        </mc:Choice>
+        <mc:Fallback xmlns="">
+          <p:sp>
+            <p:nvSpPr>
+              <p:cNvPr id="11" name="文本框 10">
+                <a:extLst>
+                  <a:ext uri="{FF2B5EF4-FFF2-40B4-BE49-F238E27FC236}">
+                    <a16:creationId xmlns:a16="http://schemas.microsoft.com/office/drawing/2014/main" id="{9C3975C3-5E29-7135-89A3-F95D0060F9C4}"/>
+                  </a:ext>
+                </a:extLst>
+              </p:cNvPr>
+              <p:cNvSpPr txBox="1">
+                <a:spLocks noRot="1" noChangeAspect="1" noMove="1" noResize="1" noEditPoints="1" noAdjustHandles="1" noChangeArrowheads="1" noChangeShapeType="1" noTextEdit="1"/>
+              </p:cNvSpPr>
+              <p:nvPr/>
+            </p:nvSpPr>
+            <p:spPr>
+              <a:xfrm>
+                <a:off x="8223068" y="4059282"/>
+                <a:ext cx="1878784" cy="1107996"/>
+              </a:xfrm>
+              <a:prstGeom prst="rect">
+                <a:avLst/>
+              </a:prstGeom>
+              <a:blipFill>
+                <a:blip r:embed="rId10"/>
+                <a:stretch>
+                  <a:fillRect l="-7792" t="-7143" r="-5519"/>
+                </a:stretch>
+              </a:blipFill>
+            </p:spPr>
+            <p:txBody>
+              <a:bodyPr/>
+              <a:lstStyle/>
+              <a:p>
+                <a:r>
+                  <a:rPr lang="zh-CN" altLang="en-US">
+                    <a:noFill/>
+                  </a:rPr>
+                  <a:t> </a:t>
+                </a:r>
+              </a:p>
+            </p:txBody>
+          </p:sp>
+        </mc:Fallback>
+      </mc:AlternateContent>
+      <mc:AlternateContent xmlns:mc="http://schemas.openxmlformats.org/markup-compatibility/2006" xmlns:a14="http://schemas.microsoft.com/office/drawing/2010/main">
+        <mc:Choice Requires="a14">
+          <p:sp>
+            <p:nvSpPr>
+              <p:cNvPr id="13" name="文本框 12">
+                <a:extLst>
+                  <a:ext uri="{FF2B5EF4-FFF2-40B4-BE49-F238E27FC236}">
+                    <a16:creationId xmlns:a16="http://schemas.microsoft.com/office/drawing/2014/main" id="{B7136B6F-A11B-BBDB-10AF-18EB19AEACDA}"/>
+                  </a:ext>
+                </a:extLst>
+              </p:cNvPr>
+              <p:cNvSpPr txBox="1"/>
+              <p:nvPr/>
+            </p:nvSpPr>
+            <p:spPr>
+              <a:xfrm>
+                <a:off x="10365378" y="4020095"/>
+                <a:ext cx="1004699" cy="853311"/>
+              </a:xfrm>
+              <a:prstGeom prst="rect">
+                <a:avLst/>
+              </a:prstGeom>
+              <a:noFill/>
+            </p:spPr>
+            <p:txBody>
+              <a:bodyPr wrap="none" lIns="0" tIns="0" rIns="0" bIns="0" rtlCol="0">
+                <a:spAutoFit/>
+              </a:bodyPr>
+              <a:lstStyle/>
+              <a:p>
+                <a:pPr/>
+                <a14:m>
+                  <m:oMathPara xmlns:m="http://schemas.openxmlformats.org/officeDocument/2006/math">
+                    <m:oMathParaPr>
+                      <m:jc m:val="centerGroup"/>
+                    </m:oMathParaPr>
+                    <m:oMath xmlns:m="http://schemas.openxmlformats.org/officeDocument/2006/math">
+                      <m:sSub>
+                        <m:sSubPr>
+                          <m:ctrlPr>
+                            <a:rPr lang="en-US" altLang="zh-CN" b="0" i="1" smtClean="0">
+                              <a:latin typeface="Cambria Math" panose="02040503050406030204" pitchFamily="18" charset="0"/>
+                            </a:rPr>
+                          </m:ctrlPr>
+                        </m:sSubPr>
+                        <m:e>
+                          <m:r>
+                            <a:rPr lang="en-US" altLang="zh-CN" b="0" i="1" smtClean="0">
+                              <a:latin typeface="Cambria Math" panose="02040503050406030204" pitchFamily="18" charset="0"/>
+                            </a:rPr>
+                            <m:t>𝑖</m:t>
+                          </m:r>
+                        </m:e>
+                        <m:sub>
+                          <m:r>
+                            <a:rPr lang="en-US" altLang="zh-CN" b="0" i="1" smtClean="0">
+                              <a:latin typeface="Cambria Math" panose="02040503050406030204" pitchFamily="18" charset="0"/>
+                            </a:rPr>
+                            <m:t>𝑗</m:t>
+                          </m:r>
+                        </m:sub>
+                      </m:sSub>
+                      <m:r>
+                        <a:rPr lang="en-US" altLang="zh-CN" b="0" i="1" smtClean="0">
+                          <a:latin typeface="Cambria Math" panose="02040503050406030204" pitchFamily="18" charset="0"/>
+                        </a:rPr>
+                        <m:t>∈{0, 1}</m:t>
+                      </m:r>
+                    </m:oMath>
+                  </m:oMathPara>
+                </a14:m>
+                <a:endParaRPr lang="en-US" altLang="zh-CN" b="0" i="1" dirty="0"/>
+              </a:p>
+              <a:p>
+                <a:endParaRPr lang="en-US" altLang="zh-CN" b="0" i="1" dirty="0"/>
+              </a:p>
+              <a:p>
+                <a:r>
+                  <a:rPr lang="en-US" altLang="zh-CN" i="1" dirty="0"/>
+                  <a:t> </a:t>
+                </a:r>
+                <a:endParaRPr lang="zh-CN" altLang="en-US" i="1" dirty="0"/>
+              </a:p>
+            </p:txBody>
+          </p:sp>
+        </mc:Choice>
+        <mc:Fallback xmlns="">
+          <p:sp>
+            <p:nvSpPr>
+              <p:cNvPr id="13" name="文本框 12">
+                <a:extLst>
+                  <a:ext uri="{FF2B5EF4-FFF2-40B4-BE49-F238E27FC236}">
+                    <a16:creationId xmlns:a16="http://schemas.microsoft.com/office/drawing/2014/main" id="{B7136B6F-A11B-BBDB-10AF-18EB19AEACDA}"/>
+                  </a:ext>
+                </a:extLst>
+              </p:cNvPr>
+              <p:cNvSpPr txBox="1">
+                <a:spLocks noRot="1" noChangeAspect="1" noMove="1" noResize="1" noEditPoints="1" noAdjustHandles="1" noChangeArrowheads="1" noChangeShapeType="1" noTextEdit="1"/>
+              </p:cNvSpPr>
+              <p:nvPr/>
+            </p:nvSpPr>
+            <p:spPr>
+              <a:xfrm>
+                <a:off x="10365378" y="4020095"/>
+                <a:ext cx="1004699" cy="853311"/>
+              </a:xfrm>
+              <a:prstGeom prst="rect">
+                <a:avLst/>
+              </a:prstGeom>
+              <a:blipFill>
+                <a:blip r:embed="rId11"/>
+                <a:stretch>
+                  <a:fillRect l="-4848" r="-7879"/>
+                </a:stretch>
+              </a:blipFill>
+            </p:spPr>
+            <p:txBody>
+              <a:bodyPr/>
+              <a:lstStyle/>
+              <a:p>
+                <a:r>
+                  <a:rPr lang="zh-CN" altLang="en-US">
+                    <a:noFill/>
+                  </a:rPr>
+                  <a:t> </a:t>
+                </a:r>
+              </a:p>
+            </p:txBody>
+          </p:sp>
+        </mc:Fallback>
+      </mc:AlternateContent>
+      <p:pic>
+        <p:nvPicPr>
+          <p:cNvPr id="6" name="图片 5">
+            <a:extLst>
+              <a:ext uri="{FF2B5EF4-FFF2-40B4-BE49-F238E27FC236}">
+                <a16:creationId xmlns:a16="http://schemas.microsoft.com/office/drawing/2014/main" id="{EE38F61D-AD70-9C4D-DF68-5C68A0F1A906}"/>
+              </a:ext>
+            </a:extLst>
+          </p:cNvPr>
+          <p:cNvPicPr>
+            <a:picLocks noChangeAspect="1"/>
+          </p:cNvPicPr>
+          <p:nvPr/>
+        </p:nvPicPr>
+        <p:blipFill>
+          <a:blip r:embed="rId12"/>
+          <a:stretch>
+            <a:fillRect/>
+          </a:stretch>
+        </p:blipFill>
+        <p:spPr>
+          <a:xfrm>
+            <a:off x="9160913" y="5740266"/>
+            <a:ext cx="1381318" cy="628738"/>
+          </a:xfrm>
+          <a:prstGeom prst="rect">
+            <a:avLst/>
+          </a:prstGeom>
+        </p:spPr>
+      </p:pic>
+    </p:spTree>
+    <p:extLst>
+      <p:ext uri="{BB962C8B-B14F-4D97-AF65-F5344CB8AC3E}">
+        <p14:creationId xmlns:p14="http://schemas.microsoft.com/office/powerpoint/2010/main" val="3844360240"/>
+      </p:ext>
+    </p:extLst>
+  </p:cSld>
+  <p:clrMapOvr>
+    <a:masterClrMapping/>
+  </p:clrMapOvr>
+  <mc:AlternateContent xmlns:mc="http://schemas.openxmlformats.org/markup-compatibility/2006" xmlns:p159="http://schemas.microsoft.com/office/powerpoint/2015/09/main">
+    <mc:Choice Requires="p159">
+      <p:transition spd="slow">
+        <p159:morph option="byObject"/>
+      </p:transition>
+    </mc:Choice>
+    <mc:Fallback xmlns="">
+      <p:transition spd="slow">
+        <p:fade/>
+      </p:transition>
+    </mc:Fallback>
+  </mc:AlternateContent>
+</p:sld>
+</file>
+
+<file path=ppt/slides/slide34.xml><?xml version="1.0" encoding="utf-8"?>
+<p:sld xmlns:a="http://schemas.openxmlformats.org/drawingml/2006/main" xmlns:r="http://schemas.openxmlformats.org/officeDocument/2006/relationships" xmlns:p="http://schemas.openxmlformats.org/presentationml/2006/main">
+  <p:cSld>
+    <p:spTree>
+      <p:nvGrpSpPr>
+        <p:cNvPr id="1" name="">
+          <a:extLst>
+            <a:ext uri="{FF2B5EF4-FFF2-40B4-BE49-F238E27FC236}">
+              <a16:creationId xmlns:a16="http://schemas.microsoft.com/office/drawing/2014/main" id="{289AE0F5-A3E5-6AAC-C80A-DC081F921B9E}"/>
+            </a:ext>
+          </a:extLst>
+        </p:cNvPr>
+        <p:cNvGrpSpPr/>
+        <p:nvPr/>
+      </p:nvGrpSpPr>
+      <p:grpSpPr>
+        <a:xfrm>
+          <a:off x="0" y="0"/>
+          <a:ext cx="0" cy="0"/>
+          <a:chOff x="0" y="0"/>
+          <a:chExt cx="0" cy="0"/>
+        </a:xfrm>
+      </p:grpSpPr>
+      <p:sp>
+        <p:nvSpPr>
+          <p:cNvPr id="2" name="TextBox 1">
+            <a:extLst>
+              <a:ext uri="{FF2B5EF4-FFF2-40B4-BE49-F238E27FC236}">
+                <a16:creationId xmlns:a16="http://schemas.microsoft.com/office/drawing/2014/main" id="{23387446-44BF-FF6C-6A22-CEDD88C9B3B9}"/>
+              </a:ext>
+            </a:extLst>
+          </p:cNvPr>
+          <p:cNvSpPr txBox="1"/>
+          <p:nvPr/>
+        </p:nvSpPr>
+        <p:spPr>
+          <a:xfrm>
+            <a:off x="762000" y="635000"/>
+            <a:ext cx="10668000" cy="571500"/>
+          </a:xfrm>
+          <a:prstGeom prst="rect">
+            <a:avLst/>
+          </a:prstGeom>
+          <a:noFill/>
+        </p:spPr>
+        <p:txBody>
+          <a:bodyPr wrap="square">
+            <a:spAutoFit/>
+          </a:bodyPr>
+          <a:lstStyle/>
+          <a:p>
+            <a:pPr algn="l"/>
+            <a:r>
+              <a:rPr sz="3200" b="1">
+                <a:solidFill>
+                  <a:srgbClr val="333333"/>
+                </a:solidFill>
+                <a:latin typeface="Noto Sans SC"/>
+              </a:rPr>
+              <a:t>04  稳定子</a:t>
+            </a:r>
+          </a:p>
+        </p:txBody>
+      </p:sp>
+      <p:sp>
+        <p:nvSpPr>
+          <p:cNvPr id="3" name="TextBox 2">
+            <a:extLst>
+              <a:ext uri="{FF2B5EF4-FFF2-40B4-BE49-F238E27FC236}">
+                <a16:creationId xmlns:a16="http://schemas.microsoft.com/office/drawing/2014/main" id="{549E1757-D271-1A58-0851-D60D64585B51}"/>
+              </a:ext>
+            </a:extLst>
+          </p:cNvPr>
+          <p:cNvSpPr txBox="1"/>
+          <p:nvPr/>
+        </p:nvSpPr>
+        <p:spPr>
+          <a:xfrm>
+            <a:off x="762000" y="1397000"/>
+            <a:ext cx="10668000" cy="444500"/>
+          </a:xfrm>
+          <a:prstGeom prst="rect">
+            <a:avLst/>
+          </a:prstGeom>
+          <a:noFill/>
+        </p:spPr>
+        <p:txBody>
+          <a:bodyPr wrap="square">
+            <a:spAutoFit/>
+          </a:bodyPr>
+          <a:lstStyle/>
+          <a:p>
+            <a:pPr algn="l"/>
+            <a:r>
+              <a:rPr sz="2200" b="1" dirty="0">
+                <a:solidFill>
+                  <a:srgbClr val="666666"/>
+                </a:solidFill>
+                <a:latin typeface="Noto Sans SC"/>
+              </a:rPr>
+              <a:t>4.</a:t>
+            </a:r>
+            <a:r>
+              <a:rPr lang="en-US" sz="2200" b="1" dirty="0">
+                <a:solidFill>
+                  <a:srgbClr val="666666"/>
+                </a:solidFill>
+                <a:latin typeface="Noto Sans SC"/>
+              </a:rPr>
+              <a:t>7</a:t>
+            </a:r>
+            <a:r>
+              <a:rPr sz="2200" b="1" dirty="0">
+                <a:solidFill>
+                  <a:srgbClr val="666666"/>
+                </a:solidFill>
+                <a:latin typeface="Noto Sans SC"/>
+              </a:rPr>
+              <a:t> </a:t>
+            </a:r>
+            <a:r>
+              <a:rPr lang="zh-CN" altLang="en-US" sz="2200" b="1" dirty="0">
+                <a:solidFill>
+                  <a:srgbClr val="666666"/>
+                </a:solidFill>
+                <a:latin typeface="Noto Sans SC"/>
+              </a:rPr>
+              <a:t>投影算符</a:t>
+            </a:r>
+            <a:r>
+              <a:rPr lang="en-US" altLang="zh-CN" sz="2200" b="1" dirty="0">
+                <a:solidFill>
+                  <a:srgbClr val="666666"/>
+                </a:solidFill>
+                <a:latin typeface="Noto Sans SC"/>
+              </a:rPr>
+              <a:t>——</a:t>
+            </a:r>
+            <a:r>
+              <a:rPr lang="zh-CN" altLang="en-US" sz="2200" b="1" dirty="0">
+                <a:solidFill>
+                  <a:srgbClr val="666666"/>
+                </a:solidFill>
+                <a:latin typeface="Noto Sans SC"/>
+              </a:rPr>
+              <a:t>稳定子群到稳定子码的显式物理图像</a:t>
+            </a:r>
+            <a:endParaRPr sz="2200" b="1" dirty="0">
+              <a:solidFill>
+                <a:srgbClr val="666666"/>
+              </a:solidFill>
+              <a:latin typeface="Noto Sans SC"/>
+            </a:endParaRPr>
+          </a:p>
+        </p:txBody>
+      </p:sp>
+      <p:cxnSp>
+        <p:nvCxnSpPr>
+          <p:cNvPr id="8" name="直接连接符 7">
+            <a:extLst>
+              <a:ext uri="{FF2B5EF4-FFF2-40B4-BE49-F238E27FC236}">
+                <a16:creationId xmlns:a16="http://schemas.microsoft.com/office/drawing/2014/main" id="{51DD623B-19B5-CA1D-C093-405AD617ADC8}"/>
+              </a:ext>
+            </a:extLst>
+          </p:cNvPr>
+          <p:cNvCxnSpPr/>
+          <p:nvPr/>
+        </p:nvCxnSpPr>
+        <p:spPr>
+          <a:xfrm>
+            <a:off x="7534894" y="0"/>
+            <a:ext cx="0" cy="6941127"/>
+          </a:xfrm>
+          <a:prstGeom prst="line">
+            <a:avLst/>
+          </a:prstGeom>
+          <a:ln w="76200">
+            <a:solidFill>
+              <a:schemeClr val="tx1">
+                <a:lumMod val="75000"/>
+                <a:lumOff val="25000"/>
+              </a:schemeClr>
+            </a:solidFill>
+            <a:prstDash val="sysDot"/>
+          </a:ln>
+        </p:spPr>
+        <p:style>
+          <a:lnRef idx="1">
+            <a:schemeClr val="accent1"/>
+          </a:lnRef>
+          <a:fillRef idx="0">
+            <a:schemeClr val="accent1"/>
+          </a:fillRef>
+          <a:effectRef idx="0">
+            <a:schemeClr val="accent1"/>
+          </a:effectRef>
+          <a:fontRef idx="minor">
+            <a:schemeClr val="tx1"/>
+          </a:fontRef>
+        </p:style>
+      </p:cxnSp>
+      <p:sp>
+        <p:nvSpPr>
+          <p:cNvPr id="5" name="AutoShape 11">
+            <a:extLst>
+              <a:ext uri="{FF2B5EF4-FFF2-40B4-BE49-F238E27FC236}">
+                <a16:creationId xmlns:a16="http://schemas.microsoft.com/office/drawing/2014/main" id="{A2914FC1-0B56-009C-4D69-99EE3CB32BBC}"/>
               </a:ext>
             </a:extLst>
           </p:cNvPr>
@@ -29732,8 +35996,8 @@
         </p:nvSpPr>
         <p:spPr>
           <a:xfrm>
-            <a:off x="762000" y="1651000"/>
-            <a:ext cx="10668000" cy="508000"/>
+            <a:off x="713883" y="2201090"/>
+            <a:ext cx="6836445" cy="4578531"/>
           </a:xfrm>
           <a:prstGeom prst="rect">
             <a:avLst/>
@@ -29749,44 +36013,2231 @@
           <a:bodyPr vert="horz" wrap="square" lIns="0" tIns="0" rIns="0" bIns="0" rtlCol="0" anchor="ctr" anchorCtr="0"/>
           <a:lstStyle/>
           <a:p>
-            <a:pPr indent="0" algn="l">
+            <a:pPr indent="0">
               <a:lnSpc>
-                <a:spcPct val="125000"/>
+                <a:spcPct val="116666"/>
               </a:lnSpc>
               <a:defRPr/>
             </a:pPr>
-            <a:r>
-              <a:rPr lang="en-US" altLang="zh-CN" sz="2200" b="1" dirty="0">
-                <a:solidFill>
-                  <a:srgbClr val="555555"/>
-                </a:solidFill>
-                <a:latin typeface="Noto Sans SC"/>
-                <a:ea typeface="Noto Sans SC"/>
-                <a:cs typeface="Noto Sans SC"/>
-                <a:sym typeface="Noto Sans SC"/>
-              </a:rPr>
-              <a:t>4.4 </a:t>
-            </a:r>
-            <a:r>
-              <a:rPr lang="zh-CN" altLang="en-US" sz="2200" b="1" dirty="0">
-                <a:solidFill>
-                  <a:srgbClr val="555555"/>
-                </a:solidFill>
-                <a:latin typeface="Noto Sans SC"/>
-                <a:ea typeface="Noto Sans SC"/>
-                <a:cs typeface="Noto Sans SC"/>
-                <a:sym typeface="Noto Sans SC"/>
-              </a:rPr>
-              <a:t>稳定子</a:t>
-            </a:r>
-            <a:endParaRPr lang="en-US" sz="1100" dirty="0"/>
-          </a:p>
-        </p:txBody>
-      </p:sp>
+            <a:endParaRPr lang="en-US" altLang="zh-CN" b="1" i="0" u="none" strike="noStrike" dirty="0">
+              <a:ea typeface="Noto Sans SC"/>
+              <a:cs typeface="Noto Sans SC"/>
+              <a:sym typeface="Noto Sans SC"/>
+            </a:endParaRPr>
+          </a:p>
+        </p:txBody>
+      </p:sp>
+      <p:pic>
+        <p:nvPicPr>
+          <p:cNvPr id="6" name="图片 5">
+            <a:extLst>
+              <a:ext uri="{FF2B5EF4-FFF2-40B4-BE49-F238E27FC236}">
+                <a16:creationId xmlns:a16="http://schemas.microsoft.com/office/drawing/2014/main" id="{6D0A5DB0-AB69-C49F-C2AA-3F9E5CA65BD1}"/>
+              </a:ext>
+            </a:extLst>
+          </p:cNvPr>
+          <p:cNvPicPr>
+            <a:picLocks noChangeAspect="1"/>
+          </p:cNvPicPr>
+          <p:nvPr/>
+        </p:nvPicPr>
+        <p:blipFill>
+          <a:blip r:embed="rId3"/>
+          <a:stretch>
+            <a:fillRect/>
+          </a:stretch>
+        </p:blipFill>
+        <p:spPr>
+          <a:xfrm>
+            <a:off x="7655917" y="311133"/>
+            <a:ext cx="4627528" cy="644869"/>
+          </a:xfrm>
+          <a:prstGeom prst="rect">
+            <a:avLst/>
+          </a:prstGeom>
+        </p:spPr>
+      </p:pic>
+      <mc:AlternateContent xmlns:mc="http://schemas.openxmlformats.org/markup-compatibility/2006" xmlns:a14="http://schemas.microsoft.com/office/drawing/2010/main">
+        <mc:Choice Requires="a14">
+          <p:sp>
+            <p:nvSpPr>
+              <p:cNvPr id="14" name="AutoShape 11">
+                <a:extLst>
+                  <a:ext uri="{FF2B5EF4-FFF2-40B4-BE49-F238E27FC236}">
+                    <a16:creationId xmlns:a16="http://schemas.microsoft.com/office/drawing/2014/main" id="{FBDDA1F2-2619-15B9-3BCB-309EEA4155A6}"/>
+                  </a:ext>
+                </a:extLst>
+              </p:cNvPr>
+              <p:cNvSpPr/>
+              <p:nvPr/>
+            </p:nvSpPr>
+            <p:spPr>
+              <a:xfrm>
+                <a:off x="735655" y="1830976"/>
+                <a:ext cx="6836445" cy="4504509"/>
+              </a:xfrm>
+              <a:prstGeom prst="rect">
+                <a:avLst/>
+              </a:prstGeom>
+              <a:noFill/>
+              <a:ln w="12700" cap="flat" cmpd="sng">
+                <a:noFill/>
+                <a:prstDash val="solid"/>
+                <a:round/>
+              </a:ln>
+            </p:spPr>
+            <p:txBody>
+              <a:bodyPr vert="horz" wrap="square" lIns="0" tIns="0" rIns="0" bIns="0" rtlCol="0" anchor="ctr" anchorCtr="0"/>
+              <a:lstStyle/>
+              <a:p>
+                <a:pPr indent="0">
+                  <a:lnSpc>
+                    <a:spcPct val="116666"/>
+                  </a:lnSpc>
+                  <a:defRPr/>
+                </a:pPr>
+                <a:r>
+                  <a:rPr lang="zh-CN" altLang="en-US" b="1" i="0" u="none" strike="noStrike" dirty="0">
+                    <a:ea typeface="Noto Sans SC"/>
+                    <a:cs typeface="Noto Sans SC"/>
+                    <a:sym typeface="Noto Sans SC"/>
+                  </a:rPr>
+                  <a:t>在之前一小节中，我们只是非常笼统模糊的给出了从稳定子群出发获得的稳定子码的定义，</a:t>
+                </a:r>
+                <a:endParaRPr lang="en-US" altLang="zh-CN" b="1" i="0" u="none" strike="noStrike" dirty="0">
+                  <a:ea typeface="Noto Sans SC"/>
+                  <a:cs typeface="Noto Sans SC"/>
+                  <a:sym typeface="Noto Sans SC"/>
+                </a:endParaRPr>
+              </a:p>
+              <a:p>
+                <a:pPr indent="0">
+                  <a:lnSpc>
+                    <a:spcPct val="116666"/>
+                  </a:lnSpc>
+                  <a:defRPr/>
+                </a:pPr>
+                <a:r>
+                  <a:rPr lang="zh-CN" altLang="en-US" b="1" i="0" u="none" strike="noStrike" dirty="0">
+                    <a:ea typeface="Noto Sans SC"/>
+                    <a:cs typeface="Noto Sans SC"/>
+                    <a:sym typeface="Noto Sans SC"/>
+                  </a:rPr>
+                  <a:t>这一节我们要借助</a:t>
+                </a:r>
+                <a:r>
+                  <a:rPr lang="zh-CN" altLang="en-US" b="1" i="0" u="none" strike="noStrike" dirty="0">
+                    <a:solidFill>
+                      <a:schemeClr val="accent2"/>
+                    </a:solidFill>
+                    <a:ea typeface="Noto Sans SC"/>
+                    <a:cs typeface="Noto Sans SC"/>
+                    <a:sym typeface="Noto Sans SC"/>
+                  </a:rPr>
+                  <a:t>投影算符</a:t>
+                </a:r>
+                <a:r>
+                  <a:rPr lang="zh-CN" altLang="en-US" b="1" i="0" u="none" strike="noStrike" dirty="0">
+                    <a:ea typeface="Noto Sans SC"/>
+                    <a:cs typeface="Noto Sans SC"/>
+                    <a:sym typeface="Noto Sans SC"/>
+                  </a:rPr>
+                  <a:t>这一物理工具构建更加</a:t>
+                </a:r>
+                <a:r>
+                  <a:rPr lang="zh-CN" altLang="en-US" b="1" i="0" u="none" strike="noStrike" dirty="0">
+                    <a:solidFill>
+                      <a:schemeClr val="accent2"/>
+                    </a:solidFill>
+                    <a:ea typeface="Noto Sans SC"/>
+                    <a:cs typeface="Noto Sans SC"/>
+                    <a:sym typeface="Noto Sans SC"/>
+                  </a:rPr>
+                  <a:t>直观的物理图像</a:t>
+                </a:r>
+                <a:r>
+                  <a:rPr lang="zh-CN" altLang="en-US" b="1" i="0" u="none" strike="noStrike" dirty="0">
+                    <a:ea typeface="Noto Sans SC"/>
+                    <a:cs typeface="Noto Sans SC"/>
+                    <a:sym typeface="Noto Sans SC"/>
+                  </a:rPr>
+                  <a:t>，</a:t>
+                </a:r>
+                <a:endParaRPr lang="en-US" altLang="zh-CN" b="1" i="0" u="none" strike="noStrike" dirty="0">
+                  <a:ea typeface="Noto Sans SC"/>
+                  <a:cs typeface="Noto Sans SC"/>
+                  <a:sym typeface="Noto Sans SC"/>
+                </a:endParaRPr>
+              </a:p>
+              <a:p>
+                <a:pPr indent="0">
+                  <a:lnSpc>
+                    <a:spcPct val="116666"/>
+                  </a:lnSpc>
+                  <a:defRPr/>
+                </a:pPr>
+                <a:endParaRPr lang="en-US" altLang="zh-CN" b="1" i="0" u="none" strike="noStrike" dirty="0">
+                  <a:ea typeface="Noto Sans SC"/>
+                  <a:cs typeface="Noto Sans SC"/>
+                  <a:sym typeface="Noto Sans SC"/>
+                </a:endParaRPr>
+              </a:p>
+              <a:p>
+                <a:pPr indent="0">
+                  <a:lnSpc>
+                    <a:spcPct val="116666"/>
+                  </a:lnSpc>
+                  <a:defRPr/>
+                </a:pPr>
+                <a:endParaRPr lang="en-US" altLang="zh-CN" b="1" dirty="0">
+                  <a:ea typeface="Noto Sans SC"/>
+                  <a:cs typeface="Noto Sans SC"/>
+                  <a:sym typeface="Noto Sans SC"/>
+                </a:endParaRPr>
+              </a:p>
+              <a:p>
+                <a:pPr indent="0">
+                  <a:lnSpc>
+                    <a:spcPct val="116666"/>
+                  </a:lnSpc>
+                  <a:defRPr/>
+                </a:pPr>
+                <a:r>
+                  <a:rPr lang="zh-CN" altLang="en-US" b="1" i="0" u="none" strike="noStrike" dirty="0">
+                    <a:ea typeface="Noto Sans SC"/>
+                    <a:cs typeface="Noto Sans SC"/>
+                    <a:sym typeface="Noto Sans SC"/>
+                  </a:rPr>
+                  <a:t>投影算符实际就是一个</a:t>
+                </a:r>
+                <a:r>
+                  <a:rPr lang="zh-CN" altLang="en-US" b="1" i="0" u="none" strike="noStrike" dirty="0">
+                    <a:solidFill>
+                      <a:schemeClr val="accent2"/>
+                    </a:solidFill>
+                    <a:ea typeface="Noto Sans SC"/>
+                    <a:cs typeface="Noto Sans SC"/>
+                    <a:sym typeface="Noto Sans SC"/>
+                  </a:rPr>
+                  <a:t>筛子</a:t>
+                </a:r>
+                <a:r>
+                  <a:rPr lang="zh-CN" altLang="en-US" b="1" i="0" u="none" strike="noStrike" dirty="0">
+                    <a:ea typeface="Noto Sans SC"/>
+                    <a:cs typeface="Noto Sans SC"/>
+                    <a:sym typeface="Noto Sans SC"/>
+                  </a:rPr>
+                  <a:t>，从完整的希尔伯特空间中筛选出稳定子码字，因此这里的孔由</a:t>
+                </a:r>
+                <a:r>
+                  <a:rPr lang="zh-CN" altLang="en-US" b="1" i="0" u="none" strike="noStrike" dirty="0">
+                    <a:solidFill>
+                      <a:schemeClr val="accent2"/>
+                    </a:solidFill>
+                    <a:ea typeface="Noto Sans SC"/>
+                    <a:cs typeface="Noto Sans SC"/>
+                    <a:sym typeface="Noto Sans SC"/>
+                  </a:rPr>
+                  <a:t>稳定子群</a:t>
+                </a:r>
+                <a:r>
+                  <a:rPr lang="zh-CN" altLang="en-US" b="1" i="0" u="none" strike="noStrike" dirty="0">
+                    <a:ea typeface="Noto Sans SC"/>
+                    <a:cs typeface="Noto Sans SC"/>
+                    <a:sym typeface="Noto Sans SC"/>
+                  </a:rPr>
+                  <a:t>决定，为了让这个筛子简洁，我们选择</a:t>
+                </a:r>
+                <a:r>
+                  <a:rPr lang="zh-CN" altLang="en-US" b="1" i="0" u="none" strike="noStrike" dirty="0">
+                    <a:solidFill>
+                      <a:schemeClr val="accent2"/>
+                    </a:solidFill>
+                    <a:ea typeface="Noto Sans SC"/>
+                    <a:cs typeface="Noto Sans SC"/>
+                    <a:sym typeface="Noto Sans SC"/>
+                  </a:rPr>
+                  <a:t>生成元</a:t>
+                </a:r>
+                <a:r>
+                  <a:rPr lang="zh-CN" altLang="en-US" b="1" i="0" u="none" strike="noStrike" dirty="0">
+                    <a:ea typeface="Noto Sans SC"/>
+                    <a:cs typeface="Noto Sans SC"/>
+                    <a:sym typeface="Noto Sans SC"/>
+                  </a:rPr>
+                  <a:t>来作为</a:t>
+                </a:r>
+                <a:r>
+                  <a:rPr lang="zh-CN" altLang="en-US" b="1" i="0" u="none" strike="noStrike" dirty="0">
+                    <a:solidFill>
+                      <a:schemeClr val="accent2"/>
+                    </a:solidFill>
+                    <a:ea typeface="Noto Sans SC"/>
+                    <a:cs typeface="Noto Sans SC"/>
+                    <a:sym typeface="Noto Sans SC"/>
+                  </a:rPr>
+                  <a:t>孔</a:t>
+                </a:r>
+                <a:endParaRPr lang="en-US" altLang="zh-CN" b="1" i="0" u="none" strike="noStrike" dirty="0">
+                  <a:solidFill>
+                    <a:schemeClr val="accent2"/>
+                  </a:solidFill>
+                  <a:ea typeface="Noto Sans SC"/>
+                  <a:cs typeface="Noto Sans SC"/>
+                  <a:sym typeface="Noto Sans SC"/>
+                </a:endParaRPr>
+              </a:p>
+              <a:p>
+                <a:pPr indent="0">
+                  <a:lnSpc>
+                    <a:spcPct val="116666"/>
+                  </a:lnSpc>
+                  <a:defRPr/>
+                </a:pPr>
+                <a:endParaRPr lang="en-US" altLang="zh-CN" b="1" dirty="0">
+                  <a:solidFill>
+                    <a:schemeClr val="accent2"/>
+                  </a:solidFill>
+                  <a:ea typeface="Noto Sans SC"/>
+                  <a:cs typeface="Noto Sans SC"/>
+                  <a:sym typeface="Noto Sans SC"/>
+                </a:endParaRPr>
+              </a:p>
+              <a:p>
+                <a:pPr indent="0">
+                  <a:lnSpc>
+                    <a:spcPct val="116666"/>
+                  </a:lnSpc>
+                  <a:defRPr/>
+                </a:pPr>
+                <a:r>
+                  <a:rPr lang="zh-CN" altLang="en-US" b="1" i="0" u="none" strike="noStrike" dirty="0">
+                    <a:ea typeface="Noto Sans SC"/>
+                    <a:cs typeface="Noto Sans SC"/>
+                    <a:sym typeface="Noto Sans SC"/>
+                  </a:rPr>
+                  <a:t>先考虑只需满足</a:t>
+                </a:r>
+                <a:r>
+                  <a:rPr lang="zh-CN" altLang="en-US" b="1" i="0" u="none" strike="noStrike" dirty="0">
+                    <a:solidFill>
+                      <a:schemeClr val="accent2"/>
+                    </a:solidFill>
+                    <a:ea typeface="Noto Sans SC"/>
+                    <a:cs typeface="Noto Sans SC"/>
+                    <a:sym typeface="Noto Sans SC"/>
+                  </a:rPr>
+                  <a:t>一个</a:t>
+                </a:r>
+                <a:r>
+                  <a:rPr lang="zh-CN" altLang="en-US" b="1" i="0" u="none" strike="noStrike" dirty="0">
+                    <a:ea typeface="Noto Sans SC"/>
+                    <a:cs typeface="Noto Sans SC"/>
+                    <a:sym typeface="Noto Sans SC"/>
+                  </a:rPr>
+                  <a:t>生成元要求的投影算符</a:t>
+                </a:r>
+                <a:r>
+                  <a:rPr lang="en-US" altLang="zh-CN" b="1" i="0" u="none" strike="noStrike" dirty="0">
+                    <a:ea typeface="Noto Sans SC"/>
+                    <a:cs typeface="Noto Sans SC"/>
+                    <a:sym typeface="Noto Sans SC"/>
+                  </a:rPr>
+                  <a:t>(</a:t>
+                </a:r>
+                <a14:m>
+                  <m:oMath xmlns:m="http://schemas.openxmlformats.org/officeDocument/2006/math">
+                    <m:sSub>
+                      <m:sSubPr>
+                        <m:ctrlPr>
+                          <a:rPr lang="en-US" altLang="zh-CN" b="1" i="1" u="none" strike="noStrike" smtClean="0">
+                            <a:latin typeface="Cambria Math" panose="02040503050406030204" pitchFamily="18" charset="0"/>
+                            <a:ea typeface="Noto Sans SC"/>
+                            <a:cs typeface="Noto Sans SC"/>
+                            <a:sym typeface="Noto Sans SC"/>
+                          </a:rPr>
+                        </m:ctrlPr>
+                      </m:sSubPr>
+                      <m:e>
+                        <m:r>
+                          <a:rPr lang="en-US" altLang="zh-CN" b="1" i="1" u="none" strike="noStrike" smtClean="0">
+                            <a:latin typeface="Cambria Math" panose="02040503050406030204" pitchFamily="18" charset="0"/>
+                            <a:ea typeface="Noto Sans SC"/>
+                            <a:cs typeface="Noto Sans SC"/>
+                            <a:sym typeface="Noto Sans SC"/>
+                          </a:rPr>
+                          <m:t>𝑷</m:t>
+                        </m:r>
+                      </m:e>
+                      <m:sub>
+                        <m:r>
+                          <a:rPr lang="en-US" altLang="zh-CN" b="1" i="1" u="none" strike="noStrike" smtClean="0">
+                            <a:latin typeface="Cambria Math" panose="02040503050406030204" pitchFamily="18" charset="0"/>
+                            <a:ea typeface="Noto Sans SC"/>
+                            <a:cs typeface="Noto Sans SC"/>
+                            <a:sym typeface="Noto Sans SC"/>
+                          </a:rPr>
+                          <m:t>𝒊</m:t>
+                        </m:r>
+                      </m:sub>
+                    </m:sSub>
+                  </m:oMath>
+                </a14:m>
+                <a:r>
+                  <a:rPr lang="zh-CN" altLang="en-US" b="1" i="0" u="none" strike="noStrike" dirty="0">
+                    <a:ea typeface="Noto Sans SC"/>
+                    <a:cs typeface="Noto Sans SC"/>
+                    <a:sym typeface="Noto Sans SC"/>
+                  </a:rPr>
+                  <a:t>只暂时做演示用不与泡利算符搞混</a:t>
+                </a:r>
+                <a:r>
+                  <a:rPr lang="en-US" altLang="zh-CN" b="1" i="0" u="none" strike="noStrike" dirty="0">
+                    <a:ea typeface="Noto Sans SC"/>
+                    <a:cs typeface="Noto Sans SC"/>
+                    <a:sym typeface="Noto Sans SC"/>
+                  </a:rPr>
+                  <a:t>)</a:t>
+                </a:r>
+                <a:r>
+                  <a:rPr lang="zh-CN" altLang="en-US" b="1" i="0" u="none" strike="noStrike" dirty="0">
+                    <a:ea typeface="Noto Sans SC"/>
+                    <a:cs typeface="Noto Sans SC"/>
+                    <a:sym typeface="Noto Sans SC"/>
+                  </a:rPr>
+                  <a:t>，</a:t>
+                </a:r>
+                <a:endParaRPr lang="en-US" altLang="zh-CN" b="1" i="0" u="none" strike="noStrike" dirty="0">
+                  <a:ea typeface="Noto Sans SC"/>
+                  <a:cs typeface="Noto Sans SC"/>
+                  <a:sym typeface="Noto Sans SC"/>
+                </a:endParaRPr>
+              </a:p>
+              <a:p>
+                <a:pPr indent="0">
+                  <a:lnSpc>
+                    <a:spcPct val="116666"/>
+                  </a:lnSpc>
+                  <a:defRPr/>
+                </a:pPr>
+                <a:r>
+                  <a:rPr lang="zh-CN" altLang="en-US" b="1" i="0" u="none" strike="noStrike" dirty="0">
+                    <a:ea typeface="Noto Sans SC"/>
+                    <a:cs typeface="Noto Sans SC"/>
+                    <a:sym typeface="Noto Sans SC"/>
+                  </a:rPr>
+                  <a:t>再考虑同时满足</a:t>
+                </a:r>
+                <a:r>
+                  <a:rPr lang="zh-CN" altLang="en-US" b="1" i="0" u="none" strike="noStrike" dirty="0">
+                    <a:solidFill>
+                      <a:schemeClr val="accent2"/>
+                    </a:solidFill>
+                    <a:ea typeface="Noto Sans SC"/>
+                    <a:cs typeface="Noto Sans SC"/>
+                    <a:sym typeface="Noto Sans SC"/>
+                  </a:rPr>
+                  <a:t>所有生成元</a:t>
+                </a:r>
+                <a:r>
+                  <a:rPr lang="zh-CN" altLang="en-US" b="1" i="0" u="none" strike="noStrike" dirty="0">
+                    <a:ea typeface="Noto Sans SC"/>
+                    <a:cs typeface="Noto Sans SC"/>
+                    <a:sym typeface="Noto Sans SC"/>
+                  </a:rPr>
+                  <a:t>的要求的投影算符</a:t>
+                </a:r>
+                <a:r>
+                  <a:rPr lang="en-US" altLang="zh-CN" b="1" i="0" u="none" strike="noStrike" dirty="0">
+                    <a:ea typeface="Noto Sans SC"/>
+                    <a:cs typeface="Noto Sans SC"/>
+                    <a:sym typeface="Noto Sans SC"/>
+                  </a:rPr>
+                  <a:t>(</a:t>
+                </a:r>
+                <a:r>
+                  <a:rPr lang="zh-CN" altLang="en-US" b="1" i="0" u="none" strike="noStrike" dirty="0">
+                    <a:ea typeface="Noto Sans SC"/>
+                    <a:cs typeface="Noto Sans SC"/>
+                    <a:sym typeface="Noto Sans SC"/>
+                  </a:rPr>
+                  <a:t>同样由于生成元内部的相互对易和自我平方为</a:t>
+                </a:r>
+                <a14:m>
+                  <m:oMath xmlns:m="http://schemas.openxmlformats.org/officeDocument/2006/math">
+                    <m:r>
+                      <a:rPr lang="en-US" altLang="zh-CN" b="1" i="1" u="none" strike="noStrike" smtClean="0">
+                        <a:latin typeface="Cambria Math" panose="02040503050406030204" pitchFamily="18" charset="0"/>
+                        <a:ea typeface="Noto Sans SC"/>
+                        <a:cs typeface="Noto Sans SC"/>
+                        <a:sym typeface="Noto Sans SC"/>
+                      </a:rPr>
+                      <m:t>𝑰</m:t>
+                    </m:r>
+                  </m:oMath>
+                </a14:m>
+                <a:r>
+                  <a:rPr lang="zh-CN" altLang="en-US" b="1" i="0" u="none" strike="noStrike" dirty="0">
+                    <a:ea typeface="Noto Sans SC"/>
+                    <a:cs typeface="Noto Sans SC"/>
+                    <a:sym typeface="Noto Sans SC"/>
+                  </a:rPr>
+                  <a:t>使得投影算符也有右方的乘积形式</a:t>
+                </a:r>
+                <a:r>
+                  <a:rPr lang="en-US" altLang="zh-CN" b="1" i="0" u="none" strike="noStrike" dirty="0">
+                    <a:ea typeface="Noto Sans SC"/>
+                    <a:cs typeface="Noto Sans SC"/>
+                    <a:sym typeface="Noto Sans SC"/>
+                  </a:rPr>
+                  <a:t>)</a:t>
+                </a:r>
+              </a:p>
+            </p:txBody>
+          </p:sp>
+        </mc:Choice>
+        <mc:Fallback xmlns="">
+          <p:sp>
+            <p:nvSpPr>
+              <p:cNvPr id="14" name="AutoShape 11">
+                <a:extLst>
+                  <a:ext uri="{FF2B5EF4-FFF2-40B4-BE49-F238E27FC236}">
+                    <a16:creationId xmlns:a16="http://schemas.microsoft.com/office/drawing/2014/main" id="{FBDDA1F2-2619-15B9-3BCB-309EEA4155A6}"/>
+                  </a:ext>
+                </a:extLst>
+              </p:cNvPr>
+              <p:cNvSpPr>
+                <a:spLocks noRot="1" noChangeAspect="1" noMove="1" noResize="1" noEditPoints="1" noAdjustHandles="1" noChangeArrowheads="1" noChangeShapeType="1" noTextEdit="1"/>
+              </p:cNvSpPr>
+              <p:nvPr/>
+            </p:nvSpPr>
+            <p:spPr>
+              <a:xfrm>
+                <a:off x="735655" y="1830976"/>
+                <a:ext cx="6836445" cy="4504509"/>
+              </a:xfrm>
+              <a:prstGeom prst="rect">
+                <a:avLst/>
+              </a:prstGeom>
+              <a:blipFill>
+                <a:blip r:embed="rId4"/>
+                <a:stretch>
+                  <a:fillRect l="-2141" t="-947" r="-446" b="-2842"/>
+                </a:stretch>
+              </a:blipFill>
+              <a:ln w="12700" cap="flat" cmpd="sng">
+                <a:noFill/>
+                <a:prstDash val="solid"/>
+                <a:round/>
+              </a:ln>
+            </p:spPr>
+            <p:txBody>
+              <a:bodyPr/>
+              <a:lstStyle/>
+              <a:p>
+                <a:r>
+                  <a:rPr lang="zh-CN" altLang="en-US">
+                    <a:noFill/>
+                  </a:rPr>
+                  <a:t> </a:t>
+                </a:r>
+              </a:p>
+            </p:txBody>
+          </p:sp>
+        </mc:Fallback>
+      </mc:AlternateContent>
+      <mc:AlternateContent xmlns:mc="http://schemas.openxmlformats.org/markup-compatibility/2006" xmlns:a14="http://schemas.microsoft.com/office/drawing/2010/main">
+        <mc:Choice Requires="a14">
+          <p:sp>
+            <p:nvSpPr>
+              <p:cNvPr id="17" name="文本框 16">
+                <a:extLst>
+                  <a:ext uri="{FF2B5EF4-FFF2-40B4-BE49-F238E27FC236}">
+                    <a16:creationId xmlns:a16="http://schemas.microsoft.com/office/drawing/2014/main" id="{8EF27002-2C80-55F1-D678-A7D763316B55}"/>
+                  </a:ext>
+                </a:extLst>
+              </p:cNvPr>
+              <p:cNvSpPr txBox="1"/>
+              <p:nvPr/>
+            </p:nvSpPr>
+            <p:spPr>
+              <a:xfrm>
+                <a:off x="7987937" y="1218111"/>
+                <a:ext cx="1878784" cy="1107996"/>
+              </a:xfrm>
+              <a:prstGeom prst="rect">
+                <a:avLst/>
+              </a:prstGeom>
+              <a:noFill/>
+            </p:spPr>
+            <p:txBody>
+              <a:bodyPr wrap="none" lIns="0" tIns="0" rIns="0" bIns="0" rtlCol="0">
+                <a:spAutoFit/>
+              </a:bodyPr>
+              <a:lstStyle/>
+              <a:p>
+                <a:r>
+                  <a:rPr lang="zh-CN" altLang="en-US" b="1" dirty="0"/>
+                  <a:t>生成元</a:t>
+                </a:r>
+                <a14:m>
+                  <m:oMath xmlns:m="http://schemas.openxmlformats.org/officeDocument/2006/math">
+                    <m:r>
+                      <a:rPr lang="en-US" altLang="zh-CN" b="0" i="1" smtClean="0">
+                        <a:latin typeface="Cambria Math" panose="02040503050406030204" pitchFamily="18" charset="0"/>
+                      </a:rPr>
+                      <m:t>{</m:t>
+                    </m:r>
+                    <m:sSub>
+                      <m:sSubPr>
+                        <m:ctrlPr>
+                          <a:rPr lang="en-US" altLang="zh-CN" b="0" i="1" smtClean="0">
+                            <a:latin typeface="Cambria Math" panose="02040503050406030204" pitchFamily="18" charset="0"/>
+                          </a:rPr>
+                        </m:ctrlPr>
+                      </m:sSubPr>
+                      <m:e>
+                        <m:r>
+                          <a:rPr lang="en-US" altLang="zh-CN" b="0" i="1" smtClean="0">
+                            <a:latin typeface="Cambria Math" panose="02040503050406030204" pitchFamily="18" charset="0"/>
+                          </a:rPr>
+                          <m:t>𝑀</m:t>
+                        </m:r>
+                      </m:e>
+                      <m:sub>
+                        <m:r>
+                          <a:rPr lang="en-US" altLang="zh-CN" b="0" i="1" smtClean="0">
+                            <a:latin typeface="Cambria Math" panose="02040503050406030204" pitchFamily="18" charset="0"/>
+                          </a:rPr>
+                          <m:t>1</m:t>
+                        </m:r>
+                      </m:sub>
+                    </m:sSub>
+                    <m:r>
+                      <a:rPr lang="en-US" altLang="zh-CN" b="0" i="1" smtClean="0">
+                        <a:latin typeface="Cambria Math" panose="02040503050406030204" pitchFamily="18" charset="0"/>
+                      </a:rPr>
+                      <m:t>,...,</m:t>
+                    </m:r>
+                    <m:sSub>
+                      <m:sSubPr>
+                        <m:ctrlPr>
+                          <a:rPr lang="en-US" altLang="zh-CN" b="0" i="1" smtClean="0">
+                            <a:latin typeface="Cambria Math" panose="02040503050406030204" pitchFamily="18" charset="0"/>
+                          </a:rPr>
+                        </m:ctrlPr>
+                      </m:sSubPr>
+                      <m:e>
+                        <m:r>
+                          <a:rPr lang="en-US" altLang="zh-CN" b="0" i="1" smtClean="0">
+                            <a:latin typeface="Cambria Math" panose="02040503050406030204" pitchFamily="18" charset="0"/>
+                          </a:rPr>
+                          <m:t>𝑀</m:t>
+                        </m:r>
+                      </m:e>
+                      <m:sub>
+                        <m:r>
+                          <a:rPr lang="en-US" altLang="zh-CN" i="1">
+                            <a:latin typeface="Cambria Math" panose="02040503050406030204" pitchFamily="18" charset="0"/>
+                          </a:rPr>
+                          <m:t>𝑟</m:t>
+                        </m:r>
+                      </m:sub>
+                    </m:sSub>
+                    <m:r>
+                      <a:rPr lang="en-US" altLang="zh-CN" b="0" i="1" smtClean="0">
+                        <a:latin typeface="Cambria Math" panose="02040503050406030204" pitchFamily="18" charset="0"/>
+                      </a:rPr>
+                      <m:t>}</m:t>
+                    </m:r>
+                  </m:oMath>
+                </a14:m>
+                <a:endParaRPr lang="en-US" altLang="zh-CN" dirty="0"/>
+              </a:p>
+              <a:p>
+                <a:endParaRPr lang="en-US" altLang="zh-CN" b="0" dirty="0"/>
+              </a:p>
+              <a:p>
+                <a:endParaRPr lang="en-US" altLang="zh-CN" b="0" dirty="0"/>
+              </a:p>
+              <a:p>
+                <a:endParaRPr lang="zh-CN" altLang="en-US" dirty="0"/>
+              </a:p>
+            </p:txBody>
+          </p:sp>
+        </mc:Choice>
+        <mc:Fallback xmlns="">
+          <p:sp>
+            <p:nvSpPr>
+              <p:cNvPr id="17" name="文本框 16">
+                <a:extLst>
+                  <a:ext uri="{FF2B5EF4-FFF2-40B4-BE49-F238E27FC236}">
+                    <a16:creationId xmlns:a16="http://schemas.microsoft.com/office/drawing/2014/main" id="{8EF27002-2C80-55F1-D678-A7D763316B55}"/>
+                  </a:ext>
+                </a:extLst>
+              </p:cNvPr>
+              <p:cNvSpPr txBox="1">
+                <a:spLocks noRot="1" noChangeAspect="1" noMove="1" noResize="1" noEditPoints="1" noAdjustHandles="1" noChangeArrowheads="1" noChangeShapeType="1" noTextEdit="1"/>
+              </p:cNvSpPr>
+              <p:nvPr/>
+            </p:nvSpPr>
+            <p:spPr>
+              <a:xfrm>
+                <a:off x="7987937" y="1218111"/>
+                <a:ext cx="1878784" cy="1107996"/>
+              </a:xfrm>
+              <a:prstGeom prst="rect">
+                <a:avLst/>
+              </a:prstGeom>
+              <a:blipFill>
+                <a:blip r:embed="rId5"/>
+                <a:stretch>
+                  <a:fillRect l="-7443" t="-7143" r="-5502"/>
+                </a:stretch>
+              </a:blipFill>
+            </p:spPr>
+            <p:txBody>
+              <a:bodyPr/>
+              <a:lstStyle/>
+              <a:p>
+                <a:r>
+                  <a:rPr lang="zh-CN" altLang="en-US">
+                    <a:noFill/>
+                  </a:rPr>
+                  <a:t> </a:t>
+                </a:r>
+              </a:p>
+            </p:txBody>
+          </p:sp>
+        </mc:Fallback>
+      </mc:AlternateContent>
+      <mc:AlternateContent xmlns:mc="http://schemas.openxmlformats.org/markup-compatibility/2006" xmlns:a14="http://schemas.microsoft.com/office/drawing/2010/main">
+        <mc:Choice Requires="a14">
+          <p:sp>
+            <p:nvSpPr>
+              <p:cNvPr id="19" name="文本框 18">
+                <a:extLst>
+                  <a:ext uri="{FF2B5EF4-FFF2-40B4-BE49-F238E27FC236}">
+                    <a16:creationId xmlns:a16="http://schemas.microsoft.com/office/drawing/2014/main" id="{E082C958-D4D8-CF0F-4ADC-3F0B9332C2A3}"/>
+                  </a:ext>
+                </a:extLst>
+              </p:cNvPr>
+              <p:cNvSpPr txBox="1"/>
+              <p:nvPr/>
+            </p:nvSpPr>
+            <p:spPr>
+              <a:xfrm>
+                <a:off x="8866414" y="1505494"/>
+                <a:ext cx="1946174" cy="3600986"/>
+              </a:xfrm>
+              <a:prstGeom prst="rect">
+                <a:avLst/>
+              </a:prstGeom>
+              <a:noFill/>
+            </p:spPr>
+            <p:txBody>
+              <a:bodyPr wrap="none" lIns="0" tIns="0" rIns="0" bIns="0" rtlCol="0">
+                <a:spAutoFit/>
+              </a:bodyPr>
+              <a:lstStyle/>
+              <a:p>
+                <a:endParaRPr lang="en-US" altLang="zh-CN" i="1" dirty="0">
+                  <a:latin typeface="Cambria Math" panose="02040503050406030204" pitchFamily="18" charset="0"/>
+                </a:endParaRPr>
+              </a:p>
+              <a:p>
+                <a:pPr/>
+                <a14:m>
+                  <m:oMathPara xmlns:m="http://schemas.openxmlformats.org/officeDocument/2006/math">
+                    <m:oMathParaPr>
+                      <m:jc m:val="centerGroup"/>
+                    </m:oMathParaPr>
+                    <m:oMath xmlns:m="http://schemas.openxmlformats.org/officeDocument/2006/math">
+                      <m:sSub>
+                        <m:sSubPr>
+                          <m:ctrlPr>
+                            <a:rPr lang="en-US" altLang="zh-CN" b="0" i="1" smtClean="0">
+                              <a:latin typeface="Cambria Math" panose="02040503050406030204" pitchFamily="18" charset="0"/>
+                            </a:rPr>
+                          </m:ctrlPr>
+                        </m:sSubPr>
+                        <m:e>
+                          <m:r>
+                            <a:rPr lang="en-US" altLang="zh-CN" b="0" i="1" smtClean="0">
+                              <a:latin typeface="Cambria Math" panose="02040503050406030204" pitchFamily="18" charset="0"/>
+                            </a:rPr>
+                            <m:t>𝑃</m:t>
+                          </m:r>
+                        </m:e>
+                        <m:sub>
+                          <m:r>
+                            <a:rPr lang="en-US" altLang="zh-CN" b="0" i="1" smtClean="0">
+                              <a:latin typeface="Cambria Math" panose="02040503050406030204" pitchFamily="18" charset="0"/>
+                            </a:rPr>
+                            <m:t>𝑖</m:t>
+                          </m:r>
+                        </m:sub>
+                      </m:sSub>
+                      <m:r>
+                        <a:rPr lang="en-US" altLang="zh-CN" b="0" i="1" smtClean="0">
+                          <a:latin typeface="Cambria Math" panose="02040503050406030204" pitchFamily="18" charset="0"/>
+                        </a:rPr>
+                        <m:t>=</m:t>
+                      </m:r>
+                      <m:d>
+                        <m:dPr>
+                          <m:ctrlPr>
+                            <a:rPr lang="en-US" altLang="zh-CN" b="0" i="1" smtClean="0">
+                              <a:latin typeface="Cambria Math" panose="02040503050406030204" pitchFamily="18" charset="0"/>
+                            </a:rPr>
+                          </m:ctrlPr>
+                        </m:dPr>
+                        <m:e>
+                          <m:r>
+                            <a:rPr lang="en-US" altLang="zh-CN" b="0" i="1" smtClean="0">
+                              <a:latin typeface="Cambria Math" panose="02040503050406030204" pitchFamily="18" charset="0"/>
+                            </a:rPr>
+                            <m:t>𝐼</m:t>
+                          </m:r>
+                          <m:r>
+                            <a:rPr lang="en-US" altLang="zh-CN" b="0" i="1" smtClean="0">
+                              <a:latin typeface="Cambria Math" panose="02040503050406030204" pitchFamily="18" charset="0"/>
+                            </a:rPr>
+                            <m:t>+</m:t>
+                          </m:r>
+                          <m:sSub>
+                            <m:sSubPr>
+                              <m:ctrlPr>
+                                <a:rPr lang="en-US" altLang="zh-CN" b="0" i="1" smtClean="0">
+                                  <a:latin typeface="Cambria Math" panose="02040503050406030204" pitchFamily="18" charset="0"/>
+                                </a:rPr>
+                              </m:ctrlPr>
+                            </m:sSubPr>
+                            <m:e>
+                              <m:r>
+                                <a:rPr lang="en-US" altLang="zh-CN" b="0" i="1" smtClean="0">
+                                  <a:latin typeface="Cambria Math" panose="02040503050406030204" pitchFamily="18" charset="0"/>
+                                </a:rPr>
+                                <m:t>𝑀</m:t>
+                              </m:r>
+                            </m:e>
+                            <m:sub>
+                              <m:r>
+                                <a:rPr lang="en-US" altLang="zh-CN" i="1">
+                                  <a:latin typeface="Cambria Math" panose="02040503050406030204" pitchFamily="18" charset="0"/>
+                                </a:rPr>
+                                <m:t>𝑖</m:t>
+                              </m:r>
+                            </m:sub>
+                          </m:sSub>
+                        </m:e>
+                      </m:d>
+                      <m:r>
+                        <a:rPr lang="en-US" altLang="zh-CN" b="0" i="1" smtClean="0">
+                          <a:latin typeface="Cambria Math" panose="02040503050406030204" pitchFamily="18" charset="0"/>
+                        </a:rPr>
+                        <m:t>/</m:t>
+                      </m:r>
+                      <m:r>
+                        <a:rPr lang="en-US" altLang="zh-CN" b="0" i="1" smtClean="0">
+                          <a:latin typeface="Cambria Math" panose="02040503050406030204" pitchFamily="18" charset="0"/>
+                        </a:rPr>
+                        <m:t>2</m:t>
+                      </m:r>
+                    </m:oMath>
+                  </m:oMathPara>
+                </a14:m>
+                <a:endParaRPr lang="en-US" altLang="zh-CN" b="0" i="1" dirty="0">
+                  <a:latin typeface="Cambria Math" panose="02040503050406030204" pitchFamily="18" charset="0"/>
+                </a:endParaRPr>
+              </a:p>
+              <a:p>
+                <a:endParaRPr lang="en-US" altLang="zh-CN" b="0" i="1" dirty="0">
+                  <a:latin typeface="Cambria Math" panose="02040503050406030204" pitchFamily="18" charset="0"/>
+                </a:endParaRPr>
+              </a:p>
+              <a:p>
+                <a:pPr/>
+                <a14:m>
+                  <m:oMathPara xmlns:m="http://schemas.openxmlformats.org/officeDocument/2006/math">
+                    <m:oMathParaPr>
+                      <m:jc m:val="centerGroup"/>
+                    </m:oMathParaPr>
+                    <m:oMath xmlns:m="http://schemas.openxmlformats.org/officeDocument/2006/math">
+                      <m:r>
+                        <a:rPr lang="en-US" altLang="zh-CN" b="0" i="1" smtClean="0">
+                          <a:latin typeface="Cambria Math" panose="02040503050406030204" pitchFamily="18" charset="0"/>
+                        </a:rPr>
+                        <m:t>𝑖𝑓</m:t>
+                      </m:r>
+                      <m:r>
+                        <a:rPr lang="en-US" altLang="zh-CN" b="0" i="1" smtClean="0">
+                          <a:latin typeface="Cambria Math" panose="02040503050406030204" pitchFamily="18" charset="0"/>
+                        </a:rPr>
+                        <m:t> </m:t>
+                      </m:r>
+                      <m:sSub>
+                        <m:sSubPr>
+                          <m:ctrlPr>
+                            <a:rPr lang="en-US" altLang="zh-CN" b="0" i="1" smtClean="0">
+                              <a:latin typeface="Cambria Math" panose="02040503050406030204" pitchFamily="18" charset="0"/>
+                            </a:rPr>
+                          </m:ctrlPr>
+                        </m:sSubPr>
+                        <m:e>
+                          <m:r>
+                            <a:rPr lang="en-US" altLang="zh-CN" b="0" i="1" smtClean="0">
+                              <a:latin typeface="Cambria Math" panose="02040503050406030204" pitchFamily="18" charset="0"/>
+                            </a:rPr>
+                            <m:t>𝑀</m:t>
+                          </m:r>
+                        </m:e>
+                        <m:sub>
+                          <m:r>
+                            <a:rPr lang="en-US" altLang="zh-CN" b="0" i="1" smtClean="0">
+                              <a:latin typeface="Cambria Math" panose="02040503050406030204" pitchFamily="18" charset="0"/>
+                            </a:rPr>
+                            <m:t>𝑖</m:t>
+                          </m:r>
+                        </m:sub>
+                      </m:sSub>
+                      <m:d>
+                        <m:dPr>
+                          <m:begChr m:val="|"/>
+                          <m:endChr m:val="⟩"/>
+                          <m:ctrlPr>
+                            <a:rPr lang="en-US" altLang="zh-CN" b="0" i="1" smtClean="0">
+                              <a:latin typeface="Cambria Math" panose="02040503050406030204" pitchFamily="18" charset="0"/>
+                            </a:rPr>
+                          </m:ctrlPr>
+                        </m:dPr>
+                        <m:e>
+                          <m:r>
+                            <a:rPr lang="en-US" altLang="zh-CN" b="0" i="1" smtClean="0">
+                              <a:latin typeface="Cambria Math" panose="02040503050406030204" pitchFamily="18" charset="0"/>
+                            </a:rPr>
+                            <m:t>𝜓</m:t>
+                          </m:r>
+                        </m:e>
+                      </m:d>
+                      <m:r>
+                        <a:rPr lang="en-US" altLang="zh-CN" b="0" i="1" smtClean="0">
+                          <a:latin typeface="Cambria Math" panose="02040503050406030204" pitchFamily="18" charset="0"/>
+                        </a:rPr>
+                        <m:t>=</m:t>
+                      </m:r>
+                      <m:d>
+                        <m:dPr>
+                          <m:begChr m:val="|"/>
+                          <m:endChr m:val="⟩"/>
+                          <m:ctrlPr>
+                            <a:rPr lang="en-US" altLang="zh-CN" b="0" i="1" smtClean="0">
+                              <a:latin typeface="Cambria Math" panose="02040503050406030204" pitchFamily="18" charset="0"/>
+                            </a:rPr>
+                          </m:ctrlPr>
+                        </m:dPr>
+                        <m:e>
+                          <m:r>
+                            <a:rPr lang="en-US" altLang="zh-CN" b="0" i="1" smtClean="0">
+                              <a:latin typeface="Cambria Math" panose="02040503050406030204" pitchFamily="18" charset="0"/>
+                            </a:rPr>
+                            <m:t>𝜓</m:t>
+                          </m:r>
+                        </m:e>
+                      </m:d>
+                    </m:oMath>
+                  </m:oMathPara>
+                </a14:m>
+                <a:endParaRPr lang="en-US" altLang="zh-CN" b="0" i="1" dirty="0">
+                  <a:latin typeface="Cambria Math" panose="02040503050406030204" pitchFamily="18" charset="0"/>
+                </a:endParaRPr>
+              </a:p>
+              <a:p>
+                <a:pPr/>
+                <a14:m>
+                  <m:oMathPara xmlns:m="http://schemas.openxmlformats.org/officeDocument/2006/math">
+                    <m:oMathParaPr>
+                      <m:jc m:val="centerGroup"/>
+                    </m:oMathParaPr>
+                    <m:oMath xmlns:m="http://schemas.openxmlformats.org/officeDocument/2006/math">
+                      <m:sSub>
+                        <m:sSubPr>
+                          <m:ctrlPr>
+                            <a:rPr lang="en-US" altLang="zh-CN" b="0" i="1" smtClean="0">
+                              <a:latin typeface="Cambria Math" panose="02040503050406030204" pitchFamily="18" charset="0"/>
+                            </a:rPr>
+                          </m:ctrlPr>
+                        </m:sSubPr>
+                        <m:e>
+                          <m:r>
+                            <a:rPr lang="en-US" altLang="zh-CN" b="0" i="1" smtClean="0">
+                              <a:latin typeface="Cambria Math" panose="02040503050406030204" pitchFamily="18" charset="0"/>
+                            </a:rPr>
+                            <m:t>𝑃</m:t>
+                          </m:r>
+                        </m:e>
+                        <m:sub>
+                          <m:r>
+                            <a:rPr lang="en-US" altLang="zh-CN" b="0" i="1" smtClean="0">
+                              <a:latin typeface="Cambria Math" panose="02040503050406030204" pitchFamily="18" charset="0"/>
+                            </a:rPr>
+                            <m:t>𝑖</m:t>
+                          </m:r>
+                        </m:sub>
+                      </m:sSub>
+                      <m:d>
+                        <m:dPr>
+                          <m:begChr m:val="|"/>
+                          <m:endChr m:val="⟩"/>
+                          <m:ctrlPr>
+                            <a:rPr lang="en-US" altLang="zh-CN" b="0" i="1" smtClean="0">
+                              <a:latin typeface="Cambria Math" panose="02040503050406030204" pitchFamily="18" charset="0"/>
+                            </a:rPr>
+                          </m:ctrlPr>
+                        </m:dPr>
+                        <m:e>
+                          <m:r>
+                            <a:rPr lang="en-US" altLang="zh-CN" b="0" i="1" smtClean="0">
+                              <a:latin typeface="Cambria Math" panose="02040503050406030204" pitchFamily="18" charset="0"/>
+                            </a:rPr>
+                            <m:t>𝜓</m:t>
+                          </m:r>
+                        </m:e>
+                      </m:d>
+                      <m:r>
+                        <a:rPr lang="en-US" altLang="zh-CN" b="0" i="1" smtClean="0">
+                          <a:latin typeface="Cambria Math" panose="02040503050406030204" pitchFamily="18" charset="0"/>
+                        </a:rPr>
+                        <m:t>=</m:t>
+                      </m:r>
+                      <m:d>
+                        <m:dPr>
+                          <m:begChr m:val="|"/>
+                          <m:endChr m:val="⟩"/>
+                          <m:ctrlPr>
+                            <a:rPr lang="en-US" altLang="zh-CN" b="0" i="1" smtClean="0">
+                              <a:latin typeface="Cambria Math" panose="02040503050406030204" pitchFamily="18" charset="0"/>
+                            </a:rPr>
+                          </m:ctrlPr>
+                        </m:dPr>
+                        <m:e>
+                          <m:r>
+                            <a:rPr lang="en-US" altLang="zh-CN" b="0" i="1" smtClean="0">
+                              <a:latin typeface="Cambria Math" panose="02040503050406030204" pitchFamily="18" charset="0"/>
+                            </a:rPr>
+                            <m:t>𝜓</m:t>
+                          </m:r>
+                        </m:e>
+                      </m:d>
+                    </m:oMath>
+                  </m:oMathPara>
+                </a14:m>
+                <a:endParaRPr lang="en-US" altLang="zh-CN" b="0" i="1" dirty="0">
+                  <a:latin typeface="Cambria Math" panose="02040503050406030204" pitchFamily="18" charset="0"/>
+                </a:endParaRPr>
+              </a:p>
+              <a:p>
+                <a:endParaRPr lang="en-US" altLang="zh-CN" i="1" dirty="0">
+                  <a:latin typeface="Cambria Math" panose="02040503050406030204" pitchFamily="18" charset="0"/>
+                </a:endParaRPr>
+              </a:p>
+              <a:p>
+                <a:pPr/>
+                <a14:m>
+                  <m:oMathPara xmlns:m="http://schemas.openxmlformats.org/officeDocument/2006/math">
+                    <m:oMathParaPr>
+                      <m:jc m:val="centerGroup"/>
+                    </m:oMathParaPr>
+                    <m:oMath xmlns:m="http://schemas.openxmlformats.org/officeDocument/2006/math">
+                      <m:r>
+                        <a:rPr lang="en-US" altLang="zh-CN" b="0" i="1" smtClean="0">
+                          <a:latin typeface="Cambria Math" panose="02040503050406030204" pitchFamily="18" charset="0"/>
+                        </a:rPr>
+                        <m:t>𝑒𝑙𝑖𝑓</m:t>
+                      </m:r>
+                      <m:r>
+                        <a:rPr lang="en-US" altLang="zh-CN" b="0" i="1" smtClean="0">
+                          <a:latin typeface="Cambria Math" panose="02040503050406030204" pitchFamily="18" charset="0"/>
+                        </a:rPr>
+                        <m:t> </m:t>
+                      </m:r>
+                      <m:sSub>
+                        <m:sSubPr>
+                          <m:ctrlPr>
+                            <a:rPr lang="en-US" altLang="zh-CN" b="0" i="1" smtClean="0">
+                              <a:latin typeface="Cambria Math" panose="02040503050406030204" pitchFamily="18" charset="0"/>
+                            </a:rPr>
+                          </m:ctrlPr>
+                        </m:sSubPr>
+                        <m:e>
+                          <m:r>
+                            <a:rPr lang="en-US" altLang="zh-CN" b="0" i="1" smtClean="0">
+                              <a:latin typeface="Cambria Math" panose="02040503050406030204" pitchFamily="18" charset="0"/>
+                            </a:rPr>
+                            <m:t>𝑀</m:t>
+                          </m:r>
+                        </m:e>
+                        <m:sub>
+                          <m:r>
+                            <a:rPr lang="en-US" altLang="zh-CN" b="0" i="1" smtClean="0">
+                              <a:latin typeface="Cambria Math" panose="02040503050406030204" pitchFamily="18" charset="0"/>
+                            </a:rPr>
+                            <m:t>𝑖</m:t>
+                          </m:r>
+                        </m:sub>
+                      </m:sSub>
+                      <m:d>
+                        <m:dPr>
+                          <m:begChr m:val="|"/>
+                          <m:endChr m:val="⟩"/>
+                          <m:ctrlPr>
+                            <a:rPr lang="en-US" altLang="zh-CN" b="0" i="1" smtClean="0">
+                              <a:latin typeface="Cambria Math" panose="02040503050406030204" pitchFamily="18" charset="0"/>
+                            </a:rPr>
+                          </m:ctrlPr>
+                        </m:dPr>
+                        <m:e>
+                          <m:r>
+                            <a:rPr lang="en-US" altLang="zh-CN" b="0" i="1" smtClean="0">
+                              <a:latin typeface="Cambria Math" panose="02040503050406030204" pitchFamily="18" charset="0"/>
+                            </a:rPr>
+                            <m:t>𝜓</m:t>
+                          </m:r>
+                        </m:e>
+                      </m:d>
+                      <m:r>
+                        <a:rPr lang="en-US" altLang="zh-CN" b="0" i="1" smtClean="0">
+                          <a:latin typeface="Cambria Math" panose="02040503050406030204" pitchFamily="18" charset="0"/>
+                        </a:rPr>
+                        <m:t>=</m:t>
+                      </m:r>
+                      <m:d>
+                        <m:dPr>
+                          <m:begChr m:val="|"/>
+                          <m:endChr m:val="⟩"/>
+                          <m:ctrlPr>
+                            <a:rPr lang="en-US" altLang="zh-CN" b="0" i="1" smtClean="0">
+                              <a:latin typeface="Cambria Math" panose="02040503050406030204" pitchFamily="18" charset="0"/>
+                            </a:rPr>
+                          </m:ctrlPr>
+                        </m:dPr>
+                        <m:e>
+                          <m:r>
+                            <a:rPr lang="en-US" altLang="zh-CN" b="0" i="1" smtClean="0">
+                              <a:latin typeface="Cambria Math" panose="02040503050406030204" pitchFamily="18" charset="0"/>
+                            </a:rPr>
+                            <m:t>𝜓</m:t>
+                          </m:r>
+                        </m:e>
+                      </m:d>
+                    </m:oMath>
+                  </m:oMathPara>
+                </a14:m>
+                <a:endParaRPr lang="en-US" altLang="zh-CN" b="0" i="1" dirty="0">
+                  <a:latin typeface="Cambria Math" panose="02040503050406030204" pitchFamily="18" charset="0"/>
+                </a:endParaRPr>
+              </a:p>
+              <a:p>
+                <a:pPr/>
+                <a14:m>
+                  <m:oMathPara xmlns:m="http://schemas.openxmlformats.org/officeDocument/2006/math">
+                    <m:oMathParaPr>
+                      <m:jc m:val="centerGroup"/>
+                    </m:oMathParaPr>
+                    <m:oMath xmlns:m="http://schemas.openxmlformats.org/officeDocument/2006/math">
+                      <m:sSub>
+                        <m:sSubPr>
+                          <m:ctrlPr>
+                            <a:rPr lang="en-US" altLang="zh-CN" b="0" i="1" smtClean="0">
+                              <a:latin typeface="Cambria Math" panose="02040503050406030204" pitchFamily="18" charset="0"/>
+                            </a:rPr>
+                          </m:ctrlPr>
+                        </m:sSubPr>
+                        <m:e>
+                          <m:r>
+                            <a:rPr lang="en-US" altLang="zh-CN" b="0" i="1" smtClean="0">
+                              <a:latin typeface="Cambria Math" panose="02040503050406030204" pitchFamily="18" charset="0"/>
+                            </a:rPr>
+                            <m:t>𝑃</m:t>
+                          </m:r>
+                        </m:e>
+                        <m:sub>
+                          <m:r>
+                            <a:rPr lang="en-US" altLang="zh-CN" b="0" i="1" smtClean="0">
+                              <a:latin typeface="Cambria Math" panose="02040503050406030204" pitchFamily="18" charset="0"/>
+                            </a:rPr>
+                            <m:t>𝑖</m:t>
+                          </m:r>
+                        </m:sub>
+                      </m:sSub>
+                      <m:d>
+                        <m:dPr>
+                          <m:begChr m:val="|"/>
+                          <m:endChr m:val="⟩"/>
+                          <m:ctrlPr>
+                            <a:rPr lang="en-US" altLang="zh-CN" b="0" i="1" smtClean="0">
+                              <a:latin typeface="Cambria Math" panose="02040503050406030204" pitchFamily="18" charset="0"/>
+                            </a:rPr>
+                          </m:ctrlPr>
+                        </m:dPr>
+                        <m:e>
+                          <m:r>
+                            <a:rPr lang="en-US" altLang="zh-CN" b="0" i="1" smtClean="0">
+                              <a:latin typeface="Cambria Math" panose="02040503050406030204" pitchFamily="18" charset="0"/>
+                            </a:rPr>
+                            <m:t>𝜓</m:t>
+                          </m:r>
+                        </m:e>
+                      </m:d>
+                      <m:r>
+                        <a:rPr lang="en-US" altLang="zh-CN" b="0" i="1" smtClean="0">
+                          <a:latin typeface="Cambria Math" panose="02040503050406030204" pitchFamily="18" charset="0"/>
+                        </a:rPr>
+                        <m:t>=</m:t>
+                      </m:r>
+                      <m:r>
+                        <a:rPr lang="en-US" altLang="zh-CN" b="0" i="1" smtClean="0">
+                          <a:latin typeface="Cambria Math" panose="02040503050406030204" pitchFamily="18" charset="0"/>
+                        </a:rPr>
+                        <m:t>0</m:t>
+                      </m:r>
+                    </m:oMath>
+                  </m:oMathPara>
+                </a14:m>
+                <a:endParaRPr lang="en-US" altLang="zh-CN" b="0" i="1" dirty="0">
+                  <a:latin typeface="Cambria Math" panose="02040503050406030204" pitchFamily="18" charset="0"/>
+                </a:endParaRPr>
+              </a:p>
+              <a:p>
+                <a:endParaRPr lang="en-US" altLang="zh-CN" b="0" i="1" dirty="0">
+                  <a:latin typeface="Cambria Math" panose="02040503050406030204" pitchFamily="18" charset="0"/>
+                </a:endParaRPr>
+              </a:p>
+              <a:p>
+                <a:endParaRPr lang="en-US" altLang="zh-CN" b="0" i="1" dirty="0">
+                  <a:latin typeface="Cambria Math" panose="02040503050406030204" pitchFamily="18" charset="0"/>
+                </a:endParaRPr>
+              </a:p>
+              <a:p>
+                <a:endParaRPr lang="en-US" altLang="zh-CN" b="0" i="1" dirty="0">
+                  <a:latin typeface="Cambria Math" panose="02040503050406030204" pitchFamily="18" charset="0"/>
+                </a:endParaRPr>
+              </a:p>
+              <a:p>
+                <a:endParaRPr lang="en-US" altLang="zh-CN" i="1" dirty="0">
+                  <a:latin typeface="Cambria Math" panose="02040503050406030204" pitchFamily="18" charset="0"/>
+                </a:endParaRPr>
+              </a:p>
+              <a:p>
+                <a:pPr/>
+                <a14:m>
+                  <m:oMathPara xmlns:m="http://schemas.openxmlformats.org/officeDocument/2006/math">
+                    <m:oMathParaPr>
+                      <m:jc m:val="centerGroup"/>
+                    </m:oMathParaPr>
+                    <m:oMath xmlns:m="http://schemas.openxmlformats.org/officeDocument/2006/math">
+                      <m:r>
+                        <a:rPr lang="en-US" altLang="zh-CN" b="0" i="1" smtClean="0">
+                          <a:latin typeface="Cambria Math" panose="02040503050406030204" pitchFamily="18" charset="0"/>
+                        </a:rPr>
+                        <m:t> </m:t>
+                      </m:r>
+                    </m:oMath>
+                  </m:oMathPara>
+                </a14:m>
+                <a:endParaRPr lang="zh-CN" altLang="en-US" dirty="0"/>
+              </a:p>
+            </p:txBody>
+          </p:sp>
+        </mc:Choice>
+        <mc:Fallback xmlns="">
+          <p:sp>
+            <p:nvSpPr>
+              <p:cNvPr id="19" name="文本框 18">
+                <a:extLst>
+                  <a:ext uri="{FF2B5EF4-FFF2-40B4-BE49-F238E27FC236}">
+                    <a16:creationId xmlns:a16="http://schemas.microsoft.com/office/drawing/2014/main" id="{E082C958-D4D8-CF0F-4ADC-3F0B9332C2A3}"/>
+                  </a:ext>
+                </a:extLst>
+              </p:cNvPr>
+              <p:cNvSpPr txBox="1">
+                <a:spLocks noRot="1" noChangeAspect="1" noMove="1" noResize="1" noEditPoints="1" noAdjustHandles="1" noChangeArrowheads="1" noChangeShapeType="1" noTextEdit="1"/>
+              </p:cNvSpPr>
+              <p:nvPr/>
+            </p:nvSpPr>
+            <p:spPr>
+              <a:xfrm>
+                <a:off x="8866414" y="1505494"/>
+                <a:ext cx="1946174" cy="3600986"/>
+              </a:xfrm>
+              <a:prstGeom prst="rect">
+                <a:avLst/>
+              </a:prstGeom>
+              <a:blipFill>
+                <a:blip r:embed="rId6"/>
+                <a:stretch>
+                  <a:fillRect/>
+                </a:stretch>
+              </a:blipFill>
+            </p:spPr>
+            <p:txBody>
+              <a:bodyPr/>
+              <a:lstStyle/>
+              <a:p>
+                <a:r>
+                  <a:rPr lang="zh-CN" altLang="en-US">
+                    <a:noFill/>
+                  </a:rPr>
+                  <a:t> </a:t>
+                </a:r>
+              </a:p>
+            </p:txBody>
+          </p:sp>
+        </mc:Fallback>
+      </mc:AlternateContent>
+      <p:pic>
+        <p:nvPicPr>
+          <p:cNvPr id="7" name="图片 6">
+            <a:extLst>
+              <a:ext uri="{FF2B5EF4-FFF2-40B4-BE49-F238E27FC236}">
+                <a16:creationId xmlns:a16="http://schemas.microsoft.com/office/drawing/2014/main" id="{CB61A138-DF81-02CA-337D-2A3420403AD7}"/>
+              </a:ext>
+            </a:extLst>
+          </p:cNvPr>
+          <p:cNvPicPr>
+            <a:picLocks noChangeAspect="1"/>
+          </p:cNvPicPr>
+          <p:nvPr/>
+        </p:nvPicPr>
+        <p:blipFill>
+          <a:blip r:embed="rId7"/>
+          <a:stretch>
+            <a:fillRect/>
+          </a:stretch>
+        </p:blipFill>
+        <p:spPr>
+          <a:xfrm>
+            <a:off x="8445546" y="3951514"/>
+            <a:ext cx="2822396" cy="1138619"/>
+          </a:xfrm>
+          <a:prstGeom prst="rect">
+            <a:avLst/>
+          </a:prstGeom>
+        </p:spPr>
+      </p:pic>
     </p:spTree>
     <p:extLst>
       <p:ext uri="{BB962C8B-B14F-4D97-AF65-F5344CB8AC3E}">
-        <p14:creationId xmlns:p14="http://schemas.microsoft.com/office/powerpoint/2010/main" val="1304257519"/>
+        <p14:creationId xmlns:p14="http://schemas.microsoft.com/office/powerpoint/2010/main" val="265753854"/>
+      </p:ext>
+    </p:extLst>
+  </p:cSld>
+  <p:clrMapOvr>
+    <a:masterClrMapping/>
+  </p:clrMapOvr>
+  <mc:AlternateContent xmlns:mc="http://schemas.openxmlformats.org/markup-compatibility/2006" xmlns:p159="http://schemas.microsoft.com/office/powerpoint/2015/09/main">
+    <mc:Choice Requires="p159">
+      <p:transition spd="slow">
+        <p159:morph option="byObject"/>
+      </p:transition>
+    </mc:Choice>
+    <mc:Fallback xmlns="">
+      <p:transition spd="slow">
+        <p:fade/>
+      </p:transition>
+    </mc:Fallback>
+  </mc:AlternateContent>
+</p:sld>
+</file>
+
+<file path=ppt/slides/slide35.xml><?xml version="1.0" encoding="utf-8"?>
+<p:sld xmlns:a="http://schemas.openxmlformats.org/drawingml/2006/main" xmlns:r="http://schemas.openxmlformats.org/officeDocument/2006/relationships" xmlns:p="http://schemas.openxmlformats.org/presentationml/2006/main">
+  <p:cSld>
+    <p:spTree>
+      <p:nvGrpSpPr>
+        <p:cNvPr id="1" name="">
+          <a:extLst>
+            <a:ext uri="{FF2B5EF4-FFF2-40B4-BE49-F238E27FC236}">
+              <a16:creationId xmlns:a16="http://schemas.microsoft.com/office/drawing/2014/main" id="{4F0C4467-7395-3DB9-7B6E-B7E5B7EA4F0A}"/>
+            </a:ext>
+          </a:extLst>
+        </p:cNvPr>
+        <p:cNvGrpSpPr/>
+        <p:nvPr/>
+      </p:nvGrpSpPr>
+      <p:grpSpPr>
+        <a:xfrm>
+          <a:off x="0" y="0"/>
+          <a:ext cx="0" cy="0"/>
+          <a:chOff x="0" y="0"/>
+          <a:chExt cx="0" cy="0"/>
+        </a:xfrm>
+      </p:grpSpPr>
+      <p:sp>
+        <p:nvSpPr>
+          <p:cNvPr id="2" name="TextBox 1">
+            <a:extLst>
+              <a:ext uri="{FF2B5EF4-FFF2-40B4-BE49-F238E27FC236}">
+                <a16:creationId xmlns:a16="http://schemas.microsoft.com/office/drawing/2014/main" id="{31FE203D-EE37-039C-0736-B5D5799FCFA0}"/>
+              </a:ext>
+            </a:extLst>
+          </p:cNvPr>
+          <p:cNvSpPr txBox="1"/>
+          <p:nvPr/>
+        </p:nvSpPr>
+        <p:spPr>
+          <a:xfrm>
+            <a:off x="762000" y="635000"/>
+            <a:ext cx="10668000" cy="571500"/>
+          </a:xfrm>
+          <a:prstGeom prst="rect">
+            <a:avLst/>
+          </a:prstGeom>
+          <a:noFill/>
+        </p:spPr>
+        <p:txBody>
+          <a:bodyPr wrap="square">
+            <a:spAutoFit/>
+          </a:bodyPr>
+          <a:lstStyle/>
+          <a:p>
+            <a:pPr algn="l"/>
+            <a:r>
+              <a:rPr sz="3200" b="1">
+                <a:solidFill>
+                  <a:srgbClr val="333333"/>
+                </a:solidFill>
+                <a:latin typeface="Noto Sans SC"/>
+              </a:rPr>
+              <a:t>04  稳定子</a:t>
+            </a:r>
+          </a:p>
+        </p:txBody>
+      </p:sp>
+      <p:sp>
+        <p:nvSpPr>
+          <p:cNvPr id="3" name="TextBox 2">
+            <a:extLst>
+              <a:ext uri="{FF2B5EF4-FFF2-40B4-BE49-F238E27FC236}">
+                <a16:creationId xmlns:a16="http://schemas.microsoft.com/office/drawing/2014/main" id="{FA2D7338-AF23-FC6B-E654-6464679AA62E}"/>
+              </a:ext>
+            </a:extLst>
+          </p:cNvPr>
+          <p:cNvSpPr txBox="1"/>
+          <p:nvPr/>
+        </p:nvSpPr>
+        <p:spPr>
+          <a:xfrm>
+            <a:off x="762000" y="1397000"/>
+            <a:ext cx="10668000" cy="444500"/>
+          </a:xfrm>
+          <a:prstGeom prst="rect">
+            <a:avLst/>
+          </a:prstGeom>
+          <a:noFill/>
+        </p:spPr>
+        <p:txBody>
+          <a:bodyPr wrap="square">
+            <a:spAutoFit/>
+          </a:bodyPr>
+          <a:lstStyle/>
+          <a:p>
+            <a:pPr algn="l"/>
+            <a:r>
+              <a:rPr sz="2200" b="1" dirty="0">
+                <a:solidFill>
+                  <a:srgbClr val="666666"/>
+                </a:solidFill>
+                <a:latin typeface="Noto Sans SC"/>
+              </a:rPr>
+              <a:t>4.</a:t>
+            </a:r>
+            <a:r>
+              <a:rPr lang="en-US" sz="2200" b="1" dirty="0">
+                <a:solidFill>
+                  <a:srgbClr val="666666"/>
+                </a:solidFill>
+                <a:latin typeface="Noto Sans SC"/>
+              </a:rPr>
+              <a:t>7</a:t>
+            </a:r>
+            <a:r>
+              <a:rPr sz="2200" b="1" dirty="0">
+                <a:solidFill>
+                  <a:srgbClr val="666666"/>
+                </a:solidFill>
+                <a:latin typeface="Noto Sans SC"/>
+              </a:rPr>
+              <a:t> </a:t>
+            </a:r>
+            <a:r>
+              <a:rPr lang="zh-CN" altLang="en-US" sz="2200" b="1" dirty="0">
+                <a:solidFill>
+                  <a:srgbClr val="666666"/>
+                </a:solidFill>
+                <a:latin typeface="Noto Sans SC"/>
+              </a:rPr>
+              <a:t>投影算符</a:t>
+            </a:r>
+            <a:r>
+              <a:rPr lang="en-US" altLang="zh-CN" sz="2200" b="1" dirty="0">
+                <a:solidFill>
+                  <a:srgbClr val="666666"/>
+                </a:solidFill>
+                <a:latin typeface="Noto Sans SC"/>
+              </a:rPr>
+              <a:t>——</a:t>
+            </a:r>
+            <a:r>
+              <a:rPr lang="zh-CN" altLang="en-US" sz="2200" b="1" dirty="0">
+                <a:solidFill>
+                  <a:srgbClr val="666666"/>
+                </a:solidFill>
+                <a:latin typeface="Noto Sans SC"/>
+              </a:rPr>
+              <a:t>稳定子群到稳定子码的显式物理图像</a:t>
+            </a:r>
+            <a:endParaRPr sz="2200" b="1" dirty="0">
+              <a:solidFill>
+                <a:srgbClr val="666666"/>
+              </a:solidFill>
+              <a:latin typeface="Noto Sans SC"/>
+            </a:endParaRPr>
+          </a:p>
+        </p:txBody>
+      </p:sp>
+      <p:cxnSp>
+        <p:nvCxnSpPr>
+          <p:cNvPr id="8" name="直接连接符 7">
+            <a:extLst>
+              <a:ext uri="{FF2B5EF4-FFF2-40B4-BE49-F238E27FC236}">
+                <a16:creationId xmlns:a16="http://schemas.microsoft.com/office/drawing/2014/main" id="{6B8F8E46-A6C9-DC30-30A2-5579E9816754}"/>
+              </a:ext>
+            </a:extLst>
+          </p:cNvPr>
+          <p:cNvCxnSpPr/>
+          <p:nvPr/>
+        </p:nvCxnSpPr>
+        <p:spPr>
+          <a:xfrm>
+            <a:off x="7534894" y="0"/>
+            <a:ext cx="0" cy="6941127"/>
+          </a:xfrm>
+          <a:prstGeom prst="line">
+            <a:avLst/>
+          </a:prstGeom>
+          <a:ln w="76200">
+            <a:solidFill>
+              <a:schemeClr val="tx1">
+                <a:lumMod val="75000"/>
+                <a:lumOff val="25000"/>
+              </a:schemeClr>
+            </a:solidFill>
+            <a:prstDash val="sysDot"/>
+          </a:ln>
+        </p:spPr>
+        <p:style>
+          <a:lnRef idx="1">
+            <a:schemeClr val="accent1"/>
+          </a:lnRef>
+          <a:fillRef idx="0">
+            <a:schemeClr val="accent1"/>
+          </a:fillRef>
+          <a:effectRef idx="0">
+            <a:schemeClr val="accent1"/>
+          </a:effectRef>
+          <a:fontRef idx="minor">
+            <a:schemeClr val="tx1"/>
+          </a:fontRef>
+        </p:style>
+      </p:cxnSp>
+      <p:sp>
+        <p:nvSpPr>
+          <p:cNvPr id="5" name="AutoShape 11">
+            <a:extLst>
+              <a:ext uri="{FF2B5EF4-FFF2-40B4-BE49-F238E27FC236}">
+                <a16:creationId xmlns:a16="http://schemas.microsoft.com/office/drawing/2014/main" id="{DD1A824D-1573-AECA-D965-A45BDD126FD8}"/>
+              </a:ext>
+            </a:extLst>
+          </p:cNvPr>
+          <p:cNvSpPr/>
+          <p:nvPr/>
+        </p:nvSpPr>
+        <p:spPr>
+          <a:xfrm>
+            <a:off x="713883" y="2201090"/>
+            <a:ext cx="6836445" cy="4578531"/>
+          </a:xfrm>
+          <a:prstGeom prst="rect">
+            <a:avLst/>
+          </a:prstGeom>
+          <a:noFill/>
+          <a:ln w="12700" cap="flat" cmpd="sng">
+            <a:noFill/>
+            <a:prstDash val="solid"/>
+            <a:round/>
+          </a:ln>
+        </p:spPr>
+        <p:txBody>
+          <a:bodyPr vert="horz" wrap="square" lIns="0" tIns="0" rIns="0" bIns="0" rtlCol="0" anchor="ctr" anchorCtr="0"/>
+          <a:lstStyle/>
+          <a:p>
+            <a:pPr indent="0">
+              <a:lnSpc>
+                <a:spcPct val="116666"/>
+              </a:lnSpc>
+              <a:defRPr/>
+            </a:pPr>
+            <a:endParaRPr lang="en-US" altLang="zh-CN" b="1" i="0" u="none" strike="noStrike" dirty="0">
+              <a:ea typeface="Noto Sans SC"/>
+              <a:cs typeface="Noto Sans SC"/>
+              <a:sym typeface="Noto Sans SC"/>
+            </a:endParaRPr>
+          </a:p>
+        </p:txBody>
+      </p:sp>
+      <p:sp>
+        <p:nvSpPr>
+          <p:cNvPr id="14" name="AutoShape 11">
+            <a:extLst>
+              <a:ext uri="{FF2B5EF4-FFF2-40B4-BE49-F238E27FC236}">
+                <a16:creationId xmlns:a16="http://schemas.microsoft.com/office/drawing/2014/main" id="{4BA99EEB-E8AF-1BE8-0662-ACCE19C5AE61}"/>
+              </a:ext>
+            </a:extLst>
+          </p:cNvPr>
+          <p:cNvSpPr/>
+          <p:nvPr/>
+        </p:nvSpPr>
+        <p:spPr>
+          <a:xfrm>
+            <a:off x="735655" y="1830976"/>
+            <a:ext cx="6836445" cy="4504509"/>
+          </a:xfrm>
+          <a:prstGeom prst="rect">
+            <a:avLst/>
+          </a:prstGeom>
+          <a:noFill/>
+          <a:ln w="12700" cap="flat" cmpd="sng">
+            <a:noFill/>
+            <a:prstDash val="solid"/>
+            <a:round/>
+          </a:ln>
+        </p:spPr>
+        <p:txBody>
+          <a:bodyPr vert="horz" wrap="square" lIns="0" tIns="0" rIns="0" bIns="0" rtlCol="0" anchor="ctr" anchorCtr="0"/>
+          <a:lstStyle/>
+          <a:p>
+            <a:pPr indent="0">
+              <a:lnSpc>
+                <a:spcPct val="116666"/>
+              </a:lnSpc>
+              <a:defRPr/>
+            </a:pPr>
+            <a:endParaRPr lang="en-US" altLang="zh-CN" b="1" i="0" u="none" strike="noStrike" dirty="0">
+              <a:ea typeface="Noto Sans SC"/>
+              <a:cs typeface="Noto Sans SC"/>
+              <a:sym typeface="Noto Sans SC"/>
+            </a:endParaRPr>
+          </a:p>
+        </p:txBody>
+      </p:sp>
+      <p:pic>
+        <p:nvPicPr>
+          <p:cNvPr id="7" name="图片 6">
+            <a:extLst>
+              <a:ext uri="{FF2B5EF4-FFF2-40B4-BE49-F238E27FC236}">
+                <a16:creationId xmlns:a16="http://schemas.microsoft.com/office/drawing/2014/main" id="{655E9B37-0B56-DCFA-41E0-C3BC94E8A729}"/>
+              </a:ext>
+            </a:extLst>
+          </p:cNvPr>
+          <p:cNvPicPr>
+            <a:picLocks noChangeAspect="1"/>
+          </p:cNvPicPr>
+          <p:nvPr/>
+        </p:nvPicPr>
+        <p:blipFill>
+          <a:blip r:embed="rId3"/>
+          <a:stretch>
+            <a:fillRect/>
+          </a:stretch>
+        </p:blipFill>
+        <p:spPr>
+          <a:xfrm>
+            <a:off x="8251820" y="1129938"/>
+            <a:ext cx="3081437" cy="1243122"/>
+          </a:xfrm>
+          <a:prstGeom prst="rect">
+            <a:avLst/>
+          </a:prstGeom>
+        </p:spPr>
+      </p:pic>
+      <mc:AlternateContent xmlns:mc="http://schemas.openxmlformats.org/markup-compatibility/2006" xmlns:a14="http://schemas.microsoft.com/office/drawing/2010/main">
+        <mc:Choice Requires="a14">
+          <p:sp>
+            <p:nvSpPr>
+              <p:cNvPr id="9" name="AutoShape 11">
+                <a:extLst>
+                  <a:ext uri="{FF2B5EF4-FFF2-40B4-BE49-F238E27FC236}">
+                    <a16:creationId xmlns:a16="http://schemas.microsoft.com/office/drawing/2014/main" id="{3803FDC5-E8DF-4C03-3458-5B7010107FA7}"/>
+                  </a:ext>
+                </a:extLst>
+              </p:cNvPr>
+              <p:cNvSpPr/>
+              <p:nvPr/>
+            </p:nvSpPr>
+            <p:spPr>
+              <a:xfrm>
+                <a:off x="888056" y="1983376"/>
+                <a:ext cx="6479396" cy="4504509"/>
+              </a:xfrm>
+              <a:prstGeom prst="rect">
+                <a:avLst/>
+              </a:prstGeom>
+              <a:noFill/>
+              <a:ln w="12700" cap="flat" cmpd="sng">
+                <a:noFill/>
+                <a:prstDash val="solid"/>
+                <a:round/>
+              </a:ln>
+            </p:spPr>
+            <p:txBody>
+              <a:bodyPr vert="horz" wrap="square" lIns="0" tIns="0" rIns="0" bIns="0" rtlCol="0" anchor="ctr" anchorCtr="0"/>
+              <a:lstStyle/>
+              <a:p>
+                <a:pPr indent="0">
+                  <a:lnSpc>
+                    <a:spcPct val="116666"/>
+                  </a:lnSpc>
+                  <a:defRPr/>
+                </a:pPr>
+                <a:r>
+                  <a:rPr lang="zh-CN" altLang="en-US" b="1" i="0" u="none" strike="noStrike" dirty="0">
+                    <a:ea typeface="Noto Sans SC"/>
+                    <a:cs typeface="Noto Sans SC"/>
+                    <a:sym typeface="Noto Sans SC"/>
+                  </a:rPr>
+                  <a:t>借助</a:t>
+                </a:r>
+                <a:r>
+                  <a:rPr lang="zh-CN" altLang="en-US" b="1" i="0" u="none" strike="noStrike" dirty="0">
+                    <a:solidFill>
+                      <a:schemeClr val="accent2"/>
+                    </a:solidFill>
+                    <a:ea typeface="Noto Sans SC"/>
+                    <a:cs typeface="Noto Sans SC"/>
+                    <a:sym typeface="Noto Sans SC"/>
+                  </a:rPr>
+                  <a:t>生成元到稳定子群的式子</a:t>
+                </a:r>
+                <a:r>
+                  <a:rPr lang="zh-CN" altLang="en-US" b="1" i="0" u="none" strike="noStrike" dirty="0">
+                    <a:ea typeface="Noto Sans SC"/>
+                    <a:cs typeface="Noto Sans SC"/>
+                    <a:sym typeface="Noto Sans SC"/>
+                  </a:rPr>
+                  <a:t>我们可以</a:t>
+                </a:r>
+                <a:r>
+                  <a:rPr lang="zh-CN" altLang="en-US" b="1" i="0" u="none" strike="noStrike" dirty="0">
+                    <a:solidFill>
+                      <a:schemeClr val="accent2"/>
+                    </a:solidFill>
+                    <a:ea typeface="Noto Sans SC"/>
+                    <a:cs typeface="Noto Sans SC"/>
+                    <a:sym typeface="Noto Sans SC"/>
+                  </a:rPr>
+                  <a:t>化简</a:t>
+                </a:r>
+                <a:r>
+                  <a:rPr lang="zh-CN" altLang="en-US" b="1" i="0" u="none" strike="noStrike" dirty="0">
+                    <a:ea typeface="Noto Sans SC"/>
+                    <a:cs typeface="Noto Sans SC"/>
+                    <a:sym typeface="Noto Sans SC"/>
+                  </a:rPr>
+                  <a:t>投影算符的式子</a:t>
+                </a:r>
+                <a:endParaRPr lang="en-US" altLang="zh-CN" b="1" i="0" u="none" strike="noStrike" dirty="0">
+                  <a:ea typeface="Noto Sans SC"/>
+                  <a:cs typeface="Noto Sans SC"/>
+                  <a:sym typeface="Noto Sans SC"/>
+                </a:endParaRPr>
+              </a:p>
+              <a:p>
+                <a:pPr indent="0">
+                  <a:lnSpc>
+                    <a:spcPct val="116666"/>
+                  </a:lnSpc>
+                  <a:defRPr/>
+                </a:pPr>
+                <a:r>
+                  <a:rPr lang="zh-CN" altLang="en-US" b="1" i="0" u="none" strike="noStrike" dirty="0">
+                    <a:ea typeface="Noto Sans SC"/>
+                    <a:cs typeface="Noto Sans SC"/>
+                    <a:sym typeface="Noto Sans SC"/>
+                  </a:rPr>
+                  <a:t>类似二项式定理展开</a:t>
+                </a:r>
+                <a:r>
+                  <a:rPr lang="en-US" altLang="zh-CN" b="1" i="0" u="none" strike="noStrike" dirty="0">
+                    <a:ea typeface="Noto Sans SC"/>
+                    <a:cs typeface="Noto Sans SC"/>
+                    <a:sym typeface="Noto Sans SC"/>
+                  </a:rPr>
+                  <a:t>(</a:t>
+                </a:r>
+                <a14:m>
+                  <m:oMath xmlns:m="http://schemas.openxmlformats.org/officeDocument/2006/math">
+                    <m:sSup>
+                      <m:sSupPr>
+                        <m:ctrlPr>
+                          <a:rPr lang="en-US" altLang="zh-CN" b="1" i="1" u="none" strike="noStrike" smtClean="0">
+                            <a:latin typeface="Cambria Math" panose="02040503050406030204" pitchFamily="18" charset="0"/>
+                            <a:ea typeface="Noto Sans SC"/>
+                            <a:cs typeface="Noto Sans SC"/>
+                            <a:sym typeface="Noto Sans SC"/>
+                          </a:rPr>
+                        </m:ctrlPr>
+                      </m:sSupPr>
+                      <m:e>
+                        <m:r>
+                          <a:rPr lang="en-US" altLang="zh-CN" b="1" i="1" u="none" strike="noStrike" smtClean="0">
+                            <a:latin typeface="Cambria Math" panose="02040503050406030204" pitchFamily="18" charset="0"/>
+                            <a:ea typeface="Noto Sans SC"/>
+                            <a:cs typeface="Noto Sans SC"/>
+                            <a:sym typeface="Noto Sans SC"/>
+                          </a:rPr>
+                          <m:t>𝑰</m:t>
+                        </m:r>
+                      </m:e>
+                      <m:sup>
+                        <m:r>
+                          <a:rPr lang="en-US" altLang="zh-CN" b="1" i="1" u="none" strike="noStrike" smtClean="0">
+                            <a:latin typeface="Cambria Math" panose="02040503050406030204" pitchFamily="18" charset="0"/>
+                            <a:ea typeface="Noto Sans SC"/>
+                            <a:cs typeface="Noto Sans SC"/>
+                            <a:sym typeface="Noto Sans SC"/>
+                          </a:rPr>
+                          <m:t>𝒏</m:t>
+                        </m:r>
+                      </m:sup>
+                    </m:sSup>
+                    <m:sSub>
+                      <m:sSubPr>
+                        <m:ctrlPr>
+                          <a:rPr lang="en-US" altLang="zh-CN" b="1" i="1" u="none" strike="noStrike" smtClean="0">
+                            <a:latin typeface="Cambria Math" panose="02040503050406030204" pitchFamily="18" charset="0"/>
+                            <a:ea typeface="Noto Sans SC"/>
+                            <a:cs typeface="Noto Sans SC"/>
+                            <a:sym typeface="Noto Sans SC"/>
+                          </a:rPr>
+                        </m:ctrlPr>
+                      </m:sSubPr>
+                      <m:e>
+                        <m:r>
+                          <a:rPr lang="en-US" altLang="zh-CN" b="1" i="1" u="none" strike="noStrike" smtClean="0">
+                            <a:latin typeface="Cambria Math" panose="02040503050406030204" pitchFamily="18" charset="0"/>
+                            <a:ea typeface="Noto Sans SC"/>
+                            <a:cs typeface="Noto Sans SC"/>
+                            <a:sym typeface="Noto Sans SC"/>
+                          </a:rPr>
+                          <m:t>𝑴</m:t>
+                        </m:r>
+                      </m:e>
+                      <m:sub>
+                        <m:d>
+                          <m:dPr>
+                            <m:ctrlPr>
+                              <a:rPr lang="en-US" altLang="zh-CN" b="1" i="1" u="none" strike="noStrike" smtClean="0">
+                                <a:latin typeface="Cambria Math" panose="02040503050406030204" pitchFamily="18" charset="0"/>
+                                <a:ea typeface="Noto Sans SC"/>
+                                <a:cs typeface="Noto Sans SC"/>
+                                <a:sym typeface="Noto Sans SC"/>
+                              </a:rPr>
+                            </m:ctrlPr>
+                          </m:dPr>
+                          <m:e>
+                            <m:r>
+                              <a:rPr lang="en-US" altLang="zh-CN" b="1" i="1" u="none" strike="noStrike" smtClean="0">
+                                <a:latin typeface="Cambria Math" panose="02040503050406030204" pitchFamily="18" charset="0"/>
+                                <a:ea typeface="Noto Sans SC"/>
+                                <a:cs typeface="Noto Sans SC"/>
+                                <a:sym typeface="Noto Sans SC"/>
+                              </a:rPr>
+                              <m:t>𝒓</m:t>
+                            </m:r>
+                            <m:r>
+                              <a:rPr lang="en-US" altLang="zh-CN" b="1" i="1" u="none" strike="noStrike" smtClean="0">
+                                <a:latin typeface="Cambria Math" panose="02040503050406030204" pitchFamily="18" charset="0"/>
+                                <a:ea typeface="Noto Sans SC"/>
+                                <a:cs typeface="Noto Sans SC"/>
+                                <a:sym typeface="Noto Sans SC"/>
+                              </a:rPr>
+                              <m:t>−</m:t>
+                            </m:r>
+                            <m:r>
+                              <a:rPr lang="en-US" altLang="zh-CN" b="1" i="1" u="none" strike="noStrike" smtClean="0">
+                                <a:latin typeface="Cambria Math" panose="02040503050406030204" pitchFamily="18" charset="0"/>
+                                <a:ea typeface="Noto Sans SC"/>
+                                <a:cs typeface="Noto Sans SC"/>
+                                <a:sym typeface="Noto Sans SC"/>
+                              </a:rPr>
+                              <m:t>𝒏</m:t>
+                            </m:r>
+                            <m:r>
+                              <a:rPr lang="en-US" altLang="zh-CN" b="1" i="1" u="none" strike="noStrike" smtClean="0">
+                                <a:latin typeface="Cambria Math" panose="02040503050406030204" pitchFamily="18" charset="0"/>
+                                <a:ea typeface="Noto Sans SC"/>
+                                <a:cs typeface="Noto Sans SC"/>
+                                <a:sym typeface="Noto Sans SC"/>
+                              </a:rPr>
+                              <m:t>, …</m:t>
+                            </m:r>
+                          </m:e>
+                        </m:d>
+                      </m:sub>
+                    </m:sSub>
+                    <m:r>
+                      <a:rPr lang="en-US" altLang="zh-CN" b="1" i="1" u="none" strike="noStrike" smtClean="0">
+                        <a:latin typeface="Cambria Math" panose="02040503050406030204" pitchFamily="18" charset="0"/>
+                        <a:ea typeface="Noto Sans SC"/>
+                        <a:cs typeface="Noto Sans SC"/>
+                        <a:sym typeface="Noto Sans SC"/>
+                      </a:rPr>
+                      <m:t>+...</m:t>
+                    </m:r>
+                  </m:oMath>
+                </a14:m>
+                <a:r>
+                  <a:rPr lang="en-US" altLang="zh-CN" b="1" i="0" u="none" strike="noStrike" dirty="0">
+                    <a:ea typeface="Noto Sans SC"/>
+                    <a:cs typeface="Noto Sans SC"/>
+                    <a:sym typeface="Noto Sans SC"/>
+                  </a:rPr>
+                  <a:t>)</a:t>
+                </a:r>
+                <a:endParaRPr lang="en-US" altLang="zh-CN" b="1" dirty="0">
+                  <a:ea typeface="Noto Sans SC"/>
+                  <a:cs typeface="Noto Sans SC"/>
+                  <a:sym typeface="Noto Sans SC"/>
+                </a:endParaRPr>
+              </a:p>
+              <a:p>
+                <a:pPr indent="0">
+                  <a:lnSpc>
+                    <a:spcPct val="116666"/>
+                  </a:lnSpc>
+                  <a:defRPr/>
+                </a:pPr>
+                <a:r>
+                  <a:rPr lang="zh-CN" altLang="en-US" b="1" dirty="0">
+                    <a:ea typeface="Noto Sans SC"/>
+                    <a:cs typeface="Noto Sans SC"/>
+                    <a:sym typeface="Noto Sans SC"/>
+                  </a:rPr>
+                  <a:t>可以发现其中的任意一项提出就是之前稳定子群</a:t>
+                </a:r>
+                <a:r>
+                  <a:rPr lang="zh-CN" altLang="en-US" b="1" dirty="0">
+                    <a:solidFill>
+                      <a:schemeClr val="accent2"/>
+                    </a:solidFill>
+                    <a:ea typeface="Noto Sans SC"/>
+                    <a:cs typeface="Noto Sans SC"/>
+                    <a:sym typeface="Noto Sans SC"/>
+                  </a:rPr>
+                  <a:t>任一算符</a:t>
+                </a:r>
+                <a:r>
+                  <a:rPr lang="zh-CN" altLang="en-US" b="1" dirty="0">
+                    <a:ea typeface="Noto Sans SC"/>
+                    <a:cs typeface="Noto Sans SC"/>
+                    <a:sym typeface="Noto Sans SC"/>
+                  </a:rPr>
+                  <a:t>由生成元表示的形式，因此相当于对所有稳定子算符</a:t>
+                </a:r>
+                <a:r>
+                  <a:rPr lang="zh-CN" altLang="en-US" b="1" dirty="0">
+                    <a:solidFill>
+                      <a:schemeClr val="accent2"/>
+                    </a:solidFill>
+                    <a:ea typeface="Noto Sans SC"/>
+                    <a:cs typeface="Noto Sans SC"/>
+                    <a:sym typeface="Noto Sans SC"/>
+                  </a:rPr>
+                  <a:t>求和</a:t>
+                </a:r>
+                <a:endParaRPr lang="en-US" altLang="zh-CN" b="1" dirty="0">
+                  <a:solidFill>
+                    <a:schemeClr val="accent2"/>
+                  </a:solidFill>
+                  <a:ea typeface="Noto Sans SC"/>
+                  <a:cs typeface="Noto Sans SC"/>
+                  <a:sym typeface="Noto Sans SC"/>
+                </a:endParaRPr>
+              </a:p>
+              <a:p>
+                <a:pPr indent="0">
+                  <a:lnSpc>
+                    <a:spcPct val="116666"/>
+                  </a:lnSpc>
+                  <a:defRPr/>
+                </a:pPr>
+                <a:endParaRPr lang="en-US" altLang="zh-CN" b="1" i="0" u="none" strike="noStrike" dirty="0">
+                  <a:solidFill>
+                    <a:schemeClr val="accent2"/>
+                  </a:solidFill>
+                  <a:ea typeface="Noto Sans SC"/>
+                  <a:cs typeface="Noto Sans SC"/>
+                  <a:sym typeface="Noto Sans SC"/>
+                </a:endParaRPr>
+              </a:p>
+              <a:p>
+                <a:pPr indent="0">
+                  <a:lnSpc>
+                    <a:spcPct val="116666"/>
+                  </a:lnSpc>
+                  <a:defRPr/>
+                </a:pPr>
+                <a:r>
+                  <a:rPr lang="zh-CN" altLang="en-US" b="1" i="0" u="none" strike="noStrike" dirty="0">
+                    <a:ea typeface="Noto Sans SC"/>
+                    <a:cs typeface="Noto Sans SC"/>
+                    <a:sym typeface="Noto Sans SC"/>
+                  </a:rPr>
+                  <a:t>实际中的投影算符</a:t>
+                </a:r>
+                <a:r>
+                  <a:rPr lang="zh-CN" altLang="en-US" b="1" i="0" u="none" strike="noStrike" dirty="0">
+                    <a:solidFill>
+                      <a:schemeClr val="accent2"/>
+                    </a:solidFill>
+                    <a:ea typeface="Noto Sans SC"/>
+                    <a:cs typeface="Noto Sans SC"/>
+                    <a:sym typeface="Noto Sans SC"/>
+                  </a:rPr>
+                  <a:t>等效的编码硬件</a:t>
+                </a:r>
+                <a:r>
+                  <a:rPr lang="zh-CN" altLang="en-US" b="1" i="0" u="none" strike="noStrike" dirty="0">
+                    <a:ea typeface="Noto Sans SC"/>
+                    <a:cs typeface="Noto Sans SC"/>
+                    <a:sym typeface="Noto Sans SC"/>
+                  </a:rPr>
+                  <a:t>是</a:t>
+                </a:r>
+                <a:r>
+                  <a:rPr lang="en-US" altLang="zh-CN" b="1" i="0" u="none" strike="noStrike" dirty="0" err="1">
+                    <a:solidFill>
+                      <a:schemeClr val="accent2"/>
+                    </a:solidFill>
+                    <a:ea typeface="Noto Sans SC"/>
+                    <a:cs typeface="Noto Sans SC"/>
+                    <a:sym typeface="Noto Sans SC"/>
+                  </a:rPr>
+                  <a:t>clifford</a:t>
+                </a:r>
+                <a:r>
+                  <a:rPr lang="zh-CN" altLang="en-US" b="1" i="0" u="none" strike="noStrike" dirty="0">
+                    <a:solidFill>
+                      <a:schemeClr val="accent2"/>
+                    </a:solidFill>
+                    <a:ea typeface="Noto Sans SC"/>
+                    <a:cs typeface="Noto Sans SC"/>
+                    <a:sym typeface="Noto Sans SC"/>
+                  </a:rPr>
+                  <a:t>门</a:t>
+                </a:r>
+                <a:r>
+                  <a:rPr lang="zh-CN" altLang="en-US" b="1" i="0" u="none" strike="noStrike" dirty="0">
+                    <a:ea typeface="Noto Sans SC"/>
+                    <a:cs typeface="Noto Sans SC"/>
+                    <a:sym typeface="Noto Sans SC"/>
+                  </a:rPr>
+                  <a:t>，他们也直接根据</a:t>
+                </a:r>
+                <a:r>
+                  <a:rPr lang="zh-CN" altLang="en-US" b="1" i="0" u="none" strike="noStrike" dirty="0">
+                    <a:solidFill>
+                      <a:schemeClr val="accent2"/>
+                    </a:solidFill>
+                    <a:ea typeface="Noto Sans SC"/>
+                    <a:cs typeface="Noto Sans SC"/>
+                    <a:sym typeface="Noto Sans SC"/>
+                  </a:rPr>
+                  <a:t>生成元</a:t>
+                </a:r>
+                <a:r>
+                  <a:rPr lang="zh-CN" altLang="en-US" b="1" i="0" u="none" strike="noStrike" dirty="0">
+                    <a:ea typeface="Noto Sans SC"/>
+                    <a:cs typeface="Noto Sans SC"/>
+                    <a:sym typeface="Noto Sans SC"/>
+                  </a:rPr>
+                  <a:t>设计，而实际中的</a:t>
+                </a:r>
+                <a:r>
+                  <a:rPr lang="zh-CN" altLang="en-US" b="1" i="0" u="none" strike="noStrike" dirty="0">
+                    <a:solidFill>
+                      <a:schemeClr val="accent2"/>
+                    </a:solidFill>
+                    <a:ea typeface="Noto Sans SC"/>
+                    <a:cs typeface="Noto Sans SC"/>
+                    <a:sym typeface="Noto Sans SC"/>
+                  </a:rPr>
+                  <a:t>校验矩阵</a:t>
+                </a:r>
+                <a:r>
+                  <a:rPr lang="zh-CN" altLang="en-US" b="1" i="0" u="none" strike="noStrike" dirty="0">
+                    <a:ea typeface="Noto Sans SC"/>
+                    <a:cs typeface="Noto Sans SC"/>
+                    <a:sym typeface="Noto Sans SC"/>
+                  </a:rPr>
+                  <a:t>也直接通过</a:t>
+                </a:r>
+                <a:r>
+                  <a:rPr lang="zh-CN" altLang="en-US" b="1" i="0" u="none" strike="noStrike" dirty="0">
+                    <a:solidFill>
+                      <a:schemeClr val="accent2"/>
+                    </a:solidFill>
+                    <a:ea typeface="Noto Sans SC"/>
+                    <a:cs typeface="Noto Sans SC"/>
+                    <a:sym typeface="Noto Sans SC"/>
+                  </a:rPr>
+                  <a:t>生成元</a:t>
+                </a:r>
+                <a:r>
+                  <a:rPr lang="zh-CN" altLang="en-US" b="1" i="0" u="none" strike="noStrike" dirty="0">
+                    <a:ea typeface="Noto Sans SC"/>
+                    <a:cs typeface="Noto Sans SC"/>
+                    <a:sym typeface="Noto Sans SC"/>
+                  </a:rPr>
+                  <a:t>获得，总的来说我们确实把</a:t>
+                </a:r>
+                <a:r>
+                  <a:rPr lang="zh-CN" altLang="en-US" b="1" i="0" u="none" strike="noStrike" dirty="0">
+                    <a:solidFill>
+                      <a:schemeClr val="accent2"/>
+                    </a:solidFill>
+                    <a:ea typeface="Noto Sans SC"/>
+                    <a:cs typeface="Noto Sans SC"/>
+                    <a:sym typeface="Noto Sans SC"/>
+                  </a:rPr>
+                  <a:t>设计纠错码本身</a:t>
+                </a:r>
+                <a:r>
+                  <a:rPr lang="zh-CN" altLang="en-US" b="1" i="0" u="none" strike="noStrike" dirty="0">
+                    <a:ea typeface="Noto Sans SC"/>
+                    <a:cs typeface="Noto Sans SC"/>
+                    <a:sym typeface="Noto Sans SC"/>
+                  </a:rPr>
+                  <a:t>这一工作转变成了</a:t>
+                </a:r>
+                <a:r>
+                  <a:rPr lang="zh-CN" altLang="en-US" b="1" i="0" u="none" strike="noStrike" dirty="0">
+                    <a:solidFill>
+                      <a:schemeClr val="accent2"/>
+                    </a:solidFill>
+                    <a:ea typeface="Noto Sans SC"/>
+                    <a:cs typeface="Noto Sans SC"/>
+                    <a:sym typeface="Noto Sans SC"/>
+                  </a:rPr>
+                  <a:t>设计稳定子群以至于设计生成元</a:t>
+                </a:r>
+                <a:endParaRPr lang="en-US" altLang="zh-CN" b="1" i="0" u="none" strike="noStrike" dirty="0">
+                  <a:solidFill>
+                    <a:schemeClr val="accent2"/>
+                  </a:solidFill>
+                  <a:ea typeface="Noto Sans SC"/>
+                  <a:cs typeface="Noto Sans SC"/>
+                  <a:sym typeface="Noto Sans SC"/>
+                </a:endParaRPr>
+              </a:p>
+            </p:txBody>
+          </p:sp>
+        </mc:Choice>
+        <mc:Fallback xmlns="">
+          <p:sp>
+            <p:nvSpPr>
+              <p:cNvPr id="9" name="AutoShape 11">
+                <a:extLst>
+                  <a:ext uri="{FF2B5EF4-FFF2-40B4-BE49-F238E27FC236}">
+                    <a16:creationId xmlns:a16="http://schemas.microsoft.com/office/drawing/2014/main" id="{3803FDC5-E8DF-4C03-3458-5B7010107FA7}"/>
+                  </a:ext>
+                </a:extLst>
+              </p:cNvPr>
+              <p:cNvSpPr>
+                <a:spLocks noRot="1" noChangeAspect="1" noMove="1" noResize="1" noEditPoints="1" noAdjustHandles="1" noChangeArrowheads="1" noChangeShapeType="1" noTextEdit="1"/>
+              </p:cNvSpPr>
+              <p:nvPr/>
+            </p:nvSpPr>
+            <p:spPr>
+              <a:xfrm>
+                <a:off x="888056" y="1983376"/>
+                <a:ext cx="6479396" cy="4504509"/>
+              </a:xfrm>
+              <a:prstGeom prst="rect">
+                <a:avLst/>
+              </a:prstGeom>
+              <a:blipFill>
+                <a:blip r:embed="rId4"/>
+                <a:stretch>
+                  <a:fillRect l="-2258" r="-2164"/>
+                </a:stretch>
+              </a:blipFill>
+              <a:ln w="12700" cap="flat" cmpd="sng">
+                <a:noFill/>
+                <a:prstDash val="solid"/>
+                <a:round/>
+              </a:ln>
+            </p:spPr>
+            <p:txBody>
+              <a:bodyPr/>
+              <a:lstStyle/>
+              <a:p>
+                <a:r>
+                  <a:rPr lang="zh-CN" altLang="en-US">
+                    <a:noFill/>
+                  </a:rPr>
+                  <a:t> </a:t>
+                </a:r>
+              </a:p>
+            </p:txBody>
+          </p:sp>
+        </mc:Fallback>
+      </mc:AlternateContent>
+      <p:pic>
+        <p:nvPicPr>
+          <p:cNvPr id="11" name="图片 10">
+            <a:extLst>
+              <a:ext uri="{FF2B5EF4-FFF2-40B4-BE49-F238E27FC236}">
+                <a16:creationId xmlns:a16="http://schemas.microsoft.com/office/drawing/2014/main" id="{B9803F47-3C8E-8C52-A74E-43DEF6D19F46}"/>
+              </a:ext>
+            </a:extLst>
+          </p:cNvPr>
+          <p:cNvPicPr>
+            <a:picLocks noChangeAspect="1"/>
+          </p:cNvPicPr>
+          <p:nvPr/>
+        </p:nvPicPr>
+        <p:blipFill>
+          <a:blip r:embed="rId5"/>
+          <a:stretch>
+            <a:fillRect/>
+          </a:stretch>
+        </p:blipFill>
+        <p:spPr>
+          <a:xfrm>
+            <a:off x="8294845" y="3535859"/>
+            <a:ext cx="2943636" cy="1314633"/>
+          </a:xfrm>
+          <a:prstGeom prst="rect">
+            <a:avLst/>
+          </a:prstGeom>
+        </p:spPr>
+      </p:pic>
+    </p:spTree>
+    <p:extLst>
+      <p:ext uri="{BB962C8B-B14F-4D97-AF65-F5344CB8AC3E}">
+        <p14:creationId xmlns:p14="http://schemas.microsoft.com/office/powerpoint/2010/main" val="989743488"/>
       </p:ext>
     </p:extLst>
   </p:cSld>
